--- a/AkshayaPatra_GS_Pitch.pptx
+++ b/AkshayaPatra_GS_Pitch.pptx
@@ -11,6 +11,10 @@
     <p:sldId id="259" r:id="rId10"/>
     <p:sldId id="260" r:id="rId11"/>
     <p:sldId id="261" r:id="rId12"/>
+    <p:sldId id="262" r:id="rId13"/>
+    <p:sldId id="263" r:id="rId14"/>
+    <p:sldId id="264" r:id="rId15"/>
+    <p:sldId id="265" r:id="rId16"/>
   </p:sldIdLst>
   <p:sldSz cx="9144000" cy="6858000" type="screen4x3"/>
   <p:notesSz cx="6858000" cy="9144000"/>
@@ -6494,6 +6498,1838 @@
 </p:sld>
 </file>
 
+<file path=ppt/slides/slide10.xml><?xml version="1.0" encoding="utf-8"?>
+<p:sld xmlns:a="http://schemas.openxmlformats.org/drawingml/2006/main" xmlns:p="http://schemas.openxmlformats.org/presentationml/2006/main" xmlns:r="http://schemas.openxmlformats.org/officeDocument/2006/relationships">
+  <p:cSld>
+    <p:spTree>
+      <p:nvGrpSpPr>
+        <p:cNvPr id="1" name=""/>
+        <p:cNvGrpSpPr/>
+        <p:nvPr/>
+      </p:nvGrpSpPr>
+      <p:grpSpPr/>
+      <p:sp>
+        <p:nvSpPr>
+          <p:cNvPr id="2" name="Rectangle 1"/>
+          <p:cNvSpPr/>
+          <p:nvPr/>
+        </p:nvSpPr>
+        <p:spPr>
+          <a:xfrm>
+            <a:off x="365760" y="274320"/>
+            <a:ext cx="8412480" cy="23774"/>
+          </a:xfrm>
+          <a:prstGeom prst="rect">
+            <a:avLst/>
+          </a:prstGeom>
+          <a:solidFill>
+            <a:srgbClr val="1B3E6E"/>
+          </a:solidFill>
+          <a:ln>
+            <a:noFill/>
+          </a:ln>
+          <a:effectLst/>
+        </p:spPr>
+        <p:style>
+          <a:lnRef idx="1">
+            <a:schemeClr val="accent1"/>
+          </a:lnRef>
+          <a:fillRef idx="3">
+            <a:schemeClr val="accent1"/>
+          </a:fillRef>
+          <a:effectRef idx="2">
+            <a:schemeClr val="accent1"/>
+          </a:effectRef>
+          <a:fontRef idx="minor">
+            <a:schemeClr val="lt1"/>
+          </a:fontRef>
+        </p:style>
+        <p:txBody>
+          <a:bodyPr rtlCol="0" anchor="ctr"/>
+          <a:lstStyle/>
+          <a:p>
+            <a:pPr algn="ctr"/>
+          </a:p>
+        </p:txBody>
+      </p:sp>
+      <p:sp>
+        <p:nvSpPr>
+          <p:cNvPr id="3" name="TextBox 2"/>
+          <p:cNvSpPr txBox="1"/>
+          <p:nvPr/>
+        </p:nvSpPr>
+        <p:spPr>
+          <a:xfrm>
+            <a:off x="365760" y="365760"/>
+            <a:ext cx="8412480" cy="457200"/>
+          </a:xfrm>
+          <a:prstGeom prst="rect">
+            <a:avLst/>
+          </a:prstGeom>
+          <a:noFill/>
+        </p:spPr>
+        <p:txBody>
+          <a:bodyPr wrap="square" lIns="0" rIns="0" tIns="0" bIns="0" anchor="t">
+            <a:spAutoFit/>
+          </a:bodyPr>
+          <a:lstStyle/>
+          <a:p>
+            <a:pPr algn="l">
+              <a:lnSpc>
+                <a:spcPct val="100000"/>
+              </a:lnSpc>
+              <a:spcBef>
+                <a:spcPts val="0"/>
+              </a:spcBef>
+              <a:spcAft>
+                <a:spcPts val="0"/>
+              </a:spcAft>
+            </a:pPr>
+            <a:r>
+              <a:rPr sz="2000" b="0" i="0">
+                <a:solidFill>
+                  <a:srgbClr val="1B3E6E"/>
+                </a:solidFill>
+                <a:latin typeface="Georgia"/>
+              </a:rPr>
+              <a:t>Conclusion — why Akshaya Patra, and why this proposal wins</a:t>
+            </a:r>
+          </a:p>
+        </p:txBody>
+      </p:sp>
+      <p:sp>
+        <p:nvSpPr>
+          <p:cNvPr id="4" name="TextBox 3"/>
+          <p:cNvSpPr txBox="1"/>
+          <p:nvPr/>
+        </p:nvSpPr>
+        <p:spPr>
+          <a:xfrm>
+            <a:off x="365760" y="822960"/>
+            <a:ext cx="8412480" cy="438912"/>
+          </a:xfrm>
+          <a:prstGeom prst="rect">
+            <a:avLst/>
+          </a:prstGeom>
+          <a:noFill/>
+        </p:spPr>
+        <p:txBody>
+          <a:bodyPr wrap="square" lIns="0" rIns="0" tIns="0" bIns="0" anchor="t">
+            <a:spAutoFit/>
+          </a:bodyPr>
+          <a:lstStyle/>
+          <a:p>
+            <a:pPr algn="l">
+              <a:lnSpc>
+                <a:spcPct val="100000"/>
+              </a:lnSpc>
+              <a:spcBef>
+                <a:spcPts val="0"/>
+              </a:spcBef>
+              <a:spcAft>
+                <a:spcPts val="0"/>
+              </a:spcAft>
+            </a:pPr>
+            <a:r>
+              <a:rPr sz="1050" b="0" i="0">
+                <a:solidFill>
+                  <a:srgbClr val="333333"/>
+                </a:solidFill>
+                <a:latin typeface="Arial"/>
+              </a:rPr>
+              <a:t>A proven engine of social mobility, a grant that compounds instead of depletes, and a partnership only Goldman Sachs can power.</a:t>
+            </a:r>
+          </a:p>
+        </p:txBody>
+      </p:sp>
+      <p:sp>
+        <p:nvSpPr>
+          <p:cNvPr id="5" name="Rectangle 4"/>
+          <p:cNvSpPr/>
+          <p:nvPr/>
+        </p:nvSpPr>
+        <p:spPr>
+          <a:xfrm>
+            <a:off x="502920" y="6071616"/>
+            <a:ext cx="8138159" cy="365760"/>
+          </a:xfrm>
+          <a:prstGeom prst="rect">
+            <a:avLst/>
+          </a:prstGeom>
+          <a:solidFill>
+            <a:srgbClr val="D9D9D9"/>
+          </a:solidFill>
+          <a:ln>
+            <a:noFill/>
+          </a:ln>
+          <a:effectLst/>
+        </p:spPr>
+        <p:style>
+          <a:lnRef idx="1">
+            <a:schemeClr val="accent1"/>
+          </a:lnRef>
+          <a:fillRef idx="3">
+            <a:schemeClr val="accent1"/>
+          </a:fillRef>
+          <a:effectRef idx="2">
+            <a:schemeClr val="accent1"/>
+          </a:effectRef>
+          <a:fontRef idx="minor">
+            <a:schemeClr val="lt1"/>
+          </a:fontRef>
+        </p:style>
+        <p:txBody>
+          <a:bodyPr rtlCol="0" anchor="ctr"/>
+          <a:lstStyle/>
+          <a:p>
+            <a:pPr algn="ctr"/>
+          </a:p>
+        </p:txBody>
+      </p:sp>
+      <p:sp>
+        <p:nvSpPr>
+          <p:cNvPr id="6" name="TextBox 5"/>
+          <p:cNvSpPr txBox="1"/>
+          <p:nvPr/>
+        </p:nvSpPr>
+        <p:spPr>
+          <a:xfrm>
+            <a:off x="640080" y="6071616"/>
+            <a:ext cx="7863840" cy="365760"/>
+          </a:xfrm>
+          <a:prstGeom prst="rect">
+            <a:avLst/>
+          </a:prstGeom>
+          <a:noFill/>
+        </p:spPr>
+        <p:txBody>
+          <a:bodyPr wrap="square" lIns="0" rIns="0" tIns="0" bIns="0" anchor="ctr">
+            <a:spAutoFit/>
+          </a:bodyPr>
+          <a:lstStyle/>
+          <a:p>
+            <a:pPr algn="ctr">
+              <a:lnSpc>
+                <a:spcPct val="95000"/>
+              </a:lnSpc>
+              <a:spcBef>
+                <a:spcPts val="0"/>
+              </a:spcBef>
+              <a:spcAft>
+                <a:spcPts val="0"/>
+              </a:spcAft>
+            </a:pPr>
+            <a:r>
+              <a:rPr sz="1100" b="1" i="0">
+                <a:solidFill>
+                  <a:srgbClr val="1B3E6E"/>
+                </a:solidFill>
+                <a:latin typeface="Georgia"/>
+              </a:rPr>
+              <a:t>$250k that doesn't feed children for a year — it upgrades the engine that feeds them forever.</a:t>
+            </a:r>
+          </a:p>
+        </p:txBody>
+      </p:sp>
+      <p:sp>
+        <p:nvSpPr>
+          <p:cNvPr id="7" name="TextBox 6"/>
+          <p:cNvSpPr txBox="1"/>
+          <p:nvPr/>
+        </p:nvSpPr>
+        <p:spPr>
+          <a:xfrm>
+            <a:off x="365760" y="6492240"/>
+            <a:ext cx="1280160" cy="329184"/>
+          </a:xfrm>
+          <a:prstGeom prst="rect">
+            <a:avLst/>
+          </a:prstGeom>
+          <a:noFill/>
+        </p:spPr>
+        <p:txBody>
+          <a:bodyPr wrap="square" lIns="0" rIns="0" tIns="0" bIns="0" anchor="t">
+            <a:spAutoFit/>
+          </a:bodyPr>
+          <a:lstStyle/>
+          <a:p>
+            <a:pPr algn="l">
+              <a:lnSpc>
+                <a:spcPct val="90000"/>
+              </a:lnSpc>
+              <a:spcBef>
+                <a:spcPts val="0"/>
+              </a:spcBef>
+              <a:spcAft>
+                <a:spcPts val="0"/>
+              </a:spcAft>
+            </a:pPr>
+            <a:r>
+              <a:rPr sz="900" b="1" i="0">
+                <a:solidFill>
+                  <a:srgbClr val="111111"/>
+                </a:solidFill>
+                <a:latin typeface="Georgia"/>
+              </a:rPr>
+              <a:t>Goldman</a:t>
+            </a:r>
+          </a:p>
+          <a:p>
+            <a:pPr algn="l">
+              <a:lnSpc>
+                <a:spcPct val="90000"/>
+              </a:lnSpc>
+              <a:spcBef>
+                <a:spcPts val="0"/>
+              </a:spcBef>
+              <a:spcAft>
+                <a:spcPts val="0"/>
+              </a:spcAft>
+            </a:pPr>
+            <a:r>
+              <a:rPr sz="900" b="1" i="0">
+                <a:solidFill>
+                  <a:srgbClr val="111111"/>
+                </a:solidFill>
+                <a:latin typeface="Georgia"/>
+              </a:rPr>
+              <a:t>Sachs</a:t>
+            </a:r>
+          </a:p>
+        </p:txBody>
+      </p:sp>
+      <p:sp>
+        <p:nvSpPr>
+          <p:cNvPr id="8" name="TextBox 7"/>
+          <p:cNvSpPr txBox="1"/>
+          <p:nvPr/>
+        </p:nvSpPr>
+        <p:spPr>
+          <a:xfrm>
+            <a:off x="8321040" y="6528816"/>
+            <a:ext cx="457200" cy="274320"/>
+          </a:xfrm>
+          <a:prstGeom prst="rect">
+            <a:avLst/>
+          </a:prstGeom>
+          <a:noFill/>
+        </p:spPr>
+        <p:txBody>
+          <a:bodyPr wrap="square" lIns="0" rIns="0" tIns="0" bIns="0" anchor="t">
+            <a:spAutoFit/>
+          </a:bodyPr>
+          <a:lstStyle/>
+          <a:p>
+            <a:pPr algn="r">
+              <a:lnSpc>
+                <a:spcPct val="100000"/>
+              </a:lnSpc>
+              <a:spcBef>
+                <a:spcPts val="0"/>
+              </a:spcBef>
+              <a:spcAft>
+                <a:spcPts val="300"/>
+              </a:spcAft>
+            </a:pPr>
+            <a:r>
+              <a:rPr sz="900" b="0" i="0">
+                <a:solidFill>
+                  <a:srgbClr val="727375"/>
+                </a:solidFill>
+                <a:latin typeface="Arial"/>
+              </a:rPr>
+              <a:t>10</a:t>
+            </a:r>
+          </a:p>
+        </p:txBody>
+      </p:sp>
+      <p:sp>
+        <p:nvSpPr>
+          <p:cNvPr id="9" name="TextBox 8"/>
+          <p:cNvSpPr txBox="1"/>
+          <p:nvPr/>
+        </p:nvSpPr>
+        <p:spPr>
+          <a:xfrm>
+            <a:off x="5486400" y="54864"/>
+            <a:ext cx="3291840" cy="182880"/>
+          </a:xfrm>
+          <a:prstGeom prst="rect">
+            <a:avLst/>
+          </a:prstGeom>
+          <a:noFill/>
+        </p:spPr>
+        <p:txBody>
+          <a:bodyPr wrap="square" lIns="0" rIns="0" tIns="0" bIns="0" anchor="t">
+            <a:spAutoFit/>
+          </a:bodyPr>
+          <a:lstStyle/>
+          <a:p>
+            <a:pPr algn="r">
+              <a:lnSpc>
+                <a:spcPct val="100000"/>
+              </a:lnSpc>
+              <a:spcBef>
+                <a:spcPts val="0"/>
+              </a:spcBef>
+              <a:spcAft>
+                <a:spcPts val="0"/>
+              </a:spcAft>
+            </a:pPr>
+            <a:r>
+              <a:rPr sz="750" b="0" i="1">
+                <a:solidFill>
+                  <a:srgbClr val="727375"/>
+                </a:solidFill>
+                <a:latin typeface="Arial"/>
+              </a:rPr>
+              <a:t>LAYOUT OPTION D — sidebar emphasis</a:t>
+            </a:r>
+          </a:p>
+        </p:txBody>
+      </p:sp>
+      <p:sp>
+        <p:nvSpPr>
+          <p:cNvPr id="10" name="Rectangle 9"/>
+          <p:cNvSpPr/>
+          <p:nvPr/>
+        </p:nvSpPr>
+        <p:spPr>
+          <a:xfrm>
+            <a:off x="365760" y="1371600"/>
+            <a:ext cx="2331720" cy="4572000"/>
+          </a:xfrm>
+          <a:prstGeom prst="rect">
+            <a:avLst/>
+          </a:prstGeom>
+          <a:solidFill>
+            <a:srgbClr val="1B3E6E"/>
+          </a:solidFill>
+          <a:ln>
+            <a:noFill/>
+          </a:ln>
+          <a:effectLst/>
+        </p:spPr>
+        <p:style>
+          <a:lnRef idx="1">
+            <a:schemeClr val="accent1"/>
+          </a:lnRef>
+          <a:fillRef idx="3">
+            <a:schemeClr val="accent1"/>
+          </a:fillRef>
+          <a:effectRef idx="2">
+            <a:schemeClr val="accent1"/>
+          </a:effectRef>
+          <a:fontRef idx="minor">
+            <a:schemeClr val="lt1"/>
+          </a:fontRef>
+        </p:style>
+        <p:txBody>
+          <a:bodyPr rtlCol="0" anchor="ctr"/>
+          <a:lstStyle/>
+          <a:p>
+            <a:pPr algn="ctr"/>
+          </a:p>
+        </p:txBody>
+      </p:sp>
+      <p:sp>
+        <p:nvSpPr>
+          <p:cNvPr id="11" name="TextBox 10"/>
+          <p:cNvSpPr txBox="1"/>
+          <p:nvPr/>
+        </p:nvSpPr>
+        <p:spPr>
+          <a:xfrm>
+            <a:off x="530352" y="1536192"/>
+            <a:ext cx="2002536" cy="4297680"/>
+          </a:xfrm>
+          <a:prstGeom prst="rect">
+            <a:avLst/>
+          </a:prstGeom>
+          <a:noFill/>
+        </p:spPr>
+        <p:txBody>
+          <a:bodyPr wrap="square" lIns="0" rIns="0" tIns="0" bIns="0" anchor="t">
+            <a:spAutoFit/>
+          </a:bodyPr>
+          <a:lstStyle/>
+          <a:p>
+            <a:pPr algn="l">
+              <a:lnSpc>
+                <a:spcPct val="100000"/>
+              </a:lnSpc>
+              <a:spcBef>
+                <a:spcPts val="0"/>
+              </a:spcBef>
+              <a:spcAft>
+                <a:spcPts val="200"/>
+              </a:spcAft>
+            </a:pPr>
+            <a:r>
+              <a:rPr sz="900" b="1" i="0">
+                <a:solidFill>
+                  <a:srgbClr val="F3C43F"/>
+                </a:solidFill>
+                <a:latin typeface="Arial"/>
+              </a:rPr>
+              <a:t>THE ASK</a:t>
+            </a:r>
+          </a:p>
+          <a:p>
+            <a:pPr algn="l">
+              <a:lnSpc>
+                <a:spcPct val="100000"/>
+              </a:lnSpc>
+              <a:spcBef>
+                <a:spcPts val="0"/>
+              </a:spcBef>
+              <a:spcAft>
+                <a:spcPts val="200"/>
+              </a:spcAft>
+            </a:pPr>
+            <a:r>
+              <a:rPr sz="2300" b="1" i="0">
+                <a:solidFill>
+                  <a:srgbClr val="FFFFFF"/>
+                </a:solidFill>
+                <a:latin typeface="Georgia"/>
+              </a:rPr>
+              <a:t>$250,000</a:t>
+            </a:r>
+          </a:p>
+          <a:p>
+            <a:pPr algn="l">
+              <a:lnSpc>
+                <a:spcPct val="100000"/>
+              </a:lnSpc>
+              <a:spcBef>
+                <a:spcPts val="0"/>
+              </a:spcBef>
+              <a:spcAft>
+                <a:spcPts val="600"/>
+              </a:spcAft>
+            </a:pPr>
+            <a:r>
+              <a:rPr sz="750" b="0" i="0">
+                <a:solidFill>
+                  <a:srgbClr val="FFFFFF"/>
+                </a:solidFill>
+                <a:latin typeface="Arial"/>
+              </a:rPr>
+              <a:t>over 12 months, in milestone-based tranches</a:t>
+            </a:r>
+          </a:p>
+          <a:p>
+            <a:pPr algn="l">
+              <a:lnSpc>
+                <a:spcPct val="105000"/>
+              </a:lnSpc>
+              <a:spcBef>
+                <a:spcPts val="0"/>
+              </a:spcBef>
+              <a:spcAft>
+                <a:spcPts val="800"/>
+              </a:spcAft>
+            </a:pPr>
+            <a:r>
+              <a:rPr sz="720" b="0" i="0">
+                <a:solidFill>
+                  <a:srgbClr val="DCE6F1"/>
+                </a:solidFill>
+                <a:latin typeface="Arial"/>
+              </a:rPr>
+              <a:t>Joint GS–AP steering committee  ·  quarterly KPI reviews  ·  independent waste &amp; delivery audits</a:t>
+            </a:r>
+          </a:p>
+          <a:p>
+            <a:pPr algn="l">
+              <a:lnSpc>
+                <a:spcPct val="100000"/>
+              </a:lnSpc>
+              <a:spcBef>
+                <a:spcPts val="0"/>
+              </a:spcBef>
+              <a:spcAft>
+                <a:spcPts val="200"/>
+              </a:spcAft>
+            </a:pPr>
+            <a:r>
+              <a:rPr sz="900" b="1" i="0">
+                <a:solidFill>
+                  <a:srgbClr val="F3C43F"/>
+                </a:solidFill>
+                <a:latin typeface="Arial"/>
+              </a:rPr>
+              <a:t>WHAT IT RETURNS</a:t>
+            </a:r>
+          </a:p>
+          <a:p>
+            <a:pPr algn="l">
+              <a:lnSpc>
+                <a:spcPct val="100000"/>
+              </a:lnSpc>
+              <a:spcBef>
+                <a:spcPts val="0"/>
+              </a:spcBef>
+              <a:spcAft>
+                <a:spcPts val="100"/>
+              </a:spcAft>
+            </a:pPr>
+            <a:r>
+              <a:rPr sz="1600" b="1" i="0">
+                <a:solidFill>
+                  <a:srgbClr val="FFFFFF"/>
+                </a:solidFill>
+                <a:latin typeface="Arial"/>
+              </a:rPr>
+              <a:t>$310k / yr</a:t>
+            </a:r>
+          </a:p>
+          <a:p>
+            <a:pPr algn="l">
+              <a:lnSpc>
+                <a:spcPct val="100000"/>
+              </a:lnSpc>
+              <a:spcBef>
+                <a:spcPts val="0"/>
+              </a:spcBef>
+              <a:spcAft>
+                <a:spcPts val="500"/>
+              </a:spcAft>
+            </a:pPr>
+            <a:r>
+              <a:rPr sz="720" b="0" i="0">
+                <a:solidFill>
+                  <a:srgbClr val="DCE6F1"/>
+                </a:solidFill>
+                <a:latin typeface="Arial"/>
+              </a:rPr>
+              <a:t>audited savings, every year</a:t>
+            </a:r>
+          </a:p>
+          <a:p>
+            <a:pPr algn="l">
+              <a:lnSpc>
+                <a:spcPct val="100000"/>
+              </a:lnSpc>
+              <a:spcBef>
+                <a:spcPts val="0"/>
+              </a:spcBef>
+              <a:spcAft>
+                <a:spcPts val="100"/>
+              </a:spcAft>
+            </a:pPr>
+            <a:r>
+              <a:rPr sz="1600" b="1" i="0">
+                <a:solidFill>
+                  <a:srgbClr val="FFFFFF"/>
+                </a:solidFill>
+                <a:latin typeface="Arial"/>
+              </a:rPr>
+              <a:t>+105,000</a:t>
+            </a:r>
+          </a:p>
+          <a:p>
+            <a:pPr algn="l">
+              <a:lnSpc>
+                <a:spcPct val="100000"/>
+              </a:lnSpc>
+              <a:spcBef>
+                <a:spcPts val="0"/>
+              </a:spcBef>
+              <a:spcAft>
+                <a:spcPts val="500"/>
+              </a:spcAft>
+            </a:pPr>
+            <a:r>
+              <a:rPr sz="720" b="0" i="0">
+                <a:solidFill>
+                  <a:srgbClr val="DCE6F1"/>
+                </a:solidFill>
+                <a:latin typeface="Arial"/>
+              </a:rPr>
+              <a:t>children fed annually, zero extra cost</a:t>
+            </a:r>
+          </a:p>
+          <a:p>
+            <a:pPr algn="l">
+              <a:lnSpc>
+                <a:spcPct val="100000"/>
+              </a:lnSpc>
+              <a:spcBef>
+                <a:spcPts val="0"/>
+              </a:spcBef>
+              <a:spcAft>
+                <a:spcPts val="100"/>
+              </a:spcAft>
+            </a:pPr>
+            <a:r>
+              <a:rPr sz="1600" b="1" i="0">
+                <a:solidFill>
+                  <a:srgbClr val="FFFFFF"/>
+                </a:solidFill>
+                <a:latin typeface="Arial"/>
+              </a:rPr>
+              <a:t>&lt; 10 months</a:t>
+            </a:r>
+          </a:p>
+          <a:p>
+            <a:pPr algn="l">
+              <a:lnSpc>
+                <a:spcPct val="100000"/>
+              </a:lnSpc>
+              <a:spcBef>
+                <a:spcPts val="0"/>
+              </a:spcBef>
+              <a:spcAft>
+                <a:spcPts val="0"/>
+              </a:spcAft>
+            </a:pPr>
+            <a:r>
+              <a:rPr sz="720" b="0" i="0">
+                <a:solidFill>
+                  <a:srgbClr val="DCE6F1"/>
+                </a:solidFill>
+                <a:latin typeface="Arial"/>
+              </a:rPr>
+              <a:t>payback on the full grant</a:t>
+            </a:r>
+          </a:p>
+        </p:txBody>
+      </p:sp>
+      <p:sp>
+        <p:nvSpPr>
+          <p:cNvPr id="12" name="TextBox 11"/>
+          <p:cNvSpPr txBox="1"/>
+          <p:nvPr/>
+        </p:nvSpPr>
+        <p:spPr>
+          <a:xfrm>
+            <a:off x="3108960" y="1389888"/>
+            <a:ext cx="5669279" cy="274320"/>
+          </a:xfrm>
+          <a:prstGeom prst="rect">
+            <a:avLst/>
+          </a:prstGeom>
+          <a:noFill/>
+        </p:spPr>
+        <p:txBody>
+          <a:bodyPr wrap="square" lIns="0" rIns="0" tIns="0" bIns="0" anchor="t">
+            <a:spAutoFit/>
+          </a:bodyPr>
+          <a:lstStyle/>
+          <a:p>
+            <a:pPr algn="l">
+              <a:lnSpc>
+                <a:spcPct val="100000"/>
+              </a:lnSpc>
+              <a:spcBef>
+                <a:spcPts val="0"/>
+              </a:spcBef>
+              <a:spcAft>
+                <a:spcPts val="0"/>
+              </a:spcAft>
+            </a:pPr>
+            <a:r>
+              <a:rPr sz="1200" b="1" i="0">
+                <a:solidFill>
+                  <a:srgbClr val="1B3E6E"/>
+                </a:solidFill>
+                <a:latin typeface="Arial"/>
+              </a:rPr>
+              <a:t>Why Goldman Sachs — and only Goldman Sachs</a:t>
+            </a:r>
+          </a:p>
+        </p:txBody>
+      </p:sp>
+      <p:sp>
+        <p:nvSpPr>
+          <p:cNvPr id="13" name="Rectangle 12"/>
+          <p:cNvSpPr/>
+          <p:nvPr/>
+        </p:nvSpPr>
+        <p:spPr>
+          <a:xfrm>
+            <a:off x="3108960" y="1682496"/>
+            <a:ext cx="5669279" cy="12801"/>
+          </a:xfrm>
+          <a:prstGeom prst="rect">
+            <a:avLst/>
+          </a:prstGeom>
+          <a:solidFill>
+            <a:srgbClr val="BFBFBF"/>
+          </a:solidFill>
+          <a:ln>
+            <a:noFill/>
+          </a:ln>
+          <a:effectLst/>
+        </p:spPr>
+        <p:style>
+          <a:lnRef idx="1">
+            <a:schemeClr val="accent1"/>
+          </a:lnRef>
+          <a:fillRef idx="3">
+            <a:schemeClr val="accent1"/>
+          </a:fillRef>
+          <a:effectRef idx="2">
+            <a:schemeClr val="accent1"/>
+          </a:effectRef>
+          <a:fontRef idx="minor">
+            <a:schemeClr val="lt1"/>
+          </a:fontRef>
+        </p:style>
+        <p:txBody>
+          <a:bodyPr rtlCol="0" anchor="ctr"/>
+          <a:lstStyle/>
+          <a:p>
+            <a:pPr algn="ctr"/>
+          </a:p>
+        </p:txBody>
+      </p:sp>
+      <p:sp>
+        <p:nvSpPr>
+          <p:cNvPr id="14" name="TextBox 13"/>
+          <p:cNvSpPr txBox="1"/>
+          <p:nvPr/>
+        </p:nvSpPr>
+        <p:spPr>
+          <a:xfrm>
+            <a:off x="3108960" y="1792224"/>
+            <a:ext cx="5669279" cy="502920"/>
+          </a:xfrm>
+          <a:prstGeom prst="rect">
+            <a:avLst/>
+          </a:prstGeom>
+          <a:noFill/>
+        </p:spPr>
+        <p:txBody>
+          <a:bodyPr wrap="square" lIns="0" rIns="0" tIns="0" bIns="0" anchor="t">
+            <a:spAutoFit/>
+          </a:bodyPr>
+          <a:lstStyle/>
+          <a:p>
+            <a:pPr algn="l">
+              <a:lnSpc>
+                <a:spcPct val="100000"/>
+              </a:lnSpc>
+              <a:spcBef>
+                <a:spcPts val="0"/>
+              </a:spcBef>
+              <a:spcAft>
+                <a:spcPts val="0"/>
+              </a:spcAft>
+            </a:pPr>
+            <a:r>
+              <a:rPr sz="830" b="1" i="0">
+                <a:solidFill>
+                  <a:srgbClr val="398025"/>
+                </a:solidFill>
+                <a:latin typeface="Arial"/>
+              </a:rPr>
+              <a:t>✓  Structural, not sustenance:  </a:t>
+            </a:r>
+            <a:r>
+              <a:rPr sz="830" b="0" i="0">
+                <a:solidFill>
+                  <a:srgbClr val="333333"/>
+                </a:solidFill>
+                <a:latin typeface="Arial"/>
+              </a:rPr>
+              <a:t>others fund meals for a year; GS funds the technology that makes every future meal cheaper</a:t>
+            </a:r>
+          </a:p>
+        </p:txBody>
+      </p:sp>
+      <p:sp>
+        <p:nvSpPr>
+          <p:cNvPr id="15" name="TextBox 14"/>
+          <p:cNvSpPr txBox="1"/>
+          <p:nvPr/>
+        </p:nvSpPr>
+        <p:spPr>
+          <a:xfrm>
+            <a:off x="3108960" y="2267712"/>
+            <a:ext cx="5669279" cy="502920"/>
+          </a:xfrm>
+          <a:prstGeom prst="rect">
+            <a:avLst/>
+          </a:prstGeom>
+          <a:noFill/>
+        </p:spPr>
+        <p:txBody>
+          <a:bodyPr wrap="square" lIns="0" rIns="0" tIns="0" bIns="0" anchor="t">
+            <a:spAutoFit/>
+          </a:bodyPr>
+          <a:lstStyle/>
+          <a:p>
+            <a:pPr algn="l">
+              <a:lnSpc>
+                <a:spcPct val="100000"/>
+              </a:lnSpc>
+              <a:spcBef>
+                <a:spcPts val="0"/>
+              </a:spcBef>
+              <a:spcAft>
+                <a:spcPts val="0"/>
+              </a:spcAft>
+            </a:pPr>
+            <a:r>
+              <a:rPr sz="830" b="1" i="0">
+                <a:solidFill>
+                  <a:srgbClr val="398025"/>
+                </a:solidFill>
+                <a:latin typeface="Arial"/>
+              </a:rPr>
+              <a:t>✓  Plays to GS DNA:  </a:t>
+            </a:r>
+            <a:r>
+              <a:rPr sz="830" b="0" i="0">
+                <a:solidFill>
+                  <a:srgbClr val="333333"/>
+                </a:solidFill>
+                <a:latin typeface="Arial"/>
+              </a:rPr>
+              <a:t>forecasting, optimisation &amp; risk controls — GS engineering mentors the build pro bono</a:t>
+            </a:r>
+          </a:p>
+        </p:txBody>
+      </p:sp>
+      <p:sp>
+        <p:nvSpPr>
+          <p:cNvPr id="16" name="TextBox 15"/>
+          <p:cNvSpPr txBox="1"/>
+          <p:nvPr/>
+        </p:nvSpPr>
+        <p:spPr>
+          <a:xfrm>
+            <a:off x="3108960" y="2743200"/>
+            <a:ext cx="5669279" cy="502920"/>
+          </a:xfrm>
+          <a:prstGeom prst="rect">
+            <a:avLst/>
+          </a:prstGeom>
+          <a:noFill/>
+        </p:spPr>
+        <p:txBody>
+          <a:bodyPr wrap="square" lIns="0" rIns="0" tIns="0" bIns="0" anchor="t">
+            <a:spAutoFit/>
+          </a:bodyPr>
+          <a:lstStyle/>
+          <a:p>
+            <a:pPr algn="l">
+              <a:lnSpc>
+                <a:spcPct val="100000"/>
+              </a:lnSpc>
+              <a:spcBef>
+                <a:spcPts val="0"/>
+              </a:spcBef>
+              <a:spcAft>
+                <a:spcPts val="0"/>
+              </a:spcAft>
+            </a:pPr>
+            <a:r>
+              <a:rPr sz="830" b="1" i="0">
+                <a:solidFill>
+                  <a:srgbClr val="398025"/>
+                </a:solidFill>
+                <a:latin typeface="Arial"/>
+              </a:rPr>
+              <a:t>✓  Measurable ROI:  </a:t>
+            </a:r>
+            <a:r>
+              <a:rPr sz="830" b="0" i="0">
+                <a:solidFill>
+                  <a:srgbClr val="333333"/>
+                </a:solidFill>
+                <a:latin typeface="Arial"/>
+              </a:rPr>
+              <a:t>$310k/yr audited savings; KPI dashboard shared quarterly with GS</a:t>
+            </a:r>
+          </a:p>
+        </p:txBody>
+      </p:sp>
+      <p:sp>
+        <p:nvSpPr>
+          <p:cNvPr id="17" name="TextBox 16"/>
+          <p:cNvSpPr txBox="1"/>
+          <p:nvPr/>
+        </p:nvSpPr>
+        <p:spPr>
+          <a:xfrm>
+            <a:off x="3108960" y="3218688"/>
+            <a:ext cx="5669279" cy="502920"/>
+          </a:xfrm>
+          <a:prstGeom prst="rect">
+            <a:avLst/>
+          </a:prstGeom>
+          <a:noFill/>
+        </p:spPr>
+        <p:txBody>
+          <a:bodyPr wrap="square" lIns="0" rIns="0" tIns="0" bIns="0" anchor="t">
+            <a:spAutoFit/>
+          </a:bodyPr>
+          <a:lstStyle/>
+          <a:p>
+            <a:pPr algn="l">
+              <a:lnSpc>
+                <a:spcPct val="100000"/>
+              </a:lnSpc>
+              <a:spcBef>
+                <a:spcPts val="0"/>
+              </a:spcBef>
+              <a:spcAft>
+                <a:spcPts val="0"/>
+              </a:spcAft>
+            </a:pPr>
+            <a:r>
+              <a:rPr sz="830" b="1" i="0">
+                <a:solidFill>
+                  <a:srgbClr val="398025"/>
+                </a:solidFill>
+                <a:latin typeface="Arial"/>
+              </a:rPr>
+              <a:t>✓  Scalable blueprint:  </a:t>
+            </a:r>
+            <a:r>
+              <a:rPr sz="830" b="0" i="0">
+                <a:solidFill>
+                  <a:srgbClr val="333333"/>
+                </a:solidFill>
+                <a:latin typeface="Arial"/>
+              </a:rPr>
+              <a:t>proven once, extends to school-feeding programmes across South Asia &amp; Africa</a:t>
+            </a:r>
+          </a:p>
+        </p:txBody>
+      </p:sp>
+      <p:sp>
+        <p:nvSpPr>
+          <p:cNvPr id="18" name="Rectangle 17"/>
+          <p:cNvSpPr/>
+          <p:nvPr/>
+        </p:nvSpPr>
+        <p:spPr>
+          <a:xfrm>
+            <a:off x="3108960" y="3803904"/>
+            <a:ext cx="731520" cy="868680"/>
+          </a:xfrm>
+          <a:prstGeom prst="rect">
+            <a:avLst/>
+          </a:prstGeom>
+          <a:solidFill>
+            <a:srgbClr val="F2F2F2"/>
+          </a:solidFill>
+          <a:ln w="12700">
+            <a:solidFill>
+              <a:srgbClr val="727375"/>
+            </a:solidFill>
+            <a:prstDash val="dash"/>
+          </a:ln>
+          <a:effectLst/>
+        </p:spPr>
+        <p:style>
+          <a:lnRef idx="1">
+            <a:schemeClr val="accent1"/>
+          </a:lnRef>
+          <a:fillRef idx="3">
+            <a:schemeClr val="accent1"/>
+          </a:fillRef>
+          <a:effectRef idx="2">
+            <a:schemeClr val="accent1"/>
+          </a:effectRef>
+          <a:fontRef idx="minor">
+            <a:schemeClr val="lt1"/>
+          </a:fontRef>
+        </p:style>
+        <p:txBody>
+          <a:bodyPr rtlCol="0" anchor="ctr"/>
+          <a:lstStyle/>
+          <a:p>
+            <a:pPr algn="ctr"/>
+          </a:p>
+        </p:txBody>
+      </p:sp>
+      <p:sp>
+        <p:nvSpPr>
+          <p:cNvPr id="19" name="TextBox 18"/>
+          <p:cNvSpPr txBox="1"/>
+          <p:nvPr/>
+        </p:nvSpPr>
+        <p:spPr>
+          <a:xfrm>
+            <a:off x="3163824" y="3803904"/>
+            <a:ext cx="621792" cy="868680"/>
+          </a:xfrm>
+          <a:prstGeom prst="rect">
+            <a:avLst/>
+          </a:prstGeom>
+          <a:noFill/>
+        </p:spPr>
+        <p:txBody>
+          <a:bodyPr wrap="square" lIns="0" rIns="0" tIns="0" bIns="0" anchor="ctr">
+            <a:spAutoFit/>
+          </a:bodyPr>
+          <a:lstStyle/>
+          <a:p>
+            <a:pPr algn="ctr">
+              <a:lnSpc>
+                <a:spcPct val="100000"/>
+              </a:lnSpc>
+              <a:spcBef>
+                <a:spcPts val="0"/>
+              </a:spcBef>
+              <a:spcAft>
+                <a:spcPts val="100"/>
+              </a:spcAft>
+            </a:pPr>
+            <a:r>
+              <a:rPr sz="850" b="1" i="0">
+                <a:solidFill>
+                  <a:srgbClr val="727375"/>
+                </a:solidFill>
+                <a:latin typeface="Arial"/>
+              </a:rPr>
+              <a:t>📷
+Krishna
+Kumar</a:t>
+            </a:r>
+          </a:p>
+        </p:txBody>
+      </p:sp>
+      <p:sp>
+        <p:nvSpPr>
+          <p:cNvPr id="20" name="TextBox 19"/>
+          <p:cNvSpPr txBox="1"/>
+          <p:nvPr/>
+        </p:nvSpPr>
+        <p:spPr>
+          <a:xfrm>
+            <a:off x="3977639" y="3822191"/>
+            <a:ext cx="4800599" cy="868680"/>
+          </a:xfrm>
+          <a:prstGeom prst="rect">
+            <a:avLst/>
+          </a:prstGeom>
+          <a:noFill/>
+        </p:spPr>
+        <p:txBody>
+          <a:bodyPr wrap="square" lIns="0" rIns="0" tIns="0" bIns="0" anchor="t">
+            <a:spAutoFit/>
+          </a:bodyPr>
+          <a:lstStyle/>
+          <a:p>
+            <a:pPr algn="l">
+              <a:lnSpc>
+                <a:spcPct val="102000"/>
+              </a:lnSpc>
+              <a:spcBef>
+                <a:spcPts val="0"/>
+              </a:spcBef>
+              <a:spcAft>
+                <a:spcPts val="200"/>
+              </a:spcAft>
+            </a:pPr>
+            <a:r>
+              <a:rPr sz="800" b="0" i="1">
+                <a:solidFill>
+                  <a:srgbClr val="333333"/>
+                </a:solidFill>
+                <a:latin typeface="Arial"/>
+              </a:rPr>
+              <a:t>“The mid-day meal was the reason I stayed in school. Today I manage portfolios instead of an empty stomach.”</a:t>
+            </a:r>
+          </a:p>
+          <a:p>
+            <a:pPr algn="l">
+              <a:lnSpc>
+                <a:spcPct val="100000"/>
+              </a:lnSpc>
+              <a:spcBef>
+                <a:spcPts val="0"/>
+              </a:spcBef>
+              <a:spcAft>
+                <a:spcPts val="0"/>
+              </a:spcAft>
+            </a:pPr>
+            <a:r>
+              <a:rPr sz="720" b="1" i="0">
+                <a:solidFill>
+                  <a:srgbClr val="1B3E6E"/>
+                </a:solidFill>
+                <a:latin typeface="Arial"/>
+              </a:rPr>
+              <a:t>— Krishna Kumar, </a:t>
+            </a:r>
+            <a:r>
+              <a:rPr sz="720" b="0" i="0">
+                <a:solidFill>
+                  <a:srgbClr val="727375"/>
+                </a:solidFill>
+                <a:latin typeface="Arial"/>
+              </a:rPr>
+              <a:t>AVP, HSBC — former mid-day meal beneficiary</a:t>
+            </a:r>
+          </a:p>
+        </p:txBody>
+      </p:sp>
+      <p:sp>
+        <p:nvSpPr>
+          <p:cNvPr id="21" name="Rectangle 20"/>
+          <p:cNvSpPr/>
+          <p:nvPr/>
+        </p:nvSpPr>
+        <p:spPr>
+          <a:xfrm>
+            <a:off x="3108960" y="4809744"/>
+            <a:ext cx="5669279" cy="10972"/>
+          </a:xfrm>
+          <a:prstGeom prst="rect">
+            <a:avLst/>
+          </a:prstGeom>
+          <a:solidFill>
+            <a:srgbClr val="E0E0E0"/>
+          </a:solidFill>
+          <a:ln>
+            <a:noFill/>
+          </a:ln>
+          <a:effectLst/>
+        </p:spPr>
+        <p:style>
+          <a:lnRef idx="1">
+            <a:schemeClr val="accent1"/>
+          </a:lnRef>
+          <a:fillRef idx="3">
+            <a:schemeClr val="accent1"/>
+          </a:fillRef>
+          <a:effectRef idx="2">
+            <a:schemeClr val="accent1"/>
+          </a:effectRef>
+          <a:fontRef idx="minor">
+            <a:schemeClr val="lt1"/>
+          </a:fontRef>
+        </p:style>
+        <p:txBody>
+          <a:bodyPr rtlCol="0" anchor="ctr"/>
+          <a:lstStyle/>
+          <a:p>
+            <a:pPr algn="ctr"/>
+          </a:p>
+        </p:txBody>
+      </p:sp>
+      <p:sp>
+        <p:nvSpPr>
+          <p:cNvPr id="22" name="TextBox 21"/>
+          <p:cNvSpPr txBox="1"/>
+          <p:nvPr/>
+        </p:nvSpPr>
+        <p:spPr>
+          <a:xfrm>
+            <a:off x="3108960" y="4882896"/>
+            <a:ext cx="5669279" cy="457200"/>
+          </a:xfrm>
+          <a:prstGeom prst="rect">
+            <a:avLst/>
+          </a:prstGeom>
+          <a:noFill/>
+        </p:spPr>
+        <p:txBody>
+          <a:bodyPr wrap="square" lIns="0" rIns="0" tIns="0" bIns="0" anchor="t">
+            <a:spAutoFit/>
+          </a:bodyPr>
+          <a:lstStyle/>
+          <a:p>
+            <a:pPr algn="l">
+              <a:lnSpc>
+                <a:spcPct val="102000"/>
+              </a:lnSpc>
+              <a:spcBef>
+                <a:spcPts val="0"/>
+              </a:spcBef>
+              <a:spcAft>
+                <a:spcPts val="0"/>
+              </a:spcAft>
+            </a:pPr>
+            <a:r>
+              <a:rPr sz="720" b="1" i="0">
+                <a:solidFill>
+                  <a:srgbClr val="1B3E6E"/>
+                </a:solidFill>
+                <a:latin typeface="Arial"/>
+              </a:rPr>
+              <a:t>Recognition:  </a:t>
+            </a:r>
+            <a:r>
+              <a:rPr sz="720" b="0" i="0">
+                <a:solidFill>
+                  <a:srgbClr val="333333"/>
+                </a:solidFill>
+                <a:latin typeface="Arial"/>
+              </a:rPr>
+              <a:t>Padma Shri (2016) · world's largest school-lunch programme · 4-billionth meal with Hon'ble PM · UK PM Sunak's kitchen visit</a:t>
+            </a:r>
+          </a:p>
+        </p:txBody>
+      </p:sp>
+      <p:sp>
+        <p:nvSpPr>
+          <p:cNvPr id="23" name="Rectangle 22"/>
+          <p:cNvSpPr/>
+          <p:nvPr/>
+        </p:nvSpPr>
+        <p:spPr>
+          <a:xfrm>
+            <a:off x="3108960" y="5376672"/>
+            <a:ext cx="899160" cy="384048"/>
+          </a:xfrm>
+          <a:prstGeom prst="rect">
+            <a:avLst/>
+          </a:prstGeom>
+          <a:solidFill>
+            <a:srgbClr val="F2F2F2"/>
+          </a:solidFill>
+          <a:ln w="12700">
+            <a:solidFill>
+              <a:srgbClr val="727375"/>
+            </a:solidFill>
+            <a:prstDash val="dash"/>
+          </a:ln>
+          <a:effectLst/>
+        </p:spPr>
+        <p:style>
+          <a:lnRef idx="1">
+            <a:schemeClr val="accent1"/>
+          </a:lnRef>
+          <a:fillRef idx="3">
+            <a:schemeClr val="accent1"/>
+          </a:fillRef>
+          <a:effectRef idx="2">
+            <a:schemeClr val="accent1"/>
+          </a:effectRef>
+          <a:fontRef idx="minor">
+            <a:schemeClr val="lt1"/>
+          </a:fontRef>
+        </p:style>
+        <p:txBody>
+          <a:bodyPr rtlCol="0" anchor="ctr"/>
+          <a:lstStyle/>
+          <a:p>
+            <a:pPr algn="ctr"/>
+          </a:p>
+        </p:txBody>
+      </p:sp>
+      <p:sp>
+        <p:nvSpPr>
+          <p:cNvPr id="24" name="TextBox 23"/>
+          <p:cNvSpPr txBox="1"/>
+          <p:nvPr/>
+        </p:nvSpPr>
+        <p:spPr>
+          <a:xfrm>
+            <a:off x="3163824" y="5376672"/>
+            <a:ext cx="789432" cy="384048"/>
+          </a:xfrm>
+          <a:prstGeom prst="rect">
+            <a:avLst/>
+          </a:prstGeom>
+          <a:noFill/>
+        </p:spPr>
+        <p:txBody>
+          <a:bodyPr wrap="square" lIns="0" rIns="0" tIns="0" bIns="0" anchor="ctr">
+            <a:spAutoFit/>
+          </a:bodyPr>
+          <a:lstStyle/>
+          <a:p>
+            <a:pPr algn="ctr">
+              <a:lnSpc>
+                <a:spcPct val="100000"/>
+              </a:lnSpc>
+              <a:spcBef>
+                <a:spcPts val="0"/>
+              </a:spcBef>
+              <a:spcAft>
+                <a:spcPts val="100"/>
+              </a:spcAft>
+            </a:pPr>
+            <a:r>
+              <a:rPr sz="850" b="1" i="0">
+                <a:solidFill>
+                  <a:srgbClr val="727375"/>
+                </a:solidFill>
+                <a:latin typeface="Arial"/>
+              </a:rPr>
+              <a:t>Infosys</a:t>
+            </a:r>
+          </a:p>
+        </p:txBody>
+      </p:sp>
+      <p:sp>
+        <p:nvSpPr>
+          <p:cNvPr id="25" name="Rectangle 24"/>
+          <p:cNvSpPr/>
+          <p:nvPr/>
+        </p:nvSpPr>
+        <p:spPr>
+          <a:xfrm>
+            <a:off x="4062984" y="5376672"/>
+            <a:ext cx="899160" cy="384048"/>
+          </a:xfrm>
+          <a:prstGeom prst="rect">
+            <a:avLst/>
+          </a:prstGeom>
+          <a:solidFill>
+            <a:srgbClr val="F2F2F2"/>
+          </a:solidFill>
+          <a:ln w="12700">
+            <a:solidFill>
+              <a:srgbClr val="727375"/>
+            </a:solidFill>
+            <a:prstDash val="dash"/>
+          </a:ln>
+          <a:effectLst/>
+        </p:spPr>
+        <p:style>
+          <a:lnRef idx="1">
+            <a:schemeClr val="accent1"/>
+          </a:lnRef>
+          <a:fillRef idx="3">
+            <a:schemeClr val="accent1"/>
+          </a:fillRef>
+          <a:effectRef idx="2">
+            <a:schemeClr val="accent1"/>
+          </a:effectRef>
+          <a:fontRef idx="minor">
+            <a:schemeClr val="lt1"/>
+          </a:fontRef>
+        </p:style>
+        <p:txBody>
+          <a:bodyPr rtlCol="0" anchor="ctr"/>
+          <a:lstStyle/>
+          <a:p>
+            <a:pPr algn="ctr"/>
+          </a:p>
+        </p:txBody>
+      </p:sp>
+      <p:sp>
+        <p:nvSpPr>
+          <p:cNvPr id="26" name="TextBox 25"/>
+          <p:cNvSpPr txBox="1"/>
+          <p:nvPr/>
+        </p:nvSpPr>
+        <p:spPr>
+          <a:xfrm>
+            <a:off x="4117847" y="5376672"/>
+            <a:ext cx="789432" cy="384048"/>
+          </a:xfrm>
+          <a:prstGeom prst="rect">
+            <a:avLst/>
+          </a:prstGeom>
+          <a:noFill/>
+        </p:spPr>
+        <p:txBody>
+          <a:bodyPr wrap="square" lIns="0" rIns="0" tIns="0" bIns="0" anchor="ctr">
+            <a:spAutoFit/>
+          </a:bodyPr>
+          <a:lstStyle/>
+          <a:p>
+            <a:pPr algn="ctr">
+              <a:lnSpc>
+                <a:spcPct val="100000"/>
+              </a:lnSpc>
+              <a:spcBef>
+                <a:spcPts val="0"/>
+              </a:spcBef>
+              <a:spcAft>
+                <a:spcPts val="100"/>
+              </a:spcAft>
+            </a:pPr>
+            <a:r>
+              <a:rPr sz="850" b="1" i="0">
+                <a:solidFill>
+                  <a:srgbClr val="727375"/>
+                </a:solidFill>
+                <a:latin typeface="Arial"/>
+              </a:rPr>
+              <a:t>TCS</a:t>
+            </a:r>
+          </a:p>
+        </p:txBody>
+      </p:sp>
+      <p:sp>
+        <p:nvSpPr>
+          <p:cNvPr id="27" name="Rectangle 26"/>
+          <p:cNvSpPr/>
+          <p:nvPr/>
+        </p:nvSpPr>
+        <p:spPr>
+          <a:xfrm>
+            <a:off x="5017008" y="5376672"/>
+            <a:ext cx="899160" cy="384048"/>
+          </a:xfrm>
+          <a:prstGeom prst="rect">
+            <a:avLst/>
+          </a:prstGeom>
+          <a:solidFill>
+            <a:srgbClr val="F2F2F2"/>
+          </a:solidFill>
+          <a:ln w="12700">
+            <a:solidFill>
+              <a:srgbClr val="727375"/>
+            </a:solidFill>
+            <a:prstDash val="dash"/>
+          </a:ln>
+          <a:effectLst/>
+        </p:spPr>
+        <p:style>
+          <a:lnRef idx="1">
+            <a:schemeClr val="accent1"/>
+          </a:lnRef>
+          <a:fillRef idx="3">
+            <a:schemeClr val="accent1"/>
+          </a:fillRef>
+          <a:effectRef idx="2">
+            <a:schemeClr val="accent1"/>
+          </a:effectRef>
+          <a:fontRef idx="minor">
+            <a:schemeClr val="lt1"/>
+          </a:fontRef>
+        </p:style>
+        <p:txBody>
+          <a:bodyPr rtlCol="0" anchor="ctr"/>
+          <a:lstStyle/>
+          <a:p>
+            <a:pPr algn="ctr"/>
+          </a:p>
+        </p:txBody>
+      </p:sp>
+      <p:sp>
+        <p:nvSpPr>
+          <p:cNvPr id="28" name="TextBox 27"/>
+          <p:cNvSpPr txBox="1"/>
+          <p:nvPr/>
+        </p:nvSpPr>
+        <p:spPr>
+          <a:xfrm>
+            <a:off x="5071871" y="5376672"/>
+            <a:ext cx="789432" cy="384048"/>
+          </a:xfrm>
+          <a:prstGeom prst="rect">
+            <a:avLst/>
+          </a:prstGeom>
+          <a:noFill/>
+        </p:spPr>
+        <p:txBody>
+          <a:bodyPr wrap="square" lIns="0" rIns="0" tIns="0" bIns="0" anchor="ctr">
+            <a:spAutoFit/>
+          </a:bodyPr>
+          <a:lstStyle/>
+          <a:p>
+            <a:pPr algn="ctr">
+              <a:lnSpc>
+                <a:spcPct val="100000"/>
+              </a:lnSpc>
+              <a:spcBef>
+                <a:spcPts val="0"/>
+              </a:spcBef>
+              <a:spcAft>
+                <a:spcPts val="100"/>
+              </a:spcAft>
+            </a:pPr>
+            <a:r>
+              <a:rPr sz="850" b="1" i="0">
+                <a:solidFill>
+                  <a:srgbClr val="727375"/>
+                </a:solidFill>
+                <a:latin typeface="Arial"/>
+              </a:rPr>
+              <a:t>HDFC</a:t>
+            </a:r>
+          </a:p>
+        </p:txBody>
+      </p:sp>
+      <p:sp>
+        <p:nvSpPr>
+          <p:cNvPr id="29" name="Rectangle 28"/>
+          <p:cNvSpPr/>
+          <p:nvPr/>
+        </p:nvSpPr>
+        <p:spPr>
+          <a:xfrm>
+            <a:off x="5971031" y="5376672"/>
+            <a:ext cx="899160" cy="384048"/>
+          </a:xfrm>
+          <a:prstGeom prst="rect">
+            <a:avLst/>
+          </a:prstGeom>
+          <a:solidFill>
+            <a:srgbClr val="F2F2F2"/>
+          </a:solidFill>
+          <a:ln w="12700">
+            <a:solidFill>
+              <a:srgbClr val="727375"/>
+            </a:solidFill>
+            <a:prstDash val="dash"/>
+          </a:ln>
+          <a:effectLst/>
+        </p:spPr>
+        <p:style>
+          <a:lnRef idx="1">
+            <a:schemeClr val="accent1"/>
+          </a:lnRef>
+          <a:fillRef idx="3">
+            <a:schemeClr val="accent1"/>
+          </a:fillRef>
+          <a:effectRef idx="2">
+            <a:schemeClr val="accent1"/>
+          </a:effectRef>
+          <a:fontRef idx="minor">
+            <a:schemeClr val="lt1"/>
+          </a:fontRef>
+        </p:style>
+        <p:txBody>
+          <a:bodyPr rtlCol="0" anchor="ctr"/>
+          <a:lstStyle/>
+          <a:p>
+            <a:pPr algn="ctr"/>
+          </a:p>
+        </p:txBody>
+      </p:sp>
+      <p:sp>
+        <p:nvSpPr>
+          <p:cNvPr id="30" name="TextBox 29"/>
+          <p:cNvSpPr txBox="1"/>
+          <p:nvPr/>
+        </p:nvSpPr>
+        <p:spPr>
+          <a:xfrm>
+            <a:off x="6025895" y="5376672"/>
+            <a:ext cx="789432" cy="384048"/>
+          </a:xfrm>
+          <a:prstGeom prst="rect">
+            <a:avLst/>
+          </a:prstGeom>
+          <a:noFill/>
+        </p:spPr>
+        <p:txBody>
+          <a:bodyPr wrap="square" lIns="0" rIns="0" tIns="0" bIns="0" anchor="ctr">
+            <a:spAutoFit/>
+          </a:bodyPr>
+          <a:lstStyle/>
+          <a:p>
+            <a:pPr algn="ctr">
+              <a:lnSpc>
+                <a:spcPct val="100000"/>
+              </a:lnSpc>
+              <a:spcBef>
+                <a:spcPts val="0"/>
+              </a:spcBef>
+              <a:spcAft>
+                <a:spcPts val="100"/>
+              </a:spcAft>
+            </a:pPr>
+            <a:r>
+              <a:rPr sz="850" b="1" i="0">
+                <a:solidFill>
+                  <a:srgbClr val="727375"/>
+                </a:solidFill>
+                <a:latin typeface="Arial"/>
+              </a:rPr>
+              <a:t>Amazon</a:t>
+            </a:r>
+          </a:p>
+        </p:txBody>
+      </p:sp>
+      <p:sp>
+        <p:nvSpPr>
+          <p:cNvPr id="31" name="Rectangle 30"/>
+          <p:cNvSpPr/>
+          <p:nvPr/>
+        </p:nvSpPr>
+        <p:spPr>
+          <a:xfrm>
+            <a:off x="6925055" y="5376672"/>
+            <a:ext cx="899160" cy="384048"/>
+          </a:xfrm>
+          <a:prstGeom prst="rect">
+            <a:avLst/>
+          </a:prstGeom>
+          <a:solidFill>
+            <a:srgbClr val="F2F2F2"/>
+          </a:solidFill>
+          <a:ln w="12700">
+            <a:solidFill>
+              <a:srgbClr val="727375"/>
+            </a:solidFill>
+            <a:prstDash val="dash"/>
+          </a:ln>
+          <a:effectLst/>
+        </p:spPr>
+        <p:style>
+          <a:lnRef idx="1">
+            <a:schemeClr val="accent1"/>
+          </a:lnRef>
+          <a:fillRef idx="3">
+            <a:schemeClr val="accent1"/>
+          </a:fillRef>
+          <a:effectRef idx="2">
+            <a:schemeClr val="accent1"/>
+          </a:effectRef>
+          <a:fontRef idx="minor">
+            <a:schemeClr val="lt1"/>
+          </a:fontRef>
+        </p:style>
+        <p:txBody>
+          <a:bodyPr rtlCol="0" anchor="ctr"/>
+          <a:lstStyle/>
+          <a:p>
+            <a:pPr algn="ctr"/>
+          </a:p>
+        </p:txBody>
+      </p:sp>
+      <p:sp>
+        <p:nvSpPr>
+          <p:cNvPr id="32" name="TextBox 31"/>
+          <p:cNvSpPr txBox="1"/>
+          <p:nvPr/>
+        </p:nvSpPr>
+        <p:spPr>
+          <a:xfrm>
+            <a:off x="6979919" y="5376672"/>
+            <a:ext cx="789432" cy="384048"/>
+          </a:xfrm>
+          <a:prstGeom prst="rect">
+            <a:avLst/>
+          </a:prstGeom>
+          <a:noFill/>
+        </p:spPr>
+        <p:txBody>
+          <a:bodyPr wrap="square" lIns="0" rIns="0" tIns="0" bIns="0" anchor="ctr">
+            <a:spAutoFit/>
+          </a:bodyPr>
+          <a:lstStyle/>
+          <a:p>
+            <a:pPr algn="ctr">
+              <a:lnSpc>
+                <a:spcPct val="100000"/>
+              </a:lnSpc>
+              <a:spcBef>
+                <a:spcPts val="0"/>
+              </a:spcBef>
+              <a:spcAft>
+                <a:spcPts val="100"/>
+              </a:spcAft>
+            </a:pPr>
+            <a:r>
+              <a:rPr sz="850" b="1" i="0">
+                <a:solidFill>
+                  <a:srgbClr val="727375"/>
+                </a:solidFill>
+                <a:latin typeface="Arial"/>
+              </a:rPr>
+              <a:t>Airbus</a:t>
+            </a:r>
+          </a:p>
+        </p:txBody>
+      </p:sp>
+      <p:sp>
+        <p:nvSpPr>
+          <p:cNvPr id="33" name="Rectangle 32"/>
+          <p:cNvSpPr/>
+          <p:nvPr/>
+        </p:nvSpPr>
+        <p:spPr>
+          <a:xfrm>
+            <a:off x="7879079" y="5376672"/>
+            <a:ext cx="899160" cy="384048"/>
+          </a:xfrm>
+          <a:prstGeom prst="rect">
+            <a:avLst/>
+          </a:prstGeom>
+          <a:solidFill>
+            <a:srgbClr val="F2F2F2"/>
+          </a:solidFill>
+          <a:ln w="12700">
+            <a:solidFill>
+              <a:srgbClr val="727375"/>
+            </a:solidFill>
+            <a:prstDash val="dash"/>
+          </a:ln>
+          <a:effectLst/>
+        </p:spPr>
+        <p:style>
+          <a:lnRef idx="1">
+            <a:schemeClr val="accent1"/>
+          </a:lnRef>
+          <a:fillRef idx="3">
+            <a:schemeClr val="accent1"/>
+          </a:fillRef>
+          <a:effectRef idx="2">
+            <a:schemeClr val="accent1"/>
+          </a:effectRef>
+          <a:fontRef idx="minor">
+            <a:schemeClr val="lt1"/>
+          </a:fontRef>
+        </p:style>
+        <p:txBody>
+          <a:bodyPr rtlCol="0" anchor="ctr"/>
+          <a:lstStyle/>
+          <a:p>
+            <a:pPr algn="ctr"/>
+          </a:p>
+        </p:txBody>
+      </p:sp>
+      <p:sp>
+        <p:nvSpPr>
+          <p:cNvPr id="34" name="TextBox 33"/>
+          <p:cNvSpPr txBox="1"/>
+          <p:nvPr/>
+        </p:nvSpPr>
+        <p:spPr>
+          <a:xfrm>
+            <a:off x="7933943" y="5376672"/>
+            <a:ext cx="789432" cy="384048"/>
+          </a:xfrm>
+          <a:prstGeom prst="rect">
+            <a:avLst/>
+          </a:prstGeom>
+          <a:noFill/>
+        </p:spPr>
+        <p:txBody>
+          <a:bodyPr wrap="square" lIns="0" rIns="0" tIns="0" bIns="0" anchor="ctr">
+            <a:spAutoFit/>
+          </a:bodyPr>
+          <a:lstStyle/>
+          <a:p>
+            <a:pPr algn="ctr">
+              <a:lnSpc>
+                <a:spcPct val="100000"/>
+              </a:lnSpc>
+              <a:spcBef>
+                <a:spcPts val="0"/>
+              </a:spcBef>
+              <a:spcAft>
+                <a:spcPts val="100"/>
+              </a:spcAft>
+            </a:pPr>
+            <a:r>
+              <a:rPr sz="850" b="1" i="0">
+                <a:solidFill>
+                  <a:srgbClr val="727375"/>
+                </a:solidFill>
+                <a:latin typeface="Arial"/>
+              </a:rPr>
+              <a:t>SBI</a:t>
+            </a:r>
+          </a:p>
+        </p:txBody>
+      </p:sp>
+    </p:spTree>
+  </p:cSld>
+  <p:clrMapOvr>
+    <a:masterClrMapping/>
+  </p:clrMapOvr>
+</p:sld>
+</file>
+
 <file path=ppt/slides/slide2.xml><?xml version="1.0" encoding="utf-8"?>
 <p:sld xmlns:a="http://schemas.openxmlformats.org/drawingml/2006/main" xmlns:p="http://schemas.openxmlformats.org/presentationml/2006/main" xmlns:r="http://schemas.openxmlformats.org/officeDocument/2006/relationships">
   <p:cSld>
@@ -18018,6 +19854,5368 @@
                 <a:latin typeface="Arial"/>
               </a:rPr>
               <a:t>both platforms live in all 68 kitchens — the savings flywheel spinning on its own.</a:t>
+            </a:r>
+          </a:p>
+        </p:txBody>
+      </p:sp>
+    </p:spTree>
+  </p:cSld>
+  <p:clrMapOvr>
+    <a:masterClrMapping/>
+  </p:clrMapOvr>
+</p:sld>
+</file>
+
+<file path=ppt/slides/slide7.xml><?xml version="1.0" encoding="utf-8"?>
+<p:sld xmlns:a="http://schemas.openxmlformats.org/drawingml/2006/main" xmlns:p="http://schemas.openxmlformats.org/presentationml/2006/main" xmlns:r="http://schemas.openxmlformats.org/officeDocument/2006/relationships">
+  <p:cSld>
+    <p:spTree>
+      <p:nvGrpSpPr>
+        <p:cNvPr id="1" name=""/>
+        <p:cNvGrpSpPr/>
+        <p:nvPr/>
+      </p:nvGrpSpPr>
+      <p:grpSpPr/>
+      <p:sp>
+        <p:nvSpPr>
+          <p:cNvPr id="2" name="Rectangle 1"/>
+          <p:cNvSpPr/>
+          <p:nvPr/>
+        </p:nvSpPr>
+        <p:spPr>
+          <a:xfrm>
+            <a:off x="365760" y="274320"/>
+            <a:ext cx="8412480" cy="23774"/>
+          </a:xfrm>
+          <a:prstGeom prst="rect">
+            <a:avLst/>
+          </a:prstGeom>
+          <a:solidFill>
+            <a:srgbClr val="1B3E6E"/>
+          </a:solidFill>
+          <a:ln>
+            <a:noFill/>
+          </a:ln>
+          <a:effectLst/>
+        </p:spPr>
+        <p:style>
+          <a:lnRef idx="1">
+            <a:schemeClr val="accent1"/>
+          </a:lnRef>
+          <a:fillRef idx="3">
+            <a:schemeClr val="accent1"/>
+          </a:fillRef>
+          <a:effectRef idx="2">
+            <a:schemeClr val="accent1"/>
+          </a:effectRef>
+          <a:fontRef idx="minor">
+            <a:schemeClr val="lt1"/>
+          </a:fontRef>
+        </p:style>
+        <p:txBody>
+          <a:bodyPr rtlCol="0" anchor="ctr"/>
+          <a:lstStyle/>
+          <a:p>
+            <a:pPr algn="ctr"/>
+          </a:p>
+        </p:txBody>
+      </p:sp>
+      <p:sp>
+        <p:nvSpPr>
+          <p:cNvPr id="3" name="TextBox 2"/>
+          <p:cNvSpPr txBox="1"/>
+          <p:nvPr/>
+        </p:nvSpPr>
+        <p:spPr>
+          <a:xfrm>
+            <a:off x="365760" y="365760"/>
+            <a:ext cx="8412480" cy="457200"/>
+          </a:xfrm>
+          <a:prstGeom prst="rect">
+            <a:avLst/>
+          </a:prstGeom>
+          <a:noFill/>
+        </p:spPr>
+        <p:txBody>
+          <a:bodyPr wrap="square" lIns="0" rIns="0" tIns="0" bIns="0" anchor="t">
+            <a:spAutoFit/>
+          </a:bodyPr>
+          <a:lstStyle/>
+          <a:p>
+            <a:pPr algn="l">
+              <a:lnSpc>
+                <a:spcPct val="100000"/>
+              </a:lnSpc>
+              <a:spcBef>
+                <a:spcPts val="0"/>
+              </a:spcBef>
+              <a:spcAft>
+                <a:spcPts val="0"/>
+              </a:spcAft>
+            </a:pPr>
+            <a:r>
+              <a:rPr sz="2000" b="0" i="0">
+                <a:solidFill>
+                  <a:srgbClr val="1B3E6E"/>
+                </a:solidFill>
+                <a:latin typeface="Georgia"/>
+              </a:rPr>
+              <a:t>Conclusion — why Akshaya Patra, and why this proposal wins</a:t>
+            </a:r>
+          </a:p>
+        </p:txBody>
+      </p:sp>
+      <p:sp>
+        <p:nvSpPr>
+          <p:cNvPr id="4" name="TextBox 3"/>
+          <p:cNvSpPr txBox="1"/>
+          <p:nvPr/>
+        </p:nvSpPr>
+        <p:spPr>
+          <a:xfrm>
+            <a:off x="365760" y="822960"/>
+            <a:ext cx="8412480" cy="438912"/>
+          </a:xfrm>
+          <a:prstGeom prst="rect">
+            <a:avLst/>
+          </a:prstGeom>
+          <a:noFill/>
+        </p:spPr>
+        <p:txBody>
+          <a:bodyPr wrap="square" lIns="0" rIns="0" tIns="0" bIns="0" anchor="t">
+            <a:spAutoFit/>
+          </a:bodyPr>
+          <a:lstStyle/>
+          <a:p>
+            <a:pPr algn="l">
+              <a:lnSpc>
+                <a:spcPct val="100000"/>
+              </a:lnSpc>
+              <a:spcBef>
+                <a:spcPts val="0"/>
+              </a:spcBef>
+              <a:spcAft>
+                <a:spcPts val="0"/>
+              </a:spcAft>
+            </a:pPr>
+            <a:r>
+              <a:rPr sz="1050" b="0" i="0">
+                <a:solidFill>
+                  <a:srgbClr val="333333"/>
+                </a:solidFill>
+                <a:latin typeface="Arial"/>
+              </a:rPr>
+              <a:t>A proven engine of social mobility, a grant that compounds instead of depletes, and a partnership only Goldman Sachs can power.</a:t>
+            </a:r>
+          </a:p>
+        </p:txBody>
+      </p:sp>
+      <p:sp>
+        <p:nvSpPr>
+          <p:cNvPr id="5" name="Rectangle 4"/>
+          <p:cNvSpPr/>
+          <p:nvPr/>
+        </p:nvSpPr>
+        <p:spPr>
+          <a:xfrm>
+            <a:off x="502920" y="6071616"/>
+            <a:ext cx="8138159" cy="365760"/>
+          </a:xfrm>
+          <a:prstGeom prst="rect">
+            <a:avLst/>
+          </a:prstGeom>
+          <a:solidFill>
+            <a:srgbClr val="D9D9D9"/>
+          </a:solidFill>
+          <a:ln>
+            <a:noFill/>
+          </a:ln>
+          <a:effectLst/>
+        </p:spPr>
+        <p:style>
+          <a:lnRef idx="1">
+            <a:schemeClr val="accent1"/>
+          </a:lnRef>
+          <a:fillRef idx="3">
+            <a:schemeClr val="accent1"/>
+          </a:fillRef>
+          <a:effectRef idx="2">
+            <a:schemeClr val="accent1"/>
+          </a:effectRef>
+          <a:fontRef idx="minor">
+            <a:schemeClr val="lt1"/>
+          </a:fontRef>
+        </p:style>
+        <p:txBody>
+          <a:bodyPr rtlCol="0" anchor="ctr"/>
+          <a:lstStyle/>
+          <a:p>
+            <a:pPr algn="ctr"/>
+          </a:p>
+        </p:txBody>
+      </p:sp>
+      <p:sp>
+        <p:nvSpPr>
+          <p:cNvPr id="6" name="TextBox 5"/>
+          <p:cNvSpPr txBox="1"/>
+          <p:nvPr/>
+        </p:nvSpPr>
+        <p:spPr>
+          <a:xfrm>
+            <a:off x="640080" y="6071616"/>
+            <a:ext cx="7863840" cy="365760"/>
+          </a:xfrm>
+          <a:prstGeom prst="rect">
+            <a:avLst/>
+          </a:prstGeom>
+          <a:noFill/>
+        </p:spPr>
+        <p:txBody>
+          <a:bodyPr wrap="square" lIns="0" rIns="0" tIns="0" bIns="0" anchor="ctr">
+            <a:spAutoFit/>
+          </a:bodyPr>
+          <a:lstStyle/>
+          <a:p>
+            <a:pPr algn="ctr">
+              <a:lnSpc>
+                <a:spcPct val="95000"/>
+              </a:lnSpc>
+              <a:spcBef>
+                <a:spcPts val="0"/>
+              </a:spcBef>
+              <a:spcAft>
+                <a:spcPts val="0"/>
+              </a:spcAft>
+            </a:pPr>
+            <a:r>
+              <a:rPr sz="1100" b="1" i="0">
+                <a:solidFill>
+                  <a:srgbClr val="1B3E6E"/>
+                </a:solidFill>
+                <a:latin typeface="Georgia"/>
+              </a:rPr>
+              <a:t>$250k that doesn't feed children for a year — it upgrades the engine that feeds them forever.</a:t>
+            </a:r>
+          </a:p>
+        </p:txBody>
+      </p:sp>
+      <p:sp>
+        <p:nvSpPr>
+          <p:cNvPr id="7" name="TextBox 6"/>
+          <p:cNvSpPr txBox="1"/>
+          <p:nvPr/>
+        </p:nvSpPr>
+        <p:spPr>
+          <a:xfrm>
+            <a:off x="365760" y="6492240"/>
+            <a:ext cx="1280160" cy="329184"/>
+          </a:xfrm>
+          <a:prstGeom prst="rect">
+            <a:avLst/>
+          </a:prstGeom>
+          <a:noFill/>
+        </p:spPr>
+        <p:txBody>
+          <a:bodyPr wrap="square" lIns="0" rIns="0" tIns="0" bIns="0" anchor="t">
+            <a:spAutoFit/>
+          </a:bodyPr>
+          <a:lstStyle/>
+          <a:p>
+            <a:pPr algn="l">
+              <a:lnSpc>
+                <a:spcPct val="90000"/>
+              </a:lnSpc>
+              <a:spcBef>
+                <a:spcPts val="0"/>
+              </a:spcBef>
+              <a:spcAft>
+                <a:spcPts val="0"/>
+              </a:spcAft>
+            </a:pPr>
+            <a:r>
+              <a:rPr sz="900" b="1" i="0">
+                <a:solidFill>
+                  <a:srgbClr val="111111"/>
+                </a:solidFill>
+                <a:latin typeface="Georgia"/>
+              </a:rPr>
+              <a:t>Goldman</a:t>
+            </a:r>
+          </a:p>
+          <a:p>
+            <a:pPr algn="l">
+              <a:lnSpc>
+                <a:spcPct val="90000"/>
+              </a:lnSpc>
+              <a:spcBef>
+                <a:spcPts val="0"/>
+              </a:spcBef>
+              <a:spcAft>
+                <a:spcPts val="0"/>
+              </a:spcAft>
+            </a:pPr>
+            <a:r>
+              <a:rPr sz="900" b="1" i="0">
+                <a:solidFill>
+                  <a:srgbClr val="111111"/>
+                </a:solidFill>
+                <a:latin typeface="Georgia"/>
+              </a:rPr>
+              <a:t>Sachs</a:t>
+            </a:r>
+          </a:p>
+        </p:txBody>
+      </p:sp>
+      <p:sp>
+        <p:nvSpPr>
+          <p:cNvPr id="8" name="TextBox 7"/>
+          <p:cNvSpPr txBox="1"/>
+          <p:nvPr/>
+        </p:nvSpPr>
+        <p:spPr>
+          <a:xfrm>
+            <a:off x="8321040" y="6528816"/>
+            <a:ext cx="457200" cy="274320"/>
+          </a:xfrm>
+          <a:prstGeom prst="rect">
+            <a:avLst/>
+          </a:prstGeom>
+          <a:noFill/>
+        </p:spPr>
+        <p:txBody>
+          <a:bodyPr wrap="square" lIns="0" rIns="0" tIns="0" bIns="0" anchor="t">
+            <a:spAutoFit/>
+          </a:bodyPr>
+          <a:lstStyle/>
+          <a:p>
+            <a:pPr algn="r">
+              <a:lnSpc>
+                <a:spcPct val="100000"/>
+              </a:lnSpc>
+              <a:spcBef>
+                <a:spcPts val="0"/>
+              </a:spcBef>
+              <a:spcAft>
+                <a:spcPts val="300"/>
+              </a:spcAft>
+            </a:pPr>
+            <a:r>
+              <a:rPr sz="900" b="0" i="0">
+                <a:solidFill>
+                  <a:srgbClr val="727375"/>
+                </a:solidFill>
+                <a:latin typeface="Arial"/>
+              </a:rPr>
+              <a:t>7</a:t>
+            </a:r>
+          </a:p>
+        </p:txBody>
+      </p:sp>
+      <p:sp>
+        <p:nvSpPr>
+          <p:cNvPr id="9" name="TextBox 8"/>
+          <p:cNvSpPr txBox="1"/>
+          <p:nvPr/>
+        </p:nvSpPr>
+        <p:spPr>
+          <a:xfrm>
+            <a:off x="5486400" y="54864"/>
+            <a:ext cx="3291840" cy="182880"/>
+          </a:xfrm>
+          <a:prstGeom prst="rect">
+            <a:avLst/>
+          </a:prstGeom>
+          <a:noFill/>
+        </p:spPr>
+        <p:txBody>
+          <a:bodyPr wrap="square" lIns="0" rIns="0" tIns="0" bIns="0" anchor="t">
+            <a:spAutoFit/>
+          </a:bodyPr>
+          <a:lstStyle/>
+          <a:p>
+            <a:pPr algn="r">
+              <a:lnSpc>
+                <a:spcPct val="100000"/>
+              </a:lnSpc>
+              <a:spcBef>
+                <a:spcPts val="0"/>
+              </a:spcBef>
+              <a:spcAft>
+                <a:spcPts val="0"/>
+              </a:spcAft>
+            </a:pPr>
+            <a:r>
+              <a:rPr sz="750" b="0" i="1">
+                <a:solidFill>
+                  <a:srgbClr val="727375"/>
+                </a:solidFill>
+                <a:latin typeface="Arial"/>
+              </a:rPr>
+              <a:t>LAYOUT OPTION A — diagram-led, symmetric</a:t>
+            </a:r>
+          </a:p>
+        </p:txBody>
+      </p:sp>
+      <p:sp>
+        <p:nvSpPr>
+          <p:cNvPr id="10" name="Oval 9"/>
+          <p:cNvSpPr/>
+          <p:nvPr/>
+        </p:nvSpPr>
+        <p:spPr>
+          <a:xfrm>
+            <a:off x="2231136" y="1389888"/>
+            <a:ext cx="1207008" cy="950976"/>
+          </a:xfrm>
+          <a:prstGeom prst="ellipse">
+            <a:avLst/>
+          </a:prstGeom>
+          <a:solidFill>
+            <a:srgbClr val="EEF3F9"/>
+          </a:solidFill>
+          <a:ln w="15875">
+            <a:solidFill>
+              <a:srgbClr val="1B3E6E"/>
+            </a:solidFill>
+          </a:ln>
+          <a:effectLst/>
+        </p:spPr>
+        <p:style>
+          <a:lnRef idx="1">
+            <a:schemeClr val="accent1"/>
+          </a:lnRef>
+          <a:fillRef idx="3">
+            <a:schemeClr val="accent1"/>
+          </a:fillRef>
+          <a:effectRef idx="2">
+            <a:schemeClr val="accent1"/>
+          </a:effectRef>
+          <a:fontRef idx="minor">
+            <a:schemeClr val="lt1"/>
+          </a:fontRef>
+        </p:style>
+        <p:txBody>
+          <a:bodyPr rtlCol="0" anchor="ctr"/>
+          <a:lstStyle/>
+          <a:p>
+            <a:pPr algn="ctr"/>
+          </a:p>
+        </p:txBody>
+      </p:sp>
+      <p:sp>
+        <p:nvSpPr>
+          <p:cNvPr id="11" name="TextBox 10"/>
+          <p:cNvSpPr txBox="1"/>
+          <p:nvPr/>
+        </p:nvSpPr>
+        <p:spPr>
+          <a:xfrm>
+            <a:off x="2231136" y="1517904"/>
+            <a:ext cx="1207008" cy="694944"/>
+          </a:xfrm>
+          <a:prstGeom prst="rect">
+            <a:avLst/>
+          </a:prstGeom>
+          <a:noFill/>
+        </p:spPr>
+        <p:txBody>
+          <a:bodyPr wrap="square" lIns="0" rIns="0" tIns="0" bIns="0" anchor="ctr">
+            <a:spAutoFit/>
+          </a:bodyPr>
+          <a:lstStyle/>
+          <a:p>
+            <a:pPr algn="ctr">
+              <a:lnSpc>
+                <a:spcPct val="92000"/>
+              </a:lnSpc>
+              <a:spcBef>
+                <a:spcPts val="0"/>
+              </a:spcBef>
+              <a:spcAft>
+                <a:spcPts val="0"/>
+              </a:spcAft>
+            </a:pPr>
+            <a:r>
+              <a:rPr sz="780" b="1" i="0">
+                <a:solidFill>
+                  <a:srgbClr val="1B3E6E"/>
+                </a:solidFill>
+                <a:latin typeface="Arial"/>
+              </a:rPr>
+              <a:t>GS $250k
+catalytic
+capital</a:t>
+            </a:r>
+          </a:p>
+        </p:txBody>
+      </p:sp>
+      <p:sp>
+        <p:nvSpPr>
+          <p:cNvPr id="12" name="Plus 11"/>
+          <p:cNvSpPr/>
+          <p:nvPr/>
+        </p:nvSpPr>
+        <p:spPr>
+          <a:xfrm>
+            <a:off x="3566160" y="1746504"/>
+            <a:ext cx="274320" cy="237744"/>
+          </a:xfrm>
+          <a:prstGeom prst="mathPlus">
+            <a:avLst/>
+          </a:prstGeom>
+          <a:solidFill>
+            <a:srgbClr val="1B3E6E"/>
+          </a:solidFill>
+          <a:ln>
+            <a:noFill/>
+          </a:ln>
+          <a:effectLst/>
+        </p:spPr>
+        <p:style>
+          <a:lnRef idx="1">
+            <a:schemeClr val="accent1"/>
+          </a:lnRef>
+          <a:fillRef idx="3">
+            <a:schemeClr val="accent1"/>
+          </a:fillRef>
+          <a:effectRef idx="2">
+            <a:schemeClr val="accent1"/>
+          </a:effectRef>
+          <a:fontRef idx="minor">
+            <a:schemeClr val="lt1"/>
+          </a:fontRef>
+        </p:style>
+        <p:txBody>
+          <a:bodyPr rtlCol="0" anchor="ctr"/>
+          <a:lstStyle/>
+          <a:p>
+            <a:pPr algn="ctr"/>
+          </a:p>
+        </p:txBody>
+      </p:sp>
+      <p:sp>
+        <p:nvSpPr>
+          <p:cNvPr id="13" name="Oval 12"/>
+          <p:cNvSpPr/>
+          <p:nvPr/>
+        </p:nvSpPr>
+        <p:spPr>
+          <a:xfrm>
+            <a:off x="3968496" y="1389888"/>
+            <a:ext cx="1207008" cy="950976"/>
+          </a:xfrm>
+          <a:prstGeom prst="ellipse">
+            <a:avLst/>
+          </a:prstGeom>
+          <a:solidFill>
+            <a:srgbClr val="FDF6E0"/>
+          </a:solidFill>
+          <a:ln w="15875">
+            <a:solidFill>
+              <a:srgbClr val="E08A1E"/>
+            </a:solidFill>
+          </a:ln>
+          <a:effectLst/>
+        </p:spPr>
+        <p:style>
+          <a:lnRef idx="1">
+            <a:schemeClr val="accent1"/>
+          </a:lnRef>
+          <a:fillRef idx="3">
+            <a:schemeClr val="accent1"/>
+          </a:fillRef>
+          <a:effectRef idx="2">
+            <a:schemeClr val="accent1"/>
+          </a:effectRef>
+          <a:fontRef idx="minor">
+            <a:schemeClr val="lt1"/>
+          </a:fontRef>
+        </p:style>
+        <p:txBody>
+          <a:bodyPr rtlCol="0" anchor="ctr"/>
+          <a:lstStyle/>
+          <a:p>
+            <a:pPr algn="ctr"/>
+          </a:p>
+        </p:txBody>
+      </p:sp>
+      <p:sp>
+        <p:nvSpPr>
+          <p:cNvPr id="14" name="TextBox 13"/>
+          <p:cNvSpPr txBox="1"/>
+          <p:nvPr/>
+        </p:nvSpPr>
+        <p:spPr>
+          <a:xfrm>
+            <a:off x="3968496" y="1517904"/>
+            <a:ext cx="1207008" cy="694944"/>
+          </a:xfrm>
+          <a:prstGeom prst="rect">
+            <a:avLst/>
+          </a:prstGeom>
+          <a:noFill/>
+        </p:spPr>
+        <p:txBody>
+          <a:bodyPr wrap="square" lIns="0" rIns="0" tIns="0" bIns="0" anchor="ctr">
+            <a:spAutoFit/>
+          </a:bodyPr>
+          <a:lstStyle/>
+          <a:p>
+            <a:pPr algn="ctr">
+              <a:lnSpc>
+                <a:spcPct val="92000"/>
+              </a:lnSpc>
+              <a:spcBef>
+                <a:spcPts val="0"/>
+              </a:spcBef>
+              <a:spcAft>
+                <a:spcPts val="0"/>
+              </a:spcAft>
+            </a:pPr>
+            <a:r>
+              <a:rPr sz="780" b="1" i="0">
+                <a:solidFill>
+                  <a:srgbClr val="E08A1E"/>
+                </a:solidFill>
+                <a:latin typeface="Arial"/>
+              </a:rPr>
+              <a:t>AP's 2.3M
+meals-a-day
+engine</a:t>
+            </a:r>
+          </a:p>
+        </p:txBody>
+      </p:sp>
+      <p:sp>
+        <p:nvSpPr>
+          <p:cNvPr id="15" name="Equal 14"/>
+          <p:cNvSpPr/>
+          <p:nvPr/>
+        </p:nvSpPr>
+        <p:spPr>
+          <a:xfrm>
+            <a:off x="5303520" y="1746504"/>
+            <a:ext cx="274320" cy="237744"/>
+          </a:xfrm>
+          <a:prstGeom prst="mathEqual">
+            <a:avLst/>
+          </a:prstGeom>
+          <a:solidFill>
+            <a:srgbClr val="1B3E6E"/>
+          </a:solidFill>
+          <a:ln>
+            <a:noFill/>
+          </a:ln>
+          <a:effectLst/>
+        </p:spPr>
+        <p:style>
+          <a:lnRef idx="1">
+            <a:schemeClr val="accent1"/>
+          </a:lnRef>
+          <a:fillRef idx="3">
+            <a:schemeClr val="accent1"/>
+          </a:fillRef>
+          <a:effectRef idx="2">
+            <a:schemeClr val="accent1"/>
+          </a:effectRef>
+          <a:fontRef idx="minor">
+            <a:schemeClr val="lt1"/>
+          </a:fontRef>
+        </p:style>
+        <p:txBody>
+          <a:bodyPr rtlCol="0" anchor="ctr"/>
+          <a:lstStyle/>
+          <a:p>
+            <a:pPr algn="ctr"/>
+          </a:p>
+        </p:txBody>
+      </p:sp>
+      <p:sp>
+        <p:nvSpPr>
+          <p:cNvPr id="16" name="Oval 15"/>
+          <p:cNvSpPr/>
+          <p:nvPr/>
+        </p:nvSpPr>
+        <p:spPr>
+          <a:xfrm>
+            <a:off x="5705856" y="1389888"/>
+            <a:ext cx="1207008" cy="950976"/>
+          </a:xfrm>
+          <a:prstGeom prst="ellipse">
+            <a:avLst/>
+          </a:prstGeom>
+          <a:solidFill>
+            <a:srgbClr val="EAF3E6"/>
+          </a:solidFill>
+          <a:ln w="15875">
+            <a:solidFill>
+              <a:srgbClr val="398025"/>
+            </a:solidFill>
+          </a:ln>
+          <a:effectLst/>
+        </p:spPr>
+        <p:style>
+          <a:lnRef idx="1">
+            <a:schemeClr val="accent1"/>
+          </a:lnRef>
+          <a:fillRef idx="3">
+            <a:schemeClr val="accent1"/>
+          </a:fillRef>
+          <a:effectRef idx="2">
+            <a:schemeClr val="accent1"/>
+          </a:effectRef>
+          <a:fontRef idx="minor">
+            <a:schemeClr val="lt1"/>
+          </a:fontRef>
+        </p:style>
+        <p:txBody>
+          <a:bodyPr rtlCol="0" anchor="ctr"/>
+          <a:lstStyle/>
+          <a:p>
+            <a:pPr algn="ctr"/>
+          </a:p>
+        </p:txBody>
+      </p:sp>
+      <p:sp>
+        <p:nvSpPr>
+          <p:cNvPr id="17" name="TextBox 16"/>
+          <p:cNvSpPr txBox="1"/>
+          <p:nvPr/>
+        </p:nvSpPr>
+        <p:spPr>
+          <a:xfrm>
+            <a:off x="5705856" y="1517904"/>
+            <a:ext cx="1207008" cy="694944"/>
+          </a:xfrm>
+          <a:prstGeom prst="rect">
+            <a:avLst/>
+          </a:prstGeom>
+          <a:noFill/>
+        </p:spPr>
+        <p:txBody>
+          <a:bodyPr wrap="square" lIns="0" rIns="0" tIns="0" bIns="0" anchor="ctr">
+            <a:spAutoFit/>
+          </a:bodyPr>
+          <a:lstStyle/>
+          <a:p>
+            <a:pPr algn="ctr">
+              <a:lnSpc>
+                <a:spcPct val="92000"/>
+              </a:lnSpc>
+              <a:spcBef>
+                <a:spcPts val="0"/>
+              </a:spcBef>
+              <a:spcAft>
+                <a:spcPts val="0"/>
+              </a:spcAft>
+            </a:pPr>
+            <a:r>
+              <a:rPr sz="780" b="1" i="0">
+                <a:solidFill>
+                  <a:srgbClr val="398025"/>
+                </a:solidFill>
+                <a:latin typeface="Arial"/>
+              </a:rPr>
+              <a:t>Impact that
+compounds
+yearly</a:t>
+            </a:r>
+          </a:p>
+        </p:txBody>
+      </p:sp>
+      <p:sp>
+        <p:nvSpPr>
+          <p:cNvPr id="18" name="TextBox 17"/>
+          <p:cNvSpPr txBox="1"/>
+          <p:nvPr/>
+        </p:nvSpPr>
+        <p:spPr>
+          <a:xfrm>
+            <a:off x="1371600" y="2414016"/>
+            <a:ext cx="6400800" cy="274320"/>
+          </a:xfrm>
+          <a:prstGeom prst="rect">
+            <a:avLst/>
+          </a:prstGeom>
+          <a:noFill/>
+        </p:spPr>
+        <p:txBody>
+          <a:bodyPr wrap="square" lIns="0" rIns="0" tIns="0" bIns="0" anchor="t">
+            <a:spAutoFit/>
+          </a:bodyPr>
+          <a:lstStyle/>
+          <a:p>
+            <a:pPr algn="ctr">
+              <a:lnSpc>
+                <a:spcPct val="100000"/>
+              </a:lnSpc>
+              <a:spcBef>
+                <a:spcPts val="0"/>
+              </a:spcBef>
+              <a:spcAft>
+                <a:spcPts val="0"/>
+              </a:spcAft>
+            </a:pPr>
+            <a:r>
+              <a:rPr sz="750" b="0" i="1">
+                <a:solidFill>
+                  <a:srgbClr val="727375"/>
+                </a:solidFill>
+                <a:latin typeface="Arial"/>
+              </a:rPr>
+              <a:t>One-time capital → permanent capability → recurring savings → more children in school, every year after Year 1</a:t>
+            </a:r>
+          </a:p>
+        </p:txBody>
+      </p:sp>
+      <p:sp>
+        <p:nvSpPr>
+          <p:cNvPr id="19" name="Rectangle 18"/>
+          <p:cNvSpPr/>
+          <p:nvPr/>
+        </p:nvSpPr>
+        <p:spPr>
+          <a:xfrm>
+            <a:off x="365760" y="2834640"/>
+            <a:ext cx="8412480" cy="1481328"/>
+          </a:xfrm>
+          <a:prstGeom prst="rect">
+            <a:avLst/>
+          </a:prstGeom>
+          <a:solidFill>
+            <a:srgbClr val="EEF3F9"/>
+          </a:solidFill>
+          <a:ln>
+            <a:noFill/>
+          </a:ln>
+          <a:effectLst/>
+        </p:spPr>
+        <p:style>
+          <a:lnRef idx="1">
+            <a:schemeClr val="accent1"/>
+          </a:lnRef>
+          <a:fillRef idx="3">
+            <a:schemeClr val="accent1"/>
+          </a:fillRef>
+          <a:effectRef idx="2">
+            <a:schemeClr val="accent1"/>
+          </a:effectRef>
+          <a:fontRef idx="minor">
+            <a:schemeClr val="lt1"/>
+          </a:fontRef>
+        </p:style>
+        <p:txBody>
+          <a:bodyPr rtlCol="0" anchor="ctr"/>
+          <a:lstStyle/>
+          <a:p>
+            <a:pPr algn="ctr"/>
+          </a:p>
+        </p:txBody>
+      </p:sp>
+      <p:sp>
+        <p:nvSpPr>
+          <p:cNvPr id="20" name="Rectangle 19"/>
+          <p:cNvSpPr/>
+          <p:nvPr/>
+        </p:nvSpPr>
+        <p:spPr>
+          <a:xfrm>
+            <a:off x="365760" y="2834640"/>
+            <a:ext cx="8412480" cy="41148"/>
+          </a:xfrm>
+          <a:prstGeom prst="rect">
+            <a:avLst/>
+          </a:prstGeom>
+          <a:solidFill>
+            <a:srgbClr val="1B3E6E"/>
+          </a:solidFill>
+          <a:ln>
+            <a:noFill/>
+          </a:ln>
+          <a:effectLst/>
+        </p:spPr>
+        <p:style>
+          <a:lnRef idx="1">
+            <a:schemeClr val="accent1"/>
+          </a:lnRef>
+          <a:fillRef idx="3">
+            <a:schemeClr val="accent1"/>
+          </a:fillRef>
+          <a:effectRef idx="2">
+            <a:schemeClr val="accent1"/>
+          </a:effectRef>
+          <a:fontRef idx="minor">
+            <a:schemeClr val="lt1"/>
+          </a:fontRef>
+        </p:style>
+        <p:txBody>
+          <a:bodyPr rtlCol="0" anchor="ctr"/>
+          <a:lstStyle/>
+          <a:p>
+            <a:pPr algn="ctr"/>
+          </a:p>
+        </p:txBody>
+      </p:sp>
+      <p:sp>
+        <p:nvSpPr>
+          <p:cNvPr id="21" name="TextBox 20"/>
+          <p:cNvSpPr txBox="1"/>
+          <p:nvPr/>
+        </p:nvSpPr>
+        <p:spPr>
+          <a:xfrm>
+            <a:off x="365760" y="2916936"/>
+            <a:ext cx="8412480" cy="237744"/>
+          </a:xfrm>
+          <a:prstGeom prst="rect">
+            <a:avLst/>
+          </a:prstGeom>
+          <a:noFill/>
+        </p:spPr>
+        <p:txBody>
+          <a:bodyPr wrap="square" lIns="0" rIns="0" tIns="0" bIns="0" anchor="t">
+            <a:spAutoFit/>
+          </a:bodyPr>
+          <a:lstStyle/>
+          <a:p>
+            <a:pPr algn="ctr">
+              <a:lnSpc>
+                <a:spcPct val="100000"/>
+              </a:lnSpc>
+              <a:spcBef>
+                <a:spcPts val="0"/>
+              </a:spcBef>
+              <a:spcAft>
+                <a:spcPts val="0"/>
+              </a:spcAft>
+            </a:pPr>
+            <a:r>
+              <a:rPr sz="1050" b="1" i="0">
+                <a:solidFill>
+                  <a:srgbClr val="1B3E6E"/>
+                </a:solidFill>
+                <a:latin typeface="Arial"/>
+              </a:rPr>
+              <a:t>WHY THE GOLDMAN SACHS GRANT STANDS OUT HERE</a:t>
+            </a:r>
+          </a:p>
+        </p:txBody>
+      </p:sp>
+      <p:sp>
+        <p:nvSpPr>
+          <p:cNvPr id="22" name="TextBox 21"/>
+          <p:cNvSpPr txBox="1"/>
+          <p:nvPr/>
+        </p:nvSpPr>
+        <p:spPr>
+          <a:xfrm>
+            <a:off x="640080" y="3218688"/>
+            <a:ext cx="1801368" cy="1005840"/>
+          </a:xfrm>
+          <a:prstGeom prst="rect">
+            <a:avLst/>
+          </a:prstGeom>
+          <a:noFill/>
+        </p:spPr>
+        <p:txBody>
+          <a:bodyPr wrap="square" lIns="0" rIns="0" tIns="0" bIns="0" anchor="t">
+            <a:spAutoFit/>
+          </a:bodyPr>
+          <a:lstStyle/>
+          <a:p>
+            <a:pPr algn="l">
+              <a:lnSpc>
+                <a:spcPct val="100000"/>
+              </a:lnSpc>
+              <a:spcBef>
+                <a:spcPts val="0"/>
+              </a:spcBef>
+              <a:spcAft>
+                <a:spcPts val="100"/>
+              </a:spcAft>
+            </a:pPr>
+            <a:r>
+              <a:rPr sz="1500" b="1" i="0">
+                <a:solidFill>
+                  <a:srgbClr val="7297C5"/>
+                </a:solidFill>
+                <a:latin typeface="Georgia"/>
+              </a:rPr>
+              <a:t>1</a:t>
+            </a:r>
+          </a:p>
+          <a:p>
+            <a:pPr algn="l">
+              <a:lnSpc>
+                <a:spcPct val="95000"/>
+              </a:lnSpc>
+              <a:spcBef>
+                <a:spcPts val="0"/>
+              </a:spcBef>
+              <a:spcAft>
+                <a:spcPts val="100"/>
+              </a:spcAft>
+            </a:pPr>
+            <a:r>
+              <a:rPr sz="800" b="1" i="0">
+                <a:solidFill>
+                  <a:srgbClr val="1B3E6E"/>
+                </a:solidFill>
+                <a:latin typeface="Arial"/>
+              </a:rPr>
+              <a:t>Structural, not sustenance</a:t>
+            </a:r>
+          </a:p>
+          <a:p>
+            <a:pPr algn="l">
+              <a:lnSpc>
+                <a:spcPct val="95000"/>
+              </a:lnSpc>
+              <a:spcBef>
+                <a:spcPts val="0"/>
+              </a:spcBef>
+              <a:spcAft>
+                <a:spcPts val="0"/>
+              </a:spcAft>
+            </a:pPr>
+            <a:r>
+              <a:rPr sz="680" b="0" i="0">
+                <a:solidFill>
+                  <a:srgbClr val="333333"/>
+                </a:solidFill>
+                <a:latin typeface="Arial"/>
+              </a:rPr>
+              <a:t>others fund meals for a year; GS funds the technology that makes every future meal cheaper</a:t>
+            </a:r>
+          </a:p>
+        </p:txBody>
+      </p:sp>
+      <p:sp>
+        <p:nvSpPr>
+          <p:cNvPr id="23" name="TextBox 22"/>
+          <p:cNvSpPr txBox="1"/>
+          <p:nvPr/>
+        </p:nvSpPr>
+        <p:spPr>
+          <a:xfrm>
+            <a:off x="2606039" y="3218688"/>
+            <a:ext cx="1801368" cy="1005840"/>
+          </a:xfrm>
+          <a:prstGeom prst="rect">
+            <a:avLst/>
+          </a:prstGeom>
+          <a:noFill/>
+        </p:spPr>
+        <p:txBody>
+          <a:bodyPr wrap="square" lIns="0" rIns="0" tIns="0" bIns="0" anchor="t">
+            <a:spAutoFit/>
+          </a:bodyPr>
+          <a:lstStyle/>
+          <a:p>
+            <a:pPr algn="l">
+              <a:lnSpc>
+                <a:spcPct val="100000"/>
+              </a:lnSpc>
+              <a:spcBef>
+                <a:spcPts val="0"/>
+              </a:spcBef>
+              <a:spcAft>
+                <a:spcPts val="100"/>
+              </a:spcAft>
+            </a:pPr>
+            <a:r>
+              <a:rPr sz="1500" b="1" i="0">
+                <a:solidFill>
+                  <a:srgbClr val="7297C5"/>
+                </a:solidFill>
+                <a:latin typeface="Georgia"/>
+              </a:rPr>
+              <a:t>2</a:t>
+            </a:r>
+          </a:p>
+          <a:p>
+            <a:pPr algn="l">
+              <a:lnSpc>
+                <a:spcPct val="95000"/>
+              </a:lnSpc>
+              <a:spcBef>
+                <a:spcPts val="0"/>
+              </a:spcBef>
+              <a:spcAft>
+                <a:spcPts val="100"/>
+              </a:spcAft>
+            </a:pPr>
+            <a:r>
+              <a:rPr sz="800" b="1" i="0">
+                <a:solidFill>
+                  <a:srgbClr val="1B3E6E"/>
+                </a:solidFill>
+                <a:latin typeface="Arial"/>
+              </a:rPr>
+              <a:t>Plays to GS DNA</a:t>
+            </a:r>
+          </a:p>
+          <a:p>
+            <a:pPr algn="l">
+              <a:lnSpc>
+                <a:spcPct val="95000"/>
+              </a:lnSpc>
+              <a:spcBef>
+                <a:spcPts val="0"/>
+              </a:spcBef>
+              <a:spcAft>
+                <a:spcPts val="0"/>
+              </a:spcAft>
+            </a:pPr>
+            <a:r>
+              <a:rPr sz="680" b="0" i="0">
+                <a:solidFill>
+                  <a:srgbClr val="333333"/>
+                </a:solidFill>
+                <a:latin typeface="Arial"/>
+              </a:rPr>
+              <a:t>forecasting, optimisation &amp; risk controls — GS engineering mentors the build pro bono</a:t>
+            </a:r>
+          </a:p>
+        </p:txBody>
+      </p:sp>
+      <p:sp>
+        <p:nvSpPr>
+          <p:cNvPr id="24" name="TextBox 23"/>
+          <p:cNvSpPr txBox="1"/>
+          <p:nvPr/>
+        </p:nvSpPr>
+        <p:spPr>
+          <a:xfrm>
+            <a:off x="4572000" y="3218688"/>
+            <a:ext cx="1801368" cy="1005840"/>
+          </a:xfrm>
+          <a:prstGeom prst="rect">
+            <a:avLst/>
+          </a:prstGeom>
+          <a:noFill/>
+        </p:spPr>
+        <p:txBody>
+          <a:bodyPr wrap="square" lIns="0" rIns="0" tIns="0" bIns="0" anchor="t">
+            <a:spAutoFit/>
+          </a:bodyPr>
+          <a:lstStyle/>
+          <a:p>
+            <a:pPr algn="l">
+              <a:lnSpc>
+                <a:spcPct val="100000"/>
+              </a:lnSpc>
+              <a:spcBef>
+                <a:spcPts val="0"/>
+              </a:spcBef>
+              <a:spcAft>
+                <a:spcPts val="100"/>
+              </a:spcAft>
+            </a:pPr>
+            <a:r>
+              <a:rPr sz="1500" b="1" i="0">
+                <a:solidFill>
+                  <a:srgbClr val="7297C5"/>
+                </a:solidFill>
+                <a:latin typeface="Georgia"/>
+              </a:rPr>
+              <a:t>3</a:t>
+            </a:r>
+          </a:p>
+          <a:p>
+            <a:pPr algn="l">
+              <a:lnSpc>
+                <a:spcPct val="95000"/>
+              </a:lnSpc>
+              <a:spcBef>
+                <a:spcPts val="0"/>
+              </a:spcBef>
+              <a:spcAft>
+                <a:spcPts val="100"/>
+              </a:spcAft>
+            </a:pPr>
+            <a:r>
+              <a:rPr sz="800" b="1" i="0">
+                <a:solidFill>
+                  <a:srgbClr val="1B3E6E"/>
+                </a:solidFill>
+                <a:latin typeface="Arial"/>
+              </a:rPr>
+              <a:t>Measurable ROI</a:t>
+            </a:r>
+          </a:p>
+          <a:p>
+            <a:pPr algn="l">
+              <a:lnSpc>
+                <a:spcPct val="95000"/>
+              </a:lnSpc>
+              <a:spcBef>
+                <a:spcPts val="0"/>
+              </a:spcBef>
+              <a:spcAft>
+                <a:spcPts val="0"/>
+              </a:spcAft>
+            </a:pPr>
+            <a:r>
+              <a:rPr sz="680" b="0" i="0">
+                <a:solidFill>
+                  <a:srgbClr val="333333"/>
+                </a:solidFill>
+                <a:latin typeface="Arial"/>
+              </a:rPr>
+              <a:t>$310k/yr audited savings; KPI dashboard shared quarterly with GS</a:t>
+            </a:r>
+          </a:p>
+        </p:txBody>
+      </p:sp>
+      <p:sp>
+        <p:nvSpPr>
+          <p:cNvPr id="25" name="TextBox 24"/>
+          <p:cNvSpPr txBox="1"/>
+          <p:nvPr/>
+        </p:nvSpPr>
+        <p:spPr>
+          <a:xfrm>
+            <a:off x="6537959" y="3218688"/>
+            <a:ext cx="1801368" cy="1005840"/>
+          </a:xfrm>
+          <a:prstGeom prst="rect">
+            <a:avLst/>
+          </a:prstGeom>
+          <a:noFill/>
+        </p:spPr>
+        <p:txBody>
+          <a:bodyPr wrap="square" lIns="0" rIns="0" tIns="0" bIns="0" anchor="t">
+            <a:spAutoFit/>
+          </a:bodyPr>
+          <a:lstStyle/>
+          <a:p>
+            <a:pPr algn="l">
+              <a:lnSpc>
+                <a:spcPct val="100000"/>
+              </a:lnSpc>
+              <a:spcBef>
+                <a:spcPts val="0"/>
+              </a:spcBef>
+              <a:spcAft>
+                <a:spcPts val="100"/>
+              </a:spcAft>
+            </a:pPr>
+            <a:r>
+              <a:rPr sz="1500" b="1" i="0">
+                <a:solidFill>
+                  <a:srgbClr val="7297C5"/>
+                </a:solidFill>
+                <a:latin typeface="Georgia"/>
+              </a:rPr>
+              <a:t>4</a:t>
+            </a:r>
+          </a:p>
+          <a:p>
+            <a:pPr algn="l">
+              <a:lnSpc>
+                <a:spcPct val="95000"/>
+              </a:lnSpc>
+              <a:spcBef>
+                <a:spcPts val="0"/>
+              </a:spcBef>
+              <a:spcAft>
+                <a:spcPts val="100"/>
+              </a:spcAft>
+            </a:pPr>
+            <a:r>
+              <a:rPr sz="800" b="1" i="0">
+                <a:solidFill>
+                  <a:srgbClr val="1B3E6E"/>
+                </a:solidFill>
+                <a:latin typeface="Arial"/>
+              </a:rPr>
+              <a:t>Scalable blueprint</a:t>
+            </a:r>
+          </a:p>
+          <a:p>
+            <a:pPr algn="l">
+              <a:lnSpc>
+                <a:spcPct val="95000"/>
+              </a:lnSpc>
+              <a:spcBef>
+                <a:spcPts val="0"/>
+              </a:spcBef>
+              <a:spcAft>
+                <a:spcPts val="0"/>
+              </a:spcAft>
+            </a:pPr>
+            <a:r>
+              <a:rPr sz="680" b="0" i="0">
+                <a:solidFill>
+                  <a:srgbClr val="333333"/>
+                </a:solidFill>
+                <a:latin typeface="Arial"/>
+              </a:rPr>
+              <a:t>proven once, extends to school-feeding programmes across South Asia &amp; Africa</a:t>
+            </a:r>
+          </a:p>
+        </p:txBody>
+      </p:sp>
+      <p:sp>
+        <p:nvSpPr>
+          <p:cNvPr id="26" name="Rectangle 25"/>
+          <p:cNvSpPr/>
+          <p:nvPr/>
+        </p:nvSpPr>
+        <p:spPr>
+          <a:xfrm>
+            <a:off x="4553712" y="4572000"/>
+            <a:ext cx="10972" cy="1325880"/>
+          </a:xfrm>
+          <a:prstGeom prst="rect">
+            <a:avLst/>
+          </a:prstGeom>
+          <a:solidFill>
+            <a:srgbClr val="DDDDDD"/>
+          </a:solidFill>
+          <a:ln>
+            <a:noFill/>
+          </a:ln>
+          <a:effectLst/>
+        </p:spPr>
+        <p:style>
+          <a:lnRef idx="1">
+            <a:schemeClr val="accent1"/>
+          </a:lnRef>
+          <a:fillRef idx="3">
+            <a:schemeClr val="accent1"/>
+          </a:fillRef>
+          <a:effectRef idx="2">
+            <a:schemeClr val="accent1"/>
+          </a:effectRef>
+          <a:fontRef idx="minor">
+            <a:schemeClr val="lt1"/>
+          </a:fontRef>
+        </p:style>
+        <p:txBody>
+          <a:bodyPr rtlCol="0" anchor="ctr"/>
+          <a:lstStyle/>
+          <a:p>
+            <a:pPr algn="ctr"/>
+          </a:p>
+        </p:txBody>
+      </p:sp>
+      <p:sp>
+        <p:nvSpPr>
+          <p:cNvPr id="27" name="TextBox 26"/>
+          <p:cNvSpPr txBox="1"/>
+          <p:nvPr/>
+        </p:nvSpPr>
+        <p:spPr>
+          <a:xfrm>
+            <a:off x="365760" y="4553712"/>
+            <a:ext cx="3977639" cy="1325880"/>
+          </a:xfrm>
+          <a:prstGeom prst="rect">
+            <a:avLst/>
+          </a:prstGeom>
+          <a:noFill/>
+        </p:spPr>
+        <p:txBody>
+          <a:bodyPr wrap="square" lIns="0" rIns="0" tIns="0" bIns="0" anchor="t">
+            <a:spAutoFit/>
+          </a:bodyPr>
+          <a:lstStyle/>
+          <a:p>
+            <a:pPr algn="l">
+              <a:lnSpc>
+                <a:spcPct val="105000"/>
+              </a:lnSpc>
+              <a:spcBef>
+                <a:spcPts val="0"/>
+              </a:spcBef>
+              <a:spcAft>
+                <a:spcPts val="200"/>
+              </a:spcAft>
+            </a:pPr>
+            <a:r>
+              <a:rPr sz="900" b="0" i="1">
+                <a:solidFill>
+                  <a:srgbClr val="333333"/>
+                </a:solidFill>
+                <a:latin typeface="Arial"/>
+              </a:rPr>
+              <a:t>“The mid-day meal was the reason I stayed in school. Today I manage portfolios instead of an empty stomach.”</a:t>
+            </a:r>
+          </a:p>
+          <a:p>
+            <a:pPr algn="l">
+              <a:lnSpc>
+                <a:spcPct val="100000"/>
+              </a:lnSpc>
+              <a:spcBef>
+                <a:spcPts val="0"/>
+              </a:spcBef>
+              <a:spcAft>
+                <a:spcPts val="400"/>
+              </a:spcAft>
+            </a:pPr>
+            <a:r>
+              <a:rPr sz="750" b="1" i="0">
+                <a:solidFill>
+                  <a:srgbClr val="1B3E6E"/>
+                </a:solidFill>
+                <a:latin typeface="Arial"/>
+              </a:rPr>
+              <a:t>— Krishna Kumar, </a:t>
+            </a:r>
+            <a:r>
+              <a:rPr sz="750" b="0" i="0">
+                <a:solidFill>
+                  <a:srgbClr val="727375"/>
+                </a:solidFill>
+                <a:latin typeface="Arial"/>
+              </a:rPr>
+              <a:t>AVP, HSBC — former mid-day meal beneficiary</a:t>
+            </a:r>
+          </a:p>
+          <a:p>
+            <a:pPr algn="l">
+              <a:lnSpc>
+                <a:spcPct val="100000"/>
+              </a:lnSpc>
+              <a:spcBef>
+                <a:spcPts val="0"/>
+              </a:spcBef>
+              <a:spcAft>
+                <a:spcPts val="0"/>
+              </a:spcAft>
+            </a:pPr>
+            <a:r>
+              <a:rPr sz="750" b="1" i="0">
+                <a:solidFill>
+                  <a:srgbClr val="398025"/>
+                </a:solidFill>
+                <a:latin typeface="Arial"/>
+              </a:rPr>
+              <a:t>92% secondary-school completion </a:t>
+            </a:r>
+            <a:r>
+              <a:rPr sz="750" b="0" i="0">
+                <a:solidFill>
+                  <a:srgbClr val="727375"/>
+                </a:solidFill>
+                <a:latin typeface="Arial"/>
+              </a:rPr>
+              <a:t>among beneficiaries vs 74% national avg [dummy]</a:t>
+            </a:r>
+          </a:p>
+        </p:txBody>
+      </p:sp>
+      <p:sp>
+        <p:nvSpPr>
+          <p:cNvPr id="28" name="TextBox 27"/>
+          <p:cNvSpPr txBox="1"/>
+          <p:nvPr/>
+        </p:nvSpPr>
+        <p:spPr>
+          <a:xfrm>
+            <a:off x="4800600" y="4553712"/>
+            <a:ext cx="3977639" cy="1325880"/>
+          </a:xfrm>
+          <a:prstGeom prst="rect">
+            <a:avLst/>
+          </a:prstGeom>
+          <a:noFill/>
+        </p:spPr>
+        <p:txBody>
+          <a:bodyPr wrap="square" lIns="0" rIns="0" tIns="0" bIns="0" anchor="t">
+            <a:spAutoFit/>
+          </a:bodyPr>
+          <a:lstStyle/>
+          <a:p>
+            <a:pPr algn="l">
+              <a:lnSpc>
+                <a:spcPct val="100000"/>
+              </a:lnSpc>
+              <a:spcBef>
+                <a:spcPts val="0"/>
+              </a:spcBef>
+              <a:spcAft>
+                <a:spcPts val="200"/>
+              </a:spcAft>
+            </a:pPr>
+            <a:r>
+              <a:rPr sz="850" b="1" i="0">
+                <a:solidFill>
+                  <a:srgbClr val="1B3E6E"/>
+                </a:solidFill>
+                <a:latin typeface="Arial"/>
+              </a:rPr>
+              <a:t>Recognised &amp; trusted</a:t>
+            </a:r>
+          </a:p>
+          <a:p>
+            <a:pPr algn="l">
+              <a:lnSpc>
+                <a:spcPct val="98000"/>
+              </a:lnSpc>
+              <a:spcBef>
+                <a:spcPts val="0"/>
+              </a:spcBef>
+              <a:spcAft>
+                <a:spcPts val="150"/>
+              </a:spcAft>
+            </a:pPr>
+            <a:r>
+              <a:rPr sz="720" b="0" i="0">
+                <a:solidFill>
+                  <a:srgbClr val="333333"/>
+                </a:solidFill>
+                <a:latin typeface="Arial"/>
+              </a:rPr>
+              <a:t>•  Padma Shri (2016) — Chairman Madhu Pandit Dasa</a:t>
+            </a:r>
+          </a:p>
+          <a:p>
+            <a:pPr algn="l">
+              <a:lnSpc>
+                <a:spcPct val="98000"/>
+              </a:lnSpc>
+              <a:spcBef>
+                <a:spcPts val="0"/>
+              </a:spcBef>
+              <a:spcAft>
+                <a:spcPts val="150"/>
+              </a:spcAft>
+            </a:pPr>
+            <a:r>
+              <a:rPr sz="720" b="0" i="0">
+                <a:solidFill>
+                  <a:srgbClr val="333333"/>
+                </a:solidFill>
+                <a:latin typeface="Arial"/>
+              </a:rPr>
+              <a:t>•  World's largest NGO school-lunch programme — global record</a:t>
+            </a:r>
+          </a:p>
+          <a:p>
+            <a:pPr algn="l">
+              <a:lnSpc>
+                <a:spcPct val="98000"/>
+              </a:lnSpc>
+              <a:spcBef>
+                <a:spcPts val="0"/>
+              </a:spcBef>
+              <a:spcAft>
+                <a:spcPts val="150"/>
+              </a:spcAft>
+            </a:pPr>
+            <a:r>
+              <a:rPr sz="720" b="0" i="0">
+                <a:solidFill>
+                  <a:srgbClr val="333333"/>
+                </a:solidFill>
+                <a:latin typeface="Arial"/>
+              </a:rPr>
+              <a:t>•  4-billionth meal celebrated with Hon'ble PM of India</a:t>
+            </a:r>
+          </a:p>
+          <a:p>
+            <a:pPr algn="l">
+              <a:lnSpc>
+                <a:spcPct val="100000"/>
+              </a:lnSpc>
+              <a:spcBef>
+                <a:spcPts val="0"/>
+              </a:spcBef>
+              <a:spcAft>
+                <a:spcPts val="0"/>
+              </a:spcAft>
+            </a:pPr>
+            <a:r>
+              <a:rPr sz="720" b="1" i="0">
+                <a:solidFill>
+                  <a:srgbClr val="1B3E6E"/>
+                </a:solidFill>
+                <a:latin typeface="Arial"/>
+              </a:rPr>
+              <a:t>Partners: </a:t>
+            </a:r>
+            <a:r>
+              <a:rPr sz="720" b="0" i="0">
+                <a:solidFill>
+                  <a:srgbClr val="727375"/>
+                </a:solidFill>
+                <a:latin typeface="Arial"/>
+              </a:rPr>
+              <a:t>Infosys Foundation · TCS · HDFC · Amazon · Airbus · SBI + 200 more</a:t>
+            </a:r>
+          </a:p>
+        </p:txBody>
+      </p:sp>
+    </p:spTree>
+  </p:cSld>
+  <p:clrMapOvr>
+    <a:masterClrMapping/>
+  </p:clrMapOvr>
+</p:sld>
+</file>
+
+<file path=ppt/slides/slide8.xml><?xml version="1.0" encoding="utf-8"?>
+<p:sld xmlns:a="http://schemas.openxmlformats.org/drawingml/2006/main" xmlns:p="http://schemas.openxmlformats.org/presentationml/2006/main" xmlns:r="http://schemas.openxmlformats.org/officeDocument/2006/relationships">
+  <p:cSld>
+    <p:spTree>
+      <p:nvGrpSpPr>
+        <p:cNvPr id="1" name=""/>
+        <p:cNvGrpSpPr/>
+        <p:nvPr/>
+      </p:nvGrpSpPr>
+      <p:grpSpPr/>
+      <p:sp>
+        <p:nvSpPr>
+          <p:cNvPr id="2" name="Rectangle 1"/>
+          <p:cNvSpPr/>
+          <p:nvPr/>
+        </p:nvSpPr>
+        <p:spPr>
+          <a:xfrm>
+            <a:off x="365760" y="274320"/>
+            <a:ext cx="8412480" cy="23774"/>
+          </a:xfrm>
+          <a:prstGeom prst="rect">
+            <a:avLst/>
+          </a:prstGeom>
+          <a:solidFill>
+            <a:srgbClr val="1B3E6E"/>
+          </a:solidFill>
+          <a:ln>
+            <a:noFill/>
+          </a:ln>
+          <a:effectLst/>
+        </p:spPr>
+        <p:style>
+          <a:lnRef idx="1">
+            <a:schemeClr val="accent1"/>
+          </a:lnRef>
+          <a:fillRef idx="3">
+            <a:schemeClr val="accent1"/>
+          </a:fillRef>
+          <a:effectRef idx="2">
+            <a:schemeClr val="accent1"/>
+          </a:effectRef>
+          <a:fontRef idx="minor">
+            <a:schemeClr val="lt1"/>
+          </a:fontRef>
+        </p:style>
+        <p:txBody>
+          <a:bodyPr rtlCol="0" anchor="ctr"/>
+          <a:lstStyle/>
+          <a:p>
+            <a:pPr algn="ctr"/>
+          </a:p>
+        </p:txBody>
+      </p:sp>
+      <p:sp>
+        <p:nvSpPr>
+          <p:cNvPr id="3" name="TextBox 2"/>
+          <p:cNvSpPr txBox="1"/>
+          <p:nvPr/>
+        </p:nvSpPr>
+        <p:spPr>
+          <a:xfrm>
+            <a:off x="365760" y="365760"/>
+            <a:ext cx="8412480" cy="457200"/>
+          </a:xfrm>
+          <a:prstGeom prst="rect">
+            <a:avLst/>
+          </a:prstGeom>
+          <a:noFill/>
+        </p:spPr>
+        <p:txBody>
+          <a:bodyPr wrap="square" lIns="0" rIns="0" tIns="0" bIns="0" anchor="t">
+            <a:spAutoFit/>
+          </a:bodyPr>
+          <a:lstStyle/>
+          <a:p>
+            <a:pPr algn="l">
+              <a:lnSpc>
+                <a:spcPct val="100000"/>
+              </a:lnSpc>
+              <a:spcBef>
+                <a:spcPts val="0"/>
+              </a:spcBef>
+              <a:spcAft>
+                <a:spcPts val="0"/>
+              </a:spcAft>
+            </a:pPr>
+            <a:r>
+              <a:rPr sz="2000" b="0" i="0">
+                <a:solidFill>
+                  <a:srgbClr val="1B3E6E"/>
+                </a:solidFill>
+                <a:latin typeface="Georgia"/>
+              </a:rPr>
+              <a:t>Conclusion — why Akshaya Patra, and why this proposal wins</a:t>
+            </a:r>
+          </a:p>
+        </p:txBody>
+      </p:sp>
+      <p:sp>
+        <p:nvSpPr>
+          <p:cNvPr id="4" name="TextBox 3"/>
+          <p:cNvSpPr txBox="1"/>
+          <p:nvPr/>
+        </p:nvSpPr>
+        <p:spPr>
+          <a:xfrm>
+            <a:off x="365760" y="822960"/>
+            <a:ext cx="8412480" cy="438912"/>
+          </a:xfrm>
+          <a:prstGeom prst="rect">
+            <a:avLst/>
+          </a:prstGeom>
+          <a:noFill/>
+        </p:spPr>
+        <p:txBody>
+          <a:bodyPr wrap="square" lIns="0" rIns="0" tIns="0" bIns="0" anchor="t">
+            <a:spAutoFit/>
+          </a:bodyPr>
+          <a:lstStyle/>
+          <a:p>
+            <a:pPr algn="l">
+              <a:lnSpc>
+                <a:spcPct val="100000"/>
+              </a:lnSpc>
+              <a:spcBef>
+                <a:spcPts val="0"/>
+              </a:spcBef>
+              <a:spcAft>
+                <a:spcPts val="0"/>
+              </a:spcAft>
+            </a:pPr>
+            <a:r>
+              <a:rPr sz="1050" b="0" i="0">
+                <a:solidFill>
+                  <a:srgbClr val="333333"/>
+                </a:solidFill>
+                <a:latin typeface="Arial"/>
+              </a:rPr>
+              <a:t>A proven engine of social mobility, a grant that compounds instead of depletes, and a partnership only Goldman Sachs can power.</a:t>
+            </a:r>
+          </a:p>
+        </p:txBody>
+      </p:sp>
+      <p:sp>
+        <p:nvSpPr>
+          <p:cNvPr id="5" name="Rectangle 4"/>
+          <p:cNvSpPr/>
+          <p:nvPr/>
+        </p:nvSpPr>
+        <p:spPr>
+          <a:xfrm>
+            <a:off x="502920" y="6071616"/>
+            <a:ext cx="8138159" cy="365760"/>
+          </a:xfrm>
+          <a:prstGeom prst="rect">
+            <a:avLst/>
+          </a:prstGeom>
+          <a:solidFill>
+            <a:srgbClr val="D9D9D9"/>
+          </a:solidFill>
+          <a:ln>
+            <a:noFill/>
+          </a:ln>
+          <a:effectLst/>
+        </p:spPr>
+        <p:style>
+          <a:lnRef idx="1">
+            <a:schemeClr val="accent1"/>
+          </a:lnRef>
+          <a:fillRef idx="3">
+            <a:schemeClr val="accent1"/>
+          </a:fillRef>
+          <a:effectRef idx="2">
+            <a:schemeClr val="accent1"/>
+          </a:effectRef>
+          <a:fontRef idx="minor">
+            <a:schemeClr val="lt1"/>
+          </a:fontRef>
+        </p:style>
+        <p:txBody>
+          <a:bodyPr rtlCol="0" anchor="ctr"/>
+          <a:lstStyle/>
+          <a:p>
+            <a:pPr algn="ctr"/>
+          </a:p>
+        </p:txBody>
+      </p:sp>
+      <p:sp>
+        <p:nvSpPr>
+          <p:cNvPr id="6" name="TextBox 5"/>
+          <p:cNvSpPr txBox="1"/>
+          <p:nvPr/>
+        </p:nvSpPr>
+        <p:spPr>
+          <a:xfrm>
+            <a:off x="640080" y="6071616"/>
+            <a:ext cx="7863840" cy="365760"/>
+          </a:xfrm>
+          <a:prstGeom prst="rect">
+            <a:avLst/>
+          </a:prstGeom>
+          <a:noFill/>
+        </p:spPr>
+        <p:txBody>
+          <a:bodyPr wrap="square" lIns="0" rIns="0" tIns="0" bIns="0" anchor="ctr">
+            <a:spAutoFit/>
+          </a:bodyPr>
+          <a:lstStyle/>
+          <a:p>
+            <a:pPr algn="ctr">
+              <a:lnSpc>
+                <a:spcPct val="95000"/>
+              </a:lnSpc>
+              <a:spcBef>
+                <a:spcPts val="0"/>
+              </a:spcBef>
+              <a:spcAft>
+                <a:spcPts val="0"/>
+              </a:spcAft>
+            </a:pPr>
+            <a:r>
+              <a:rPr sz="1100" b="1" i="0">
+                <a:solidFill>
+                  <a:srgbClr val="1B3E6E"/>
+                </a:solidFill>
+                <a:latin typeface="Georgia"/>
+              </a:rPr>
+              <a:t>$250k that doesn't feed children for a year — it upgrades the engine that feeds them forever.</a:t>
+            </a:r>
+          </a:p>
+        </p:txBody>
+      </p:sp>
+      <p:sp>
+        <p:nvSpPr>
+          <p:cNvPr id="7" name="TextBox 6"/>
+          <p:cNvSpPr txBox="1"/>
+          <p:nvPr/>
+        </p:nvSpPr>
+        <p:spPr>
+          <a:xfrm>
+            <a:off x="365760" y="6492240"/>
+            <a:ext cx="1280160" cy="329184"/>
+          </a:xfrm>
+          <a:prstGeom prst="rect">
+            <a:avLst/>
+          </a:prstGeom>
+          <a:noFill/>
+        </p:spPr>
+        <p:txBody>
+          <a:bodyPr wrap="square" lIns="0" rIns="0" tIns="0" bIns="0" anchor="t">
+            <a:spAutoFit/>
+          </a:bodyPr>
+          <a:lstStyle/>
+          <a:p>
+            <a:pPr algn="l">
+              <a:lnSpc>
+                <a:spcPct val="90000"/>
+              </a:lnSpc>
+              <a:spcBef>
+                <a:spcPts val="0"/>
+              </a:spcBef>
+              <a:spcAft>
+                <a:spcPts val="0"/>
+              </a:spcAft>
+            </a:pPr>
+            <a:r>
+              <a:rPr sz="900" b="1" i="0">
+                <a:solidFill>
+                  <a:srgbClr val="111111"/>
+                </a:solidFill>
+                <a:latin typeface="Georgia"/>
+              </a:rPr>
+              <a:t>Goldman</a:t>
+            </a:r>
+          </a:p>
+          <a:p>
+            <a:pPr algn="l">
+              <a:lnSpc>
+                <a:spcPct val="90000"/>
+              </a:lnSpc>
+              <a:spcBef>
+                <a:spcPts val="0"/>
+              </a:spcBef>
+              <a:spcAft>
+                <a:spcPts val="0"/>
+              </a:spcAft>
+            </a:pPr>
+            <a:r>
+              <a:rPr sz="900" b="1" i="0">
+                <a:solidFill>
+                  <a:srgbClr val="111111"/>
+                </a:solidFill>
+                <a:latin typeface="Georgia"/>
+              </a:rPr>
+              <a:t>Sachs</a:t>
+            </a:r>
+          </a:p>
+        </p:txBody>
+      </p:sp>
+      <p:sp>
+        <p:nvSpPr>
+          <p:cNvPr id="8" name="TextBox 7"/>
+          <p:cNvSpPr txBox="1"/>
+          <p:nvPr/>
+        </p:nvSpPr>
+        <p:spPr>
+          <a:xfrm>
+            <a:off x="8321040" y="6528816"/>
+            <a:ext cx="457200" cy="274320"/>
+          </a:xfrm>
+          <a:prstGeom prst="rect">
+            <a:avLst/>
+          </a:prstGeom>
+          <a:noFill/>
+        </p:spPr>
+        <p:txBody>
+          <a:bodyPr wrap="square" lIns="0" rIns="0" tIns="0" bIns="0" anchor="t">
+            <a:spAutoFit/>
+          </a:bodyPr>
+          <a:lstStyle/>
+          <a:p>
+            <a:pPr algn="r">
+              <a:lnSpc>
+                <a:spcPct val="100000"/>
+              </a:lnSpc>
+              <a:spcBef>
+                <a:spcPts val="0"/>
+              </a:spcBef>
+              <a:spcAft>
+                <a:spcPts val="300"/>
+              </a:spcAft>
+            </a:pPr>
+            <a:r>
+              <a:rPr sz="900" b="0" i="0">
+                <a:solidFill>
+                  <a:srgbClr val="727375"/>
+                </a:solidFill>
+                <a:latin typeface="Arial"/>
+              </a:rPr>
+              <a:t>8</a:t>
+            </a:r>
+          </a:p>
+        </p:txBody>
+      </p:sp>
+      <p:sp>
+        <p:nvSpPr>
+          <p:cNvPr id="9" name="TextBox 8"/>
+          <p:cNvSpPr txBox="1"/>
+          <p:nvPr/>
+        </p:nvSpPr>
+        <p:spPr>
+          <a:xfrm>
+            <a:off x="5486400" y="54864"/>
+            <a:ext cx="3291840" cy="182880"/>
+          </a:xfrm>
+          <a:prstGeom prst="rect">
+            <a:avLst/>
+          </a:prstGeom>
+          <a:noFill/>
+        </p:spPr>
+        <p:txBody>
+          <a:bodyPr wrap="square" lIns="0" rIns="0" tIns="0" bIns="0" anchor="t">
+            <a:spAutoFit/>
+          </a:bodyPr>
+          <a:lstStyle/>
+          <a:p>
+            <a:pPr algn="r">
+              <a:lnSpc>
+                <a:spcPct val="100000"/>
+              </a:lnSpc>
+              <a:spcBef>
+                <a:spcPts val="0"/>
+              </a:spcBef>
+              <a:spcAft>
+                <a:spcPts val="0"/>
+              </a:spcAft>
+            </a:pPr>
+            <a:r>
+              <a:rPr sz="750" b="0" i="1">
+                <a:solidFill>
+                  <a:srgbClr val="727375"/>
+                </a:solidFill>
+                <a:latin typeface="Arial"/>
+              </a:rPr>
+              <a:t>LAYOUT OPTION B — typographic, ranked</a:t>
+            </a:r>
+          </a:p>
+        </p:txBody>
+      </p:sp>
+      <p:sp>
+        <p:nvSpPr>
+          <p:cNvPr id="10" name="TextBox 9"/>
+          <p:cNvSpPr txBox="1"/>
+          <p:nvPr/>
+        </p:nvSpPr>
+        <p:spPr>
+          <a:xfrm>
+            <a:off x="365760" y="1481328"/>
+            <a:ext cx="2377440" cy="868680"/>
+          </a:xfrm>
+          <a:prstGeom prst="rect">
+            <a:avLst/>
+          </a:prstGeom>
+          <a:noFill/>
+        </p:spPr>
+        <p:txBody>
+          <a:bodyPr wrap="square" lIns="0" rIns="0" tIns="0" bIns="0" anchor="t">
+            <a:spAutoFit/>
+          </a:bodyPr>
+          <a:lstStyle/>
+          <a:p>
+            <a:pPr algn="l">
+              <a:lnSpc>
+                <a:spcPct val="100000"/>
+              </a:lnSpc>
+              <a:spcBef>
+                <a:spcPts val="0"/>
+              </a:spcBef>
+              <a:spcAft>
+                <a:spcPts val="100"/>
+              </a:spcAft>
+            </a:pPr>
+            <a:r>
+              <a:rPr sz="2400" b="1" i="0">
+                <a:solidFill>
+                  <a:srgbClr val="1B3E6E"/>
+                </a:solidFill>
+                <a:latin typeface="Georgia"/>
+              </a:rPr>
+              <a:t>$250k</a:t>
+            </a:r>
+          </a:p>
+          <a:p>
+            <a:pPr algn="l">
+              <a:lnSpc>
+                <a:spcPct val="95000"/>
+              </a:lnSpc>
+              <a:spcBef>
+                <a:spcPts val="0"/>
+              </a:spcBef>
+              <a:spcAft>
+                <a:spcPts val="0"/>
+              </a:spcAft>
+            </a:pPr>
+            <a:r>
+              <a:rPr sz="750" b="0" i="0">
+                <a:solidFill>
+                  <a:srgbClr val="727375"/>
+                </a:solidFill>
+                <a:latin typeface="Arial"/>
+              </a:rPr>
+              <a:t>one-time grant</a:t>
+            </a:r>
+          </a:p>
+        </p:txBody>
+      </p:sp>
+      <p:cxnSp>
+        <p:nvCxnSpPr>
+          <p:cNvPr id="11" name="Connector 10"/>
+          <p:cNvCxnSpPr/>
+          <p:nvPr/>
+        </p:nvCxnSpPr>
+        <p:spPr>
+          <a:xfrm>
+            <a:off x="685800" y="2231136"/>
+            <a:ext cx="0" cy="274320"/>
+          </a:xfrm>
+          <a:prstGeom prst="line">
+            <a:avLst/>
+          </a:prstGeom>
+          <a:ln w="12700">
+            <a:solidFill>
+              <a:srgbClr val="BFBFBF"/>
+            </a:solidFill>
+            <a:prstDash val="sysDash"/>
+            <a:tailEnd type="triangle" w="med" len="med"/>
+          </a:ln>
+          <a:effectLst/>
+        </p:spPr>
+        <p:style>
+          <a:lnRef idx="2">
+            <a:schemeClr val="accent1"/>
+          </a:lnRef>
+          <a:fillRef idx="0">
+            <a:schemeClr val="accent1"/>
+          </a:fillRef>
+          <a:effectRef idx="1">
+            <a:schemeClr val="accent1"/>
+          </a:effectRef>
+          <a:fontRef idx="minor">
+            <a:schemeClr val="tx1"/>
+          </a:fontRef>
+        </p:style>
+      </p:cxnSp>
+      <p:sp>
+        <p:nvSpPr>
+          <p:cNvPr id="12" name="TextBox 11"/>
+          <p:cNvSpPr txBox="1"/>
+          <p:nvPr/>
+        </p:nvSpPr>
+        <p:spPr>
+          <a:xfrm>
+            <a:off x="365760" y="2596896"/>
+            <a:ext cx="2377440" cy="868680"/>
+          </a:xfrm>
+          <a:prstGeom prst="rect">
+            <a:avLst/>
+          </a:prstGeom>
+          <a:noFill/>
+        </p:spPr>
+        <p:txBody>
+          <a:bodyPr wrap="square" lIns="0" rIns="0" tIns="0" bIns="0" anchor="t">
+            <a:spAutoFit/>
+          </a:bodyPr>
+          <a:lstStyle/>
+          <a:p>
+            <a:pPr algn="l">
+              <a:lnSpc>
+                <a:spcPct val="100000"/>
+              </a:lnSpc>
+              <a:spcBef>
+                <a:spcPts val="0"/>
+              </a:spcBef>
+              <a:spcAft>
+                <a:spcPts val="100"/>
+              </a:spcAft>
+            </a:pPr>
+            <a:r>
+              <a:rPr sz="1900" b="1" i="0">
+                <a:solidFill>
+                  <a:srgbClr val="398025"/>
+                </a:solidFill>
+                <a:latin typeface="Georgia"/>
+              </a:rPr>
+              <a:t>$310k / yr</a:t>
+            </a:r>
+          </a:p>
+          <a:p>
+            <a:pPr algn="l">
+              <a:lnSpc>
+                <a:spcPct val="95000"/>
+              </a:lnSpc>
+              <a:spcBef>
+                <a:spcPts val="0"/>
+              </a:spcBef>
+              <a:spcAft>
+                <a:spcPts val="0"/>
+              </a:spcAft>
+            </a:pPr>
+            <a:r>
+              <a:rPr sz="750" b="0" i="0">
+                <a:solidFill>
+                  <a:srgbClr val="727375"/>
+                </a:solidFill>
+                <a:latin typeface="Arial"/>
+              </a:rPr>
+              <a:t>returned in audited savings — every single year</a:t>
+            </a:r>
+          </a:p>
+        </p:txBody>
+      </p:sp>
+      <p:cxnSp>
+        <p:nvCxnSpPr>
+          <p:cNvPr id="13" name="Connector 12"/>
+          <p:cNvCxnSpPr/>
+          <p:nvPr/>
+        </p:nvCxnSpPr>
+        <p:spPr>
+          <a:xfrm>
+            <a:off x="685800" y="3346703"/>
+            <a:ext cx="0" cy="274321"/>
+          </a:xfrm>
+          <a:prstGeom prst="line">
+            <a:avLst/>
+          </a:prstGeom>
+          <a:ln w="12700">
+            <a:solidFill>
+              <a:srgbClr val="BFBFBF"/>
+            </a:solidFill>
+            <a:prstDash val="sysDash"/>
+            <a:tailEnd type="triangle" w="med" len="med"/>
+          </a:ln>
+          <a:effectLst/>
+        </p:spPr>
+        <p:style>
+          <a:lnRef idx="2">
+            <a:schemeClr val="accent1"/>
+          </a:lnRef>
+          <a:fillRef idx="0">
+            <a:schemeClr val="accent1"/>
+          </a:fillRef>
+          <a:effectRef idx="1">
+            <a:schemeClr val="accent1"/>
+          </a:effectRef>
+          <a:fontRef idx="minor">
+            <a:schemeClr val="tx1"/>
+          </a:fontRef>
+        </p:style>
+      </p:cxnSp>
+      <p:sp>
+        <p:nvSpPr>
+          <p:cNvPr id="14" name="TextBox 13"/>
+          <p:cNvSpPr txBox="1"/>
+          <p:nvPr/>
+        </p:nvSpPr>
+        <p:spPr>
+          <a:xfrm>
+            <a:off x="365760" y="3712463"/>
+            <a:ext cx="2377440" cy="868680"/>
+          </a:xfrm>
+          <a:prstGeom prst="rect">
+            <a:avLst/>
+          </a:prstGeom>
+          <a:noFill/>
+        </p:spPr>
+        <p:txBody>
+          <a:bodyPr wrap="square" lIns="0" rIns="0" tIns="0" bIns="0" anchor="t">
+            <a:spAutoFit/>
+          </a:bodyPr>
+          <a:lstStyle/>
+          <a:p>
+            <a:pPr algn="l">
+              <a:lnSpc>
+                <a:spcPct val="100000"/>
+              </a:lnSpc>
+              <a:spcBef>
+                <a:spcPts val="0"/>
+              </a:spcBef>
+              <a:spcAft>
+                <a:spcPts val="100"/>
+              </a:spcAft>
+            </a:pPr>
+            <a:r>
+              <a:rPr sz="1900" b="1" i="0">
+                <a:solidFill>
+                  <a:srgbClr val="1B3E6E"/>
+                </a:solidFill>
+                <a:latin typeface="Georgia"/>
+              </a:rPr>
+              <a:t>+105,000</a:t>
+            </a:r>
+          </a:p>
+          <a:p>
+            <a:pPr algn="l">
+              <a:lnSpc>
+                <a:spcPct val="95000"/>
+              </a:lnSpc>
+              <a:spcBef>
+                <a:spcPts val="0"/>
+              </a:spcBef>
+              <a:spcAft>
+                <a:spcPts val="0"/>
+              </a:spcAft>
+            </a:pPr>
+            <a:r>
+              <a:rPr sz="750" b="0" i="0">
+                <a:solidFill>
+                  <a:srgbClr val="727375"/>
+                </a:solidFill>
+                <a:latin typeface="Arial"/>
+              </a:rPr>
+              <a:t>children fed per year at zero extra cost</a:t>
+            </a:r>
+          </a:p>
+        </p:txBody>
+      </p:sp>
+      <p:cxnSp>
+        <p:nvCxnSpPr>
+          <p:cNvPr id="15" name="Connector 14"/>
+          <p:cNvCxnSpPr/>
+          <p:nvPr/>
+        </p:nvCxnSpPr>
+        <p:spPr>
+          <a:xfrm>
+            <a:off x="685800" y="4462272"/>
+            <a:ext cx="0" cy="274320"/>
+          </a:xfrm>
+          <a:prstGeom prst="line">
+            <a:avLst/>
+          </a:prstGeom>
+          <a:ln w="12700">
+            <a:solidFill>
+              <a:srgbClr val="BFBFBF"/>
+            </a:solidFill>
+            <a:prstDash val="sysDash"/>
+            <a:tailEnd type="triangle" w="med" len="med"/>
+          </a:ln>
+          <a:effectLst/>
+        </p:spPr>
+        <p:style>
+          <a:lnRef idx="2">
+            <a:schemeClr val="accent1"/>
+          </a:lnRef>
+          <a:fillRef idx="0">
+            <a:schemeClr val="accent1"/>
+          </a:fillRef>
+          <a:effectRef idx="1">
+            <a:schemeClr val="accent1"/>
+          </a:effectRef>
+          <a:fontRef idx="minor">
+            <a:schemeClr val="tx1"/>
+          </a:fontRef>
+        </p:style>
+      </p:cxnSp>
+      <p:sp>
+        <p:nvSpPr>
+          <p:cNvPr id="16" name="TextBox 15"/>
+          <p:cNvSpPr txBox="1"/>
+          <p:nvPr/>
+        </p:nvSpPr>
+        <p:spPr>
+          <a:xfrm>
+            <a:off x="365760" y="4828031"/>
+            <a:ext cx="2377440" cy="868680"/>
+          </a:xfrm>
+          <a:prstGeom prst="rect">
+            <a:avLst/>
+          </a:prstGeom>
+          <a:noFill/>
+        </p:spPr>
+        <p:txBody>
+          <a:bodyPr wrap="square" lIns="0" rIns="0" tIns="0" bIns="0" anchor="t">
+            <a:spAutoFit/>
+          </a:bodyPr>
+          <a:lstStyle/>
+          <a:p>
+            <a:pPr algn="l">
+              <a:lnSpc>
+                <a:spcPct val="100000"/>
+              </a:lnSpc>
+              <a:spcBef>
+                <a:spcPts val="0"/>
+              </a:spcBef>
+              <a:spcAft>
+                <a:spcPts val="100"/>
+              </a:spcAft>
+            </a:pPr>
+            <a:r>
+              <a:rPr sz="1600" b="1" i="0">
+                <a:solidFill>
+                  <a:srgbClr val="E08A1E"/>
+                </a:solidFill>
+                <a:latin typeface="Georgia"/>
+              </a:rPr>
+              <a:t>&lt; 10 months</a:t>
+            </a:r>
+          </a:p>
+          <a:p>
+            <a:pPr algn="l">
+              <a:lnSpc>
+                <a:spcPct val="95000"/>
+              </a:lnSpc>
+              <a:spcBef>
+                <a:spcPts val="0"/>
+              </a:spcBef>
+              <a:spcAft>
+                <a:spcPts val="0"/>
+              </a:spcAft>
+            </a:pPr>
+            <a:r>
+              <a:rPr sz="750" b="0" i="0">
+                <a:solidFill>
+                  <a:srgbClr val="727375"/>
+                </a:solidFill>
+                <a:latin typeface="Arial"/>
+              </a:rPr>
+              <a:t>payback on the full grant</a:t>
+            </a:r>
+          </a:p>
+        </p:txBody>
+      </p:sp>
+      <p:sp>
+        <p:nvSpPr>
+          <p:cNvPr id="17" name="Rectangle 16"/>
+          <p:cNvSpPr/>
+          <p:nvPr/>
+        </p:nvSpPr>
+        <p:spPr>
+          <a:xfrm>
+            <a:off x="2880360" y="1463040"/>
+            <a:ext cx="10972" cy="4434840"/>
+          </a:xfrm>
+          <a:prstGeom prst="rect">
+            <a:avLst/>
+          </a:prstGeom>
+          <a:solidFill>
+            <a:srgbClr val="DDDDDD"/>
+          </a:solidFill>
+          <a:ln>
+            <a:noFill/>
+          </a:ln>
+          <a:effectLst/>
+        </p:spPr>
+        <p:style>
+          <a:lnRef idx="1">
+            <a:schemeClr val="accent1"/>
+          </a:lnRef>
+          <a:fillRef idx="3">
+            <a:schemeClr val="accent1"/>
+          </a:fillRef>
+          <a:effectRef idx="2">
+            <a:schemeClr val="accent1"/>
+          </a:effectRef>
+          <a:fontRef idx="minor">
+            <a:schemeClr val="lt1"/>
+          </a:fontRef>
+        </p:style>
+        <p:txBody>
+          <a:bodyPr rtlCol="0" anchor="ctr"/>
+          <a:lstStyle/>
+          <a:p>
+            <a:pPr algn="ctr"/>
+          </a:p>
+        </p:txBody>
+      </p:sp>
+      <p:sp>
+        <p:nvSpPr>
+          <p:cNvPr id="18" name="Oval 17"/>
+          <p:cNvSpPr/>
+          <p:nvPr/>
+        </p:nvSpPr>
+        <p:spPr>
+          <a:xfrm>
+            <a:off x="3154680" y="1444752"/>
+            <a:ext cx="310896" cy="310896"/>
+          </a:xfrm>
+          <a:prstGeom prst="ellipse">
+            <a:avLst/>
+          </a:prstGeom>
+          <a:solidFill>
+            <a:srgbClr val="1B3E6E"/>
+          </a:solidFill>
+          <a:ln>
+            <a:noFill/>
+          </a:ln>
+          <a:effectLst/>
+        </p:spPr>
+        <p:style>
+          <a:lnRef idx="1">
+            <a:schemeClr val="accent1"/>
+          </a:lnRef>
+          <a:fillRef idx="3">
+            <a:schemeClr val="accent1"/>
+          </a:fillRef>
+          <a:effectRef idx="2">
+            <a:schemeClr val="accent1"/>
+          </a:effectRef>
+          <a:fontRef idx="minor">
+            <a:schemeClr val="lt1"/>
+          </a:fontRef>
+        </p:style>
+        <p:txBody>
+          <a:bodyPr rtlCol="0" anchor="ctr"/>
+          <a:lstStyle/>
+          <a:p>
+            <a:pPr algn="ctr"/>
+          </a:p>
+        </p:txBody>
+      </p:sp>
+      <p:sp>
+        <p:nvSpPr>
+          <p:cNvPr id="19" name="TextBox 18"/>
+          <p:cNvSpPr txBox="1"/>
+          <p:nvPr/>
+        </p:nvSpPr>
+        <p:spPr>
+          <a:xfrm>
+            <a:off x="3154680" y="1458468"/>
+            <a:ext cx="310896" cy="274320"/>
+          </a:xfrm>
+          <a:prstGeom prst="rect">
+            <a:avLst/>
+          </a:prstGeom>
+          <a:noFill/>
+        </p:spPr>
+        <p:txBody>
+          <a:bodyPr wrap="square" lIns="0" rIns="0" tIns="0" bIns="0" anchor="ctr">
+            <a:spAutoFit/>
+          </a:bodyPr>
+          <a:lstStyle/>
+          <a:p>
+            <a:pPr algn="ctr">
+              <a:lnSpc>
+                <a:spcPct val="100000"/>
+              </a:lnSpc>
+              <a:spcBef>
+                <a:spcPts val="0"/>
+              </a:spcBef>
+              <a:spcAft>
+                <a:spcPts val="0"/>
+              </a:spcAft>
+            </a:pPr>
+            <a:r>
+              <a:rPr sz="1100" b="1" i="0">
+                <a:solidFill>
+                  <a:srgbClr val="FFFFFF"/>
+                </a:solidFill>
+                <a:latin typeface="Arial"/>
+              </a:rPr>
+              <a:t>1</a:t>
+            </a:r>
+          </a:p>
+        </p:txBody>
+      </p:sp>
+      <p:sp>
+        <p:nvSpPr>
+          <p:cNvPr id="20" name="TextBox 19"/>
+          <p:cNvSpPr txBox="1"/>
+          <p:nvPr/>
+        </p:nvSpPr>
+        <p:spPr>
+          <a:xfrm>
+            <a:off x="3593592" y="1408176"/>
+            <a:ext cx="5184648" cy="566928"/>
+          </a:xfrm>
+          <a:prstGeom prst="rect">
+            <a:avLst/>
+          </a:prstGeom>
+          <a:noFill/>
+        </p:spPr>
+        <p:txBody>
+          <a:bodyPr wrap="square" lIns="0" rIns="0" tIns="0" bIns="0" anchor="t">
+            <a:spAutoFit/>
+          </a:bodyPr>
+          <a:lstStyle/>
+          <a:p>
+            <a:pPr algn="l">
+              <a:lnSpc>
+                <a:spcPct val="100000"/>
+              </a:lnSpc>
+              <a:spcBef>
+                <a:spcPts val="0"/>
+              </a:spcBef>
+              <a:spcAft>
+                <a:spcPts val="100"/>
+              </a:spcAft>
+            </a:pPr>
+            <a:r>
+              <a:rPr sz="950" b="1" i="0">
+                <a:solidFill>
+                  <a:srgbClr val="1B3E6E"/>
+                </a:solidFill>
+                <a:latin typeface="Arial"/>
+              </a:rPr>
+              <a:t>Structural, not sustenance</a:t>
+            </a:r>
+          </a:p>
+          <a:p>
+            <a:pPr algn="l">
+              <a:lnSpc>
+                <a:spcPct val="98000"/>
+              </a:lnSpc>
+              <a:spcBef>
+                <a:spcPts val="0"/>
+              </a:spcBef>
+              <a:spcAft>
+                <a:spcPts val="0"/>
+              </a:spcAft>
+            </a:pPr>
+            <a:r>
+              <a:rPr sz="750" b="0" i="0">
+                <a:solidFill>
+                  <a:srgbClr val="333333"/>
+                </a:solidFill>
+                <a:latin typeface="Arial"/>
+              </a:rPr>
+              <a:t>others fund meals for a year; GS funds the technology that makes every future meal cheaper</a:t>
+            </a:r>
+          </a:p>
+        </p:txBody>
+      </p:sp>
+      <p:sp>
+        <p:nvSpPr>
+          <p:cNvPr id="21" name="Oval 20"/>
+          <p:cNvSpPr/>
+          <p:nvPr/>
+        </p:nvSpPr>
+        <p:spPr>
+          <a:xfrm>
+            <a:off x="3154680" y="2048256"/>
+            <a:ext cx="310896" cy="310896"/>
+          </a:xfrm>
+          <a:prstGeom prst="ellipse">
+            <a:avLst/>
+          </a:prstGeom>
+          <a:solidFill>
+            <a:srgbClr val="1B3E6E"/>
+          </a:solidFill>
+          <a:ln>
+            <a:noFill/>
+          </a:ln>
+          <a:effectLst/>
+        </p:spPr>
+        <p:style>
+          <a:lnRef idx="1">
+            <a:schemeClr val="accent1"/>
+          </a:lnRef>
+          <a:fillRef idx="3">
+            <a:schemeClr val="accent1"/>
+          </a:fillRef>
+          <a:effectRef idx="2">
+            <a:schemeClr val="accent1"/>
+          </a:effectRef>
+          <a:fontRef idx="minor">
+            <a:schemeClr val="lt1"/>
+          </a:fontRef>
+        </p:style>
+        <p:txBody>
+          <a:bodyPr rtlCol="0" anchor="ctr"/>
+          <a:lstStyle/>
+          <a:p>
+            <a:pPr algn="ctr"/>
+          </a:p>
+        </p:txBody>
+      </p:sp>
+      <p:sp>
+        <p:nvSpPr>
+          <p:cNvPr id="22" name="TextBox 21"/>
+          <p:cNvSpPr txBox="1"/>
+          <p:nvPr/>
+        </p:nvSpPr>
+        <p:spPr>
+          <a:xfrm>
+            <a:off x="3154680" y="2061972"/>
+            <a:ext cx="310896" cy="274320"/>
+          </a:xfrm>
+          <a:prstGeom prst="rect">
+            <a:avLst/>
+          </a:prstGeom>
+          <a:noFill/>
+        </p:spPr>
+        <p:txBody>
+          <a:bodyPr wrap="square" lIns="0" rIns="0" tIns="0" bIns="0" anchor="ctr">
+            <a:spAutoFit/>
+          </a:bodyPr>
+          <a:lstStyle/>
+          <a:p>
+            <a:pPr algn="ctr">
+              <a:lnSpc>
+                <a:spcPct val="100000"/>
+              </a:lnSpc>
+              <a:spcBef>
+                <a:spcPts val="0"/>
+              </a:spcBef>
+              <a:spcAft>
+                <a:spcPts val="0"/>
+              </a:spcAft>
+            </a:pPr>
+            <a:r>
+              <a:rPr sz="1100" b="1" i="0">
+                <a:solidFill>
+                  <a:srgbClr val="FFFFFF"/>
+                </a:solidFill>
+                <a:latin typeface="Arial"/>
+              </a:rPr>
+              <a:t>2</a:t>
+            </a:r>
+          </a:p>
+        </p:txBody>
+      </p:sp>
+      <p:sp>
+        <p:nvSpPr>
+          <p:cNvPr id="23" name="TextBox 22"/>
+          <p:cNvSpPr txBox="1"/>
+          <p:nvPr/>
+        </p:nvSpPr>
+        <p:spPr>
+          <a:xfrm>
+            <a:off x="3593592" y="2011680"/>
+            <a:ext cx="5184648" cy="566928"/>
+          </a:xfrm>
+          <a:prstGeom prst="rect">
+            <a:avLst/>
+          </a:prstGeom>
+          <a:noFill/>
+        </p:spPr>
+        <p:txBody>
+          <a:bodyPr wrap="square" lIns="0" rIns="0" tIns="0" bIns="0" anchor="t">
+            <a:spAutoFit/>
+          </a:bodyPr>
+          <a:lstStyle/>
+          <a:p>
+            <a:pPr algn="l">
+              <a:lnSpc>
+                <a:spcPct val="100000"/>
+              </a:lnSpc>
+              <a:spcBef>
+                <a:spcPts val="0"/>
+              </a:spcBef>
+              <a:spcAft>
+                <a:spcPts val="100"/>
+              </a:spcAft>
+            </a:pPr>
+            <a:r>
+              <a:rPr sz="950" b="1" i="0">
+                <a:solidFill>
+                  <a:srgbClr val="1B3E6E"/>
+                </a:solidFill>
+                <a:latin typeface="Arial"/>
+              </a:rPr>
+              <a:t>Plays to GS DNA</a:t>
+            </a:r>
+          </a:p>
+          <a:p>
+            <a:pPr algn="l">
+              <a:lnSpc>
+                <a:spcPct val="98000"/>
+              </a:lnSpc>
+              <a:spcBef>
+                <a:spcPts val="0"/>
+              </a:spcBef>
+              <a:spcAft>
+                <a:spcPts val="0"/>
+              </a:spcAft>
+            </a:pPr>
+            <a:r>
+              <a:rPr sz="750" b="0" i="0">
+                <a:solidFill>
+                  <a:srgbClr val="333333"/>
+                </a:solidFill>
+                <a:latin typeface="Arial"/>
+              </a:rPr>
+              <a:t>forecasting, optimisation &amp; risk controls — GS engineering mentors the build pro bono</a:t>
+            </a:r>
+          </a:p>
+        </p:txBody>
+      </p:sp>
+      <p:sp>
+        <p:nvSpPr>
+          <p:cNvPr id="24" name="Oval 23"/>
+          <p:cNvSpPr/>
+          <p:nvPr/>
+        </p:nvSpPr>
+        <p:spPr>
+          <a:xfrm>
+            <a:off x="3154680" y="2651760"/>
+            <a:ext cx="310896" cy="310896"/>
+          </a:xfrm>
+          <a:prstGeom prst="ellipse">
+            <a:avLst/>
+          </a:prstGeom>
+          <a:solidFill>
+            <a:srgbClr val="3B6EA5"/>
+          </a:solidFill>
+          <a:ln>
+            <a:noFill/>
+          </a:ln>
+          <a:effectLst/>
+        </p:spPr>
+        <p:style>
+          <a:lnRef idx="1">
+            <a:schemeClr val="accent1"/>
+          </a:lnRef>
+          <a:fillRef idx="3">
+            <a:schemeClr val="accent1"/>
+          </a:fillRef>
+          <a:effectRef idx="2">
+            <a:schemeClr val="accent1"/>
+          </a:effectRef>
+          <a:fontRef idx="minor">
+            <a:schemeClr val="lt1"/>
+          </a:fontRef>
+        </p:style>
+        <p:txBody>
+          <a:bodyPr rtlCol="0" anchor="ctr"/>
+          <a:lstStyle/>
+          <a:p>
+            <a:pPr algn="ctr"/>
+          </a:p>
+        </p:txBody>
+      </p:sp>
+      <p:sp>
+        <p:nvSpPr>
+          <p:cNvPr id="25" name="TextBox 24"/>
+          <p:cNvSpPr txBox="1"/>
+          <p:nvPr/>
+        </p:nvSpPr>
+        <p:spPr>
+          <a:xfrm>
+            <a:off x="3154680" y="2665476"/>
+            <a:ext cx="310896" cy="274320"/>
+          </a:xfrm>
+          <a:prstGeom prst="rect">
+            <a:avLst/>
+          </a:prstGeom>
+          <a:noFill/>
+        </p:spPr>
+        <p:txBody>
+          <a:bodyPr wrap="square" lIns="0" rIns="0" tIns="0" bIns="0" anchor="ctr">
+            <a:spAutoFit/>
+          </a:bodyPr>
+          <a:lstStyle/>
+          <a:p>
+            <a:pPr algn="ctr">
+              <a:lnSpc>
+                <a:spcPct val="100000"/>
+              </a:lnSpc>
+              <a:spcBef>
+                <a:spcPts val="0"/>
+              </a:spcBef>
+              <a:spcAft>
+                <a:spcPts val="0"/>
+              </a:spcAft>
+            </a:pPr>
+            <a:r>
+              <a:rPr sz="1100" b="1" i="0">
+                <a:solidFill>
+                  <a:srgbClr val="FFFFFF"/>
+                </a:solidFill>
+                <a:latin typeface="Arial"/>
+              </a:rPr>
+              <a:t>3</a:t>
+            </a:r>
+          </a:p>
+        </p:txBody>
+      </p:sp>
+      <p:sp>
+        <p:nvSpPr>
+          <p:cNvPr id="26" name="TextBox 25"/>
+          <p:cNvSpPr txBox="1"/>
+          <p:nvPr/>
+        </p:nvSpPr>
+        <p:spPr>
+          <a:xfrm>
+            <a:off x="3593592" y="2615184"/>
+            <a:ext cx="5184648" cy="566928"/>
+          </a:xfrm>
+          <a:prstGeom prst="rect">
+            <a:avLst/>
+          </a:prstGeom>
+          <a:noFill/>
+        </p:spPr>
+        <p:txBody>
+          <a:bodyPr wrap="square" lIns="0" rIns="0" tIns="0" bIns="0" anchor="t">
+            <a:spAutoFit/>
+          </a:bodyPr>
+          <a:lstStyle/>
+          <a:p>
+            <a:pPr algn="l">
+              <a:lnSpc>
+                <a:spcPct val="100000"/>
+              </a:lnSpc>
+              <a:spcBef>
+                <a:spcPts val="0"/>
+              </a:spcBef>
+              <a:spcAft>
+                <a:spcPts val="100"/>
+              </a:spcAft>
+            </a:pPr>
+            <a:r>
+              <a:rPr sz="950" b="1" i="0">
+                <a:solidFill>
+                  <a:srgbClr val="1B3E6E"/>
+                </a:solidFill>
+                <a:latin typeface="Arial"/>
+              </a:rPr>
+              <a:t>Measurable ROI</a:t>
+            </a:r>
+          </a:p>
+          <a:p>
+            <a:pPr algn="l">
+              <a:lnSpc>
+                <a:spcPct val="98000"/>
+              </a:lnSpc>
+              <a:spcBef>
+                <a:spcPts val="0"/>
+              </a:spcBef>
+              <a:spcAft>
+                <a:spcPts val="0"/>
+              </a:spcAft>
+            </a:pPr>
+            <a:r>
+              <a:rPr sz="750" b="0" i="0">
+                <a:solidFill>
+                  <a:srgbClr val="333333"/>
+                </a:solidFill>
+                <a:latin typeface="Arial"/>
+              </a:rPr>
+              <a:t>$310k/yr audited savings; KPI dashboard shared quarterly with GS</a:t>
+            </a:r>
+          </a:p>
+        </p:txBody>
+      </p:sp>
+      <p:sp>
+        <p:nvSpPr>
+          <p:cNvPr id="27" name="Oval 26"/>
+          <p:cNvSpPr/>
+          <p:nvPr/>
+        </p:nvSpPr>
+        <p:spPr>
+          <a:xfrm>
+            <a:off x="3154680" y="3255264"/>
+            <a:ext cx="310896" cy="310896"/>
+          </a:xfrm>
+          <a:prstGeom prst="ellipse">
+            <a:avLst/>
+          </a:prstGeom>
+          <a:solidFill>
+            <a:srgbClr val="3B6EA5"/>
+          </a:solidFill>
+          <a:ln>
+            <a:noFill/>
+          </a:ln>
+          <a:effectLst/>
+        </p:spPr>
+        <p:style>
+          <a:lnRef idx="1">
+            <a:schemeClr val="accent1"/>
+          </a:lnRef>
+          <a:fillRef idx="3">
+            <a:schemeClr val="accent1"/>
+          </a:fillRef>
+          <a:effectRef idx="2">
+            <a:schemeClr val="accent1"/>
+          </a:effectRef>
+          <a:fontRef idx="minor">
+            <a:schemeClr val="lt1"/>
+          </a:fontRef>
+        </p:style>
+        <p:txBody>
+          <a:bodyPr rtlCol="0" anchor="ctr"/>
+          <a:lstStyle/>
+          <a:p>
+            <a:pPr algn="ctr"/>
+          </a:p>
+        </p:txBody>
+      </p:sp>
+      <p:sp>
+        <p:nvSpPr>
+          <p:cNvPr id="28" name="TextBox 27"/>
+          <p:cNvSpPr txBox="1"/>
+          <p:nvPr/>
+        </p:nvSpPr>
+        <p:spPr>
+          <a:xfrm>
+            <a:off x="3154680" y="3268980"/>
+            <a:ext cx="310896" cy="274320"/>
+          </a:xfrm>
+          <a:prstGeom prst="rect">
+            <a:avLst/>
+          </a:prstGeom>
+          <a:noFill/>
+        </p:spPr>
+        <p:txBody>
+          <a:bodyPr wrap="square" lIns="0" rIns="0" tIns="0" bIns="0" anchor="ctr">
+            <a:spAutoFit/>
+          </a:bodyPr>
+          <a:lstStyle/>
+          <a:p>
+            <a:pPr algn="ctr">
+              <a:lnSpc>
+                <a:spcPct val="100000"/>
+              </a:lnSpc>
+              <a:spcBef>
+                <a:spcPts val="0"/>
+              </a:spcBef>
+              <a:spcAft>
+                <a:spcPts val="0"/>
+              </a:spcAft>
+            </a:pPr>
+            <a:r>
+              <a:rPr sz="1100" b="1" i="0">
+                <a:solidFill>
+                  <a:srgbClr val="FFFFFF"/>
+                </a:solidFill>
+                <a:latin typeface="Arial"/>
+              </a:rPr>
+              <a:t>4</a:t>
+            </a:r>
+          </a:p>
+        </p:txBody>
+      </p:sp>
+      <p:sp>
+        <p:nvSpPr>
+          <p:cNvPr id="29" name="TextBox 28"/>
+          <p:cNvSpPr txBox="1"/>
+          <p:nvPr/>
+        </p:nvSpPr>
+        <p:spPr>
+          <a:xfrm>
+            <a:off x="3593592" y="3218688"/>
+            <a:ext cx="5184648" cy="566928"/>
+          </a:xfrm>
+          <a:prstGeom prst="rect">
+            <a:avLst/>
+          </a:prstGeom>
+          <a:noFill/>
+        </p:spPr>
+        <p:txBody>
+          <a:bodyPr wrap="square" lIns="0" rIns="0" tIns="0" bIns="0" anchor="t">
+            <a:spAutoFit/>
+          </a:bodyPr>
+          <a:lstStyle/>
+          <a:p>
+            <a:pPr algn="l">
+              <a:lnSpc>
+                <a:spcPct val="100000"/>
+              </a:lnSpc>
+              <a:spcBef>
+                <a:spcPts val="0"/>
+              </a:spcBef>
+              <a:spcAft>
+                <a:spcPts val="100"/>
+              </a:spcAft>
+            </a:pPr>
+            <a:r>
+              <a:rPr sz="950" b="1" i="0">
+                <a:solidFill>
+                  <a:srgbClr val="1B3E6E"/>
+                </a:solidFill>
+                <a:latin typeface="Arial"/>
+              </a:rPr>
+              <a:t>Scalable blueprint</a:t>
+            </a:r>
+          </a:p>
+          <a:p>
+            <a:pPr algn="l">
+              <a:lnSpc>
+                <a:spcPct val="98000"/>
+              </a:lnSpc>
+              <a:spcBef>
+                <a:spcPts val="0"/>
+              </a:spcBef>
+              <a:spcAft>
+                <a:spcPts val="0"/>
+              </a:spcAft>
+            </a:pPr>
+            <a:r>
+              <a:rPr sz="750" b="0" i="0">
+                <a:solidFill>
+                  <a:srgbClr val="333333"/>
+                </a:solidFill>
+                <a:latin typeface="Arial"/>
+              </a:rPr>
+              <a:t>proven once, extends to school-feeding programmes across South Asia &amp; Africa</a:t>
+            </a:r>
+          </a:p>
+        </p:txBody>
+      </p:sp>
+      <p:sp>
+        <p:nvSpPr>
+          <p:cNvPr id="30" name="TextBox 29"/>
+          <p:cNvSpPr txBox="1"/>
+          <p:nvPr/>
+        </p:nvSpPr>
+        <p:spPr>
+          <a:xfrm>
+            <a:off x="3154680" y="3950208"/>
+            <a:ext cx="5623559" cy="219456"/>
+          </a:xfrm>
+          <a:prstGeom prst="rect">
+            <a:avLst/>
+          </a:prstGeom>
+          <a:noFill/>
+        </p:spPr>
+        <p:txBody>
+          <a:bodyPr wrap="square" lIns="0" rIns="0" tIns="0" bIns="0" anchor="t">
+            <a:spAutoFit/>
+          </a:bodyPr>
+          <a:lstStyle/>
+          <a:p>
+            <a:pPr algn="l">
+              <a:lnSpc>
+                <a:spcPct val="100000"/>
+              </a:lnSpc>
+              <a:spcBef>
+                <a:spcPts val="0"/>
+              </a:spcBef>
+              <a:spcAft>
+                <a:spcPts val="0"/>
+              </a:spcAft>
+            </a:pPr>
+            <a:r>
+              <a:rPr sz="900" b="1" i="0">
+                <a:solidFill>
+                  <a:srgbClr val="1B3E6E"/>
+                </a:solidFill>
+                <a:latin typeface="Arial"/>
+              </a:rPr>
+              <a:t>A typical $250k grant  vs  this proposal</a:t>
+            </a:r>
+          </a:p>
+        </p:txBody>
+      </p:sp>
+      <p:sp>
+        <p:nvSpPr>
+          <p:cNvPr id="31" name="Rectangle 30"/>
+          <p:cNvSpPr/>
+          <p:nvPr/>
+        </p:nvSpPr>
+        <p:spPr>
+          <a:xfrm>
+            <a:off x="3154680" y="4498848"/>
+            <a:ext cx="5623559" cy="9144"/>
+          </a:xfrm>
+          <a:prstGeom prst="rect">
+            <a:avLst/>
+          </a:prstGeom>
+          <a:solidFill>
+            <a:srgbClr val="E5E5E5"/>
+          </a:solidFill>
+          <a:ln>
+            <a:noFill/>
+          </a:ln>
+          <a:effectLst/>
+        </p:spPr>
+        <p:style>
+          <a:lnRef idx="1">
+            <a:schemeClr val="accent1"/>
+          </a:lnRef>
+          <a:fillRef idx="3">
+            <a:schemeClr val="accent1"/>
+          </a:fillRef>
+          <a:effectRef idx="2">
+            <a:schemeClr val="accent1"/>
+          </a:effectRef>
+          <a:fontRef idx="minor">
+            <a:schemeClr val="lt1"/>
+          </a:fontRef>
+        </p:style>
+        <p:txBody>
+          <a:bodyPr rtlCol="0" anchor="ctr"/>
+          <a:lstStyle/>
+          <a:p>
+            <a:pPr algn="ctr"/>
+          </a:p>
+        </p:txBody>
+      </p:sp>
+      <p:sp>
+        <p:nvSpPr>
+          <p:cNvPr id="32" name="TextBox 31"/>
+          <p:cNvSpPr txBox="1"/>
+          <p:nvPr/>
+        </p:nvSpPr>
+        <p:spPr>
+          <a:xfrm>
+            <a:off x="3154680" y="4242816"/>
+            <a:ext cx="2586837" cy="256032"/>
+          </a:xfrm>
+          <a:prstGeom prst="rect">
+            <a:avLst/>
+          </a:prstGeom>
+          <a:noFill/>
+        </p:spPr>
+        <p:txBody>
+          <a:bodyPr wrap="square" lIns="0" rIns="0" tIns="0" bIns="0" anchor="t">
+            <a:spAutoFit/>
+          </a:bodyPr>
+          <a:lstStyle/>
+          <a:p>
+            <a:pPr algn="l">
+              <a:lnSpc>
+                <a:spcPct val="100000"/>
+              </a:lnSpc>
+              <a:spcBef>
+                <a:spcPts val="0"/>
+              </a:spcBef>
+              <a:spcAft>
+                <a:spcPts val="0"/>
+              </a:spcAft>
+            </a:pPr>
+            <a:r>
+              <a:rPr sz="730" b="0" i="0">
+                <a:solidFill>
+                  <a:srgbClr val="727375"/>
+                </a:solidFill>
+                <a:latin typeface="Arial"/>
+              </a:rPr>
+              <a:t>Feeds children for ~1 year</a:t>
+            </a:r>
+          </a:p>
+        </p:txBody>
+      </p:sp>
+      <p:sp>
+        <p:nvSpPr>
+          <p:cNvPr id="33" name="TextBox 32"/>
+          <p:cNvSpPr txBox="1"/>
+          <p:nvPr/>
+        </p:nvSpPr>
+        <p:spPr>
+          <a:xfrm>
+            <a:off x="5966460" y="4242816"/>
+            <a:ext cx="2811779" cy="256032"/>
+          </a:xfrm>
+          <a:prstGeom prst="rect">
+            <a:avLst/>
+          </a:prstGeom>
+          <a:noFill/>
+        </p:spPr>
+        <p:txBody>
+          <a:bodyPr wrap="square" lIns="0" rIns="0" tIns="0" bIns="0" anchor="t">
+            <a:spAutoFit/>
+          </a:bodyPr>
+          <a:lstStyle/>
+          <a:p>
+            <a:pPr algn="l">
+              <a:lnSpc>
+                <a:spcPct val="100000"/>
+              </a:lnSpc>
+              <a:spcBef>
+                <a:spcPts val="0"/>
+              </a:spcBef>
+              <a:spcAft>
+                <a:spcPts val="0"/>
+              </a:spcAft>
+            </a:pPr>
+            <a:r>
+              <a:rPr sz="730" b="1" i="0">
+                <a:solidFill>
+                  <a:srgbClr val="1B3E6E"/>
+                </a:solidFill>
+                <a:latin typeface="Arial"/>
+              </a:rPr>
+              <a:t>✓  Feeds 105,000 more children — every year</a:t>
+            </a:r>
+          </a:p>
+        </p:txBody>
+      </p:sp>
+      <p:sp>
+        <p:nvSpPr>
+          <p:cNvPr id="34" name="Rectangle 33"/>
+          <p:cNvSpPr/>
+          <p:nvPr/>
+        </p:nvSpPr>
+        <p:spPr>
+          <a:xfrm>
+            <a:off x="3154680" y="4828032"/>
+            <a:ext cx="5623559" cy="9144"/>
+          </a:xfrm>
+          <a:prstGeom prst="rect">
+            <a:avLst/>
+          </a:prstGeom>
+          <a:solidFill>
+            <a:srgbClr val="E5E5E5"/>
+          </a:solidFill>
+          <a:ln>
+            <a:noFill/>
+          </a:ln>
+          <a:effectLst/>
+        </p:spPr>
+        <p:style>
+          <a:lnRef idx="1">
+            <a:schemeClr val="accent1"/>
+          </a:lnRef>
+          <a:fillRef idx="3">
+            <a:schemeClr val="accent1"/>
+          </a:fillRef>
+          <a:effectRef idx="2">
+            <a:schemeClr val="accent1"/>
+          </a:effectRef>
+          <a:fontRef idx="minor">
+            <a:schemeClr val="lt1"/>
+          </a:fontRef>
+        </p:style>
+        <p:txBody>
+          <a:bodyPr rtlCol="0" anchor="ctr"/>
+          <a:lstStyle/>
+          <a:p>
+            <a:pPr algn="ctr"/>
+          </a:p>
+        </p:txBody>
+      </p:sp>
+      <p:sp>
+        <p:nvSpPr>
+          <p:cNvPr id="35" name="TextBox 34"/>
+          <p:cNvSpPr txBox="1"/>
+          <p:nvPr/>
+        </p:nvSpPr>
+        <p:spPr>
+          <a:xfrm>
+            <a:off x="3154680" y="4572000"/>
+            <a:ext cx="2586837" cy="256032"/>
+          </a:xfrm>
+          <a:prstGeom prst="rect">
+            <a:avLst/>
+          </a:prstGeom>
+          <a:noFill/>
+        </p:spPr>
+        <p:txBody>
+          <a:bodyPr wrap="square" lIns="0" rIns="0" tIns="0" bIns="0" anchor="t">
+            <a:spAutoFit/>
+          </a:bodyPr>
+          <a:lstStyle/>
+          <a:p>
+            <a:pPr algn="l">
+              <a:lnSpc>
+                <a:spcPct val="100000"/>
+              </a:lnSpc>
+              <a:spcBef>
+                <a:spcPts val="0"/>
+              </a:spcBef>
+              <a:spcAft>
+                <a:spcPts val="0"/>
+              </a:spcAft>
+            </a:pPr>
+            <a:r>
+              <a:rPr sz="730" b="0" i="0">
+                <a:solidFill>
+                  <a:srgbClr val="727375"/>
+                </a:solidFill>
+                <a:latin typeface="Arial"/>
+              </a:rPr>
+              <a:t>Impact ends when funds end</a:t>
+            </a:r>
+          </a:p>
+        </p:txBody>
+      </p:sp>
+      <p:sp>
+        <p:nvSpPr>
+          <p:cNvPr id="36" name="TextBox 35"/>
+          <p:cNvSpPr txBox="1"/>
+          <p:nvPr/>
+        </p:nvSpPr>
+        <p:spPr>
+          <a:xfrm>
+            <a:off x="5966460" y="4572000"/>
+            <a:ext cx="2811779" cy="256032"/>
+          </a:xfrm>
+          <a:prstGeom prst="rect">
+            <a:avLst/>
+          </a:prstGeom>
+          <a:noFill/>
+        </p:spPr>
+        <p:txBody>
+          <a:bodyPr wrap="square" lIns="0" rIns="0" tIns="0" bIns="0" anchor="t">
+            <a:spAutoFit/>
+          </a:bodyPr>
+          <a:lstStyle/>
+          <a:p>
+            <a:pPr algn="l">
+              <a:lnSpc>
+                <a:spcPct val="100000"/>
+              </a:lnSpc>
+              <a:spcBef>
+                <a:spcPts val="0"/>
+              </a:spcBef>
+              <a:spcAft>
+                <a:spcPts val="0"/>
+              </a:spcAft>
+            </a:pPr>
+            <a:r>
+              <a:rPr sz="730" b="1" i="0">
+                <a:solidFill>
+                  <a:srgbClr val="1B3E6E"/>
+                </a:solidFill>
+                <a:latin typeface="Arial"/>
+              </a:rPr>
+              <a:t>✓  Savings outlive the cheque: 1.24x returned / yr</a:t>
+            </a:r>
+          </a:p>
+        </p:txBody>
+      </p:sp>
+      <p:sp>
+        <p:nvSpPr>
+          <p:cNvPr id="37" name="Rectangle 36"/>
+          <p:cNvSpPr/>
+          <p:nvPr/>
+        </p:nvSpPr>
+        <p:spPr>
+          <a:xfrm>
+            <a:off x="3154680" y="5157216"/>
+            <a:ext cx="5623559" cy="9144"/>
+          </a:xfrm>
+          <a:prstGeom prst="rect">
+            <a:avLst/>
+          </a:prstGeom>
+          <a:solidFill>
+            <a:srgbClr val="E5E5E5"/>
+          </a:solidFill>
+          <a:ln>
+            <a:noFill/>
+          </a:ln>
+          <a:effectLst/>
+        </p:spPr>
+        <p:style>
+          <a:lnRef idx="1">
+            <a:schemeClr val="accent1"/>
+          </a:lnRef>
+          <a:fillRef idx="3">
+            <a:schemeClr val="accent1"/>
+          </a:fillRef>
+          <a:effectRef idx="2">
+            <a:schemeClr val="accent1"/>
+          </a:effectRef>
+          <a:fontRef idx="minor">
+            <a:schemeClr val="lt1"/>
+          </a:fontRef>
+        </p:style>
+        <p:txBody>
+          <a:bodyPr rtlCol="0" anchor="ctr"/>
+          <a:lstStyle/>
+          <a:p>
+            <a:pPr algn="ctr"/>
+          </a:p>
+        </p:txBody>
+      </p:sp>
+      <p:sp>
+        <p:nvSpPr>
+          <p:cNvPr id="38" name="TextBox 37"/>
+          <p:cNvSpPr txBox="1"/>
+          <p:nvPr/>
+        </p:nvSpPr>
+        <p:spPr>
+          <a:xfrm>
+            <a:off x="3154680" y="4901184"/>
+            <a:ext cx="2586837" cy="256032"/>
+          </a:xfrm>
+          <a:prstGeom prst="rect">
+            <a:avLst/>
+          </a:prstGeom>
+          <a:noFill/>
+        </p:spPr>
+        <p:txBody>
+          <a:bodyPr wrap="square" lIns="0" rIns="0" tIns="0" bIns="0" anchor="t">
+            <a:spAutoFit/>
+          </a:bodyPr>
+          <a:lstStyle/>
+          <a:p>
+            <a:pPr algn="l">
+              <a:lnSpc>
+                <a:spcPct val="100000"/>
+              </a:lnSpc>
+              <a:spcBef>
+                <a:spcPts val="0"/>
+              </a:spcBef>
+              <a:spcAft>
+                <a:spcPts val="0"/>
+              </a:spcAft>
+            </a:pPr>
+            <a:r>
+              <a:rPr sz="730" b="0" i="0">
+                <a:solidFill>
+                  <a:srgbClr val="727375"/>
+                </a:solidFill>
+                <a:latin typeface="Arial"/>
+              </a:rPr>
+              <a:t>Comes back for renewal next year</a:t>
+            </a:r>
+          </a:p>
+        </p:txBody>
+      </p:sp>
+      <p:sp>
+        <p:nvSpPr>
+          <p:cNvPr id="39" name="TextBox 38"/>
+          <p:cNvSpPr txBox="1"/>
+          <p:nvPr/>
+        </p:nvSpPr>
+        <p:spPr>
+          <a:xfrm>
+            <a:off x="5966460" y="4901184"/>
+            <a:ext cx="2811779" cy="256032"/>
+          </a:xfrm>
+          <a:prstGeom prst="rect">
+            <a:avLst/>
+          </a:prstGeom>
+          <a:noFill/>
+        </p:spPr>
+        <p:txBody>
+          <a:bodyPr wrap="square" lIns="0" rIns="0" tIns="0" bIns="0" anchor="t">
+            <a:spAutoFit/>
+          </a:bodyPr>
+          <a:lstStyle/>
+          <a:p>
+            <a:pPr algn="l">
+              <a:lnSpc>
+                <a:spcPct val="100000"/>
+              </a:lnSpc>
+              <a:spcBef>
+                <a:spcPts val="0"/>
+              </a:spcBef>
+              <a:spcAft>
+                <a:spcPts val="0"/>
+              </a:spcAft>
+            </a:pPr>
+            <a:r>
+              <a:rPr sz="730" b="1" i="0">
+                <a:solidFill>
+                  <a:srgbClr val="1B3E6E"/>
+                </a:solidFill>
+                <a:latin typeface="Arial"/>
+              </a:rPr>
+              <a:t>✓  Self-funding flywheel from month 10</a:t>
+            </a:r>
+          </a:p>
+        </p:txBody>
+      </p:sp>
+      <p:sp>
+        <p:nvSpPr>
+          <p:cNvPr id="40" name="TextBox 39"/>
+          <p:cNvSpPr txBox="1"/>
+          <p:nvPr/>
+        </p:nvSpPr>
+        <p:spPr>
+          <a:xfrm>
+            <a:off x="3154680" y="5266944"/>
+            <a:ext cx="5623559" cy="548640"/>
+          </a:xfrm>
+          <a:prstGeom prst="rect">
+            <a:avLst/>
+          </a:prstGeom>
+          <a:noFill/>
+        </p:spPr>
+        <p:txBody>
+          <a:bodyPr wrap="square" lIns="0" rIns="0" tIns="0" bIns="0" anchor="t">
+            <a:spAutoFit/>
+          </a:bodyPr>
+          <a:lstStyle/>
+          <a:p>
+            <a:pPr algn="l">
+              <a:lnSpc>
+                <a:spcPct val="100000"/>
+              </a:lnSpc>
+              <a:spcBef>
+                <a:spcPts val="0"/>
+              </a:spcBef>
+              <a:spcAft>
+                <a:spcPts val="100"/>
+              </a:spcAft>
+            </a:pPr>
+            <a:r>
+              <a:rPr sz="730" b="0" i="1">
+                <a:solidFill>
+                  <a:srgbClr val="333333"/>
+                </a:solidFill>
+                <a:latin typeface="Arial"/>
+              </a:rPr>
+              <a:t>“The mid-day meal was the reason I stayed in school. Today I manage portfolios instead of an empty stomach.”  </a:t>
+            </a:r>
+          </a:p>
+          <a:p>
+            <a:pPr algn="l">
+              <a:lnSpc>
+                <a:spcPct val="100000"/>
+              </a:lnSpc>
+              <a:spcBef>
+                <a:spcPts val="0"/>
+              </a:spcBef>
+              <a:spcAft>
+                <a:spcPts val="0"/>
+              </a:spcAft>
+            </a:pPr>
+            <a:r>
+              <a:rPr sz="700" b="1" i="0">
+                <a:solidFill>
+                  <a:srgbClr val="1B3E6E"/>
+                </a:solidFill>
+                <a:latin typeface="Arial"/>
+              </a:rPr>
+              <a:t>— Krishna Kumar, </a:t>
+            </a:r>
+            <a:r>
+              <a:rPr sz="700" b="0" i="0">
+                <a:solidFill>
+                  <a:srgbClr val="727375"/>
+                </a:solidFill>
+                <a:latin typeface="Arial"/>
+              </a:rPr>
+              <a:t>AVP, HSBC — former mid-day meal beneficiary</a:t>
+            </a:r>
+          </a:p>
+        </p:txBody>
+      </p:sp>
+    </p:spTree>
+  </p:cSld>
+  <p:clrMapOvr>
+    <a:masterClrMapping/>
+  </p:clrMapOvr>
+</p:sld>
+</file>
+
+<file path=ppt/slides/slide9.xml><?xml version="1.0" encoding="utf-8"?>
+<p:sld xmlns:a="http://schemas.openxmlformats.org/drawingml/2006/main" xmlns:p="http://schemas.openxmlformats.org/presentationml/2006/main" xmlns:r="http://schemas.openxmlformats.org/officeDocument/2006/relationships">
+  <p:cSld>
+    <p:spTree>
+      <p:nvGrpSpPr>
+        <p:cNvPr id="1" name=""/>
+        <p:cNvGrpSpPr/>
+        <p:nvPr/>
+      </p:nvGrpSpPr>
+      <p:grpSpPr/>
+      <p:sp>
+        <p:nvSpPr>
+          <p:cNvPr id="2" name="Rectangle 1"/>
+          <p:cNvSpPr/>
+          <p:nvPr/>
+        </p:nvSpPr>
+        <p:spPr>
+          <a:xfrm>
+            <a:off x="365760" y="274320"/>
+            <a:ext cx="8412480" cy="23774"/>
+          </a:xfrm>
+          <a:prstGeom prst="rect">
+            <a:avLst/>
+          </a:prstGeom>
+          <a:solidFill>
+            <a:srgbClr val="1B3E6E"/>
+          </a:solidFill>
+          <a:ln>
+            <a:noFill/>
+          </a:ln>
+          <a:effectLst/>
+        </p:spPr>
+        <p:style>
+          <a:lnRef idx="1">
+            <a:schemeClr val="accent1"/>
+          </a:lnRef>
+          <a:fillRef idx="3">
+            <a:schemeClr val="accent1"/>
+          </a:fillRef>
+          <a:effectRef idx="2">
+            <a:schemeClr val="accent1"/>
+          </a:effectRef>
+          <a:fontRef idx="minor">
+            <a:schemeClr val="lt1"/>
+          </a:fontRef>
+        </p:style>
+        <p:txBody>
+          <a:bodyPr rtlCol="0" anchor="ctr"/>
+          <a:lstStyle/>
+          <a:p>
+            <a:pPr algn="ctr"/>
+          </a:p>
+        </p:txBody>
+      </p:sp>
+      <p:sp>
+        <p:nvSpPr>
+          <p:cNvPr id="3" name="TextBox 2"/>
+          <p:cNvSpPr txBox="1"/>
+          <p:nvPr/>
+        </p:nvSpPr>
+        <p:spPr>
+          <a:xfrm>
+            <a:off x="365760" y="365760"/>
+            <a:ext cx="8412480" cy="457200"/>
+          </a:xfrm>
+          <a:prstGeom prst="rect">
+            <a:avLst/>
+          </a:prstGeom>
+          <a:noFill/>
+        </p:spPr>
+        <p:txBody>
+          <a:bodyPr wrap="square" lIns="0" rIns="0" tIns="0" bIns="0" anchor="t">
+            <a:spAutoFit/>
+          </a:bodyPr>
+          <a:lstStyle/>
+          <a:p>
+            <a:pPr algn="l">
+              <a:lnSpc>
+                <a:spcPct val="100000"/>
+              </a:lnSpc>
+              <a:spcBef>
+                <a:spcPts val="0"/>
+              </a:spcBef>
+              <a:spcAft>
+                <a:spcPts val="0"/>
+              </a:spcAft>
+            </a:pPr>
+            <a:r>
+              <a:rPr sz="2000" b="0" i="0">
+                <a:solidFill>
+                  <a:srgbClr val="1B3E6E"/>
+                </a:solidFill>
+                <a:latin typeface="Georgia"/>
+              </a:rPr>
+              <a:t>Conclusion — why Akshaya Patra, and why this proposal wins</a:t>
+            </a:r>
+          </a:p>
+        </p:txBody>
+      </p:sp>
+      <p:sp>
+        <p:nvSpPr>
+          <p:cNvPr id="4" name="TextBox 3"/>
+          <p:cNvSpPr txBox="1"/>
+          <p:nvPr/>
+        </p:nvSpPr>
+        <p:spPr>
+          <a:xfrm>
+            <a:off x="365760" y="822960"/>
+            <a:ext cx="8412480" cy="438912"/>
+          </a:xfrm>
+          <a:prstGeom prst="rect">
+            <a:avLst/>
+          </a:prstGeom>
+          <a:noFill/>
+        </p:spPr>
+        <p:txBody>
+          <a:bodyPr wrap="square" lIns="0" rIns="0" tIns="0" bIns="0" anchor="t">
+            <a:spAutoFit/>
+          </a:bodyPr>
+          <a:lstStyle/>
+          <a:p>
+            <a:pPr algn="l">
+              <a:lnSpc>
+                <a:spcPct val="100000"/>
+              </a:lnSpc>
+              <a:spcBef>
+                <a:spcPts val="0"/>
+              </a:spcBef>
+              <a:spcAft>
+                <a:spcPts val="0"/>
+              </a:spcAft>
+            </a:pPr>
+            <a:r>
+              <a:rPr sz="1050" b="0" i="0">
+                <a:solidFill>
+                  <a:srgbClr val="333333"/>
+                </a:solidFill>
+                <a:latin typeface="Arial"/>
+              </a:rPr>
+              <a:t>A proven engine of social mobility, a grant that compounds instead of depletes, and a partnership only Goldman Sachs can power.</a:t>
+            </a:r>
+          </a:p>
+        </p:txBody>
+      </p:sp>
+      <p:sp>
+        <p:nvSpPr>
+          <p:cNvPr id="5" name="Rectangle 4"/>
+          <p:cNvSpPr/>
+          <p:nvPr/>
+        </p:nvSpPr>
+        <p:spPr>
+          <a:xfrm>
+            <a:off x="502920" y="6071616"/>
+            <a:ext cx="8138159" cy="365760"/>
+          </a:xfrm>
+          <a:prstGeom prst="rect">
+            <a:avLst/>
+          </a:prstGeom>
+          <a:solidFill>
+            <a:srgbClr val="D9D9D9"/>
+          </a:solidFill>
+          <a:ln>
+            <a:noFill/>
+          </a:ln>
+          <a:effectLst/>
+        </p:spPr>
+        <p:style>
+          <a:lnRef idx="1">
+            <a:schemeClr val="accent1"/>
+          </a:lnRef>
+          <a:fillRef idx="3">
+            <a:schemeClr val="accent1"/>
+          </a:fillRef>
+          <a:effectRef idx="2">
+            <a:schemeClr val="accent1"/>
+          </a:effectRef>
+          <a:fontRef idx="minor">
+            <a:schemeClr val="lt1"/>
+          </a:fontRef>
+        </p:style>
+        <p:txBody>
+          <a:bodyPr rtlCol="0" anchor="ctr"/>
+          <a:lstStyle/>
+          <a:p>
+            <a:pPr algn="ctr"/>
+          </a:p>
+        </p:txBody>
+      </p:sp>
+      <p:sp>
+        <p:nvSpPr>
+          <p:cNvPr id="6" name="TextBox 5"/>
+          <p:cNvSpPr txBox="1"/>
+          <p:nvPr/>
+        </p:nvSpPr>
+        <p:spPr>
+          <a:xfrm>
+            <a:off x="640080" y="6071616"/>
+            <a:ext cx="7863840" cy="365760"/>
+          </a:xfrm>
+          <a:prstGeom prst="rect">
+            <a:avLst/>
+          </a:prstGeom>
+          <a:noFill/>
+        </p:spPr>
+        <p:txBody>
+          <a:bodyPr wrap="square" lIns="0" rIns="0" tIns="0" bIns="0" anchor="ctr">
+            <a:spAutoFit/>
+          </a:bodyPr>
+          <a:lstStyle/>
+          <a:p>
+            <a:pPr algn="ctr">
+              <a:lnSpc>
+                <a:spcPct val="95000"/>
+              </a:lnSpc>
+              <a:spcBef>
+                <a:spcPts val="0"/>
+              </a:spcBef>
+              <a:spcAft>
+                <a:spcPts val="0"/>
+              </a:spcAft>
+            </a:pPr>
+            <a:r>
+              <a:rPr sz="1100" b="1" i="0">
+                <a:solidFill>
+                  <a:srgbClr val="1B3E6E"/>
+                </a:solidFill>
+                <a:latin typeface="Georgia"/>
+              </a:rPr>
+              <a:t>$250k that doesn't feed children for a year — it upgrades the engine that feeds them forever.</a:t>
+            </a:r>
+          </a:p>
+        </p:txBody>
+      </p:sp>
+      <p:sp>
+        <p:nvSpPr>
+          <p:cNvPr id="7" name="TextBox 6"/>
+          <p:cNvSpPr txBox="1"/>
+          <p:nvPr/>
+        </p:nvSpPr>
+        <p:spPr>
+          <a:xfrm>
+            <a:off x="365760" y="6492240"/>
+            <a:ext cx="1280160" cy="329184"/>
+          </a:xfrm>
+          <a:prstGeom prst="rect">
+            <a:avLst/>
+          </a:prstGeom>
+          <a:noFill/>
+        </p:spPr>
+        <p:txBody>
+          <a:bodyPr wrap="square" lIns="0" rIns="0" tIns="0" bIns="0" anchor="t">
+            <a:spAutoFit/>
+          </a:bodyPr>
+          <a:lstStyle/>
+          <a:p>
+            <a:pPr algn="l">
+              <a:lnSpc>
+                <a:spcPct val="90000"/>
+              </a:lnSpc>
+              <a:spcBef>
+                <a:spcPts val="0"/>
+              </a:spcBef>
+              <a:spcAft>
+                <a:spcPts val="0"/>
+              </a:spcAft>
+            </a:pPr>
+            <a:r>
+              <a:rPr sz="900" b="1" i="0">
+                <a:solidFill>
+                  <a:srgbClr val="111111"/>
+                </a:solidFill>
+                <a:latin typeface="Georgia"/>
+              </a:rPr>
+              <a:t>Goldman</a:t>
+            </a:r>
+          </a:p>
+          <a:p>
+            <a:pPr algn="l">
+              <a:lnSpc>
+                <a:spcPct val="90000"/>
+              </a:lnSpc>
+              <a:spcBef>
+                <a:spcPts val="0"/>
+              </a:spcBef>
+              <a:spcAft>
+                <a:spcPts val="0"/>
+              </a:spcAft>
+            </a:pPr>
+            <a:r>
+              <a:rPr sz="900" b="1" i="0">
+                <a:solidFill>
+                  <a:srgbClr val="111111"/>
+                </a:solidFill>
+                <a:latin typeface="Georgia"/>
+              </a:rPr>
+              <a:t>Sachs</a:t>
+            </a:r>
+          </a:p>
+        </p:txBody>
+      </p:sp>
+      <p:sp>
+        <p:nvSpPr>
+          <p:cNvPr id="8" name="TextBox 7"/>
+          <p:cNvSpPr txBox="1"/>
+          <p:nvPr/>
+        </p:nvSpPr>
+        <p:spPr>
+          <a:xfrm>
+            <a:off x="8321040" y="6528816"/>
+            <a:ext cx="457200" cy="274320"/>
+          </a:xfrm>
+          <a:prstGeom prst="rect">
+            <a:avLst/>
+          </a:prstGeom>
+          <a:noFill/>
+        </p:spPr>
+        <p:txBody>
+          <a:bodyPr wrap="square" lIns="0" rIns="0" tIns="0" bIns="0" anchor="t">
+            <a:spAutoFit/>
+          </a:bodyPr>
+          <a:lstStyle/>
+          <a:p>
+            <a:pPr algn="r">
+              <a:lnSpc>
+                <a:spcPct val="100000"/>
+              </a:lnSpc>
+              <a:spcBef>
+                <a:spcPts val="0"/>
+              </a:spcBef>
+              <a:spcAft>
+                <a:spcPts val="300"/>
+              </a:spcAft>
+            </a:pPr>
+            <a:r>
+              <a:rPr sz="900" b="0" i="0">
+                <a:solidFill>
+                  <a:srgbClr val="727375"/>
+                </a:solidFill>
+                <a:latin typeface="Arial"/>
+              </a:rPr>
+              <a:t>9</a:t>
+            </a:r>
+          </a:p>
+        </p:txBody>
+      </p:sp>
+      <p:sp>
+        <p:nvSpPr>
+          <p:cNvPr id="9" name="TextBox 8"/>
+          <p:cNvSpPr txBox="1"/>
+          <p:nvPr/>
+        </p:nvSpPr>
+        <p:spPr>
+          <a:xfrm>
+            <a:off x="5486400" y="54864"/>
+            <a:ext cx="3291840" cy="182880"/>
+          </a:xfrm>
+          <a:prstGeom prst="rect">
+            <a:avLst/>
+          </a:prstGeom>
+          <a:noFill/>
+        </p:spPr>
+        <p:txBody>
+          <a:bodyPr wrap="square" lIns="0" rIns="0" tIns="0" bIns="0" anchor="t">
+            <a:spAutoFit/>
+          </a:bodyPr>
+          <a:lstStyle/>
+          <a:p>
+            <a:pPr algn="r">
+              <a:lnSpc>
+                <a:spcPct val="100000"/>
+              </a:lnSpc>
+              <a:spcBef>
+                <a:spcPts val="0"/>
+              </a:spcBef>
+              <a:spcAft>
+                <a:spcPts val="0"/>
+              </a:spcAft>
+            </a:pPr>
+            <a:r>
+              <a:rPr sz="750" b="0" i="1">
+                <a:solidFill>
+                  <a:srgbClr val="727375"/>
+                </a:solidFill>
+                <a:latin typeface="Arial"/>
+              </a:rPr>
+              <a:t>LAYOUT OPTION C — timeline narrative</a:t>
+            </a:r>
+          </a:p>
+        </p:txBody>
+      </p:sp>
+      <p:sp>
+        <p:nvSpPr>
+          <p:cNvPr id="10" name="TextBox 9"/>
+          <p:cNvSpPr txBox="1"/>
+          <p:nvPr/>
+        </p:nvSpPr>
+        <p:spPr>
+          <a:xfrm>
+            <a:off x="365760" y="1417320"/>
+            <a:ext cx="2697480" cy="1874519"/>
+          </a:xfrm>
+          <a:prstGeom prst="rect">
+            <a:avLst/>
+          </a:prstGeom>
+          <a:noFill/>
+        </p:spPr>
+        <p:txBody>
+          <a:bodyPr wrap="square" lIns="0" rIns="0" tIns="0" bIns="0" anchor="t">
+            <a:spAutoFit/>
+          </a:bodyPr>
+          <a:lstStyle/>
+          <a:p>
+            <a:pPr algn="l">
+              <a:lnSpc>
+                <a:spcPct val="100000"/>
+              </a:lnSpc>
+              <a:spcBef>
+                <a:spcPts val="0"/>
+              </a:spcBef>
+              <a:spcAft>
+                <a:spcPts val="300"/>
+              </a:spcAft>
+            </a:pPr>
+            <a:r>
+              <a:rPr sz="950" b="1" i="0">
+                <a:solidFill>
+                  <a:srgbClr val="1B3E6E"/>
+                </a:solidFill>
+                <a:latin typeface="Arial"/>
+              </a:rPr>
+              <a:t>Two decades of delivery</a:t>
+            </a:r>
+          </a:p>
+          <a:p>
+            <a:pPr algn="l">
+              <a:lnSpc>
+                <a:spcPct val="98000"/>
+              </a:lnSpc>
+              <a:spcBef>
+                <a:spcPts val="0"/>
+              </a:spcBef>
+              <a:spcAft>
+                <a:spcPts val="150"/>
+              </a:spcAft>
+            </a:pPr>
+            <a:r>
+              <a:rPr sz="720" b="0" i="0">
+                <a:solidFill>
+                  <a:srgbClr val="333333"/>
+                </a:solidFill>
+                <a:latin typeface="Arial"/>
+              </a:rPr>
+              <a:t>•  Padma Shri (2016) — Chairman Madhu Pandit Dasa</a:t>
+            </a:r>
+          </a:p>
+          <a:p>
+            <a:pPr algn="l">
+              <a:lnSpc>
+                <a:spcPct val="98000"/>
+              </a:lnSpc>
+              <a:spcBef>
+                <a:spcPts val="0"/>
+              </a:spcBef>
+              <a:spcAft>
+                <a:spcPts val="150"/>
+              </a:spcAft>
+            </a:pPr>
+            <a:r>
+              <a:rPr sz="720" b="0" i="0">
+                <a:solidFill>
+                  <a:srgbClr val="333333"/>
+                </a:solidFill>
+                <a:latin typeface="Arial"/>
+              </a:rPr>
+              <a:t>•  World's largest NGO school-lunch programme — global record</a:t>
+            </a:r>
+          </a:p>
+          <a:p>
+            <a:pPr algn="l">
+              <a:lnSpc>
+                <a:spcPct val="98000"/>
+              </a:lnSpc>
+              <a:spcBef>
+                <a:spcPts val="0"/>
+              </a:spcBef>
+              <a:spcAft>
+                <a:spcPts val="150"/>
+              </a:spcAft>
+            </a:pPr>
+            <a:r>
+              <a:rPr sz="720" b="0" i="0">
+                <a:solidFill>
+                  <a:srgbClr val="333333"/>
+                </a:solidFill>
+                <a:latin typeface="Arial"/>
+              </a:rPr>
+              <a:t>•  4-billionth meal celebrated with Hon'ble PM of India</a:t>
+            </a:r>
+          </a:p>
+          <a:p>
+            <a:pPr algn="l">
+              <a:lnSpc>
+                <a:spcPct val="98000"/>
+              </a:lnSpc>
+              <a:spcBef>
+                <a:spcPts val="0"/>
+              </a:spcBef>
+              <a:spcAft>
+                <a:spcPts val="0"/>
+              </a:spcAft>
+            </a:pPr>
+            <a:r>
+              <a:rPr sz="700" b="0" i="1">
+                <a:solidFill>
+                  <a:srgbClr val="333333"/>
+                </a:solidFill>
+                <a:latin typeface="Arial"/>
+              </a:rPr>
+              <a:t>“…I manage portfolios instead of an empty stomach.” </a:t>
+            </a:r>
+            <a:r>
+              <a:rPr sz="700" b="1" i="1">
+                <a:solidFill>
+                  <a:srgbClr val="727375"/>
+                </a:solidFill>
+                <a:latin typeface="Arial"/>
+              </a:rPr>
+              <a:t>— Krishna Kumar, AVP HSBC, beneficiary</a:t>
+            </a:r>
+          </a:p>
+        </p:txBody>
+      </p:sp>
+      <p:sp>
+        <p:nvSpPr>
+          <p:cNvPr id="11" name="Rounded Rectangle 10"/>
+          <p:cNvSpPr/>
+          <p:nvPr/>
+        </p:nvSpPr>
+        <p:spPr>
+          <a:xfrm>
+            <a:off x="3246120" y="1417320"/>
+            <a:ext cx="2697480" cy="1847088"/>
+          </a:xfrm>
+          <a:prstGeom prst="roundRect">
+            <a:avLst>
+              <a:gd name="adj" fmla="val 6000"/>
+            </a:avLst>
+          </a:prstGeom>
+          <a:solidFill>
+            <a:srgbClr val="1B3E6E"/>
+          </a:solidFill>
+          <a:ln>
+            <a:noFill/>
+          </a:ln>
+          <a:effectLst/>
+        </p:spPr>
+        <p:style>
+          <a:lnRef idx="1">
+            <a:schemeClr val="accent1"/>
+          </a:lnRef>
+          <a:fillRef idx="3">
+            <a:schemeClr val="accent1"/>
+          </a:fillRef>
+          <a:effectRef idx="2">
+            <a:schemeClr val="accent1"/>
+          </a:effectRef>
+          <a:fontRef idx="minor">
+            <a:schemeClr val="lt1"/>
+          </a:fontRef>
+        </p:style>
+        <p:txBody>
+          <a:bodyPr rtlCol="0" anchor="ctr"/>
+          <a:lstStyle/>
+          <a:p>
+            <a:pPr algn="ctr"/>
+          </a:p>
+        </p:txBody>
+      </p:sp>
+      <p:sp>
+        <p:nvSpPr>
+          <p:cNvPr id="12" name="TextBox 11"/>
+          <p:cNvSpPr txBox="1"/>
+          <p:nvPr/>
+        </p:nvSpPr>
+        <p:spPr>
+          <a:xfrm>
+            <a:off x="3392424" y="1536192"/>
+            <a:ext cx="2404872" cy="1645920"/>
+          </a:xfrm>
+          <a:prstGeom prst="rect">
+            <a:avLst/>
+          </a:prstGeom>
+          <a:noFill/>
+        </p:spPr>
+        <p:txBody>
+          <a:bodyPr wrap="square" lIns="0" rIns="0" tIns="0" bIns="0" anchor="t">
+            <a:spAutoFit/>
+          </a:bodyPr>
+          <a:lstStyle/>
+          <a:p>
+            <a:pPr algn="ctr">
+              <a:lnSpc>
+                <a:spcPct val="100000"/>
+              </a:lnSpc>
+              <a:spcBef>
+                <a:spcPts val="0"/>
+              </a:spcBef>
+              <a:spcAft>
+                <a:spcPts val="200"/>
+              </a:spcAft>
+            </a:pPr>
+            <a:r>
+              <a:rPr sz="2000" b="1" i="0">
+                <a:solidFill>
+                  <a:srgbClr val="FFFFFF"/>
+                </a:solidFill>
+                <a:latin typeface="Georgia"/>
+              </a:rPr>
+              <a:t>$250,000</a:t>
+            </a:r>
+          </a:p>
+          <a:p>
+            <a:pPr algn="ctr">
+              <a:lnSpc>
+                <a:spcPct val="100000"/>
+              </a:lnSpc>
+              <a:spcBef>
+                <a:spcPts val="0"/>
+              </a:spcBef>
+              <a:spcAft>
+                <a:spcPts val="400"/>
+              </a:spcAft>
+            </a:pPr>
+            <a:r>
+              <a:rPr sz="750" b="0" i="0">
+                <a:solidFill>
+                  <a:srgbClr val="FFFFFF"/>
+                </a:solidFill>
+                <a:latin typeface="Arial"/>
+              </a:rPr>
+              <a:t>over 12 months · milestone-based tranches</a:t>
+            </a:r>
+          </a:p>
+          <a:p>
+            <a:pPr algn="l">
+              <a:lnSpc>
+                <a:spcPct val="100000"/>
+              </a:lnSpc>
+              <a:spcBef>
+                <a:spcPts val="0"/>
+              </a:spcBef>
+              <a:spcAft>
+                <a:spcPts val="150"/>
+              </a:spcAft>
+            </a:pPr>
+            <a:r>
+              <a:rPr sz="720" b="0" i="0">
+                <a:solidFill>
+                  <a:srgbClr val="FFFFFF"/>
+                </a:solidFill>
+                <a:latin typeface="Arial"/>
+              </a:rPr>
+              <a:t>•  Joint GS–AP steering committee</a:t>
+            </a:r>
+          </a:p>
+          <a:p>
+            <a:pPr algn="l">
+              <a:lnSpc>
+                <a:spcPct val="100000"/>
+              </a:lnSpc>
+              <a:spcBef>
+                <a:spcPts val="0"/>
+              </a:spcBef>
+              <a:spcAft>
+                <a:spcPts val="150"/>
+              </a:spcAft>
+            </a:pPr>
+            <a:r>
+              <a:rPr sz="720" b="0" i="0">
+                <a:solidFill>
+                  <a:srgbClr val="FFFFFF"/>
+                </a:solidFill>
+                <a:latin typeface="Arial"/>
+              </a:rPr>
+              <a:t>•  Quarterly KPI reviews with GS</a:t>
+            </a:r>
+          </a:p>
+          <a:p>
+            <a:pPr algn="l">
+              <a:lnSpc>
+                <a:spcPct val="100000"/>
+              </a:lnSpc>
+              <a:spcBef>
+                <a:spcPts val="0"/>
+              </a:spcBef>
+              <a:spcAft>
+                <a:spcPts val="150"/>
+              </a:spcAft>
+            </a:pPr>
+            <a:r>
+              <a:rPr sz="720" b="0" i="0">
+                <a:solidFill>
+                  <a:srgbClr val="FFFFFF"/>
+                </a:solidFill>
+                <a:latin typeface="Arial"/>
+              </a:rPr>
+              <a:t>•  Independent waste &amp; delivery audits</a:t>
+            </a:r>
+          </a:p>
+          <a:p>
+            <a:pPr algn="l">
+              <a:lnSpc>
+                <a:spcPct val="100000"/>
+              </a:lnSpc>
+              <a:spcBef>
+                <a:spcPts val="0"/>
+              </a:spcBef>
+              <a:spcAft>
+                <a:spcPts val="0"/>
+              </a:spcAft>
+            </a:pPr>
+            <a:r>
+              <a:rPr sz="720" b="0" i="0">
+                <a:solidFill>
+                  <a:srgbClr val="FFFFFF"/>
+                </a:solidFill>
+                <a:latin typeface="Arial"/>
+              </a:rPr>
+              <a:t>•  GS volunteering &amp; engineering mentorship</a:t>
+            </a:r>
+          </a:p>
+        </p:txBody>
+      </p:sp>
+      <p:sp>
+        <p:nvSpPr>
+          <p:cNvPr id="13" name="TextBox 12"/>
+          <p:cNvSpPr txBox="1"/>
+          <p:nvPr/>
+        </p:nvSpPr>
+        <p:spPr>
+          <a:xfrm>
+            <a:off x="6126480" y="1417320"/>
+            <a:ext cx="2697480" cy="1874519"/>
+          </a:xfrm>
+          <a:prstGeom prst="rect">
+            <a:avLst/>
+          </a:prstGeom>
+          <a:noFill/>
+        </p:spPr>
+        <p:txBody>
+          <a:bodyPr wrap="square" lIns="0" rIns="0" tIns="0" bIns="0" anchor="t">
+            <a:spAutoFit/>
+          </a:bodyPr>
+          <a:lstStyle/>
+          <a:p>
+            <a:pPr algn="l">
+              <a:lnSpc>
+                <a:spcPct val="100000"/>
+              </a:lnSpc>
+              <a:spcBef>
+                <a:spcPts val="0"/>
+              </a:spcBef>
+              <a:spcAft>
+                <a:spcPts val="300"/>
+              </a:spcAft>
+            </a:pPr>
+            <a:r>
+              <a:rPr sz="950" b="1" i="0">
+                <a:solidFill>
+                  <a:srgbClr val="1B3E6E"/>
+                </a:solidFill>
+                <a:latin typeface="Arial"/>
+              </a:rPr>
+              <a:t>What compounds after Year 1</a:t>
+            </a:r>
+          </a:p>
+          <a:p>
+            <a:pPr algn="l">
+              <a:lnSpc>
+                <a:spcPct val="98000"/>
+              </a:lnSpc>
+              <a:spcBef>
+                <a:spcPts val="0"/>
+              </a:spcBef>
+              <a:spcAft>
+                <a:spcPts val="150"/>
+              </a:spcAft>
+            </a:pPr>
+            <a:r>
+              <a:rPr sz="740" b="1" i="0">
+                <a:solidFill>
+                  <a:srgbClr val="398025"/>
+                </a:solidFill>
+                <a:latin typeface="Arial"/>
+              </a:rPr>
+              <a:t>$310k/yr </a:t>
+            </a:r>
+            <a:r>
+              <a:rPr sz="740" b="0" i="0">
+                <a:solidFill>
+                  <a:srgbClr val="333333"/>
+                </a:solidFill>
+                <a:latin typeface="Arial"/>
+              </a:rPr>
+              <a:t>audited savings — every year, in perpetuity</a:t>
+            </a:r>
+          </a:p>
+          <a:p>
+            <a:pPr algn="l">
+              <a:lnSpc>
+                <a:spcPct val="98000"/>
+              </a:lnSpc>
+              <a:spcBef>
+                <a:spcPts val="0"/>
+              </a:spcBef>
+              <a:spcAft>
+                <a:spcPts val="150"/>
+              </a:spcAft>
+            </a:pPr>
+            <a:r>
+              <a:rPr sz="740" b="1" i="0">
+                <a:solidFill>
+                  <a:srgbClr val="398025"/>
+                </a:solidFill>
+                <a:latin typeface="Arial"/>
+              </a:rPr>
+              <a:t>+105,000 </a:t>
+            </a:r>
+            <a:r>
+              <a:rPr sz="740" b="0" i="0">
+                <a:solidFill>
+                  <a:srgbClr val="333333"/>
+                </a:solidFill>
+                <a:latin typeface="Arial"/>
+              </a:rPr>
+              <a:t>children fed annually at zero extra donor cost</a:t>
+            </a:r>
+          </a:p>
+          <a:p>
+            <a:pPr algn="l">
+              <a:lnSpc>
+                <a:spcPct val="98000"/>
+              </a:lnSpc>
+              <a:spcBef>
+                <a:spcPts val="0"/>
+              </a:spcBef>
+              <a:spcAft>
+                <a:spcPts val="150"/>
+              </a:spcAft>
+            </a:pPr>
+            <a:r>
+              <a:rPr sz="740" b="1" i="0">
+                <a:solidFill>
+                  <a:srgbClr val="398025"/>
+                </a:solidFill>
+                <a:latin typeface="Arial"/>
+              </a:rPr>
+              <a:t>~70% </a:t>
+            </a:r>
+            <a:r>
+              <a:rPr sz="740" b="0" i="0">
+                <a:solidFill>
+                  <a:srgbClr val="333333"/>
+                </a:solidFill>
+                <a:latin typeface="Arial"/>
+              </a:rPr>
+              <a:t>less food waste; 99%+ on-time delivery</a:t>
+            </a:r>
+          </a:p>
+          <a:p>
+            <a:pPr algn="l">
+              <a:lnSpc>
+                <a:spcPct val="98000"/>
+              </a:lnSpc>
+              <a:spcBef>
+                <a:spcPts val="0"/>
+              </a:spcBef>
+              <a:spcAft>
+                <a:spcPts val="0"/>
+              </a:spcAft>
+            </a:pPr>
+            <a:r>
+              <a:rPr sz="740" b="1" i="0">
+                <a:solidFill>
+                  <a:srgbClr val="398025"/>
+                </a:solidFill>
+                <a:latin typeface="Arial"/>
+              </a:rPr>
+              <a:t>Blueprint </a:t>
+            </a:r>
+            <a:r>
+              <a:rPr sz="740" b="0" i="0">
+                <a:solidFill>
+                  <a:srgbClr val="333333"/>
+                </a:solidFill>
+                <a:latin typeface="Arial"/>
+              </a:rPr>
+              <a:t>extends to school-feeding programmes across South Asia &amp; Africa</a:t>
+            </a:r>
+          </a:p>
+        </p:txBody>
+      </p:sp>
+      <p:sp>
+        <p:nvSpPr>
+          <p:cNvPr id="14" name="Right Arrow 13"/>
+          <p:cNvSpPr/>
+          <p:nvPr/>
+        </p:nvSpPr>
+        <p:spPr>
+          <a:xfrm>
+            <a:off x="365760" y="3456432"/>
+            <a:ext cx="8412480" cy="310896"/>
+          </a:xfrm>
+          <a:prstGeom prst="rightArrow">
+            <a:avLst>
+              <a:gd name="adj1" fmla="val 55000"/>
+              <a:gd name="adj2" fmla="val 4500"/>
+            </a:avLst>
+          </a:prstGeom>
+          <a:solidFill>
+            <a:srgbClr val="DCE6F1"/>
+          </a:solidFill>
+          <a:ln>
+            <a:noFill/>
+          </a:ln>
+          <a:effectLst/>
+        </p:spPr>
+        <p:style>
+          <a:lnRef idx="1">
+            <a:schemeClr val="accent1"/>
+          </a:lnRef>
+          <a:fillRef idx="3">
+            <a:schemeClr val="accent1"/>
+          </a:fillRef>
+          <a:effectRef idx="2">
+            <a:schemeClr val="accent1"/>
+          </a:effectRef>
+          <a:fontRef idx="minor">
+            <a:schemeClr val="lt1"/>
+          </a:fontRef>
+        </p:style>
+        <p:txBody>
+          <a:bodyPr rtlCol="0" anchor="ctr"/>
+          <a:lstStyle/>
+          <a:p>
+            <a:pPr algn="ctr"/>
+          </a:p>
+        </p:txBody>
+      </p:sp>
+      <p:sp>
+        <p:nvSpPr>
+          <p:cNvPr id="15" name="TextBox 14"/>
+          <p:cNvSpPr txBox="1"/>
+          <p:nvPr/>
+        </p:nvSpPr>
+        <p:spPr>
+          <a:xfrm>
+            <a:off x="365760" y="3506724"/>
+            <a:ext cx="2697480" cy="219456"/>
+          </a:xfrm>
+          <a:prstGeom prst="rect">
+            <a:avLst/>
+          </a:prstGeom>
+          <a:noFill/>
+        </p:spPr>
+        <p:txBody>
+          <a:bodyPr wrap="square" lIns="0" rIns="0" tIns="0" bIns="0" anchor="t">
+            <a:spAutoFit/>
+          </a:bodyPr>
+          <a:lstStyle/>
+          <a:p>
+            <a:pPr algn="ctr">
+              <a:lnSpc>
+                <a:spcPct val="100000"/>
+              </a:lnSpc>
+              <a:spcBef>
+                <a:spcPts val="0"/>
+              </a:spcBef>
+              <a:spcAft>
+                <a:spcPts val="0"/>
+              </a:spcAft>
+            </a:pPr>
+            <a:r>
+              <a:rPr sz="850" b="1" i="0">
+                <a:solidFill>
+                  <a:srgbClr val="E08A1E"/>
+                </a:solidFill>
+                <a:latin typeface="Arial"/>
+              </a:rPr>
+              <a:t>PROVEN PAST</a:t>
+            </a:r>
+          </a:p>
+        </p:txBody>
+      </p:sp>
+      <p:sp>
+        <p:nvSpPr>
+          <p:cNvPr id="16" name="TextBox 15"/>
+          <p:cNvSpPr txBox="1"/>
+          <p:nvPr/>
+        </p:nvSpPr>
+        <p:spPr>
+          <a:xfrm>
+            <a:off x="3246120" y="3506724"/>
+            <a:ext cx="2697480" cy="219456"/>
+          </a:xfrm>
+          <a:prstGeom prst="rect">
+            <a:avLst/>
+          </a:prstGeom>
+          <a:noFill/>
+        </p:spPr>
+        <p:txBody>
+          <a:bodyPr wrap="square" lIns="0" rIns="0" tIns="0" bIns="0" anchor="t">
+            <a:spAutoFit/>
+          </a:bodyPr>
+          <a:lstStyle/>
+          <a:p>
+            <a:pPr algn="ctr">
+              <a:lnSpc>
+                <a:spcPct val="100000"/>
+              </a:lnSpc>
+              <a:spcBef>
+                <a:spcPts val="0"/>
+              </a:spcBef>
+              <a:spcAft>
+                <a:spcPts val="0"/>
+              </a:spcAft>
+            </a:pPr>
+            <a:r>
+              <a:rPr sz="850" b="1" i="0">
+                <a:solidFill>
+                  <a:srgbClr val="1B3E6E"/>
+                </a:solidFill>
+                <a:latin typeface="Arial"/>
+              </a:rPr>
+              <a:t>THE ASK — TODAY</a:t>
+            </a:r>
+          </a:p>
+        </p:txBody>
+      </p:sp>
+      <p:sp>
+        <p:nvSpPr>
+          <p:cNvPr id="17" name="TextBox 16"/>
+          <p:cNvSpPr txBox="1"/>
+          <p:nvPr/>
+        </p:nvSpPr>
+        <p:spPr>
+          <a:xfrm>
+            <a:off x="6126480" y="3506724"/>
+            <a:ext cx="2697480" cy="219456"/>
+          </a:xfrm>
+          <a:prstGeom prst="rect">
+            <a:avLst/>
+          </a:prstGeom>
+          <a:noFill/>
+        </p:spPr>
+        <p:txBody>
+          <a:bodyPr wrap="square" lIns="0" rIns="0" tIns="0" bIns="0" anchor="t">
+            <a:spAutoFit/>
+          </a:bodyPr>
+          <a:lstStyle/>
+          <a:p>
+            <a:pPr algn="ctr">
+              <a:lnSpc>
+                <a:spcPct val="100000"/>
+              </a:lnSpc>
+              <a:spcBef>
+                <a:spcPts val="0"/>
+              </a:spcBef>
+              <a:spcAft>
+                <a:spcPts val="0"/>
+              </a:spcAft>
+            </a:pPr>
+            <a:r>
+              <a:rPr sz="850" b="1" i="0">
+                <a:solidFill>
+                  <a:srgbClr val="398025"/>
+                </a:solidFill>
+                <a:latin typeface="Arial"/>
+              </a:rPr>
+              <a:t>COMPOUNDING FUTURE</a:t>
+            </a:r>
+          </a:p>
+        </p:txBody>
+      </p:sp>
+      <p:sp>
+        <p:nvSpPr>
+          <p:cNvPr id="18" name="Rectangle 17"/>
+          <p:cNvSpPr/>
+          <p:nvPr/>
+        </p:nvSpPr>
+        <p:spPr>
+          <a:xfrm>
+            <a:off x="1199692" y="3858768"/>
+            <a:ext cx="14630" cy="164592"/>
+          </a:xfrm>
+          <a:prstGeom prst="rect">
+            <a:avLst/>
+          </a:prstGeom>
+          <a:solidFill>
+            <a:srgbClr val="727375"/>
+          </a:solidFill>
+          <a:ln>
+            <a:noFill/>
+          </a:ln>
+          <a:effectLst/>
+        </p:spPr>
+        <p:style>
+          <a:lnRef idx="1">
+            <a:schemeClr val="accent1"/>
+          </a:lnRef>
+          <a:fillRef idx="3">
+            <a:schemeClr val="accent1"/>
+          </a:fillRef>
+          <a:effectRef idx="2">
+            <a:schemeClr val="accent1"/>
+          </a:effectRef>
+          <a:fontRef idx="minor">
+            <a:schemeClr val="lt1"/>
+          </a:fontRef>
+        </p:style>
+        <p:txBody>
+          <a:bodyPr rtlCol="0" anchor="ctr"/>
+          <a:lstStyle/>
+          <a:p>
+            <a:pPr algn="ctr"/>
+          </a:p>
+        </p:txBody>
+      </p:sp>
+      <p:sp>
+        <p:nvSpPr>
+          <p:cNvPr id="19" name="TextBox 18"/>
+          <p:cNvSpPr txBox="1"/>
+          <p:nvPr/>
+        </p:nvSpPr>
+        <p:spPr>
+          <a:xfrm>
+            <a:off x="411480" y="4059936"/>
+            <a:ext cx="1591055" cy="548640"/>
+          </a:xfrm>
+          <a:prstGeom prst="rect">
+            <a:avLst/>
+          </a:prstGeom>
+          <a:noFill/>
+        </p:spPr>
+        <p:txBody>
+          <a:bodyPr wrap="square" lIns="0" rIns="0" tIns="0" bIns="0" anchor="t">
+            <a:spAutoFit/>
+          </a:bodyPr>
+          <a:lstStyle/>
+          <a:p>
+            <a:pPr algn="ctr">
+              <a:lnSpc>
+                <a:spcPct val="100000"/>
+              </a:lnSpc>
+              <a:spcBef>
+                <a:spcPts val="0"/>
+              </a:spcBef>
+              <a:spcAft>
+                <a:spcPts val="100"/>
+              </a:spcAft>
+            </a:pPr>
+            <a:r>
+              <a:rPr sz="850" b="1" i="0">
+                <a:solidFill>
+                  <a:srgbClr val="1B3E6E"/>
+                </a:solidFill>
+                <a:latin typeface="Arial"/>
+              </a:rPr>
+              <a:t>Mo 0</a:t>
+            </a:r>
+          </a:p>
+          <a:p>
+            <a:pPr algn="ctr">
+              <a:lnSpc>
+                <a:spcPct val="92000"/>
+              </a:lnSpc>
+              <a:spcBef>
+                <a:spcPts val="0"/>
+              </a:spcBef>
+              <a:spcAft>
+                <a:spcPts val="0"/>
+              </a:spcAft>
+            </a:pPr>
+            <a:r>
+              <a:rPr sz="680" b="0" i="0">
+                <a:solidFill>
+                  <a:srgbClr val="727375"/>
+                </a:solidFill>
+                <a:latin typeface="Arial"/>
+              </a:rPr>
+              <a:t>grant signed</a:t>
+            </a:r>
+          </a:p>
+        </p:txBody>
+      </p:sp>
+      <p:sp>
+        <p:nvSpPr>
+          <p:cNvPr id="20" name="Rectangle 19"/>
+          <p:cNvSpPr/>
+          <p:nvPr/>
+        </p:nvSpPr>
+        <p:spPr>
+          <a:xfrm>
+            <a:off x="2882188" y="3858768"/>
+            <a:ext cx="14630" cy="164592"/>
+          </a:xfrm>
+          <a:prstGeom prst="rect">
+            <a:avLst/>
+          </a:prstGeom>
+          <a:solidFill>
+            <a:srgbClr val="727375"/>
+          </a:solidFill>
+          <a:ln>
+            <a:noFill/>
+          </a:ln>
+          <a:effectLst/>
+        </p:spPr>
+        <p:style>
+          <a:lnRef idx="1">
+            <a:schemeClr val="accent1"/>
+          </a:lnRef>
+          <a:fillRef idx="3">
+            <a:schemeClr val="accent1"/>
+          </a:fillRef>
+          <a:effectRef idx="2">
+            <a:schemeClr val="accent1"/>
+          </a:effectRef>
+          <a:fontRef idx="minor">
+            <a:schemeClr val="lt1"/>
+          </a:fontRef>
+        </p:style>
+        <p:txBody>
+          <a:bodyPr rtlCol="0" anchor="ctr"/>
+          <a:lstStyle/>
+          <a:p>
+            <a:pPr algn="ctr"/>
+          </a:p>
+        </p:txBody>
+      </p:sp>
+      <p:sp>
+        <p:nvSpPr>
+          <p:cNvPr id="21" name="TextBox 20"/>
+          <p:cNvSpPr txBox="1"/>
+          <p:nvPr/>
+        </p:nvSpPr>
+        <p:spPr>
+          <a:xfrm>
+            <a:off x="2093975" y="4059936"/>
+            <a:ext cx="1591055" cy="548640"/>
+          </a:xfrm>
+          <a:prstGeom prst="rect">
+            <a:avLst/>
+          </a:prstGeom>
+          <a:noFill/>
+        </p:spPr>
+        <p:txBody>
+          <a:bodyPr wrap="square" lIns="0" rIns="0" tIns="0" bIns="0" anchor="t">
+            <a:spAutoFit/>
+          </a:bodyPr>
+          <a:lstStyle/>
+          <a:p>
+            <a:pPr algn="ctr">
+              <a:lnSpc>
+                <a:spcPct val="100000"/>
+              </a:lnSpc>
+              <a:spcBef>
+                <a:spcPts val="0"/>
+              </a:spcBef>
+              <a:spcAft>
+                <a:spcPts val="100"/>
+              </a:spcAft>
+            </a:pPr>
+            <a:r>
+              <a:rPr sz="850" b="1" i="0">
+                <a:solidFill>
+                  <a:srgbClr val="1B3E6E"/>
+                </a:solidFill>
+                <a:latin typeface="Arial"/>
+              </a:rPr>
+              <a:t>Mo 4</a:t>
+            </a:r>
+          </a:p>
+          <a:p>
+            <a:pPr algn="ctr">
+              <a:lnSpc>
+                <a:spcPct val="92000"/>
+              </a:lnSpc>
+              <a:spcBef>
+                <a:spcPts val="0"/>
+              </a:spcBef>
+              <a:spcAft>
+                <a:spcPts val="0"/>
+              </a:spcAft>
+            </a:pPr>
+            <a:r>
+              <a:rPr sz="680" b="0" i="0">
+                <a:solidFill>
+                  <a:srgbClr val="727375"/>
+                </a:solidFill>
+                <a:latin typeface="Arial"/>
+              </a:rPr>
+              <a:t>pilot live in 3 kitchens</a:t>
+            </a:r>
+          </a:p>
+        </p:txBody>
+      </p:sp>
+      <p:sp>
+        <p:nvSpPr>
+          <p:cNvPr id="22" name="Rectangle 21"/>
+          <p:cNvSpPr/>
+          <p:nvPr/>
+        </p:nvSpPr>
+        <p:spPr>
+          <a:xfrm>
+            <a:off x="4564684" y="3858768"/>
+            <a:ext cx="14630" cy="164592"/>
+          </a:xfrm>
+          <a:prstGeom prst="rect">
+            <a:avLst/>
+          </a:prstGeom>
+          <a:solidFill>
+            <a:srgbClr val="727375"/>
+          </a:solidFill>
+          <a:ln>
+            <a:noFill/>
+          </a:ln>
+          <a:effectLst/>
+        </p:spPr>
+        <p:style>
+          <a:lnRef idx="1">
+            <a:schemeClr val="accent1"/>
+          </a:lnRef>
+          <a:fillRef idx="3">
+            <a:schemeClr val="accent1"/>
+          </a:fillRef>
+          <a:effectRef idx="2">
+            <a:schemeClr val="accent1"/>
+          </a:effectRef>
+          <a:fontRef idx="minor">
+            <a:schemeClr val="lt1"/>
+          </a:fontRef>
+        </p:style>
+        <p:txBody>
+          <a:bodyPr rtlCol="0" anchor="ctr"/>
+          <a:lstStyle/>
+          <a:p>
+            <a:pPr algn="ctr"/>
+          </a:p>
+        </p:txBody>
+      </p:sp>
+      <p:sp>
+        <p:nvSpPr>
+          <p:cNvPr id="23" name="TextBox 22"/>
+          <p:cNvSpPr txBox="1"/>
+          <p:nvPr/>
+        </p:nvSpPr>
+        <p:spPr>
+          <a:xfrm>
+            <a:off x="3776472" y="4059936"/>
+            <a:ext cx="1591055" cy="548640"/>
+          </a:xfrm>
+          <a:prstGeom prst="rect">
+            <a:avLst/>
+          </a:prstGeom>
+          <a:noFill/>
+        </p:spPr>
+        <p:txBody>
+          <a:bodyPr wrap="square" lIns="0" rIns="0" tIns="0" bIns="0" anchor="t">
+            <a:spAutoFit/>
+          </a:bodyPr>
+          <a:lstStyle/>
+          <a:p>
+            <a:pPr algn="ctr">
+              <a:lnSpc>
+                <a:spcPct val="100000"/>
+              </a:lnSpc>
+              <a:spcBef>
+                <a:spcPts val="0"/>
+              </a:spcBef>
+              <a:spcAft>
+                <a:spcPts val="100"/>
+              </a:spcAft>
+            </a:pPr>
+            <a:r>
+              <a:rPr sz="850" b="1" i="0">
+                <a:solidFill>
+                  <a:srgbClr val="1B3E6E"/>
+                </a:solidFill>
+                <a:latin typeface="Arial"/>
+              </a:rPr>
+              <a:t>Mo 12</a:t>
+            </a:r>
+          </a:p>
+          <a:p>
+            <a:pPr algn="ctr">
+              <a:lnSpc>
+                <a:spcPct val="92000"/>
+              </a:lnSpc>
+              <a:spcBef>
+                <a:spcPts val="0"/>
+              </a:spcBef>
+              <a:spcAft>
+                <a:spcPts val="0"/>
+              </a:spcAft>
+            </a:pPr>
+            <a:r>
+              <a:rPr sz="680" b="0" i="0">
+                <a:solidFill>
+                  <a:srgbClr val="727375"/>
+                </a:solidFill>
+                <a:latin typeface="Arial"/>
+              </a:rPr>
+              <a:t>both platforms in all 68 kitchens</a:t>
+            </a:r>
+          </a:p>
+        </p:txBody>
+      </p:sp>
+      <p:sp>
+        <p:nvSpPr>
+          <p:cNvPr id="24" name="Rectangle 23"/>
+          <p:cNvSpPr/>
+          <p:nvPr/>
+        </p:nvSpPr>
+        <p:spPr>
+          <a:xfrm>
+            <a:off x="6247180" y="3858768"/>
+            <a:ext cx="14630" cy="164592"/>
+          </a:xfrm>
+          <a:prstGeom prst="rect">
+            <a:avLst/>
+          </a:prstGeom>
+          <a:solidFill>
+            <a:srgbClr val="727375"/>
+          </a:solidFill>
+          <a:ln>
+            <a:noFill/>
+          </a:ln>
+          <a:effectLst/>
+        </p:spPr>
+        <p:style>
+          <a:lnRef idx="1">
+            <a:schemeClr val="accent1"/>
+          </a:lnRef>
+          <a:fillRef idx="3">
+            <a:schemeClr val="accent1"/>
+          </a:fillRef>
+          <a:effectRef idx="2">
+            <a:schemeClr val="accent1"/>
+          </a:effectRef>
+          <a:fontRef idx="minor">
+            <a:schemeClr val="lt1"/>
+          </a:fontRef>
+        </p:style>
+        <p:txBody>
+          <a:bodyPr rtlCol="0" anchor="ctr"/>
+          <a:lstStyle/>
+          <a:p>
+            <a:pPr algn="ctr"/>
+          </a:p>
+        </p:txBody>
+      </p:sp>
+      <p:sp>
+        <p:nvSpPr>
+          <p:cNvPr id="25" name="TextBox 24"/>
+          <p:cNvSpPr txBox="1"/>
+          <p:nvPr/>
+        </p:nvSpPr>
+        <p:spPr>
+          <a:xfrm>
+            <a:off x="5458968" y="4059936"/>
+            <a:ext cx="1591055" cy="548640"/>
+          </a:xfrm>
+          <a:prstGeom prst="rect">
+            <a:avLst/>
+          </a:prstGeom>
+          <a:noFill/>
+        </p:spPr>
+        <p:txBody>
+          <a:bodyPr wrap="square" lIns="0" rIns="0" tIns="0" bIns="0" anchor="t">
+            <a:spAutoFit/>
+          </a:bodyPr>
+          <a:lstStyle/>
+          <a:p>
+            <a:pPr algn="ctr">
+              <a:lnSpc>
+                <a:spcPct val="100000"/>
+              </a:lnSpc>
+              <a:spcBef>
+                <a:spcPts val="0"/>
+              </a:spcBef>
+              <a:spcAft>
+                <a:spcPts val="100"/>
+              </a:spcAft>
+            </a:pPr>
+            <a:r>
+              <a:rPr sz="850" b="1" i="0">
+                <a:solidFill>
+                  <a:srgbClr val="1B3E6E"/>
+                </a:solidFill>
+                <a:latin typeface="Arial"/>
+              </a:rPr>
+              <a:t>Yr 2</a:t>
+            </a:r>
+          </a:p>
+          <a:p>
+            <a:pPr algn="ctr">
+              <a:lnSpc>
+                <a:spcPct val="92000"/>
+              </a:lnSpc>
+              <a:spcBef>
+                <a:spcPts val="0"/>
+              </a:spcBef>
+              <a:spcAft>
+                <a:spcPts val="0"/>
+              </a:spcAft>
+            </a:pPr>
+            <a:r>
+              <a:rPr sz="680" b="0" i="0">
+                <a:solidFill>
+                  <a:srgbClr val="727375"/>
+                </a:solidFill>
+                <a:latin typeface="Arial"/>
+              </a:rPr>
+              <a:t>flywheel self-funding</a:t>
+            </a:r>
+          </a:p>
+        </p:txBody>
+      </p:sp>
+      <p:sp>
+        <p:nvSpPr>
+          <p:cNvPr id="26" name="Rectangle 25"/>
+          <p:cNvSpPr/>
+          <p:nvPr/>
+        </p:nvSpPr>
+        <p:spPr>
+          <a:xfrm>
+            <a:off x="7929676" y="3858768"/>
+            <a:ext cx="14630" cy="164592"/>
+          </a:xfrm>
+          <a:prstGeom prst="rect">
+            <a:avLst/>
+          </a:prstGeom>
+          <a:solidFill>
+            <a:srgbClr val="727375"/>
+          </a:solidFill>
+          <a:ln>
+            <a:noFill/>
+          </a:ln>
+          <a:effectLst/>
+        </p:spPr>
+        <p:style>
+          <a:lnRef idx="1">
+            <a:schemeClr val="accent1"/>
+          </a:lnRef>
+          <a:fillRef idx="3">
+            <a:schemeClr val="accent1"/>
+          </a:fillRef>
+          <a:effectRef idx="2">
+            <a:schemeClr val="accent1"/>
+          </a:effectRef>
+          <a:fontRef idx="minor">
+            <a:schemeClr val="lt1"/>
+          </a:fontRef>
+        </p:style>
+        <p:txBody>
+          <a:bodyPr rtlCol="0" anchor="ctr"/>
+          <a:lstStyle/>
+          <a:p>
+            <a:pPr algn="ctr"/>
+          </a:p>
+        </p:txBody>
+      </p:sp>
+      <p:sp>
+        <p:nvSpPr>
+          <p:cNvPr id="27" name="TextBox 26"/>
+          <p:cNvSpPr txBox="1"/>
+          <p:nvPr/>
+        </p:nvSpPr>
+        <p:spPr>
+          <a:xfrm>
+            <a:off x="7141464" y="4059936"/>
+            <a:ext cx="1591055" cy="548640"/>
+          </a:xfrm>
+          <a:prstGeom prst="rect">
+            <a:avLst/>
+          </a:prstGeom>
+          <a:noFill/>
+        </p:spPr>
+        <p:txBody>
+          <a:bodyPr wrap="square" lIns="0" rIns="0" tIns="0" bIns="0" anchor="t">
+            <a:spAutoFit/>
+          </a:bodyPr>
+          <a:lstStyle/>
+          <a:p>
+            <a:pPr algn="ctr">
+              <a:lnSpc>
+                <a:spcPct val="100000"/>
+              </a:lnSpc>
+              <a:spcBef>
+                <a:spcPts val="0"/>
+              </a:spcBef>
+              <a:spcAft>
+                <a:spcPts val="100"/>
+              </a:spcAft>
+            </a:pPr>
+            <a:r>
+              <a:rPr sz="850" b="1" i="0">
+                <a:solidFill>
+                  <a:srgbClr val="1B3E6E"/>
+                </a:solidFill>
+                <a:latin typeface="Arial"/>
+              </a:rPr>
+              <a:t>Yr 3+</a:t>
+            </a:r>
+          </a:p>
+          <a:p>
+            <a:pPr algn="ctr">
+              <a:lnSpc>
+                <a:spcPct val="92000"/>
+              </a:lnSpc>
+              <a:spcBef>
+                <a:spcPts val="0"/>
+              </a:spcBef>
+              <a:spcAft>
+                <a:spcPts val="0"/>
+              </a:spcAft>
+            </a:pPr>
+            <a:r>
+              <a:rPr sz="680" b="0" i="0">
+                <a:solidFill>
+                  <a:srgbClr val="727375"/>
+                </a:solidFill>
+                <a:latin typeface="Arial"/>
+              </a:rPr>
+              <a:t>blueprint scales abroad</a:t>
+            </a:r>
+          </a:p>
+        </p:txBody>
+      </p:sp>
+      <p:sp>
+        <p:nvSpPr>
+          <p:cNvPr id="28" name="Rectangle 27"/>
+          <p:cNvSpPr/>
+          <p:nvPr/>
+        </p:nvSpPr>
+        <p:spPr>
+          <a:xfrm>
+            <a:off x="365760" y="4736592"/>
+            <a:ext cx="8412480" cy="10972"/>
+          </a:xfrm>
+          <a:prstGeom prst="rect">
+            <a:avLst/>
+          </a:prstGeom>
+          <a:solidFill>
+            <a:srgbClr val="E0E0E0"/>
+          </a:solidFill>
+          <a:ln>
+            <a:noFill/>
+          </a:ln>
+          <a:effectLst/>
+        </p:spPr>
+        <p:style>
+          <a:lnRef idx="1">
+            <a:schemeClr val="accent1"/>
+          </a:lnRef>
+          <a:fillRef idx="3">
+            <a:schemeClr val="accent1"/>
+          </a:fillRef>
+          <a:effectRef idx="2">
+            <a:schemeClr val="accent1"/>
+          </a:effectRef>
+          <a:fontRef idx="minor">
+            <a:schemeClr val="lt1"/>
+          </a:fontRef>
+        </p:style>
+        <p:txBody>
+          <a:bodyPr rtlCol="0" anchor="ctr"/>
+          <a:lstStyle/>
+          <a:p>
+            <a:pPr algn="ctr"/>
+          </a:p>
+        </p:txBody>
+      </p:sp>
+      <p:sp>
+        <p:nvSpPr>
+          <p:cNvPr id="29" name="TextBox 28"/>
+          <p:cNvSpPr txBox="1"/>
+          <p:nvPr/>
+        </p:nvSpPr>
+        <p:spPr>
+          <a:xfrm>
+            <a:off x="365760" y="4846320"/>
+            <a:ext cx="8412480" cy="502920"/>
+          </a:xfrm>
+          <a:prstGeom prst="rect">
+            <a:avLst/>
+          </a:prstGeom>
+          <a:noFill/>
+        </p:spPr>
+        <p:txBody>
+          <a:bodyPr wrap="square" lIns="0" rIns="0" tIns="0" bIns="0" anchor="t">
+            <a:spAutoFit/>
+          </a:bodyPr>
+          <a:lstStyle/>
+          <a:p>
+            <a:pPr algn="ctr">
+              <a:lnSpc>
+                <a:spcPct val="105000"/>
+              </a:lnSpc>
+              <a:spcBef>
+                <a:spcPts val="0"/>
+              </a:spcBef>
+              <a:spcAft>
+                <a:spcPts val="0"/>
+              </a:spcAft>
+            </a:pPr>
+            <a:r>
+              <a:rPr sz="800" b="1" i="0">
+                <a:solidFill>
+                  <a:srgbClr val="1B3E6E"/>
+                </a:solidFill>
+                <a:latin typeface="Arial"/>
+              </a:rPr>
+              <a:t>Why GS stands out:  </a:t>
+            </a:r>
+            <a:r>
+              <a:rPr sz="800" b="0" i="0">
+                <a:solidFill>
+                  <a:srgbClr val="333333"/>
+                </a:solidFill>
+                <a:latin typeface="Arial"/>
+              </a:rPr>
+              <a:t>structural fix, not sustenance  ·  plays to GS forecasting &amp; optimisation DNA  ·  $310k/yr measurable ROI  ·  a blueprint the firm can scale globally</a:t>
+            </a:r>
+          </a:p>
+        </p:txBody>
+      </p:sp>
+      <p:sp>
+        <p:nvSpPr>
+          <p:cNvPr id="30" name="TextBox 29"/>
+          <p:cNvSpPr txBox="1"/>
+          <p:nvPr/>
+        </p:nvSpPr>
+        <p:spPr>
+          <a:xfrm>
+            <a:off x="365760" y="5413248"/>
+            <a:ext cx="8412480" cy="274320"/>
+          </a:xfrm>
+          <a:prstGeom prst="rect">
+            <a:avLst/>
+          </a:prstGeom>
+          <a:noFill/>
+        </p:spPr>
+        <p:txBody>
+          <a:bodyPr wrap="square" lIns="0" rIns="0" tIns="0" bIns="0" anchor="t">
+            <a:spAutoFit/>
+          </a:bodyPr>
+          <a:lstStyle/>
+          <a:p>
+            <a:pPr algn="ctr">
+              <a:lnSpc>
+                <a:spcPct val="100000"/>
+              </a:lnSpc>
+              <a:spcBef>
+                <a:spcPts val="0"/>
+              </a:spcBef>
+              <a:spcAft>
+                <a:spcPts val="0"/>
+              </a:spcAft>
+            </a:pPr>
+            <a:r>
+              <a:rPr sz="720" b="1" i="1">
+                <a:solidFill>
+                  <a:srgbClr val="727375"/>
+                </a:solidFill>
+                <a:latin typeface="Arial"/>
+              </a:rPr>
+              <a:t>In the company of: </a:t>
+            </a:r>
+            <a:r>
+              <a:rPr sz="720" b="0" i="1">
+                <a:solidFill>
+                  <a:srgbClr val="727375"/>
+                </a:solidFill>
+                <a:latin typeface="Arial"/>
+              </a:rPr>
+              <a:t>Infosys Foundation · TCS · HDFC Bank · Amazon · Airbus · SBI Foundation + 200 corporate donors</a:t>
             </a:r>
           </a:p>
         </p:txBody>

--- a/AkshayaPatra_GS_Pitch.pptx
+++ b/AkshayaPatra_GS_Pitch.pptx
@@ -15,6 +15,7 @@
     <p:sldId id="263" r:id="rId14"/>
     <p:sldId id="264" r:id="rId15"/>
     <p:sldId id="265" r:id="rId16"/>
+    <p:sldId id="266" r:id="rId17"/>
   </p:sldIdLst>
   <p:sldSz cx="9144000" cy="6858000" type="screen4x3"/>
   <p:notesSz cx="6858000" cy="9144000"/>
@@ -8287,6 +8288,2677 @@
           <a:xfrm>
             <a:off x="7933943" y="5376672"/>
             <a:ext cx="789432" cy="384048"/>
+          </a:xfrm>
+          <a:prstGeom prst="rect">
+            <a:avLst/>
+          </a:prstGeom>
+          <a:noFill/>
+        </p:spPr>
+        <p:txBody>
+          <a:bodyPr wrap="square" lIns="0" rIns="0" tIns="0" bIns="0" anchor="ctr">
+            <a:spAutoFit/>
+          </a:bodyPr>
+          <a:lstStyle/>
+          <a:p>
+            <a:pPr algn="ctr">
+              <a:lnSpc>
+                <a:spcPct val="100000"/>
+              </a:lnSpc>
+              <a:spcBef>
+                <a:spcPts val="0"/>
+              </a:spcBef>
+              <a:spcAft>
+                <a:spcPts val="100"/>
+              </a:spcAft>
+            </a:pPr>
+            <a:r>
+              <a:rPr sz="850" b="1" i="0">
+                <a:solidFill>
+                  <a:srgbClr val="727375"/>
+                </a:solidFill>
+                <a:latin typeface="Arial"/>
+              </a:rPr>
+              <a:t>SBI</a:t>
+            </a:r>
+          </a:p>
+        </p:txBody>
+      </p:sp>
+    </p:spTree>
+  </p:cSld>
+  <p:clrMapOvr>
+    <a:masterClrMapping/>
+  </p:clrMapOvr>
+</p:sld>
+</file>
+
+<file path=ppt/slides/slide11.xml><?xml version="1.0" encoding="utf-8"?>
+<p:sld xmlns:a="http://schemas.openxmlformats.org/drawingml/2006/main" xmlns:p="http://schemas.openxmlformats.org/presentationml/2006/main" xmlns:r="http://schemas.openxmlformats.org/officeDocument/2006/relationships">
+  <p:cSld>
+    <p:spTree>
+      <p:nvGrpSpPr>
+        <p:cNvPr id="1" name=""/>
+        <p:cNvGrpSpPr/>
+        <p:nvPr/>
+      </p:nvGrpSpPr>
+      <p:grpSpPr/>
+      <p:sp>
+        <p:nvSpPr>
+          <p:cNvPr id="2" name="Rectangle 1"/>
+          <p:cNvSpPr/>
+          <p:nvPr/>
+        </p:nvSpPr>
+        <p:spPr>
+          <a:xfrm>
+            <a:off x="365760" y="274320"/>
+            <a:ext cx="8412480" cy="23774"/>
+          </a:xfrm>
+          <a:prstGeom prst="rect">
+            <a:avLst/>
+          </a:prstGeom>
+          <a:solidFill>
+            <a:srgbClr val="1B3E6E"/>
+          </a:solidFill>
+          <a:ln>
+            <a:noFill/>
+          </a:ln>
+          <a:effectLst/>
+        </p:spPr>
+        <p:style>
+          <a:lnRef idx="1">
+            <a:schemeClr val="accent1"/>
+          </a:lnRef>
+          <a:fillRef idx="3">
+            <a:schemeClr val="accent1"/>
+          </a:fillRef>
+          <a:effectRef idx="2">
+            <a:schemeClr val="accent1"/>
+          </a:effectRef>
+          <a:fontRef idx="minor">
+            <a:schemeClr val="lt1"/>
+          </a:fontRef>
+        </p:style>
+        <p:txBody>
+          <a:bodyPr rtlCol="0" anchor="ctr"/>
+          <a:lstStyle/>
+          <a:p>
+            <a:pPr algn="ctr"/>
+          </a:p>
+        </p:txBody>
+      </p:sp>
+      <p:sp>
+        <p:nvSpPr>
+          <p:cNvPr id="3" name="TextBox 2"/>
+          <p:cNvSpPr txBox="1"/>
+          <p:nvPr/>
+        </p:nvSpPr>
+        <p:spPr>
+          <a:xfrm>
+            <a:off x="365760" y="365760"/>
+            <a:ext cx="8412480" cy="457200"/>
+          </a:xfrm>
+          <a:prstGeom prst="rect">
+            <a:avLst/>
+          </a:prstGeom>
+          <a:noFill/>
+        </p:spPr>
+        <p:txBody>
+          <a:bodyPr wrap="square" lIns="0" rIns="0" tIns="0" bIns="0" anchor="t">
+            <a:spAutoFit/>
+          </a:bodyPr>
+          <a:lstStyle/>
+          <a:p>
+            <a:pPr algn="l">
+              <a:lnSpc>
+                <a:spcPct val="100000"/>
+              </a:lnSpc>
+              <a:spcBef>
+                <a:spcPts val="0"/>
+              </a:spcBef>
+              <a:spcAft>
+                <a:spcPts val="0"/>
+              </a:spcAft>
+            </a:pPr>
+            <a:r>
+              <a:rPr sz="2000" b="0" i="0">
+                <a:solidFill>
+                  <a:srgbClr val="1B3E6E"/>
+                </a:solidFill>
+                <a:latin typeface="Georgia"/>
+              </a:rPr>
+              <a:t>Conclusion — why Akshaya Patra, and why this proposal wins</a:t>
+            </a:r>
+          </a:p>
+        </p:txBody>
+      </p:sp>
+      <p:sp>
+        <p:nvSpPr>
+          <p:cNvPr id="4" name="TextBox 3"/>
+          <p:cNvSpPr txBox="1"/>
+          <p:nvPr/>
+        </p:nvSpPr>
+        <p:spPr>
+          <a:xfrm>
+            <a:off x="365760" y="822960"/>
+            <a:ext cx="8412480" cy="438912"/>
+          </a:xfrm>
+          <a:prstGeom prst="rect">
+            <a:avLst/>
+          </a:prstGeom>
+          <a:noFill/>
+        </p:spPr>
+        <p:txBody>
+          <a:bodyPr wrap="square" lIns="0" rIns="0" tIns="0" bIns="0" anchor="t">
+            <a:spAutoFit/>
+          </a:bodyPr>
+          <a:lstStyle/>
+          <a:p>
+            <a:pPr algn="l">
+              <a:lnSpc>
+                <a:spcPct val="100000"/>
+              </a:lnSpc>
+              <a:spcBef>
+                <a:spcPts val="0"/>
+              </a:spcBef>
+              <a:spcAft>
+                <a:spcPts val="0"/>
+              </a:spcAft>
+            </a:pPr>
+            <a:r>
+              <a:rPr sz="1050" b="0" i="0">
+                <a:solidFill>
+                  <a:srgbClr val="333333"/>
+                </a:solidFill>
+                <a:latin typeface="Arial"/>
+              </a:rPr>
+              <a:t>A proven engine of social mobility, a grant that compounds instead of depletes, and a partnership only Goldman Sachs can power.</a:t>
+            </a:r>
+          </a:p>
+        </p:txBody>
+      </p:sp>
+      <p:sp>
+        <p:nvSpPr>
+          <p:cNvPr id="5" name="Rectangle 4"/>
+          <p:cNvSpPr/>
+          <p:nvPr/>
+        </p:nvSpPr>
+        <p:spPr>
+          <a:xfrm>
+            <a:off x="502920" y="6071616"/>
+            <a:ext cx="8138159" cy="365760"/>
+          </a:xfrm>
+          <a:prstGeom prst="rect">
+            <a:avLst/>
+          </a:prstGeom>
+          <a:solidFill>
+            <a:srgbClr val="D9D9D9"/>
+          </a:solidFill>
+          <a:ln>
+            <a:noFill/>
+          </a:ln>
+          <a:effectLst/>
+        </p:spPr>
+        <p:style>
+          <a:lnRef idx="1">
+            <a:schemeClr val="accent1"/>
+          </a:lnRef>
+          <a:fillRef idx="3">
+            <a:schemeClr val="accent1"/>
+          </a:fillRef>
+          <a:effectRef idx="2">
+            <a:schemeClr val="accent1"/>
+          </a:effectRef>
+          <a:fontRef idx="minor">
+            <a:schemeClr val="lt1"/>
+          </a:fontRef>
+        </p:style>
+        <p:txBody>
+          <a:bodyPr rtlCol="0" anchor="ctr"/>
+          <a:lstStyle/>
+          <a:p>
+            <a:pPr algn="ctr"/>
+          </a:p>
+        </p:txBody>
+      </p:sp>
+      <p:sp>
+        <p:nvSpPr>
+          <p:cNvPr id="6" name="TextBox 5"/>
+          <p:cNvSpPr txBox="1"/>
+          <p:nvPr/>
+        </p:nvSpPr>
+        <p:spPr>
+          <a:xfrm>
+            <a:off x="640080" y="6071616"/>
+            <a:ext cx="7863840" cy="365760"/>
+          </a:xfrm>
+          <a:prstGeom prst="rect">
+            <a:avLst/>
+          </a:prstGeom>
+          <a:noFill/>
+        </p:spPr>
+        <p:txBody>
+          <a:bodyPr wrap="square" lIns="0" rIns="0" tIns="0" bIns="0" anchor="ctr">
+            <a:spAutoFit/>
+          </a:bodyPr>
+          <a:lstStyle/>
+          <a:p>
+            <a:pPr algn="ctr">
+              <a:lnSpc>
+                <a:spcPct val="95000"/>
+              </a:lnSpc>
+              <a:spcBef>
+                <a:spcPts val="0"/>
+              </a:spcBef>
+              <a:spcAft>
+                <a:spcPts val="0"/>
+              </a:spcAft>
+            </a:pPr>
+            <a:r>
+              <a:rPr sz="1100" b="1" i="0">
+                <a:solidFill>
+                  <a:srgbClr val="1B3E6E"/>
+                </a:solidFill>
+                <a:latin typeface="Georgia"/>
+              </a:rPr>
+              <a:t>$250k that doesn't feed children for a year — it upgrades the engine that feeds them forever.</a:t>
+            </a:r>
+          </a:p>
+        </p:txBody>
+      </p:sp>
+      <p:sp>
+        <p:nvSpPr>
+          <p:cNvPr id="7" name="TextBox 6"/>
+          <p:cNvSpPr txBox="1"/>
+          <p:nvPr/>
+        </p:nvSpPr>
+        <p:spPr>
+          <a:xfrm>
+            <a:off x="365760" y="6492240"/>
+            <a:ext cx="1280160" cy="329184"/>
+          </a:xfrm>
+          <a:prstGeom prst="rect">
+            <a:avLst/>
+          </a:prstGeom>
+          <a:noFill/>
+        </p:spPr>
+        <p:txBody>
+          <a:bodyPr wrap="square" lIns="0" rIns="0" tIns="0" bIns="0" anchor="t">
+            <a:spAutoFit/>
+          </a:bodyPr>
+          <a:lstStyle/>
+          <a:p>
+            <a:pPr algn="l">
+              <a:lnSpc>
+                <a:spcPct val="90000"/>
+              </a:lnSpc>
+              <a:spcBef>
+                <a:spcPts val="0"/>
+              </a:spcBef>
+              <a:spcAft>
+                <a:spcPts val="0"/>
+              </a:spcAft>
+            </a:pPr>
+            <a:r>
+              <a:rPr sz="900" b="1" i="0">
+                <a:solidFill>
+                  <a:srgbClr val="111111"/>
+                </a:solidFill>
+                <a:latin typeface="Georgia"/>
+              </a:rPr>
+              <a:t>Goldman</a:t>
+            </a:r>
+          </a:p>
+          <a:p>
+            <a:pPr algn="l">
+              <a:lnSpc>
+                <a:spcPct val="90000"/>
+              </a:lnSpc>
+              <a:spcBef>
+                <a:spcPts val="0"/>
+              </a:spcBef>
+              <a:spcAft>
+                <a:spcPts val="0"/>
+              </a:spcAft>
+            </a:pPr>
+            <a:r>
+              <a:rPr sz="900" b="1" i="0">
+                <a:solidFill>
+                  <a:srgbClr val="111111"/>
+                </a:solidFill>
+                <a:latin typeface="Georgia"/>
+              </a:rPr>
+              <a:t>Sachs</a:t>
+            </a:r>
+          </a:p>
+        </p:txBody>
+      </p:sp>
+      <p:sp>
+        <p:nvSpPr>
+          <p:cNvPr id="8" name="TextBox 7"/>
+          <p:cNvSpPr txBox="1"/>
+          <p:nvPr/>
+        </p:nvSpPr>
+        <p:spPr>
+          <a:xfrm>
+            <a:off x="8321040" y="6528816"/>
+            <a:ext cx="457200" cy="274320"/>
+          </a:xfrm>
+          <a:prstGeom prst="rect">
+            <a:avLst/>
+          </a:prstGeom>
+          <a:noFill/>
+        </p:spPr>
+        <p:txBody>
+          <a:bodyPr wrap="square" lIns="0" rIns="0" tIns="0" bIns="0" anchor="t">
+            <a:spAutoFit/>
+          </a:bodyPr>
+          <a:lstStyle/>
+          <a:p>
+            <a:pPr algn="r">
+              <a:lnSpc>
+                <a:spcPct val="100000"/>
+              </a:lnSpc>
+              <a:spcBef>
+                <a:spcPts val="0"/>
+              </a:spcBef>
+              <a:spcAft>
+                <a:spcPts val="300"/>
+              </a:spcAft>
+            </a:pPr>
+            <a:r>
+              <a:rPr sz="900" b="0" i="0">
+                <a:solidFill>
+                  <a:srgbClr val="727375"/>
+                </a:solidFill>
+                <a:latin typeface="Arial"/>
+              </a:rPr>
+              <a:t>11</a:t>
+            </a:r>
+          </a:p>
+        </p:txBody>
+      </p:sp>
+      <p:sp>
+        <p:nvSpPr>
+          <p:cNvPr id="9" name="TextBox 8"/>
+          <p:cNvSpPr txBox="1"/>
+          <p:nvPr/>
+        </p:nvSpPr>
+        <p:spPr>
+          <a:xfrm>
+            <a:off x="5486400" y="54864"/>
+            <a:ext cx="3291840" cy="182880"/>
+          </a:xfrm>
+          <a:prstGeom prst="rect">
+            <a:avLst/>
+          </a:prstGeom>
+          <a:noFill/>
+        </p:spPr>
+        <p:txBody>
+          <a:bodyPr wrap="square" lIns="0" rIns="0" tIns="0" bIns="0" anchor="t">
+            <a:spAutoFit/>
+          </a:bodyPr>
+          <a:lstStyle/>
+          <a:p>
+            <a:pPr algn="r">
+              <a:lnSpc>
+                <a:spcPct val="100000"/>
+              </a:lnSpc>
+              <a:spcBef>
+                <a:spcPts val="0"/>
+              </a:spcBef>
+              <a:spcAft>
+                <a:spcPts val="0"/>
+              </a:spcAft>
+            </a:pPr>
+            <a:r>
+              <a:rPr sz="750" b="0" i="1">
+                <a:solidFill>
+                  <a:srgbClr val="727375"/>
+                </a:solidFill>
+                <a:latin typeface="Arial"/>
+              </a:rPr>
+              <a:t>LAYOUT OPTION E — combined</a:t>
+            </a:r>
+          </a:p>
+        </p:txBody>
+      </p:sp>
+      <p:sp>
+        <p:nvSpPr>
+          <p:cNvPr id="10" name="TextBox 9"/>
+          <p:cNvSpPr txBox="1"/>
+          <p:nvPr/>
+        </p:nvSpPr>
+        <p:spPr>
+          <a:xfrm>
+            <a:off x="365760" y="1389888"/>
+            <a:ext cx="2331720" cy="219456"/>
+          </a:xfrm>
+          <a:prstGeom prst="rect">
+            <a:avLst/>
+          </a:prstGeom>
+          <a:noFill/>
+        </p:spPr>
+        <p:txBody>
+          <a:bodyPr wrap="square" lIns="0" rIns="0" tIns="0" bIns="0" anchor="t">
+            <a:spAutoFit/>
+          </a:bodyPr>
+          <a:lstStyle/>
+          <a:p>
+            <a:pPr algn="l">
+              <a:lnSpc>
+                <a:spcPct val="100000"/>
+              </a:lnSpc>
+              <a:spcBef>
+                <a:spcPts val="0"/>
+              </a:spcBef>
+              <a:spcAft>
+                <a:spcPts val="0"/>
+              </a:spcAft>
+            </a:pPr>
+            <a:r>
+              <a:rPr sz="900" b="1" i="0">
+                <a:solidFill>
+                  <a:srgbClr val="1B3E6E"/>
+                </a:solidFill>
+                <a:latin typeface="Arial"/>
+              </a:rPr>
+              <a:t>THE FUND &amp; ITS IMPACT</a:t>
+            </a:r>
+          </a:p>
+        </p:txBody>
+      </p:sp>
+      <p:sp>
+        <p:nvSpPr>
+          <p:cNvPr id="11" name="Rectangle 10"/>
+          <p:cNvSpPr/>
+          <p:nvPr/>
+        </p:nvSpPr>
+        <p:spPr>
+          <a:xfrm>
+            <a:off x="365760" y="1645920"/>
+            <a:ext cx="2331720" cy="12801"/>
+          </a:xfrm>
+          <a:prstGeom prst="rect">
+            <a:avLst/>
+          </a:prstGeom>
+          <a:solidFill>
+            <a:srgbClr val="BFBFBF"/>
+          </a:solidFill>
+          <a:ln>
+            <a:noFill/>
+          </a:ln>
+          <a:effectLst/>
+        </p:spPr>
+        <p:style>
+          <a:lnRef idx="1">
+            <a:schemeClr val="accent1"/>
+          </a:lnRef>
+          <a:fillRef idx="3">
+            <a:schemeClr val="accent1"/>
+          </a:fillRef>
+          <a:effectRef idx="2">
+            <a:schemeClr val="accent1"/>
+          </a:effectRef>
+          <a:fontRef idx="minor">
+            <a:schemeClr val="lt1"/>
+          </a:fontRef>
+        </p:style>
+        <p:txBody>
+          <a:bodyPr rtlCol="0" anchor="ctr"/>
+          <a:lstStyle/>
+          <a:p>
+            <a:pPr algn="ctr"/>
+          </a:p>
+        </p:txBody>
+      </p:sp>
+      <p:sp>
+        <p:nvSpPr>
+          <p:cNvPr id="12" name="TextBox 11"/>
+          <p:cNvSpPr txBox="1"/>
+          <p:nvPr/>
+        </p:nvSpPr>
+        <p:spPr>
+          <a:xfrm>
+            <a:off x="365760" y="1810512"/>
+            <a:ext cx="2331720" cy="841248"/>
+          </a:xfrm>
+          <a:prstGeom prst="rect">
+            <a:avLst/>
+          </a:prstGeom>
+          <a:noFill/>
+        </p:spPr>
+        <p:txBody>
+          <a:bodyPr wrap="square" lIns="0" rIns="0" tIns="0" bIns="0" anchor="t">
+            <a:spAutoFit/>
+          </a:bodyPr>
+          <a:lstStyle/>
+          <a:p>
+            <a:pPr algn="l">
+              <a:lnSpc>
+                <a:spcPct val="100000"/>
+              </a:lnSpc>
+              <a:spcBef>
+                <a:spcPts val="0"/>
+              </a:spcBef>
+              <a:spcAft>
+                <a:spcPts val="100"/>
+              </a:spcAft>
+            </a:pPr>
+            <a:r>
+              <a:rPr sz="2300" b="1" i="0">
+                <a:solidFill>
+                  <a:srgbClr val="1B3E6E"/>
+                </a:solidFill>
+                <a:latin typeface="Georgia"/>
+              </a:rPr>
+              <a:t>$250k</a:t>
+            </a:r>
+          </a:p>
+          <a:p>
+            <a:pPr algn="l">
+              <a:lnSpc>
+                <a:spcPct val="95000"/>
+              </a:lnSpc>
+              <a:spcBef>
+                <a:spcPts val="0"/>
+              </a:spcBef>
+              <a:spcAft>
+                <a:spcPts val="0"/>
+              </a:spcAft>
+            </a:pPr>
+            <a:r>
+              <a:rPr sz="740" b="0" i="0">
+                <a:solidFill>
+                  <a:srgbClr val="727375"/>
+                </a:solidFill>
+                <a:latin typeface="Arial"/>
+              </a:rPr>
+              <a:t>one-time grant</a:t>
+            </a:r>
+          </a:p>
+        </p:txBody>
+      </p:sp>
+      <p:cxnSp>
+        <p:nvCxnSpPr>
+          <p:cNvPr id="13" name="Connector 12"/>
+          <p:cNvCxnSpPr/>
+          <p:nvPr/>
+        </p:nvCxnSpPr>
+        <p:spPr>
+          <a:xfrm>
+            <a:off x="667512" y="2505456"/>
+            <a:ext cx="0" cy="256032"/>
+          </a:xfrm>
+          <a:prstGeom prst="line">
+            <a:avLst/>
+          </a:prstGeom>
+          <a:ln w="12700">
+            <a:solidFill>
+              <a:srgbClr val="BFBFBF"/>
+            </a:solidFill>
+            <a:prstDash val="sysDash"/>
+            <a:tailEnd type="triangle" w="med" len="med"/>
+          </a:ln>
+          <a:effectLst/>
+        </p:spPr>
+        <p:style>
+          <a:lnRef idx="2">
+            <a:schemeClr val="accent1"/>
+          </a:lnRef>
+          <a:fillRef idx="0">
+            <a:schemeClr val="accent1"/>
+          </a:fillRef>
+          <a:effectRef idx="1">
+            <a:schemeClr val="accent1"/>
+          </a:effectRef>
+          <a:fontRef idx="minor">
+            <a:schemeClr val="tx1"/>
+          </a:fontRef>
+        </p:style>
+      </p:cxnSp>
+      <p:sp>
+        <p:nvSpPr>
+          <p:cNvPr id="14" name="TextBox 13"/>
+          <p:cNvSpPr txBox="1"/>
+          <p:nvPr/>
+        </p:nvSpPr>
+        <p:spPr>
+          <a:xfrm>
+            <a:off x="365760" y="2852928"/>
+            <a:ext cx="2331720" cy="841248"/>
+          </a:xfrm>
+          <a:prstGeom prst="rect">
+            <a:avLst/>
+          </a:prstGeom>
+          <a:noFill/>
+        </p:spPr>
+        <p:txBody>
+          <a:bodyPr wrap="square" lIns="0" rIns="0" tIns="0" bIns="0" anchor="t">
+            <a:spAutoFit/>
+          </a:bodyPr>
+          <a:lstStyle/>
+          <a:p>
+            <a:pPr algn="l">
+              <a:lnSpc>
+                <a:spcPct val="100000"/>
+              </a:lnSpc>
+              <a:spcBef>
+                <a:spcPts val="0"/>
+              </a:spcBef>
+              <a:spcAft>
+                <a:spcPts val="100"/>
+              </a:spcAft>
+            </a:pPr>
+            <a:r>
+              <a:rPr sz="1800" b="1" i="0">
+                <a:solidFill>
+                  <a:srgbClr val="398025"/>
+                </a:solidFill>
+                <a:latin typeface="Georgia"/>
+              </a:rPr>
+              <a:t>$310k / yr</a:t>
+            </a:r>
+          </a:p>
+          <a:p>
+            <a:pPr algn="l">
+              <a:lnSpc>
+                <a:spcPct val="95000"/>
+              </a:lnSpc>
+              <a:spcBef>
+                <a:spcPts val="0"/>
+              </a:spcBef>
+              <a:spcAft>
+                <a:spcPts val="0"/>
+              </a:spcAft>
+            </a:pPr>
+            <a:r>
+              <a:rPr sz="740" b="0" i="0">
+                <a:solidFill>
+                  <a:srgbClr val="727375"/>
+                </a:solidFill>
+                <a:latin typeface="Arial"/>
+              </a:rPr>
+              <a:t>returned in audited savings — every single year</a:t>
+            </a:r>
+          </a:p>
+        </p:txBody>
+      </p:sp>
+      <p:cxnSp>
+        <p:nvCxnSpPr>
+          <p:cNvPr id="15" name="Connector 14"/>
+          <p:cNvCxnSpPr/>
+          <p:nvPr/>
+        </p:nvCxnSpPr>
+        <p:spPr>
+          <a:xfrm>
+            <a:off x="667512" y="3547872"/>
+            <a:ext cx="0" cy="256032"/>
+          </a:xfrm>
+          <a:prstGeom prst="line">
+            <a:avLst/>
+          </a:prstGeom>
+          <a:ln w="12700">
+            <a:solidFill>
+              <a:srgbClr val="BFBFBF"/>
+            </a:solidFill>
+            <a:prstDash val="sysDash"/>
+            <a:tailEnd type="triangle" w="med" len="med"/>
+          </a:ln>
+          <a:effectLst/>
+        </p:spPr>
+        <p:style>
+          <a:lnRef idx="2">
+            <a:schemeClr val="accent1"/>
+          </a:lnRef>
+          <a:fillRef idx="0">
+            <a:schemeClr val="accent1"/>
+          </a:fillRef>
+          <a:effectRef idx="1">
+            <a:schemeClr val="accent1"/>
+          </a:effectRef>
+          <a:fontRef idx="minor">
+            <a:schemeClr val="tx1"/>
+          </a:fontRef>
+        </p:style>
+      </p:cxnSp>
+      <p:sp>
+        <p:nvSpPr>
+          <p:cNvPr id="16" name="TextBox 15"/>
+          <p:cNvSpPr txBox="1"/>
+          <p:nvPr/>
+        </p:nvSpPr>
+        <p:spPr>
+          <a:xfrm>
+            <a:off x="365760" y="3895344"/>
+            <a:ext cx="2331720" cy="841248"/>
+          </a:xfrm>
+          <a:prstGeom prst="rect">
+            <a:avLst/>
+          </a:prstGeom>
+          <a:noFill/>
+        </p:spPr>
+        <p:txBody>
+          <a:bodyPr wrap="square" lIns="0" rIns="0" tIns="0" bIns="0" anchor="t">
+            <a:spAutoFit/>
+          </a:bodyPr>
+          <a:lstStyle/>
+          <a:p>
+            <a:pPr algn="l">
+              <a:lnSpc>
+                <a:spcPct val="100000"/>
+              </a:lnSpc>
+              <a:spcBef>
+                <a:spcPts val="0"/>
+              </a:spcBef>
+              <a:spcAft>
+                <a:spcPts val="100"/>
+              </a:spcAft>
+            </a:pPr>
+            <a:r>
+              <a:rPr sz="1800" b="1" i="0">
+                <a:solidFill>
+                  <a:srgbClr val="1B3E6E"/>
+                </a:solidFill>
+                <a:latin typeface="Georgia"/>
+              </a:rPr>
+              <a:t>+105,000</a:t>
+            </a:r>
+          </a:p>
+          <a:p>
+            <a:pPr algn="l">
+              <a:lnSpc>
+                <a:spcPct val="95000"/>
+              </a:lnSpc>
+              <a:spcBef>
+                <a:spcPts val="0"/>
+              </a:spcBef>
+              <a:spcAft>
+                <a:spcPts val="0"/>
+              </a:spcAft>
+            </a:pPr>
+            <a:r>
+              <a:rPr sz="740" b="0" i="0">
+                <a:solidFill>
+                  <a:srgbClr val="727375"/>
+                </a:solidFill>
+                <a:latin typeface="Arial"/>
+              </a:rPr>
+              <a:t>children fed per year at zero extra cost</a:t>
+            </a:r>
+          </a:p>
+        </p:txBody>
+      </p:sp>
+      <p:cxnSp>
+        <p:nvCxnSpPr>
+          <p:cNvPr id="17" name="Connector 16"/>
+          <p:cNvCxnSpPr/>
+          <p:nvPr/>
+        </p:nvCxnSpPr>
+        <p:spPr>
+          <a:xfrm>
+            <a:off x="667512" y="4590288"/>
+            <a:ext cx="0" cy="256032"/>
+          </a:xfrm>
+          <a:prstGeom prst="line">
+            <a:avLst/>
+          </a:prstGeom>
+          <a:ln w="12700">
+            <a:solidFill>
+              <a:srgbClr val="BFBFBF"/>
+            </a:solidFill>
+            <a:prstDash val="sysDash"/>
+            <a:tailEnd type="triangle" w="med" len="med"/>
+          </a:ln>
+          <a:effectLst/>
+        </p:spPr>
+        <p:style>
+          <a:lnRef idx="2">
+            <a:schemeClr val="accent1"/>
+          </a:lnRef>
+          <a:fillRef idx="0">
+            <a:schemeClr val="accent1"/>
+          </a:fillRef>
+          <a:effectRef idx="1">
+            <a:schemeClr val="accent1"/>
+          </a:effectRef>
+          <a:fontRef idx="minor">
+            <a:schemeClr val="tx1"/>
+          </a:fontRef>
+        </p:style>
+      </p:cxnSp>
+      <p:sp>
+        <p:nvSpPr>
+          <p:cNvPr id="18" name="TextBox 17"/>
+          <p:cNvSpPr txBox="1"/>
+          <p:nvPr/>
+        </p:nvSpPr>
+        <p:spPr>
+          <a:xfrm>
+            <a:off x="365760" y="4937759"/>
+            <a:ext cx="2331720" cy="841248"/>
+          </a:xfrm>
+          <a:prstGeom prst="rect">
+            <a:avLst/>
+          </a:prstGeom>
+          <a:noFill/>
+        </p:spPr>
+        <p:txBody>
+          <a:bodyPr wrap="square" lIns="0" rIns="0" tIns="0" bIns="0" anchor="t">
+            <a:spAutoFit/>
+          </a:bodyPr>
+          <a:lstStyle/>
+          <a:p>
+            <a:pPr algn="l">
+              <a:lnSpc>
+                <a:spcPct val="100000"/>
+              </a:lnSpc>
+              <a:spcBef>
+                <a:spcPts val="0"/>
+              </a:spcBef>
+              <a:spcAft>
+                <a:spcPts val="100"/>
+              </a:spcAft>
+            </a:pPr>
+            <a:r>
+              <a:rPr sz="1500" b="1" i="0">
+                <a:solidFill>
+                  <a:srgbClr val="E08A1E"/>
+                </a:solidFill>
+                <a:latin typeface="Georgia"/>
+              </a:rPr>
+              <a:t>&lt; 10 months</a:t>
+            </a:r>
+          </a:p>
+          <a:p>
+            <a:pPr algn="l">
+              <a:lnSpc>
+                <a:spcPct val="95000"/>
+              </a:lnSpc>
+              <a:spcBef>
+                <a:spcPts val="0"/>
+              </a:spcBef>
+              <a:spcAft>
+                <a:spcPts val="0"/>
+              </a:spcAft>
+            </a:pPr>
+            <a:r>
+              <a:rPr sz="740" b="0" i="0">
+                <a:solidFill>
+                  <a:srgbClr val="727375"/>
+                </a:solidFill>
+                <a:latin typeface="Arial"/>
+              </a:rPr>
+              <a:t>payback on the full grant</a:t>
+            </a:r>
+          </a:p>
+        </p:txBody>
+      </p:sp>
+      <p:sp>
+        <p:nvSpPr>
+          <p:cNvPr id="19" name="Rectangle 18"/>
+          <p:cNvSpPr/>
+          <p:nvPr/>
+        </p:nvSpPr>
+        <p:spPr>
+          <a:xfrm>
+            <a:off x="2788920" y="1417320"/>
+            <a:ext cx="10972" cy="4480560"/>
+          </a:xfrm>
+          <a:prstGeom prst="rect">
+            <a:avLst/>
+          </a:prstGeom>
+          <a:solidFill>
+            <a:srgbClr val="DDDDDD"/>
+          </a:solidFill>
+          <a:ln>
+            <a:noFill/>
+          </a:ln>
+          <a:effectLst/>
+        </p:spPr>
+        <p:style>
+          <a:lnRef idx="1">
+            <a:schemeClr val="accent1"/>
+          </a:lnRef>
+          <a:fillRef idx="3">
+            <a:schemeClr val="accent1"/>
+          </a:fillRef>
+          <a:effectRef idx="2">
+            <a:schemeClr val="accent1"/>
+          </a:effectRef>
+          <a:fontRef idx="minor">
+            <a:schemeClr val="lt1"/>
+          </a:fontRef>
+        </p:style>
+        <p:txBody>
+          <a:bodyPr rtlCol="0" anchor="ctr"/>
+          <a:lstStyle/>
+          <a:p>
+            <a:pPr algn="ctr"/>
+          </a:p>
+        </p:txBody>
+      </p:sp>
+      <p:sp>
+        <p:nvSpPr>
+          <p:cNvPr id="20" name="Rectangle 19"/>
+          <p:cNvSpPr/>
+          <p:nvPr/>
+        </p:nvSpPr>
+        <p:spPr>
+          <a:xfrm>
+            <a:off x="3063240" y="1399032"/>
+            <a:ext cx="54864" cy="182880"/>
+          </a:xfrm>
+          <a:prstGeom prst="rect">
+            <a:avLst/>
+          </a:prstGeom>
+          <a:solidFill>
+            <a:srgbClr val="3B6EA5"/>
+          </a:solidFill>
+          <a:ln>
+            <a:noFill/>
+          </a:ln>
+          <a:effectLst/>
+        </p:spPr>
+        <p:style>
+          <a:lnRef idx="1">
+            <a:schemeClr val="accent1"/>
+          </a:lnRef>
+          <a:fillRef idx="3">
+            <a:schemeClr val="accent1"/>
+          </a:fillRef>
+          <a:effectRef idx="2">
+            <a:schemeClr val="accent1"/>
+          </a:effectRef>
+          <a:fontRef idx="minor">
+            <a:schemeClr val="lt1"/>
+          </a:fontRef>
+        </p:style>
+        <p:txBody>
+          <a:bodyPr rtlCol="0" anchor="ctr"/>
+          <a:lstStyle/>
+          <a:p>
+            <a:pPr algn="ctr"/>
+          </a:p>
+        </p:txBody>
+      </p:sp>
+      <p:sp>
+        <p:nvSpPr>
+          <p:cNvPr id="21" name="TextBox 20"/>
+          <p:cNvSpPr txBox="1"/>
+          <p:nvPr/>
+        </p:nvSpPr>
+        <p:spPr>
+          <a:xfrm>
+            <a:off x="3209544" y="1371600"/>
+            <a:ext cx="5568696" cy="256032"/>
+          </a:xfrm>
+          <a:prstGeom prst="rect">
+            <a:avLst/>
+          </a:prstGeom>
+          <a:noFill/>
+        </p:spPr>
+        <p:txBody>
+          <a:bodyPr wrap="square" lIns="0" rIns="0" tIns="0" bIns="0" anchor="t">
+            <a:spAutoFit/>
+          </a:bodyPr>
+          <a:lstStyle/>
+          <a:p>
+            <a:pPr algn="l">
+              <a:lnSpc>
+                <a:spcPct val="100000"/>
+              </a:lnSpc>
+              <a:spcBef>
+                <a:spcPts val="0"/>
+              </a:spcBef>
+              <a:spcAft>
+                <a:spcPts val="0"/>
+              </a:spcAft>
+            </a:pPr>
+            <a:r>
+              <a:rPr sz="1050" b="1" i="0">
+                <a:solidFill>
+                  <a:srgbClr val="1B3E6E"/>
+                </a:solidFill>
+                <a:latin typeface="Arial"/>
+              </a:rPr>
+              <a:t>The partnership equation</a:t>
+            </a:r>
+          </a:p>
+        </p:txBody>
+      </p:sp>
+      <p:sp>
+        <p:nvSpPr>
+          <p:cNvPr id="22" name="Rectangle 21"/>
+          <p:cNvSpPr/>
+          <p:nvPr/>
+        </p:nvSpPr>
+        <p:spPr>
+          <a:xfrm>
+            <a:off x="3063240" y="1645920"/>
+            <a:ext cx="5715000" cy="10972"/>
+          </a:xfrm>
+          <a:prstGeom prst="rect">
+            <a:avLst/>
+          </a:prstGeom>
+          <a:solidFill>
+            <a:srgbClr val="BFBFBF"/>
+          </a:solidFill>
+          <a:ln>
+            <a:noFill/>
+          </a:ln>
+          <a:effectLst/>
+        </p:spPr>
+        <p:style>
+          <a:lnRef idx="1">
+            <a:schemeClr val="accent1"/>
+          </a:lnRef>
+          <a:fillRef idx="3">
+            <a:schemeClr val="accent1"/>
+          </a:fillRef>
+          <a:effectRef idx="2">
+            <a:schemeClr val="accent1"/>
+          </a:effectRef>
+          <a:fontRef idx="minor">
+            <a:schemeClr val="lt1"/>
+          </a:fontRef>
+        </p:style>
+        <p:txBody>
+          <a:bodyPr rtlCol="0" anchor="ctr"/>
+          <a:lstStyle/>
+          <a:p>
+            <a:pPr algn="ctr"/>
+          </a:p>
+        </p:txBody>
+      </p:sp>
+      <p:sp>
+        <p:nvSpPr>
+          <p:cNvPr id="23" name="Oval 22"/>
+          <p:cNvSpPr/>
+          <p:nvPr/>
+        </p:nvSpPr>
+        <p:spPr>
+          <a:xfrm>
+            <a:off x="4009644" y="1755648"/>
+            <a:ext cx="969264" cy="822960"/>
+          </a:xfrm>
+          <a:prstGeom prst="ellipse">
+            <a:avLst/>
+          </a:prstGeom>
+          <a:solidFill>
+            <a:srgbClr val="EEF3F9"/>
+          </a:solidFill>
+          <a:ln w="13970">
+            <a:solidFill>
+              <a:srgbClr val="1B3E6E"/>
+            </a:solidFill>
+          </a:ln>
+          <a:effectLst/>
+        </p:spPr>
+        <p:style>
+          <a:lnRef idx="1">
+            <a:schemeClr val="accent1"/>
+          </a:lnRef>
+          <a:fillRef idx="3">
+            <a:schemeClr val="accent1"/>
+          </a:fillRef>
+          <a:effectRef idx="2">
+            <a:schemeClr val="accent1"/>
+          </a:effectRef>
+          <a:fontRef idx="minor">
+            <a:schemeClr val="lt1"/>
+          </a:fontRef>
+        </p:style>
+        <p:txBody>
+          <a:bodyPr rtlCol="0" anchor="ctr"/>
+          <a:lstStyle/>
+          <a:p>
+            <a:pPr algn="ctr"/>
+          </a:p>
+        </p:txBody>
+      </p:sp>
+      <p:sp>
+        <p:nvSpPr>
+          <p:cNvPr id="24" name="TextBox 23"/>
+          <p:cNvSpPr txBox="1"/>
+          <p:nvPr/>
+        </p:nvSpPr>
+        <p:spPr>
+          <a:xfrm>
+            <a:off x="4009644" y="1856231"/>
+            <a:ext cx="969264" cy="621792"/>
+          </a:xfrm>
+          <a:prstGeom prst="rect">
+            <a:avLst/>
+          </a:prstGeom>
+          <a:noFill/>
+        </p:spPr>
+        <p:txBody>
+          <a:bodyPr wrap="square" lIns="0" rIns="0" tIns="0" bIns="0" anchor="ctr">
+            <a:spAutoFit/>
+          </a:bodyPr>
+          <a:lstStyle/>
+          <a:p>
+            <a:pPr algn="ctr">
+              <a:lnSpc>
+                <a:spcPct val="90000"/>
+              </a:lnSpc>
+              <a:spcBef>
+                <a:spcPts val="0"/>
+              </a:spcBef>
+              <a:spcAft>
+                <a:spcPts val="0"/>
+              </a:spcAft>
+            </a:pPr>
+            <a:r>
+              <a:rPr sz="700" b="1" i="0">
+                <a:solidFill>
+                  <a:srgbClr val="1B3E6E"/>
+                </a:solidFill>
+                <a:latin typeface="Arial"/>
+              </a:rPr>
+              <a:t>GS $250k
+catalytic
+capital</a:t>
+            </a:r>
+          </a:p>
+        </p:txBody>
+      </p:sp>
+      <p:sp>
+        <p:nvSpPr>
+          <p:cNvPr id="25" name="Plus 24"/>
+          <p:cNvSpPr/>
+          <p:nvPr/>
+        </p:nvSpPr>
+        <p:spPr>
+          <a:xfrm>
+            <a:off x="5088636" y="2057400"/>
+            <a:ext cx="237744" cy="219456"/>
+          </a:xfrm>
+          <a:prstGeom prst="mathPlus">
+            <a:avLst/>
+          </a:prstGeom>
+          <a:solidFill>
+            <a:srgbClr val="1B3E6E"/>
+          </a:solidFill>
+          <a:ln>
+            <a:noFill/>
+          </a:ln>
+          <a:effectLst/>
+        </p:spPr>
+        <p:style>
+          <a:lnRef idx="1">
+            <a:schemeClr val="accent1"/>
+          </a:lnRef>
+          <a:fillRef idx="3">
+            <a:schemeClr val="accent1"/>
+          </a:fillRef>
+          <a:effectRef idx="2">
+            <a:schemeClr val="accent1"/>
+          </a:effectRef>
+          <a:fontRef idx="minor">
+            <a:schemeClr val="lt1"/>
+          </a:fontRef>
+        </p:style>
+        <p:txBody>
+          <a:bodyPr rtlCol="0" anchor="ctr"/>
+          <a:lstStyle/>
+          <a:p>
+            <a:pPr algn="ctr"/>
+          </a:p>
+        </p:txBody>
+      </p:sp>
+      <p:sp>
+        <p:nvSpPr>
+          <p:cNvPr id="26" name="Oval 25"/>
+          <p:cNvSpPr/>
+          <p:nvPr/>
+        </p:nvSpPr>
+        <p:spPr>
+          <a:xfrm>
+            <a:off x="5436108" y="1755648"/>
+            <a:ext cx="969264" cy="822960"/>
+          </a:xfrm>
+          <a:prstGeom prst="ellipse">
+            <a:avLst/>
+          </a:prstGeom>
+          <a:solidFill>
+            <a:srgbClr val="FDF6E0"/>
+          </a:solidFill>
+          <a:ln w="13970">
+            <a:solidFill>
+              <a:srgbClr val="E08A1E"/>
+            </a:solidFill>
+          </a:ln>
+          <a:effectLst/>
+        </p:spPr>
+        <p:style>
+          <a:lnRef idx="1">
+            <a:schemeClr val="accent1"/>
+          </a:lnRef>
+          <a:fillRef idx="3">
+            <a:schemeClr val="accent1"/>
+          </a:fillRef>
+          <a:effectRef idx="2">
+            <a:schemeClr val="accent1"/>
+          </a:effectRef>
+          <a:fontRef idx="minor">
+            <a:schemeClr val="lt1"/>
+          </a:fontRef>
+        </p:style>
+        <p:txBody>
+          <a:bodyPr rtlCol="0" anchor="ctr"/>
+          <a:lstStyle/>
+          <a:p>
+            <a:pPr algn="ctr"/>
+          </a:p>
+        </p:txBody>
+      </p:sp>
+      <p:sp>
+        <p:nvSpPr>
+          <p:cNvPr id="27" name="TextBox 26"/>
+          <p:cNvSpPr txBox="1"/>
+          <p:nvPr/>
+        </p:nvSpPr>
+        <p:spPr>
+          <a:xfrm>
+            <a:off x="5436108" y="1856231"/>
+            <a:ext cx="969264" cy="621792"/>
+          </a:xfrm>
+          <a:prstGeom prst="rect">
+            <a:avLst/>
+          </a:prstGeom>
+          <a:noFill/>
+        </p:spPr>
+        <p:txBody>
+          <a:bodyPr wrap="square" lIns="0" rIns="0" tIns="0" bIns="0" anchor="ctr">
+            <a:spAutoFit/>
+          </a:bodyPr>
+          <a:lstStyle/>
+          <a:p>
+            <a:pPr algn="ctr">
+              <a:lnSpc>
+                <a:spcPct val="90000"/>
+              </a:lnSpc>
+              <a:spcBef>
+                <a:spcPts val="0"/>
+              </a:spcBef>
+              <a:spcAft>
+                <a:spcPts val="0"/>
+              </a:spcAft>
+            </a:pPr>
+            <a:r>
+              <a:rPr sz="700" b="1" i="0">
+                <a:solidFill>
+                  <a:srgbClr val="E08A1E"/>
+                </a:solidFill>
+                <a:latin typeface="Arial"/>
+              </a:rPr>
+              <a:t>AP's 2.3M
+meals-a-day
+engine</a:t>
+            </a:r>
+          </a:p>
+        </p:txBody>
+      </p:sp>
+      <p:sp>
+        <p:nvSpPr>
+          <p:cNvPr id="28" name="Equal 27"/>
+          <p:cNvSpPr/>
+          <p:nvPr/>
+        </p:nvSpPr>
+        <p:spPr>
+          <a:xfrm>
+            <a:off x="6515100" y="2057400"/>
+            <a:ext cx="237744" cy="219456"/>
+          </a:xfrm>
+          <a:prstGeom prst="mathEqual">
+            <a:avLst/>
+          </a:prstGeom>
+          <a:solidFill>
+            <a:srgbClr val="1B3E6E"/>
+          </a:solidFill>
+          <a:ln>
+            <a:noFill/>
+          </a:ln>
+          <a:effectLst/>
+        </p:spPr>
+        <p:style>
+          <a:lnRef idx="1">
+            <a:schemeClr val="accent1"/>
+          </a:lnRef>
+          <a:fillRef idx="3">
+            <a:schemeClr val="accent1"/>
+          </a:fillRef>
+          <a:effectRef idx="2">
+            <a:schemeClr val="accent1"/>
+          </a:effectRef>
+          <a:fontRef idx="minor">
+            <a:schemeClr val="lt1"/>
+          </a:fontRef>
+        </p:style>
+        <p:txBody>
+          <a:bodyPr rtlCol="0" anchor="ctr"/>
+          <a:lstStyle/>
+          <a:p>
+            <a:pPr algn="ctr"/>
+          </a:p>
+        </p:txBody>
+      </p:sp>
+      <p:sp>
+        <p:nvSpPr>
+          <p:cNvPr id="29" name="Oval 28"/>
+          <p:cNvSpPr/>
+          <p:nvPr/>
+        </p:nvSpPr>
+        <p:spPr>
+          <a:xfrm>
+            <a:off x="6862572" y="1755648"/>
+            <a:ext cx="969264" cy="822960"/>
+          </a:xfrm>
+          <a:prstGeom prst="ellipse">
+            <a:avLst/>
+          </a:prstGeom>
+          <a:solidFill>
+            <a:srgbClr val="EAF3E6"/>
+          </a:solidFill>
+          <a:ln w="13970">
+            <a:solidFill>
+              <a:srgbClr val="398025"/>
+            </a:solidFill>
+          </a:ln>
+          <a:effectLst/>
+        </p:spPr>
+        <p:style>
+          <a:lnRef idx="1">
+            <a:schemeClr val="accent1"/>
+          </a:lnRef>
+          <a:fillRef idx="3">
+            <a:schemeClr val="accent1"/>
+          </a:fillRef>
+          <a:effectRef idx="2">
+            <a:schemeClr val="accent1"/>
+          </a:effectRef>
+          <a:fontRef idx="minor">
+            <a:schemeClr val="lt1"/>
+          </a:fontRef>
+        </p:style>
+        <p:txBody>
+          <a:bodyPr rtlCol="0" anchor="ctr"/>
+          <a:lstStyle/>
+          <a:p>
+            <a:pPr algn="ctr"/>
+          </a:p>
+        </p:txBody>
+      </p:sp>
+      <p:sp>
+        <p:nvSpPr>
+          <p:cNvPr id="30" name="TextBox 29"/>
+          <p:cNvSpPr txBox="1"/>
+          <p:nvPr/>
+        </p:nvSpPr>
+        <p:spPr>
+          <a:xfrm>
+            <a:off x="6862572" y="1856231"/>
+            <a:ext cx="969264" cy="621792"/>
+          </a:xfrm>
+          <a:prstGeom prst="rect">
+            <a:avLst/>
+          </a:prstGeom>
+          <a:noFill/>
+        </p:spPr>
+        <p:txBody>
+          <a:bodyPr wrap="square" lIns="0" rIns="0" tIns="0" bIns="0" anchor="ctr">
+            <a:spAutoFit/>
+          </a:bodyPr>
+          <a:lstStyle/>
+          <a:p>
+            <a:pPr algn="ctr">
+              <a:lnSpc>
+                <a:spcPct val="90000"/>
+              </a:lnSpc>
+              <a:spcBef>
+                <a:spcPts val="0"/>
+              </a:spcBef>
+              <a:spcAft>
+                <a:spcPts val="0"/>
+              </a:spcAft>
+            </a:pPr>
+            <a:r>
+              <a:rPr sz="700" b="1" i="0">
+                <a:solidFill>
+                  <a:srgbClr val="398025"/>
+                </a:solidFill>
+                <a:latin typeface="Arial"/>
+              </a:rPr>
+              <a:t>Impact that
+compounds
+yearly</a:t>
+            </a:r>
+          </a:p>
+        </p:txBody>
+      </p:sp>
+      <p:sp>
+        <p:nvSpPr>
+          <p:cNvPr id="31" name="TextBox 30"/>
+          <p:cNvSpPr txBox="1"/>
+          <p:nvPr/>
+        </p:nvSpPr>
+        <p:spPr>
+          <a:xfrm>
+            <a:off x="3063240" y="2633472"/>
+            <a:ext cx="5715000" cy="237744"/>
+          </a:xfrm>
+          <a:prstGeom prst="rect">
+            <a:avLst/>
+          </a:prstGeom>
+          <a:noFill/>
+        </p:spPr>
+        <p:txBody>
+          <a:bodyPr wrap="square" lIns="0" rIns="0" tIns="0" bIns="0" anchor="t">
+            <a:spAutoFit/>
+          </a:bodyPr>
+          <a:lstStyle/>
+          <a:p>
+            <a:pPr algn="ctr">
+              <a:lnSpc>
+                <a:spcPct val="100000"/>
+              </a:lnSpc>
+              <a:spcBef>
+                <a:spcPts val="0"/>
+              </a:spcBef>
+              <a:spcAft>
+                <a:spcPts val="0"/>
+              </a:spcAft>
+            </a:pPr>
+            <a:r>
+              <a:rPr sz="700" b="0" i="1">
+                <a:solidFill>
+                  <a:srgbClr val="727375"/>
+                </a:solidFill>
+                <a:latin typeface="Arial"/>
+              </a:rPr>
+              <a:t>One-time capital → permanent capability → recurring savings → more children in school, every year after Year 1</a:t>
+            </a:r>
+          </a:p>
+        </p:txBody>
+      </p:sp>
+      <p:sp>
+        <p:nvSpPr>
+          <p:cNvPr id="32" name="Rectangle 31"/>
+          <p:cNvSpPr/>
+          <p:nvPr/>
+        </p:nvSpPr>
+        <p:spPr>
+          <a:xfrm>
+            <a:off x="3063240" y="3063239"/>
+            <a:ext cx="54864" cy="182880"/>
+          </a:xfrm>
+          <a:prstGeom prst="rect">
+            <a:avLst/>
+          </a:prstGeom>
+          <a:solidFill>
+            <a:srgbClr val="1B3E6E"/>
+          </a:solidFill>
+          <a:ln>
+            <a:noFill/>
+          </a:ln>
+          <a:effectLst/>
+        </p:spPr>
+        <p:style>
+          <a:lnRef idx="1">
+            <a:schemeClr val="accent1"/>
+          </a:lnRef>
+          <a:fillRef idx="3">
+            <a:schemeClr val="accent1"/>
+          </a:fillRef>
+          <a:effectRef idx="2">
+            <a:schemeClr val="accent1"/>
+          </a:effectRef>
+          <a:fontRef idx="minor">
+            <a:schemeClr val="lt1"/>
+          </a:fontRef>
+        </p:style>
+        <p:txBody>
+          <a:bodyPr rtlCol="0" anchor="ctr"/>
+          <a:lstStyle/>
+          <a:p>
+            <a:pPr algn="ctr"/>
+          </a:p>
+        </p:txBody>
+      </p:sp>
+      <p:sp>
+        <p:nvSpPr>
+          <p:cNvPr id="33" name="TextBox 32"/>
+          <p:cNvSpPr txBox="1"/>
+          <p:nvPr/>
+        </p:nvSpPr>
+        <p:spPr>
+          <a:xfrm>
+            <a:off x="3209544" y="3035808"/>
+            <a:ext cx="5568696" cy="256032"/>
+          </a:xfrm>
+          <a:prstGeom prst="rect">
+            <a:avLst/>
+          </a:prstGeom>
+          <a:noFill/>
+        </p:spPr>
+        <p:txBody>
+          <a:bodyPr wrap="square" lIns="0" rIns="0" tIns="0" bIns="0" anchor="t">
+            <a:spAutoFit/>
+          </a:bodyPr>
+          <a:lstStyle/>
+          <a:p>
+            <a:pPr algn="l">
+              <a:lnSpc>
+                <a:spcPct val="100000"/>
+              </a:lnSpc>
+              <a:spcBef>
+                <a:spcPts val="0"/>
+              </a:spcBef>
+              <a:spcAft>
+                <a:spcPts val="0"/>
+              </a:spcAft>
+            </a:pPr>
+            <a:r>
+              <a:rPr sz="1050" b="1" i="0">
+                <a:solidFill>
+                  <a:srgbClr val="1B3E6E"/>
+                </a:solidFill>
+                <a:latin typeface="Arial"/>
+              </a:rPr>
+              <a:t>Why the GS grant stands out here</a:t>
+            </a:r>
+          </a:p>
+        </p:txBody>
+      </p:sp>
+      <p:sp>
+        <p:nvSpPr>
+          <p:cNvPr id="34" name="Rectangle 33"/>
+          <p:cNvSpPr/>
+          <p:nvPr/>
+        </p:nvSpPr>
+        <p:spPr>
+          <a:xfrm>
+            <a:off x="3063240" y="3310127"/>
+            <a:ext cx="5715000" cy="10972"/>
+          </a:xfrm>
+          <a:prstGeom prst="rect">
+            <a:avLst/>
+          </a:prstGeom>
+          <a:solidFill>
+            <a:srgbClr val="BFBFBF"/>
+          </a:solidFill>
+          <a:ln>
+            <a:noFill/>
+          </a:ln>
+          <a:effectLst/>
+        </p:spPr>
+        <p:style>
+          <a:lnRef idx="1">
+            <a:schemeClr val="accent1"/>
+          </a:lnRef>
+          <a:fillRef idx="3">
+            <a:schemeClr val="accent1"/>
+          </a:fillRef>
+          <a:effectRef idx="2">
+            <a:schemeClr val="accent1"/>
+          </a:effectRef>
+          <a:fontRef idx="minor">
+            <a:schemeClr val="lt1"/>
+          </a:fontRef>
+        </p:style>
+        <p:txBody>
+          <a:bodyPr rtlCol="0" anchor="ctr"/>
+          <a:lstStyle/>
+          <a:p>
+            <a:pPr algn="ctr"/>
+          </a:p>
+        </p:txBody>
+      </p:sp>
+      <p:sp>
+        <p:nvSpPr>
+          <p:cNvPr id="35" name="TextBox 34"/>
+          <p:cNvSpPr txBox="1"/>
+          <p:nvPr/>
+        </p:nvSpPr>
+        <p:spPr>
+          <a:xfrm>
+            <a:off x="3063240" y="3401568"/>
+            <a:ext cx="5715000" cy="384048"/>
+          </a:xfrm>
+          <a:prstGeom prst="rect">
+            <a:avLst/>
+          </a:prstGeom>
+          <a:noFill/>
+        </p:spPr>
+        <p:txBody>
+          <a:bodyPr wrap="square" lIns="0" rIns="0" tIns="0" bIns="0" anchor="t">
+            <a:spAutoFit/>
+          </a:bodyPr>
+          <a:lstStyle/>
+          <a:p>
+            <a:pPr algn="l">
+              <a:lnSpc>
+                <a:spcPct val="98000"/>
+              </a:lnSpc>
+              <a:spcBef>
+                <a:spcPts val="0"/>
+              </a:spcBef>
+              <a:spcAft>
+                <a:spcPts val="0"/>
+              </a:spcAft>
+            </a:pPr>
+            <a:r>
+              <a:rPr sz="800" b="1" i="0">
+                <a:solidFill>
+                  <a:srgbClr val="398025"/>
+                </a:solidFill>
+                <a:latin typeface="Arial"/>
+              </a:rPr>
+              <a:t>✓  Structural, not sustenance:  </a:t>
+            </a:r>
+            <a:r>
+              <a:rPr sz="800" b="0" i="0">
+                <a:solidFill>
+                  <a:srgbClr val="333333"/>
+                </a:solidFill>
+                <a:latin typeface="Arial"/>
+              </a:rPr>
+              <a:t>others fund meals for a year; GS funds the technology that makes every future meal cheaper</a:t>
+            </a:r>
+          </a:p>
+        </p:txBody>
+      </p:sp>
+      <p:sp>
+        <p:nvSpPr>
+          <p:cNvPr id="36" name="TextBox 35"/>
+          <p:cNvSpPr txBox="1"/>
+          <p:nvPr/>
+        </p:nvSpPr>
+        <p:spPr>
+          <a:xfrm>
+            <a:off x="3063240" y="3753611"/>
+            <a:ext cx="5715000" cy="384048"/>
+          </a:xfrm>
+          <a:prstGeom prst="rect">
+            <a:avLst/>
+          </a:prstGeom>
+          <a:noFill/>
+        </p:spPr>
+        <p:txBody>
+          <a:bodyPr wrap="square" lIns="0" rIns="0" tIns="0" bIns="0" anchor="t">
+            <a:spAutoFit/>
+          </a:bodyPr>
+          <a:lstStyle/>
+          <a:p>
+            <a:pPr algn="l">
+              <a:lnSpc>
+                <a:spcPct val="98000"/>
+              </a:lnSpc>
+              <a:spcBef>
+                <a:spcPts val="0"/>
+              </a:spcBef>
+              <a:spcAft>
+                <a:spcPts val="0"/>
+              </a:spcAft>
+            </a:pPr>
+            <a:r>
+              <a:rPr sz="800" b="1" i="0">
+                <a:solidFill>
+                  <a:srgbClr val="398025"/>
+                </a:solidFill>
+                <a:latin typeface="Arial"/>
+              </a:rPr>
+              <a:t>✓  Plays to GS DNA:  </a:t>
+            </a:r>
+            <a:r>
+              <a:rPr sz="800" b="0" i="0">
+                <a:solidFill>
+                  <a:srgbClr val="333333"/>
+                </a:solidFill>
+                <a:latin typeface="Arial"/>
+              </a:rPr>
+              <a:t>forecasting, optimisation &amp; risk controls — GS engineering mentors the build pro bono</a:t>
+            </a:r>
+          </a:p>
+        </p:txBody>
+      </p:sp>
+      <p:sp>
+        <p:nvSpPr>
+          <p:cNvPr id="37" name="TextBox 36"/>
+          <p:cNvSpPr txBox="1"/>
+          <p:nvPr/>
+        </p:nvSpPr>
+        <p:spPr>
+          <a:xfrm>
+            <a:off x="3063240" y="4105655"/>
+            <a:ext cx="5715000" cy="384048"/>
+          </a:xfrm>
+          <a:prstGeom prst="rect">
+            <a:avLst/>
+          </a:prstGeom>
+          <a:noFill/>
+        </p:spPr>
+        <p:txBody>
+          <a:bodyPr wrap="square" lIns="0" rIns="0" tIns="0" bIns="0" anchor="t">
+            <a:spAutoFit/>
+          </a:bodyPr>
+          <a:lstStyle/>
+          <a:p>
+            <a:pPr algn="l">
+              <a:lnSpc>
+                <a:spcPct val="98000"/>
+              </a:lnSpc>
+              <a:spcBef>
+                <a:spcPts val="0"/>
+              </a:spcBef>
+              <a:spcAft>
+                <a:spcPts val="0"/>
+              </a:spcAft>
+            </a:pPr>
+            <a:r>
+              <a:rPr sz="800" b="1" i="0">
+                <a:solidFill>
+                  <a:srgbClr val="398025"/>
+                </a:solidFill>
+                <a:latin typeface="Arial"/>
+              </a:rPr>
+              <a:t>✓  Measurable ROI:  </a:t>
+            </a:r>
+            <a:r>
+              <a:rPr sz="800" b="0" i="0">
+                <a:solidFill>
+                  <a:srgbClr val="333333"/>
+                </a:solidFill>
+                <a:latin typeface="Arial"/>
+              </a:rPr>
+              <a:t>$310k/yr audited savings; KPI dashboard shared quarterly with GS</a:t>
+            </a:r>
+          </a:p>
+        </p:txBody>
+      </p:sp>
+      <p:sp>
+        <p:nvSpPr>
+          <p:cNvPr id="38" name="TextBox 37"/>
+          <p:cNvSpPr txBox="1"/>
+          <p:nvPr/>
+        </p:nvSpPr>
+        <p:spPr>
+          <a:xfrm>
+            <a:off x="3063240" y="4457699"/>
+            <a:ext cx="5715000" cy="384048"/>
+          </a:xfrm>
+          <a:prstGeom prst="rect">
+            <a:avLst/>
+          </a:prstGeom>
+          <a:noFill/>
+        </p:spPr>
+        <p:txBody>
+          <a:bodyPr wrap="square" lIns="0" rIns="0" tIns="0" bIns="0" anchor="t">
+            <a:spAutoFit/>
+          </a:bodyPr>
+          <a:lstStyle/>
+          <a:p>
+            <a:pPr algn="l">
+              <a:lnSpc>
+                <a:spcPct val="98000"/>
+              </a:lnSpc>
+              <a:spcBef>
+                <a:spcPts val="0"/>
+              </a:spcBef>
+              <a:spcAft>
+                <a:spcPts val="0"/>
+              </a:spcAft>
+            </a:pPr>
+            <a:r>
+              <a:rPr sz="800" b="1" i="0">
+                <a:solidFill>
+                  <a:srgbClr val="398025"/>
+                </a:solidFill>
+                <a:latin typeface="Arial"/>
+              </a:rPr>
+              <a:t>✓  Scalable blueprint:  </a:t>
+            </a:r>
+            <a:r>
+              <a:rPr sz="800" b="0" i="0">
+                <a:solidFill>
+                  <a:srgbClr val="333333"/>
+                </a:solidFill>
+                <a:latin typeface="Arial"/>
+              </a:rPr>
+              <a:t>proven once, extends to school-feeding programmes across South Asia &amp; Africa</a:t>
+            </a:r>
+          </a:p>
+        </p:txBody>
+      </p:sp>
+      <p:sp>
+        <p:nvSpPr>
+          <p:cNvPr id="39" name="Rectangle 38"/>
+          <p:cNvSpPr/>
+          <p:nvPr/>
+        </p:nvSpPr>
+        <p:spPr>
+          <a:xfrm>
+            <a:off x="3063240" y="4937759"/>
+            <a:ext cx="5715000" cy="10972"/>
+          </a:xfrm>
+          <a:prstGeom prst="rect">
+            <a:avLst/>
+          </a:prstGeom>
+          <a:solidFill>
+            <a:srgbClr val="E0E0E0"/>
+          </a:solidFill>
+          <a:ln>
+            <a:noFill/>
+          </a:ln>
+          <a:effectLst/>
+        </p:spPr>
+        <p:style>
+          <a:lnRef idx="1">
+            <a:schemeClr val="accent1"/>
+          </a:lnRef>
+          <a:fillRef idx="3">
+            <a:schemeClr val="accent1"/>
+          </a:fillRef>
+          <a:effectRef idx="2">
+            <a:schemeClr val="accent1"/>
+          </a:effectRef>
+          <a:fontRef idx="minor">
+            <a:schemeClr val="lt1"/>
+          </a:fontRef>
+        </p:style>
+        <p:txBody>
+          <a:bodyPr rtlCol="0" anchor="ctr"/>
+          <a:lstStyle/>
+          <a:p>
+            <a:pPr algn="ctr"/>
+          </a:p>
+        </p:txBody>
+      </p:sp>
+      <p:sp>
+        <p:nvSpPr>
+          <p:cNvPr id="40" name="Rectangle 39"/>
+          <p:cNvSpPr/>
+          <p:nvPr/>
+        </p:nvSpPr>
+        <p:spPr>
+          <a:xfrm>
+            <a:off x="3063240" y="5029199"/>
+            <a:ext cx="658368" cy="841248"/>
+          </a:xfrm>
+          <a:prstGeom prst="rect">
+            <a:avLst/>
+          </a:prstGeom>
+          <a:solidFill>
+            <a:srgbClr val="F2F2F2"/>
+          </a:solidFill>
+          <a:ln w="12700">
+            <a:solidFill>
+              <a:srgbClr val="727375"/>
+            </a:solidFill>
+            <a:prstDash val="dash"/>
+          </a:ln>
+          <a:effectLst/>
+        </p:spPr>
+        <p:style>
+          <a:lnRef idx="1">
+            <a:schemeClr val="accent1"/>
+          </a:lnRef>
+          <a:fillRef idx="3">
+            <a:schemeClr val="accent1"/>
+          </a:fillRef>
+          <a:effectRef idx="2">
+            <a:schemeClr val="accent1"/>
+          </a:effectRef>
+          <a:fontRef idx="minor">
+            <a:schemeClr val="lt1"/>
+          </a:fontRef>
+        </p:style>
+        <p:txBody>
+          <a:bodyPr rtlCol="0" anchor="ctr"/>
+          <a:lstStyle/>
+          <a:p>
+            <a:pPr algn="ctr"/>
+          </a:p>
+        </p:txBody>
+      </p:sp>
+      <p:sp>
+        <p:nvSpPr>
+          <p:cNvPr id="41" name="TextBox 40"/>
+          <p:cNvSpPr txBox="1"/>
+          <p:nvPr/>
+        </p:nvSpPr>
+        <p:spPr>
+          <a:xfrm>
+            <a:off x="3118104" y="5029199"/>
+            <a:ext cx="548640" cy="841248"/>
+          </a:xfrm>
+          <a:prstGeom prst="rect">
+            <a:avLst/>
+          </a:prstGeom>
+          <a:noFill/>
+        </p:spPr>
+        <p:txBody>
+          <a:bodyPr wrap="square" lIns="0" rIns="0" tIns="0" bIns="0" anchor="ctr">
+            <a:spAutoFit/>
+          </a:bodyPr>
+          <a:lstStyle/>
+          <a:p>
+            <a:pPr algn="ctr">
+              <a:lnSpc>
+                <a:spcPct val="100000"/>
+              </a:lnSpc>
+              <a:spcBef>
+                <a:spcPts val="0"/>
+              </a:spcBef>
+              <a:spcAft>
+                <a:spcPts val="100"/>
+              </a:spcAft>
+            </a:pPr>
+            <a:r>
+              <a:rPr sz="850" b="1" i="0">
+                <a:solidFill>
+                  <a:srgbClr val="727375"/>
+                </a:solidFill>
+                <a:latin typeface="Arial"/>
+              </a:rPr>
+              <a:t>📷
+Krishna
+Kumar</a:t>
+            </a:r>
+          </a:p>
+        </p:txBody>
+      </p:sp>
+      <p:sp>
+        <p:nvSpPr>
+          <p:cNvPr id="42" name="TextBox 41"/>
+          <p:cNvSpPr txBox="1"/>
+          <p:nvPr/>
+        </p:nvSpPr>
+        <p:spPr>
+          <a:xfrm>
+            <a:off x="3849624" y="5047487"/>
+            <a:ext cx="2212848" cy="868680"/>
+          </a:xfrm>
+          <a:prstGeom prst="rect">
+            <a:avLst/>
+          </a:prstGeom>
+          <a:noFill/>
+        </p:spPr>
+        <p:txBody>
+          <a:bodyPr wrap="square" lIns="0" rIns="0" tIns="0" bIns="0" anchor="t">
+            <a:spAutoFit/>
+          </a:bodyPr>
+          <a:lstStyle/>
+          <a:p>
+            <a:pPr algn="l">
+              <a:lnSpc>
+                <a:spcPct val="100000"/>
+              </a:lnSpc>
+              <a:spcBef>
+                <a:spcPts val="0"/>
+              </a:spcBef>
+              <a:spcAft>
+                <a:spcPts val="200"/>
+              </a:spcAft>
+            </a:pPr>
+            <a:r>
+              <a:rPr sz="720" b="0" i="1">
+                <a:solidFill>
+                  <a:srgbClr val="333333"/>
+                </a:solidFill>
+                <a:latin typeface="Arial"/>
+              </a:rPr>
+              <a:t>“The mid-day meal was the reason I stayed in school. Today I manage portfolios instead of an empty stomach.”</a:t>
+            </a:r>
+          </a:p>
+          <a:p>
+            <a:pPr algn="l">
+              <a:lnSpc>
+                <a:spcPct val="100000"/>
+              </a:lnSpc>
+              <a:spcBef>
+                <a:spcPts val="0"/>
+              </a:spcBef>
+              <a:spcAft>
+                <a:spcPts val="0"/>
+              </a:spcAft>
+            </a:pPr>
+            <a:r>
+              <a:rPr sz="680" b="1" i="0">
+                <a:solidFill>
+                  <a:srgbClr val="1B3E6E"/>
+                </a:solidFill>
+                <a:latin typeface="Arial"/>
+              </a:rPr>
+              <a:t>— Krishna Kumar, </a:t>
+            </a:r>
+            <a:r>
+              <a:rPr sz="680" b="0" i="0">
+                <a:solidFill>
+                  <a:srgbClr val="727375"/>
+                </a:solidFill>
+                <a:latin typeface="Arial"/>
+              </a:rPr>
+              <a:t>AVP, HSBC — former beneficiary</a:t>
+            </a:r>
+          </a:p>
+        </p:txBody>
+      </p:sp>
+      <p:sp>
+        <p:nvSpPr>
+          <p:cNvPr id="43" name="Rectangle 42"/>
+          <p:cNvSpPr/>
+          <p:nvPr/>
+        </p:nvSpPr>
+        <p:spPr>
+          <a:xfrm>
+            <a:off x="6227064" y="5029199"/>
+            <a:ext cx="10972" cy="868680"/>
+          </a:xfrm>
+          <a:prstGeom prst="rect">
+            <a:avLst/>
+          </a:prstGeom>
+          <a:solidFill>
+            <a:srgbClr val="DDDDDD"/>
+          </a:solidFill>
+          <a:ln>
+            <a:noFill/>
+          </a:ln>
+          <a:effectLst/>
+        </p:spPr>
+        <p:style>
+          <a:lnRef idx="1">
+            <a:schemeClr val="accent1"/>
+          </a:lnRef>
+          <a:fillRef idx="3">
+            <a:schemeClr val="accent1"/>
+          </a:fillRef>
+          <a:effectRef idx="2">
+            <a:schemeClr val="accent1"/>
+          </a:effectRef>
+          <a:fontRef idx="minor">
+            <a:schemeClr val="lt1"/>
+          </a:fontRef>
+        </p:style>
+        <p:txBody>
+          <a:bodyPr rtlCol="0" anchor="ctr"/>
+          <a:lstStyle/>
+          <a:p>
+            <a:pPr algn="ctr"/>
+          </a:p>
+        </p:txBody>
+      </p:sp>
+      <p:sp>
+        <p:nvSpPr>
+          <p:cNvPr id="44" name="TextBox 43"/>
+          <p:cNvSpPr txBox="1"/>
+          <p:nvPr/>
+        </p:nvSpPr>
+        <p:spPr>
+          <a:xfrm>
+            <a:off x="6373368" y="5029199"/>
+            <a:ext cx="2404872" cy="201168"/>
+          </a:xfrm>
+          <a:prstGeom prst="rect">
+            <a:avLst/>
+          </a:prstGeom>
+          <a:noFill/>
+        </p:spPr>
+        <p:txBody>
+          <a:bodyPr wrap="square" lIns="0" rIns="0" tIns="0" bIns="0" anchor="t">
+            <a:spAutoFit/>
+          </a:bodyPr>
+          <a:lstStyle/>
+          <a:p>
+            <a:pPr algn="l">
+              <a:lnSpc>
+                <a:spcPct val="100000"/>
+              </a:lnSpc>
+              <a:spcBef>
+                <a:spcPts val="0"/>
+              </a:spcBef>
+              <a:spcAft>
+                <a:spcPts val="0"/>
+              </a:spcAft>
+            </a:pPr>
+            <a:r>
+              <a:rPr sz="819" b="1" i="0">
+                <a:solidFill>
+                  <a:srgbClr val="1B3E6E"/>
+                </a:solidFill>
+                <a:latin typeface="Arial"/>
+              </a:rPr>
+              <a:t>Trusted by leading corporates </a:t>
+            </a:r>
+            <a:r>
+              <a:rPr sz="819" b="0" i="0">
+                <a:solidFill>
+                  <a:srgbClr val="727375"/>
+                </a:solidFill>
+                <a:latin typeface="Arial"/>
+              </a:rPr>
+              <a:t>(+200 more)</a:t>
+            </a:r>
+          </a:p>
+        </p:txBody>
+      </p:sp>
+      <p:sp>
+        <p:nvSpPr>
+          <p:cNvPr id="45" name="Rectangle 44"/>
+          <p:cNvSpPr/>
+          <p:nvPr/>
+        </p:nvSpPr>
+        <p:spPr>
+          <a:xfrm>
+            <a:off x="6373368" y="5266943"/>
+            <a:ext cx="765047" cy="292608"/>
+          </a:xfrm>
+          <a:prstGeom prst="rect">
+            <a:avLst/>
+          </a:prstGeom>
+          <a:solidFill>
+            <a:srgbClr val="F2F2F2"/>
+          </a:solidFill>
+          <a:ln w="12700">
+            <a:solidFill>
+              <a:srgbClr val="727375"/>
+            </a:solidFill>
+            <a:prstDash val="dash"/>
+          </a:ln>
+          <a:effectLst/>
+        </p:spPr>
+        <p:style>
+          <a:lnRef idx="1">
+            <a:schemeClr val="accent1"/>
+          </a:lnRef>
+          <a:fillRef idx="3">
+            <a:schemeClr val="accent1"/>
+          </a:fillRef>
+          <a:effectRef idx="2">
+            <a:schemeClr val="accent1"/>
+          </a:effectRef>
+          <a:fontRef idx="minor">
+            <a:schemeClr val="lt1"/>
+          </a:fontRef>
+        </p:style>
+        <p:txBody>
+          <a:bodyPr rtlCol="0" anchor="ctr"/>
+          <a:lstStyle/>
+          <a:p>
+            <a:pPr algn="ctr"/>
+          </a:p>
+        </p:txBody>
+      </p:sp>
+      <p:sp>
+        <p:nvSpPr>
+          <p:cNvPr id="46" name="TextBox 45"/>
+          <p:cNvSpPr txBox="1"/>
+          <p:nvPr/>
+        </p:nvSpPr>
+        <p:spPr>
+          <a:xfrm>
+            <a:off x="6428232" y="5266943"/>
+            <a:ext cx="655319" cy="292608"/>
+          </a:xfrm>
+          <a:prstGeom prst="rect">
+            <a:avLst/>
+          </a:prstGeom>
+          <a:noFill/>
+        </p:spPr>
+        <p:txBody>
+          <a:bodyPr wrap="square" lIns="0" rIns="0" tIns="0" bIns="0" anchor="ctr">
+            <a:spAutoFit/>
+          </a:bodyPr>
+          <a:lstStyle/>
+          <a:p>
+            <a:pPr algn="ctr">
+              <a:lnSpc>
+                <a:spcPct val="100000"/>
+              </a:lnSpc>
+              <a:spcBef>
+                <a:spcPts val="0"/>
+              </a:spcBef>
+              <a:spcAft>
+                <a:spcPts val="100"/>
+              </a:spcAft>
+            </a:pPr>
+            <a:r>
+              <a:rPr sz="850" b="1" i="0">
+                <a:solidFill>
+                  <a:srgbClr val="727375"/>
+                </a:solidFill>
+                <a:latin typeface="Arial"/>
+              </a:rPr>
+              <a:t>Infosys</a:t>
+            </a:r>
+          </a:p>
+        </p:txBody>
+      </p:sp>
+      <p:sp>
+        <p:nvSpPr>
+          <p:cNvPr id="47" name="Rectangle 46"/>
+          <p:cNvSpPr/>
+          <p:nvPr/>
+        </p:nvSpPr>
+        <p:spPr>
+          <a:xfrm>
+            <a:off x="7193280" y="5266943"/>
+            <a:ext cx="765047" cy="292608"/>
+          </a:xfrm>
+          <a:prstGeom prst="rect">
+            <a:avLst/>
+          </a:prstGeom>
+          <a:solidFill>
+            <a:srgbClr val="F2F2F2"/>
+          </a:solidFill>
+          <a:ln w="12700">
+            <a:solidFill>
+              <a:srgbClr val="727375"/>
+            </a:solidFill>
+            <a:prstDash val="dash"/>
+          </a:ln>
+          <a:effectLst/>
+        </p:spPr>
+        <p:style>
+          <a:lnRef idx="1">
+            <a:schemeClr val="accent1"/>
+          </a:lnRef>
+          <a:fillRef idx="3">
+            <a:schemeClr val="accent1"/>
+          </a:fillRef>
+          <a:effectRef idx="2">
+            <a:schemeClr val="accent1"/>
+          </a:effectRef>
+          <a:fontRef idx="minor">
+            <a:schemeClr val="lt1"/>
+          </a:fontRef>
+        </p:style>
+        <p:txBody>
+          <a:bodyPr rtlCol="0" anchor="ctr"/>
+          <a:lstStyle/>
+          <a:p>
+            <a:pPr algn="ctr"/>
+          </a:p>
+        </p:txBody>
+      </p:sp>
+      <p:sp>
+        <p:nvSpPr>
+          <p:cNvPr id="48" name="TextBox 47"/>
+          <p:cNvSpPr txBox="1"/>
+          <p:nvPr/>
+        </p:nvSpPr>
+        <p:spPr>
+          <a:xfrm>
+            <a:off x="7248144" y="5266943"/>
+            <a:ext cx="655319" cy="292608"/>
+          </a:xfrm>
+          <a:prstGeom prst="rect">
+            <a:avLst/>
+          </a:prstGeom>
+          <a:noFill/>
+        </p:spPr>
+        <p:txBody>
+          <a:bodyPr wrap="square" lIns="0" rIns="0" tIns="0" bIns="0" anchor="ctr">
+            <a:spAutoFit/>
+          </a:bodyPr>
+          <a:lstStyle/>
+          <a:p>
+            <a:pPr algn="ctr">
+              <a:lnSpc>
+                <a:spcPct val="100000"/>
+              </a:lnSpc>
+              <a:spcBef>
+                <a:spcPts val="0"/>
+              </a:spcBef>
+              <a:spcAft>
+                <a:spcPts val="100"/>
+              </a:spcAft>
+            </a:pPr>
+            <a:r>
+              <a:rPr sz="850" b="1" i="0">
+                <a:solidFill>
+                  <a:srgbClr val="727375"/>
+                </a:solidFill>
+                <a:latin typeface="Arial"/>
+              </a:rPr>
+              <a:t>TCS</a:t>
+            </a:r>
+          </a:p>
+        </p:txBody>
+      </p:sp>
+      <p:sp>
+        <p:nvSpPr>
+          <p:cNvPr id="49" name="Rectangle 48"/>
+          <p:cNvSpPr/>
+          <p:nvPr/>
+        </p:nvSpPr>
+        <p:spPr>
+          <a:xfrm>
+            <a:off x="8013192" y="5266943"/>
+            <a:ext cx="765047" cy="292608"/>
+          </a:xfrm>
+          <a:prstGeom prst="rect">
+            <a:avLst/>
+          </a:prstGeom>
+          <a:solidFill>
+            <a:srgbClr val="F2F2F2"/>
+          </a:solidFill>
+          <a:ln w="12700">
+            <a:solidFill>
+              <a:srgbClr val="727375"/>
+            </a:solidFill>
+            <a:prstDash val="dash"/>
+          </a:ln>
+          <a:effectLst/>
+        </p:spPr>
+        <p:style>
+          <a:lnRef idx="1">
+            <a:schemeClr val="accent1"/>
+          </a:lnRef>
+          <a:fillRef idx="3">
+            <a:schemeClr val="accent1"/>
+          </a:fillRef>
+          <a:effectRef idx="2">
+            <a:schemeClr val="accent1"/>
+          </a:effectRef>
+          <a:fontRef idx="minor">
+            <a:schemeClr val="lt1"/>
+          </a:fontRef>
+        </p:style>
+        <p:txBody>
+          <a:bodyPr rtlCol="0" anchor="ctr"/>
+          <a:lstStyle/>
+          <a:p>
+            <a:pPr algn="ctr"/>
+          </a:p>
+        </p:txBody>
+      </p:sp>
+      <p:sp>
+        <p:nvSpPr>
+          <p:cNvPr id="50" name="TextBox 49"/>
+          <p:cNvSpPr txBox="1"/>
+          <p:nvPr/>
+        </p:nvSpPr>
+        <p:spPr>
+          <a:xfrm>
+            <a:off x="8068056" y="5266943"/>
+            <a:ext cx="655319" cy="292608"/>
+          </a:xfrm>
+          <a:prstGeom prst="rect">
+            <a:avLst/>
+          </a:prstGeom>
+          <a:noFill/>
+        </p:spPr>
+        <p:txBody>
+          <a:bodyPr wrap="square" lIns="0" rIns="0" tIns="0" bIns="0" anchor="ctr">
+            <a:spAutoFit/>
+          </a:bodyPr>
+          <a:lstStyle/>
+          <a:p>
+            <a:pPr algn="ctr">
+              <a:lnSpc>
+                <a:spcPct val="100000"/>
+              </a:lnSpc>
+              <a:spcBef>
+                <a:spcPts val="0"/>
+              </a:spcBef>
+              <a:spcAft>
+                <a:spcPts val="100"/>
+              </a:spcAft>
+            </a:pPr>
+            <a:r>
+              <a:rPr sz="850" b="1" i="0">
+                <a:solidFill>
+                  <a:srgbClr val="727375"/>
+                </a:solidFill>
+                <a:latin typeface="Arial"/>
+              </a:rPr>
+              <a:t>HDFC</a:t>
+            </a:r>
+          </a:p>
+        </p:txBody>
+      </p:sp>
+      <p:sp>
+        <p:nvSpPr>
+          <p:cNvPr id="51" name="Rectangle 50"/>
+          <p:cNvSpPr/>
+          <p:nvPr/>
+        </p:nvSpPr>
+        <p:spPr>
+          <a:xfrm>
+            <a:off x="6373368" y="5614415"/>
+            <a:ext cx="765047" cy="292608"/>
+          </a:xfrm>
+          <a:prstGeom prst="rect">
+            <a:avLst/>
+          </a:prstGeom>
+          <a:solidFill>
+            <a:srgbClr val="F2F2F2"/>
+          </a:solidFill>
+          <a:ln w="12700">
+            <a:solidFill>
+              <a:srgbClr val="727375"/>
+            </a:solidFill>
+            <a:prstDash val="dash"/>
+          </a:ln>
+          <a:effectLst/>
+        </p:spPr>
+        <p:style>
+          <a:lnRef idx="1">
+            <a:schemeClr val="accent1"/>
+          </a:lnRef>
+          <a:fillRef idx="3">
+            <a:schemeClr val="accent1"/>
+          </a:fillRef>
+          <a:effectRef idx="2">
+            <a:schemeClr val="accent1"/>
+          </a:effectRef>
+          <a:fontRef idx="minor">
+            <a:schemeClr val="lt1"/>
+          </a:fontRef>
+        </p:style>
+        <p:txBody>
+          <a:bodyPr rtlCol="0" anchor="ctr"/>
+          <a:lstStyle/>
+          <a:p>
+            <a:pPr algn="ctr"/>
+          </a:p>
+        </p:txBody>
+      </p:sp>
+      <p:sp>
+        <p:nvSpPr>
+          <p:cNvPr id="52" name="TextBox 51"/>
+          <p:cNvSpPr txBox="1"/>
+          <p:nvPr/>
+        </p:nvSpPr>
+        <p:spPr>
+          <a:xfrm>
+            <a:off x="6428232" y="5614415"/>
+            <a:ext cx="655319" cy="292608"/>
+          </a:xfrm>
+          <a:prstGeom prst="rect">
+            <a:avLst/>
+          </a:prstGeom>
+          <a:noFill/>
+        </p:spPr>
+        <p:txBody>
+          <a:bodyPr wrap="square" lIns="0" rIns="0" tIns="0" bIns="0" anchor="ctr">
+            <a:spAutoFit/>
+          </a:bodyPr>
+          <a:lstStyle/>
+          <a:p>
+            <a:pPr algn="ctr">
+              <a:lnSpc>
+                <a:spcPct val="100000"/>
+              </a:lnSpc>
+              <a:spcBef>
+                <a:spcPts val="0"/>
+              </a:spcBef>
+              <a:spcAft>
+                <a:spcPts val="100"/>
+              </a:spcAft>
+            </a:pPr>
+            <a:r>
+              <a:rPr sz="850" b="1" i="0">
+                <a:solidFill>
+                  <a:srgbClr val="727375"/>
+                </a:solidFill>
+                <a:latin typeface="Arial"/>
+              </a:rPr>
+              <a:t>Amazon</a:t>
+            </a:r>
+          </a:p>
+        </p:txBody>
+      </p:sp>
+      <p:sp>
+        <p:nvSpPr>
+          <p:cNvPr id="53" name="Rectangle 52"/>
+          <p:cNvSpPr/>
+          <p:nvPr/>
+        </p:nvSpPr>
+        <p:spPr>
+          <a:xfrm>
+            <a:off x="7193280" y="5614415"/>
+            <a:ext cx="765047" cy="292608"/>
+          </a:xfrm>
+          <a:prstGeom prst="rect">
+            <a:avLst/>
+          </a:prstGeom>
+          <a:solidFill>
+            <a:srgbClr val="F2F2F2"/>
+          </a:solidFill>
+          <a:ln w="12700">
+            <a:solidFill>
+              <a:srgbClr val="727375"/>
+            </a:solidFill>
+            <a:prstDash val="dash"/>
+          </a:ln>
+          <a:effectLst/>
+        </p:spPr>
+        <p:style>
+          <a:lnRef idx="1">
+            <a:schemeClr val="accent1"/>
+          </a:lnRef>
+          <a:fillRef idx="3">
+            <a:schemeClr val="accent1"/>
+          </a:fillRef>
+          <a:effectRef idx="2">
+            <a:schemeClr val="accent1"/>
+          </a:effectRef>
+          <a:fontRef idx="minor">
+            <a:schemeClr val="lt1"/>
+          </a:fontRef>
+        </p:style>
+        <p:txBody>
+          <a:bodyPr rtlCol="0" anchor="ctr"/>
+          <a:lstStyle/>
+          <a:p>
+            <a:pPr algn="ctr"/>
+          </a:p>
+        </p:txBody>
+      </p:sp>
+      <p:sp>
+        <p:nvSpPr>
+          <p:cNvPr id="54" name="TextBox 53"/>
+          <p:cNvSpPr txBox="1"/>
+          <p:nvPr/>
+        </p:nvSpPr>
+        <p:spPr>
+          <a:xfrm>
+            <a:off x="7248144" y="5614415"/>
+            <a:ext cx="655319" cy="292608"/>
+          </a:xfrm>
+          <a:prstGeom prst="rect">
+            <a:avLst/>
+          </a:prstGeom>
+          <a:noFill/>
+        </p:spPr>
+        <p:txBody>
+          <a:bodyPr wrap="square" lIns="0" rIns="0" tIns="0" bIns="0" anchor="ctr">
+            <a:spAutoFit/>
+          </a:bodyPr>
+          <a:lstStyle/>
+          <a:p>
+            <a:pPr algn="ctr">
+              <a:lnSpc>
+                <a:spcPct val="100000"/>
+              </a:lnSpc>
+              <a:spcBef>
+                <a:spcPts val="0"/>
+              </a:spcBef>
+              <a:spcAft>
+                <a:spcPts val="100"/>
+              </a:spcAft>
+            </a:pPr>
+            <a:r>
+              <a:rPr sz="850" b="1" i="0">
+                <a:solidFill>
+                  <a:srgbClr val="727375"/>
+                </a:solidFill>
+                <a:latin typeface="Arial"/>
+              </a:rPr>
+              <a:t>Airbus</a:t>
+            </a:r>
+          </a:p>
+        </p:txBody>
+      </p:sp>
+      <p:sp>
+        <p:nvSpPr>
+          <p:cNvPr id="55" name="Rectangle 54"/>
+          <p:cNvSpPr/>
+          <p:nvPr/>
+        </p:nvSpPr>
+        <p:spPr>
+          <a:xfrm>
+            <a:off x="8013192" y="5614415"/>
+            <a:ext cx="765047" cy="292608"/>
+          </a:xfrm>
+          <a:prstGeom prst="rect">
+            <a:avLst/>
+          </a:prstGeom>
+          <a:solidFill>
+            <a:srgbClr val="F2F2F2"/>
+          </a:solidFill>
+          <a:ln w="12700">
+            <a:solidFill>
+              <a:srgbClr val="727375"/>
+            </a:solidFill>
+            <a:prstDash val="dash"/>
+          </a:ln>
+          <a:effectLst/>
+        </p:spPr>
+        <p:style>
+          <a:lnRef idx="1">
+            <a:schemeClr val="accent1"/>
+          </a:lnRef>
+          <a:fillRef idx="3">
+            <a:schemeClr val="accent1"/>
+          </a:fillRef>
+          <a:effectRef idx="2">
+            <a:schemeClr val="accent1"/>
+          </a:effectRef>
+          <a:fontRef idx="minor">
+            <a:schemeClr val="lt1"/>
+          </a:fontRef>
+        </p:style>
+        <p:txBody>
+          <a:bodyPr rtlCol="0" anchor="ctr"/>
+          <a:lstStyle/>
+          <a:p>
+            <a:pPr algn="ctr"/>
+          </a:p>
+        </p:txBody>
+      </p:sp>
+      <p:sp>
+        <p:nvSpPr>
+          <p:cNvPr id="56" name="TextBox 55"/>
+          <p:cNvSpPr txBox="1"/>
+          <p:nvPr/>
+        </p:nvSpPr>
+        <p:spPr>
+          <a:xfrm>
+            <a:off x="8068056" y="5614415"/>
+            <a:ext cx="655319" cy="292608"/>
           </a:xfrm>
           <a:prstGeom prst="rect">
             <a:avLst/>

--- a/AkshayaPatra_GS_Pitch.pptx
+++ b/AkshayaPatra_GS_Pitch.pptx
@@ -11,6 +11,7 @@
     <p:sldId id="259" r:id="rId10"/>
     <p:sldId id="260" r:id="rId11"/>
     <p:sldId id="261" r:id="rId12"/>
+    <p:sldId id="262" r:id="rId13"/>
   </p:sldIdLst>
   <p:sldSz cx="9144000" cy="6858000" type="screen4x3"/>
   <p:notesSz cx="6858000" cy="9144000"/>
@@ -17913,6 +17914,1947 @@
                 <a:latin typeface="Arial"/>
               </a:rPr>
               <a:t>SBI</a:t>
+            </a:r>
+          </a:p>
+        </p:txBody>
+      </p:sp>
+    </p:spTree>
+  </p:cSld>
+  <p:clrMapOvr>
+    <a:masterClrMapping/>
+  </p:clrMapOvr>
+</p:sld>
+</file>
+
+<file path=ppt/slides/slide7.xml><?xml version="1.0" encoding="utf-8"?>
+<p:sld xmlns:a="http://schemas.openxmlformats.org/drawingml/2006/main" xmlns:p="http://schemas.openxmlformats.org/presentationml/2006/main" xmlns:r="http://schemas.openxmlformats.org/officeDocument/2006/relationships">
+  <p:cSld>
+    <p:spTree>
+      <p:nvGrpSpPr>
+        <p:cNvPr id="1" name=""/>
+        <p:cNvGrpSpPr/>
+        <p:nvPr/>
+      </p:nvGrpSpPr>
+      <p:grpSpPr/>
+      <p:sp>
+        <p:nvSpPr>
+          <p:cNvPr id="2" name="Rectangle 1"/>
+          <p:cNvSpPr/>
+          <p:nvPr/>
+        </p:nvSpPr>
+        <p:spPr>
+          <a:xfrm>
+            <a:off x="365760" y="274320"/>
+            <a:ext cx="8412480" cy="23774"/>
+          </a:xfrm>
+          <a:prstGeom prst="rect">
+            <a:avLst/>
+          </a:prstGeom>
+          <a:solidFill>
+            <a:srgbClr val="1B3E6E"/>
+          </a:solidFill>
+          <a:ln>
+            <a:noFill/>
+          </a:ln>
+          <a:effectLst/>
+        </p:spPr>
+        <p:style>
+          <a:lnRef idx="1">
+            <a:schemeClr val="accent1"/>
+          </a:lnRef>
+          <a:fillRef idx="3">
+            <a:schemeClr val="accent1"/>
+          </a:fillRef>
+          <a:effectRef idx="2">
+            <a:schemeClr val="accent1"/>
+          </a:effectRef>
+          <a:fontRef idx="minor">
+            <a:schemeClr val="lt1"/>
+          </a:fontRef>
+        </p:style>
+        <p:txBody>
+          <a:bodyPr rtlCol="0" anchor="ctr"/>
+          <a:lstStyle/>
+          <a:p>
+            <a:pPr algn="ctr"/>
+          </a:p>
+        </p:txBody>
+      </p:sp>
+      <p:sp>
+        <p:nvSpPr>
+          <p:cNvPr id="3" name="TextBox 2"/>
+          <p:cNvSpPr txBox="1"/>
+          <p:nvPr/>
+        </p:nvSpPr>
+        <p:spPr>
+          <a:xfrm>
+            <a:off x="365760" y="365760"/>
+            <a:ext cx="8412480" cy="457200"/>
+          </a:xfrm>
+          <a:prstGeom prst="rect">
+            <a:avLst/>
+          </a:prstGeom>
+          <a:noFill/>
+        </p:spPr>
+        <p:txBody>
+          <a:bodyPr wrap="square" lIns="0" rIns="0" tIns="0" bIns="0" anchor="t">
+            <a:spAutoFit/>
+          </a:bodyPr>
+          <a:lstStyle/>
+          <a:p>
+            <a:pPr algn="l">
+              <a:lnSpc>
+                <a:spcPct val="100000"/>
+              </a:lnSpc>
+              <a:spcBef>
+                <a:spcPts val="0"/>
+              </a:spcBef>
+              <a:spcAft>
+                <a:spcPts val="0"/>
+              </a:spcAft>
+            </a:pPr>
+            <a:r>
+              <a:rPr sz="2000" b="0" i="0">
+                <a:solidFill>
+                  <a:srgbClr val="1B3E6E"/>
+                </a:solidFill>
+                <a:latin typeface="Georgia"/>
+              </a:rPr>
+              <a:t>The two gaps — and the $250,000 that closes them</a:t>
+            </a:r>
+          </a:p>
+        </p:txBody>
+      </p:sp>
+      <p:sp>
+        <p:nvSpPr>
+          <p:cNvPr id="4" name="TextBox 3"/>
+          <p:cNvSpPr txBox="1"/>
+          <p:nvPr/>
+        </p:nvSpPr>
+        <p:spPr>
+          <a:xfrm>
+            <a:off x="365760" y="822960"/>
+            <a:ext cx="8412480" cy="438912"/>
+          </a:xfrm>
+          <a:prstGeom prst="rect">
+            <a:avLst/>
+          </a:prstGeom>
+          <a:noFill/>
+        </p:spPr>
+        <p:txBody>
+          <a:bodyPr wrap="square" lIns="0" rIns="0" tIns="0" bIns="0" anchor="t">
+            <a:spAutoFit/>
+          </a:bodyPr>
+          <a:lstStyle/>
+          <a:p>
+            <a:pPr algn="l">
+              <a:lnSpc>
+                <a:spcPct val="100000"/>
+              </a:lnSpc>
+              <a:spcBef>
+                <a:spcPts val="0"/>
+              </a:spcBef>
+              <a:spcAft>
+                <a:spcPts val="0"/>
+              </a:spcAft>
+            </a:pPr>
+            <a:r>
+              <a:rPr sz="1050" b="0" i="0">
+                <a:solidFill>
+                  <a:srgbClr val="333333"/>
+                </a:solidFill>
+                <a:latin typeface="Arial"/>
+              </a:rPr>
+              <a:t>Unpacking the gaps highlighted in the supply chain: what is broken today, how the grant splits across them, and the solution we build for each.</a:t>
+            </a:r>
+          </a:p>
+        </p:txBody>
+      </p:sp>
+      <p:sp>
+        <p:nvSpPr>
+          <p:cNvPr id="5" name="Rectangle 4"/>
+          <p:cNvSpPr/>
+          <p:nvPr/>
+        </p:nvSpPr>
+        <p:spPr>
+          <a:xfrm>
+            <a:off x="502920" y="6071616"/>
+            <a:ext cx="8138159" cy="365760"/>
+          </a:xfrm>
+          <a:prstGeom prst="rect">
+            <a:avLst/>
+          </a:prstGeom>
+          <a:solidFill>
+            <a:srgbClr val="D9D9D9"/>
+          </a:solidFill>
+          <a:ln>
+            <a:noFill/>
+          </a:ln>
+          <a:effectLst/>
+        </p:spPr>
+        <p:style>
+          <a:lnRef idx="1">
+            <a:schemeClr val="accent1"/>
+          </a:lnRef>
+          <a:fillRef idx="3">
+            <a:schemeClr val="accent1"/>
+          </a:fillRef>
+          <a:effectRef idx="2">
+            <a:schemeClr val="accent1"/>
+          </a:effectRef>
+          <a:fontRef idx="minor">
+            <a:schemeClr val="lt1"/>
+          </a:fontRef>
+        </p:style>
+        <p:txBody>
+          <a:bodyPr rtlCol="0" anchor="ctr"/>
+          <a:lstStyle/>
+          <a:p>
+            <a:pPr algn="ctr"/>
+          </a:p>
+        </p:txBody>
+      </p:sp>
+      <p:sp>
+        <p:nvSpPr>
+          <p:cNvPr id="6" name="TextBox 5"/>
+          <p:cNvSpPr txBox="1"/>
+          <p:nvPr/>
+        </p:nvSpPr>
+        <p:spPr>
+          <a:xfrm>
+            <a:off x="640080" y="6071616"/>
+            <a:ext cx="7863840" cy="365760"/>
+          </a:xfrm>
+          <a:prstGeom prst="rect">
+            <a:avLst/>
+          </a:prstGeom>
+          <a:noFill/>
+        </p:spPr>
+        <p:txBody>
+          <a:bodyPr wrap="square" lIns="0" rIns="0" tIns="0" bIns="0" anchor="ctr">
+            <a:spAutoFit/>
+          </a:bodyPr>
+          <a:lstStyle/>
+          <a:p>
+            <a:pPr algn="ctr">
+              <a:lnSpc>
+                <a:spcPct val="95000"/>
+              </a:lnSpc>
+              <a:spcBef>
+                <a:spcPts val="0"/>
+              </a:spcBef>
+              <a:spcAft>
+                <a:spcPts val="0"/>
+              </a:spcAft>
+            </a:pPr>
+            <a:r>
+              <a:rPr sz="1100" b="1" i="0">
+                <a:solidFill>
+                  <a:srgbClr val="1B3E6E"/>
+                </a:solidFill>
+                <a:latin typeface="Georgia"/>
+              </a:rPr>
+              <a:t>Two fixable gaps, two targeted builds — $250k of capital becomes $310k of savings, every year.</a:t>
+            </a:r>
+          </a:p>
+        </p:txBody>
+      </p:sp>
+      <p:sp>
+        <p:nvSpPr>
+          <p:cNvPr id="7" name="TextBox 6"/>
+          <p:cNvSpPr txBox="1"/>
+          <p:nvPr/>
+        </p:nvSpPr>
+        <p:spPr>
+          <a:xfrm>
+            <a:off x="365760" y="6492240"/>
+            <a:ext cx="1280160" cy="329184"/>
+          </a:xfrm>
+          <a:prstGeom prst="rect">
+            <a:avLst/>
+          </a:prstGeom>
+          <a:noFill/>
+        </p:spPr>
+        <p:txBody>
+          <a:bodyPr wrap="square" lIns="0" rIns="0" tIns="0" bIns="0" anchor="t">
+            <a:spAutoFit/>
+          </a:bodyPr>
+          <a:lstStyle/>
+          <a:p>
+            <a:pPr algn="l">
+              <a:lnSpc>
+                <a:spcPct val="90000"/>
+              </a:lnSpc>
+              <a:spcBef>
+                <a:spcPts val="0"/>
+              </a:spcBef>
+              <a:spcAft>
+                <a:spcPts val="0"/>
+              </a:spcAft>
+            </a:pPr>
+            <a:r>
+              <a:rPr sz="900" b="1" i="0">
+                <a:solidFill>
+                  <a:srgbClr val="111111"/>
+                </a:solidFill>
+                <a:latin typeface="Georgia"/>
+              </a:rPr>
+              <a:t>Goldman</a:t>
+            </a:r>
+          </a:p>
+          <a:p>
+            <a:pPr algn="l">
+              <a:lnSpc>
+                <a:spcPct val="90000"/>
+              </a:lnSpc>
+              <a:spcBef>
+                <a:spcPts val="0"/>
+              </a:spcBef>
+              <a:spcAft>
+                <a:spcPts val="0"/>
+              </a:spcAft>
+            </a:pPr>
+            <a:r>
+              <a:rPr sz="900" b="1" i="0">
+                <a:solidFill>
+                  <a:srgbClr val="111111"/>
+                </a:solidFill>
+                <a:latin typeface="Georgia"/>
+              </a:rPr>
+              <a:t>Sachs</a:t>
+            </a:r>
+          </a:p>
+        </p:txBody>
+      </p:sp>
+      <p:sp>
+        <p:nvSpPr>
+          <p:cNvPr id="8" name="TextBox 7"/>
+          <p:cNvSpPr txBox="1"/>
+          <p:nvPr/>
+        </p:nvSpPr>
+        <p:spPr>
+          <a:xfrm>
+            <a:off x="8321040" y="6528816"/>
+            <a:ext cx="457200" cy="274320"/>
+          </a:xfrm>
+          <a:prstGeom prst="rect">
+            <a:avLst/>
+          </a:prstGeom>
+          <a:noFill/>
+        </p:spPr>
+        <p:txBody>
+          <a:bodyPr wrap="square" lIns="0" rIns="0" tIns="0" bIns="0" anchor="t">
+            <a:spAutoFit/>
+          </a:bodyPr>
+          <a:lstStyle/>
+          <a:p>
+            <a:pPr algn="r">
+              <a:lnSpc>
+                <a:spcPct val="100000"/>
+              </a:lnSpc>
+              <a:spcBef>
+                <a:spcPts val="0"/>
+              </a:spcBef>
+              <a:spcAft>
+                <a:spcPts val="300"/>
+              </a:spcAft>
+            </a:pPr>
+            <a:r>
+              <a:rPr sz="900" b="0" i="0">
+                <a:solidFill>
+                  <a:srgbClr val="727375"/>
+                </a:solidFill>
+                <a:latin typeface="Arial"/>
+              </a:rPr>
+              <a:t>7</a:t>
+            </a:r>
+          </a:p>
+        </p:txBody>
+      </p:sp>
+      <p:sp>
+        <p:nvSpPr>
+          <p:cNvPr id="9" name="TextBox 8"/>
+          <p:cNvSpPr txBox="1"/>
+          <p:nvPr/>
+        </p:nvSpPr>
+        <p:spPr>
+          <a:xfrm>
+            <a:off x="5486400" y="54864"/>
+            <a:ext cx="3291840" cy="182880"/>
+          </a:xfrm>
+          <a:prstGeom prst="rect">
+            <a:avLst/>
+          </a:prstGeom>
+          <a:noFill/>
+        </p:spPr>
+        <p:txBody>
+          <a:bodyPr wrap="square" lIns="0" rIns="0" tIns="0" bIns="0" anchor="t">
+            <a:spAutoFit/>
+          </a:bodyPr>
+          <a:lstStyle/>
+          <a:p>
+            <a:pPr algn="r">
+              <a:lnSpc>
+                <a:spcPct val="100000"/>
+              </a:lnSpc>
+              <a:spcBef>
+                <a:spcPts val="0"/>
+              </a:spcBef>
+              <a:spcAft>
+                <a:spcPts val="0"/>
+              </a:spcAft>
+            </a:pPr>
+            <a:r>
+              <a:rPr sz="750" b="0" i="1">
+                <a:solidFill>
+                  <a:srgbClr val="727375"/>
+                </a:solidFill>
+                <a:latin typeface="Arial"/>
+              </a:rPr>
+              <a:t>PROPOSED SLIDE 3 — v2</a:t>
+            </a:r>
+          </a:p>
+        </p:txBody>
+      </p:sp>
+      <p:sp>
+        <p:nvSpPr>
+          <p:cNvPr id="10" name="Rectangle 9"/>
+          <p:cNvSpPr/>
+          <p:nvPr/>
+        </p:nvSpPr>
+        <p:spPr>
+          <a:xfrm>
+            <a:off x="365760" y="1353312"/>
+            <a:ext cx="54864" cy="182880"/>
+          </a:xfrm>
+          <a:prstGeom prst="rect">
+            <a:avLst/>
+          </a:prstGeom>
+          <a:solidFill>
+            <a:srgbClr val="1B3E6E"/>
+          </a:solidFill>
+          <a:ln>
+            <a:noFill/>
+          </a:ln>
+          <a:effectLst/>
+        </p:spPr>
+        <p:style>
+          <a:lnRef idx="1">
+            <a:schemeClr val="accent1"/>
+          </a:lnRef>
+          <a:fillRef idx="3">
+            <a:schemeClr val="accent1"/>
+          </a:fillRef>
+          <a:effectRef idx="2">
+            <a:schemeClr val="accent1"/>
+          </a:effectRef>
+          <a:fontRef idx="minor">
+            <a:schemeClr val="lt1"/>
+          </a:fontRef>
+        </p:style>
+        <p:txBody>
+          <a:bodyPr rtlCol="0" anchor="ctr"/>
+          <a:lstStyle/>
+          <a:p>
+            <a:pPr algn="ctr"/>
+          </a:p>
+        </p:txBody>
+      </p:sp>
+      <p:sp>
+        <p:nvSpPr>
+          <p:cNvPr id="11" name="TextBox 10"/>
+          <p:cNvSpPr txBox="1"/>
+          <p:nvPr/>
+        </p:nvSpPr>
+        <p:spPr>
+          <a:xfrm>
+            <a:off x="512064" y="1325880"/>
+            <a:ext cx="8266175" cy="256032"/>
+          </a:xfrm>
+          <a:prstGeom prst="rect">
+            <a:avLst/>
+          </a:prstGeom>
+          <a:noFill/>
+        </p:spPr>
+        <p:txBody>
+          <a:bodyPr wrap="square" lIns="0" rIns="0" tIns="0" bIns="0" anchor="t">
+            <a:spAutoFit/>
+          </a:bodyPr>
+          <a:lstStyle/>
+          <a:p>
+            <a:pPr algn="l">
+              <a:lnSpc>
+                <a:spcPct val="100000"/>
+              </a:lnSpc>
+              <a:spcBef>
+                <a:spcPts val="0"/>
+              </a:spcBef>
+              <a:spcAft>
+                <a:spcPts val="0"/>
+              </a:spcAft>
+            </a:pPr>
+            <a:r>
+              <a:rPr sz="1150" b="1" i="0">
+                <a:solidFill>
+                  <a:srgbClr val="1B3E6E"/>
+                </a:solidFill>
+                <a:latin typeface="Arial"/>
+              </a:rPr>
+              <a:t>How the $250,000 grant splits across the two gaps</a:t>
+            </a:r>
+          </a:p>
+        </p:txBody>
+      </p:sp>
+      <p:sp>
+        <p:nvSpPr>
+          <p:cNvPr id="12" name="Rectangle 11"/>
+          <p:cNvSpPr/>
+          <p:nvPr/>
+        </p:nvSpPr>
+        <p:spPr>
+          <a:xfrm>
+            <a:off x="365760" y="1600200"/>
+            <a:ext cx="8412480" cy="10972"/>
+          </a:xfrm>
+          <a:prstGeom prst="rect">
+            <a:avLst/>
+          </a:prstGeom>
+          <a:solidFill>
+            <a:srgbClr val="BFBFBF"/>
+          </a:solidFill>
+          <a:ln>
+            <a:noFill/>
+          </a:ln>
+          <a:effectLst/>
+        </p:spPr>
+        <p:style>
+          <a:lnRef idx="1">
+            <a:schemeClr val="accent1"/>
+          </a:lnRef>
+          <a:fillRef idx="3">
+            <a:schemeClr val="accent1"/>
+          </a:fillRef>
+          <a:effectRef idx="2">
+            <a:schemeClr val="accent1"/>
+          </a:effectRef>
+          <a:fontRef idx="minor">
+            <a:schemeClr val="lt1"/>
+          </a:fontRef>
+        </p:style>
+        <p:txBody>
+          <a:bodyPr rtlCol="0" anchor="ctr"/>
+          <a:lstStyle/>
+          <a:p>
+            <a:pPr algn="ctr"/>
+          </a:p>
+        </p:txBody>
+      </p:sp>
+      <p:sp>
+        <p:nvSpPr>
+          <p:cNvPr id="13" name="Rectangle 12"/>
+          <p:cNvSpPr/>
+          <p:nvPr/>
+        </p:nvSpPr>
+        <p:spPr>
+          <a:xfrm>
+            <a:off x="502920" y="1746504"/>
+            <a:ext cx="4882895" cy="420624"/>
+          </a:xfrm>
+          <a:prstGeom prst="rect">
+            <a:avLst/>
+          </a:prstGeom>
+          <a:solidFill>
+            <a:srgbClr val="1B3E6E"/>
+          </a:solidFill>
+          <a:ln>
+            <a:noFill/>
+          </a:ln>
+          <a:effectLst/>
+        </p:spPr>
+        <p:style>
+          <a:lnRef idx="1">
+            <a:schemeClr val="accent1"/>
+          </a:lnRef>
+          <a:fillRef idx="3">
+            <a:schemeClr val="accent1"/>
+          </a:fillRef>
+          <a:effectRef idx="2">
+            <a:schemeClr val="accent1"/>
+          </a:effectRef>
+          <a:fontRef idx="minor">
+            <a:schemeClr val="lt1"/>
+          </a:fontRef>
+        </p:style>
+        <p:txBody>
+          <a:bodyPr rtlCol="0" anchor="ctr"/>
+          <a:lstStyle/>
+          <a:p>
+            <a:pPr algn="ctr"/>
+          </a:p>
+        </p:txBody>
+      </p:sp>
+      <p:sp>
+        <p:nvSpPr>
+          <p:cNvPr id="14" name="Rectangle 13"/>
+          <p:cNvSpPr/>
+          <p:nvPr/>
+        </p:nvSpPr>
+        <p:spPr>
+          <a:xfrm>
+            <a:off x="5385815" y="1746504"/>
+            <a:ext cx="3255263" cy="420624"/>
+          </a:xfrm>
+          <a:prstGeom prst="rect">
+            <a:avLst/>
+          </a:prstGeom>
+          <a:solidFill>
+            <a:srgbClr val="398025"/>
+          </a:solidFill>
+          <a:ln>
+            <a:noFill/>
+          </a:ln>
+          <a:effectLst/>
+        </p:spPr>
+        <p:style>
+          <a:lnRef idx="1">
+            <a:schemeClr val="accent1"/>
+          </a:lnRef>
+          <a:fillRef idx="3">
+            <a:schemeClr val="accent1"/>
+          </a:fillRef>
+          <a:effectRef idx="2">
+            <a:schemeClr val="accent1"/>
+          </a:effectRef>
+          <a:fontRef idx="minor">
+            <a:schemeClr val="lt1"/>
+          </a:fontRef>
+        </p:style>
+        <p:txBody>
+          <a:bodyPr rtlCol="0" anchor="ctr"/>
+          <a:lstStyle/>
+          <a:p>
+            <a:pPr algn="ctr"/>
+          </a:p>
+        </p:txBody>
+      </p:sp>
+      <p:sp>
+        <p:nvSpPr>
+          <p:cNvPr id="15" name="TextBox 14"/>
+          <p:cNvSpPr txBox="1"/>
+          <p:nvPr/>
+        </p:nvSpPr>
+        <p:spPr>
+          <a:xfrm>
+            <a:off x="502920" y="1746504"/>
+            <a:ext cx="4882895" cy="420624"/>
+          </a:xfrm>
+          <a:prstGeom prst="rect">
+            <a:avLst/>
+          </a:prstGeom>
+          <a:noFill/>
+        </p:spPr>
+        <p:txBody>
+          <a:bodyPr wrap="square" lIns="0" rIns="0" tIns="0" bIns="0" anchor="ctr">
+            <a:spAutoFit/>
+          </a:bodyPr>
+          <a:lstStyle/>
+          <a:p>
+            <a:pPr algn="ctr">
+              <a:lnSpc>
+                <a:spcPct val="100000"/>
+              </a:lnSpc>
+              <a:spcBef>
+                <a:spcPts val="0"/>
+              </a:spcBef>
+              <a:spcAft>
+                <a:spcPts val="0"/>
+              </a:spcAft>
+            </a:pPr>
+            <a:r>
+              <a:rPr sz="1000" b="1" i="0">
+                <a:solidFill>
+                  <a:srgbClr val="FFFFFF"/>
+                </a:solidFill>
+                <a:latin typeface="Arial"/>
+              </a:rPr>
+              <a:t>$150k — Gap 1: Procurement (60%)</a:t>
+            </a:r>
+          </a:p>
+        </p:txBody>
+      </p:sp>
+      <p:sp>
+        <p:nvSpPr>
+          <p:cNvPr id="16" name="TextBox 15"/>
+          <p:cNvSpPr txBox="1"/>
+          <p:nvPr/>
+        </p:nvSpPr>
+        <p:spPr>
+          <a:xfrm>
+            <a:off x="5385815" y="1746504"/>
+            <a:ext cx="3255263" cy="420624"/>
+          </a:xfrm>
+          <a:prstGeom prst="rect">
+            <a:avLst/>
+          </a:prstGeom>
+          <a:noFill/>
+        </p:spPr>
+        <p:txBody>
+          <a:bodyPr wrap="square" lIns="0" rIns="0" tIns="0" bIns="0" anchor="ctr">
+            <a:spAutoFit/>
+          </a:bodyPr>
+          <a:lstStyle/>
+          <a:p>
+            <a:pPr algn="ctr">
+              <a:lnSpc>
+                <a:spcPct val="100000"/>
+              </a:lnSpc>
+              <a:spcBef>
+                <a:spcPts val="0"/>
+              </a:spcBef>
+              <a:spcAft>
+                <a:spcPts val="0"/>
+              </a:spcAft>
+            </a:pPr>
+            <a:r>
+              <a:rPr sz="1000" b="1" i="0">
+                <a:solidFill>
+                  <a:srgbClr val="FFFFFF"/>
+                </a:solidFill>
+                <a:latin typeface="Arial"/>
+              </a:rPr>
+              <a:t>$100k — Gap 2: Distribution (40%)</a:t>
+            </a:r>
+          </a:p>
+        </p:txBody>
+      </p:sp>
+      <p:sp>
+        <p:nvSpPr>
+          <p:cNvPr id="17" name="TextBox 16"/>
+          <p:cNvSpPr txBox="1"/>
+          <p:nvPr/>
+        </p:nvSpPr>
+        <p:spPr>
+          <a:xfrm>
+            <a:off x="502920" y="2203704"/>
+            <a:ext cx="4882895" cy="219456"/>
+          </a:xfrm>
+          <a:prstGeom prst="rect">
+            <a:avLst/>
+          </a:prstGeom>
+          <a:noFill/>
+        </p:spPr>
+        <p:txBody>
+          <a:bodyPr wrap="square" lIns="0" rIns="0" tIns="0" bIns="0" anchor="t">
+            <a:spAutoFit/>
+          </a:bodyPr>
+          <a:lstStyle/>
+          <a:p>
+            <a:pPr algn="ctr">
+              <a:lnSpc>
+                <a:spcPct val="100000"/>
+              </a:lnSpc>
+              <a:spcBef>
+                <a:spcPts val="0"/>
+              </a:spcBef>
+              <a:spcAft>
+                <a:spcPts val="0"/>
+              </a:spcAft>
+            </a:pPr>
+            <a:r>
+              <a:rPr sz="720" b="0" i="0">
+                <a:solidFill>
+                  <a:srgbClr val="727375"/>
+                </a:solidFill>
+                <a:latin typeface="Arial"/>
+              </a:rPr>
+              <a:t>The costlier gap first — waste &amp; over-priced buying start at the source</a:t>
+            </a:r>
+          </a:p>
+        </p:txBody>
+      </p:sp>
+      <p:sp>
+        <p:nvSpPr>
+          <p:cNvPr id="18" name="TextBox 17"/>
+          <p:cNvSpPr txBox="1"/>
+          <p:nvPr/>
+        </p:nvSpPr>
+        <p:spPr>
+          <a:xfrm>
+            <a:off x="5385815" y="2203704"/>
+            <a:ext cx="3255263" cy="219456"/>
+          </a:xfrm>
+          <a:prstGeom prst="rect">
+            <a:avLst/>
+          </a:prstGeom>
+          <a:noFill/>
+        </p:spPr>
+        <p:txBody>
+          <a:bodyPr wrap="square" lIns="0" rIns="0" tIns="0" bIns="0" anchor="t">
+            <a:spAutoFit/>
+          </a:bodyPr>
+          <a:lstStyle/>
+          <a:p>
+            <a:pPr algn="ctr">
+              <a:lnSpc>
+                <a:spcPct val="100000"/>
+              </a:lnSpc>
+              <a:spcBef>
+                <a:spcPts val="0"/>
+              </a:spcBef>
+              <a:spcAft>
+                <a:spcPts val="0"/>
+              </a:spcAft>
+            </a:pPr>
+            <a:r>
+              <a:rPr sz="720" b="0" i="0">
+                <a:solidFill>
+                  <a:srgbClr val="727375"/>
+                </a:solidFill>
+                <a:latin typeface="Arial"/>
+              </a:rPr>
+              <a:t>Then seal the last mile — on time, intact, untouched</a:t>
+            </a:r>
+          </a:p>
+        </p:txBody>
+      </p:sp>
+      <p:sp>
+        <p:nvSpPr>
+          <p:cNvPr id="19" name="Rectangle 18"/>
+          <p:cNvSpPr/>
+          <p:nvPr/>
+        </p:nvSpPr>
+        <p:spPr>
+          <a:xfrm>
+            <a:off x="365760" y="2569463"/>
+            <a:ext cx="54864" cy="182880"/>
+          </a:xfrm>
+          <a:prstGeom prst="rect">
+            <a:avLst/>
+          </a:prstGeom>
+          <a:solidFill>
+            <a:srgbClr val="C22310"/>
+          </a:solidFill>
+          <a:ln>
+            <a:noFill/>
+          </a:ln>
+          <a:effectLst/>
+        </p:spPr>
+        <p:style>
+          <a:lnRef idx="1">
+            <a:schemeClr val="accent1"/>
+          </a:lnRef>
+          <a:fillRef idx="3">
+            <a:schemeClr val="accent1"/>
+          </a:fillRef>
+          <a:effectRef idx="2">
+            <a:schemeClr val="accent1"/>
+          </a:effectRef>
+          <a:fontRef idx="minor">
+            <a:schemeClr val="lt1"/>
+          </a:fontRef>
+        </p:style>
+        <p:txBody>
+          <a:bodyPr rtlCol="0" anchor="ctr"/>
+          <a:lstStyle/>
+          <a:p>
+            <a:pPr algn="ctr"/>
+          </a:p>
+        </p:txBody>
+      </p:sp>
+      <p:sp>
+        <p:nvSpPr>
+          <p:cNvPr id="20" name="TextBox 19"/>
+          <p:cNvSpPr txBox="1"/>
+          <p:nvPr/>
+        </p:nvSpPr>
+        <p:spPr>
+          <a:xfrm>
+            <a:off x="512064" y="2542032"/>
+            <a:ext cx="3922776" cy="256032"/>
+          </a:xfrm>
+          <a:prstGeom prst="rect">
+            <a:avLst/>
+          </a:prstGeom>
+          <a:noFill/>
+        </p:spPr>
+        <p:txBody>
+          <a:bodyPr wrap="square" lIns="0" rIns="0" tIns="0" bIns="0" anchor="t">
+            <a:spAutoFit/>
+          </a:bodyPr>
+          <a:lstStyle/>
+          <a:p>
+            <a:pPr algn="l">
+              <a:lnSpc>
+                <a:spcPct val="100000"/>
+              </a:lnSpc>
+              <a:spcBef>
+                <a:spcPts val="0"/>
+              </a:spcBef>
+              <a:spcAft>
+                <a:spcPts val="0"/>
+              </a:spcAft>
+            </a:pPr>
+            <a:r>
+              <a:rPr sz="1050" b="1" i="0">
+                <a:solidFill>
+                  <a:srgbClr val="1B3E6E"/>
+                </a:solidFill>
+                <a:latin typeface="Arial"/>
+              </a:rPr>
+              <a:t>GAP 1 — Procurement: demand is guesswork</a:t>
+            </a:r>
+          </a:p>
+        </p:txBody>
+      </p:sp>
+      <p:sp>
+        <p:nvSpPr>
+          <p:cNvPr id="21" name="Rectangle 20"/>
+          <p:cNvSpPr/>
+          <p:nvPr/>
+        </p:nvSpPr>
+        <p:spPr>
+          <a:xfrm>
+            <a:off x="365760" y="2816351"/>
+            <a:ext cx="4069080" cy="10972"/>
+          </a:xfrm>
+          <a:prstGeom prst="rect">
+            <a:avLst/>
+          </a:prstGeom>
+          <a:solidFill>
+            <a:srgbClr val="BFBFBF"/>
+          </a:solidFill>
+          <a:ln>
+            <a:noFill/>
+          </a:ln>
+          <a:effectLst/>
+        </p:spPr>
+        <p:style>
+          <a:lnRef idx="1">
+            <a:schemeClr val="accent1"/>
+          </a:lnRef>
+          <a:fillRef idx="3">
+            <a:schemeClr val="accent1"/>
+          </a:fillRef>
+          <a:effectRef idx="2">
+            <a:schemeClr val="accent1"/>
+          </a:effectRef>
+          <a:fontRef idx="minor">
+            <a:schemeClr val="lt1"/>
+          </a:fontRef>
+        </p:style>
+        <p:txBody>
+          <a:bodyPr rtlCol="0" anchor="ctr"/>
+          <a:lstStyle/>
+          <a:p>
+            <a:pPr algn="ctr"/>
+          </a:p>
+        </p:txBody>
+      </p:sp>
+      <p:sp>
+        <p:nvSpPr>
+          <p:cNvPr id="22" name="TextBox 21"/>
+          <p:cNvSpPr txBox="1"/>
+          <p:nvPr/>
+        </p:nvSpPr>
+        <p:spPr>
+          <a:xfrm>
+            <a:off x="365760" y="2907791"/>
+            <a:ext cx="4069080" cy="1005840"/>
+          </a:xfrm>
+          <a:prstGeom prst="rect">
+            <a:avLst/>
+          </a:prstGeom>
+          <a:noFill/>
+        </p:spPr>
+        <p:txBody>
+          <a:bodyPr wrap="square" lIns="0" rIns="0" tIns="0" bIns="0" anchor="t">
+            <a:spAutoFit/>
+          </a:bodyPr>
+          <a:lstStyle/>
+          <a:p>
+            <a:pPr algn="l">
+              <a:lnSpc>
+                <a:spcPct val="105000"/>
+              </a:lnSpc>
+              <a:spcBef>
+                <a:spcPts val="0"/>
+              </a:spcBef>
+              <a:spcAft>
+                <a:spcPts val="300"/>
+              </a:spcAft>
+            </a:pPr>
+            <a:r>
+              <a:rPr sz="819" b="1" i="0">
+                <a:solidFill>
+                  <a:srgbClr val="333333"/>
+                </a:solidFill>
+                <a:latin typeface="Arial"/>
+              </a:rPr>
+              <a:t>•  Manual, gut-feel indenting</a:t>
+            </a:r>
+            <a:r>
+              <a:rPr sz="819" b="0" i="0">
+                <a:solidFill>
+                  <a:srgbClr val="333333"/>
+                </a:solidFill>
+                <a:latin typeface="Arial"/>
+              </a:rPr>
+              <a:t> 3 days ahead — blind to attendance swings, exams &amp; holidays</a:t>
+            </a:r>
+          </a:p>
+          <a:p>
+            <a:pPr algn="l">
+              <a:lnSpc>
+                <a:spcPct val="105000"/>
+              </a:lnSpc>
+              <a:spcBef>
+                <a:spcPts val="0"/>
+              </a:spcBef>
+              <a:spcAft>
+                <a:spcPts val="300"/>
+              </a:spcAft>
+            </a:pPr>
+            <a:r>
+              <a:rPr sz="819" b="1" i="0">
+                <a:solidFill>
+                  <a:srgbClr val="333333"/>
+                </a:solidFill>
+                <a:latin typeface="Arial"/>
+              </a:rPr>
+              <a:t>•  Reactive spot-buying</a:t>
+            </a:r>
+            <a:r>
+              <a:rPr sz="819" b="0" i="0">
+                <a:solidFill>
+                  <a:srgbClr val="333333"/>
+                </a:solidFill>
+                <a:latin typeface="Arial"/>
+              </a:rPr>
+              <a:t> at mandi peak prices when stocks run short</a:t>
+            </a:r>
+          </a:p>
+          <a:p>
+            <a:pPr algn="l">
+              <a:lnSpc>
+                <a:spcPct val="105000"/>
+              </a:lnSpc>
+              <a:spcBef>
+                <a:spcPts val="0"/>
+              </a:spcBef>
+              <a:spcAft>
+                <a:spcPts val="300"/>
+              </a:spcAft>
+            </a:pPr>
+            <a:r>
+              <a:rPr sz="819" b="1" i="0">
+                <a:solidFill>
+                  <a:srgbClr val="333333"/>
+                </a:solidFill>
+                <a:latin typeface="Arial"/>
+              </a:rPr>
+              <a:t>•  No price intelligence</a:t>
+            </a:r>
+            <a:r>
+              <a:rPr sz="819" b="0" i="0">
+                <a:solidFill>
+                  <a:srgbClr val="333333"/>
+                </a:solidFill>
+                <a:latin typeface="Arial"/>
+              </a:rPr>
+              <a:t> — cheapest forward-buying windows are missed</a:t>
+            </a:r>
+          </a:p>
+          <a:p>
+            <a:pPr algn="l">
+              <a:lnSpc>
+                <a:spcPct val="105000"/>
+              </a:lnSpc>
+              <a:spcBef>
+                <a:spcPts val="0"/>
+              </a:spcBef>
+              <a:spcAft>
+                <a:spcPts val="0"/>
+              </a:spcAft>
+            </a:pPr>
+            <a:r>
+              <a:rPr sz="819" b="1" i="0">
+                <a:solidFill>
+                  <a:srgbClr val="333333"/>
+                </a:solidFill>
+                <a:latin typeface="Arial"/>
+              </a:rPr>
+              <a:t>•  No feedback loop</a:t>
+            </a:r>
+            <a:r>
+              <a:rPr sz="819" b="0" i="0">
+                <a:solidFill>
+                  <a:srgbClr val="333333"/>
+                </a:solidFill>
+                <a:latin typeface="Arial"/>
+              </a:rPr>
+              <a:t> from schools on actual meal uptake</a:t>
+            </a:r>
+          </a:p>
+        </p:txBody>
+      </p:sp>
+      <p:sp>
+        <p:nvSpPr>
+          <p:cNvPr id="23" name="TextBox 22"/>
+          <p:cNvSpPr txBox="1"/>
+          <p:nvPr/>
+        </p:nvSpPr>
+        <p:spPr>
+          <a:xfrm>
+            <a:off x="365760" y="3931920"/>
+            <a:ext cx="4069080" cy="219456"/>
+          </a:xfrm>
+          <a:prstGeom prst="rect">
+            <a:avLst/>
+          </a:prstGeom>
+          <a:noFill/>
+        </p:spPr>
+        <p:txBody>
+          <a:bodyPr wrap="square" lIns="0" rIns="0" tIns="0" bIns="0" anchor="t">
+            <a:spAutoFit/>
+          </a:bodyPr>
+          <a:lstStyle/>
+          <a:p>
+            <a:pPr algn="l">
+              <a:lnSpc>
+                <a:spcPct val="100000"/>
+              </a:lnSpc>
+              <a:spcBef>
+                <a:spcPts val="0"/>
+              </a:spcBef>
+              <a:spcAft>
+                <a:spcPts val="0"/>
+              </a:spcAft>
+            </a:pPr>
+            <a:r>
+              <a:rPr sz="819" b="1" i="0">
+                <a:solidFill>
+                  <a:srgbClr val="C22310"/>
+                </a:solidFill>
+                <a:latin typeface="Arial"/>
+              </a:rPr>
+              <a:t>Cost today:  8–10% meals over-produced  ·  +12% paid on spot buys [dummy]</a:t>
+            </a:r>
+          </a:p>
+        </p:txBody>
+      </p:sp>
+      <p:cxnSp>
+        <p:nvCxnSpPr>
+          <p:cNvPr id="24" name="Connector 23"/>
+          <p:cNvCxnSpPr/>
+          <p:nvPr/>
+        </p:nvCxnSpPr>
+        <p:spPr>
+          <a:xfrm>
+            <a:off x="2400300" y="4187952"/>
+            <a:ext cx="0" cy="182879"/>
+          </a:xfrm>
+          <a:prstGeom prst="line">
+            <a:avLst/>
+          </a:prstGeom>
+          <a:ln w="15875">
+            <a:solidFill>
+              <a:srgbClr val="1B3E6E"/>
+            </a:solidFill>
+            <a:prstDash val="sysDash"/>
+            <a:tailEnd type="triangle" w="med" len="med"/>
+          </a:ln>
+          <a:effectLst/>
+        </p:spPr>
+        <p:style>
+          <a:lnRef idx="2">
+            <a:schemeClr val="accent1"/>
+          </a:lnRef>
+          <a:fillRef idx="0">
+            <a:schemeClr val="accent1"/>
+          </a:fillRef>
+          <a:effectRef idx="1">
+            <a:schemeClr val="accent1"/>
+          </a:effectRef>
+          <a:fontRef idx="minor">
+            <a:schemeClr val="tx1"/>
+          </a:fontRef>
+        </p:style>
+      </p:cxnSp>
+      <p:sp>
+        <p:nvSpPr>
+          <p:cNvPr id="25" name="Rounded Rectangle 24"/>
+          <p:cNvSpPr/>
+          <p:nvPr/>
+        </p:nvSpPr>
+        <p:spPr>
+          <a:xfrm>
+            <a:off x="365760" y="4425696"/>
+            <a:ext cx="4069080" cy="1389888"/>
+          </a:xfrm>
+          <a:prstGeom prst="roundRect">
+            <a:avLst>
+              <a:gd name="adj" fmla="val 5000"/>
+            </a:avLst>
+          </a:prstGeom>
+          <a:solidFill>
+            <a:srgbClr val="EEF3F9"/>
+          </a:solidFill>
+          <a:ln w="12700">
+            <a:solidFill>
+              <a:srgbClr val="1B3E6E"/>
+            </a:solidFill>
+          </a:ln>
+          <a:effectLst/>
+        </p:spPr>
+        <p:style>
+          <a:lnRef idx="1">
+            <a:schemeClr val="accent1"/>
+          </a:lnRef>
+          <a:fillRef idx="3">
+            <a:schemeClr val="accent1"/>
+          </a:fillRef>
+          <a:effectRef idx="2">
+            <a:schemeClr val="accent1"/>
+          </a:effectRef>
+          <a:fontRef idx="minor">
+            <a:schemeClr val="lt1"/>
+          </a:fontRef>
+        </p:style>
+        <p:txBody>
+          <a:bodyPr rtlCol="0" anchor="ctr"/>
+          <a:lstStyle/>
+          <a:p>
+            <a:pPr algn="ctr"/>
+          </a:p>
+        </p:txBody>
+      </p:sp>
+      <p:sp>
+        <p:nvSpPr>
+          <p:cNvPr id="26" name="TextBox 25"/>
+          <p:cNvSpPr txBox="1"/>
+          <p:nvPr/>
+        </p:nvSpPr>
+        <p:spPr>
+          <a:xfrm>
+            <a:off x="493776" y="4507992"/>
+            <a:ext cx="3813048" cy="1389888"/>
+          </a:xfrm>
+          <a:prstGeom prst="rect">
+            <a:avLst/>
+          </a:prstGeom>
+          <a:noFill/>
+        </p:spPr>
+        <p:txBody>
+          <a:bodyPr wrap="square" lIns="0" rIns="0" tIns="0" bIns="0" anchor="t">
+            <a:spAutoFit/>
+          </a:bodyPr>
+          <a:lstStyle/>
+          <a:p>
+            <a:pPr algn="l">
+              <a:lnSpc>
+                <a:spcPct val="100000"/>
+              </a:lnSpc>
+              <a:spcBef>
+                <a:spcPts val="0"/>
+              </a:spcBef>
+              <a:spcAft>
+                <a:spcPts val="300"/>
+              </a:spcAft>
+            </a:pPr>
+            <a:r>
+              <a:rPr sz="1050" b="1" i="0">
+                <a:solidFill>
+                  <a:srgbClr val="1B3E6E"/>
+                </a:solidFill>
+                <a:latin typeface="Arial"/>
+              </a:rPr>
+              <a:t>SOLUTION 1 — “Annapurna AI”  ·  $150k</a:t>
+            </a:r>
+          </a:p>
+          <a:p>
+            <a:pPr algn="l">
+              <a:lnSpc>
+                <a:spcPct val="105000"/>
+              </a:lnSpc>
+              <a:spcBef>
+                <a:spcPts val="0"/>
+              </a:spcBef>
+              <a:spcAft>
+                <a:spcPts val="300"/>
+              </a:spcAft>
+            </a:pPr>
+            <a:r>
+              <a:rPr sz="819" b="1" i="0">
+                <a:solidFill>
+                  <a:srgbClr val="1B3E6E"/>
+                </a:solidFill>
+                <a:latin typeface="Arial"/>
+              </a:rPr>
+              <a:t>What: </a:t>
+            </a:r>
+            <a:r>
+              <a:rPr sz="819" b="0" i="0">
+                <a:solidFill>
+                  <a:srgbClr val="333333"/>
+                </a:solidFill>
+                <a:latin typeface="Arial"/>
+              </a:rPr>
+              <a:t>ML demand-forecasting &amp; procurement-planning platform across all 68 kitchens</a:t>
+            </a:r>
+          </a:p>
+          <a:p>
+            <a:pPr algn="l">
+              <a:lnSpc>
+                <a:spcPct val="105000"/>
+              </a:lnSpc>
+              <a:spcBef>
+                <a:spcPts val="0"/>
+              </a:spcBef>
+              <a:spcAft>
+                <a:spcPts val="300"/>
+              </a:spcAft>
+            </a:pPr>
+            <a:r>
+              <a:rPr sz="819" b="1" i="0">
+                <a:solidFill>
+                  <a:srgbClr val="1B3E6E"/>
+                </a:solidFill>
+                <a:latin typeface="Arial"/>
+              </a:rPr>
+              <a:t>How: </a:t>
+            </a:r>
+            <a:r>
+              <a:rPr sz="819" b="0" i="0">
+                <a:solidFill>
+                  <a:srgbClr val="333333"/>
+                </a:solidFill>
+                <a:latin typeface="Arial"/>
+              </a:rPr>
+              <a:t>predicts school-level attendance from history, calendars &amp; seasonality; auto-generates daily indents &amp; forward buying schedules</a:t>
+            </a:r>
+          </a:p>
+          <a:p>
+            <a:pPr algn="l">
+              <a:lnSpc>
+                <a:spcPct val="105000"/>
+              </a:lnSpc>
+              <a:spcBef>
+                <a:spcPts val="0"/>
+              </a:spcBef>
+              <a:spcAft>
+                <a:spcPts val="300"/>
+              </a:spcAft>
+            </a:pPr>
+            <a:r>
+              <a:rPr sz="780" b="1" i="0">
+                <a:solidFill>
+                  <a:srgbClr val="727375"/>
+                </a:solidFill>
+                <a:latin typeface="Arial"/>
+              </a:rPr>
+              <a:t>Rollout: </a:t>
+            </a:r>
+            <a:r>
+              <a:rPr sz="780" b="0" i="0">
+                <a:solidFill>
+                  <a:srgbClr val="727375"/>
+                </a:solidFill>
+                <a:latin typeface="Arial"/>
+              </a:rPr>
+              <a:t>3-kitchen pilot (Mo 1–4) → all 68 kitchens by Mo 12</a:t>
+            </a:r>
+          </a:p>
+          <a:p>
+            <a:pPr algn="l">
+              <a:lnSpc>
+                <a:spcPct val="100000"/>
+              </a:lnSpc>
+              <a:spcBef>
+                <a:spcPts val="0"/>
+              </a:spcBef>
+              <a:spcAft>
+                <a:spcPts val="0"/>
+              </a:spcAft>
+            </a:pPr>
+            <a:r>
+              <a:rPr sz="860" b="1" i="0">
+                <a:solidFill>
+                  <a:srgbClr val="398025"/>
+                </a:solidFill>
+                <a:latin typeface="Arial"/>
+              </a:rPr>
+              <a:t>→  ~70% less food waste  ·  est. $230k saved / yr [dummy]</a:t>
+            </a:r>
+          </a:p>
+        </p:txBody>
+      </p:sp>
+      <p:sp>
+        <p:nvSpPr>
+          <p:cNvPr id="27" name="Rectangle 26"/>
+          <p:cNvSpPr/>
+          <p:nvPr/>
+        </p:nvSpPr>
+        <p:spPr>
+          <a:xfrm>
+            <a:off x="4709160" y="2569463"/>
+            <a:ext cx="54864" cy="182880"/>
+          </a:xfrm>
+          <a:prstGeom prst="rect">
+            <a:avLst/>
+          </a:prstGeom>
+          <a:solidFill>
+            <a:srgbClr val="C22310"/>
+          </a:solidFill>
+          <a:ln>
+            <a:noFill/>
+          </a:ln>
+          <a:effectLst/>
+        </p:spPr>
+        <p:style>
+          <a:lnRef idx="1">
+            <a:schemeClr val="accent1"/>
+          </a:lnRef>
+          <a:fillRef idx="3">
+            <a:schemeClr val="accent1"/>
+          </a:fillRef>
+          <a:effectRef idx="2">
+            <a:schemeClr val="accent1"/>
+          </a:effectRef>
+          <a:fontRef idx="minor">
+            <a:schemeClr val="lt1"/>
+          </a:fontRef>
+        </p:style>
+        <p:txBody>
+          <a:bodyPr rtlCol="0" anchor="ctr"/>
+          <a:lstStyle/>
+          <a:p>
+            <a:pPr algn="ctr"/>
+          </a:p>
+        </p:txBody>
+      </p:sp>
+      <p:sp>
+        <p:nvSpPr>
+          <p:cNvPr id="28" name="TextBox 27"/>
+          <p:cNvSpPr txBox="1"/>
+          <p:nvPr/>
+        </p:nvSpPr>
+        <p:spPr>
+          <a:xfrm>
+            <a:off x="4855464" y="2542032"/>
+            <a:ext cx="3922776" cy="256032"/>
+          </a:xfrm>
+          <a:prstGeom prst="rect">
+            <a:avLst/>
+          </a:prstGeom>
+          <a:noFill/>
+        </p:spPr>
+        <p:txBody>
+          <a:bodyPr wrap="square" lIns="0" rIns="0" tIns="0" bIns="0" anchor="t">
+            <a:spAutoFit/>
+          </a:bodyPr>
+          <a:lstStyle/>
+          <a:p>
+            <a:pPr algn="l">
+              <a:lnSpc>
+                <a:spcPct val="100000"/>
+              </a:lnSpc>
+              <a:spcBef>
+                <a:spcPts val="0"/>
+              </a:spcBef>
+              <a:spcAft>
+                <a:spcPts val="0"/>
+              </a:spcAft>
+            </a:pPr>
+            <a:r>
+              <a:rPr sz="1050" b="1" i="0">
+                <a:solidFill>
+                  <a:srgbClr val="1B3E6E"/>
+                </a:solidFill>
+                <a:latin typeface="Arial"/>
+              </a:rPr>
+              <a:t>GAP 2 — Distribution: the last mile is blind</a:t>
+            </a:r>
+          </a:p>
+        </p:txBody>
+      </p:sp>
+      <p:sp>
+        <p:nvSpPr>
+          <p:cNvPr id="29" name="Rectangle 28"/>
+          <p:cNvSpPr/>
+          <p:nvPr/>
+        </p:nvSpPr>
+        <p:spPr>
+          <a:xfrm>
+            <a:off x="4709160" y="2816351"/>
+            <a:ext cx="4069080" cy="10972"/>
+          </a:xfrm>
+          <a:prstGeom prst="rect">
+            <a:avLst/>
+          </a:prstGeom>
+          <a:solidFill>
+            <a:srgbClr val="BFBFBF"/>
+          </a:solidFill>
+          <a:ln>
+            <a:noFill/>
+          </a:ln>
+          <a:effectLst/>
+        </p:spPr>
+        <p:style>
+          <a:lnRef idx="1">
+            <a:schemeClr val="accent1"/>
+          </a:lnRef>
+          <a:fillRef idx="3">
+            <a:schemeClr val="accent1"/>
+          </a:fillRef>
+          <a:effectRef idx="2">
+            <a:schemeClr val="accent1"/>
+          </a:effectRef>
+          <a:fontRef idx="minor">
+            <a:schemeClr val="lt1"/>
+          </a:fontRef>
+        </p:style>
+        <p:txBody>
+          <a:bodyPr rtlCol="0" anchor="ctr"/>
+          <a:lstStyle/>
+          <a:p>
+            <a:pPr algn="ctr"/>
+          </a:p>
+        </p:txBody>
+      </p:sp>
+      <p:sp>
+        <p:nvSpPr>
+          <p:cNvPr id="30" name="TextBox 29"/>
+          <p:cNvSpPr txBox="1"/>
+          <p:nvPr/>
+        </p:nvSpPr>
+        <p:spPr>
+          <a:xfrm>
+            <a:off x="4709160" y="2907791"/>
+            <a:ext cx="4069080" cy="1005840"/>
+          </a:xfrm>
+          <a:prstGeom prst="rect">
+            <a:avLst/>
+          </a:prstGeom>
+          <a:noFill/>
+        </p:spPr>
+        <p:txBody>
+          <a:bodyPr wrap="square" lIns="0" rIns="0" tIns="0" bIns="0" anchor="t">
+            <a:spAutoFit/>
+          </a:bodyPr>
+          <a:lstStyle/>
+          <a:p>
+            <a:pPr algn="l">
+              <a:lnSpc>
+                <a:spcPct val="105000"/>
+              </a:lnSpc>
+              <a:spcBef>
+                <a:spcPts val="0"/>
+              </a:spcBef>
+              <a:spcAft>
+                <a:spcPts val="300"/>
+              </a:spcAft>
+            </a:pPr>
+            <a:r>
+              <a:rPr sz="819" b="1" i="0">
+                <a:solidFill>
+                  <a:srgbClr val="333333"/>
+                </a:solidFill>
+                <a:latin typeface="Arial"/>
+              </a:rPr>
+              <a:t>•  Static, driver-memory routes</a:t>
+            </a:r>
+            <a:r>
+              <a:rPr sz="819" b="0" i="0">
+                <a:solidFill>
+                  <a:srgbClr val="333333"/>
+                </a:solidFill>
+                <a:latin typeface="Arial"/>
+              </a:rPr>
+              <a:t> — 15–30 min past the lunch bell means children stay hungry all day</a:t>
+            </a:r>
+          </a:p>
+          <a:p>
+            <a:pPr algn="l">
+              <a:lnSpc>
+                <a:spcPct val="105000"/>
+              </a:lnSpc>
+              <a:spcBef>
+                <a:spcPts val="0"/>
+              </a:spcBef>
+              <a:spcAft>
+                <a:spcPts val="300"/>
+              </a:spcAft>
+            </a:pPr>
+            <a:r>
+              <a:rPr sz="819" b="1" i="0">
+                <a:solidFill>
+                  <a:srgbClr val="333333"/>
+                </a:solidFill>
+                <a:latin typeface="Arial"/>
+              </a:rPr>
+              <a:t>•  Untracked vessels &amp; utensils</a:t>
+            </a:r>
+            <a:r>
+              <a:rPr sz="819" b="0" i="0">
+                <a:solidFill>
+                  <a:srgbClr val="333333"/>
+                </a:solidFill>
+                <a:latin typeface="Arial"/>
+              </a:rPr>
+              <a:t> — daily losses add to operating cost</a:t>
+            </a:r>
+          </a:p>
+          <a:p>
+            <a:pPr algn="l">
+              <a:lnSpc>
+                <a:spcPct val="105000"/>
+              </a:lnSpc>
+              <a:spcBef>
+                <a:spcPts val="0"/>
+              </a:spcBef>
+              <a:spcAft>
+                <a:spcPts val="300"/>
+              </a:spcAft>
+            </a:pPr>
+            <a:r>
+              <a:rPr sz="819" b="1" i="0">
+                <a:solidFill>
+                  <a:srgbClr val="333333"/>
+                </a:solidFill>
+                <a:latin typeface="Arial"/>
+              </a:rPr>
+              <a:t>•  Adulteration / diversion risk</a:t>
+            </a:r>
+            <a:r>
+              <a:rPr sz="819" b="0" i="0">
+                <a:solidFill>
+                  <a:srgbClr val="333333"/>
+                </a:solidFill>
+                <a:latin typeface="Arial"/>
+              </a:rPr>
+              <a:t> — unsealed vans can be offloaded at roadside dhabas</a:t>
+            </a:r>
+          </a:p>
+          <a:p>
+            <a:pPr algn="l">
+              <a:lnSpc>
+                <a:spcPct val="105000"/>
+              </a:lnSpc>
+              <a:spcBef>
+                <a:spcPts val="0"/>
+              </a:spcBef>
+              <a:spcAft>
+                <a:spcPts val="0"/>
+              </a:spcAft>
+            </a:pPr>
+            <a:r>
+              <a:rPr sz="819" b="1" i="0">
+                <a:solidFill>
+                  <a:srgbClr val="333333"/>
+                </a:solidFill>
+                <a:latin typeface="Arial"/>
+              </a:rPr>
+              <a:t>•  No proof-of-delivery</a:t>
+            </a:r>
+            <a:r>
+              <a:rPr sz="819" b="0" i="0">
+                <a:solidFill>
+                  <a:srgbClr val="333333"/>
+                </a:solidFill>
+                <a:latin typeface="Arial"/>
+              </a:rPr>
+              <a:t> — school shortfall disputes go unresolved</a:t>
+            </a:r>
+          </a:p>
+        </p:txBody>
+      </p:sp>
+      <p:sp>
+        <p:nvSpPr>
+          <p:cNvPr id="31" name="TextBox 30"/>
+          <p:cNvSpPr txBox="1"/>
+          <p:nvPr/>
+        </p:nvSpPr>
+        <p:spPr>
+          <a:xfrm>
+            <a:off x="4709160" y="3931920"/>
+            <a:ext cx="4069080" cy="219456"/>
+          </a:xfrm>
+          <a:prstGeom prst="rect">
+            <a:avLst/>
+          </a:prstGeom>
+          <a:noFill/>
+        </p:spPr>
+        <p:txBody>
+          <a:bodyPr wrap="square" lIns="0" rIns="0" tIns="0" bIns="0" anchor="t">
+            <a:spAutoFit/>
+          </a:bodyPr>
+          <a:lstStyle/>
+          <a:p>
+            <a:pPr algn="l">
+              <a:lnSpc>
+                <a:spcPct val="100000"/>
+              </a:lnSpc>
+              <a:spcBef>
+                <a:spcPts val="0"/>
+              </a:spcBef>
+              <a:spcAft>
+                <a:spcPts val="0"/>
+              </a:spcAft>
+            </a:pPr>
+            <a:r>
+              <a:rPr sz="819" b="1" i="0">
+                <a:solidFill>
+                  <a:srgbClr val="C22310"/>
+                </a:solidFill>
+                <a:latin typeface="Arial"/>
+              </a:rPr>
+              <a:t>Cost today:  6.2% deliveries miss lunch  ·  $35k/yr shrinkage [dummy]</a:t>
+            </a:r>
+          </a:p>
+        </p:txBody>
+      </p:sp>
+      <p:cxnSp>
+        <p:nvCxnSpPr>
+          <p:cNvPr id="32" name="Connector 31"/>
+          <p:cNvCxnSpPr/>
+          <p:nvPr/>
+        </p:nvCxnSpPr>
+        <p:spPr>
+          <a:xfrm>
+            <a:off x="6743700" y="4187952"/>
+            <a:ext cx="0" cy="182879"/>
+          </a:xfrm>
+          <a:prstGeom prst="line">
+            <a:avLst/>
+          </a:prstGeom>
+          <a:ln w="15875">
+            <a:solidFill>
+              <a:srgbClr val="398025"/>
+            </a:solidFill>
+            <a:prstDash val="sysDash"/>
+            <a:tailEnd type="triangle" w="med" len="med"/>
+          </a:ln>
+          <a:effectLst/>
+        </p:spPr>
+        <p:style>
+          <a:lnRef idx="2">
+            <a:schemeClr val="accent1"/>
+          </a:lnRef>
+          <a:fillRef idx="0">
+            <a:schemeClr val="accent1"/>
+          </a:fillRef>
+          <a:effectRef idx="1">
+            <a:schemeClr val="accent1"/>
+          </a:effectRef>
+          <a:fontRef idx="minor">
+            <a:schemeClr val="tx1"/>
+          </a:fontRef>
+        </p:style>
+      </p:cxnSp>
+      <p:sp>
+        <p:nvSpPr>
+          <p:cNvPr id="33" name="Rounded Rectangle 32"/>
+          <p:cNvSpPr/>
+          <p:nvPr/>
+        </p:nvSpPr>
+        <p:spPr>
+          <a:xfrm>
+            <a:off x="4709160" y="4425696"/>
+            <a:ext cx="4069080" cy="1389888"/>
+          </a:xfrm>
+          <a:prstGeom prst="roundRect">
+            <a:avLst>
+              <a:gd name="adj" fmla="val 5000"/>
+            </a:avLst>
+          </a:prstGeom>
+          <a:solidFill>
+            <a:srgbClr val="EAF3E6"/>
+          </a:solidFill>
+          <a:ln w="12700">
+            <a:solidFill>
+              <a:srgbClr val="398025"/>
+            </a:solidFill>
+          </a:ln>
+          <a:effectLst/>
+        </p:spPr>
+        <p:style>
+          <a:lnRef idx="1">
+            <a:schemeClr val="accent1"/>
+          </a:lnRef>
+          <a:fillRef idx="3">
+            <a:schemeClr val="accent1"/>
+          </a:fillRef>
+          <a:effectRef idx="2">
+            <a:schemeClr val="accent1"/>
+          </a:effectRef>
+          <a:fontRef idx="minor">
+            <a:schemeClr val="lt1"/>
+          </a:fontRef>
+        </p:style>
+        <p:txBody>
+          <a:bodyPr rtlCol="0" anchor="ctr"/>
+          <a:lstStyle/>
+          <a:p>
+            <a:pPr algn="ctr"/>
+          </a:p>
+        </p:txBody>
+      </p:sp>
+      <p:sp>
+        <p:nvSpPr>
+          <p:cNvPr id="34" name="TextBox 33"/>
+          <p:cNvSpPr txBox="1"/>
+          <p:nvPr/>
+        </p:nvSpPr>
+        <p:spPr>
+          <a:xfrm>
+            <a:off x="4837176" y="4507992"/>
+            <a:ext cx="3813048" cy="1389888"/>
+          </a:xfrm>
+          <a:prstGeom prst="rect">
+            <a:avLst/>
+          </a:prstGeom>
+          <a:noFill/>
+        </p:spPr>
+        <p:txBody>
+          <a:bodyPr wrap="square" lIns="0" rIns="0" tIns="0" bIns="0" anchor="t">
+            <a:spAutoFit/>
+          </a:bodyPr>
+          <a:lstStyle/>
+          <a:p>
+            <a:pPr algn="l">
+              <a:lnSpc>
+                <a:spcPct val="100000"/>
+              </a:lnSpc>
+              <a:spcBef>
+                <a:spcPts val="0"/>
+              </a:spcBef>
+              <a:spcAft>
+                <a:spcPts val="300"/>
+              </a:spcAft>
+            </a:pPr>
+            <a:r>
+              <a:rPr sz="1050" b="1" i="0">
+                <a:solidFill>
+                  <a:srgbClr val="398025"/>
+                </a:solidFill>
+                <a:latin typeface="Arial"/>
+              </a:rPr>
+              <a:t>SOLUTION 2 — “Last-Mile Shield”  ·  $100k</a:t>
+            </a:r>
+          </a:p>
+          <a:p>
+            <a:pPr algn="l">
+              <a:lnSpc>
+                <a:spcPct val="105000"/>
+              </a:lnSpc>
+              <a:spcBef>
+                <a:spcPts val="0"/>
+              </a:spcBef>
+              <a:spcAft>
+                <a:spcPts val="300"/>
+              </a:spcAft>
+            </a:pPr>
+            <a:r>
+              <a:rPr sz="819" b="1" i="0">
+                <a:solidFill>
+                  <a:srgbClr val="1B3E6E"/>
+                </a:solidFill>
+                <a:latin typeface="Arial"/>
+              </a:rPr>
+              <a:t>What: </a:t>
+            </a:r>
+            <a:r>
+              <a:rPr sz="819" b="0" i="0">
+                <a:solidFill>
+                  <a:srgbClr val="333333"/>
+                </a:solidFill>
+                <a:latin typeface="Arial"/>
+              </a:rPr>
+              <a:t>AI route optimisation + van telematics (GPS, cameras, RFID tags) + geofenced smart locks</a:t>
+            </a:r>
+          </a:p>
+          <a:p>
+            <a:pPr algn="l">
+              <a:lnSpc>
+                <a:spcPct val="105000"/>
+              </a:lnSpc>
+              <a:spcBef>
+                <a:spcPts val="0"/>
+              </a:spcBef>
+              <a:spcAft>
+                <a:spcPts val="300"/>
+              </a:spcAft>
+            </a:pPr>
+            <a:r>
+              <a:rPr sz="819" b="1" i="0">
+                <a:solidFill>
+                  <a:srgbClr val="1B3E6E"/>
+                </a:solidFill>
+                <a:latin typeface="Arial"/>
+              </a:rPr>
+              <a:t>How: </a:t>
+            </a:r>
+            <a:r>
+              <a:rPr sz="819" b="0" i="0">
+                <a:solidFill>
+                  <a:srgbClr val="333333"/>
+                </a:solidFill>
+                <a:latin typeface="Arial"/>
+              </a:rPr>
+              <a:t>routes sequenced to each school's lunch bell; doors unlock only within 150 m of a registered school — diversion becomes impossible</a:t>
+            </a:r>
+          </a:p>
+          <a:p>
+            <a:pPr algn="l">
+              <a:lnSpc>
+                <a:spcPct val="105000"/>
+              </a:lnSpc>
+              <a:spcBef>
+                <a:spcPts val="0"/>
+              </a:spcBef>
+              <a:spcAft>
+                <a:spcPts val="300"/>
+              </a:spcAft>
+            </a:pPr>
+            <a:r>
+              <a:rPr sz="780" b="1" i="0">
+                <a:solidFill>
+                  <a:srgbClr val="727375"/>
+                </a:solidFill>
+                <a:latin typeface="Arial"/>
+              </a:rPr>
+              <a:t>Bonus: </a:t>
+            </a:r>
+            <a:r>
+              <a:rPr sz="780" b="0" i="0">
+                <a:solidFill>
+                  <a:srgbClr val="727375"/>
+                </a:solidFill>
+                <a:latin typeface="Arial"/>
+              </a:rPr>
+              <a:t>hardware amortises over 5+ yrs; 3 vans freed per hub reach new schools</a:t>
+            </a:r>
+          </a:p>
+          <a:p>
+            <a:pPr algn="l">
+              <a:lnSpc>
+                <a:spcPct val="100000"/>
+              </a:lnSpc>
+              <a:spcBef>
+                <a:spcPts val="0"/>
+              </a:spcBef>
+              <a:spcAft>
+                <a:spcPts val="0"/>
+              </a:spcAft>
+            </a:pPr>
+            <a:r>
+              <a:rPr sz="860" b="1" i="0">
+                <a:solidFill>
+                  <a:srgbClr val="398025"/>
+                </a:solidFill>
+                <a:latin typeface="Arial"/>
+              </a:rPr>
+              <a:t>→  99%+ on-time  ·  −18% fleet km  ·  est. $80k saved / yr [dummy]</a:t>
             </a:r>
           </a:p>
         </p:txBody>

--- a/AkshayaPatra_GS_Pitch.pptx
+++ b/AkshayaPatra_GS_Pitch.pptx
@@ -12,6 +12,7 @@
     <p:sldId id="260" r:id="rId11"/>
     <p:sldId id="261" r:id="rId12"/>
     <p:sldId id="262" r:id="rId13"/>
+    <p:sldId id="263" r:id="rId14"/>
   </p:sldIdLst>
   <p:sldSz cx="9144000" cy="6858000" type="screen4x3"/>
   <p:notesSz cx="6858000" cy="9144000"/>
@@ -1150,6 +1151,135 @@
         </a:defRPr>
       </a:pPr>
       <a:endParaRPr lang="en-US"/>
+    </a:p>
+  </c:txPr>
+  <c:externalData r:id="rId1">
+    <c:autoUpdate val="0"/>
+  </c:externalData>
+</c:chartSpace>
+</file>
+
+<file path=ppt/charts/chart7.xml><?xml version="1.0" encoding="utf-8"?>
+<c:chartSpace xmlns:c="http://schemas.openxmlformats.org/drawingml/2006/chart" xmlns:a="http://schemas.openxmlformats.org/drawingml/2006/main" xmlns:r="http://schemas.openxmlformats.org/officeDocument/2006/relationships">
+  <c:date1904 val="0"/>
+  <c:roundedCorners val="0"/>
+  <c:chart>
+    <c:autoTitleDeleted val="1"/>
+    <c:plotArea>
+      <c:layout/>
+      <c:doughnutChart>
+        <c:varyColors val="1"/>
+        <c:ser>
+          <c:idx val="0"/>
+          <c:order val="0"/>
+          <c:tx>
+            <c:strRef>
+              <c:f>Sheet1!$B$1</c:f>
+              <c:strCache>
+                <c:ptCount val="1"/>
+                <c:pt idx="0">
+                  <c:v>s</c:v>
+                </c:pt>
+              </c:strCache>
+            </c:strRef>
+          </c:tx>
+          <c:dPt>
+            <c:idx val="0"/>
+            <c:spPr>
+              <a:solidFill>
+                <a:srgbClr val="1B3E6E"/>
+              </a:solidFill>
+              <a:ln w="19050">
+                <a:solidFill>
+                  <a:srgbClr val="FFFFFF"/>
+                </a:solidFill>
+              </a:ln>
+            </c:spPr>
+          </c:dPt>
+          <c:dPt>
+            <c:idx val="1"/>
+            <c:spPr>
+              <a:solidFill>
+                <a:srgbClr val="398025"/>
+              </a:solidFill>
+              <a:ln w="19050">
+                <a:solidFill>
+                  <a:srgbClr val="FFFFFF"/>
+                </a:solidFill>
+              </a:ln>
+            </c:spPr>
+          </c:dPt>
+          <c:cat>
+            <c:strRef>
+              <c:f>Sheet1!$A$2:$A$3</c:f>
+              <c:strCache>
+                <c:ptCount val="2"/>
+                <c:pt idx="0">
+                  <c:v>Solution 1 — $150k</c:v>
+                </c:pt>
+                <c:pt idx="1">
+                  <c:v>Solution 2 — $100k</c:v>
+                </c:pt>
+              </c:strCache>
+            </c:strRef>
+          </c:cat>
+          <c:val>
+            <c:numRef>
+              <c:f>Sheet1!$B$2:$B$3</c:f>
+              <c:numCache>
+                <c:formatCode>General</c:formatCode>
+                <c:ptCount val="2"/>
+                <c:pt idx="0">
+                  <c:v>150</c:v>
+                </c:pt>
+                <c:pt idx="1">
+                  <c:v>100</c:v>
+                </c:pt>
+              </c:numCache>
+            </c:numRef>
+          </c:val>
+        </c:ser>
+        <c:dLbls>
+          <c:numFmt formatCode="&quot;$&quot;0&quot;k&quot;" sourceLinked="0"/>
+          <c:txPr>
+            <a:bodyPr/>
+            <a:lstStyle/>
+            <a:p>
+              <a:pPr>
+                <a:defRPr sz="1000" b="1">
+                  <a:solidFill>
+                    <a:srgbClr val="FFFFFF"/>
+                  </a:solidFill>
+                </a:defRPr>
+              </a:pPr>
+            </a:p>
+          </c:txPr>
+          <c:showLegendKey val="0"/>
+          <c:showVal val="1"/>
+          <c:showCatName val="0"/>
+          <c:showSerName val="0"/>
+          <c:showPercent val="0"/>
+          <c:showBubbleSize val="0"/>
+          <c:showLeaderLines val="1"/>
+        </c:dLbls>
+        <c:firstSliceAng val="0"/>
+        <c:holeSize val="50"/>
+      </c:doughnutChart>
+    </c:plotArea>
+    <c:plotVisOnly val="1"/>
+    <c:dispBlanksAs val="gap"/>
+    <c:showDLblsOverMax val="0"/>
+  </c:chart>
+  <c:txPr>
+    <a:bodyPr/>
+    <a:lstStyle/>
+    <a:p>
+      <a:pPr>
+        <a:defRPr sz="800">
+          <a:latin typeface="Arial"/>
+        </a:defRPr>
+      </a:pPr>
+      <a:endParaRPr/>
     </a:p>
   </c:txPr>
   <c:externalData r:id="rId1">
@@ -18324,7 +18454,657 @@
         </p:nvSpPr>
         <p:spPr>
           <a:xfrm>
-            <a:off x="365760" y="1353312"/>
+            <a:off x="365760" y="1380744"/>
+            <a:ext cx="54864" cy="182880"/>
+          </a:xfrm>
+          <a:prstGeom prst="rect">
+            <a:avLst/>
+          </a:prstGeom>
+          <a:solidFill>
+            <a:srgbClr val="C22310"/>
+          </a:solidFill>
+          <a:ln>
+            <a:noFill/>
+          </a:ln>
+          <a:effectLst/>
+        </p:spPr>
+        <p:style>
+          <a:lnRef idx="1">
+            <a:schemeClr val="accent1"/>
+          </a:lnRef>
+          <a:fillRef idx="3">
+            <a:schemeClr val="accent1"/>
+          </a:fillRef>
+          <a:effectRef idx="2">
+            <a:schemeClr val="accent1"/>
+          </a:effectRef>
+          <a:fontRef idx="minor">
+            <a:schemeClr val="lt1"/>
+          </a:fontRef>
+        </p:style>
+        <p:txBody>
+          <a:bodyPr rtlCol="0" anchor="ctr"/>
+          <a:lstStyle/>
+          <a:p>
+            <a:pPr algn="ctr"/>
+          </a:p>
+        </p:txBody>
+      </p:sp>
+      <p:sp>
+        <p:nvSpPr>
+          <p:cNvPr id="11" name="TextBox 10"/>
+          <p:cNvSpPr txBox="1"/>
+          <p:nvPr/>
+        </p:nvSpPr>
+        <p:spPr>
+          <a:xfrm>
+            <a:off x="512064" y="1353312"/>
+            <a:ext cx="3922776" cy="256032"/>
+          </a:xfrm>
+          <a:prstGeom prst="rect">
+            <a:avLst/>
+          </a:prstGeom>
+          <a:noFill/>
+        </p:spPr>
+        <p:txBody>
+          <a:bodyPr wrap="square" lIns="0" rIns="0" tIns="0" bIns="0" anchor="t">
+            <a:spAutoFit/>
+          </a:bodyPr>
+          <a:lstStyle/>
+          <a:p>
+            <a:pPr algn="l">
+              <a:lnSpc>
+                <a:spcPct val="100000"/>
+              </a:lnSpc>
+              <a:spcBef>
+                <a:spcPts val="0"/>
+              </a:spcBef>
+              <a:spcAft>
+                <a:spcPts val="0"/>
+              </a:spcAft>
+            </a:pPr>
+            <a:r>
+              <a:rPr sz="1050" b="1" i="0">
+                <a:solidFill>
+                  <a:srgbClr val="1B3E6E"/>
+                </a:solidFill>
+                <a:latin typeface="Arial"/>
+              </a:rPr>
+              <a:t>GAP 1 — Procurement: demand is guesswork</a:t>
+            </a:r>
+          </a:p>
+        </p:txBody>
+      </p:sp>
+      <p:sp>
+        <p:nvSpPr>
+          <p:cNvPr id="12" name="Rectangle 11"/>
+          <p:cNvSpPr/>
+          <p:nvPr/>
+        </p:nvSpPr>
+        <p:spPr>
+          <a:xfrm>
+            <a:off x="365760" y="1627632"/>
+            <a:ext cx="4069080" cy="10972"/>
+          </a:xfrm>
+          <a:prstGeom prst="rect">
+            <a:avLst/>
+          </a:prstGeom>
+          <a:solidFill>
+            <a:srgbClr val="BFBFBF"/>
+          </a:solidFill>
+          <a:ln>
+            <a:noFill/>
+          </a:ln>
+          <a:effectLst/>
+        </p:spPr>
+        <p:style>
+          <a:lnRef idx="1">
+            <a:schemeClr val="accent1"/>
+          </a:lnRef>
+          <a:fillRef idx="3">
+            <a:schemeClr val="accent1"/>
+          </a:fillRef>
+          <a:effectRef idx="2">
+            <a:schemeClr val="accent1"/>
+          </a:effectRef>
+          <a:fontRef idx="minor">
+            <a:schemeClr val="lt1"/>
+          </a:fontRef>
+        </p:style>
+        <p:txBody>
+          <a:bodyPr rtlCol="0" anchor="ctr"/>
+          <a:lstStyle/>
+          <a:p>
+            <a:pPr algn="ctr"/>
+          </a:p>
+        </p:txBody>
+      </p:sp>
+      <p:sp>
+        <p:nvSpPr>
+          <p:cNvPr id="13" name="TextBox 12"/>
+          <p:cNvSpPr txBox="1"/>
+          <p:nvPr/>
+        </p:nvSpPr>
+        <p:spPr>
+          <a:xfrm>
+            <a:off x="365760" y="1719072"/>
+            <a:ext cx="4069080" cy="960120"/>
+          </a:xfrm>
+          <a:prstGeom prst="rect">
+            <a:avLst/>
+          </a:prstGeom>
+          <a:noFill/>
+        </p:spPr>
+        <p:txBody>
+          <a:bodyPr wrap="square" lIns="0" rIns="0" tIns="0" bIns="0" anchor="t">
+            <a:spAutoFit/>
+          </a:bodyPr>
+          <a:lstStyle/>
+          <a:p>
+            <a:pPr algn="l">
+              <a:lnSpc>
+                <a:spcPct val="102000"/>
+              </a:lnSpc>
+              <a:spcBef>
+                <a:spcPts val="0"/>
+              </a:spcBef>
+              <a:spcAft>
+                <a:spcPts val="300"/>
+              </a:spcAft>
+            </a:pPr>
+            <a:r>
+              <a:rPr sz="819" b="1" i="0">
+                <a:solidFill>
+                  <a:srgbClr val="333333"/>
+                </a:solidFill>
+                <a:latin typeface="Arial"/>
+              </a:rPr>
+              <a:t>•  Manual, gut-feel indenting</a:t>
+            </a:r>
+            <a:r>
+              <a:rPr sz="819" b="0" i="0">
+                <a:solidFill>
+                  <a:srgbClr val="333333"/>
+                </a:solidFill>
+                <a:latin typeface="Arial"/>
+              </a:rPr>
+              <a:t> 3 days ahead — blind to attendance swings, exams &amp; holidays</a:t>
+            </a:r>
+          </a:p>
+          <a:p>
+            <a:pPr algn="l">
+              <a:lnSpc>
+                <a:spcPct val="102000"/>
+              </a:lnSpc>
+              <a:spcBef>
+                <a:spcPts val="0"/>
+              </a:spcBef>
+              <a:spcAft>
+                <a:spcPts val="300"/>
+              </a:spcAft>
+            </a:pPr>
+            <a:r>
+              <a:rPr sz="819" b="1" i="0">
+                <a:solidFill>
+                  <a:srgbClr val="333333"/>
+                </a:solidFill>
+                <a:latin typeface="Arial"/>
+              </a:rPr>
+              <a:t>•  Reactive spot-buying</a:t>
+            </a:r>
+            <a:r>
+              <a:rPr sz="819" b="0" i="0">
+                <a:solidFill>
+                  <a:srgbClr val="333333"/>
+                </a:solidFill>
+                <a:latin typeface="Arial"/>
+              </a:rPr>
+              <a:t> at mandi peak prices when stocks run short</a:t>
+            </a:r>
+          </a:p>
+          <a:p>
+            <a:pPr algn="l">
+              <a:lnSpc>
+                <a:spcPct val="102000"/>
+              </a:lnSpc>
+              <a:spcBef>
+                <a:spcPts val="0"/>
+              </a:spcBef>
+              <a:spcAft>
+                <a:spcPts val="300"/>
+              </a:spcAft>
+            </a:pPr>
+            <a:r>
+              <a:rPr sz="819" b="1" i="0">
+                <a:solidFill>
+                  <a:srgbClr val="333333"/>
+                </a:solidFill>
+                <a:latin typeface="Arial"/>
+              </a:rPr>
+              <a:t>•  No price intelligence</a:t>
+            </a:r>
+            <a:r>
+              <a:rPr sz="819" b="0" i="0">
+                <a:solidFill>
+                  <a:srgbClr val="333333"/>
+                </a:solidFill>
+                <a:latin typeface="Arial"/>
+              </a:rPr>
+              <a:t> — cheapest forward-buying windows are missed</a:t>
+            </a:r>
+          </a:p>
+          <a:p>
+            <a:pPr algn="l">
+              <a:lnSpc>
+                <a:spcPct val="102000"/>
+              </a:lnSpc>
+              <a:spcBef>
+                <a:spcPts val="0"/>
+              </a:spcBef>
+              <a:spcAft>
+                <a:spcPts val="0"/>
+              </a:spcAft>
+            </a:pPr>
+            <a:r>
+              <a:rPr sz="819" b="1" i="0">
+                <a:solidFill>
+                  <a:srgbClr val="333333"/>
+                </a:solidFill>
+                <a:latin typeface="Arial"/>
+              </a:rPr>
+              <a:t>•  No feedback loop</a:t>
+            </a:r>
+            <a:r>
+              <a:rPr sz="819" b="0" i="0">
+                <a:solidFill>
+                  <a:srgbClr val="333333"/>
+                </a:solidFill>
+                <a:latin typeface="Arial"/>
+              </a:rPr>
+              <a:t> from schools on actual meal uptake</a:t>
+            </a:r>
+          </a:p>
+        </p:txBody>
+      </p:sp>
+      <p:sp>
+        <p:nvSpPr>
+          <p:cNvPr id="14" name="TextBox 13"/>
+          <p:cNvSpPr txBox="1"/>
+          <p:nvPr/>
+        </p:nvSpPr>
+        <p:spPr>
+          <a:xfrm>
+            <a:off x="365760" y="2724912"/>
+            <a:ext cx="4069080" cy="219456"/>
+          </a:xfrm>
+          <a:prstGeom prst="rect">
+            <a:avLst/>
+          </a:prstGeom>
+          <a:noFill/>
+        </p:spPr>
+        <p:txBody>
+          <a:bodyPr wrap="square" lIns="0" rIns="0" tIns="0" bIns="0" anchor="t">
+            <a:spAutoFit/>
+          </a:bodyPr>
+          <a:lstStyle/>
+          <a:p>
+            <a:pPr algn="l">
+              <a:lnSpc>
+                <a:spcPct val="100000"/>
+              </a:lnSpc>
+              <a:spcBef>
+                <a:spcPts val="0"/>
+              </a:spcBef>
+              <a:spcAft>
+                <a:spcPts val="0"/>
+              </a:spcAft>
+            </a:pPr>
+            <a:r>
+              <a:rPr sz="819" b="1" i="0">
+                <a:solidFill>
+                  <a:srgbClr val="C22310"/>
+                </a:solidFill>
+                <a:latin typeface="Arial"/>
+              </a:rPr>
+              <a:t>Cost today:  8–10% meals over-produced  ·  +12% paid on spot buys [dummy]</a:t>
+            </a:r>
+          </a:p>
+        </p:txBody>
+      </p:sp>
+      <p:sp>
+        <p:nvSpPr>
+          <p:cNvPr id="15" name="Rectangle 14"/>
+          <p:cNvSpPr/>
+          <p:nvPr/>
+        </p:nvSpPr>
+        <p:spPr>
+          <a:xfrm>
+            <a:off x="4709160" y="1380744"/>
+            <a:ext cx="54864" cy="182880"/>
+          </a:xfrm>
+          <a:prstGeom prst="rect">
+            <a:avLst/>
+          </a:prstGeom>
+          <a:solidFill>
+            <a:srgbClr val="C22310"/>
+          </a:solidFill>
+          <a:ln>
+            <a:noFill/>
+          </a:ln>
+          <a:effectLst/>
+        </p:spPr>
+        <p:style>
+          <a:lnRef idx="1">
+            <a:schemeClr val="accent1"/>
+          </a:lnRef>
+          <a:fillRef idx="3">
+            <a:schemeClr val="accent1"/>
+          </a:fillRef>
+          <a:effectRef idx="2">
+            <a:schemeClr val="accent1"/>
+          </a:effectRef>
+          <a:fontRef idx="minor">
+            <a:schemeClr val="lt1"/>
+          </a:fontRef>
+        </p:style>
+        <p:txBody>
+          <a:bodyPr rtlCol="0" anchor="ctr"/>
+          <a:lstStyle/>
+          <a:p>
+            <a:pPr algn="ctr"/>
+          </a:p>
+        </p:txBody>
+      </p:sp>
+      <p:sp>
+        <p:nvSpPr>
+          <p:cNvPr id="16" name="TextBox 15"/>
+          <p:cNvSpPr txBox="1"/>
+          <p:nvPr/>
+        </p:nvSpPr>
+        <p:spPr>
+          <a:xfrm>
+            <a:off x="4855464" y="1353312"/>
+            <a:ext cx="3922776" cy="256032"/>
+          </a:xfrm>
+          <a:prstGeom prst="rect">
+            <a:avLst/>
+          </a:prstGeom>
+          <a:noFill/>
+        </p:spPr>
+        <p:txBody>
+          <a:bodyPr wrap="square" lIns="0" rIns="0" tIns="0" bIns="0" anchor="t">
+            <a:spAutoFit/>
+          </a:bodyPr>
+          <a:lstStyle/>
+          <a:p>
+            <a:pPr algn="l">
+              <a:lnSpc>
+                <a:spcPct val="100000"/>
+              </a:lnSpc>
+              <a:spcBef>
+                <a:spcPts val="0"/>
+              </a:spcBef>
+              <a:spcAft>
+                <a:spcPts val="0"/>
+              </a:spcAft>
+            </a:pPr>
+            <a:r>
+              <a:rPr sz="1050" b="1" i="0">
+                <a:solidFill>
+                  <a:srgbClr val="1B3E6E"/>
+                </a:solidFill>
+                <a:latin typeface="Arial"/>
+              </a:rPr>
+              <a:t>GAP 2 — Distribution: the last mile is blind</a:t>
+            </a:r>
+          </a:p>
+        </p:txBody>
+      </p:sp>
+      <p:sp>
+        <p:nvSpPr>
+          <p:cNvPr id="17" name="Rectangle 16"/>
+          <p:cNvSpPr/>
+          <p:nvPr/>
+        </p:nvSpPr>
+        <p:spPr>
+          <a:xfrm>
+            <a:off x="4709160" y="1627632"/>
+            <a:ext cx="4069080" cy="10972"/>
+          </a:xfrm>
+          <a:prstGeom prst="rect">
+            <a:avLst/>
+          </a:prstGeom>
+          <a:solidFill>
+            <a:srgbClr val="BFBFBF"/>
+          </a:solidFill>
+          <a:ln>
+            <a:noFill/>
+          </a:ln>
+          <a:effectLst/>
+        </p:spPr>
+        <p:style>
+          <a:lnRef idx="1">
+            <a:schemeClr val="accent1"/>
+          </a:lnRef>
+          <a:fillRef idx="3">
+            <a:schemeClr val="accent1"/>
+          </a:fillRef>
+          <a:effectRef idx="2">
+            <a:schemeClr val="accent1"/>
+          </a:effectRef>
+          <a:fontRef idx="minor">
+            <a:schemeClr val="lt1"/>
+          </a:fontRef>
+        </p:style>
+        <p:txBody>
+          <a:bodyPr rtlCol="0" anchor="ctr"/>
+          <a:lstStyle/>
+          <a:p>
+            <a:pPr algn="ctr"/>
+          </a:p>
+        </p:txBody>
+      </p:sp>
+      <p:sp>
+        <p:nvSpPr>
+          <p:cNvPr id="18" name="TextBox 17"/>
+          <p:cNvSpPr txBox="1"/>
+          <p:nvPr/>
+        </p:nvSpPr>
+        <p:spPr>
+          <a:xfrm>
+            <a:off x="4709160" y="1719072"/>
+            <a:ext cx="4069080" cy="960120"/>
+          </a:xfrm>
+          <a:prstGeom prst="rect">
+            <a:avLst/>
+          </a:prstGeom>
+          <a:noFill/>
+        </p:spPr>
+        <p:txBody>
+          <a:bodyPr wrap="square" lIns="0" rIns="0" tIns="0" bIns="0" anchor="t">
+            <a:spAutoFit/>
+          </a:bodyPr>
+          <a:lstStyle/>
+          <a:p>
+            <a:pPr algn="l">
+              <a:lnSpc>
+                <a:spcPct val="102000"/>
+              </a:lnSpc>
+              <a:spcBef>
+                <a:spcPts val="0"/>
+              </a:spcBef>
+              <a:spcAft>
+                <a:spcPts val="300"/>
+              </a:spcAft>
+            </a:pPr>
+            <a:r>
+              <a:rPr sz="819" b="1" i="0">
+                <a:solidFill>
+                  <a:srgbClr val="333333"/>
+                </a:solidFill>
+                <a:latin typeface="Arial"/>
+              </a:rPr>
+              <a:t>•  Static, driver-memory routes</a:t>
+            </a:r>
+            <a:r>
+              <a:rPr sz="819" b="0" i="0">
+                <a:solidFill>
+                  <a:srgbClr val="333333"/>
+                </a:solidFill>
+                <a:latin typeface="Arial"/>
+              </a:rPr>
+              <a:t> — 15–30 min past the lunch bell means children stay hungry all day</a:t>
+            </a:r>
+          </a:p>
+          <a:p>
+            <a:pPr algn="l">
+              <a:lnSpc>
+                <a:spcPct val="102000"/>
+              </a:lnSpc>
+              <a:spcBef>
+                <a:spcPts val="0"/>
+              </a:spcBef>
+              <a:spcAft>
+                <a:spcPts val="300"/>
+              </a:spcAft>
+            </a:pPr>
+            <a:r>
+              <a:rPr sz="819" b="1" i="0">
+                <a:solidFill>
+                  <a:srgbClr val="333333"/>
+                </a:solidFill>
+                <a:latin typeface="Arial"/>
+              </a:rPr>
+              <a:t>•  Untracked vessels &amp; utensils</a:t>
+            </a:r>
+            <a:r>
+              <a:rPr sz="819" b="0" i="0">
+                <a:solidFill>
+                  <a:srgbClr val="333333"/>
+                </a:solidFill>
+                <a:latin typeface="Arial"/>
+              </a:rPr>
+              <a:t> — daily losses add to operating cost</a:t>
+            </a:r>
+          </a:p>
+          <a:p>
+            <a:pPr algn="l">
+              <a:lnSpc>
+                <a:spcPct val="102000"/>
+              </a:lnSpc>
+              <a:spcBef>
+                <a:spcPts val="0"/>
+              </a:spcBef>
+              <a:spcAft>
+                <a:spcPts val="300"/>
+              </a:spcAft>
+            </a:pPr>
+            <a:r>
+              <a:rPr sz="819" b="1" i="0">
+                <a:solidFill>
+                  <a:srgbClr val="333333"/>
+                </a:solidFill>
+                <a:latin typeface="Arial"/>
+              </a:rPr>
+              <a:t>•  Adulteration / diversion risk</a:t>
+            </a:r>
+            <a:r>
+              <a:rPr sz="819" b="0" i="0">
+                <a:solidFill>
+                  <a:srgbClr val="333333"/>
+                </a:solidFill>
+                <a:latin typeface="Arial"/>
+              </a:rPr>
+              <a:t> — unsealed vans can be offloaded at roadside dhabas</a:t>
+            </a:r>
+          </a:p>
+          <a:p>
+            <a:pPr algn="l">
+              <a:lnSpc>
+                <a:spcPct val="102000"/>
+              </a:lnSpc>
+              <a:spcBef>
+                <a:spcPts val="0"/>
+              </a:spcBef>
+              <a:spcAft>
+                <a:spcPts val="0"/>
+              </a:spcAft>
+            </a:pPr>
+            <a:r>
+              <a:rPr sz="819" b="1" i="0">
+                <a:solidFill>
+                  <a:srgbClr val="333333"/>
+                </a:solidFill>
+                <a:latin typeface="Arial"/>
+              </a:rPr>
+              <a:t>•  No proof-of-delivery</a:t>
+            </a:r>
+            <a:r>
+              <a:rPr sz="819" b="0" i="0">
+                <a:solidFill>
+                  <a:srgbClr val="333333"/>
+                </a:solidFill>
+                <a:latin typeface="Arial"/>
+              </a:rPr>
+              <a:t> — school shortfall disputes go unresolved</a:t>
+            </a:r>
+          </a:p>
+        </p:txBody>
+      </p:sp>
+      <p:sp>
+        <p:nvSpPr>
+          <p:cNvPr id="19" name="TextBox 18"/>
+          <p:cNvSpPr txBox="1"/>
+          <p:nvPr/>
+        </p:nvSpPr>
+        <p:spPr>
+          <a:xfrm>
+            <a:off x="4709160" y="2724912"/>
+            <a:ext cx="4069080" cy="219456"/>
+          </a:xfrm>
+          <a:prstGeom prst="rect">
+            <a:avLst/>
+          </a:prstGeom>
+          <a:noFill/>
+        </p:spPr>
+        <p:txBody>
+          <a:bodyPr wrap="square" lIns="0" rIns="0" tIns="0" bIns="0" anchor="t">
+            <a:spAutoFit/>
+          </a:bodyPr>
+          <a:lstStyle/>
+          <a:p>
+            <a:pPr algn="l">
+              <a:lnSpc>
+                <a:spcPct val="100000"/>
+              </a:lnSpc>
+              <a:spcBef>
+                <a:spcPts val="0"/>
+              </a:spcBef>
+              <a:spcAft>
+                <a:spcPts val="0"/>
+              </a:spcAft>
+            </a:pPr>
+            <a:r>
+              <a:rPr sz="819" b="1" i="0">
+                <a:solidFill>
+                  <a:srgbClr val="C22310"/>
+                </a:solidFill>
+                <a:latin typeface="Arial"/>
+              </a:rPr>
+              <a:t>Cost today:  6.2% deliveries miss lunch  ·  $35k/yr shrinkage [dummy]</a:t>
+            </a:r>
+          </a:p>
+        </p:txBody>
+      </p:sp>
+      <p:sp>
+        <p:nvSpPr>
+          <p:cNvPr id="20" name="Rectangle 19"/>
+          <p:cNvSpPr/>
+          <p:nvPr/>
+        </p:nvSpPr>
+        <p:spPr>
+          <a:xfrm>
+            <a:off x="365760" y="3026663"/>
             <a:ext cx="54864" cy="182880"/>
           </a:xfrm>
           <a:prstGeom prst="rect">
@@ -18362,13 +19142,13 @@
       </p:sp>
       <p:sp>
         <p:nvSpPr>
-          <p:cNvPr id="11" name="TextBox 10"/>
+          <p:cNvPr id="21" name="TextBox 20"/>
           <p:cNvSpPr txBox="1"/>
           <p:nvPr/>
         </p:nvSpPr>
         <p:spPr>
           <a:xfrm>
-            <a:off x="512064" y="1325880"/>
+            <a:off x="512064" y="2999232"/>
             <a:ext cx="8266175" cy="256032"/>
           </a:xfrm>
           <a:prstGeom prst="rect">
@@ -18407,13 +19187,13 @@
       </p:sp>
       <p:sp>
         <p:nvSpPr>
-          <p:cNvPr id="12" name="Rectangle 11"/>
+          <p:cNvPr id="22" name="Rectangle 21"/>
           <p:cNvSpPr/>
           <p:nvPr/>
         </p:nvSpPr>
         <p:spPr>
           <a:xfrm>
-            <a:off x="365760" y="1600200"/>
+            <a:off x="365760" y="3273551"/>
             <a:ext cx="8412480" cy="10972"/>
           </a:xfrm>
           <a:prstGeom prst="rect">
@@ -18451,14 +19231,14 @@
       </p:sp>
       <p:sp>
         <p:nvSpPr>
-          <p:cNvPr id="13" name="Rectangle 12"/>
+          <p:cNvPr id="23" name="Rectangle 22"/>
           <p:cNvSpPr/>
           <p:nvPr/>
         </p:nvSpPr>
         <p:spPr>
           <a:xfrm>
-            <a:off x="502920" y="1746504"/>
-            <a:ext cx="4882895" cy="420624"/>
+            <a:off x="502920" y="3383279"/>
+            <a:ext cx="4882895" cy="402336"/>
           </a:xfrm>
           <a:prstGeom prst="rect">
             <a:avLst/>
@@ -18495,14 +19275,14 @@
       </p:sp>
       <p:sp>
         <p:nvSpPr>
-          <p:cNvPr id="14" name="Rectangle 13"/>
+          <p:cNvPr id="24" name="Rectangle 23"/>
           <p:cNvSpPr/>
           <p:nvPr/>
         </p:nvSpPr>
         <p:spPr>
           <a:xfrm>
-            <a:off x="5385815" y="1746504"/>
-            <a:ext cx="3255263" cy="420624"/>
+            <a:off x="5385815" y="3383279"/>
+            <a:ext cx="3255263" cy="402336"/>
           </a:xfrm>
           <a:prstGeom prst="rect">
             <a:avLst/>
@@ -18539,14 +19319,14 @@
       </p:sp>
       <p:sp>
         <p:nvSpPr>
-          <p:cNvPr id="15" name="TextBox 14"/>
+          <p:cNvPr id="25" name="TextBox 24"/>
           <p:cNvSpPr txBox="1"/>
           <p:nvPr/>
         </p:nvSpPr>
         <p:spPr>
           <a:xfrm>
-            <a:off x="502920" y="1746504"/>
-            <a:ext cx="4882895" cy="420624"/>
+            <a:off x="502920" y="3383279"/>
+            <a:ext cx="4882895" cy="402336"/>
           </a:xfrm>
           <a:prstGeom prst="rect">
             <a:avLst/>
@@ -18584,14 +19364,14 @@
       </p:sp>
       <p:sp>
         <p:nvSpPr>
-          <p:cNvPr id="16" name="TextBox 15"/>
+          <p:cNvPr id="26" name="TextBox 25"/>
           <p:cNvSpPr txBox="1"/>
           <p:nvPr/>
         </p:nvSpPr>
         <p:spPr>
           <a:xfrm>
-            <a:off x="5385815" y="1746504"/>
-            <a:ext cx="3255263" cy="420624"/>
+            <a:off x="5385815" y="3383279"/>
+            <a:ext cx="3255263" cy="402336"/>
           </a:xfrm>
           <a:prstGeom prst="rect">
             <a:avLst/>
@@ -18629,14 +19409,14 @@
       </p:sp>
       <p:sp>
         <p:nvSpPr>
-          <p:cNvPr id="17" name="TextBox 16"/>
+          <p:cNvPr id="27" name="TextBox 26"/>
           <p:cNvSpPr txBox="1"/>
           <p:nvPr/>
         </p:nvSpPr>
         <p:spPr>
           <a:xfrm>
-            <a:off x="502920" y="2203704"/>
-            <a:ext cx="4882895" cy="219456"/>
+            <a:off x="502920" y="3813048"/>
+            <a:ext cx="4882895" cy="201168"/>
           </a:xfrm>
           <a:prstGeom prst="rect">
             <a:avLst/>
@@ -18674,14 +19454,14 @@
       </p:sp>
       <p:sp>
         <p:nvSpPr>
-          <p:cNvPr id="18" name="TextBox 17"/>
+          <p:cNvPr id="28" name="TextBox 27"/>
           <p:cNvSpPr txBox="1"/>
           <p:nvPr/>
         </p:nvSpPr>
         <p:spPr>
           <a:xfrm>
-            <a:off x="5385815" y="2203704"/>
-            <a:ext cx="3255263" cy="219456"/>
+            <a:off x="5385815" y="3813048"/>
+            <a:ext cx="3255263" cy="201168"/>
           </a:xfrm>
           <a:prstGeom prst="rect">
             <a:avLst/>
@@ -18717,343 +19497,18 @@
           </a:p>
         </p:txBody>
       </p:sp>
-      <p:sp>
-        <p:nvSpPr>
-          <p:cNvPr id="19" name="Rectangle 18"/>
-          <p:cNvSpPr/>
-          <p:nvPr/>
-        </p:nvSpPr>
-        <p:spPr>
-          <a:xfrm>
-            <a:off x="365760" y="2569463"/>
-            <a:ext cx="54864" cy="182880"/>
-          </a:xfrm>
-          <a:prstGeom prst="rect">
-            <a:avLst/>
-          </a:prstGeom>
-          <a:solidFill>
-            <a:srgbClr val="C22310"/>
-          </a:solidFill>
-          <a:ln>
-            <a:noFill/>
-          </a:ln>
-          <a:effectLst/>
-        </p:spPr>
-        <p:style>
-          <a:lnRef idx="1">
-            <a:schemeClr val="accent1"/>
-          </a:lnRef>
-          <a:fillRef idx="3">
-            <a:schemeClr val="accent1"/>
-          </a:fillRef>
-          <a:effectRef idx="2">
-            <a:schemeClr val="accent1"/>
-          </a:effectRef>
-          <a:fontRef idx="minor">
-            <a:schemeClr val="lt1"/>
-          </a:fontRef>
-        </p:style>
-        <p:txBody>
-          <a:bodyPr rtlCol="0" anchor="ctr"/>
-          <a:lstStyle/>
-          <a:p>
-            <a:pPr algn="ctr"/>
-          </a:p>
-        </p:txBody>
-      </p:sp>
-      <p:sp>
-        <p:nvSpPr>
-          <p:cNvPr id="20" name="TextBox 19"/>
-          <p:cNvSpPr txBox="1"/>
-          <p:nvPr/>
-        </p:nvSpPr>
-        <p:spPr>
-          <a:xfrm>
-            <a:off x="512064" y="2542032"/>
-            <a:ext cx="3922776" cy="256032"/>
-          </a:xfrm>
-          <a:prstGeom prst="rect">
-            <a:avLst/>
-          </a:prstGeom>
-          <a:noFill/>
-        </p:spPr>
-        <p:txBody>
-          <a:bodyPr wrap="square" lIns="0" rIns="0" tIns="0" bIns="0" anchor="t">
-            <a:spAutoFit/>
-          </a:bodyPr>
-          <a:lstStyle/>
-          <a:p>
-            <a:pPr algn="l">
-              <a:lnSpc>
-                <a:spcPct val="100000"/>
-              </a:lnSpc>
-              <a:spcBef>
-                <a:spcPts val="0"/>
-              </a:spcBef>
-              <a:spcAft>
-                <a:spcPts val="0"/>
-              </a:spcAft>
-            </a:pPr>
-            <a:r>
-              <a:rPr sz="1050" b="1" i="0">
-                <a:solidFill>
-                  <a:srgbClr val="1B3E6E"/>
-                </a:solidFill>
-                <a:latin typeface="Arial"/>
-              </a:rPr>
-              <a:t>GAP 1 — Procurement: demand is guesswork</a:t>
-            </a:r>
-          </a:p>
-        </p:txBody>
-      </p:sp>
-      <p:sp>
-        <p:nvSpPr>
-          <p:cNvPr id="21" name="Rectangle 20"/>
-          <p:cNvSpPr/>
-          <p:nvPr/>
-        </p:nvSpPr>
-        <p:spPr>
-          <a:xfrm>
-            <a:off x="365760" y="2816351"/>
-            <a:ext cx="4069080" cy="10972"/>
-          </a:xfrm>
-          <a:prstGeom prst="rect">
-            <a:avLst/>
-          </a:prstGeom>
-          <a:solidFill>
-            <a:srgbClr val="BFBFBF"/>
-          </a:solidFill>
-          <a:ln>
-            <a:noFill/>
-          </a:ln>
-          <a:effectLst/>
-        </p:spPr>
-        <p:style>
-          <a:lnRef idx="1">
-            <a:schemeClr val="accent1"/>
-          </a:lnRef>
-          <a:fillRef idx="3">
-            <a:schemeClr val="accent1"/>
-          </a:fillRef>
-          <a:effectRef idx="2">
-            <a:schemeClr val="accent1"/>
-          </a:effectRef>
-          <a:fontRef idx="minor">
-            <a:schemeClr val="lt1"/>
-          </a:fontRef>
-        </p:style>
-        <p:txBody>
-          <a:bodyPr rtlCol="0" anchor="ctr"/>
-          <a:lstStyle/>
-          <a:p>
-            <a:pPr algn="ctr"/>
-          </a:p>
-        </p:txBody>
-      </p:sp>
-      <p:sp>
-        <p:nvSpPr>
-          <p:cNvPr id="22" name="TextBox 21"/>
-          <p:cNvSpPr txBox="1"/>
-          <p:nvPr/>
-        </p:nvSpPr>
-        <p:spPr>
-          <a:xfrm>
-            <a:off x="365760" y="2907791"/>
-            <a:ext cx="4069080" cy="1005840"/>
-          </a:xfrm>
-          <a:prstGeom prst="rect">
-            <a:avLst/>
-          </a:prstGeom>
-          <a:noFill/>
-        </p:spPr>
-        <p:txBody>
-          <a:bodyPr wrap="square" lIns="0" rIns="0" tIns="0" bIns="0" anchor="t">
-            <a:spAutoFit/>
-          </a:bodyPr>
-          <a:lstStyle/>
-          <a:p>
-            <a:pPr algn="l">
-              <a:lnSpc>
-                <a:spcPct val="105000"/>
-              </a:lnSpc>
-              <a:spcBef>
-                <a:spcPts val="0"/>
-              </a:spcBef>
-              <a:spcAft>
-                <a:spcPts val="300"/>
-              </a:spcAft>
-            </a:pPr>
-            <a:r>
-              <a:rPr sz="819" b="1" i="0">
-                <a:solidFill>
-                  <a:srgbClr val="333333"/>
-                </a:solidFill>
-                <a:latin typeface="Arial"/>
-              </a:rPr>
-              <a:t>•  Manual, gut-feel indenting</a:t>
-            </a:r>
-            <a:r>
-              <a:rPr sz="819" b="0" i="0">
-                <a:solidFill>
-                  <a:srgbClr val="333333"/>
-                </a:solidFill>
-                <a:latin typeface="Arial"/>
-              </a:rPr>
-              <a:t> 3 days ahead — blind to attendance swings, exams &amp; holidays</a:t>
-            </a:r>
-          </a:p>
-          <a:p>
-            <a:pPr algn="l">
-              <a:lnSpc>
-                <a:spcPct val="105000"/>
-              </a:lnSpc>
-              <a:spcBef>
-                <a:spcPts val="0"/>
-              </a:spcBef>
-              <a:spcAft>
-                <a:spcPts val="300"/>
-              </a:spcAft>
-            </a:pPr>
-            <a:r>
-              <a:rPr sz="819" b="1" i="0">
-                <a:solidFill>
-                  <a:srgbClr val="333333"/>
-                </a:solidFill>
-                <a:latin typeface="Arial"/>
-              </a:rPr>
-              <a:t>•  Reactive spot-buying</a:t>
-            </a:r>
-            <a:r>
-              <a:rPr sz="819" b="0" i="0">
-                <a:solidFill>
-                  <a:srgbClr val="333333"/>
-                </a:solidFill>
-                <a:latin typeface="Arial"/>
-              </a:rPr>
-              <a:t> at mandi peak prices when stocks run short</a:t>
-            </a:r>
-          </a:p>
-          <a:p>
-            <a:pPr algn="l">
-              <a:lnSpc>
-                <a:spcPct val="105000"/>
-              </a:lnSpc>
-              <a:spcBef>
-                <a:spcPts val="0"/>
-              </a:spcBef>
-              <a:spcAft>
-                <a:spcPts val="300"/>
-              </a:spcAft>
-            </a:pPr>
-            <a:r>
-              <a:rPr sz="819" b="1" i="0">
-                <a:solidFill>
-                  <a:srgbClr val="333333"/>
-                </a:solidFill>
-                <a:latin typeface="Arial"/>
-              </a:rPr>
-              <a:t>•  No price intelligence</a:t>
-            </a:r>
-            <a:r>
-              <a:rPr sz="819" b="0" i="0">
-                <a:solidFill>
-                  <a:srgbClr val="333333"/>
-                </a:solidFill>
-                <a:latin typeface="Arial"/>
-              </a:rPr>
-              <a:t> — cheapest forward-buying windows are missed</a:t>
-            </a:r>
-          </a:p>
-          <a:p>
-            <a:pPr algn="l">
-              <a:lnSpc>
-                <a:spcPct val="105000"/>
-              </a:lnSpc>
-              <a:spcBef>
-                <a:spcPts val="0"/>
-              </a:spcBef>
-              <a:spcAft>
-                <a:spcPts val="0"/>
-              </a:spcAft>
-            </a:pPr>
-            <a:r>
-              <a:rPr sz="819" b="1" i="0">
-                <a:solidFill>
-                  <a:srgbClr val="333333"/>
-                </a:solidFill>
-                <a:latin typeface="Arial"/>
-              </a:rPr>
-              <a:t>•  No feedback loop</a:t>
-            </a:r>
-            <a:r>
-              <a:rPr sz="819" b="0" i="0">
-                <a:solidFill>
-                  <a:srgbClr val="333333"/>
-                </a:solidFill>
-                <a:latin typeface="Arial"/>
-              </a:rPr>
-              <a:t> from schools on actual meal uptake</a:t>
-            </a:r>
-          </a:p>
-        </p:txBody>
-      </p:sp>
-      <p:sp>
-        <p:nvSpPr>
-          <p:cNvPr id="23" name="TextBox 22"/>
-          <p:cNvSpPr txBox="1"/>
-          <p:nvPr/>
-        </p:nvSpPr>
-        <p:spPr>
-          <a:xfrm>
-            <a:off x="365760" y="3931920"/>
-            <a:ext cx="4069080" cy="219456"/>
-          </a:xfrm>
-          <a:prstGeom prst="rect">
-            <a:avLst/>
-          </a:prstGeom>
-          <a:noFill/>
-        </p:spPr>
-        <p:txBody>
-          <a:bodyPr wrap="square" lIns="0" rIns="0" tIns="0" bIns="0" anchor="t">
-            <a:spAutoFit/>
-          </a:bodyPr>
-          <a:lstStyle/>
-          <a:p>
-            <a:pPr algn="l">
-              <a:lnSpc>
-                <a:spcPct val="100000"/>
-              </a:lnSpc>
-              <a:spcBef>
-                <a:spcPts val="0"/>
-              </a:spcBef>
-              <a:spcAft>
-                <a:spcPts val="0"/>
-              </a:spcAft>
-            </a:pPr>
-            <a:r>
-              <a:rPr sz="819" b="1" i="0">
-                <a:solidFill>
-                  <a:srgbClr val="C22310"/>
-                </a:solidFill>
-                <a:latin typeface="Arial"/>
-              </a:rPr>
-              <a:t>Cost today:  8–10% meals over-produced  ·  +12% paid on spot buys [dummy]</a:t>
-            </a:r>
-          </a:p>
-        </p:txBody>
-      </p:sp>
       <p:cxnSp>
         <p:nvCxnSpPr>
-          <p:cNvPr id="24" name="Connector 23"/>
+          <p:cNvPr id="29" name="Connector 28"/>
           <p:cNvCxnSpPr/>
           <p:nvPr/>
         </p:nvCxnSpPr>
         <p:spPr>
-          <a:xfrm>
-            <a:off x="2400300" y="4187952"/>
-            <a:ext cx="0" cy="182879"/>
-          </a:xfrm>
-          <a:prstGeom prst="line">
+          <a:xfrm flipH="1">
+            <a:off x="2400300" y="4023359"/>
+            <a:ext cx="544068" cy="164593"/>
+          </a:xfrm>
+          <a:prstGeom prst="curvedConnector3">
             <a:avLst/>
           </a:prstGeom>
           <a:ln w="15875">
@@ -19080,16 +19535,54 @@
           </a:fontRef>
         </p:style>
       </p:cxnSp>
-      <p:sp>
-        <p:nvSpPr>
-          <p:cNvPr id="25" name="Rounded Rectangle 24"/>
+      <p:cxnSp>
+        <p:nvCxnSpPr>
+          <p:cNvPr id="30" name="Connector 29"/>
+          <p:cNvCxnSpPr/>
+          <p:nvPr/>
+        </p:nvCxnSpPr>
+        <p:spPr>
+          <a:xfrm flipH="1">
+            <a:off x="6743700" y="4023359"/>
+            <a:ext cx="269747" cy="164593"/>
+          </a:xfrm>
+          <a:prstGeom prst="curvedConnector3">
+            <a:avLst/>
+          </a:prstGeom>
+          <a:ln w="15875">
+            <a:solidFill>
+              <a:srgbClr val="398025"/>
+            </a:solidFill>
+            <a:prstDash val="sysDash"/>
+            <a:tailEnd type="triangle" w="med" len="med"/>
+          </a:ln>
+          <a:effectLst/>
+        </p:spPr>
+        <p:style>
+          <a:lnRef idx="2">
+            <a:schemeClr val="accent1"/>
+          </a:lnRef>
+          <a:fillRef idx="0">
+            <a:schemeClr val="accent1"/>
+          </a:fillRef>
+          <a:effectRef idx="1">
+            <a:schemeClr val="accent1"/>
+          </a:effectRef>
+          <a:fontRef idx="minor">
+            <a:schemeClr val="tx1"/>
+          </a:fontRef>
+        </p:style>
+      </p:cxnSp>
+      <p:sp>
+        <p:nvSpPr>
+          <p:cNvPr id="31" name="Rounded Rectangle 30"/>
           <p:cNvSpPr/>
           <p:nvPr/>
         </p:nvSpPr>
         <p:spPr>
           <a:xfrm>
-            <a:off x="365760" y="4425696"/>
-            <a:ext cx="4069080" cy="1389888"/>
+            <a:off x="365760" y="4224528"/>
+            <a:ext cx="4069080" cy="1664208"/>
           </a:xfrm>
           <a:prstGeom prst="roundRect">
             <a:avLst>
@@ -19130,14 +19623,14 @@
       </p:sp>
       <p:sp>
         <p:nvSpPr>
-          <p:cNvPr id="26" name="TextBox 25"/>
+          <p:cNvPr id="32" name="TextBox 31"/>
           <p:cNvSpPr txBox="1"/>
           <p:nvPr/>
         </p:nvSpPr>
         <p:spPr>
           <a:xfrm>
-            <a:off x="493776" y="4507992"/>
-            <a:ext cx="3813048" cy="1389888"/>
+            <a:off x="493776" y="4306824"/>
+            <a:ext cx="3813048" cy="1517904"/>
           </a:xfrm>
           <a:prstGeom prst="rect">
             <a:avLst/>
@@ -19290,377 +19783,14 @@
       </p:sp>
       <p:sp>
         <p:nvSpPr>
-          <p:cNvPr id="27" name="Rectangle 26"/>
-          <p:cNvSpPr/>
-          <p:nvPr/>
-        </p:nvSpPr>
-        <p:spPr>
-          <a:xfrm>
-            <a:off x="4709160" y="2569463"/>
-            <a:ext cx="54864" cy="182880"/>
-          </a:xfrm>
-          <a:prstGeom prst="rect">
-            <a:avLst/>
-          </a:prstGeom>
-          <a:solidFill>
-            <a:srgbClr val="C22310"/>
-          </a:solidFill>
-          <a:ln>
-            <a:noFill/>
-          </a:ln>
-          <a:effectLst/>
-        </p:spPr>
-        <p:style>
-          <a:lnRef idx="1">
-            <a:schemeClr val="accent1"/>
-          </a:lnRef>
-          <a:fillRef idx="3">
-            <a:schemeClr val="accent1"/>
-          </a:fillRef>
-          <a:effectRef idx="2">
-            <a:schemeClr val="accent1"/>
-          </a:effectRef>
-          <a:fontRef idx="minor">
-            <a:schemeClr val="lt1"/>
-          </a:fontRef>
-        </p:style>
-        <p:txBody>
-          <a:bodyPr rtlCol="0" anchor="ctr"/>
-          <a:lstStyle/>
-          <a:p>
-            <a:pPr algn="ctr"/>
-          </a:p>
-        </p:txBody>
-      </p:sp>
-      <p:sp>
-        <p:nvSpPr>
-          <p:cNvPr id="28" name="TextBox 27"/>
-          <p:cNvSpPr txBox="1"/>
-          <p:nvPr/>
-        </p:nvSpPr>
-        <p:spPr>
-          <a:xfrm>
-            <a:off x="4855464" y="2542032"/>
-            <a:ext cx="3922776" cy="256032"/>
-          </a:xfrm>
-          <a:prstGeom prst="rect">
-            <a:avLst/>
-          </a:prstGeom>
-          <a:noFill/>
-        </p:spPr>
-        <p:txBody>
-          <a:bodyPr wrap="square" lIns="0" rIns="0" tIns="0" bIns="0" anchor="t">
-            <a:spAutoFit/>
-          </a:bodyPr>
-          <a:lstStyle/>
-          <a:p>
-            <a:pPr algn="l">
-              <a:lnSpc>
-                <a:spcPct val="100000"/>
-              </a:lnSpc>
-              <a:spcBef>
-                <a:spcPts val="0"/>
-              </a:spcBef>
-              <a:spcAft>
-                <a:spcPts val="0"/>
-              </a:spcAft>
-            </a:pPr>
-            <a:r>
-              <a:rPr sz="1050" b="1" i="0">
-                <a:solidFill>
-                  <a:srgbClr val="1B3E6E"/>
-                </a:solidFill>
-                <a:latin typeface="Arial"/>
-              </a:rPr>
-              <a:t>GAP 2 — Distribution: the last mile is blind</a:t>
-            </a:r>
-          </a:p>
-        </p:txBody>
-      </p:sp>
-      <p:sp>
-        <p:nvSpPr>
-          <p:cNvPr id="29" name="Rectangle 28"/>
-          <p:cNvSpPr/>
-          <p:nvPr/>
-        </p:nvSpPr>
-        <p:spPr>
-          <a:xfrm>
-            <a:off x="4709160" y="2816351"/>
-            <a:ext cx="4069080" cy="10972"/>
-          </a:xfrm>
-          <a:prstGeom prst="rect">
-            <a:avLst/>
-          </a:prstGeom>
-          <a:solidFill>
-            <a:srgbClr val="BFBFBF"/>
-          </a:solidFill>
-          <a:ln>
-            <a:noFill/>
-          </a:ln>
-          <a:effectLst/>
-        </p:spPr>
-        <p:style>
-          <a:lnRef idx="1">
-            <a:schemeClr val="accent1"/>
-          </a:lnRef>
-          <a:fillRef idx="3">
-            <a:schemeClr val="accent1"/>
-          </a:fillRef>
-          <a:effectRef idx="2">
-            <a:schemeClr val="accent1"/>
-          </a:effectRef>
-          <a:fontRef idx="minor">
-            <a:schemeClr val="lt1"/>
-          </a:fontRef>
-        </p:style>
-        <p:txBody>
-          <a:bodyPr rtlCol="0" anchor="ctr"/>
-          <a:lstStyle/>
-          <a:p>
-            <a:pPr algn="ctr"/>
-          </a:p>
-        </p:txBody>
-      </p:sp>
-      <p:sp>
-        <p:nvSpPr>
-          <p:cNvPr id="30" name="TextBox 29"/>
-          <p:cNvSpPr txBox="1"/>
-          <p:nvPr/>
-        </p:nvSpPr>
-        <p:spPr>
-          <a:xfrm>
-            <a:off x="4709160" y="2907791"/>
-            <a:ext cx="4069080" cy="1005840"/>
-          </a:xfrm>
-          <a:prstGeom prst="rect">
-            <a:avLst/>
-          </a:prstGeom>
-          <a:noFill/>
-        </p:spPr>
-        <p:txBody>
-          <a:bodyPr wrap="square" lIns="0" rIns="0" tIns="0" bIns="0" anchor="t">
-            <a:spAutoFit/>
-          </a:bodyPr>
-          <a:lstStyle/>
-          <a:p>
-            <a:pPr algn="l">
-              <a:lnSpc>
-                <a:spcPct val="105000"/>
-              </a:lnSpc>
-              <a:spcBef>
-                <a:spcPts val="0"/>
-              </a:spcBef>
-              <a:spcAft>
-                <a:spcPts val="300"/>
-              </a:spcAft>
-            </a:pPr>
-            <a:r>
-              <a:rPr sz="819" b="1" i="0">
-                <a:solidFill>
-                  <a:srgbClr val="333333"/>
-                </a:solidFill>
-                <a:latin typeface="Arial"/>
-              </a:rPr>
-              <a:t>•  Static, driver-memory routes</a:t>
-            </a:r>
-            <a:r>
-              <a:rPr sz="819" b="0" i="0">
-                <a:solidFill>
-                  <a:srgbClr val="333333"/>
-                </a:solidFill>
-                <a:latin typeface="Arial"/>
-              </a:rPr>
-              <a:t> — 15–30 min past the lunch bell means children stay hungry all day</a:t>
-            </a:r>
-          </a:p>
-          <a:p>
-            <a:pPr algn="l">
-              <a:lnSpc>
-                <a:spcPct val="105000"/>
-              </a:lnSpc>
-              <a:spcBef>
-                <a:spcPts val="0"/>
-              </a:spcBef>
-              <a:spcAft>
-                <a:spcPts val="300"/>
-              </a:spcAft>
-            </a:pPr>
-            <a:r>
-              <a:rPr sz="819" b="1" i="0">
-                <a:solidFill>
-                  <a:srgbClr val="333333"/>
-                </a:solidFill>
-                <a:latin typeface="Arial"/>
-              </a:rPr>
-              <a:t>•  Untracked vessels &amp; utensils</a:t>
-            </a:r>
-            <a:r>
-              <a:rPr sz="819" b="0" i="0">
-                <a:solidFill>
-                  <a:srgbClr val="333333"/>
-                </a:solidFill>
-                <a:latin typeface="Arial"/>
-              </a:rPr>
-              <a:t> — daily losses add to operating cost</a:t>
-            </a:r>
-          </a:p>
-          <a:p>
-            <a:pPr algn="l">
-              <a:lnSpc>
-                <a:spcPct val="105000"/>
-              </a:lnSpc>
-              <a:spcBef>
-                <a:spcPts val="0"/>
-              </a:spcBef>
-              <a:spcAft>
-                <a:spcPts val="300"/>
-              </a:spcAft>
-            </a:pPr>
-            <a:r>
-              <a:rPr sz="819" b="1" i="0">
-                <a:solidFill>
-                  <a:srgbClr val="333333"/>
-                </a:solidFill>
-                <a:latin typeface="Arial"/>
-              </a:rPr>
-              <a:t>•  Adulteration / diversion risk</a:t>
-            </a:r>
-            <a:r>
-              <a:rPr sz="819" b="0" i="0">
-                <a:solidFill>
-                  <a:srgbClr val="333333"/>
-                </a:solidFill>
-                <a:latin typeface="Arial"/>
-              </a:rPr>
-              <a:t> — unsealed vans can be offloaded at roadside dhabas</a:t>
-            </a:r>
-          </a:p>
-          <a:p>
-            <a:pPr algn="l">
-              <a:lnSpc>
-                <a:spcPct val="105000"/>
-              </a:lnSpc>
-              <a:spcBef>
-                <a:spcPts val="0"/>
-              </a:spcBef>
-              <a:spcAft>
-                <a:spcPts val="0"/>
-              </a:spcAft>
-            </a:pPr>
-            <a:r>
-              <a:rPr sz="819" b="1" i="0">
-                <a:solidFill>
-                  <a:srgbClr val="333333"/>
-                </a:solidFill>
-                <a:latin typeface="Arial"/>
-              </a:rPr>
-              <a:t>•  No proof-of-delivery</a:t>
-            </a:r>
-            <a:r>
-              <a:rPr sz="819" b="0" i="0">
-                <a:solidFill>
-                  <a:srgbClr val="333333"/>
-                </a:solidFill>
-                <a:latin typeface="Arial"/>
-              </a:rPr>
-              <a:t> — school shortfall disputes go unresolved</a:t>
-            </a:r>
-          </a:p>
-        </p:txBody>
-      </p:sp>
-      <p:sp>
-        <p:nvSpPr>
-          <p:cNvPr id="31" name="TextBox 30"/>
-          <p:cNvSpPr txBox="1"/>
-          <p:nvPr/>
-        </p:nvSpPr>
-        <p:spPr>
-          <a:xfrm>
-            <a:off x="4709160" y="3931920"/>
-            <a:ext cx="4069080" cy="219456"/>
-          </a:xfrm>
-          <a:prstGeom prst="rect">
-            <a:avLst/>
-          </a:prstGeom>
-          <a:noFill/>
-        </p:spPr>
-        <p:txBody>
-          <a:bodyPr wrap="square" lIns="0" rIns="0" tIns="0" bIns="0" anchor="t">
-            <a:spAutoFit/>
-          </a:bodyPr>
-          <a:lstStyle/>
-          <a:p>
-            <a:pPr algn="l">
-              <a:lnSpc>
-                <a:spcPct val="100000"/>
-              </a:lnSpc>
-              <a:spcBef>
-                <a:spcPts val="0"/>
-              </a:spcBef>
-              <a:spcAft>
-                <a:spcPts val="0"/>
-              </a:spcAft>
-            </a:pPr>
-            <a:r>
-              <a:rPr sz="819" b="1" i="0">
-                <a:solidFill>
-                  <a:srgbClr val="C22310"/>
-                </a:solidFill>
-                <a:latin typeface="Arial"/>
-              </a:rPr>
-              <a:t>Cost today:  6.2% deliveries miss lunch  ·  $35k/yr shrinkage [dummy]</a:t>
-            </a:r>
-          </a:p>
-        </p:txBody>
-      </p:sp>
-      <p:cxnSp>
-        <p:nvCxnSpPr>
-          <p:cNvPr id="32" name="Connector 31"/>
-          <p:cNvCxnSpPr/>
-          <p:nvPr/>
-        </p:nvCxnSpPr>
-        <p:spPr>
-          <a:xfrm>
-            <a:off x="6743700" y="4187952"/>
-            <a:ext cx="0" cy="182879"/>
-          </a:xfrm>
-          <a:prstGeom prst="line">
-            <a:avLst/>
-          </a:prstGeom>
-          <a:ln w="15875">
-            <a:solidFill>
-              <a:srgbClr val="398025"/>
-            </a:solidFill>
-            <a:prstDash val="sysDash"/>
-            <a:tailEnd type="triangle" w="med" len="med"/>
-          </a:ln>
-          <a:effectLst/>
-        </p:spPr>
-        <p:style>
-          <a:lnRef idx="2">
-            <a:schemeClr val="accent1"/>
-          </a:lnRef>
-          <a:fillRef idx="0">
-            <a:schemeClr val="accent1"/>
-          </a:fillRef>
-          <a:effectRef idx="1">
-            <a:schemeClr val="accent1"/>
-          </a:effectRef>
-          <a:fontRef idx="minor">
-            <a:schemeClr val="tx1"/>
-          </a:fontRef>
-        </p:style>
-      </p:cxnSp>
-      <p:sp>
-        <p:nvSpPr>
           <p:cNvPr id="33" name="Rounded Rectangle 32"/>
           <p:cNvSpPr/>
           <p:nvPr/>
         </p:nvSpPr>
         <p:spPr>
           <a:xfrm>
-            <a:off x="4709160" y="4425696"/>
-            <a:ext cx="4069080" cy="1389888"/>
+            <a:off x="4709160" y="4224528"/>
+            <a:ext cx="4069080" cy="1664208"/>
           </a:xfrm>
           <a:prstGeom prst="roundRect">
             <a:avLst>
@@ -19707,8 +19837,8 @@
         </p:nvSpPr>
         <p:spPr>
           <a:xfrm>
-            <a:off x="4837176" y="4507992"/>
-            <a:ext cx="3813048" cy="1389888"/>
+            <a:off x="4837176" y="4306824"/>
+            <a:ext cx="3813048" cy="1517904"/>
           </a:xfrm>
           <a:prstGeom prst="rect">
             <a:avLst/>
@@ -19855,6 +19985,1539 @@
                 <a:latin typeface="Arial"/>
               </a:rPr>
               <a:t>→  99%+ on-time  ·  −18% fleet km  ·  est. $80k saved / yr [dummy]</a:t>
+            </a:r>
+          </a:p>
+        </p:txBody>
+      </p:sp>
+    </p:spTree>
+  </p:cSld>
+  <p:clrMapOvr>
+    <a:masterClrMapping/>
+  </p:clrMapOvr>
+</p:sld>
+</file>
+
+<file path=ppt/slides/slide8.xml><?xml version="1.0" encoding="utf-8"?>
+<p:sld xmlns:a="http://schemas.openxmlformats.org/drawingml/2006/main" xmlns:p="http://schemas.openxmlformats.org/presentationml/2006/main" xmlns:r="http://schemas.openxmlformats.org/officeDocument/2006/relationships">
+  <p:cSld>
+    <p:spTree>
+      <p:nvGrpSpPr>
+        <p:cNvPr id="1" name=""/>
+        <p:cNvGrpSpPr/>
+        <p:nvPr/>
+      </p:nvGrpSpPr>
+      <p:grpSpPr/>
+      <p:sp>
+        <p:nvSpPr>
+          <p:cNvPr id="2" name="Rectangle 1"/>
+          <p:cNvSpPr/>
+          <p:nvPr/>
+        </p:nvSpPr>
+        <p:spPr>
+          <a:xfrm>
+            <a:off x="365760" y="274320"/>
+            <a:ext cx="8412480" cy="23774"/>
+          </a:xfrm>
+          <a:prstGeom prst="rect">
+            <a:avLst/>
+          </a:prstGeom>
+          <a:solidFill>
+            <a:srgbClr val="1B3E6E"/>
+          </a:solidFill>
+          <a:ln>
+            <a:noFill/>
+          </a:ln>
+          <a:effectLst/>
+        </p:spPr>
+        <p:style>
+          <a:lnRef idx="1">
+            <a:schemeClr val="accent1"/>
+          </a:lnRef>
+          <a:fillRef idx="3">
+            <a:schemeClr val="accent1"/>
+          </a:fillRef>
+          <a:effectRef idx="2">
+            <a:schemeClr val="accent1"/>
+          </a:effectRef>
+          <a:fontRef idx="minor">
+            <a:schemeClr val="lt1"/>
+          </a:fontRef>
+        </p:style>
+        <p:txBody>
+          <a:bodyPr rtlCol="0" anchor="ctr"/>
+          <a:lstStyle/>
+          <a:p>
+            <a:pPr algn="ctr"/>
+          </a:p>
+        </p:txBody>
+      </p:sp>
+      <p:sp>
+        <p:nvSpPr>
+          <p:cNvPr id="3" name="TextBox 2"/>
+          <p:cNvSpPr txBox="1"/>
+          <p:nvPr/>
+        </p:nvSpPr>
+        <p:spPr>
+          <a:xfrm>
+            <a:off x="365760" y="365760"/>
+            <a:ext cx="8412480" cy="457200"/>
+          </a:xfrm>
+          <a:prstGeom prst="rect">
+            <a:avLst/>
+          </a:prstGeom>
+          <a:noFill/>
+        </p:spPr>
+        <p:txBody>
+          <a:bodyPr wrap="square" lIns="0" rIns="0" tIns="0" bIns="0" anchor="t">
+            <a:spAutoFit/>
+          </a:bodyPr>
+          <a:lstStyle/>
+          <a:p>
+            <a:pPr algn="l">
+              <a:lnSpc>
+                <a:spcPct val="100000"/>
+              </a:lnSpc>
+              <a:spcBef>
+                <a:spcPts val="0"/>
+              </a:spcBef>
+              <a:spcAft>
+                <a:spcPts val="0"/>
+              </a:spcAft>
+            </a:pPr>
+            <a:r>
+              <a:rPr sz="2000" b="0" i="0">
+                <a:solidFill>
+                  <a:srgbClr val="1B3E6E"/>
+                </a:solidFill>
+                <a:latin typeface="Georgia"/>
+              </a:rPr>
+              <a:t>The two gaps — and the $250,000 that closes them</a:t>
+            </a:r>
+          </a:p>
+        </p:txBody>
+      </p:sp>
+      <p:sp>
+        <p:nvSpPr>
+          <p:cNvPr id="4" name="TextBox 3"/>
+          <p:cNvSpPr txBox="1"/>
+          <p:nvPr/>
+        </p:nvSpPr>
+        <p:spPr>
+          <a:xfrm>
+            <a:off x="365760" y="822960"/>
+            <a:ext cx="8412480" cy="438912"/>
+          </a:xfrm>
+          <a:prstGeom prst="rect">
+            <a:avLst/>
+          </a:prstGeom>
+          <a:noFill/>
+        </p:spPr>
+        <p:txBody>
+          <a:bodyPr wrap="square" lIns="0" rIns="0" tIns="0" bIns="0" anchor="t">
+            <a:spAutoFit/>
+          </a:bodyPr>
+          <a:lstStyle/>
+          <a:p>
+            <a:pPr algn="l">
+              <a:lnSpc>
+                <a:spcPct val="100000"/>
+              </a:lnSpc>
+              <a:spcBef>
+                <a:spcPts val="0"/>
+              </a:spcBef>
+              <a:spcAft>
+                <a:spcPts val="0"/>
+              </a:spcAft>
+            </a:pPr>
+            <a:r>
+              <a:rPr sz="1050" b="0" i="0">
+                <a:solidFill>
+                  <a:srgbClr val="333333"/>
+                </a:solidFill>
+                <a:latin typeface="Arial"/>
+              </a:rPr>
+              <a:t>The gaps highlighted in the supply chain, the grant that closes them, and the solution we build for each — all in one view.</a:t>
+            </a:r>
+          </a:p>
+        </p:txBody>
+      </p:sp>
+      <p:sp>
+        <p:nvSpPr>
+          <p:cNvPr id="5" name="Rectangle 4"/>
+          <p:cNvSpPr/>
+          <p:nvPr/>
+        </p:nvSpPr>
+        <p:spPr>
+          <a:xfrm>
+            <a:off x="502920" y="6071616"/>
+            <a:ext cx="8138159" cy="365760"/>
+          </a:xfrm>
+          <a:prstGeom prst="rect">
+            <a:avLst/>
+          </a:prstGeom>
+          <a:solidFill>
+            <a:srgbClr val="D9D9D9"/>
+          </a:solidFill>
+          <a:ln>
+            <a:noFill/>
+          </a:ln>
+          <a:effectLst/>
+        </p:spPr>
+        <p:style>
+          <a:lnRef idx="1">
+            <a:schemeClr val="accent1"/>
+          </a:lnRef>
+          <a:fillRef idx="3">
+            <a:schemeClr val="accent1"/>
+          </a:fillRef>
+          <a:effectRef idx="2">
+            <a:schemeClr val="accent1"/>
+          </a:effectRef>
+          <a:fontRef idx="minor">
+            <a:schemeClr val="lt1"/>
+          </a:fontRef>
+        </p:style>
+        <p:txBody>
+          <a:bodyPr rtlCol="0" anchor="ctr"/>
+          <a:lstStyle/>
+          <a:p>
+            <a:pPr algn="ctr"/>
+          </a:p>
+        </p:txBody>
+      </p:sp>
+      <p:sp>
+        <p:nvSpPr>
+          <p:cNvPr id="6" name="TextBox 5"/>
+          <p:cNvSpPr txBox="1"/>
+          <p:nvPr/>
+        </p:nvSpPr>
+        <p:spPr>
+          <a:xfrm>
+            <a:off x="640080" y="6071616"/>
+            <a:ext cx="7863840" cy="365760"/>
+          </a:xfrm>
+          <a:prstGeom prst="rect">
+            <a:avLst/>
+          </a:prstGeom>
+          <a:noFill/>
+        </p:spPr>
+        <p:txBody>
+          <a:bodyPr wrap="square" lIns="0" rIns="0" tIns="0" bIns="0" anchor="ctr">
+            <a:spAutoFit/>
+          </a:bodyPr>
+          <a:lstStyle/>
+          <a:p>
+            <a:pPr algn="ctr">
+              <a:lnSpc>
+                <a:spcPct val="95000"/>
+              </a:lnSpc>
+              <a:spcBef>
+                <a:spcPts val="0"/>
+              </a:spcBef>
+              <a:spcAft>
+                <a:spcPts val="0"/>
+              </a:spcAft>
+            </a:pPr>
+            <a:r>
+              <a:rPr sz="1100" b="1" i="0">
+                <a:solidFill>
+                  <a:srgbClr val="1B3E6E"/>
+                </a:solidFill>
+                <a:latin typeface="Georgia"/>
+              </a:rPr>
+              <a:t>Two fixable gaps, two targeted builds — $250k of capital becomes $310k of savings, every year.</a:t>
+            </a:r>
+          </a:p>
+        </p:txBody>
+      </p:sp>
+      <p:sp>
+        <p:nvSpPr>
+          <p:cNvPr id="7" name="TextBox 6"/>
+          <p:cNvSpPr txBox="1"/>
+          <p:nvPr/>
+        </p:nvSpPr>
+        <p:spPr>
+          <a:xfrm>
+            <a:off x="365760" y="6492240"/>
+            <a:ext cx="1280160" cy="329184"/>
+          </a:xfrm>
+          <a:prstGeom prst="rect">
+            <a:avLst/>
+          </a:prstGeom>
+          <a:noFill/>
+        </p:spPr>
+        <p:txBody>
+          <a:bodyPr wrap="square" lIns="0" rIns="0" tIns="0" bIns="0" anchor="t">
+            <a:spAutoFit/>
+          </a:bodyPr>
+          <a:lstStyle/>
+          <a:p>
+            <a:pPr algn="l">
+              <a:lnSpc>
+                <a:spcPct val="90000"/>
+              </a:lnSpc>
+              <a:spcBef>
+                <a:spcPts val="0"/>
+              </a:spcBef>
+              <a:spcAft>
+                <a:spcPts val="0"/>
+              </a:spcAft>
+            </a:pPr>
+            <a:r>
+              <a:rPr sz="900" b="1" i="0">
+                <a:solidFill>
+                  <a:srgbClr val="111111"/>
+                </a:solidFill>
+                <a:latin typeface="Georgia"/>
+              </a:rPr>
+              <a:t>Goldman</a:t>
+            </a:r>
+          </a:p>
+          <a:p>
+            <a:pPr algn="l">
+              <a:lnSpc>
+                <a:spcPct val="90000"/>
+              </a:lnSpc>
+              <a:spcBef>
+                <a:spcPts val="0"/>
+              </a:spcBef>
+              <a:spcAft>
+                <a:spcPts val="0"/>
+              </a:spcAft>
+            </a:pPr>
+            <a:r>
+              <a:rPr sz="900" b="1" i="0">
+                <a:solidFill>
+                  <a:srgbClr val="111111"/>
+                </a:solidFill>
+                <a:latin typeface="Georgia"/>
+              </a:rPr>
+              <a:t>Sachs</a:t>
+            </a:r>
+          </a:p>
+        </p:txBody>
+      </p:sp>
+      <p:sp>
+        <p:nvSpPr>
+          <p:cNvPr id="8" name="TextBox 7"/>
+          <p:cNvSpPr txBox="1"/>
+          <p:nvPr/>
+        </p:nvSpPr>
+        <p:spPr>
+          <a:xfrm>
+            <a:off x="8321040" y="6528816"/>
+            <a:ext cx="457200" cy="274320"/>
+          </a:xfrm>
+          <a:prstGeom prst="rect">
+            <a:avLst/>
+          </a:prstGeom>
+          <a:noFill/>
+        </p:spPr>
+        <p:txBody>
+          <a:bodyPr wrap="square" lIns="0" rIns="0" tIns="0" bIns="0" anchor="t">
+            <a:spAutoFit/>
+          </a:bodyPr>
+          <a:lstStyle/>
+          <a:p>
+            <a:pPr algn="r">
+              <a:lnSpc>
+                <a:spcPct val="100000"/>
+              </a:lnSpc>
+              <a:spcBef>
+                <a:spcPts val="0"/>
+              </a:spcBef>
+              <a:spcAft>
+                <a:spcPts val="300"/>
+              </a:spcAft>
+            </a:pPr>
+            <a:r>
+              <a:rPr sz="900" b="0" i="0">
+                <a:solidFill>
+                  <a:srgbClr val="727375"/>
+                </a:solidFill>
+                <a:latin typeface="Arial"/>
+              </a:rPr>
+              <a:t>8</a:t>
+            </a:r>
+          </a:p>
+        </p:txBody>
+      </p:sp>
+      <p:sp>
+        <p:nvSpPr>
+          <p:cNvPr id="9" name="TextBox 8"/>
+          <p:cNvSpPr txBox="1"/>
+          <p:nvPr/>
+        </p:nvSpPr>
+        <p:spPr>
+          <a:xfrm>
+            <a:off x="5486400" y="54864"/>
+            <a:ext cx="3291840" cy="182880"/>
+          </a:xfrm>
+          <a:prstGeom prst="rect">
+            <a:avLst/>
+          </a:prstGeom>
+          <a:noFill/>
+        </p:spPr>
+        <p:txBody>
+          <a:bodyPr wrap="square" lIns="0" rIns="0" tIns="0" bIns="0" anchor="t">
+            <a:spAutoFit/>
+          </a:bodyPr>
+          <a:lstStyle/>
+          <a:p>
+            <a:pPr algn="r">
+              <a:lnSpc>
+                <a:spcPct val="100000"/>
+              </a:lnSpc>
+              <a:spcBef>
+                <a:spcPts val="0"/>
+              </a:spcBef>
+              <a:spcAft>
+                <a:spcPts val="0"/>
+              </a:spcAft>
+            </a:pPr>
+            <a:r>
+              <a:rPr sz="750" b="0" i="1">
+                <a:solidFill>
+                  <a:srgbClr val="727375"/>
+                </a:solidFill>
+                <a:latin typeface="Arial"/>
+              </a:rPr>
+              <a:t>PROPOSED SLIDE 3 — v3 (pie quadrant)</a:t>
+            </a:r>
+          </a:p>
+        </p:txBody>
+      </p:sp>
+      <p:sp>
+        <p:nvSpPr>
+          <p:cNvPr id="10" name="Rectangle 9"/>
+          <p:cNvSpPr/>
+          <p:nvPr/>
+        </p:nvSpPr>
+        <p:spPr>
+          <a:xfrm>
+            <a:off x="365760" y="1399032"/>
+            <a:ext cx="54864" cy="182880"/>
+          </a:xfrm>
+          <a:prstGeom prst="rect">
+            <a:avLst/>
+          </a:prstGeom>
+          <a:solidFill>
+            <a:srgbClr val="C22310"/>
+          </a:solidFill>
+          <a:ln>
+            <a:noFill/>
+          </a:ln>
+          <a:effectLst/>
+        </p:spPr>
+        <p:style>
+          <a:lnRef idx="1">
+            <a:schemeClr val="accent1"/>
+          </a:lnRef>
+          <a:fillRef idx="3">
+            <a:schemeClr val="accent1"/>
+          </a:fillRef>
+          <a:effectRef idx="2">
+            <a:schemeClr val="accent1"/>
+          </a:effectRef>
+          <a:fontRef idx="minor">
+            <a:schemeClr val="lt1"/>
+          </a:fontRef>
+        </p:style>
+        <p:txBody>
+          <a:bodyPr rtlCol="0" anchor="ctr"/>
+          <a:lstStyle/>
+          <a:p>
+            <a:pPr algn="ctr"/>
+          </a:p>
+        </p:txBody>
+      </p:sp>
+      <p:sp>
+        <p:nvSpPr>
+          <p:cNvPr id="11" name="TextBox 10"/>
+          <p:cNvSpPr txBox="1"/>
+          <p:nvPr/>
+        </p:nvSpPr>
+        <p:spPr>
+          <a:xfrm>
+            <a:off x="512064" y="1371600"/>
+            <a:ext cx="2642615" cy="256032"/>
+          </a:xfrm>
+          <a:prstGeom prst="rect">
+            <a:avLst/>
+          </a:prstGeom>
+          <a:noFill/>
+        </p:spPr>
+        <p:txBody>
+          <a:bodyPr wrap="square" lIns="0" rIns="0" tIns="0" bIns="0" anchor="t">
+            <a:spAutoFit/>
+          </a:bodyPr>
+          <a:lstStyle/>
+          <a:p>
+            <a:pPr algn="l">
+              <a:lnSpc>
+                <a:spcPct val="100000"/>
+              </a:lnSpc>
+              <a:spcBef>
+                <a:spcPts val="0"/>
+              </a:spcBef>
+              <a:spcAft>
+                <a:spcPts val="0"/>
+              </a:spcAft>
+            </a:pPr>
+            <a:r>
+              <a:rPr sz="1050" b="1" i="0">
+                <a:solidFill>
+                  <a:srgbClr val="1B3E6E"/>
+                </a:solidFill>
+                <a:latin typeface="Arial"/>
+              </a:rPr>
+              <a:t>GAP 1 — Procurement</a:t>
+            </a:r>
+          </a:p>
+        </p:txBody>
+      </p:sp>
+      <p:sp>
+        <p:nvSpPr>
+          <p:cNvPr id="12" name="Rectangle 11"/>
+          <p:cNvSpPr/>
+          <p:nvPr/>
+        </p:nvSpPr>
+        <p:spPr>
+          <a:xfrm>
+            <a:off x="365760" y="1645920"/>
+            <a:ext cx="2788920" cy="10972"/>
+          </a:xfrm>
+          <a:prstGeom prst="rect">
+            <a:avLst/>
+          </a:prstGeom>
+          <a:solidFill>
+            <a:srgbClr val="BFBFBF"/>
+          </a:solidFill>
+          <a:ln>
+            <a:noFill/>
+          </a:ln>
+          <a:effectLst/>
+        </p:spPr>
+        <p:style>
+          <a:lnRef idx="1">
+            <a:schemeClr val="accent1"/>
+          </a:lnRef>
+          <a:fillRef idx="3">
+            <a:schemeClr val="accent1"/>
+          </a:fillRef>
+          <a:effectRef idx="2">
+            <a:schemeClr val="accent1"/>
+          </a:effectRef>
+          <a:fontRef idx="minor">
+            <a:schemeClr val="lt1"/>
+          </a:fontRef>
+        </p:style>
+        <p:txBody>
+          <a:bodyPr rtlCol="0" anchor="ctr"/>
+          <a:lstStyle/>
+          <a:p>
+            <a:pPr algn="ctr"/>
+          </a:p>
+        </p:txBody>
+      </p:sp>
+      <p:sp>
+        <p:nvSpPr>
+          <p:cNvPr id="13" name="TextBox 12"/>
+          <p:cNvSpPr txBox="1"/>
+          <p:nvPr/>
+        </p:nvSpPr>
+        <p:spPr>
+          <a:xfrm>
+            <a:off x="365760" y="1737360"/>
+            <a:ext cx="2788920" cy="1188720"/>
+          </a:xfrm>
+          <a:prstGeom prst="rect">
+            <a:avLst/>
+          </a:prstGeom>
+          <a:noFill/>
+        </p:spPr>
+        <p:txBody>
+          <a:bodyPr wrap="square" lIns="0" rIns="0" tIns="0" bIns="0" anchor="t">
+            <a:spAutoFit/>
+          </a:bodyPr>
+          <a:lstStyle/>
+          <a:p>
+            <a:pPr algn="l">
+              <a:lnSpc>
+                <a:spcPct val="100000"/>
+              </a:lnSpc>
+              <a:spcBef>
+                <a:spcPts val="0"/>
+              </a:spcBef>
+              <a:spcAft>
+                <a:spcPts val="300"/>
+              </a:spcAft>
+            </a:pPr>
+            <a:r>
+              <a:rPr sz="780" b="1" i="0">
+                <a:solidFill>
+                  <a:srgbClr val="333333"/>
+                </a:solidFill>
+                <a:latin typeface="Arial"/>
+              </a:rPr>
+              <a:t>•  Manual indenting</a:t>
+            </a:r>
+            <a:r>
+              <a:rPr sz="780" b="0" i="0">
+                <a:solidFill>
+                  <a:srgbClr val="333333"/>
+                </a:solidFill>
+                <a:latin typeface="Arial"/>
+              </a:rPr>
+              <a:t> — blind to attendance, exams &amp; holidays</a:t>
+            </a:r>
+          </a:p>
+          <a:p>
+            <a:pPr algn="l">
+              <a:lnSpc>
+                <a:spcPct val="100000"/>
+              </a:lnSpc>
+              <a:spcBef>
+                <a:spcPts val="0"/>
+              </a:spcBef>
+              <a:spcAft>
+                <a:spcPts val="300"/>
+              </a:spcAft>
+            </a:pPr>
+            <a:r>
+              <a:rPr sz="780" b="1" i="0">
+                <a:solidFill>
+                  <a:srgbClr val="333333"/>
+                </a:solidFill>
+                <a:latin typeface="Arial"/>
+              </a:rPr>
+              <a:t>•  Spot-buying</a:t>
+            </a:r>
+            <a:r>
+              <a:rPr sz="780" b="0" i="0">
+                <a:solidFill>
+                  <a:srgbClr val="333333"/>
+                </a:solidFill>
+                <a:latin typeface="Arial"/>
+              </a:rPr>
+              <a:t> at mandi peak prices; no price intelligence</a:t>
+            </a:r>
+          </a:p>
+          <a:p>
+            <a:pPr algn="l">
+              <a:lnSpc>
+                <a:spcPct val="100000"/>
+              </a:lnSpc>
+              <a:spcBef>
+                <a:spcPts val="0"/>
+              </a:spcBef>
+              <a:spcAft>
+                <a:spcPts val="300"/>
+              </a:spcAft>
+            </a:pPr>
+            <a:r>
+              <a:rPr sz="780" b="1" i="0">
+                <a:solidFill>
+                  <a:srgbClr val="333333"/>
+                </a:solidFill>
+                <a:latin typeface="Arial"/>
+              </a:rPr>
+              <a:t>•  No feedback loop</a:t>
+            </a:r>
+            <a:r>
+              <a:rPr sz="780" b="0" i="0">
+                <a:solidFill>
+                  <a:srgbClr val="333333"/>
+                </a:solidFill>
+                <a:latin typeface="Arial"/>
+              </a:rPr>
+              <a:t> on actual meal uptake</a:t>
+            </a:r>
+          </a:p>
+          <a:p>
+            <a:pPr algn="l">
+              <a:lnSpc>
+                <a:spcPct val="100000"/>
+              </a:lnSpc>
+              <a:spcBef>
+                <a:spcPts val="0"/>
+              </a:spcBef>
+              <a:spcAft>
+                <a:spcPts val="0"/>
+              </a:spcAft>
+            </a:pPr>
+            <a:r>
+              <a:rPr sz="780" b="1" i="0">
+                <a:solidFill>
+                  <a:srgbClr val="C22310"/>
+                </a:solidFill>
+                <a:latin typeface="Arial"/>
+              </a:rPr>
+              <a:t>8–10% over-produced · +12% spot premium [dummy]</a:t>
+            </a:r>
+          </a:p>
+        </p:txBody>
+      </p:sp>
+      <p:sp>
+        <p:nvSpPr>
+          <p:cNvPr id="14" name="Rectangle 13"/>
+          <p:cNvSpPr/>
+          <p:nvPr/>
+        </p:nvSpPr>
+        <p:spPr>
+          <a:xfrm>
+            <a:off x="5989320" y="1399032"/>
+            <a:ext cx="54864" cy="182880"/>
+          </a:xfrm>
+          <a:prstGeom prst="rect">
+            <a:avLst/>
+          </a:prstGeom>
+          <a:solidFill>
+            <a:srgbClr val="C22310"/>
+          </a:solidFill>
+          <a:ln>
+            <a:noFill/>
+          </a:ln>
+          <a:effectLst/>
+        </p:spPr>
+        <p:style>
+          <a:lnRef idx="1">
+            <a:schemeClr val="accent1"/>
+          </a:lnRef>
+          <a:fillRef idx="3">
+            <a:schemeClr val="accent1"/>
+          </a:fillRef>
+          <a:effectRef idx="2">
+            <a:schemeClr val="accent1"/>
+          </a:effectRef>
+          <a:fontRef idx="minor">
+            <a:schemeClr val="lt1"/>
+          </a:fontRef>
+        </p:style>
+        <p:txBody>
+          <a:bodyPr rtlCol="0" anchor="ctr"/>
+          <a:lstStyle/>
+          <a:p>
+            <a:pPr algn="ctr"/>
+          </a:p>
+        </p:txBody>
+      </p:sp>
+      <p:sp>
+        <p:nvSpPr>
+          <p:cNvPr id="15" name="TextBox 14"/>
+          <p:cNvSpPr txBox="1"/>
+          <p:nvPr/>
+        </p:nvSpPr>
+        <p:spPr>
+          <a:xfrm>
+            <a:off x="6135624" y="1371600"/>
+            <a:ext cx="2642615" cy="256032"/>
+          </a:xfrm>
+          <a:prstGeom prst="rect">
+            <a:avLst/>
+          </a:prstGeom>
+          <a:noFill/>
+        </p:spPr>
+        <p:txBody>
+          <a:bodyPr wrap="square" lIns="0" rIns="0" tIns="0" bIns="0" anchor="t">
+            <a:spAutoFit/>
+          </a:bodyPr>
+          <a:lstStyle/>
+          <a:p>
+            <a:pPr algn="l">
+              <a:lnSpc>
+                <a:spcPct val="100000"/>
+              </a:lnSpc>
+              <a:spcBef>
+                <a:spcPts val="0"/>
+              </a:spcBef>
+              <a:spcAft>
+                <a:spcPts val="0"/>
+              </a:spcAft>
+            </a:pPr>
+            <a:r>
+              <a:rPr sz="1050" b="1" i="0">
+                <a:solidFill>
+                  <a:srgbClr val="1B3E6E"/>
+                </a:solidFill>
+                <a:latin typeface="Arial"/>
+              </a:rPr>
+              <a:t>GAP 2 — Distribution</a:t>
+            </a:r>
+          </a:p>
+        </p:txBody>
+      </p:sp>
+      <p:sp>
+        <p:nvSpPr>
+          <p:cNvPr id="16" name="Rectangle 15"/>
+          <p:cNvSpPr/>
+          <p:nvPr/>
+        </p:nvSpPr>
+        <p:spPr>
+          <a:xfrm>
+            <a:off x="5989320" y="1645920"/>
+            <a:ext cx="2788920" cy="10972"/>
+          </a:xfrm>
+          <a:prstGeom prst="rect">
+            <a:avLst/>
+          </a:prstGeom>
+          <a:solidFill>
+            <a:srgbClr val="BFBFBF"/>
+          </a:solidFill>
+          <a:ln>
+            <a:noFill/>
+          </a:ln>
+          <a:effectLst/>
+        </p:spPr>
+        <p:style>
+          <a:lnRef idx="1">
+            <a:schemeClr val="accent1"/>
+          </a:lnRef>
+          <a:fillRef idx="3">
+            <a:schemeClr val="accent1"/>
+          </a:fillRef>
+          <a:effectRef idx="2">
+            <a:schemeClr val="accent1"/>
+          </a:effectRef>
+          <a:fontRef idx="minor">
+            <a:schemeClr val="lt1"/>
+          </a:fontRef>
+        </p:style>
+        <p:txBody>
+          <a:bodyPr rtlCol="0" anchor="ctr"/>
+          <a:lstStyle/>
+          <a:p>
+            <a:pPr algn="ctr"/>
+          </a:p>
+        </p:txBody>
+      </p:sp>
+      <p:sp>
+        <p:nvSpPr>
+          <p:cNvPr id="17" name="TextBox 16"/>
+          <p:cNvSpPr txBox="1"/>
+          <p:nvPr/>
+        </p:nvSpPr>
+        <p:spPr>
+          <a:xfrm>
+            <a:off x="5989320" y="1737360"/>
+            <a:ext cx="2788920" cy="1188720"/>
+          </a:xfrm>
+          <a:prstGeom prst="rect">
+            <a:avLst/>
+          </a:prstGeom>
+          <a:noFill/>
+        </p:spPr>
+        <p:txBody>
+          <a:bodyPr wrap="square" lIns="0" rIns="0" tIns="0" bIns="0" anchor="t">
+            <a:spAutoFit/>
+          </a:bodyPr>
+          <a:lstStyle/>
+          <a:p>
+            <a:pPr algn="l">
+              <a:lnSpc>
+                <a:spcPct val="100000"/>
+              </a:lnSpc>
+              <a:spcBef>
+                <a:spcPts val="0"/>
+              </a:spcBef>
+              <a:spcAft>
+                <a:spcPts val="300"/>
+              </a:spcAft>
+            </a:pPr>
+            <a:r>
+              <a:rPr sz="780" b="1" i="0">
+                <a:solidFill>
+                  <a:srgbClr val="333333"/>
+                </a:solidFill>
+                <a:latin typeface="Arial"/>
+              </a:rPr>
+              <a:t>•  Static, driver-memory routes</a:t>
+            </a:r>
+            <a:r>
+              <a:rPr sz="780" b="0" i="0">
+                <a:solidFill>
+                  <a:srgbClr val="333333"/>
+                </a:solidFill>
+                <a:latin typeface="Arial"/>
+              </a:rPr>
+              <a:t> — late vans mean children stay hungry all day</a:t>
+            </a:r>
+          </a:p>
+          <a:p>
+            <a:pPr algn="l">
+              <a:lnSpc>
+                <a:spcPct val="100000"/>
+              </a:lnSpc>
+              <a:spcBef>
+                <a:spcPts val="0"/>
+              </a:spcBef>
+              <a:spcAft>
+                <a:spcPts val="300"/>
+              </a:spcAft>
+            </a:pPr>
+            <a:r>
+              <a:rPr sz="780" b="1" i="0">
+                <a:solidFill>
+                  <a:srgbClr val="333333"/>
+                </a:solidFill>
+                <a:latin typeface="Arial"/>
+              </a:rPr>
+              <a:t>•  Untracked vessels</a:t>
+            </a:r>
+            <a:r>
+              <a:rPr sz="780" b="0" i="0">
+                <a:solidFill>
+                  <a:srgbClr val="333333"/>
+                </a:solidFill>
+                <a:latin typeface="Arial"/>
+              </a:rPr>
+              <a:t>; adulteration &amp; diversion risk en route</a:t>
+            </a:r>
+          </a:p>
+          <a:p>
+            <a:pPr algn="l">
+              <a:lnSpc>
+                <a:spcPct val="100000"/>
+              </a:lnSpc>
+              <a:spcBef>
+                <a:spcPts val="0"/>
+              </a:spcBef>
+              <a:spcAft>
+                <a:spcPts val="300"/>
+              </a:spcAft>
+            </a:pPr>
+            <a:r>
+              <a:rPr sz="780" b="1" i="0">
+                <a:solidFill>
+                  <a:srgbClr val="333333"/>
+                </a:solidFill>
+                <a:latin typeface="Arial"/>
+              </a:rPr>
+              <a:t>•  No proof-of-delivery</a:t>
+            </a:r>
+            <a:r>
+              <a:rPr sz="780" b="0" i="0">
+                <a:solidFill>
+                  <a:srgbClr val="333333"/>
+                </a:solidFill>
+                <a:latin typeface="Arial"/>
+              </a:rPr>
+              <a:t> — disputes go unresolved</a:t>
+            </a:r>
+          </a:p>
+          <a:p>
+            <a:pPr algn="l">
+              <a:lnSpc>
+                <a:spcPct val="100000"/>
+              </a:lnSpc>
+              <a:spcBef>
+                <a:spcPts val="0"/>
+              </a:spcBef>
+              <a:spcAft>
+                <a:spcPts val="0"/>
+              </a:spcAft>
+            </a:pPr>
+            <a:r>
+              <a:rPr sz="780" b="1" i="0">
+                <a:solidFill>
+                  <a:srgbClr val="C22310"/>
+                </a:solidFill>
+                <a:latin typeface="Arial"/>
+              </a:rPr>
+              <a:t>6.2% miss lunch window · $35k/yr shrinkage [dummy]</a:t>
+            </a:r>
+          </a:p>
+        </p:txBody>
+      </p:sp>
+      <p:graphicFrame>
+        <p:nvGraphicFramePr>
+          <p:cNvPr id="18" name="Chart 17"/>
+          <p:cNvGraphicFramePr>
+            <a:graphicFrameLocks noGrp="1"/>
+          </p:cNvGraphicFramePr>
+          <p:nvPr/>
+        </p:nvGraphicFramePr>
+        <p:xfrm>
+          <a:off x="3273552" y="2331720"/>
+          <a:ext cx="2606040" cy="2240280"/>
+        </p:xfrm>
+        <a:graphic>
+          <a:graphicData uri="http://schemas.openxmlformats.org/drawingml/2006/chart">
+            <c:chart xmlns:c="http://schemas.openxmlformats.org/drawingml/2006/chart" r:id="rId2"/>
+          </a:graphicData>
+        </a:graphic>
+      </p:graphicFrame>
+      <p:sp>
+        <p:nvSpPr>
+          <p:cNvPr id="19" name="TextBox 18"/>
+          <p:cNvSpPr txBox="1"/>
+          <p:nvPr/>
+        </p:nvSpPr>
+        <p:spPr>
+          <a:xfrm>
+            <a:off x="3273552" y="4626864"/>
+            <a:ext cx="2606040" cy="402336"/>
+          </a:xfrm>
+          <a:prstGeom prst="rect">
+            <a:avLst/>
+          </a:prstGeom>
+          <a:noFill/>
+        </p:spPr>
+        <p:txBody>
+          <a:bodyPr wrap="square" lIns="0" rIns="0" tIns="0" bIns="0" anchor="t">
+            <a:spAutoFit/>
+          </a:bodyPr>
+          <a:lstStyle/>
+          <a:p>
+            <a:pPr algn="ctr">
+              <a:lnSpc>
+                <a:spcPct val="100000"/>
+              </a:lnSpc>
+              <a:spcBef>
+                <a:spcPts val="0"/>
+              </a:spcBef>
+              <a:spcAft>
+                <a:spcPts val="100"/>
+              </a:spcAft>
+            </a:pPr>
+            <a:r>
+              <a:rPr sz="950" b="1" i="0">
+                <a:solidFill>
+                  <a:srgbClr val="1B3E6E"/>
+                </a:solidFill>
+                <a:latin typeface="Arial"/>
+              </a:rPr>
+              <a:t>THE $250k GRANT</a:t>
+            </a:r>
+          </a:p>
+          <a:p>
+            <a:pPr algn="ctr">
+              <a:lnSpc>
+                <a:spcPct val="100000"/>
+              </a:lnSpc>
+              <a:spcBef>
+                <a:spcPts val="0"/>
+              </a:spcBef>
+              <a:spcAft>
+                <a:spcPts val="0"/>
+              </a:spcAft>
+            </a:pPr>
+            <a:r>
+              <a:rPr sz="720" b="0" i="1">
+                <a:solidFill>
+                  <a:srgbClr val="727375"/>
+                </a:solidFill>
+                <a:latin typeface="Arial"/>
+              </a:rPr>
+              <a:t>60 / 40 — weighted to the costlier gap</a:t>
+            </a:r>
+          </a:p>
+        </p:txBody>
+      </p:sp>
+      <p:cxnSp>
+        <p:nvCxnSpPr>
+          <p:cNvPr id="20" name="Connector 19"/>
+          <p:cNvCxnSpPr/>
+          <p:nvPr/>
+        </p:nvCxnSpPr>
+        <p:spPr>
+          <a:xfrm>
+            <a:off x="3246120" y="2331720"/>
+            <a:ext cx="548640" cy="548640"/>
+          </a:xfrm>
+          <a:prstGeom prst="curvedConnector3">
+            <a:avLst/>
+          </a:prstGeom>
+          <a:ln w="13970">
+            <a:solidFill>
+              <a:srgbClr val="C22310"/>
+            </a:solidFill>
+            <a:prstDash val="sysDash"/>
+            <a:tailEnd type="triangle" w="med" len="med"/>
+          </a:ln>
+          <a:effectLst/>
+        </p:spPr>
+        <p:style>
+          <a:lnRef idx="2">
+            <a:schemeClr val="accent1"/>
+          </a:lnRef>
+          <a:fillRef idx="0">
+            <a:schemeClr val="accent1"/>
+          </a:fillRef>
+          <a:effectRef idx="1">
+            <a:schemeClr val="accent1"/>
+          </a:effectRef>
+          <a:fontRef idx="minor">
+            <a:schemeClr val="tx1"/>
+          </a:fontRef>
+        </p:style>
+      </p:cxnSp>
+      <p:cxnSp>
+        <p:nvCxnSpPr>
+          <p:cNvPr id="21" name="Connector 20"/>
+          <p:cNvCxnSpPr/>
+          <p:nvPr/>
+        </p:nvCxnSpPr>
+        <p:spPr>
+          <a:xfrm flipH="1">
+            <a:off x="5349240" y="2331720"/>
+            <a:ext cx="548640" cy="548640"/>
+          </a:xfrm>
+          <a:prstGeom prst="curvedConnector3">
+            <a:avLst/>
+          </a:prstGeom>
+          <a:ln w="13970">
+            <a:solidFill>
+              <a:srgbClr val="C22310"/>
+            </a:solidFill>
+            <a:prstDash val="sysDash"/>
+            <a:tailEnd type="triangle" w="med" len="med"/>
+          </a:ln>
+          <a:effectLst/>
+        </p:spPr>
+        <p:style>
+          <a:lnRef idx="2">
+            <a:schemeClr val="accent1"/>
+          </a:lnRef>
+          <a:fillRef idx="0">
+            <a:schemeClr val="accent1"/>
+          </a:fillRef>
+          <a:effectRef idx="1">
+            <a:schemeClr val="accent1"/>
+          </a:effectRef>
+          <a:fontRef idx="minor">
+            <a:schemeClr val="tx1"/>
+          </a:fontRef>
+        </p:style>
+      </p:cxnSp>
+      <p:cxnSp>
+        <p:nvCxnSpPr>
+          <p:cNvPr id="22" name="Connector 21"/>
+          <p:cNvCxnSpPr/>
+          <p:nvPr/>
+        </p:nvCxnSpPr>
+        <p:spPr>
+          <a:xfrm flipH="1">
+            <a:off x="3209544" y="4160520"/>
+            <a:ext cx="539495" cy="457200"/>
+          </a:xfrm>
+          <a:prstGeom prst="curvedConnector3">
+            <a:avLst/>
+          </a:prstGeom>
+          <a:ln w="13970">
+            <a:solidFill>
+              <a:srgbClr val="1B3E6E"/>
+            </a:solidFill>
+            <a:prstDash val="sysDash"/>
+            <a:tailEnd type="triangle" w="med" len="med"/>
+          </a:ln>
+          <a:effectLst/>
+        </p:spPr>
+        <p:style>
+          <a:lnRef idx="2">
+            <a:schemeClr val="accent1"/>
+          </a:lnRef>
+          <a:fillRef idx="0">
+            <a:schemeClr val="accent1"/>
+          </a:fillRef>
+          <a:effectRef idx="1">
+            <a:schemeClr val="accent1"/>
+          </a:effectRef>
+          <a:fontRef idx="minor">
+            <a:schemeClr val="tx1"/>
+          </a:fontRef>
+        </p:style>
+      </p:cxnSp>
+      <p:cxnSp>
+        <p:nvCxnSpPr>
+          <p:cNvPr id="23" name="Connector 22"/>
+          <p:cNvCxnSpPr/>
+          <p:nvPr/>
+        </p:nvCxnSpPr>
+        <p:spPr>
+          <a:xfrm>
+            <a:off x="5394960" y="4160520"/>
+            <a:ext cx="539496" cy="457200"/>
+          </a:xfrm>
+          <a:prstGeom prst="curvedConnector3">
+            <a:avLst/>
+          </a:prstGeom>
+          <a:ln w="13970">
+            <a:solidFill>
+              <a:srgbClr val="398025"/>
+            </a:solidFill>
+            <a:prstDash val="sysDash"/>
+            <a:tailEnd type="triangle" w="med" len="med"/>
+          </a:ln>
+          <a:effectLst/>
+        </p:spPr>
+        <p:style>
+          <a:lnRef idx="2">
+            <a:schemeClr val="accent1"/>
+          </a:lnRef>
+          <a:fillRef idx="0">
+            <a:schemeClr val="accent1"/>
+          </a:fillRef>
+          <a:effectRef idx="1">
+            <a:schemeClr val="accent1"/>
+          </a:effectRef>
+          <a:fontRef idx="minor">
+            <a:schemeClr val="tx1"/>
+          </a:fontRef>
+        </p:style>
+      </p:cxnSp>
+      <p:sp>
+        <p:nvSpPr>
+          <p:cNvPr id="24" name="Rounded Rectangle 23"/>
+          <p:cNvSpPr/>
+          <p:nvPr/>
+        </p:nvSpPr>
+        <p:spPr>
+          <a:xfrm>
+            <a:off x="365760" y="3931920"/>
+            <a:ext cx="2788920" cy="1783080"/>
+          </a:xfrm>
+          <a:prstGeom prst="roundRect">
+            <a:avLst>
+              <a:gd name="adj" fmla="val 5000"/>
+            </a:avLst>
+          </a:prstGeom>
+          <a:solidFill>
+            <a:srgbClr val="EEF3F9"/>
+          </a:solidFill>
+          <a:ln w="12700">
+            <a:solidFill>
+              <a:srgbClr val="1B3E6E"/>
+            </a:solidFill>
+          </a:ln>
+          <a:effectLst/>
+        </p:spPr>
+        <p:style>
+          <a:lnRef idx="1">
+            <a:schemeClr val="accent1"/>
+          </a:lnRef>
+          <a:fillRef idx="3">
+            <a:schemeClr val="accent1"/>
+          </a:fillRef>
+          <a:effectRef idx="2">
+            <a:schemeClr val="accent1"/>
+          </a:effectRef>
+          <a:fontRef idx="minor">
+            <a:schemeClr val="lt1"/>
+          </a:fontRef>
+        </p:style>
+        <p:txBody>
+          <a:bodyPr rtlCol="0" anchor="ctr"/>
+          <a:lstStyle/>
+          <a:p>
+            <a:pPr algn="ctr"/>
+          </a:p>
+        </p:txBody>
+      </p:sp>
+      <p:sp>
+        <p:nvSpPr>
+          <p:cNvPr id="25" name="TextBox 24"/>
+          <p:cNvSpPr txBox="1"/>
+          <p:nvPr/>
+        </p:nvSpPr>
+        <p:spPr>
+          <a:xfrm>
+            <a:off x="484632" y="4014215"/>
+            <a:ext cx="2551176" cy="1645920"/>
+          </a:xfrm>
+          <a:prstGeom prst="rect">
+            <a:avLst/>
+          </a:prstGeom>
+          <a:noFill/>
+        </p:spPr>
+        <p:txBody>
+          <a:bodyPr wrap="square" lIns="0" rIns="0" tIns="0" bIns="0" anchor="t">
+            <a:spAutoFit/>
+          </a:bodyPr>
+          <a:lstStyle/>
+          <a:p>
+            <a:pPr algn="l">
+              <a:lnSpc>
+                <a:spcPct val="95000"/>
+              </a:lnSpc>
+              <a:spcBef>
+                <a:spcPts val="0"/>
+              </a:spcBef>
+              <a:spcAft>
+                <a:spcPts val="300"/>
+              </a:spcAft>
+            </a:pPr>
+            <a:r>
+              <a:rPr sz="950" b="1" i="0">
+                <a:solidFill>
+                  <a:srgbClr val="1B3E6E"/>
+                </a:solidFill>
+                <a:latin typeface="Arial"/>
+              </a:rPr>
+              <a:t>SOLUTION 1
+“Annapurna AI” · $150k</a:t>
+            </a:r>
+          </a:p>
+          <a:p>
+            <a:pPr algn="l">
+              <a:lnSpc>
+                <a:spcPct val="104000"/>
+              </a:lnSpc>
+              <a:spcBef>
+                <a:spcPts val="0"/>
+              </a:spcBef>
+              <a:spcAft>
+                <a:spcPts val="300"/>
+              </a:spcAft>
+            </a:pPr>
+            <a:r>
+              <a:rPr sz="819" b="1" i="0">
+                <a:solidFill>
+                  <a:srgbClr val="1B3E6E"/>
+                </a:solidFill>
+                <a:latin typeface="Arial"/>
+              </a:rPr>
+              <a:t>What: </a:t>
+            </a:r>
+            <a:r>
+              <a:rPr sz="819" b="0" i="0">
+                <a:solidFill>
+                  <a:srgbClr val="333333"/>
+                </a:solidFill>
+                <a:latin typeface="Arial"/>
+              </a:rPr>
+              <a:t>ML demand-forecasting &amp; procurement planning for all 68 kitchens</a:t>
+            </a:r>
+          </a:p>
+          <a:p>
+            <a:pPr algn="l">
+              <a:lnSpc>
+                <a:spcPct val="104000"/>
+              </a:lnSpc>
+              <a:spcBef>
+                <a:spcPts val="0"/>
+              </a:spcBef>
+              <a:spcAft>
+                <a:spcPts val="300"/>
+              </a:spcAft>
+            </a:pPr>
+            <a:r>
+              <a:rPr sz="819" b="1" i="0">
+                <a:solidFill>
+                  <a:srgbClr val="1B3E6E"/>
+                </a:solidFill>
+                <a:latin typeface="Arial"/>
+              </a:rPr>
+              <a:t>How: </a:t>
+            </a:r>
+            <a:r>
+              <a:rPr sz="819" b="0" i="0">
+                <a:solidFill>
+                  <a:srgbClr val="333333"/>
+                </a:solidFill>
+                <a:latin typeface="Arial"/>
+              </a:rPr>
+              <a:t>predicts school-level attendance; auto-generates indents &amp; buying schedules</a:t>
+            </a:r>
+          </a:p>
+          <a:p>
+            <a:pPr algn="l">
+              <a:lnSpc>
+                <a:spcPct val="105000"/>
+              </a:lnSpc>
+              <a:spcBef>
+                <a:spcPts val="0"/>
+              </a:spcBef>
+              <a:spcAft>
+                <a:spcPts val="0"/>
+              </a:spcAft>
+            </a:pPr>
+            <a:r>
+              <a:rPr sz="830" b="1" i="0">
+                <a:solidFill>
+                  <a:srgbClr val="398025"/>
+                </a:solidFill>
+                <a:latin typeface="Arial"/>
+              </a:rPr>
+              <a:t>→ ~70% less waste  ·  est. $230k saved / yr [dummy]</a:t>
+            </a:r>
+          </a:p>
+        </p:txBody>
+      </p:sp>
+      <p:sp>
+        <p:nvSpPr>
+          <p:cNvPr id="26" name="Rounded Rectangle 25"/>
+          <p:cNvSpPr/>
+          <p:nvPr/>
+        </p:nvSpPr>
+        <p:spPr>
+          <a:xfrm>
+            <a:off x="5989320" y="3931920"/>
+            <a:ext cx="2788920" cy="1783080"/>
+          </a:xfrm>
+          <a:prstGeom prst="roundRect">
+            <a:avLst>
+              <a:gd name="adj" fmla="val 5000"/>
+            </a:avLst>
+          </a:prstGeom>
+          <a:solidFill>
+            <a:srgbClr val="EAF3E6"/>
+          </a:solidFill>
+          <a:ln w="12700">
+            <a:solidFill>
+              <a:srgbClr val="398025"/>
+            </a:solidFill>
+          </a:ln>
+          <a:effectLst/>
+        </p:spPr>
+        <p:style>
+          <a:lnRef idx="1">
+            <a:schemeClr val="accent1"/>
+          </a:lnRef>
+          <a:fillRef idx="3">
+            <a:schemeClr val="accent1"/>
+          </a:fillRef>
+          <a:effectRef idx="2">
+            <a:schemeClr val="accent1"/>
+          </a:effectRef>
+          <a:fontRef idx="minor">
+            <a:schemeClr val="lt1"/>
+          </a:fontRef>
+        </p:style>
+        <p:txBody>
+          <a:bodyPr rtlCol="0" anchor="ctr"/>
+          <a:lstStyle/>
+          <a:p>
+            <a:pPr algn="ctr"/>
+          </a:p>
+        </p:txBody>
+      </p:sp>
+      <p:sp>
+        <p:nvSpPr>
+          <p:cNvPr id="27" name="TextBox 26"/>
+          <p:cNvSpPr txBox="1"/>
+          <p:nvPr/>
+        </p:nvSpPr>
+        <p:spPr>
+          <a:xfrm>
+            <a:off x="6108192" y="4014215"/>
+            <a:ext cx="2551176" cy="1645920"/>
+          </a:xfrm>
+          <a:prstGeom prst="rect">
+            <a:avLst/>
+          </a:prstGeom>
+          <a:noFill/>
+        </p:spPr>
+        <p:txBody>
+          <a:bodyPr wrap="square" lIns="0" rIns="0" tIns="0" bIns="0" anchor="t">
+            <a:spAutoFit/>
+          </a:bodyPr>
+          <a:lstStyle/>
+          <a:p>
+            <a:pPr algn="l">
+              <a:lnSpc>
+                <a:spcPct val="95000"/>
+              </a:lnSpc>
+              <a:spcBef>
+                <a:spcPts val="0"/>
+              </a:spcBef>
+              <a:spcAft>
+                <a:spcPts val="300"/>
+              </a:spcAft>
+            </a:pPr>
+            <a:r>
+              <a:rPr sz="950" b="1" i="0">
+                <a:solidFill>
+                  <a:srgbClr val="398025"/>
+                </a:solidFill>
+                <a:latin typeface="Arial"/>
+              </a:rPr>
+              <a:t>SOLUTION 2
+“Last-Mile Shield” · $100k</a:t>
+            </a:r>
+          </a:p>
+          <a:p>
+            <a:pPr algn="l">
+              <a:lnSpc>
+                <a:spcPct val="104000"/>
+              </a:lnSpc>
+              <a:spcBef>
+                <a:spcPts val="0"/>
+              </a:spcBef>
+              <a:spcAft>
+                <a:spcPts val="300"/>
+              </a:spcAft>
+            </a:pPr>
+            <a:r>
+              <a:rPr sz="819" b="1" i="0">
+                <a:solidFill>
+                  <a:srgbClr val="1B3E6E"/>
+                </a:solidFill>
+                <a:latin typeface="Arial"/>
+              </a:rPr>
+              <a:t>What: </a:t>
+            </a:r>
+            <a:r>
+              <a:rPr sz="819" b="0" i="0">
+                <a:solidFill>
+                  <a:srgbClr val="333333"/>
+                </a:solidFill>
+                <a:latin typeface="Arial"/>
+              </a:rPr>
+              <a:t>AI routing + telematics (GPS, cameras, RFID) + geofenced smart locks</a:t>
+            </a:r>
+          </a:p>
+          <a:p>
+            <a:pPr algn="l">
+              <a:lnSpc>
+                <a:spcPct val="104000"/>
+              </a:lnSpc>
+              <a:spcBef>
+                <a:spcPts val="0"/>
+              </a:spcBef>
+              <a:spcAft>
+                <a:spcPts val="300"/>
+              </a:spcAft>
+            </a:pPr>
+            <a:r>
+              <a:rPr sz="819" b="1" i="0">
+                <a:solidFill>
+                  <a:srgbClr val="1B3E6E"/>
+                </a:solidFill>
+                <a:latin typeface="Arial"/>
+              </a:rPr>
+              <a:t>How: </a:t>
+            </a:r>
+            <a:r>
+              <a:rPr sz="819" b="0" i="0">
+                <a:solidFill>
+                  <a:srgbClr val="333333"/>
+                </a:solidFill>
+                <a:latin typeface="Arial"/>
+              </a:rPr>
+              <a:t>drops sequenced to lunch bells; doors unlock only near a registered school</a:t>
+            </a:r>
+          </a:p>
+          <a:p>
+            <a:pPr algn="l">
+              <a:lnSpc>
+                <a:spcPct val="105000"/>
+              </a:lnSpc>
+              <a:spcBef>
+                <a:spcPts val="0"/>
+              </a:spcBef>
+              <a:spcAft>
+                <a:spcPts val="0"/>
+              </a:spcAft>
+            </a:pPr>
+            <a:r>
+              <a:rPr sz="830" b="1" i="0">
+                <a:solidFill>
+                  <a:srgbClr val="398025"/>
+                </a:solidFill>
+                <a:latin typeface="Arial"/>
+              </a:rPr>
+              <a:t>→ 99%+ on-time · −18% km  ·  est. $80k saved / yr [dummy]</a:t>
             </a:r>
           </a:p>
         </p:txBody>

--- a/AkshayaPatra_GS_Pitch.pptx
+++ b/AkshayaPatra_GS_Pitch.pptx
@@ -1161,13 +1161,10 @@
 
 <file path=ppt/charts/chart7.xml><?xml version="1.0" encoding="utf-8"?>
 <c:chartSpace xmlns:c="http://schemas.openxmlformats.org/drawingml/2006/chart" xmlns:a="http://schemas.openxmlformats.org/drawingml/2006/main" xmlns:r="http://schemas.openxmlformats.org/officeDocument/2006/relationships">
-  <c:date1904 val="0"/>
-  <c:roundedCorners val="0"/>
   <c:chart>
     <c:autoTitleDeleted val="1"/>
     <c:plotArea>
-      <c:layout/>
-      <c:doughnutChart>
+      <c:pieChart>
         <c:varyColors val="1"/>
         <c:ser>
           <c:idx val="0"/>
@@ -1189,7 +1186,7 @@
               <a:solidFill>
                 <a:srgbClr val="1B3E6E"/>
               </a:solidFill>
-              <a:ln w="19050">
+              <a:ln w="25400">
                 <a:solidFill>
                   <a:srgbClr val="FFFFFF"/>
                 </a:solidFill>
@@ -1202,7 +1199,7 @@
               <a:solidFill>
                 <a:srgbClr val="398025"/>
               </a:solidFill>
-              <a:ln w="19050">
+              <a:ln w="25400">
                 <a:solidFill>
                   <a:srgbClr val="FFFFFF"/>
                 </a:solidFill>
@@ -1246,7 +1243,7 @@
             <a:lstStyle/>
             <a:p>
               <a:pPr>
-                <a:defRPr sz="1000" b="1">
+                <a:defRPr sz="1100" b="1">
                   <a:solidFill>
                     <a:srgbClr val="FFFFFF"/>
                   </a:solidFill>
@@ -1262,26 +1259,28 @@
           <c:showBubbleSize val="0"/>
           <c:showLeaderLines val="1"/>
         </c:dLbls>
-        <c:firstSliceAng val="0"/>
-        <c:holeSize val="50"/>
-      </c:doughnutChart>
+      </c:pieChart>
     </c:plotArea>
-    <c:plotVisOnly val="1"/>
     <c:dispBlanksAs val="gap"/>
-    <c:showDLblsOverMax val="0"/>
   </c:chart>
   <c:txPr>
     <a:bodyPr/>
     <a:lstStyle/>
     <a:p>
       <a:pPr>
-        <a:defRPr sz="800">
+        <a:defRPr sz="900">
           <a:latin typeface="Arial"/>
         </a:defRPr>
       </a:pPr>
-      <a:endParaRPr/>
+      <a:endParaRPr lang="en-US"/>
     </a:p>
   </c:txPr>
+  <c:spPr>
+    <a:noFill/>
+    <a:ln>
+      <a:noFill/>
+    </a:ln>
+  </c:spPr>
   <c:externalData r:id="rId1">
     <c:autoUpdate val="0"/>
   </c:externalData>
@@ -20395,7 +20394,183 @@
         </p:nvSpPr>
         <p:spPr>
           <a:xfrm>
-            <a:off x="365760" y="1399032"/>
+            <a:off x="365760" y="1335024"/>
+            <a:ext cx="4133087" cy="2249424"/>
+          </a:xfrm>
+          <a:prstGeom prst="rect">
+            <a:avLst/>
+          </a:prstGeom>
+          <a:solidFill>
+            <a:srgbClr val="F4F4F4"/>
+          </a:solidFill>
+          <a:ln>
+            <a:noFill/>
+          </a:ln>
+          <a:effectLst/>
+        </p:spPr>
+        <p:style>
+          <a:lnRef idx="1">
+            <a:schemeClr val="accent1"/>
+          </a:lnRef>
+          <a:fillRef idx="3">
+            <a:schemeClr val="accent1"/>
+          </a:fillRef>
+          <a:effectRef idx="2">
+            <a:schemeClr val="accent1"/>
+          </a:effectRef>
+          <a:fontRef idx="minor">
+            <a:schemeClr val="lt1"/>
+          </a:fontRef>
+        </p:style>
+        <p:txBody>
+          <a:bodyPr rtlCol="0" anchor="ctr"/>
+          <a:lstStyle/>
+          <a:p>
+            <a:pPr algn="ctr"/>
+          </a:p>
+        </p:txBody>
+      </p:sp>
+      <p:sp>
+        <p:nvSpPr>
+          <p:cNvPr id="11" name="Rectangle 10"/>
+          <p:cNvSpPr/>
+          <p:nvPr/>
+        </p:nvSpPr>
+        <p:spPr>
+          <a:xfrm>
+            <a:off x="365760" y="3675887"/>
+            <a:ext cx="4133087" cy="2231136"/>
+          </a:xfrm>
+          <a:prstGeom prst="rect">
+            <a:avLst/>
+          </a:prstGeom>
+          <a:solidFill>
+            <a:srgbClr val="F4F4F4"/>
+          </a:solidFill>
+          <a:ln>
+            <a:noFill/>
+          </a:ln>
+          <a:effectLst/>
+        </p:spPr>
+        <p:style>
+          <a:lnRef idx="1">
+            <a:schemeClr val="accent1"/>
+          </a:lnRef>
+          <a:fillRef idx="3">
+            <a:schemeClr val="accent1"/>
+          </a:fillRef>
+          <a:effectRef idx="2">
+            <a:schemeClr val="accent1"/>
+          </a:effectRef>
+          <a:fontRef idx="minor">
+            <a:schemeClr val="lt1"/>
+          </a:fontRef>
+        </p:style>
+        <p:txBody>
+          <a:bodyPr rtlCol="0" anchor="ctr"/>
+          <a:lstStyle/>
+          <a:p>
+            <a:pPr algn="ctr"/>
+          </a:p>
+        </p:txBody>
+      </p:sp>
+      <p:sp>
+        <p:nvSpPr>
+          <p:cNvPr id="12" name="Rectangle 11"/>
+          <p:cNvSpPr/>
+          <p:nvPr/>
+        </p:nvSpPr>
+        <p:spPr>
+          <a:xfrm>
+            <a:off x="4645152" y="1335024"/>
+            <a:ext cx="4133087" cy="2249424"/>
+          </a:xfrm>
+          <a:prstGeom prst="rect">
+            <a:avLst/>
+          </a:prstGeom>
+          <a:solidFill>
+            <a:srgbClr val="F4F4F4"/>
+          </a:solidFill>
+          <a:ln>
+            <a:noFill/>
+          </a:ln>
+          <a:effectLst/>
+        </p:spPr>
+        <p:style>
+          <a:lnRef idx="1">
+            <a:schemeClr val="accent1"/>
+          </a:lnRef>
+          <a:fillRef idx="3">
+            <a:schemeClr val="accent1"/>
+          </a:fillRef>
+          <a:effectRef idx="2">
+            <a:schemeClr val="accent1"/>
+          </a:effectRef>
+          <a:fontRef idx="minor">
+            <a:schemeClr val="lt1"/>
+          </a:fontRef>
+        </p:style>
+        <p:txBody>
+          <a:bodyPr rtlCol="0" anchor="ctr"/>
+          <a:lstStyle/>
+          <a:p>
+            <a:pPr algn="ctr"/>
+          </a:p>
+        </p:txBody>
+      </p:sp>
+      <p:sp>
+        <p:nvSpPr>
+          <p:cNvPr id="13" name="Rectangle 12"/>
+          <p:cNvSpPr/>
+          <p:nvPr/>
+        </p:nvSpPr>
+        <p:spPr>
+          <a:xfrm>
+            <a:off x="4645152" y="3675887"/>
+            <a:ext cx="4133087" cy="2231136"/>
+          </a:xfrm>
+          <a:prstGeom prst="rect">
+            <a:avLst/>
+          </a:prstGeom>
+          <a:solidFill>
+            <a:srgbClr val="F4F4F4"/>
+          </a:solidFill>
+          <a:ln>
+            <a:noFill/>
+          </a:ln>
+          <a:effectLst/>
+        </p:spPr>
+        <p:style>
+          <a:lnRef idx="1">
+            <a:schemeClr val="accent1"/>
+          </a:lnRef>
+          <a:fillRef idx="3">
+            <a:schemeClr val="accent1"/>
+          </a:fillRef>
+          <a:effectRef idx="2">
+            <a:schemeClr val="accent1"/>
+          </a:effectRef>
+          <a:fontRef idx="minor">
+            <a:schemeClr val="lt1"/>
+          </a:fontRef>
+        </p:style>
+        <p:txBody>
+          <a:bodyPr rtlCol="0" anchor="ctr"/>
+          <a:lstStyle/>
+          <a:p>
+            <a:pPr algn="ctr"/>
+          </a:p>
+        </p:txBody>
+      </p:sp>
+      <p:sp>
+        <p:nvSpPr>
+          <p:cNvPr id="14" name="Rectangle 13"/>
+          <p:cNvSpPr/>
+          <p:nvPr/>
+        </p:nvSpPr>
+        <p:spPr>
+          <a:xfrm>
+            <a:off x="502920" y="1472184"/>
             <a:ext cx="54864" cy="182880"/>
           </a:xfrm>
           <a:prstGeom prst="rect">
@@ -20433,14 +20608,14 @@
       </p:sp>
       <p:sp>
         <p:nvSpPr>
-          <p:cNvPr id="11" name="TextBox 10"/>
+          <p:cNvPr id="15" name="TextBox 14"/>
           <p:cNvSpPr txBox="1"/>
           <p:nvPr/>
         </p:nvSpPr>
         <p:spPr>
           <a:xfrm>
-            <a:off x="512064" y="1371600"/>
-            <a:ext cx="2642615" cy="256032"/>
+            <a:off x="640080" y="1444752"/>
+            <a:ext cx="2926080" cy="237744"/>
           </a:xfrm>
           <a:prstGeom prst="rect">
             <a:avLst/>
@@ -20478,58 +20653,14 @@
       </p:sp>
       <p:sp>
         <p:nvSpPr>
-          <p:cNvPr id="12" name="Rectangle 11"/>
-          <p:cNvSpPr/>
-          <p:nvPr/>
-        </p:nvSpPr>
-        <p:spPr>
-          <a:xfrm>
-            <a:off x="365760" y="1645920"/>
-            <a:ext cx="2788920" cy="10972"/>
-          </a:xfrm>
-          <a:prstGeom prst="rect">
-            <a:avLst/>
-          </a:prstGeom>
-          <a:solidFill>
-            <a:srgbClr val="BFBFBF"/>
-          </a:solidFill>
-          <a:ln>
-            <a:noFill/>
-          </a:ln>
-          <a:effectLst/>
-        </p:spPr>
-        <p:style>
-          <a:lnRef idx="1">
-            <a:schemeClr val="accent1"/>
-          </a:lnRef>
-          <a:fillRef idx="3">
-            <a:schemeClr val="accent1"/>
-          </a:fillRef>
-          <a:effectRef idx="2">
-            <a:schemeClr val="accent1"/>
-          </a:effectRef>
-          <a:fontRef idx="minor">
-            <a:schemeClr val="lt1"/>
-          </a:fontRef>
-        </p:style>
-        <p:txBody>
-          <a:bodyPr rtlCol="0" anchor="ctr"/>
-          <a:lstStyle/>
-          <a:p>
-            <a:pPr algn="ctr"/>
-          </a:p>
-        </p:txBody>
-      </p:sp>
-      <p:sp>
-        <p:nvSpPr>
-          <p:cNvPr id="13" name="TextBox 12"/>
+          <p:cNvPr id="16" name="TextBox 15"/>
           <p:cNvSpPr txBox="1"/>
           <p:nvPr/>
         </p:nvSpPr>
         <p:spPr>
           <a:xfrm>
-            <a:off x="365760" y="1737360"/>
-            <a:ext cx="2788920" cy="1188720"/>
+            <a:off x="530352" y="1792224"/>
+            <a:ext cx="2788920" cy="1691640"/>
           </a:xfrm>
           <a:prstGeom prst="rect">
             <a:avLst/>
@@ -20544,7 +20675,7 @@
           <a:p>
             <a:pPr algn="l">
               <a:lnSpc>
-                <a:spcPct val="100000"/>
+                <a:spcPct val="104000"/>
               </a:lnSpc>
               <a:spcBef>
                 <a:spcPts val="0"/>
@@ -20554,28 +20685,28 @@
               </a:spcAft>
             </a:pPr>
             <a:r>
-              <a:rPr sz="780" b="1" i="0">
+              <a:rPr sz="800" b="1" i="0">
                 <a:solidFill>
                   <a:srgbClr val="333333"/>
                 </a:solidFill>
                 <a:latin typeface="Arial"/>
               </a:rPr>
-              <a:t>•  Manual indenting</a:t>
-            </a:r>
-            <a:r>
-              <a:rPr sz="780" b="0" i="0">
+              <a:t>•  Manual, gut-feel indenting</a:t>
+            </a:r>
+            <a:r>
+              <a:rPr sz="800" b="0" i="0">
                 <a:solidFill>
                   <a:srgbClr val="333333"/>
                 </a:solidFill>
                 <a:latin typeface="Arial"/>
               </a:rPr>
-              <a:t> — blind to attendance, exams &amp; holidays</a:t>
+              <a:t> — blind to attendance swings, exams &amp; holidays</a:t>
             </a:r>
           </a:p>
           <a:p>
             <a:pPr algn="l">
               <a:lnSpc>
-                <a:spcPct val="100000"/>
+                <a:spcPct val="104000"/>
               </a:lnSpc>
               <a:spcBef>
                 <a:spcPts val="0"/>
@@ -20585,16 +20716,16 @@
               </a:spcAft>
             </a:pPr>
             <a:r>
-              <a:rPr sz="780" b="1" i="0">
+              <a:rPr sz="800" b="1" i="0">
                 <a:solidFill>
                   <a:srgbClr val="333333"/>
                 </a:solidFill>
                 <a:latin typeface="Arial"/>
               </a:rPr>
-              <a:t>•  Spot-buying</a:t>
-            </a:r>
-            <a:r>
-              <a:rPr sz="780" b="0" i="0">
+              <a:t>•  Reactive spot-buying</a:t>
+            </a:r>
+            <a:r>
+              <a:rPr sz="800" b="0" i="0">
                 <a:solidFill>
                   <a:srgbClr val="333333"/>
                 </a:solidFill>
@@ -20606,7 +20737,7 @@
           <a:p>
             <a:pPr algn="l">
               <a:lnSpc>
-                <a:spcPct val="100000"/>
+                <a:spcPct val="104000"/>
               </a:lnSpc>
               <a:spcBef>
                 <a:spcPts val="0"/>
@@ -20616,7 +20747,7 @@
               </a:spcAft>
             </a:pPr>
             <a:r>
-              <a:rPr sz="780" b="1" i="0">
+              <a:rPr sz="800" b="1" i="0">
                 <a:solidFill>
                   <a:srgbClr val="333333"/>
                 </a:solidFill>
@@ -20625,48 +20756,48 @@
               <a:t>•  No feedback loop</a:t>
             </a:r>
             <a:r>
-              <a:rPr sz="780" b="0" i="0">
+              <a:rPr sz="800" b="0" i="0">
                 <a:solidFill>
                   <a:srgbClr val="333333"/>
                 </a:solidFill>
                 <a:latin typeface="Arial"/>
               </a:rPr>
-              <a:t> on actual meal uptake</a:t>
+              <a:t> from schools on actual meal uptake</a:t>
             </a:r>
           </a:p>
           <a:p>
             <a:pPr algn="l">
               <a:lnSpc>
-                <a:spcPct val="100000"/>
-              </a:lnSpc>
-              <a:spcBef>
-                <a:spcPts val="0"/>
-              </a:spcBef>
-              <a:spcAft>
-                <a:spcPts val="0"/>
-              </a:spcAft>
-            </a:pPr>
-            <a:r>
-              <a:rPr sz="780" b="1" i="0">
+                <a:spcPct val="104000"/>
+              </a:lnSpc>
+              <a:spcBef>
+                <a:spcPts val="0"/>
+              </a:spcBef>
+              <a:spcAft>
+                <a:spcPts val="0"/>
+              </a:spcAft>
+            </a:pPr>
+            <a:r>
+              <a:rPr sz="800" b="1" i="0">
                 <a:solidFill>
                   <a:srgbClr val="C22310"/>
                 </a:solidFill>
                 <a:latin typeface="Arial"/>
               </a:rPr>
-              <a:t>8–10% over-produced · +12% spot premium [dummy]</a:t>
-            </a:r>
-          </a:p>
-        </p:txBody>
-      </p:sp>
-      <p:sp>
-        <p:nvSpPr>
-          <p:cNvPr id="14" name="Rectangle 13"/>
+              <a:t>Cost today:  8–10% meals over-produced · +12% spot premium [dummy]</a:t>
+            </a:r>
+          </a:p>
+        </p:txBody>
+      </p:sp>
+      <p:sp>
+        <p:nvSpPr>
+          <p:cNvPr id="17" name="Rectangle 16"/>
           <p:cNvSpPr/>
           <p:nvPr/>
         </p:nvSpPr>
         <p:spPr>
           <a:xfrm>
-            <a:off x="5989320" y="1399032"/>
+            <a:off x="5833872" y="1472184"/>
             <a:ext cx="54864" cy="182880"/>
           </a:xfrm>
           <a:prstGeom prst="rect">
@@ -20704,14 +20835,14 @@
       </p:sp>
       <p:sp>
         <p:nvSpPr>
-          <p:cNvPr id="15" name="TextBox 14"/>
+          <p:cNvPr id="18" name="TextBox 17"/>
           <p:cNvSpPr txBox="1"/>
           <p:nvPr/>
         </p:nvSpPr>
         <p:spPr>
           <a:xfrm>
-            <a:off x="6135624" y="1371600"/>
-            <a:ext cx="2642615" cy="256032"/>
+            <a:off x="5971032" y="1444752"/>
+            <a:ext cx="2926080" cy="237744"/>
           </a:xfrm>
           <a:prstGeom prst="rect">
             <a:avLst/>
@@ -20749,20 +20880,158 @@
       </p:sp>
       <p:sp>
         <p:nvSpPr>
-          <p:cNvPr id="16" name="Rectangle 15"/>
+          <p:cNvPr id="19" name="TextBox 18"/>
+          <p:cNvSpPr txBox="1"/>
+          <p:nvPr/>
+        </p:nvSpPr>
+        <p:spPr>
+          <a:xfrm>
+            <a:off x="5852160" y="1792224"/>
+            <a:ext cx="2788920" cy="1691640"/>
+          </a:xfrm>
+          <a:prstGeom prst="rect">
+            <a:avLst/>
+          </a:prstGeom>
+          <a:noFill/>
+        </p:spPr>
+        <p:txBody>
+          <a:bodyPr wrap="square" lIns="0" rIns="0" tIns="0" bIns="0" anchor="t">
+            <a:spAutoFit/>
+          </a:bodyPr>
+          <a:lstStyle/>
+          <a:p>
+            <a:pPr algn="l">
+              <a:lnSpc>
+                <a:spcPct val="104000"/>
+              </a:lnSpc>
+              <a:spcBef>
+                <a:spcPts val="0"/>
+              </a:spcBef>
+              <a:spcAft>
+                <a:spcPts val="300"/>
+              </a:spcAft>
+            </a:pPr>
+            <a:r>
+              <a:rPr sz="800" b="1" i="0">
+                <a:solidFill>
+                  <a:srgbClr val="333333"/>
+                </a:solidFill>
+                <a:latin typeface="Arial"/>
+              </a:rPr>
+              <a:t>•  Static, driver-memory routes</a:t>
+            </a:r>
+            <a:r>
+              <a:rPr sz="800" b="0" i="0">
+                <a:solidFill>
+                  <a:srgbClr val="333333"/>
+                </a:solidFill>
+                <a:latin typeface="Arial"/>
+              </a:rPr>
+              <a:t> — late vans mean children stay hungry all day</a:t>
+            </a:r>
+          </a:p>
+          <a:p>
+            <a:pPr algn="l">
+              <a:lnSpc>
+                <a:spcPct val="104000"/>
+              </a:lnSpc>
+              <a:spcBef>
+                <a:spcPts val="0"/>
+              </a:spcBef>
+              <a:spcAft>
+                <a:spcPts val="300"/>
+              </a:spcAft>
+            </a:pPr>
+            <a:r>
+              <a:rPr sz="800" b="1" i="0">
+                <a:solidFill>
+                  <a:srgbClr val="333333"/>
+                </a:solidFill>
+                <a:latin typeface="Arial"/>
+              </a:rPr>
+              <a:t>•  Untracked vessels &amp; utensils</a:t>
+            </a:r>
+            <a:r>
+              <a:rPr sz="800" b="0" i="0">
+                <a:solidFill>
+                  <a:srgbClr val="333333"/>
+                </a:solidFill>
+                <a:latin typeface="Arial"/>
+              </a:rPr>
+              <a:t>; adulteration &amp; diversion risk en route</a:t>
+            </a:r>
+          </a:p>
+          <a:p>
+            <a:pPr algn="l">
+              <a:lnSpc>
+                <a:spcPct val="104000"/>
+              </a:lnSpc>
+              <a:spcBef>
+                <a:spcPts val="0"/>
+              </a:spcBef>
+              <a:spcAft>
+                <a:spcPts val="300"/>
+              </a:spcAft>
+            </a:pPr>
+            <a:r>
+              <a:rPr sz="800" b="1" i="0">
+                <a:solidFill>
+                  <a:srgbClr val="333333"/>
+                </a:solidFill>
+                <a:latin typeface="Arial"/>
+              </a:rPr>
+              <a:t>•  No proof-of-delivery</a:t>
+            </a:r>
+            <a:r>
+              <a:rPr sz="800" b="0" i="0">
+                <a:solidFill>
+                  <a:srgbClr val="333333"/>
+                </a:solidFill>
+                <a:latin typeface="Arial"/>
+              </a:rPr>
+              <a:t> — school shortfall disputes go unresolved</a:t>
+            </a:r>
+          </a:p>
+          <a:p>
+            <a:pPr algn="l">
+              <a:lnSpc>
+                <a:spcPct val="104000"/>
+              </a:lnSpc>
+              <a:spcBef>
+                <a:spcPts val="0"/>
+              </a:spcBef>
+              <a:spcAft>
+                <a:spcPts val="0"/>
+              </a:spcAft>
+            </a:pPr>
+            <a:r>
+              <a:rPr sz="800" b="1" i="0">
+                <a:solidFill>
+                  <a:srgbClr val="C22310"/>
+                </a:solidFill>
+                <a:latin typeface="Arial"/>
+              </a:rPr>
+              <a:t>Cost today:  6.2% miss the lunch window · $35k/yr shrinkage [dummy]</a:t>
+            </a:r>
+          </a:p>
+        </p:txBody>
+      </p:sp>
+      <p:sp>
+        <p:nvSpPr>
+          <p:cNvPr id="20" name="Rectangle 19"/>
           <p:cNvSpPr/>
           <p:nvPr/>
         </p:nvSpPr>
         <p:spPr>
           <a:xfrm>
-            <a:off x="5989320" y="1645920"/>
-            <a:ext cx="2788920" cy="10972"/>
+            <a:off x="502920" y="3813048"/>
+            <a:ext cx="54864" cy="182880"/>
           </a:xfrm>
           <a:prstGeom prst="rect">
             <a:avLst/>
           </a:prstGeom>
           <a:solidFill>
-            <a:srgbClr val="BFBFBF"/>
+            <a:srgbClr val="1B3E6E"/>
           </a:solidFill>
           <a:ln>
             <a:noFill/>
@@ -20793,14 +21062,14 @@
       </p:sp>
       <p:sp>
         <p:nvSpPr>
-          <p:cNvPr id="17" name="TextBox 16"/>
+          <p:cNvPr id="21" name="TextBox 20"/>
           <p:cNvSpPr txBox="1"/>
           <p:nvPr/>
         </p:nvSpPr>
         <p:spPr>
           <a:xfrm>
-            <a:off x="5989320" y="1737360"/>
-            <a:ext cx="2788920" cy="1188720"/>
+            <a:off x="640080" y="3785615"/>
+            <a:ext cx="2926080" cy="237744"/>
           </a:xfrm>
           <a:prstGeom prst="rect">
             <a:avLst/>
@@ -20821,32 +21090,388 @@
                 <a:spcPts val="0"/>
               </a:spcBef>
               <a:spcAft>
+                <a:spcPts val="0"/>
+              </a:spcAft>
+            </a:pPr>
+            <a:r>
+              <a:rPr sz="1050" b="1" i="0">
+                <a:solidFill>
+                  <a:srgbClr val="1B3E6E"/>
+                </a:solidFill>
+                <a:latin typeface="Arial"/>
+              </a:rPr>
+              <a:t>SOLUTION 1 — “Annapurna AI” · $150k</a:t>
+            </a:r>
+          </a:p>
+        </p:txBody>
+      </p:sp>
+      <p:sp>
+        <p:nvSpPr>
+          <p:cNvPr id="22" name="TextBox 21"/>
+          <p:cNvSpPr txBox="1"/>
+          <p:nvPr/>
+        </p:nvSpPr>
+        <p:spPr>
+          <a:xfrm>
+            <a:off x="530352" y="4133087"/>
+            <a:ext cx="2788920" cy="1691640"/>
+          </a:xfrm>
+          <a:prstGeom prst="rect">
+            <a:avLst/>
+          </a:prstGeom>
+          <a:noFill/>
+        </p:spPr>
+        <p:txBody>
+          <a:bodyPr wrap="square" lIns="0" rIns="0" tIns="0" bIns="0" anchor="t">
+            <a:spAutoFit/>
+          </a:bodyPr>
+          <a:lstStyle/>
+          <a:p>
+            <a:pPr algn="l">
+              <a:lnSpc>
+                <a:spcPct val="104000"/>
+              </a:lnSpc>
+              <a:spcBef>
+                <a:spcPts val="0"/>
+              </a:spcBef>
+              <a:spcAft>
                 <a:spcPts val="300"/>
               </a:spcAft>
             </a:pPr>
             <a:r>
+              <a:rPr sz="800" b="1" i="0">
+                <a:solidFill>
+                  <a:srgbClr val="1B3E6E"/>
+                </a:solidFill>
+                <a:latin typeface="Arial"/>
+              </a:rPr>
+              <a:t>What: </a:t>
+            </a:r>
+            <a:r>
+              <a:rPr sz="800" b="0" i="0">
+                <a:solidFill>
+                  <a:srgbClr val="333333"/>
+                </a:solidFill>
+                <a:latin typeface="Arial"/>
+              </a:rPr>
+              <a:t>ML demand-forecasting &amp; procurement planning across all 68 kitchens</a:t>
+            </a:r>
+          </a:p>
+          <a:p>
+            <a:pPr algn="l">
+              <a:lnSpc>
+                <a:spcPct val="104000"/>
+              </a:lnSpc>
+              <a:spcBef>
+                <a:spcPts val="0"/>
+              </a:spcBef>
+              <a:spcAft>
+                <a:spcPts val="300"/>
+              </a:spcAft>
+            </a:pPr>
+            <a:r>
+              <a:rPr sz="800" b="1" i="0">
+                <a:solidFill>
+                  <a:srgbClr val="1B3E6E"/>
+                </a:solidFill>
+                <a:latin typeface="Arial"/>
+              </a:rPr>
+              <a:t>How: </a:t>
+            </a:r>
+            <a:r>
+              <a:rPr sz="800" b="0" i="0">
+                <a:solidFill>
+                  <a:srgbClr val="333333"/>
+                </a:solidFill>
+                <a:latin typeface="Arial"/>
+              </a:rPr>
+              <a:t>predicts school-level attendance; auto-generates daily indents &amp; forward buying schedules</a:t>
+            </a:r>
+          </a:p>
+          <a:p>
+            <a:pPr algn="l">
+              <a:lnSpc>
+                <a:spcPct val="104000"/>
+              </a:lnSpc>
+              <a:spcBef>
+                <a:spcPts val="0"/>
+              </a:spcBef>
+              <a:spcAft>
+                <a:spcPts val="300"/>
+              </a:spcAft>
+            </a:pPr>
+            <a:r>
               <a:rPr sz="780" b="1" i="0">
                 <a:solidFill>
+                  <a:srgbClr val="727375"/>
+                </a:solidFill>
+                <a:latin typeface="Arial"/>
+              </a:rPr>
+              <a:t>Rollout: </a:t>
+            </a:r>
+            <a:r>
+              <a:rPr sz="780" b="0" i="0">
+                <a:solidFill>
+                  <a:srgbClr val="727375"/>
+                </a:solidFill>
+                <a:latin typeface="Arial"/>
+              </a:rPr>
+              <a:t>3-kitchen pilot (Mo 1–4) → all 68 kitchens by Mo 12</a:t>
+            </a:r>
+          </a:p>
+          <a:p>
+            <a:pPr algn="l">
+              <a:lnSpc>
+                <a:spcPct val="104000"/>
+              </a:lnSpc>
+              <a:spcBef>
+                <a:spcPts val="0"/>
+              </a:spcBef>
+              <a:spcAft>
+                <a:spcPts val="300"/>
+              </a:spcAft>
+            </a:pPr>
+            <a:r>
+              <a:rPr sz="819" b="1" i="0">
+                <a:solidFill>
+                  <a:srgbClr val="398025"/>
+                </a:solidFill>
+                <a:latin typeface="Arial"/>
+              </a:rPr>
+              <a:t>→  ~70% less food waste</a:t>
+            </a:r>
+          </a:p>
+          <a:p>
+            <a:pPr algn="l">
+              <a:lnSpc>
+                <a:spcPct val="104000"/>
+              </a:lnSpc>
+              <a:spcBef>
+                <a:spcPts val="0"/>
+              </a:spcBef>
+              <a:spcAft>
+                <a:spcPts val="0"/>
+              </a:spcAft>
+            </a:pPr>
+            <a:r>
+              <a:rPr sz="819" b="1" i="0">
+                <a:solidFill>
+                  <a:srgbClr val="398025"/>
+                </a:solidFill>
+                <a:latin typeface="Arial"/>
+              </a:rPr>
+              <a:t>→  est. $230k saved / yr [dummy]</a:t>
+            </a:r>
+          </a:p>
+        </p:txBody>
+      </p:sp>
+      <p:sp>
+        <p:nvSpPr>
+          <p:cNvPr id="23" name="Rectangle 22"/>
+          <p:cNvSpPr/>
+          <p:nvPr/>
+        </p:nvSpPr>
+        <p:spPr>
+          <a:xfrm>
+            <a:off x="5833872" y="3813048"/>
+            <a:ext cx="54864" cy="182880"/>
+          </a:xfrm>
+          <a:prstGeom prst="rect">
+            <a:avLst/>
+          </a:prstGeom>
+          <a:solidFill>
+            <a:srgbClr val="398025"/>
+          </a:solidFill>
+          <a:ln>
+            <a:noFill/>
+          </a:ln>
+          <a:effectLst/>
+        </p:spPr>
+        <p:style>
+          <a:lnRef idx="1">
+            <a:schemeClr val="accent1"/>
+          </a:lnRef>
+          <a:fillRef idx="3">
+            <a:schemeClr val="accent1"/>
+          </a:fillRef>
+          <a:effectRef idx="2">
+            <a:schemeClr val="accent1"/>
+          </a:effectRef>
+          <a:fontRef idx="minor">
+            <a:schemeClr val="lt1"/>
+          </a:fontRef>
+        </p:style>
+        <p:txBody>
+          <a:bodyPr rtlCol="0" anchor="ctr"/>
+          <a:lstStyle/>
+          <a:p>
+            <a:pPr algn="ctr"/>
+          </a:p>
+        </p:txBody>
+      </p:sp>
+      <p:sp>
+        <p:nvSpPr>
+          <p:cNvPr id="24" name="TextBox 23"/>
+          <p:cNvSpPr txBox="1"/>
+          <p:nvPr/>
+        </p:nvSpPr>
+        <p:spPr>
+          <a:xfrm>
+            <a:off x="5971032" y="3785615"/>
+            <a:ext cx="2926080" cy="237744"/>
+          </a:xfrm>
+          <a:prstGeom prst="rect">
+            <a:avLst/>
+          </a:prstGeom>
+          <a:noFill/>
+        </p:spPr>
+        <p:txBody>
+          <a:bodyPr wrap="square" lIns="0" rIns="0" tIns="0" bIns="0" anchor="t">
+            <a:spAutoFit/>
+          </a:bodyPr>
+          <a:lstStyle/>
+          <a:p>
+            <a:pPr algn="l">
+              <a:lnSpc>
+                <a:spcPct val="100000"/>
+              </a:lnSpc>
+              <a:spcBef>
+                <a:spcPts val="0"/>
+              </a:spcBef>
+              <a:spcAft>
+                <a:spcPts val="0"/>
+              </a:spcAft>
+            </a:pPr>
+            <a:r>
+              <a:rPr sz="1050" b="1" i="0">
+                <a:solidFill>
+                  <a:srgbClr val="1B3E6E"/>
+                </a:solidFill>
+                <a:latin typeface="Arial"/>
+              </a:rPr>
+              <a:t>SOLUTION 2 — “Last-Mile Shield” · $100k</a:t>
+            </a:r>
+          </a:p>
+        </p:txBody>
+      </p:sp>
+      <p:sp>
+        <p:nvSpPr>
+          <p:cNvPr id="25" name="TextBox 24"/>
+          <p:cNvSpPr txBox="1"/>
+          <p:nvPr/>
+        </p:nvSpPr>
+        <p:spPr>
+          <a:xfrm>
+            <a:off x="5852160" y="4133087"/>
+            <a:ext cx="2788920" cy="1691640"/>
+          </a:xfrm>
+          <a:prstGeom prst="rect">
+            <a:avLst/>
+          </a:prstGeom>
+          <a:noFill/>
+        </p:spPr>
+        <p:txBody>
+          <a:bodyPr wrap="square" lIns="0" rIns="0" tIns="0" bIns="0" anchor="t">
+            <a:spAutoFit/>
+          </a:bodyPr>
+          <a:lstStyle/>
+          <a:p>
+            <a:pPr algn="l">
+              <a:lnSpc>
+                <a:spcPct val="104000"/>
+              </a:lnSpc>
+              <a:spcBef>
+                <a:spcPts val="0"/>
+              </a:spcBef>
+              <a:spcAft>
+                <a:spcPts val="300"/>
+              </a:spcAft>
+            </a:pPr>
+            <a:r>
+              <a:rPr sz="800" b="1" i="0">
+                <a:solidFill>
+                  <a:srgbClr val="1B3E6E"/>
+                </a:solidFill>
+                <a:latin typeface="Arial"/>
+              </a:rPr>
+              <a:t>What: </a:t>
+            </a:r>
+            <a:r>
+              <a:rPr sz="800" b="0" i="0">
+                <a:solidFill>
                   <a:srgbClr val="333333"/>
                 </a:solidFill>
                 <a:latin typeface="Arial"/>
               </a:rPr>
-              <a:t>•  Static, driver-memory routes</a:t>
+              <a:t>AI route optimisation + telematics (GPS, cameras, RFID) + geofenced smart locks</a:t>
+            </a:r>
+          </a:p>
+          <a:p>
+            <a:pPr algn="l">
+              <a:lnSpc>
+                <a:spcPct val="104000"/>
+              </a:lnSpc>
+              <a:spcBef>
+                <a:spcPts val="0"/>
+              </a:spcBef>
+              <a:spcAft>
+                <a:spcPts val="300"/>
+              </a:spcAft>
+            </a:pPr>
+            <a:r>
+              <a:rPr sz="800" b="1" i="0">
+                <a:solidFill>
+                  <a:srgbClr val="1B3E6E"/>
+                </a:solidFill>
+                <a:latin typeface="Arial"/>
+              </a:rPr>
+              <a:t>How: </a:t>
+            </a:r>
+            <a:r>
+              <a:rPr sz="800" b="0" i="0">
+                <a:solidFill>
+                  <a:srgbClr val="333333"/>
+                </a:solidFill>
+                <a:latin typeface="Arial"/>
+              </a:rPr>
+              <a:t>drops sequenced to each school's lunch bell; doors unlock only near a registered school</a:t>
+            </a:r>
+          </a:p>
+          <a:p>
+            <a:pPr algn="l">
+              <a:lnSpc>
+                <a:spcPct val="104000"/>
+              </a:lnSpc>
+              <a:spcBef>
+                <a:spcPts val="0"/>
+              </a:spcBef>
+              <a:spcAft>
+                <a:spcPts val="300"/>
+              </a:spcAft>
+            </a:pPr>
+            <a:r>
+              <a:rPr sz="780" b="1" i="0">
+                <a:solidFill>
+                  <a:srgbClr val="727375"/>
+                </a:solidFill>
+                <a:latin typeface="Arial"/>
+              </a:rPr>
+              <a:t>Bonus: </a:t>
             </a:r>
             <a:r>
               <a:rPr sz="780" b="0" i="0">
                 <a:solidFill>
-                  <a:srgbClr val="333333"/>
-                </a:solidFill>
-                <a:latin typeface="Arial"/>
-              </a:rPr>
-              <a:t> — late vans mean children stay hungry all day</a:t>
+                  <a:srgbClr val="727375"/>
+                </a:solidFill>
+                <a:latin typeface="Arial"/>
+              </a:rPr>
+              <a:t>3 vans freed per hub redeployed to reach new schools</a:t>
             </a:r>
           </a:p>
           <a:p>
             <a:pPr algn="l">
               <a:lnSpc>
-                <a:spcPct val="100000"/>
+                <a:spcPct val="104000"/>
               </a:lnSpc>
               <a:spcBef>
                 <a:spcPts val="0"/>
@@ -20856,90 +21481,96 @@
               </a:spcAft>
             </a:pPr>
             <a:r>
-              <a:rPr sz="780" b="1" i="0">
-                <a:solidFill>
-                  <a:srgbClr val="333333"/>
-                </a:solidFill>
-                <a:latin typeface="Arial"/>
-              </a:rPr>
-              <a:t>•  Untracked vessels</a:t>
-            </a:r>
-            <a:r>
-              <a:rPr sz="780" b="0" i="0">
-                <a:solidFill>
-                  <a:srgbClr val="333333"/>
-                </a:solidFill>
-                <a:latin typeface="Arial"/>
-              </a:rPr>
-              <a:t>; adulteration &amp; diversion risk en route</a:t>
+              <a:rPr sz="819" b="1" i="0">
+                <a:solidFill>
+                  <a:srgbClr val="398025"/>
+                </a:solidFill>
+                <a:latin typeface="Arial"/>
+              </a:rPr>
+              <a:t>→  99%+ on-time · −18% fleet km</a:t>
             </a:r>
           </a:p>
           <a:p>
             <a:pPr algn="l">
               <a:lnSpc>
-                <a:spcPct val="100000"/>
-              </a:lnSpc>
-              <a:spcBef>
-                <a:spcPts val="0"/>
-              </a:spcBef>
-              <a:spcAft>
-                <a:spcPts val="300"/>
-              </a:spcAft>
-            </a:pPr>
-            <a:r>
-              <a:rPr sz="780" b="1" i="0">
-                <a:solidFill>
-                  <a:srgbClr val="333333"/>
-                </a:solidFill>
-                <a:latin typeface="Arial"/>
-              </a:rPr>
-              <a:t>•  No proof-of-delivery</a:t>
-            </a:r>
-            <a:r>
-              <a:rPr sz="780" b="0" i="0">
-                <a:solidFill>
-                  <a:srgbClr val="333333"/>
-                </a:solidFill>
-                <a:latin typeface="Arial"/>
-              </a:rPr>
-              <a:t> — disputes go unresolved</a:t>
-            </a:r>
-          </a:p>
-          <a:p>
-            <a:pPr algn="l">
-              <a:lnSpc>
-                <a:spcPct val="100000"/>
-              </a:lnSpc>
-              <a:spcBef>
-                <a:spcPts val="0"/>
-              </a:spcBef>
-              <a:spcAft>
-                <a:spcPts val="0"/>
-              </a:spcAft>
-            </a:pPr>
-            <a:r>
-              <a:rPr sz="780" b="1" i="0">
-                <a:solidFill>
-                  <a:srgbClr val="C22310"/>
-                </a:solidFill>
-                <a:latin typeface="Arial"/>
-              </a:rPr>
-              <a:t>6.2% miss lunch window · $35k/yr shrinkage [dummy]</a:t>
-            </a:r>
+                <a:spcPct val="104000"/>
+              </a:lnSpc>
+              <a:spcBef>
+                <a:spcPts val="0"/>
+              </a:spcBef>
+              <a:spcAft>
+                <a:spcPts val="0"/>
+              </a:spcAft>
+            </a:pPr>
+            <a:r>
+              <a:rPr sz="819" b="1" i="0">
+                <a:solidFill>
+                  <a:srgbClr val="398025"/>
+                </a:solidFill>
+                <a:latin typeface="Arial"/>
+              </a:rPr>
+              <a:t>→  est. $80k saved / yr [dummy]</a:t>
+            </a:r>
+          </a:p>
+        </p:txBody>
+      </p:sp>
+      <p:sp>
+        <p:nvSpPr>
+          <p:cNvPr id="26" name="Oval 25"/>
+          <p:cNvSpPr/>
+          <p:nvPr/>
+        </p:nvSpPr>
+        <p:spPr>
+          <a:xfrm>
+            <a:off x="3337560" y="2386584"/>
+            <a:ext cx="2468880" cy="2468880"/>
+          </a:xfrm>
+          <a:prstGeom prst="ellipse">
+            <a:avLst/>
+          </a:prstGeom>
+          <a:solidFill>
+            <a:srgbClr val="FFFFFF"/>
+          </a:solidFill>
+          <a:ln w="12700">
+            <a:solidFill>
+              <a:srgbClr val="BFBFBF"/>
+            </a:solidFill>
+          </a:ln>
+          <a:effectLst/>
+        </p:spPr>
+        <p:style>
+          <a:lnRef idx="1">
+            <a:schemeClr val="accent1"/>
+          </a:lnRef>
+          <a:fillRef idx="3">
+            <a:schemeClr val="accent1"/>
+          </a:fillRef>
+          <a:effectRef idx="2">
+            <a:schemeClr val="accent1"/>
+          </a:effectRef>
+          <a:fontRef idx="minor">
+            <a:schemeClr val="lt1"/>
+          </a:fontRef>
+        </p:style>
+        <p:txBody>
+          <a:bodyPr rtlCol="0" anchor="ctr"/>
+          <a:lstStyle/>
+          <a:p>
+            <a:pPr algn="ctr"/>
           </a:p>
         </p:txBody>
       </p:sp>
       <p:graphicFrame>
         <p:nvGraphicFramePr>
-          <p:cNvPr id="18" name="Chart 17"/>
+          <p:cNvPr id="27" name="Chart 26"/>
           <p:cNvGraphicFramePr>
             <a:graphicFrameLocks noGrp="1"/>
           </p:cNvGraphicFramePr>
           <p:nvPr/>
         </p:nvGraphicFramePr>
         <p:xfrm>
-          <a:off x="3273552" y="2331720"/>
-          <a:ext cx="2606040" cy="2240280"/>
+          <a:off x="3406140" y="2455164"/>
+          <a:ext cx="2331720" cy="2331720"/>
         </p:xfrm>
         <a:graphic>
           <a:graphicData uri="http://schemas.openxmlformats.org/drawingml/2006/chart">
@@ -20949,245 +21580,26 @@
       </p:graphicFrame>
       <p:sp>
         <p:nvSpPr>
-          <p:cNvPr id="19" name="TextBox 18"/>
-          <p:cNvSpPr txBox="1"/>
-          <p:nvPr/>
-        </p:nvSpPr>
-        <p:spPr>
-          <a:xfrm>
-            <a:off x="3273552" y="4626864"/>
-            <a:ext cx="2606040" cy="402336"/>
-          </a:xfrm>
-          <a:prstGeom prst="rect">
-            <a:avLst/>
-          </a:prstGeom>
-          <a:noFill/>
-        </p:spPr>
-        <p:txBody>
-          <a:bodyPr wrap="square" lIns="0" rIns="0" tIns="0" bIns="0" anchor="t">
-            <a:spAutoFit/>
-          </a:bodyPr>
-          <a:lstStyle/>
-          <a:p>
-            <a:pPr algn="ctr">
-              <a:lnSpc>
-                <a:spcPct val="100000"/>
-              </a:lnSpc>
-              <a:spcBef>
-                <a:spcPts val="0"/>
-              </a:spcBef>
-              <a:spcAft>
-                <a:spcPts val="100"/>
-              </a:spcAft>
-            </a:pPr>
-            <a:r>
-              <a:rPr sz="950" b="1" i="0">
-                <a:solidFill>
-                  <a:srgbClr val="1B3E6E"/>
-                </a:solidFill>
-                <a:latin typeface="Arial"/>
-              </a:rPr>
-              <a:t>THE $250k GRANT</a:t>
-            </a:r>
-          </a:p>
-          <a:p>
-            <a:pPr algn="ctr">
-              <a:lnSpc>
-                <a:spcPct val="100000"/>
-              </a:lnSpc>
-              <a:spcBef>
-                <a:spcPts val="0"/>
-              </a:spcBef>
-              <a:spcAft>
-                <a:spcPts val="0"/>
-              </a:spcAft>
-            </a:pPr>
-            <a:r>
-              <a:rPr sz="720" b="0" i="1">
-                <a:solidFill>
-                  <a:srgbClr val="727375"/>
-                </a:solidFill>
-                <a:latin typeface="Arial"/>
-              </a:rPr>
-              <a:t>60 / 40 — weighted to the costlier gap</a:t>
-            </a:r>
-          </a:p>
-        </p:txBody>
-      </p:sp>
-      <p:cxnSp>
-        <p:nvCxnSpPr>
-          <p:cNvPr id="20" name="Connector 19"/>
-          <p:cNvCxnSpPr/>
-          <p:nvPr/>
-        </p:nvCxnSpPr>
-        <p:spPr>
-          <a:xfrm>
-            <a:off x="3246120" y="2331720"/>
-            <a:ext cx="548640" cy="548640"/>
-          </a:xfrm>
-          <a:prstGeom prst="curvedConnector3">
-            <a:avLst/>
-          </a:prstGeom>
-          <a:ln w="13970">
-            <a:solidFill>
-              <a:srgbClr val="C22310"/>
-            </a:solidFill>
-            <a:prstDash val="sysDash"/>
-            <a:tailEnd type="triangle" w="med" len="med"/>
-          </a:ln>
-          <a:effectLst/>
-        </p:spPr>
-        <p:style>
-          <a:lnRef idx="2">
-            <a:schemeClr val="accent1"/>
-          </a:lnRef>
-          <a:fillRef idx="0">
-            <a:schemeClr val="accent1"/>
-          </a:fillRef>
-          <a:effectRef idx="1">
-            <a:schemeClr val="accent1"/>
-          </a:effectRef>
-          <a:fontRef idx="minor">
-            <a:schemeClr val="tx1"/>
-          </a:fontRef>
-        </p:style>
-      </p:cxnSp>
-      <p:cxnSp>
-        <p:nvCxnSpPr>
-          <p:cNvPr id="21" name="Connector 20"/>
-          <p:cNvCxnSpPr/>
-          <p:nvPr/>
-        </p:nvCxnSpPr>
-        <p:spPr>
-          <a:xfrm flipH="1">
-            <a:off x="5349240" y="2331720"/>
-            <a:ext cx="548640" cy="548640"/>
-          </a:xfrm>
-          <a:prstGeom prst="curvedConnector3">
-            <a:avLst/>
-          </a:prstGeom>
-          <a:ln w="13970">
-            <a:solidFill>
-              <a:srgbClr val="C22310"/>
-            </a:solidFill>
-            <a:prstDash val="sysDash"/>
-            <a:tailEnd type="triangle" w="med" len="med"/>
-          </a:ln>
-          <a:effectLst/>
-        </p:spPr>
-        <p:style>
-          <a:lnRef idx="2">
-            <a:schemeClr val="accent1"/>
-          </a:lnRef>
-          <a:fillRef idx="0">
-            <a:schemeClr val="accent1"/>
-          </a:fillRef>
-          <a:effectRef idx="1">
-            <a:schemeClr val="accent1"/>
-          </a:effectRef>
-          <a:fontRef idx="minor">
-            <a:schemeClr val="tx1"/>
-          </a:fontRef>
-        </p:style>
-      </p:cxnSp>
-      <p:cxnSp>
-        <p:nvCxnSpPr>
-          <p:cNvPr id="22" name="Connector 21"/>
-          <p:cNvCxnSpPr/>
-          <p:nvPr/>
-        </p:nvCxnSpPr>
-        <p:spPr>
-          <a:xfrm flipH="1">
-            <a:off x="3209544" y="4160520"/>
-            <a:ext cx="539495" cy="457200"/>
-          </a:xfrm>
-          <a:prstGeom prst="curvedConnector3">
-            <a:avLst/>
-          </a:prstGeom>
-          <a:ln w="13970">
-            <a:solidFill>
-              <a:srgbClr val="1B3E6E"/>
-            </a:solidFill>
-            <a:prstDash val="sysDash"/>
-            <a:tailEnd type="triangle" w="med" len="med"/>
-          </a:ln>
-          <a:effectLst/>
-        </p:spPr>
-        <p:style>
-          <a:lnRef idx="2">
-            <a:schemeClr val="accent1"/>
-          </a:lnRef>
-          <a:fillRef idx="0">
-            <a:schemeClr val="accent1"/>
-          </a:fillRef>
-          <a:effectRef idx="1">
-            <a:schemeClr val="accent1"/>
-          </a:effectRef>
-          <a:fontRef idx="minor">
-            <a:schemeClr val="tx1"/>
-          </a:fontRef>
-        </p:style>
-      </p:cxnSp>
-      <p:cxnSp>
-        <p:nvCxnSpPr>
-          <p:cNvPr id="23" name="Connector 22"/>
-          <p:cNvCxnSpPr/>
-          <p:nvPr/>
-        </p:nvCxnSpPr>
-        <p:spPr>
-          <a:xfrm>
-            <a:off x="5394960" y="4160520"/>
-            <a:ext cx="539496" cy="457200"/>
-          </a:xfrm>
-          <a:prstGeom prst="curvedConnector3">
-            <a:avLst/>
-          </a:prstGeom>
-          <a:ln w="13970">
-            <a:solidFill>
-              <a:srgbClr val="398025"/>
-            </a:solidFill>
-            <a:prstDash val="sysDash"/>
-            <a:tailEnd type="triangle" w="med" len="med"/>
-          </a:ln>
-          <a:effectLst/>
-        </p:spPr>
-        <p:style>
-          <a:lnRef idx="2">
-            <a:schemeClr val="accent1"/>
-          </a:lnRef>
-          <a:fillRef idx="0">
-            <a:schemeClr val="accent1"/>
-          </a:fillRef>
-          <a:effectRef idx="1">
-            <a:schemeClr val="accent1"/>
-          </a:effectRef>
-          <a:fontRef idx="minor">
-            <a:schemeClr val="tx1"/>
-          </a:fontRef>
-        </p:style>
-      </p:cxnSp>
-      <p:sp>
-        <p:nvSpPr>
-          <p:cNvPr id="24" name="Rounded Rectangle 23"/>
+          <p:cNvPr id="28" name="Rounded Rectangle 27"/>
           <p:cNvSpPr/>
           <p:nvPr/>
         </p:nvSpPr>
         <p:spPr>
           <a:xfrm>
-            <a:off x="365760" y="3931920"/>
-            <a:ext cx="2788920" cy="1783080"/>
+            <a:off x="3520440" y="4837176"/>
+            <a:ext cx="2103120" cy="365760"/>
           </a:xfrm>
           <a:prstGeom prst="roundRect">
             <a:avLst>
-              <a:gd name="adj" fmla="val 5000"/>
+              <a:gd name="adj" fmla="val 50000"/>
             </a:avLst>
           </a:prstGeom>
           <a:solidFill>
-            <a:srgbClr val="EEF3F9"/>
+            <a:srgbClr val="FFFFFF"/>
           </a:solidFill>
-          <a:ln w="12700">
+          <a:ln w="11430">
             <a:solidFill>
-              <a:srgbClr val="1B3E6E"/>
+              <a:srgbClr val="BFBFBF"/>
             </a:solidFill>
           </a:ln>
           <a:effectLst/>
@@ -21216,14 +21628,14 @@
       </p:sp>
       <p:sp>
         <p:nvSpPr>
-          <p:cNvPr id="25" name="TextBox 24"/>
+          <p:cNvPr id="29" name="TextBox 28"/>
           <p:cNvSpPr txBox="1"/>
           <p:nvPr/>
         </p:nvSpPr>
         <p:spPr>
           <a:xfrm>
-            <a:off x="484632" y="4014215"/>
-            <a:ext cx="2551176" cy="1645920"/>
+            <a:off x="3520440" y="4860036"/>
+            <a:ext cx="2103120" cy="320040"/>
           </a:xfrm>
           <a:prstGeom prst="rect">
             <a:avLst/>
@@ -21231,293 +21643,52 @@
           <a:noFill/>
         </p:spPr>
         <p:txBody>
-          <a:bodyPr wrap="square" lIns="0" rIns="0" tIns="0" bIns="0" anchor="t">
+          <a:bodyPr wrap="square" lIns="0" rIns="0" tIns="0" bIns="0" anchor="ctr">
             <a:spAutoFit/>
           </a:bodyPr>
           <a:lstStyle/>
           <a:p>
-            <a:pPr algn="l">
-              <a:lnSpc>
-                <a:spcPct val="95000"/>
-              </a:lnSpc>
-              <a:spcBef>
-                <a:spcPts val="0"/>
-              </a:spcBef>
-              <a:spcAft>
-                <a:spcPts val="300"/>
-              </a:spcAft>
-            </a:pPr>
-            <a:r>
-              <a:rPr sz="950" b="1" i="0">
+            <a:pPr algn="ctr">
+              <a:lnSpc>
+                <a:spcPct val="100000"/>
+              </a:lnSpc>
+              <a:spcBef>
+                <a:spcPts val="0"/>
+              </a:spcBef>
+              <a:spcAft>
+                <a:spcPts val="0"/>
+              </a:spcAft>
+            </a:pPr>
+            <a:r>
+              <a:rPr sz="850" b="1" i="0">
                 <a:solidFill>
                   <a:srgbClr val="1B3E6E"/>
                 </a:solidFill>
                 <a:latin typeface="Arial"/>
               </a:rPr>
-              <a:t>SOLUTION 1
-“Annapurna AI” · $150k</a:t>
-            </a:r>
-          </a:p>
-          <a:p>
-            <a:pPr algn="l">
-              <a:lnSpc>
-                <a:spcPct val="104000"/>
-              </a:lnSpc>
-              <a:spcBef>
-                <a:spcPts val="0"/>
-              </a:spcBef>
-              <a:spcAft>
-                <a:spcPts val="300"/>
-              </a:spcAft>
-            </a:pPr>
-            <a:r>
-              <a:rPr sz="819" b="1" i="0">
-                <a:solidFill>
-                  <a:srgbClr val="1B3E6E"/>
-                </a:solidFill>
-                <a:latin typeface="Arial"/>
-              </a:rPr>
-              <a:t>What: </a:t>
-            </a:r>
-            <a:r>
-              <a:rPr sz="819" b="0" i="0">
-                <a:solidFill>
-                  <a:srgbClr val="333333"/>
-                </a:solidFill>
-                <a:latin typeface="Arial"/>
-              </a:rPr>
-              <a:t>ML demand-forecasting &amp; procurement planning for all 68 kitchens</a:t>
-            </a:r>
-          </a:p>
-          <a:p>
-            <a:pPr algn="l">
-              <a:lnSpc>
-                <a:spcPct val="104000"/>
-              </a:lnSpc>
-              <a:spcBef>
-                <a:spcPts val="0"/>
-              </a:spcBef>
-              <a:spcAft>
-                <a:spcPts val="300"/>
-              </a:spcAft>
-            </a:pPr>
-            <a:r>
-              <a:rPr sz="819" b="1" i="0">
-                <a:solidFill>
-                  <a:srgbClr val="1B3E6E"/>
-                </a:solidFill>
-                <a:latin typeface="Arial"/>
-              </a:rPr>
-              <a:t>How: </a:t>
-            </a:r>
-            <a:r>
-              <a:rPr sz="819" b="0" i="0">
-                <a:solidFill>
-                  <a:srgbClr val="333333"/>
-                </a:solidFill>
-                <a:latin typeface="Arial"/>
-              </a:rPr>
-              <a:t>predicts school-level attendance; auto-generates indents &amp; buying schedules</a:t>
-            </a:r>
-          </a:p>
-          <a:p>
-            <a:pPr algn="l">
-              <a:lnSpc>
-                <a:spcPct val="105000"/>
-              </a:lnSpc>
-              <a:spcBef>
-                <a:spcPts val="0"/>
-              </a:spcBef>
-              <a:spcAft>
-                <a:spcPts val="0"/>
-              </a:spcAft>
-            </a:pPr>
-            <a:r>
-              <a:rPr sz="830" b="1" i="0">
-                <a:solidFill>
-                  <a:srgbClr val="398025"/>
-                </a:solidFill>
-                <a:latin typeface="Arial"/>
-              </a:rPr>
-              <a:t>→ ~70% less waste  ·  est. $230k saved / yr [dummy]</a:t>
-            </a:r>
-          </a:p>
-        </p:txBody>
-      </p:sp>
-      <p:sp>
-        <p:nvSpPr>
-          <p:cNvPr id="26" name="Rounded Rectangle 25"/>
-          <p:cNvSpPr/>
-          <p:nvPr/>
-        </p:nvSpPr>
-        <p:spPr>
-          <a:xfrm>
-            <a:off x="5989320" y="3931920"/>
-            <a:ext cx="2788920" cy="1783080"/>
-          </a:xfrm>
-          <a:prstGeom prst="roundRect">
-            <a:avLst>
-              <a:gd name="adj" fmla="val 5000"/>
-            </a:avLst>
-          </a:prstGeom>
-          <a:solidFill>
-            <a:srgbClr val="EAF3E6"/>
-          </a:solidFill>
-          <a:ln w="12700">
-            <a:solidFill>
-              <a:srgbClr val="398025"/>
-            </a:solidFill>
-          </a:ln>
-          <a:effectLst/>
-        </p:spPr>
-        <p:style>
-          <a:lnRef idx="1">
-            <a:schemeClr val="accent1"/>
-          </a:lnRef>
-          <a:fillRef idx="3">
-            <a:schemeClr val="accent1"/>
-          </a:fillRef>
-          <a:effectRef idx="2">
-            <a:schemeClr val="accent1"/>
-          </a:effectRef>
-          <a:fontRef idx="minor">
-            <a:schemeClr val="lt1"/>
-          </a:fontRef>
-        </p:style>
-        <p:txBody>
-          <a:bodyPr rtlCol="0" anchor="ctr"/>
-          <a:lstStyle/>
-          <a:p>
-            <a:pPr algn="ctr"/>
-          </a:p>
-        </p:txBody>
-      </p:sp>
-      <p:sp>
-        <p:nvSpPr>
-          <p:cNvPr id="27" name="TextBox 26"/>
-          <p:cNvSpPr txBox="1"/>
-          <p:nvPr/>
-        </p:nvSpPr>
-        <p:spPr>
-          <a:xfrm>
-            <a:off x="6108192" y="4014215"/>
-            <a:ext cx="2551176" cy="1645920"/>
-          </a:xfrm>
-          <a:prstGeom prst="rect">
-            <a:avLst/>
-          </a:prstGeom>
-          <a:noFill/>
-        </p:spPr>
-        <p:txBody>
-          <a:bodyPr wrap="square" lIns="0" rIns="0" tIns="0" bIns="0" anchor="t">
-            <a:spAutoFit/>
-          </a:bodyPr>
-          <a:lstStyle/>
-          <a:p>
-            <a:pPr algn="l">
-              <a:lnSpc>
-                <a:spcPct val="95000"/>
-              </a:lnSpc>
-              <a:spcBef>
-                <a:spcPts val="0"/>
-              </a:spcBef>
-              <a:spcAft>
-                <a:spcPts val="300"/>
-              </a:spcAft>
-            </a:pPr>
-            <a:r>
-              <a:rPr sz="950" b="1" i="0">
-                <a:solidFill>
-                  <a:srgbClr val="398025"/>
-                </a:solidFill>
-                <a:latin typeface="Arial"/>
-              </a:rPr>
-              <a:t>SOLUTION 2
-“Last-Mile Shield” · $100k</a:t>
-            </a:r>
-          </a:p>
-          <a:p>
-            <a:pPr algn="l">
-              <a:lnSpc>
-                <a:spcPct val="104000"/>
-              </a:lnSpc>
-              <a:spcBef>
-                <a:spcPts val="0"/>
-              </a:spcBef>
-              <a:spcAft>
-                <a:spcPts val="300"/>
-              </a:spcAft>
-            </a:pPr>
-            <a:r>
-              <a:rPr sz="819" b="1" i="0">
-                <a:solidFill>
-                  <a:srgbClr val="1B3E6E"/>
-                </a:solidFill>
-                <a:latin typeface="Arial"/>
-              </a:rPr>
-              <a:t>What: </a:t>
-            </a:r>
-            <a:r>
-              <a:rPr sz="819" b="0" i="0">
-                <a:solidFill>
-                  <a:srgbClr val="333333"/>
-                </a:solidFill>
-                <a:latin typeface="Arial"/>
-              </a:rPr>
-              <a:t>AI routing + telematics (GPS, cameras, RFID) + geofenced smart locks</a:t>
-            </a:r>
-          </a:p>
-          <a:p>
-            <a:pPr algn="l">
-              <a:lnSpc>
-                <a:spcPct val="104000"/>
-              </a:lnSpc>
-              <a:spcBef>
-                <a:spcPts val="0"/>
-              </a:spcBef>
-              <a:spcAft>
-                <a:spcPts val="300"/>
-              </a:spcAft>
-            </a:pPr>
-            <a:r>
-              <a:rPr sz="819" b="1" i="0">
-                <a:solidFill>
-                  <a:srgbClr val="1B3E6E"/>
-                </a:solidFill>
-                <a:latin typeface="Arial"/>
-              </a:rPr>
-              <a:t>How: </a:t>
-            </a:r>
-            <a:r>
-              <a:rPr sz="819" b="0" i="0">
-                <a:solidFill>
-                  <a:srgbClr val="333333"/>
-                </a:solidFill>
-                <a:latin typeface="Arial"/>
-              </a:rPr>
-              <a:t>drops sequenced to lunch bells; doors unlock only near a registered school</a:t>
-            </a:r>
-          </a:p>
-          <a:p>
-            <a:pPr algn="l">
-              <a:lnSpc>
-                <a:spcPct val="105000"/>
-              </a:lnSpc>
-              <a:spcBef>
-                <a:spcPts val="0"/>
-              </a:spcBef>
-              <a:spcAft>
-                <a:spcPts val="0"/>
-              </a:spcAft>
-            </a:pPr>
-            <a:r>
-              <a:rPr sz="830" b="1" i="0">
-                <a:solidFill>
-                  <a:srgbClr val="398025"/>
-                </a:solidFill>
-                <a:latin typeface="Arial"/>
-              </a:rPr>
-              <a:t>→ 99%+ on-time · −18% km  ·  est. $80k saved / yr [dummy]</a:t>
+              <a:t>THE $250k GRANT</a:t>
+            </a:r>
+          </a:p>
+          <a:p>
+            <a:pPr algn="ctr">
+              <a:lnSpc>
+                <a:spcPct val="100000"/>
+              </a:lnSpc>
+              <a:spcBef>
+                <a:spcPts val="0"/>
+              </a:spcBef>
+              <a:spcAft>
+                <a:spcPts val="0"/>
+              </a:spcAft>
+            </a:pPr>
+            <a:r>
+              <a:rPr sz="660" b="0" i="1">
+                <a:solidFill>
+                  <a:srgbClr val="727375"/>
+                </a:solidFill>
+                <a:latin typeface="Arial"/>
+              </a:rPr>
+              <a:t>60 / 40 — weighted to the costlier gap</a:t>
             </a:r>
           </a:p>
         </p:txBody>

--- a/AkshayaPatra_GS_Pitch.pptx
+++ b/AkshayaPatra_GS_Pitch.pptx
@@ -13,6 +13,10 @@
     <p:sldId id="261" r:id="rId12"/>
     <p:sldId id="262" r:id="rId13"/>
     <p:sldId id="263" r:id="rId14"/>
+    <p:sldId id="264" r:id="rId15"/>
+    <p:sldId id="265" r:id="rId16"/>
+    <p:sldId id="266" r:id="rId17"/>
+    <p:sldId id="267" r:id="rId18"/>
   </p:sldIdLst>
   <p:sldSz cx="9144000" cy="6858000" type="screen4x3"/>
   <p:notesSz cx="6858000" cy="9144000"/>
@@ -298,6 +302,472 @@
 </c:chartSpace>
 </file>
 
+<file path=ppt/charts/chart10.xml><?xml version="1.0" encoding="utf-8"?>
+<c:chartSpace xmlns:c="http://schemas.openxmlformats.org/drawingml/2006/chart" xmlns:a="http://schemas.openxmlformats.org/drawingml/2006/main" xmlns:r="http://schemas.openxmlformats.org/officeDocument/2006/relationships">
+  <c:date1904 val="0"/>
+  <c:chart>
+    <c:autoTitleDeleted val="1"/>
+    <c:plotArea>
+      <c:barChart>
+        <c:barDir val="col"/>
+        <c:grouping val="clustered"/>
+        <c:ser>
+          <c:idx val="0"/>
+          <c:order val="0"/>
+          <c:tx>
+            <c:strRef>
+              <c:f>Sheet1!$B$1</c:f>
+              <c:strCache>
+                <c:ptCount val="1"/>
+                <c:pt idx="0">
+                  <c:v>Without GS funding</c:v>
+                </c:pt>
+              </c:strCache>
+            </c:strRef>
+          </c:tx>
+          <c:spPr>
+            <a:solidFill>
+              <a:srgbClr val="E08A1E"/>
+            </a:solidFill>
+            <a:ln>
+              <a:noFill/>
+            </a:ln>
+          </c:spPr>
+          <c:cat>
+            <c:strRef>
+              <c:f>Sheet1!$A$2:$A$5</c:f>
+              <c:strCache>
+                <c:ptCount val="4"/>
+                <c:pt idx="0">
+                  <c:v>2026</c:v>
+                </c:pt>
+                <c:pt idx="1">
+                  <c:v>2027</c:v>
+                </c:pt>
+                <c:pt idx="2">
+                  <c:v>2028</c:v>
+                </c:pt>
+                <c:pt idx="3">
+                  <c:v>2029</c:v>
+                </c:pt>
+              </c:strCache>
+            </c:strRef>
+          </c:cat>
+          <c:val>
+            <c:numRef>
+              <c:f>Sheet1!$B$2:$B$5</c:f>
+              <c:numCache>
+                <c:formatCode>General</c:formatCode>
+                <c:ptCount val="4"/>
+                <c:pt idx="0">
+                  <c:v>10.8</c:v>
+                </c:pt>
+                <c:pt idx="1">
+                  <c:v>11.4</c:v>
+                </c:pt>
+                <c:pt idx="2">
+                  <c:v>12.0</c:v>
+                </c:pt>
+                <c:pt idx="3">
+                  <c:v>12.6</c:v>
+                </c:pt>
+              </c:numCache>
+            </c:numRef>
+          </c:val>
+        </c:ser>
+        <c:ser>
+          <c:idx val="1"/>
+          <c:order val="1"/>
+          <c:tx>
+            <c:strRef>
+              <c:f>Sheet1!$C$1</c:f>
+              <c:strCache>
+                <c:ptCount val="1"/>
+                <c:pt idx="0">
+                  <c:v>With GS funding</c:v>
+                </c:pt>
+              </c:strCache>
+            </c:strRef>
+          </c:tx>
+          <c:spPr>
+            <a:solidFill>
+              <a:srgbClr val="398025"/>
+            </a:solidFill>
+            <a:ln>
+              <a:noFill/>
+            </a:ln>
+          </c:spPr>
+          <c:cat>
+            <c:strRef>
+              <c:f>Sheet1!$A$2:$A$5</c:f>
+              <c:strCache>
+                <c:ptCount val="4"/>
+                <c:pt idx="0">
+                  <c:v>2026</c:v>
+                </c:pt>
+                <c:pt idx="1">
+                  <c:v>2027</c:v>
+                </c:pt>
+                <c:pt idx="2">
+                  <c:v>2028</c:v>
+                </c:pt>
+                <c:pt idx="3">
+                  <c:v>2029</c:v>
+                </c:pt>
+              </c:strCache>
+            </c:strRef>
+          </c:cat>
+          <c:val>
+            <c:numRef>
+              <c:f>Sheet1!$C$2:$C$5</c:f>
+              <c:numCache>
+                <c:formatCode>General</c:formatCode>
+                <c:ptCount val="4"/>
+                <c:pt idx="0">
+                  <c:v>9.4</c:v>
+                </c:pt>
+                <c:pt idx="1">
+                  <c:v>9.2</c:v>
+                </c:pt>
+                <c:pt idx="2">
+                  <c:v>9.1</c:v>
+                </c:pt>
+                <c:pt idx="3">
+                  <c:v>9.0</c:v>
+                </c:pt>
+              </c:numCache>
+            </c:numRef>
+          </c:val>
+        </c:ser>
+        <c:gapWidth val="80"/>
+        <c:overlap val="-10"/>
+        <c:axId val="-2068027336"/>
+        <c:axId val="-2113994440"/>
+      </c:barChart>
+      <c:catAx>
+        <c:axId val="-2068027336"/>
+        <c:scaling>
+          <c:orientation val="minMax"/>
+        </c:scaling>
+        <c:delete val="0"/>
+        <c:axPos val="b"/>
+        <c:majorTickMark val="out"/>
+        <c:minorTickMark val="none"/>
+        <c:tickLblPos val="nextTo"/>
+        <c:spPr>
+          <a:ln>
+            <a:solidFill>
+              <a:srgbClr val="BFBFBF"/>
+            </a:solidFill>
+          </a:ln>
+        </c:spPr>
+        <c:txPr>
+          <a:bodyPr/>
+          <a:lstStyle/>
+          <a:p>
+            <a:pPr>
+              <a:defRPr sz="650"/>
+            </a:pPr>
+          </a:p>
+        </c:txPr>
+        <c:crossAx val="-2113994440"/>
+        <c:crosses val="autoZero"/>
+        <c:auto val="1"/>
+        <c:lblAlgn val="ctr"/>
+        <c:lblOffset val="100"/>
+        <c:noMultiLvlLbl val="0"/>
+      </c:catAx>
+      <c:valAx>
+        <c:axId val="-2113994440"/>
+        <c:scaling/>
+        <c:delete val="0"/>
+        <c:axPos val="l"/>
+        <c:numFmt formatCode="&quot;$&quot;0&quot;M&quot;" sourceLinked="0"/>
+        <c:majorTickMark val="out"/>
+        <c:minorTickMark val="none"/>
+        <c:tickLblPos val="nextTo"/>
+        <c:txPr>
+          <a:bodyPr/>
+          <a:lstStyle/>
+          <a:p>
+            <a:pPr>
+              <a:defRPr sz="600"/>
+            </a:pPr>
+          </a:p>
+        </c:txPr>
+        <c:crossAx val="-2068027336"/>
+        <c:crosses val="autoZero"/>
+      </c:valAx>
+    </c:plotArea>
+    <c:legend>
+      <c:legendPos val="b"/>
+      <c:overlay val="0"/>
+      <c:txPr>
+        <a:bodyPr/>
+        <a:lstStyle/>
+        <a:p>
+          <a:pPr>
+            <a:defRPr sz="650"/>
+          </a:pPr>
+        </a:p>
+      </c:txPr>
+    </c:legend>
+    <c:dispBlanksAs val="gap"/>
+  </c:chart>
+  <c:txPr>
+    <a:bodyPr/>
+    <a:lstStyle/>
+    <a:p>
+      <a:pPr>
+        <a:defRPr sz="650">
+          <a:solidFill>
+            <a:srgbClr val="333333"/>
+          </a:solidFill>
+          <a:latin typeface="Arial"/>
+        </a:defRPr>
+      </a:pPr>
+      <a:endParaRPr lang="en-US"/>
+    </a:p>
+  </c:txPr>
+  <c:externalData r:id="rId1">
+    <c:autoUpdate val="0"/>
+  </c:externalData>
+</c:chartSpace>
+</file>
+
+<file path=ppt/charts/chart11.xml><?xml version="1.0" encoding="utf-8"?>
+<c:chartSpace xmlns:c="http://schemas.openxmlformats.org/drawingml/2006/chart" xmlns:a="http://schemas.openxmlformats.org/drawingml/2006/main" xmlns:r="http://schemas.openxmlformats.org/officeDocument/2006/relationships">
+  <c:date1904 val="0"/>
+  <c:chart>
+    <c:autoTitleDeleted val="1"/>
+    <c:plotArea>
+      <c:barChart>
+        <c:barDir val="col"/>
+        <c:grouping val="clustered"/>
+        <c:ser>
+          <c:idx val="0"/>
+          <c:order val="0"/>
+          <c:tx>
+            <c:strRef>
+              <c:f>Sheet1!$B$1</c:f>
+              <c:strCache>
+                <c:ptCount val="1"/>
+                <c:pt idx="0">
+                  <c:v>Without GS funding</c:v>
+                </c:pt>
+              </c:strCache>
+            </c:strRef>
+          </c:tx>
+          <c:spPr>
+            <a:solidFill>
+              <a:srgbClr val="E08A1E"/>
+            </a:solidFill>
+            <a:ln>
+              <a:noFill/>
+            </a:ln>
+          </c:spPr>
+          <c:cat>
+            <c:strRef>
+              <c:f>Sheet1!$A$2:$A$5</c:f>
+              <c:strCache>
+                <c:ptCount val="4"/>
+                <c:pt idx="0">
+                  <c:v>2026</c:v>
+                </c:pt>
+                <c:pt idx="1">
+                  <c:v>2027</c:v>
+                </c:pt>
+                <c:pt idx="2">
+                  <c:v>2028</c:v>
+                </c:pt>
+                <c:pt idx="3">
+                  <c:v>2029</c:v>
+                </c:pt>
+              </c:strCache>
+            </c:strRef>
+          </c:cat>
+          <c:val>
+            <c:numRef>
+              <c:f>Sheet1!$B$2:$B$5</c:f>
+              <c:numCache>
+                <c:formatCode>General</c:formatCode>
+                <c:ptCount val="4"/>
+                <c:pt idx="0">
+                  <c:v>10.8</c:v>
+                </c:pt>
+                <c:pt idx="1">
+                  <c:v>11.4</c:v>
+                </c:pt>
+                <c:pt idx="2">
+                  <c:v>12.0</c:v>
+                </c:pt>
+                <c:pt idx="3">
+                  <c:v>12.6</c:v>
+                </c:pt>
+              </c:numCache>
+            </c:numRef>
+          </c:val>
+        </c:ser>
+        <c:ser>
+          <c:idx val="1"/>
+          <c:order val="1"/>
+          <c:tx>
+            <c:strRef>
+              <c:f>Sheet1!$C$1</c:f>
+              <c:strCache>
+                <c:ptCount val="1"/>
+                <c:pt idx="0">
+                  <c:v>With GS funding</c:v>
+                </c:pt>
+              </c:strCache>
+            </c:strRef>
+          </c:tx>
+          <c:spPr>
+            <a:solidFill>
+              <a:srgbClr val="398025"/>
+            </a:solidFill>
+            <a:ln>
+              <a:noFill/>
+            </a:ln>
+          </c:spPr>
+          <c:cat>
+            <c:strRef>
+              <c:f>Sheet1!$A$2:$A$5</c:f>
+              <c:strCache>
+                <c:ptCount val="4"/>
+                <c:pt idx="0">
+                  <c:v>2026</c:v>
+                </c:pt>
+                <c:pt idx="1">
+                  <c:v>2027</c:v>
+                </c:pt>
+                <c:pt idx="2">
+                  <c:v>2028</c:v>
+                </c:pt>
+                <c:pt idx="3">
+                  <c:v>2029</c:v>
+                </c:pt>
+              </c:strCache>
+            </c:strRef>
+          </c:cat>
+          <c:val>
+            <c:numRef>
+              <c:f>Sheet1!$C$2:$C$5</c:f>
+              <c:numCache>
+                <c:formatCode>General</c:formatCode>
+                <c:ptCount val="4"/>
+                <c:pt idx="0">
+                  <c:v>9.4</c:v>
+                </c:pt>
+                <c:pt idx="1">
+                  <c:v>9.2</c:v>
+                </c:pt>
+                <c:pt idx="2">
+                  <c:v>9.1</c:v>
+                </c:pt>
+                <c:pt idx="3">
+                  <c:v>9.0</c:v>
+                </c:pt>
+              </c:numCache>
+            </c:numRef>
+          </c:val>
+        </c:ser>
+        <c:gapWidth val="80"/>
+        <c:overlap val="-10"/>
+        <c:axId val="-2068027336"/>
+        <c:axId val="-2113994440"/>
+      </c:barChart>
+      <c:catAx>
+        <c:axId val="-2068027336"/>
+        <c:scaling>
+          <c:orientation val="minMax"/>
+        </c:scaling>
+        <c:delete val="0"/>
+        <c:axPos val="b"/>
+        <c:majorTickMark val="out"/>
+        <c:minorTickMark val="none"/>
+        <c:tickLblPos val="nextTo"/>
+        <c:spPr>
+          <a:ln>
+            <a:solidFill>
+              <a:srgbClr val="BFBFBF"/>
+            </a:solidFill>
+          </a:ln>
+        </c:spPr>
+        <c:txPr>
+          <a:bodyPr/>
+          <a:lstStyle/>
+          <a:p>
+            <a:pPr>
+              <a:defRPr sz="650"/>
+            </a:pPr>
+          </a:p>
+        </c:txPr>
+        <c:crossAx val="-2113994440"/>
+        <c:crosses val="autoZero"/>
+        <c:auto val="1"/>
+        <c:lblAlgn val="ctr"/>
+        <c:lblOffset val="100"/>
+        <c:noMultiLvlLbl val="0"/>
+      </c:catAx>
+      <c:valAx>
+        <c:axId val="-2113994440"/>
+        <c:scaling/>
+        <c:delete val="0"/>
+        <c:axPos val="l"/>
+        <c:numFmt formatCode="&quot;$&quot;0&quot;M&quot;" sourceLinked="0"/>
+        <c:majorTickMark val="out"/>
+        <c:minorTickMark val="none"/>
+        <c:tickLblPos val="nextTo"/>
+        <c:txPr>
+          <a:bodyPr/>
+          <a:lstStyle/>
+          <a:p>
+            <a:pPr>
+              <a:defRPr sz="600"/>
+            </a:pPr>
+          </a:p>
+        </c:txPr>
+        <c:crossAx val="-2068027336"/>
+        <c:crosses val="autoZero"/>
+      </c:valAx>
+    </c:plotArea>
+    <c:legend>
+      <c:legendPos val="b"/>
+      <c:overlay val="0"/>
+      <c:txPr>
+        <a:bodyPr/>
+        <a:lstStyle/>
+        <a:p>
+          <a:pPr>
+            <a:defRPr sz="650"/>
+          </a:pPr>
+        </a:p>
+      </c:txPr>
+    </c:legend>
+    <c:dispBlanksAs val="gap"/>
+  </c:chart>
+  <c:txPr>
+    <a:bodyPr/>
+    <a:lstStyle/>
+    <a:p>
+      <a:pPr>
+        <a:defRPr sz="650">
+          <a:solidFill>
+            <a:srgbClr val="333333"/>
+          </a:solidFill>
+          <a:latin typeface="Arial"/>
+        </a:defRPr>
+      </a:pPr>
+      <a:endParaRPr lang="en-US"/>
+    </a:p>
+  </c:txPr>
+  <c:externalData r:id="rId1">
+    <c:autoUpdate val="0"/>
+  </c:externalData>
+</c:chartSpace>
+</file>
+
 <file path=ppt/charts/chart2.xml><?xml version="1.0" encoding="utf-8"?>
 <c:chartSpace xmlns:c="http://schemas.openxmlformats.org/drawingml/2006/chart" xmlns:a="http://schemas.openxmlformats.org/drawingml/2006/main" xmlns:r="http://schemas.openxmlformats.org/officeDocument/2006/relationships">
   <c:date1904 val="0"/>
@@ -1281,6 +1751,495 @@
       <a:noFill/>
     </a:ln>
   </c:spPr>
+  <c:externalData r:id="rId1">
+    <c:autoUpdate val="0"/>
+  </c:externalData>
+</c:chartSpace>
+</file>
+
+<file path=ppt/charts/chart8.xml><?xml version="1.0" encoding="utf-8"?>
+<c:chartSpace xmlns:c="http://schemas.openxmlformats.org/drawingml/2006/chart" xmlns:a="http://schemas.openxmlformats.org/drawingml/2006/main" xmlns:r="http://schemas.openxmlformats.org/officeDocument/2006/relationships">
+  <c:date1904 val="0"/>
+  <c:chart>
+    <c:autoTitleDeleted val="1"/>
+    <c:plotArea>
+      <c:barChart>
+        <c:barDir val="col"/>
+        <c:grouping val="clustered"/>
+        <c:ser>
+          <c:idx val="0"/>
+          <c:order val="0"/>
+          <c:tx>
+            <c:strRef>
+              <c:f>Sheet1!$B$1</c:f>
+              <c:strCache>
+                <c:ptCount val="1"/>
+                <c:pt idx="0">
+                  <c:v>Without GS funding</c:v>
+                </c:pt>
+              </c:strCache>
+            </c:strRef>
+          </c:tx>
+          <c:spPr>
+            <a:solidFill>
+              <a:srgbClr val="E08A1E"/>
+            </a:solidFill>
+            <a:ln>
+              <a:noFill/>
+            </a:ln>
+          </c:spPr>
+          <c:cat>
+            <c:strRef>
+              <c:f>Sheet1!$A$2:$A$5</c:f>
+              <c:strCache>
+                <c:ptCount val="4"/>
+                <c:pt idx="0">
+                  <c:v>2026</c:v>
+                </c:pt>
+                <c:pt idx="1">
+                  <c:v>2027</c:v>
+                </c:pt>
+                <c:pt idx="2">
+                  <c:v>2028</c:v>
+                </c:pt>
+                <c:pt idx="3">
+                  <c:v>2029</c:v>
+                </c:pt>
+              </c:strCache>
+            </c:strRef>
+          </c:cat>
+          <c:val>
+            <c:numRef>
+              <c:f>Sheet1!$B$2:$B$5</c:f>
+              <c:numCache>
+                <c:formatCode>General</c:formatCode>
+                <c:ptCount val="4"/>
+                <c:pt idx="0">
+                  <c:v>10.8</c:v>
+                </c:pt>
+                <c:pt idx="1">
+                  <c:v>11.4</c:v>
+                </c:pt>
+                <c:pt idx="2">
+                  <c:v>12.0</c:v>
+                </c:pt>
+                <c:pt idx="3">
+                  <c:v>12.6</c:v>
+                </c:pt>
+              </c:numCache>
+            </c:numRef>
+          </c:val>
+        </c:ser>
+        <c:ser>
+          <c:idx val="1"/>
+          <c:order val="1"/>
+          <c:tx>
+            <c:strRef>
+              <c:f>Sheet1!$C$1</c:f>
+              <c:strCache>
+                <c:ptCount val="1"/>
+                <c:pt idx="0">
+                  <c:v>With GS funding</c:v>
+                </c:pt>
+              </c:strCache>
+            </c:strRef>
+          </c:tx>
+          <c:spPr>
+            <a:solidFill>
+              <a:srgbClr val="398025"/>
+            </a:solidFill>
+            <a:ln>
+              <a:noFill/>
+            </a:ln>
+          </c:spPr>
+          <c:cat>
+            <c:strRef>
+              <c:f>Sheet1!$A$2:$A$5</c:f>
+              <c:strCache>
+                <c:ptCount val="4"/>
+                <c:pt idx="0">
+                  <c:v>2026</c:v>
+                </c:pt>
+                <c:pt idx="1">
+                  <c:v>2027</c:v>
+                </c:pt>
+                <c:pt idx="2">
+                  <c:v>2028</c:v>
+                </c:pt>
+                <c:pt idx="3">
+                  <c:v>2029</c:v>
+                </c:pt>
+              </c:strCache>
+            </c:strRef>
+          </c:cat>
+          <c:val>
+            <c:numRef>
+              <c:f>Sheet1!$C$2:$C$5</c:f>
+              <c:numCache>
+                <c:formatCode>General</c:formatCode>
+                <c:ptCount val="4"/>
+                <c:pt idx="0">
+                  <c:v>9.4</c:v>
+                </c:pt>
+                <c:pt idx="1">
+                  <c:v>9.2</c:v>
+                </c:pt>
+                <c:pt idx="2">
+                  <c:v>9.1</c:v>
+                </c:pt>
+                <c:pt idx="3">
+                  <c:v>9.0</c:v>
+                </c:pt>
+              </c:numCache>
+            </c:numRef>
+          </c:val>
+        </c:ser>
+        <c:gapWidth val="80"/>
+        <c:overlap val="-10"/>
+        <c:axId val="-2068027336"/>
+        <c:axId val="-2113994440"/>
+      </c:barChart>
+      <c:catAx>
+        <c:axId val="-2068027336"/>
+        <c:scaling>
+          <c:orientation val="minMax"/>
+        </c:scaling>
+        <c:delete val="0"/>
+        <c:axPos val="b"/>
+        <c:majorTickMark val="out"/>
+        <c:minorTickMark val="none"/>
+        <c:tickLblPos val="nextTo"/>
+        <c:spPr>
+          <a:ln>
+            <a:solidFill>
+              <a:srgbClr val="BFBFBF"/>
+            </a:solidFill>
+          </a:ln>
+        </c:spPr>
+        <c:txPr>
+          <a:bodyPr/>
+          <a:lstStyle/>
+          <a:p>
+            <a:pPr>
+              <a:defRPr sz="700"/>
+            </a:pPr>
+          </a:p>
+        </c:txPr>
+        <c:crossAx val="-2113994440"/>
+        <c:crosses val="autoZero"/>
+        <c:auto val="1"/>
+        <c:lblAlgn val="ctr"/>
+        <c:lblOffset val="100"/>
+        <c:noMultiLvlLbl val="0"/>
+      </c:catAx>
+      <c:valAx>
+        <c:axId val="-2113994440"/>
+        <c:scaling/>
+        <c:delete val="0"/>
+        <c:axPos val="l"/>
+        <c:numFmt formatCode="&quot;$&quot;0&quot;M&quot;" sourceLinked="0"/>
+        <c:majorTickMark val="out"/>
+        <c:minorTickMark val="none"/>
+        <c:tickLblPos val="nextTo"/>
+        <c:txPr>
+          <a:bodyPr/>
+          <a:lstStyle/>
+          <a:p>
+            <a:pPr>
+              <a:defRPr sz="650"/>
+            </a:pPr>
+          </a:p>
+        </c:txPr>
+        <c:crossAx val="-2068027336"/>
+        <c:crosses val="autoZero"/>
+      </c:valAx>
+    </c:plotArea>
+    <c:legend>
+      <c:legendPos val="b"/>
+      <c:overlay val="0"/>
+      <c:txPr>
+        <a:bodyPr/>
+        <a:lstStyle/>
+        <a:p>
+          <a:pPr>
+            <a:defRPr sz="700"/>
+          </a:pPr>
+        </a:p>
+      </c:txPr>
+    </c:legend>
+    <c:dispBlanksAs val="gap"/>
+  </c:chart>
+  <c:txPr>
+    <a:bodyPr/>
+    <a:lstStyle/>
+    <a:p>
+      <a:pPr>
+        <a:defRPr sz="700">
+          <a:solidFill>
+            <a:srgbClr val="333333"/>
+          </a:solidFill>
+          <a:latin typeface="Arial"/>
+        </a:defRPr>
+      </a:pPr>
+      <a:endParaRPr lang="en-US"/>
+    </a:p>
+  </c:txPr>
+  <c:externalData r:id="rId1">
+    <c:autoUpdate val="0"/>
+  </c:externalData>
+</c:chartSpace>
+</file>
+
+<file path=ppt/charts/chart9.xml><?xml version="1.0" encoding="utf-8"?>
+<c:chartSpace xmlns:c="http://schemas.openxmlformats.org/drawingml/2006/chart" xmlns:a="http://schemas.openxmlformats.org/drawingml/2006/main" xmlns:r="http://schemas.openxmlformats.org/officeDocument/2006/relationships">
+  <c:date1904 val="0"/>
+  <c:chart>
+    <c:autoTitleDeleted val="1"/>
+    <c:plotArea>
+      <c:barChart>
+        <c:barDir val="col"/>
+        <c:grouping val="clustered"/>
+        <c:ser>
+          <c:idx val="0"/>
+          <c:order val="0"/>
+          <c:tx>
+            <c:strRef>
+              <c:f>Sheet1!$B$1</c:f>
+              <c:strCache>
+                <c:ptCount val="1"/>
+                <c:pt idx="0">
+                  <c:v>Without GS funding</c:v>
+                </c:pt>
+              </c:strCache>
+            </c:strRef>
+          </c:tx>
+          <c:spPr>
+            <a:solidFill>
+              <a:srgbClr val="E08A1E"/>
+            </a:solidFill>
+            <a:ln>
+              <a:noFill/>
+            </a:ln>
+          </c:spPr>
+          <c:cat>
+            <c:strRef>
+              <c:f>Sheet1!$A$2:$A$5</c:f>
+              <c:strCache>
+                <c:ptCount val="4"/>
+                <c:pt idx="0">
+                  <c:v>2026</c:v>
+                </c:pt>
+                <c:pt idx="1">
+                  <c:v>2027</c:v>
+                </c:pt>
+                <c:pt idx="2">
+                  <c:v>2028</c:v>
+                </c:pt>
+                <c:pt idx="3">
+                  <c:v>2029</c:v>
+                </c:pt>
+              </c:strCache>
+            </c:strRef>
+          </c:cat>
+          <c:val>
+            <c:numRef>
+              <c:f>Sheet1!$B$2:$B$5</c:f>
+              <c:numCache>
+                <c:formatCode>General</c:formatCode>
+                <c:ptCount val="4"/>
+                <c:pt idx="0">
+                  <c:v>10.8</c:v>
+                </c:pt>
+                <c:pt idx="1">
+                  <c:v>11.4</c:v>
+                </c:pt>
+                <c:pt idx="2">
+                  <c:v>12.0</c:v>
+                </c:pt>
+                <c:pt idx="3">
+                  <c:v>12.6</c:v>
+                </c:pt>
+              </c:numCache>
+            </c:numRef>
+          </c:val>
+        </c:ser>
+        <c:ser>
+          <c:idx val="1"/>
+          <c:order val="1"/>
+          <c:tx>
+            <c:strRef>
+              <c:f>Sheet1!$C$1</c:f>
+              <c:strCache>
+                <c:ptCount val="1"/>
+                <c:pt idx="0">
+                  <c:v>With GS funding</c:v>
+                </c:pt>
+              </c:strCache>
+            </c:strRef>
+          </c:tx>
+          <c:spPr>
+            <a:solidFill>
+              <a:srgbClr val="398025"/>
+            </a:solidFill>
+            <a:ln>
+              <a:noFill/>
+            </a:ln>
+          </c:spPr>
+          <c:cat>
+            <c:strRef>
+              <c:f>Sheet1!$A$2:$A$5</c:f>
+              <c:strCache>
+                <c:ptCount val="4"/>
+                <c:pt idx="0">
+                  <c:v>2026</c:v>
+                </c:pt>
+                <c:pt idx="1">
+                  <c:v>2027</c:v>
+                </c:pt>
+                <c:pt idx="2">
+                  <c:v>2028</c:v>
+                </c:pt>
+                <c:pt idx="3">
+                  <c:v>2029</c:v>
+                </c:pt>
+              </c:strCache>
+            </c:strRef>
+          </c:cat>
+          <c:val>
+            <c:numRef>
+              <c:f>Sheet1!$C$2:$C$5</c:f>
+              <c:numCache>
+                <c:formatCode>General</c:formatCode>
+                <c:ptCount val="4"/>
+                <c:pt idx="0">
+                  <c:v>9.4</c:v>
+                </c:pt>
+                <c:pt idx="1">
+                  <c:v>9.2</c:v>
+                </c:pt>
+                <c:pt idx="2">
+                  <c:v>9.1</c:v>
+                </c:pt>
+                <c:pt idx="3">
+                  <c:v>9.0</c:v>
+                </c:pt>
+              </c:numCache>
+            </c:numRef>
+          </c:val>
+        </c:ser>
+        <c:dLbls>
+          <c:numFmt formatCode="&quot;$&quot;0.0&quot;M&quot;" sourceLinked="0"/>
+          <c:txPr>
+            <a:bodyPr/>
+            <a:lstStyle/>
+            <a:p>
+              <a:pPr>
+                <a:defRPr sz="630" b="1">
+                  <a:solidFill>
+                    <a:srgbClr val="1B3E6E"/>
+                  </a:solidFill>
+                </a:defRPr>
+              </a:pPr>
+            </a:p>
+          </c:txPr>
+          <c:showLegendKey val="0"/>
+          <c:showVal val="1"/>
+          <c:showCatName val="0"/>
+          <c:showSerName val="0"/>
+          <c:showPercent val="0"/>
+          <c:showBubbleSize val="0"/>
+          <c:showLeaderLines val="1"/>
+        </c:dLbls>
+        <c:gapWidth val="80"/>
+        <c:overlap val="-10"/>
+        <c:axId val="-2068027336"/>
+        <c:axId val="-2113994440"/>
+      </c:barChart>
+      <c:catAx>
+        <c:axId val="-2068027336"/>
+        <c:scaling>
+          <c:orientation val="minMax"/>
+        </c:scaling>
+        <c:delete val="0"/>
+        <c:axPos val="b"/>
+        <c:majorTickMark val="out"/>
+        <c:minorTickMark val="none"/>
+        <c:tickLblPos val="nextTo"/>
+        <c:spPr>
+          <a:ln>
+            <a:solidFill>
+              <a:srgbClr val="BFBFBF"/>
+            </a:solidFill>
+          </a:ln>
+        </c:spPr>
+        <c:txPr>
+          <a:bodyPr/>
+          <a:lstStyle/>
+          <a:p>
+            <a:pPr>
+              <a:defRPr sz="680"/>
+            </a:pPr>
+          </a:p>
+        </c:txPr>
+        <c:crossAx val="-2113994440"/>
+        <c:crosses val="autoZero"/>
+        <c:auto val="1"/>
+        <c:lblAlgn val="ctr"/>
+        <c:lblOffset val="100"/>
+        <c:noMultiLvlLbl val="0"/>
+      </c:catAx>
+      <c:valAx>
+        <c:axId val="-2113994440"/>
+        <c:scaling/>
+        <c:delete val="0"/>
+        <c:axPos val="l"/>
+        <c:numFmt formatCode="&quot;$&quot;0&quot;M&quot;" sourceLinked="0"/>
+        <c:majorTickMark val="out"/>
+        <c:minorTickMark val="none"/>
+        <c:tickLblPos val="nextTo"/>
+        <c:txPr>
+          <a:bodyPr/>
+          <a:lstStyle/>
+          <a:p>
+            <a:pPr>
+              <a:defRPr sz="630"/>
+            </a:pPr>
+          </a:p>
+        </c:txPr>
+        <c:crossAx val="-2068027336"/>
+        <c:crosses val="autoZero"/>
+      </c:valAx>
+    </c:plotArea>
+    <c:legend>
+      <c:legendPos val="b"/>
+      <c:overlay val="0"/>
+      <c:txPr>
+        <a:bodyPr/>
+        <a:lstStyle/>
+        <a:p>
+          <a:pPr>
+            <a:defRPr sz="680"/>
+          </a:pPr>
+        </a:p>
+      </c:txPr>
+    </c:legend>
+    <c:dispBlanksAs val="gap"/>
+  </c:chart>
+  <c:txPr>
+    <a:bodyPr/>
+    <a:lstStyle/>
+    <a:p>
+      <a:pPr>
+        <a:defRPr sz="680">
+          <a:solidFill>
+            <a:srgbClr val="333333"/>
+          </a:solidFill>
+          <a:latin typeface="Arial"/>
+        </a:defRPr>
+      </a:pPr>
+      <a:endParaRPr lang="en-US"/>
+    </a:p>
+  </c:txPr>
   <c:externalData r:id="rId1">
     <c:autoUpdate val="0"/>
   </c:externalData>
@@ -6624,6 +7583,6631 @@
 </p:sld>
 </file>
 
+<file path=ppt/slides/slide10.xml><?xml version="1.0" encoding="utf-8"?>
+<p:sld xmlns:a="http://schemas.openxmlformats.org/drawingml/2006/main" xmlns:p="http://schemas.openxmlformats.org/presentationml/2006/main" xmlns:r="http://schemas.openxmlformats.org/officeDocument/2006/relationships">
+  <p:cSld>
+    <p:spTree>
+      <p:nvGrpSpPr>
+        <p:cNvPr id="1" name=""/>
+        <p:cNvGrpSpPr/>
+        <p:nvPr/>
+      </p:nvGrpSpPr>
+      <p:grpSpPr/>
+      <p:sp>
+        <p:nvSpPr>
+          <p:cNvPr id="2" name="Rectangle 1"/>
+          <p:cNvSpPr/>
+          <p:nvPr/>
+        </p:nvSpPr>
+        <p:spPr>
+          <a:xfrm>
+            <a:off x="365760" y="274320"/>
+            <a:ext cx="8412480" cy="23774"/>
+          </a:xfrm>
+          <a:prstGeom prst="rect">
+            <a:avLst/>
+          </a:prstGeom>
+          <a:solidFill>
+            <a:srgbClr val="1B3E6E"/>
+          </a:solidFill>
+          <a:ln>
+            <a:noFill/>
+          </a:ln>
+          <a:effectLst/>
+        </p:spPr>
+        <p:style>
+          <a:lnRef idx="1">
+            <a:schemeClr val="accent1"/>
+          </a:lnRef>
+          <a:fillRef idx="3">
+            <a:schemeClr val="accent1"/>
+          </a:fillRef>
+          <a:effectRef idx="2">
+            <a:schemeClr val="accent1"/>
+          </a:effectRef>
+          <a:fontRef idx="minor">
+            <a:schemeClr val="lt1"/>
+          </a:fontRef>
+        </p:style>
+        <p:txBody>
+          <a:bodyPr rtlCol="0" anchor="ctr"/>
+          <a:lstStyle/>
+          <a:p>
+            <a:pPr algn="ctr"/>
+          </a:p>
+        </p:txBody>
+      </p:sp>
+      <p:sp>
+        <p:nvSpPr>
+          <p:cNvPr id="3" name="TextBox 2"/>
+          <p:cNvSpPr txBox="1"/>
+          <p:nvPr/>
+        </p:nvSpPr>
+        <p:spPr>
+          <a:xfrm>
+            <a:off x="365760" y="365760"/>
+            <a:ext cx="8412480" cy="457200"/>
+          </a:xfrm>
+          <a:prstGeom prst="rect">
+            <a:avLst/>
+          </a:prstGeom>
+          <a:noFill/>
+        </p:spPr>
+        <p:txBody>
+          <a:bodyPr wrap="square" lIns="0" rIns="0" tIns="0" bIns="0" anchor="t">
+            <a:spAutoFit/>
+          </a:bodyPr>
+          <a:lstStyle/>
+          <a:p>
+            <a:pPr algn="l">
+              <a:lnSpc>
+                <a:spcPct val="100000"/>
+              </a:lnSpc>
+              <a:spcBef>
+                <a:spcPts val="0"/>
+              </a:spcBef>
+              <a:spcAft>
+                <a:spcPts val="0"/>
+              </a:spcAft>
+            </a:pPr>
+            <a:r>
+              <a:rPr sz="2000" b="0" i="0">
+                <a:solidFill>
+                  <a:srgbClr val="1B3E6E"/>
+                </a:solidFill>
+                <a:latin typeface="Georgia"/>
+              </a:rPr>
+              <a:t>Solution 1 — the AI-enabled planning &amp; procurement build ($150k)</a:t>
+            </a:r>
+          </a:p>
+        </p:txBody>
+      </p:sp>
+      <p:sp>
+        <p:nvSpPr>
+          <p:cNvPr id="4" name="TextBox 3"/>
+          <p:cNvSpPr txBox="1"/>
+          <p:nvPr/>
+        </p:nvSpPr>
+        <p:spPr>
+          <a:xfrm>
+            <a:off x="365760" y="822960"/>
+            <a:ext cx="8412480" cy="438912"/>
+          </a:xfrm>
+          <a:prstGeom prst="rect">
+            <a:avLst/>
+          </a:prstGeom>
+          <a:noFill/>
+        </p:spPr>
+        <p:txBody>
+          <a:bodyPr wrap="square" lIns="0" rIns="0" tIns="0" bIns="0" anchor="t">
+            <a:spAutoFit/>
+          </a:bodyPr>
+          <a:lstStyle/>
+          <a:p>
+            <a:pPr algn="l">
+              <a:lnSpc>
+                <a:spcPct val="100000"/>
+              </a:lnSpc>
+              <a:spcBef>
+                <a:spcPts val="0"/>
+              </a:spcBef>
+              <a:spcAft>
+                <a:spcPts val="0"/>
+              </a:spcAft>
+            </a:pPr>
+            <a:r>
+              <a:rPr sz="1050" b="0" i="0">
+                <a:solidFill>
+                  <a:srgbClr val="333333"/>
+                </a:solidFill>
+                <a:latin typeface="Arial"/>
+              </a:rPr>
+              <a:t>Connecting real-time demand signals to kitchen production and procurement — the technology that closes Gap 1.</a:t>
+            </a:r>
+          </a:p>
+        </p:txBody>
+      </p:sp>
+      <p:sp>
+        <p:nvSpPr>
+          <p:cNvPr id="5" name="Rectangle 4"/>
+          <p:cNvSpPr/>
+          <p:nvPr/>
+        </p:nvSpPr>
+        <p:spPr>
+          <a:xfrm>
+            <a:off x="502920" y="6071616"/>
+            <a:ext cx="8138159" cy="365760"/>
+          </a:xfrm>
+          <a:prstGeom prst="rect">
+            <a:avLst/>
+          </a:prstGeom>
+          <a:solidFill>
+            <a:srgbClr val="D9D9D9"/>
+          </a:solidFill>
+          <a:ln>
+            <a:noFill/>
+          </a:ln>
+          <a:effectLst/>
+        </p:spPr>
+        <p:style>
+          <a:lnRef idx="1">
+            <a:schemeClr val="accent1"/>
+          </a:lnRef>
+          <a:fillRef idx="3">
+            <a:schemeClr val="accent1"/>
+          </a:fillRef>
+          <a:effectRef idx="2">
+            <a:schemeClr val="accent1"/>
+          </a:effectRef>
+          <a:fontRef idx="minor">
+            <a:schemeClr val="lt1"/>
+          </a:fontRef>
+        </p:style>
+        <p:txBody>
+          <a:bodyPr rtlCol="0" anchor="ctr"/>
+          <a:lstStyle/>
+          <a:p>
+            <a:pPr algn="ctr"/>
+          </a:p>
+        </p:txBody>
+      </p:sp>
+      <p:sp>
+        <p:nvSpPr>
+          <p:cNvPr id="6" name="TextBox 5"/>
+          <p:cNvSpPr txBox="1"/>
+          <p:nvPr/>
+        </p:nvSpPr>
+        <p:spPr>
+          <a:xfrm>
+            <a:off x="640080" y="6071616"/>
+            <a:ext cx="7863840" cy="365760"/>
+          </a:xfrm>
+          <a:prstGeom prst="rect">
+            <a:avLst/>
+          </a:prstGeom>
+          <a:noFill/>
+        </p:spPr>
+        <p:txBody>
+          <a:bodyPr wrap="square" lIns="0" rIns="0" tIns="0" bIns="0" anchor="ctr">
+            <a:spAutoFit/>
+          </a:bodyPr>
+          <a:lstStyle/>
+          <a:p>
+            <a:pPr algn="ctr">
+              <a:lnSpc>
+                <a:spcPct val="95000"/>
+              </a:lnSpc>
+              <a:spcBef>
+                <a:spcPts val="0"/>
+              </a:spcBef>
+              <a:spcAft>
+                <a:spcPts val="0"/>
+              </a:spcAft>
+            </a:pPr>
+            <a:r>
+              <a:rPr sz="1100" b="1" i="0">
+                <a:solidFill>
+                  <a:srgbClr val="1B3E6E"/>
+                </a:solidFill>
+                <a:latin typeface="Georgia"/>
+              </a:rPr>
+              <a:t>“Feeding more children with the same rupee” — AI plus GS capital makes it possible.</a:t>
+            </a:r>
+          </a:p>
+        </p:txBody>
+      </p:sp>
+      <p:sp>
+        <p:nvSpPr>
+          <p:cNvPr id="7" name="TextBox 6"/>
+          <p:cNvSpPr txBox="1"/>
+          <p:nvPr/>
+        </p:nvSpPr>
+        <p:spPr>
+          <a:xfrm>
+            <a:off x="365760" y="6492240"/>
+            <a:ext cx="1280160" cy="329184"/>
+          </a:xfrm>
+          <a:prstGeom prst="rect">
+            <a:avLst/>
+          </a:prstGeom>
+          <a:noFill/>
+        </p:spPr>
+        <p:txBody>
+          <a:bodyPr wrap="square" lIns="0" rIns="0" tIns="0" bIns="0" anchor="t">
+            <a:spAutoFit/>
+          </a:bodyPr>
+          <a:lstStyle/>
+          <a:p>
+            <a:pPr algn="l">
+              <a:lnSpc>
+                <a:spcPct val="90000"/>
+              </a:lnSpc>
+              <a:spcBef>
+                <a:spcPts val="0"/>
+              </a:spcBef>
+              <a:spcAft>
+                <a:spcPts val="0"/>
+              </a:spcAft>
+            </a:pPr>
+            <a:r>
+              <a:rPr sz="900" b="1" i="0">
+                <a:solidFill>
+                  <a:srgbClr val="111111"/>
+                </a:solidFill>
+                <a:latin typeface="Georgia"/>
+              </a:rPr>
+              <a:t>Goldman</a:t>
+            </a:r>
+          </a:p>
+          <a:p>
+            <a:pPr algn="l">
+              <a:lnSpc>
+                <a:spcPct val="90000"/>
+              </a:lnSpc>
+              <a:spcBef>
+                <a:spcPts val="0"/>
+              </a:spcBef>
+              <a:spcAft>
+                <a:spcPts val="0"/>
+              </a:spcAft>
+            </a:pPr>
+            <a:r>
+              <a:rPr sz="900" b="1" i="0">
+                <a:solidFill>
+                  <a:srgbClr val="111111"/>
+                </a:solidFill>
+                <a:latin typeface="Georgia"/>
+              </a:rPr>
+              <a:t>Sachs</a:t>
+            </a:r>
+          </a:p>
+        </p:txBody>
+      </p:sp>
+      <p:sp>
+        <p:nvSpPr>
+          <p:cNvPr id="8" name="TextBox 7"/>
+          <p:cNvSpPr txBox="1"/>
+          <p:nvPr/>
+        </p:nvSpPr>
+        <p:spPr>
+          <a:xfrm>
+            <a:off x="8321040" y="6528816"/>
+            <a:ext cx="457200" cy="274320"/>
+          </a:xfrm>
+          <a:prstGeom prst="rect">
+            <a:avLst/>
+          </a:prstGeom>
+          <a:noFill/>
+        </p:spPr>
+        <p:txBody>
+          <a:bodyPr wrap="square" lIns="0" rIns="0" tIns="0" bIns="0" anchor="t">
+            <a:spAutoFit/>
+          </a:bodyPr>
+          <a:lstStyle/>
+          <a:p>
+            <a:pPr algn="r">
+              <a:lnSpc>
+                <a:spcPct val="100000"/>
+              </a:lnSpc>
+              <a:spcBef>
+                <a:spcPts val="0"/>
+              </a:spcBef>
+              <a:spcAft>
+                <a:spcPts val="300"/>
+              </a:spcAft>
+            </a:pPr>
+            <a:r>
+              <a:rPr sz="900" b="0" i="0">
+                <a:solidFill>
+                  <a:srgbClr val="727375"/>
+                </a:solidFill>
+                <a:latin typeface="Arial"/>
+              </a:rPr>
+              <a:t>10</a:t>
+            </a:r>
+          </a:p>
+        </p:txBody>
+      </p:sp>
+      <p:sp>
+        <p:nvSpPr>
+          <p:cNvPr id="9" name="TextBox 8"/>
+          <p:cNvSpPr txBox="1"/>
+          <p:nvPr/>
+        </p:nvSpPr>
+        <p:spPr>
+          <a:xfrm>
+            <a:off x="4754879" y="54864"/>
+            <a:ext cx="4023360" cy="182880"/>
+          </a:xfrm>
+          <a:prstGeom prst="rect">
+            <a:avLst/>
+          </a:prstGeom>
+          <a:noFill/>
+        </p:spPr>
+        <p:txBody>
+          <a:bodyPr wrap="square" lIns="0" rIns="0" tIns="0" bIns="0" anchor="t">
+            <a:spAutoFit/>
+          </a:bodyPr>
+          <a:lstStyle/>
+          <a:p>
+            <a:pPr algn="r">
+              <a:lnSpc>
+                <a:spcPct val="100000"/>
+              </a:lnSpc>
+              <a:spcBef>
+                <a:spcPts val="0"/>
+              </a:spcBef>
+              <a:spcAft>
+                <a:spcPts val="0"/>
+              </a:spcAft>
+            </a:pPr>
+            <a:r>
+              <a:rPr sz="750" b="0" i="1">
+                <a:solidFill>
+                  <a:srgbClr val="727375"/>
+                </a:solidFill>
+                <a:latin typeface="Arial"/>
+              </a:rPr>
+              <a:t>PROPOSED SLIDE 4 — OPTION B (pipeline)</a:t>
+            </a:r>
+          </a:p>
+        </p:txBody>
+      </p:sp>
+      <p:sp>
+        <p:nvSpPr>
+          <p:cNvPr id="10" name="Rectangle 9"/>
+          <p:cNvSpPr/>
+          <p:nvPr/>
+        </p:nvSpPr>
+        <p:spPr>
+          <a:xfrm>
+            <a:off x="365760" y="1353312"/>
+            <a:ext cx="54864" cy="182880"/>
+          </a:xfrm>
+          <a:prstGeom prst="rect">
+            <a:avLst/>
+          </a:prstGeom>
+          <a:solidFill>
+            <a:srgbClr val="095F61"/>
+          </a:solidFill>
+          <a:ln>
+            <a:noFill/>
+          </a:ln>
+          <a:effectLst/>
+        </p:spPr>
+        <p:style>
+          <a:lnRef idx="1">
+            <a:schemeClr val="accent1"/>
+          </a:lnRef>
+          <a:fillRef idx="3">
+            <a:schemeClr val="accent1"/>
+          </a:fillRef>
+          <a:effectRef idx="2">
+            <a:schemeClr val="accent1"/>
+          </a:effectRef>
+          <a:fontRef idx="minor">
+            <a:schemeClr val="lt1"/>
+          </a:fontRef>
+        </p:style>
+        <p:txBody>
+          <a:bodyPr rtlCol="0" anchor="ctr"/>
+          <a:lstStyle/>
+          <a:p>
+            <a:pPr algn="ctr"/>
+          </a:p>
+        </p:txBody>
+      </p:sp>
+      <p:sp>
+        <p:nvSpPr>
+          <p:cNvPr id="11" name="TextBox 10"/>
+          <p:cNvSpPr txBox="1"/>
+          <p:nvPr/>
+        </p:nvSpPr>
+        <p:spPr>
+          <a:xfrm>
+            <a:off x="512064" y="1325880"/>
+            <a:ext cx="3968496" cy="256032"/>
+          </a:xfrm>
+          <a:prstGeom prst="rect">
+            <a:avLst/>
+          </a:prstGeom>
+          <a:noFill/>
+        </p:spPr>
+        <p:txBody>
+          <a:bodyPr wrap="square" lIns="0" rIns="0" tIns="0" bIns="0" anchor="t">
+            <a:spAutoFit/>
+          </a:bodyPr>
+          <a:lstStyle/>
+          <a:p>
+            <a:pPr algn="l">
+              <a:lnSpc>
+                <a:spcPct val="100000"/>
+              </a:lnSpc>
+              <a:spcBef>
+                <a:spcPts val="0"/>
+              </a:spcBef>
+              <a:spcAft>
+                <a:spcPts val="0"/>
+              </a:spcAft>
+            </a:pPr>
+            <a:r>
+              <a:rPr sz="1000" b="1" i="0">
+                <a:solidFill>
+                  <a:srgbClr val="1B3E6E"/>
+                </a:solidFill>
+                <a:latin typeface="Arial"/>
+              </a:rPr>
+              <a:t>PILLAR 1 — Predictive Demand Forecasting</a:t>
+            </a:r>
+          </a:p>
+        </p:txBody>
+      </p:sp>
+      <p:sp>
+        <p:nvSpPr>
+          <p:cNvPr id="12" name="Rectangle 11"/>
+          <p:cNvSpPr/>
+          <p:nvPr/>
+        </p:nvSpPr>
+        <p:spPr>
+          <a:xfrm>
+            <a:off x="365760" y="1600200"/>
+            <a:ext cx="4114800" cy="10972"/>
+          </a:xfrm>
+          <a:prstGeom prst="rect">
+            <a:avLst/>
+          </a:prstGeom>
+          <a:solidFill>
+            <a:srgbClr val="BFBFBF"/>
+          </a:solidFill>
+          <a:ln>
+            <a:noFill/>
+          </a:ln>
+          <a:effectLst/>
+        </p:spPr>
+        <p:style>
+          <a:lnRef idx="1">
+            <a:schemeClr val="accent1"/>
+          </a:lnRef>
+          <a:fillRef idx="3">
+            <a:schemeClr val="accent1"/>
+          </a:fillRef>
+          <a:effectRef idx="2">
+            <a:schemeClr val="accent1"/>
+          </a:effectRef>
+          <a:fontRef idx="minor">
+            <a:schemeClr val="lt1"/>
+          </a:fontRef>
+        </p:style>
+        <p:txBody>
+          <a:bodyPr rtlCol="0" anchor="ctr"/>
+          <a:lstStyle/>
+          <a:p>
+            <a:pPr algn="ctr"/>
+          </a:p>
+        </p:txBody>
+      </p:sp>
+      <p:sp>
+        <p:nvSpPr>
+          <p:cNvPr id="13" name="TextBox 12"/>
+          <p:cNvSpPr txBox="1"/>
+          <p:nvPr/>
+        </p:nvSpPr>
+        <p:spPr>
+          <a:xfrm>
+            <a:off x="365760" y="1691640"/>
+            <a:ext cx="4114800" cy="2011680"/>
+          </a:xfrm>
+          <a:prstGeom prst="rect">
+            <a:avLst/>
+          </a:prstGeom>
+          <a:noFill/>
+        </p:spPr>
+        <p:txBody>
+          <a:bodyPr wrap="square" lIns="0" rIns="0" tIns="0" bIns="0" anchor="t">
+            <a:spAutoFit/>
+          </a:bodyPr>
+          <a:lstStyle/>
+          <a:p>
+            <a:pPr algn="l">
+              <a:lnSpc>
+                <a:spcPct val="102000"/>
+              </a:lnSpc>
+              <a:spcBef>
+                <a:spcPts val="0"/>
+              </a:spcBef>
+              <a:spcAft>
+                <a:spcPts val="150"/>
+              </a:spcAft>
+            </a:pPr>
+            <a:r>
+              <a:rPr sz="750" b="1" i="0">
+                <a:solidFill>
+                  <a:srgbClr val="333333"/>
+                </a:solidFill>
+                <a:latin typeface="Arial"/>
+              </a:rPr>
+              <a:t>•  Attendance &amp; enrolment trends </a:t>
+            </a:r>
+            <a:r>
+              <a:rPr sz="750" b="0" i="0">
+                <a:solidFill>
+                  <a:srgbClr val="333333"/>
+                </a:solidFill>
+                <a:latin typeface="Arial"/>
+              </a:rPr>
+              <a:t>estimate how many meals each centre should prepare daily</a:t>
+            </a:r>
+          </a:p>
+          <a:p>
+            <a:pPr algn="l">
+              <a:lnSpc>
+                <a:spcPct val="102000"/>
+              </a:lnSpc>
+              <a:spcBef>
+                <a:spcPts val="0"/>
+              </a:spcBef>
+              <a:spcAft>
+                <a:spcPts val="150"/>
+              </a:spcAft>
+            </a:pPr>
+            <a:r>
+              <a:rPr sz="750" b="1" i="0">
+                <a:solidFill>
+                  <a:srgbClr val="333333"/>
+                </a:solidFill>
+                <a:latin typeface="Arial"/>
+              </a:rPr>
+              <a:t>•  Holiday calendars </a:t>
+            </a:r>
+            <a:r>
+              <a:rPr sz="750" b="0" i="0">
+                <a:solidFill>
+                  <a:srgbClr val="333333"/>
+                </a:solidFill>
+                <a:latin typeface="Arial"/>
+              </a:rPr>
+              <a:t>capture local demand spikes or dips before production quantities are finalised</a:t>
+            </a:r>
+          </a:p>
+          <a:p>
+            <a:pPr algn="l">
+              <a:lnSpc>
+                <a:spcPct val="102000"/>
+              </a:lnSpc>
+              <a:spcBef>
+                <a:spcPts val="0"/>
+              </a:spcBef>
+              <a:spcAft>
+                <a:spcPts val="150"/>
+              </a:spcAft>
+            </a:pPr>
+            <a:r>
+              <a:rPr sz="750" b="1" i="0">
+                <a:solidFill>
+                  <a:srgbClr val="333333"/>
+                </a:solidFill>
+                <a:latin typeface="Arial"/>
+              </a:rPr>
+              <a:t>•  Menu consumption history </a:t>
+            </a:r>
+            <a:r>
+              <a:rPr sz="750" b="0" i="0">
+                <a:solidFill>
+                  <a:srgbClr val="333333"/>
+                </a:solidFill>
+                <a:latin typeface="Arial"/>
+              </a:rPr>
+              <a:t>converts expected meals into ingredient quantities for key staples</a:t>
+            </a:r>
+          </a:p>
+          <a:p>
+            <a:pPr algn="l">
+              <a:lnSpc>
+                <a:spcPct val="102000"/>
+              </a:lnSpc>
+              <a:spcBef>
+                <a:spcPts val="0"/>
+              </a:spcBef>
+              <a:spcAft>
+                <a:spcPts val="150"/>
+              </a:spcAft>
+            </a:pPr>
+            <a:r>
+              <a:rPr sz="750" b="1" i="0">
+                <a:solidFill>
+                  <a:srgbClr val="333333"/>
+                </a:solidFill>
+                <a:latin typeface="Arial"/>
+              </a:rPr>
+              <a:t>•  Weather signals &amp; feedback </a:t>
+            </a:r>
+            <a:r>
+              <a:rPr sz="750" b="0" i="0">
+                <a:solidFill>
+                  <a:srgbClr val="333333"/>
+                </a:solidFill>
+                <a:latin typeface="Arial"/>
+              </a:rPr>
+              <a:t>continuously refine the next centre-level forecast</a:t>
+            </a:r>
+          </a:p>
+        </p:txBody>
+      </p:sp>
+      <p:sp>
+        <p:nvSpPr>
+          <p:cNvPr id="14" name="Rectangle 13"/>
+          <p:cNvSpPr/>
+          <p:nvPr/>
+        </p:nvSpPr>
+        <p:spPr>
+          <a:xfrm>
+            <a:off x="4663440" y="1353312"/>
+            <a:ext cx="54864" cy="182880"/>
+          </a:xfrm>
+          <a:prstGeom prst="rect">
+            <a:avLst/>
+          </a:prstGeom>
+          <a:solidFill>
+            <a:srgbClr val="E08A1E"/>
+          </a:solidFill>
+          <a:ln>
+            <a:noFill/>
+          </a:ln>
+          <a:effectLst/>
+        </p:spPr>
+        <p:style>
+          <a:lnRef idx="1">
+            <a:schemeClr val="accent1"/>
+          </a:lnRef>
+          <a:fillRef idx="3">
+            <a:schemeClr val="accent1"/>
+          </a:fillRef>
+          <a:effectRef idx="2">
+            <a:schemeClr val="accent1"/>
+          </a:effectRef>
+          <a:fontRef idx="minor">
+            <a:schemeClr val="lt1"/>
+          </a:fontRef>
+        </p:style>
+        <p:txBody>
+          <a:bodyPr rtlCol="0" anchor="ctr"/>
+          <a:lstStyle/>
+          <a:p>
+            <a:pPr algn="ctr"/>
+          </a:p>
+        </p:txBody>
+      </p:sp>
+      <p:sp>
+        <p:nvSpPr>
+          <p:cNvPr id="15" name="TextBox 14"/>
+          <p:cNvSpPr txBox="1"/>
+          <p:nvPr/>
+        </p:nvSpPr>
+        <p:spPr>
+          <a:xfrm>
+            <a:off x="4809744" y="1325880"/>
+            <a:ext cx="3968496" cy="256032"/>
+          </a:xfrm>
+          <a:prstGeom prst="rect">
+            <a:avLst/>
+          </a:prstGeom>
+          <a:noFill/>
+        </p:spPr>
+        <p:txBody>
+          <a:bodyPr wrap="square" lIns="0" rIns="0" tIns="0" bIns="0" anchor="t">
+            <a:spAutoFit/>
+          </a:bodyPr>
+          <a:lstStyle/>
+          <a:p>
+            <a:pPr algn="l">
+              <a:lnSpc>
+                <a:spcPct val="100000"/>
+              </a:lnSpc>
+              <a:spcBef>
+                <a:spcPts val="0"/>
+              </a:spcBef>
+              <a:spcAft>
+                <a:spcPts val="0"/>
+              </a:spcAft>
+            </a:pPr>
+            <a:r>
+              <a:rPr sz="1000" b="1" i="0">
+                <a:solidFill>
+                  <a:srgbClr val="1B3E6E"/>
+                </a:solidFill>
+                <a:latin typeface="Arial"/>
+              </a:rPr>
+              <a:t>PILLAR 2 — Spatial-Temporal Procurement</a:t>
+            </a:r>
+          </a:p>
+        </p:txBody>
+      </p:sp>
+      <p:sp>
+        <p:nvSpPr>
+          <p:cNvPr id="16" name="Rectangle 15"/>
+          <p:cNvSpPr/>
+          <p:nvPr/>
+        </p:nvSpPr>
+        <p:spPr>
+          <a:xfrm>
+            <a:off x="4663440" y="1600200"/>
+            <a:ext cx="4114800" cy="10972"/>
+          </a:xfrm>
+          <a:prstGeom prst="rect">
+            <a:avLst/>
+          </a:prstGeom>
+          <a:solidFill>
+            <a:srgbClr val="BFBFBF"/>
+          </a:solidFill>
+          <a:ln>
+            <a:noFill/>
+          </a:ln>
+          <a:effectLst/>
+        </p:spPr>
+        <p:style>
+          <a:lnRef idx="1">
+            <a:schemeClr val="accent1"/>
+          </a:lnRef>
+          <a:fillRef idx="3">
+            <a:schemeClr val="accent1"/>
+          </a:fillRef>
+          <a:effectRef idx="2">
+            <a:schemeClr val="accent1"/>
+          </a:effectRef>
+          <a:fontRef idx="minor">
+            <a:schemeClr val="lt1"/>
+          </a:fontRef>
+        </p:style>
+        <p:txBody>
+          <a:bodyPr rtlCol="0" anchor="ctr"/>
+          <a:lstStyle/>
+          <a:p>
+            <a:pPr algn="ctr"/>
+          </a:p>
+        </p:txBody>
+      </p:sp>
+      <p:sp>
+        <p:nvSpPr>
+          <p:cNvPr id="17" name="TextBox 16"/>
+          <p:cNvSpPr txBox="1"/>
+          <p:nvPr/>
+        </p:nvSpPr>
+        <p:spPr>
+          <a:xfrm>
+            <a:off x="4663440" y="1691640"/>
+            <a:ext cx="4114800" cy="2011680"/>
+          </a:xfrm>
+          <a:prstGeom prst="rect">
+            <a:avLst/>
+          </a:prstGeom>
+          <a:noFill/>
+        </p:spPr>
+        <p:txBody>
+          <a:bodyPr wrap="square" lIns="0" rIns="0" tIns="0" bIns="0" anchor="t">
+            <a:spAutoFit/>
+          </a:bodyPr>
+          <a:lstStyle/>
+          <a:p>
+            <a:pPr algn="l">
+              <a:lnSpc>
+                <a:spcPct val="102000"/>
+              </a:lnSpc>
+              <a:spcBef>
+                <a:spcPts val="0"/>
+              </a:spcBef>
+              <a:spcAft>
+                <a:spcPts val="150"/>
+              </a:spcAft>
+            </a:pPr>
+            <a:r>
+              <a:rPr sz="750" b="1" i="0">
+                <a:solidFill>
+                  <a:srgbClr val="333333"/>
+                </a:solidFill>
+                <a:latin typeface="Arial"/>
+              </a:rPr>
+              <a:t>•  Seasonal price troughs </a:t>
+            </a:r>
+            <a:r>
+              <a:rPr sz="750" b="0" i="0">
+                <a:solidFill>
+                  <a:srgbClr val="333333"/>
+                </a:solidFill>
+                <a:latin typeface="Arial"/>
+              </a:rPr>
+              <a:t>identify when each commodity should be bought before prices rise</a:t>
+            </a:r>
+          </a:p>
+          <a:p>
+            <a:pPr algn="l">
+              <a:lnSpc>
+                <a:spcPct val="102000"/>
+              </a:lnSpc>
+              <a:spcBef>
+                <a:spcPts val="0"/>
+              </a:spcBef>
+              <a:spcAft>
+                <a:spcPts val="150"/>
+              </a:spcAft>
+            </a:pPr>
+            <a:r>
+              <a:rPr sz="750" b="1" i="0">
+                <a:solidFill>
+                  <a:srgbClr val="333333"/>
+                </a:solidFill>
+                <a:latin typeface="Arial"/>
+              </a:rPr>
+              <a:t>•  Surplus-region signals </a:t>
+            </a:r>
+            <a:r>
+              <a:rPr sz="750" b="0" i="0">
+                <a:solidFill>
+                  <a:srgbClr val="333333"/>
+                </a:solidFill>
+                <a:latin typeface="Arial"/>
+              </a:rPr>
+              <a:t>identify where each commodity can be sourced at lower landed cost</a:t>
+            </a:r>
+          </a:p>
+          <a:p>
+            <a:pPr algn="l">
+              <a:lnSpc>
+                <a:spcPct val="102000"/>
+              </a:lnSpc>
+              <a:spcBef>
+                <a:spcPts val="0"/>
+              </a:spcBef>
+              <a:spcAft>
+                <a:spcPts val="150"/>
+              </a:spcAft>
+            </a:pPr>
+            <a:r>
+              <a:rPr sz="750" b="1" i="0">
+                <a:solidFill>
+                  <a:srgbClr val="333333"/>
+                </a:solidFill>
+                <a:latin typeface="Arial"/>
+              </a:rPr>
+              <a:t>•  Logistics, handling &amp; storage costs </a:t>
+            </a:r>
+            <a:r>
+              <a:rPr sz="750" b="0" i="0">
+                <a:solidFill>
+                  <a:srgbClr val="333333"/>
+                </a:solidFill>
+                <a:latin typeface="Arial"/>
+              </a:rPr>
+              <a:t>are included in every sourcing recommendation</a:t>
+            </a:r>
+          </a:p>
+          <a:p>
+            <a:pPr algn="l">
+              <a:lnSpc>
+                <a:spcPct val="102000"/>
+              </a:lnSpc>
+              <a:spcBef>
+                <a:spcPts val="0"/>
+              </a:spcBef>
+              <a:spcAft>
+                <a:spcPts val="150"/>
+              </a:spcAft>
+            </a:pPr>
+            <a:r>
+              <a:rPr sz="750" b="1" i="0">
+                <a:solidFill>
+                  <a:srgbClr val="333333"/>
+                </a:solidFill>
+                <a:latin typeface="Arial"/>
+              </a:rPr>
+              <a:t>•  Quality grades &amp; shelf-life rules </a:t>
+            </a:r>
+            <a:r>
+              <a:rPr sz="750" b="0" i="0">
+                <a:solidFill>
+                  <a:srgbClr val="333333"/>
+                </a:solidFill>
+                <a:latin typeface="Arial"/>
+              </a:rPr>
+              <a:t>are locked into the final buying plan</a:t>
+            </a:r>
+          </a:p>
+        </p:txBody>
+      </p:sp>
+      <p:sp>
+        <p:nvSpPr>
+          <p:cNvPr id="18" name="Rounded Rectangle 17"/>
+          <p:cNvSpPr/>
+          <p:nvPr/>
+        </p:nvSpPr>
+        <p:spPr>
+          <a:xfrm>
+            <a:off x="365760" y="2761488"/>
+            <a:ext cx="1481328" cy="566928"/>
+          </a:xfrm>
+          <a:prstGeom prst="roundRect">
+            <a:avLst>
+              <a:gd name="adj" fmla="val 18000"/>
+            </a:avLst>
+          </a:prstGeom>
+          <a:solidFill>
+            <a:srgbClr val="1B3E6E"/>
+          </a:solidFill>
+          <a:ln>
+            <a:noFill/>
+          </a:ln>
+          <a:effectLst/>
+        </p:spPr>
+        <p:style>
+          <a:lnRef idx="1">
+            <a:schemeClr val="accent1"/>
+          </a:lnRef>
+          <a:fillRef idx="3">
+            <a:schemeClr val="accent1"/>
+          </a:fillRef>
+          <a:effectRef idx="2">
+            <a:schemeClr val="accent1"/>
+          </a:effectRef>
+          <a:fontRef idx="minor">
+            <a:schemeClr val="lt1"/>
+          </a:fontRef>
+        </p:style>
+        <p:txBody>
+          <a:bodyPr rtlCol="0" anchor="ctr"/>
+          <a:lstStyle/>
+          <a:p>
+            <a:pPr algn="ctr"/>
+          </a:p>
+        </p:txBody>
+      </p:sp>
+      <p:sp>
+        <p:nvSpPr>
+          <p:cNvPr id="19" name="TextBox 18"/>
+          <p:cNvSpPr txBox="1"/>
+          <p:nvPr/>
+        </p:nvSpPr>
+        <p:spPr>
+          <a:xfrm>
+            <a:off x="365760" y="2798064"/>
+            <a:ext cx="1481328" cy="493776"/>
+          </a:xfrm>
+          <a:prstGeom prst="rect">
+            <a:avLst/>
+          </a:prstGeom>
+          <a:noFill/>
+        </p:spPr>
+        <p:txBody>
+          <a:bodyPr wrap="square" lIns="0" rIns="0" tIns="0" bIns="0" anchor="ctr">
+            <a:spAutoFit/>
+          </a:bodyPr>
+          <a:lstStyle/>
+          <a:p>
+            <a:pPr algn="ctr">
+              <a:lnSpc>
+                <a:spcPct val="90000"/>
+              </a:lnSpc>
+              <a:spcBef>
+                <a:spcPts val="0"/>
+              </a:spcBef>
+              <a:spcAft>
+                <a:spcPts val="100"/>
+              </a:spcAft>
+            </a:pPr>
+            <a:r>
+              <a:rPr sz="850" b="1" i="0">
+                <a:solidFill>
+                  <a:srgbClr val="FFFFFF"/>
+                </a:solidFill>
+                <a:latin typeface="Arial"/>
+              </a:rPr>
+              <a:t>INGEST</a:t>
+            </a:r>
+          </a:p>
+          <a:p>
+            <a:pPr algn="ctr">
+              <a:lnSpc>
+                <a:spcPct val="90000"/>
+              </a:lnSpc>
+              <a:spcBef>
+                <a:spcPts val="0"/>
+              </a:spcBef>
+              <a:spcAft>
+                <a:spcPts val="0"/>
+              </a:spcAft>
+            </a:pPr>
+            <a:r>
+              <a:rPr sz="600" b="0" i="0">
+                <a:solidFill>
+                  <a:srgbClr val="FFFFFF"/>
+                </a:solidFill>
+                <a:latin typeface="Arial"/>
+              </a:rPr>
+              <a:t>live prices, weather, attendance</a:t>
+            </a:r>
+          </a:p>
+        </p:txBody>
+      </p:sp>
+      <p:cxnSp>
+        <p:nvCxnSpPr>
+          <p:cNvPr id="20" name="Connector 19"/>
+          <p:cNvCxnSpPr/>
+          <p:nvPr/>
+        </p:nvCxnSpPr>
+        <p:spPr>
+          <a:xfrm>
+            <a:off x="1874519" y="3044952"/>
+            <a:ext cx="196597" cy="0"/>
+          </a:xfrm>
+          <a:prstGeom prst="curvedConnector3">
+            <a:avLst/>
+          </a:prstGeom>
+          <a:ln w="13970">
+            <a:solidFill>
+              <a:srgbClr val="727375"/>
+            </a:solidFill>
+            <a:prstDash val="sysDash"/>
+            <a:tailEnd type="triangle" w="med" len="med"/>
+          </a:ln>
+          <a:effectLst/>
+        </p:spPr>
+        <p:style>
+          <a:lnRef idx="2">
+            <a:schemeClr val="accent1"/>
+          </a:lnRef>
+          <a:fillRef idx="0">
+            <a:schemeClr val="accent1"/>
+          </a:fillRef>
+          <a:effectRef idx="1">
+            <a:schemeClr val="accent1"/>
+          </a:effectRef>
+          <a:fontRef idx="minor">
+            <a:schemeClr val="tx1"/>
+          </a:fontRef>
+        </p:style>
+      </p:cxnSp>
+      <p:sp>
+        <p:nvSpPr>
+          <p:cNvPr id="21" name="Rounded Rectangle 20"/>
+          <p:cNvSpPr/>
+          <p:nvPr/>
+        </p:nvSpPr>
+        <p:spPr>
+          <a:xfrm>
+            <a:off x="2098548" y="2761488"/>
+            <a:ext cx="1481328" cy="566928"/>
+          </a:xfrm>
+          <a:prstGeom prst="roundRect">
+            <a:avLst>
+              <a:gd name="adj" fmla="val 18000"/>
+            </a:avLst>
+          </a:prstGeom>
+          <a:solidFill>
+            <a:srgbClr val="3B6EA5"/>
+          </a:solidFill>
+          <a:ln>
+            <a:noFill/>
+          </a:ln>
+          <a:effectLst/>
+        </p:spPr>
+        <p:style>
+          <a:lnRef idx="1">
+            <a:schemeClr val="accent1"/>
+          </a:lnRef>
+          <a:fillRef idx="3">
+            <a:schemeClr val="accent1"/>
+          </a:fillRef>
+          <a:effectRef idx="2">
+            <a:schemeClr val="accent1"/>
+          </a:effectRef>
+          <a:fontRef idx="minor">
+            <a:schemeClr val="lt1"/>
+          </a:fontRef>
+        </p:style>
+        <p:txBody>
+          <a:bodyPr rtlCol="0" anchor="ctr"/>
+          <a:lstStyle/>
+          <a:p>
+            <a:pPr algn="ctr"/>
+          </a:p>
+        </p:txBody>
+      </p:sp>
+      <p:sp>
+        <p:nvSpPr>
+          <p:cNvPr id="22" name="TextBox 21"/>
+          <p:cNvSpPr txBox="1"/>
+          <p:nvPr/>
+        </p:nvSpPr>
+        <p:spPr>
+          <a:xfrm>
+            <a:off x="2098548" y="2798064"/>
+            <a:ext cx="1481328" cy="493776"/>
+          </a:xfrm>
+          <a:prstGeom prst="rect">
+            <a:avLst/>
+          </a:prstGeom>
+          <a:noFill/>
+        </p:spPr>
+        <p:txBody>
+          <a:bodyPr wrap="square" lIns="0" rIns="0" tIns="0" bIns="0" anchor="ctr">
+            <a:spAutoFit/>
+          </a:bodyPr>
+          <a:lstStyle/>
+          <a:p>
+            <a:pPr algn="ctr">
+              <a:lnSpc>
+                <a:spcPct val="90000"/>
+              </a:lnSpc>
+              <a:spcBef>
+                <a:spcPts val="0"/>
+              </a:spcBef>
+              <a:spcAft>
+                <a:spcPts val="100"/>
+              </a:spcAft>
+            </a:pPr>
+            <a:r>
+              <a:rPr sz="850" b="1" i="0">
+                <a:solidFill>
+                  <a:srgbClr val="FFFFFF"/>
+                </a:solidFill>
+                <a:latin typeface="Arial"/>
+              </a:rPr>
+              <a:t>FORECAST</a:t>
+            </a:r>
+          </a:p>
+          <a:p>
+            <a:pPr algn="ctr">
+              <a:lnSpc>
+                <a:spcPct val="90000"/>
+              </a:lnSpc>
+              <a:spcBef>
+                <a:spcPts val="0"/>
+              </a:spcBef>
+              <a:spcAft>
+                <a:spcPts val="0"/>
+              </a:spcAft>
+            </a:pPr>
+            <a:r>
+              <a:rPr sz="600" b="0" i="0">
+                <a:solidFill>
+                  <a:srgbClr val="FFFFFF"/>
+                </a:solidFill>
+                <a:latin typeface="Arial"/>
+              </a:rPr>
+              <a:t>ingredient-level demand</a:t>
+            </a:r>
+          </a:p>
+        </p:txBody>
+      </p:sp>
+      <p:cxnSp>
+        <p:nvCxnSpPr>
+          <p:cNvPr id="23" name="Connector 22"/>
+          <p:cNvCxnSpPr/>
+          <p:nvPr/>
+        </p:nvCxnSpPr>
+        <p:spPr>
+          <a:xfrm>
+            <a:off x="3607308" y="3044952"/>
+            <a:ext cx="196596" cy="0"/>
+          </a:xfrm>
+          <a:prstGeom prst="curvedConnector3">
+            <a:avLst/>
+          </a:prstGeom>
+          <a:ln w="13970">
+            <a:solidFill>
+              <a:srgbClr val="727375"/>
+            </a:solidFill>
+            <a:prstDash val="sysDash"/>
+            <a:tailEnd type="triangle" w="med" len="med"/>
+          </a:ln>
+          <a:effectLst/>
+        </p:spPr>
+        <p:style>
+          <a:lnRef idx="2">
+            <a:schemeClr val="accent1"/>
+          </a:lnRef>
+          <a:fillRef idx="0">
+            <a:schemeClr val="accent1"/>
+          </a:fillRef>
+          <a:effectRef idx="1">
+            <a:schemeClr val="accent1"/>
+          </a:effectRef>
+          <a:fontRef idx="minor">
+            <a:schemeClr val="tx1"/>
+          </a:fontRef>
+        </p:style>
+      </p:cxnSp>
+      <p:sp>
+        <p:nvSpPr>
+          <p:cNvPr id="24" name="Rounded Rectangle 23"/>
+          <p:cNvSpPr/>
+          <p:nvPr/>
+        </p:nvSpPr>
+        <p:spPr>
+          <a:xfrm>
+            <a:off x="3831335" y="2761488"/>
+            <a:ext cx="1481328" cy="566928"/>
+          </a:xfrm>
+          <a:prstGeom prst="roundRect">
+            <a:avLst>
+              <a:gd name="adj" fmla="val 18000"/>
+            </a:avLst>
+          </a:prstGeom>
+          <a:solidFill>
+            <a:srgbClr val="398025"/>
+          </a:solidFill>
+          <a:ln>
+            <a:noFill/>
+          </a:ln>
+          <a:effectLst/>
+        </p:spPr>
+        <p:style>
+          <a:lnRef idx="1">
+            <a:schemeClr val="accent1"/>
+          </a:lnRef>
+          <a:fillRef idx="3">
+            <a:schemeClr val="accent1"/>
+          </a:fillRef>
+          <a:effectRef idx="2">
+            <a:schemeClr val="accent1"/>
+          </a:effectRef>
+          <a:fontRef idx="minor">
+            <a:schemeClr val="lt1"/>
+          </a:fontRef>
+        </p:style>
+        <p:txBody>
+          <a:bodyPr rtlCol="0" anchor="ctr"/>
+          <a:lstStyle/>
+          <a:p>
+            <a:pPr algn="ctr"/>
+          </a:p>
+        </p:txBody>
+      </p:sp>
+      <p:sp>
+        <p:nvSpPr>
+          <p:cNvPr id="25" name="TextBox 24"/>
+          <p:cNvSpPr txBox="1"/>
+          <p:nvPr/>
+        </p:nvSpPr>
+        <p:spPr>
+          <a:xfrm>
+            <a:off x="3831335" y="2798064"/>
+            <a:ext cx="1481328" cy="493776"/>
+          </a:xfrm>
+          <a:prstGeom prst="rect">
+            <a:avLst/>
+          </a:prstGeom>
+          <a:noFill/>
+        </p:spPr>
+        <p:txBody>
+          <a:bodyPr wrap="square" lIns="0" rIns="0" tIns="0" bIns="0" anchor="ctr">
+            <a:spAutoFit/>
+          </a:bodyPr>
+          <a:lstStyle/>
+          <a:p>
+            <a:pPr algn="ctr">
+              <a:lnSpc>
+                <a:spcPct val="90000"/>
+              </a:lnSpc>
+              <a:spcBef>
+                <a:spcPts val="0"/>
+              </a:spcBef>
+              <a:spcAft>
+                <a:spcPts val="100"/>
+              </a:spcAft>
+            </a:pPr>
+            <a:r>
+              <a:rPr sz="850" b="1" i="0">
+                <a:solidFill>
+                  <a:srgbClr val="FFFFFF"/>
+                </a:solidFill>
+                <a:latin typeface="Arial"/>
+              </a:rPr>
+              <a:t>OPTIMIZE</a:t>
+            </a:r>
+          </a:p>
+          <a:p>
+            <a:pPr algn="ctr">
+              <a:lnSpc>
+                <a:spcPct val="90000"/>
+              </a:lnSpc>
+              <a:spcBef>
+                <a:spcPts val="0"/>
+              </a:spcBef>
+              <a:spcAft>
+                <a:spcPts val="0"/>
+              </a:spcAft>
+            </a:pPr>
+            <a:r>
+              <a:rPr sz="600" b="0" i="0">
+                <a:solidFill>
+                  <a:srgbClr val="FFFFFF"/>
+                </a:solidFill>
+                <a:latin typeface="Arial"/>
+              </a:rPr>
+              <a:t>when &amp; where to buy</a:t>
+            </a:r>
+          </a:p>
+        </p:txBody>
+      </p:sp>
+      <p:cxnSp>
+        <p:nvCxnSpPr>
+          <p:cNvPr id="26" name="Connector 25"/>
+          <p:cNvCxnSpPr/>
+          <p:nvPr/>
+        </p:nvCxnSpPr>
+        <p:spPr>
+          <a:xfrm>
+            <a:off x="5340096" y="3044952"/>
+            <a:ext cx="196596" cy="0"/>
+          </a:xfrm>
+          <a:prstGeom prst="curvedConnector3">
+            <a:avLst/>
+          </a:prstGeom>
+          <a:ln w="13970">
+            <a:solidFill>
+              <a:srgbClr val="727375"/>
+            </a:solidFill>
+            <a:prstDash val="sysDash"/>
+            <a:tailEnd type="triangle" w="med" len="med"/>
+          </a:ln>
+          <a:effectLst/>
+        </p:spPr>
+        <p:style>
+          <a:lnRef idx="2">
+            <a:schemeClr val="accent1"/>
+          </a:lnRef>
+          <a:fillRef idx="0">
+            <a:schemeClr val="accent1"/>
+          </a:fillRef>
+          <a:effectRef idx="1">
+            <a:schemeClr val="accent1"/>
+          </a:effectRef>
+          <a:fontRef idx="minor">
+            <a:schemeClr val="tx1"/>
+          </a:fontRef>
+        </p:style>
+      </p:cxnSp>
+      <p:sp>
+        <p:nvSpPr>
+          <p:cNvPr id="27" name="Rounded Rectangle 26"/>
+          <p:cNvSpPr/>
+          <p:nvPr/>
+        </p:nvSpPr>
+        <p:spPr>
+          <a:xfrm>
+            <a:off x="5564123" y="2761488"/>
+            <a:ext cx="1481328" cy="566928"/>
+          </a:xfrm>
+          <a:prstGeom prst="roundRect">
+            <a:avLst>
+              <a:gd name="adj" fmla="val 18000"/>
+            </a:avLst>
+          </a:prstGeom>
+          <a:solidFill>
+            <a:srgbClr val="E08A1E"/>
+          </a:solidFill>
+          <a:ln>
+            <a:noFill/>
+          </a:ln>
+          <a:effectLst/>
+        </p:spPr>
+        <p:style>
+          <a:lnRef idx="1">
+            <a:schemeClr val="accent1"/>
+          </a:lnRef>
+          <a:fillRef idx="3">
+            <a:schemeClr val="accent1"/>
+          </a:fillRef>
+          <a:effectRef idx="2">
+            <a:schemeClr val="accent1"/>
+          </a:effectRef>
+          <a:fontRef idx="minor">
+            <a:schemeClr val="lt1"/>
+          </a:fontRef>
+        </p:style>
+        <p:txBody>
+          <a:bodyPr rtlCol="0" anchor="ctr"/>
+          <a:lstStyle/>
+          <a:p>
+            <a:pPr algn="ctr"/>
+          </a:p>
+        </p:txBody>
+      </p:sp>
+      <p:sp>
+        <p:nvSpPr>
+          <p:cNvPr id="28" name="TextBox 27"/>
+          <p:cNvSpPr txBox="1"/>
+          <p:nvPr/>
+        </p:nvSpPr>
+        <p:spPr>
+          <a:xfrm>
+            <a:off x="5564123" y="2798064"/>
+            <a:ext cx="1481328" cy="493776"/>
+          </a:xfrm>
+          <a:prstGeom prst="rect">
+            <a:avLst/>
+          </a:prstGeom>
+          <a:noFill/>
+        </p:spPr>
+        <p:txBody>
+          <a:bodyPr wrap="square" lIns="0" rIns="0" tIns="0" bIns="0" anchor="ctr">
+            <a:spAutoFit/>
+          </a:bodyPr>
+          <a:lstStyle/>
+          <a:p>
+            <a:pPr algn="ctr">
+              <a:lnSpc>
+                <a:spcPct val="90000"/>
+              </a:lnSpc>
+              <a:spcBef>
+                <a:spcPts val="0"/>
+              </a:spcBef>
+              <a:spcAft>
+                <a:spcPts val="100"/>
+              </a:spcAft>
+            </a:pPr>
+            <a:r>
+              <a:rPr sz="850" b="1" i="0">
+                <a:solidFill>
+                  <a:srgbClr val="FFFFFF"/>
+                </a:solidFill>
+                <a:latin typeface="Arial"/>
+              </a:rPr>
+              <a:t>RECOMMEND</a:t>
+            </a:r>
+          </a:p>
+          <a:p>
+            <a:pPr algn="ctr">
+              <a:lnSpc>
+                <a:spcPct val="90000"/>
+              </a:lnSpc>
+              <a:spcBef>
+                <a:spcPts val="0"/>
+              </a:spcBef>
+              <a:spcAft>
+                <a:spcPts val="0"/>
+              </a:spcAft>
+            </a:pPr>
+            <a:r>
+              <a:rPr sz="600" b="0" i="0">
+                <a:solidFill>
+                  <a:srgbClr val="FFFFFF"/>
+                </a:solidFill>
+                <a:latin typeface="Arial"/>
+              </a:rPr>
+              <a:t>actionable buying sheet</a:t>
+            </a:r>
+          </a:p>
+        </p:txBody>
+      </p:sp>
+      <p:cxnSp>
+        <p:nvCxnSpPr>
+          <p:cNvPr id="29" name="Connector 28"/>
+          <p:cNvCxnSpPr/>
+          <p:nvPr/>
+        </p:nvCxnSpPr>
+        <p:spPr>
+          <a:xfrm>
+            <a:off x="7072883" y="3044952"/>
+            <a:ext cx="196596" cy="0"/>
+          </a:xfrm>
+          <a:prstGeom prst="curvedConnector3">
+            <a:avLst/>
+          </a:prstGeom>
+          <a:ln w="13970">
+            <a:solidFill>
+              <a:srgbClr val="727375"/>
+            </a:solidFill>
+            <a:prstDash val="sysDash"/>
+            <a:tailEnd type="triangle" w="med" len="med"/>
+          </a:ln>
+          <a:effectLst/>
+        </p:spPr>
+        <p:style>
+          <a:lnRef idx="2">
+            <a:schemeClr val="accent1"/>
+          </a:lnRef>
+          <a:fillRef idx="0">
+            <a:schemeClr val="accent1"/>
+          </a:fillRef>
+          <a:effectRef idx="1">
+            <a:schemeClr val="accent1"/>
+          </a:effectRef>
+          <a:fontRef idx="minor">
+            <a:schemeClr val="tx1"/>
+          </a:fontRef>
+        </p:style>
+      </p:cxnSp>
+      <p:sp>
+        <p:nvSpPr>
+          <p:cNvPr id="30" name="Rounded Rectangle 29"/>
+          <p:cNvSpPr/>
+          <p:nvPr/>
+        </p:nvSpPr>
+        <p:spPr>
+          <a:xfrm>
+            <a:off x="7296911" y="2761488"/>
+            <a:ext cx="1481328" cy="566928"/>
+          </a:xfrm>
+          <a:prstGeom prst="roundRect">
+            <a:avLst>
+              <a:gd name="adj" fmla="val 18000"/>
+            </a:avLst>
+          </a:prstGeom>
+          <a:solidFill>
+            <a:srgbClr val="A6428C"/>
+          </a:solidFill>
+          <a:ln>
+            <a:noFill/>
+          </a:ln>
+          <a:effectLst/>
+        </p:spPr>
+        <p:style>
+          <a:lnRef idx="1">
+            <a:schemeClr val="accent1"/>
+          </a:lnRef>
+          <a:fillRef idx="3">
+            <a:schemeClr val="accent1"/>
+          </a:fillRef>
+          <a:effectRef idx="2">
+            <a:schemeClr val="accent1"/>
+          </a:effectRef>
+          <a:fontRef idx="minor">
+            <a:schemeClr val="lt1"/>
+          </a:fontRef>
+        </p:style>
+        <p:txBody>
+          <a:bodyPr rtlCol="0" anchor="ctr"/>
+          <a:lstStyle/>
+          <a:p>
+            <a:pPr algn="ctr"/>
+          </a:p>
+        </p:txBody>
+      </p:sp>
+      <p:sp>
+        <p:nvSpPr>
+          <p:cNvPr id="31" name="TextBox 30"/>
+          <p:cNvSpPr txBox="1"/>
+          <p:nvPr/>
+        </p:nvSpPr>
+        <p:spPr>
+          <a:xfrm>
+            <a:off x="7296911" y="2798064"/>
+            <a:ext cx="1481328" cy="493776"/>
+          </a:xfrm>
+          <a:prstGeom prst="rect">
+            <a:avLst/>
+          </a:prstGeom>
+          <a:noFill/>
+        </p:spPr>
+        <p:txBody>
+          <a:bodyPr wrap="square" lIns="0" rIns="0" tIns="0" bIns="0" anchor="ctr">
+            <a:spAutoFit/>
+          </a:bodyPr>
+          <a:lstStyle/>
+          <a:p>
+            <a:pPr algn="ctr">
+              <a:lnSpc>
+                <a:spcPct val="90000"/>
+              </a:lnSpc>
+              <a:spcBef>
+                <a:spcPts val="0"/>
+              </a:spcBef>
+              <a:spcAft>
+                <a:spcPts val="100"/>
+              </a:spcAft>
+            </a:pPr>
+            <a:r>
+              <a:rPr sz="850" b="1" i="0">
+                <a:solidFill>
+                  <a:srgbClr val="FFFFFF"/>
+                </a:solidFill>
+                <a:latin typeface="Arial"/>
+              </a:rPr>
+              <a:t>LEARN</a:t>
+            </a:r>
+          </a:p>
+          <a:p>
+            <a:pPr algn="ctr">
+              <a:lnSpc>
+                <a:spcPct val="90000"/>
+              </a:lnSpc>
+              <a:spcBef>
+                <a:spcPts val="0"/>
+              </a:spcBef>
+              <a:spcAft>
+                <a:spcPts val="0"/>
+              </a:spcAft>
+            </a:pPr>
+            <a:r>
+              <a:rPr sz="600" b="0" i="0">
+                <a:solidFill>
+                  <a:srgbClr val="FFFFFF"/>
+                </a:solidFill>
+                <a:latin typeface="Arial"/>
+              </a:rPr>
+              <a:t>feedback trains the model</a:t>
+            </a:r>
+          </a:p>
+        </p:txBody>
+      </p:sp>
+      <p:cxnSp>
+        <p:nvCxnSpPr>
+          <p:cNvPr id="32" name="Connector 31"/>
+          <p:cNvCxnSpPr/>
+          <p:nvPr/>
+        </p:nvCxnSpPr>
+        <p:spPr>
+          <a:xfrm flipH="1">
+            <a:off x="1106424" y="3374136"/>
+            <a:ext cx="6931152" cy="155448"/>
+          </a:xfrm>
+          <a:prstGeom prst="curvedConnector3">
+            <a:avLst/>
+          </a:prstGeom>
+          <a:ln w="13970">
+            <a:solidFill>
+              <a:srgbClr val="727375"/>
+            </a:solidFill>
+            <a:prstDash val="sysDash"/>
+            <a:tailEnd type="triangle" w="med" len="med"/>
+          </a:ln>
+          <a:effectLst/>
+        </p:spPr>
+        <p:style>
+          <a:lnRef idx="2">
+            <a:schemeClr val="accent1"/>
+          </a:lnRef>
+          <a:fillRef idx="0">
+            <a:schemeClr val="accent1"/>
+          </a:fillRef>
+          <a:effectRef idx="1">
+            <a:schemeClr val="accent1"/>
+          </a:effectRef>
+          <a:fontRef idx="minor">
+            <a:schemeClr val="tx1"/>
+          </a:fontRef>
+        </p:style>
+      </p:cxnSp>
+      <p:sp>
+        <p:nvSpPr>
+          <p:cNvPr id="33" name="TextBox 32"/>
+          <p:cNvSpPr txBox="1"/>
+          <p:nvPr/>
+        </p:nvSpPr>
+        <p:spPr>
+          <a:xfrm>
+            <a:off x="365760" y="3547872"/>
+            <a:ext cx="8412480" cy="182880"/>
+          </a:xfrm>
+          <a:prstGeom prst="rect">
+            <a:avLst/>
+          </a:prstGeom>
+          <a:noFill/>
+        </p:spPr>
+        <p:txBody>
+          <a:bodyPr wrap="square" lIns="0" rIns="0" tIns="0" bIns="0" anchor="t">
+            <a:spAutoFit/>
+          </a:bodyPr>
+          <a:lstStyle/>
+          <a:p>
+            <a:pPr algn="ctr">
+              <a:lnSpc>
+                <a:spcPct val="100000"/>
+              </a:lnSpc>
+              <a:spcBef>
+                <a:spcPts val="0"/>
+              </a:spcBef>
+              <a:spcAft>
+                <a:spcPts val="0"/>
+              </a:spcAft>
+            </a:pPr>
+            <a:r>
+              <a:rPr sz="700" b="0" i="1">
+                <a:solidFill>
+                  <a:srgbClr val="727375"/>
+                </a:solidFill>
+                <a:latin typeface="Arial"/>
+              </a:rPr>
+              <a:t>…the loop repeats every day — each cycle makes the next forecast sharper</a:t>
+            </a:r>
+          </a:p>
+        </p:txBody>
+      </p:sp>
+      <p:sp>
+        <p:nvSpPr>
+          <p:cNvPr id="34" name="Rectangle 33"/>
+          <p:cNvSpPr/>
+          <p:nvPr/>
+        </p:nvSpPr>
+        <p:spPr>
+          <a:xfrm>
+            <a:off x="365760" y="4050792"/>
+            <a:ext cx="54864" cy="182880"/>
+          </a:xfrm>
+          <a:prstGeom prst="rect">
+            <a:avLst/>
+          </a:prstGeom>
+          <a:solidFill>
+            <a:srgbClr val="398025"/>
+          </a:solidFill>
+          <a:ln>
+            <a:noFill/>
+          </a:ln>
+          <a:effectLst/>
+        </p:spPr>
+        <p:style>
+          <a:lnRef idx="1">
+            <a:schemeClr val="accent1"/>
+          </a:lnRef>
+          <a:fillRef idx="3">
+            <a:schemeClr val="accent1"/>
+          </a:fillRef>
+          <a:effectRef idx="2">
+            <a:schemeClr val="accent1"/>
+          </a:effectRef>
+          <a:fontRef idx="minor">
+            <a:schemeClr val="lt1"/>
+          </a:fontRef>
+        </p:style>
+        <p:txBody>
+          <a:bodyPr rtlCol="0" anchor="ctr"/>
+          <a:lstStyle/>
+          <a:p>
+            <a:pPr algn="ctr"/>
+          </a:p>
+        </p:txBody>
+      </p:sp>
+      <p:sp>
+        <p:nvSpPr>
+          <p:cNvPr id="35" name="TextBox 34"/>
+          <p:cNvSpPr txBox="1"/>
+          <p:nvPr/>
+        </p:nvSpPr>
+        <p:spPr>
+          <a:xfrm>
+            <a:off x="512064" y="4023360"/>
+            <a:ext cx="4882896" cy="256032"/>
+          </a:xfrm>
+          <a:prstGeom prst="rect">
+            <a:avLst/>
+          </a:prstGeom>
+          <a:noFill/>
+        </p:spPr>
+        <p:txBody>
+          <a:bodyPr wrap="square" lIns="0" rIns="0" tIns="0" bIns="0" anchor="t">
+            <a:spAutoFit/>
+          </a:bodyPr>
+          <a:lstStyle/>
+          <a:p>
+            <a:pPr algn="l">
+              <a:lnSpc>
+                <a:spcPct val="100000"/>
+              </a:lnSpc>
+              <a:spcBef>
+                <a:spcPts val="0"/>
+              </a:spcBef>
+              <a:spcAft>
+                <a:spcPts val="0"/>
+              </a:spcAft>
+            </a:pPr>
+            <a:r>
+              <a:rPr sz="950" b="1" i="0">
+                <a:solidFill>
+                  <a:srgbClr val="1B3E6E"/>
+                </a:solidFill>
+                <a:latin typeface="Arial"/>
+              </a:rPr>
+              <a:t>Rice procurement cost — with vs. without GS funding ($M)</a:t>
+            </a:r>
+          </a:p>
+        </p:txBody>
+      </p:sp>
+      <p:sp>
+        <p:nvSpPr>
+          <p:cNvPr id="36" name="Rectangle 35"/>
+          <p:cNvSpPr/>
+          <p:nvPr/>
+        </p:nvSpPr>
+        <p:spPr>
+          <a:xfrm>
+            <a:off x="365760" y="4297680"/>
+            <a:ext cx="5029200" cy="10972"/>
+          </a:xfrm>
+          <a:prstGeom prst="rect">
+            <a:avLst/>
+          </a:prstGeom>
+          <a:solidFill>
+            <a:srgbClr val="BFBFBF"/>
+          </a:solidFill>
+          <a:ln>
+            <a:noFill/>
+          </a:ln>
+          <a:effectLst/>
+        </p:spPr>
+        <p:style>
+          <a:lnRef idx="1">
+            <a:schemeClr val="accent1"/>
+          </a:lnRef>
+          <a:fillRef idx="3">
+            <a:schemeClr val="accent1"/>
+          </a:fillRef>
+          <a:effectRef idx="2">
+            <a:schemeClr val="accent1"/>
+          </a:effectRef>
+          <a:fontRef idx="minor">
+            <a:schemeClr val="lt1"/>
+          </a:fontRef>
+        </p:style>
+        <p:txBody>
+          <a:bodyPr rtlCol="0" anchor="ctr"/>
+          <a:lstStyle/>
+          <a:p>
+            <a:pPr algn="ctr"/>
+          </a:p>
+        </p:txBody>
+      </p:sp>
+      <p:graphicFrame>
+        <p:nvGraphicFramePr>
+          <p:cNvPr id="37" name="Chart 36"/>
+          <p:cNvGraphicFramePr>
+            <a:graphicFrameLocks noGrp="1"/>
+          </p:cNvGraphicFramePr>
+          <p:nvPr/>
+        </p:nvGraphicFramePr>
+        <p:xfrm>
+          <a:off x="365760" y="4370832"/>
+          <a:ext cx="5029200" cy="1481328"/>
+        </p:xfrm>
+        <a:graphic>
+          <a:graphicData uri="http://schemas.openxmlformats.org/drawingml/2006/chart">
+            <c:chart xmlns:c="http://schemas.openxmlformats.org/drawingml/2006/chart" r:id="rId2"/>
+          </a:graphicData>
+        </a:graphic>
+      </p:graphicFrame>
+      <p:sp>
+        <p:nvSpPr>
+          <p:cNvPr id="38" name="Rounded Rectangle 37"/>
+          <p:cNvSpPr/>
+          <p:nvPr/>
+        </p:nvSpPr>
+        <p:spPr>
+          <a:xfrm>
+            <a:off x="5623560" y="4023360"/>
+            <a:ext cx="3154680" cy="1847088"/>
+          </a:xfrm>
+          <a:prstGeom prst="roundRect">
+            <a:avLst>
+              <a:gd name="adj" fmla="val 6000"/>
+            </a:avLst>
+          </a:prstGeom>
+          <a:solidFill>
+            <a:srgbClr val="398025"/>
+          </a:solidFill>
+          <a:ln>
+            <a:noFill/>
+          </a:ln>
+          <a:effectLst/>
+        </p:spPr>
+        <p:style>
+          <a:lnRef idx="1">
+            <a:schemeClr val="accent1"/>
+          </a:lnRef>
+          <a:fillRef idx="3">
+            <a:schemeClr val="accent1"/>
+          </a:fillRef>
+          <a:effectRef idx="2">
+            <a:schemeClr val="accent1"/>
+          </a:effectRef>
+          <a:fontRef idx="minor">
+            <a:schemeClr val="lt1"/>
+          </a:fontRef>
+        </p:style>
+        <p:txBody>
+          <a:bodyPr rtlCol="0" anchor="ctr"/>
+          <a:lstStyle/>
+          <a:p>
+            <a:pPr algn="ctr"/>
+          </a:p>
+        </p:txBody>
+      </p:sp>
+      <p:sp>
+        <p:nvSpPr>
+          <p:cNvPr id="39" name="TextBox 38"/>
+          <p:cNvSpPr txBox="1"/>
+          <p:nvPr/>
+        </p:nvSpPr>
+        <p:spPr>
+          <a:xfrm>
+            <a:off x="5760720" y="4169663"/>
+            <a:ext cx="2880360" cy="1645920"/>
+          </a:xfrm>
+          <a:prstGeom prst="rect">
+            <a:avLst/>
+          </a:prstGeom>
+          <a:noFill/>
+        </p:spPr>
+        <p:txBody>
+          <a:bodyPr wrap="square" lIns="0" rIns="0" tIns="0" bIns="0" anchor="t">
+            <a:spAutoFit/>
+          </a:bodyPr>
+          <a:lstStyle/>
+          <a:p>
+            <a:pPr algn="l">
+              <a:lnSpc>
+                <a:spcPct val="100000"/>
+              </a:lnSpc>
+              <a:spcBef>
+                <a:spcPts val="0"/>
+              </a:spcBef>
+              <a:spcAft>
+                <a:spcPts val="400"/>
+              </a:spcAft>
+            </a:pPr>
+            <a:r>
+              <a:rPr sz="750" b="1" i="0">
+                <a:solidFill>
+                  <a:srgbClr val="FFFFFF"/>
+                </a:solidFill>
+                <a:latin typeface="Arial"/>
+              </a:rPr>
+              <a:t>CUMULATIVE 2026–29 IMPACT</a:t>
+            </a:r>
+          </a:p>
+          <a:p>
+            <a:pPr algn="l">
+              <a:lnSpc>
+                <a:spcPct val="100000"/>
+              </a:lnSpc>
+              <a:spcBef>
+                <a:spcPts val="0"/>
+              </a:spcBef>
+              <a:spcAft>
+                <a:spcPts val="100"/>
+              </a:spcAft>
+            </a:pPr>
+            <a:r>
+              <a:rPr sz="2000" b="1" i="0">
+                <a:solidFill>
+                  <a:srgbClr val="FFFFFF"/>
+                </a:solidFill>
+                <a:latin typeface="Georgia"/>
+              </a:rPr>
+              <a:t>~$10.1M</a:t>
+            </a:r>
+          </a:p>
+          <a:p>
+            <a:pPr algn="l">
+              <a:lnSpc>
+                <a:spcPct val="100000"/>
+              </a:lnSpc>
+              <a:spcBef>
+                <a:spcPts val="0"/>
+              </a:spcBef>
+              <a:spcAft>
+                <a:spcPts val="500"/>
+              </a:spcAft>
+            </a:pPr>
+            <a:r>
+              <a:rPr sz="750" b="0" i="0">
+                <a:solidFill>
+                  <a:srgbClr val="FFFFFF"/>
+                </a:solidFill>
+                <a:latin typeface="Arial"/>
+              </a:rPr>
+              <a:t>saved on procurement</a:t>
+            </a:r>
+          </a:p>
+          <a:p>
+            <a:pPr algn="l">
+              <a:lnSpc>
+                <a:spcPct val="100000"/>
+              </a:lnSpc>
+              <a:spcBef>
+                <a:spcPts val="0"/>
+              </a:spcBef>
+              <a:spcAft>
+                <a:spcPts val="100"/>
+              </a:spcAft>
+            </a:pPr>
+            <a:r>
+              <a:rPr sz="1600" b="1" i="0">
+                <a:solidFill>
+                  <a:srgbClr val="FFFFFF"/>
+                </a:solidFill>
+                <a:latin typeface="Georgia"/>
+              </a:rPr>
+              <a:t>21.6%</a:t>
+            </a:r>
+          </a:p>
+          <a:p>
+            <a:pPr algn="l">
+              <a:lnSpc>
+                <a:spcPct val="100000"/>
+              </a:lnSpc>
+              <a:spcBef>
+                <a:spcPts val="0"/>
+              </a:spcBef>
+              <a:spcAft>
+                <a:spcPts val="0"/>
+              </a:spcAft>
+            </a:pPr>
+            <a:r>
+              <a:rPr sz="750" b="0" i="0">
+                <a:solidFill>
+                  <a:srgbClr val="FFFFFF"/>
+                </a:solidFill>
+                <a:latin typeface="Arial"/>
+              </a:rPr>
+              <a:t>reduction in cost — freed capital feeds more children</a:t>
+            </a:r>
+          </a:p>
+        </p:txBody>
+      </p:sp>
+    </p:spTree>
+  </p:cSld>
+  <p:clrMapOvr>
+    <a:masterClrMapping/>
+  </p:clrMapOvr>
+</p:sld>
+</file>
+
+<file path=ppt/slides/slide11.xml><?xml version="1.0" encoding="utf-8"?>
+<p:sld xmlns:a="http://schemas.openxmlformats.org/drawingml/2006/main" xmlns:p="http://schemas.openxmlformats.org/presentationml/2006/main" xmlns:r="http://schemas.openxmlformats.org/officeDocument/2006/relationships">
+  <p:cSld>
+    <p:spTree>
+      <p:nvGrpSpPr>
+        <p:cNvPr id="1" name=""/>
+        <p:cNvGrpSpPr/>
+        <p:nvPr/>
+      </p:nvGrpSpPr>
+      <p:grpSpPr/>
+      <p:sp>
+        <p:nvSpPr>
+          <p:cNvPr id="2" name="Rectangle 1"/>
+          <p:cNvSpPr/>
+          <p:nvPr/>
+        </p:nvSpPr>
+        <p:spPr>
+          <a:xfrm>
+            <a:off x="365760" y="274320"/>
+            <a:ext cx="8412480" cy="23774"/>
+          </a:xfrm>
+          <a:prstGeom prst="rect">
+            <a:avLst/>
+          </a:prstGeom>
+          <a:solidFill>
+            <a:srgbClr val="1B3E6E"/>
+          </a:solidFill>
+          <a:ln>
+            <a:noFill/>
+          </a:ln>
+          <a:effectLst/>
+        </p:spPr>
+        <p:style>
+          <a:lnRef idx="1">
+            <a:schemeClr val="accent1"/>
+          </a:lnRef>
+          <a:fillRef idx="3">
+            <a:schemeClr val="accent1"/>
+          </a:fillRef>
+          <a:effectRef idx="2">
+            <a:schemeClr val="accent1"/>
+          </a:effectRef>
+          <a:fontRef idx="minor">
+            <a:schemeClr val="lt1"/>
+          </a:fontRef>
+        </p:style>
+        <p:txBody>
+          <a:bodyPr rtlCol="0" anchor="ctr"/>
+          <a:lstStyle/>
+          <a:p>
+            <a:pPr algn="ctr"/>
+          </a:p>
+        </p:txBody>
+      </p:sp>
+      <p:sp>
+        <p:nvSpPr>
+          <p:cNvPr id="3" name="TextBox 2"/>
+          <p:cNvSpPr txBox="1"/>
+          <p:nvPr/>
+        </p:nvSpPr>
+        <p:spPr>
+          <a:xfrm>
+            <a:off x="365760" y="365760"/>
+            <a:ext cx="8412480" cy="457200"/>
+          </a:xfrm>
+          <a:prstGeom prst="rect">
+            <a:avLst/>
+          </a:prstGeom>
+          <a:noFill/>
+        </p:spPr>
+        <p:txBody>
+          <a:bodyPr wrap="square" lIns="0" rIns="0" tIns="0" bIns="0" anchor="t">
+            <a:spAutoFit/>
+          </a:bodyPr>
+          <a:lstStyle/>
+          <a:p>
+            <a:pPr algn="l">
+              <a:lnSpc>
+                <a:spcPct val="100000"/>
+              </a:lnSpc>
+              <a:spcBef>
+                <a:spcPts val="0"/>
+              </a:spcBef>
+              <a:spcAft>
+                <a:spcPts val="0"/>
+              </a:spcAft>
+            </a:pPr>
+            <a:r>
+              <a:rPr sz="2000" b="0" i="0">
+                <a:solidFill>
+                  <a:srgbClr val="1B3E6E"/>
+                </a:solidFill>
+                <a:latin typeface="Georgia"/>
+              </a:rPr>
+              <a:t>Solution 1 — the AI-enabled planning &amp; procurement build ($150k)</a:t>
+            </a:r>
+          </a:p>
+        </p:txBody>
+      </p:sp>
+      <p:sp>
+        <p:nvSpPr>
+          <p:cNvPr id="4" name="TextBox 3"/>
+          <p:cNvSpPr txBox="1"/>
+          <p:nvPr/>
+        </p:nvSpPr>
+        <p:spPr>
+          <a:xfrm>
+            <a:off x="365760" y="822960"/>
+            <a:ext cx="8412480" cy="438912"/>
+          </a:xfrm>
+          <a:prstGeom prst="rect">
+            <a:avLst/>
+          </a:prstGeom>
+          <a:noFill/>
+        </p:spPr>
+        <p:txBody>
+          <a:bodyPr wrap="square" lIns="0" rIns="0" tIns="0" bIns="0" anchor="t">
+            <a:spAutoFit/>
+          </a:bodyPr>
+          <a:lstStyle/>
+          <a:p>
+            <a:pPr algn="l">
+              <a:lnSpc>
+                <a:spcPct val="100000"/>
+              </a:lnSpc>
+              <a:spcBef>
+                <a:spcPts val="0"/>
+              </a:spcBef>
+              <a:spcAft>
+                <a:spcPts val="0"/>
+              </a:spcAft>
+            </a:pPr>
+            <a:r>
+              <a:rPr sz="1050" b="0" i="0">
+                <a:solidFill>
+                  <a:srgbClr val="333333"/>
+                </a:solidFill>
+                <a:latin typeface="Arial"/>
+              </a:rPr>
+              <a:t>Connecting real-time demand signals to kitchen production and procurement — the technology that closes Gap 1.</a:t>
+            </a:r>
+          </a:p>
+        </p:txBody>
+      </p:sp>
+      <p:sp>
+        <p:nvSpPr>
+          <p:cNvPr id="5" name="Rectangle 4"/>
+          <p:cNvSpPr/>
+          <p:nvPr/>
+        </p:nvSpPr>
+        <p:spPr>
+          <a:xfrm>
+            <a:off x="502920" y="6071616"/>
+            <a:ext cx="8138159" cy="365760"/>
+          </a:xfrm>
+          <a:prstGeom prst="rect">
+            <a:avLst/>
+          </a:prstGeom>
+          <a:solidFill>
+            <a:srgbClr val="D9D9D9"/>
+          </a:solidFill>
+          <a:ln>
+            <a:noFill/>
+          </a:ln>
+          <a:effectLst/>
+        </p:spPr>
+        <p:style>
+          <a:lnRef idx="1">
+            <a:schemeClr val="accent1"/>
+          </a:lnRef>
+          <a:fillRef idx="3">
+            <a:schemeClr val="accent1"/>
+          </a:fillRef>
+          <a:effectRef idx="2">
+            <a:schemeClr val="accent1"/>
+          </a:effectRef>
+          <a:fontRef idx="minor">
+            <a:schemeClr val="lt1"/>
+          </a:fontRef>
+        </p:style>
+        <p:txBody>
+          <a:bodyPr rtlCol="0" anchor="ctr"/>
+          <a:lstStyle/>
+          <a:p>
+            <a:pPr algn="ctr"/>
+          </a:p>
+        </p:txBody>
+      </p:sp>
+      <p:sp>
+        <p:nvSpPr>
+          <p:cNvPr id="6" name="TextBox 5"/>
+          <p:cNvSpPr txBox="1"/>
+          <p:nvPr/>
+        </p:nvSpPr>
+        <p:spPr>
+          <a:xfrm>
+            <a:off x="640080" y="6071616"/>
+            <a:ext cx="7863840" cy="365760"/>
+          </a:xfrm>
+          <a:prstGeom prst="rect">
+            <a:avLst/>
+          </a:prstGeom>
+          <a:noFill/>
+        </p:spPr>
+        <p:txBody>
+          <a:bodyPr wrap="square" lIns="0" rIns="0" tIns="0" bIns="0" anchor="ctr">
+            <a:spAutoFit/>
+          </a:bodyPr>
+          <a:lstStyle/>
+          <a:p>
+            <a:pPr algn="ctr">
+              <a:lnSpc>
+                <a:spcPct val="95000"/>
+              </a:lnSpc>
+              <a:spcBef>
+                <a:spcPts val="0"/>
+              </a:spcBef>
+              <a:spcAft>
+                <a:spcPts val="0"/>
+              </a:spcAft>
+            </a:pPr>
+            <a:r>
+              <a:rPr sz="1100" b="1" i="0">
+                <a:solidFill>
+                  <a:srgbClr val="1B3E6E"/>
+                </a:solidFill>
+                <a:latin typeface="Georgia"/>
+              </a:rPr>
+              <a:t>“Feeding more children with the same rupee” — AI plus GS capital makes it possible.</a:t>
+            </a:r>
+          </a:p>
+        </p:txBody>
+      </p:sp>
+      <p:sp>
+        <p:nvSpPr>
+          <p:cNvPr id="7" name="TextBox 6"/>
+          <p:cNvSpPr txBox="1"/>
+          <p:nvPr/>
+        </p:nvSpPr>
+        <p:spPr>
+          <a:xfrm>
+            <a:off x="365760" y="6492240"/>
+            <a:ext cx="1280160" cy="329184"/>
+          </a:xfrm>
+          <a:prstGeom prst="rect">
+            <a:avLst/>
+          </a:prstGeom>
+          <a:noFill/>
+        </p:spPr>
+        <p:txBody>
+          <a:bodyPr wrap="square" lIns="0" rIns="0" tIns="0" bIns="0" anchor="t">
+            <a:spAutoFit/>
+          </a:bodyPr>
+          <a:lstStyle/>
+          <a:p>
+            <a:pPr algn="l">
+              <a:lnSpc>
+                <a:spcPct val="90000"/>
+              </a:lnSpc>
+              <a:spcBef>
+                <a:spcPts val="0"/>
+              </a:spcBef>
+              <a:spcAft>
+                <a:spcPts val="0"/>
+              </a:spcAft>
+            </a:pPr>
+            <a:r>
+              <a:rPr sz="900" b="1" i="0">
+                <a:solidFill>
+                  <a:srgbClr val="111111"/>
+                </a:solidFill>
+                <a:latin typeface="Georgia"/>
+              </a:rPr>
+              <a:t>Goldman</a:t>
+            </a:r>
+          </a:p>
+          <a:p>
+            <a:pPr algn="l">
+              <a:lnSpc>
+                <a:spcPct val="90000"/>
+              </a:lnSpc>
+              <a:spcBef>
+                <a:spcPts val="0"/>
+              </a:spcBef>
+              <a:spcAft>
+                <a:spcPts val="0"/>
+              </a:spcAft>
+            </a:pPr>
+            <a:r>
+              <a:rPr sz="900" b="1" i="0">
+                <a:solidFill>
+                  <a:srgbClr val="111111"/>
+                </a:solidFill>
+                <a:latin typeface="Georgia"/>
+              </a:rPr>
+              <a:t>Sachs</a:t>
+            </a:r>
+          </a:p>
+        </p:txBody>
+      </p:sp>
+      <p:sp>
+        <p:nvSpPr>
+          <p:cNvPr id="8" name="TextBox 7"/>
+          <p:cNvSpPr txBox="1"/>
+          <p:nvPr/>
+        </p:nvSpPr>
+        <p:spPr>
+          <a:xfrm>
+            <a:off x="8321040" y="6528816"/>
+            <a:ext cx="457200" cy="274320"/>
+          </a:xfrm>
+          <a:prstGeom prst="rect">
+            <a:avLst/>
+          </a:prstGeom>
+          <a:noFill/>
+        </p:spPr>
+        <p:txBody>
+          <a:bodyPr wrap="square" lIns="0" rIns="0" tIns="0" bIns="0" anchor="t">
+            <a:spAutoFit/>
+          </a:bodyPr>
+          <a:lstStyle/>
+          <a:p>
+            <a:pPr algn="r">
+              <a:lnSpc>
+                <a:spcPct val="100000"/>
+              </a:lnSpc>
+              <a:spcBef>
+                <a:spcPts val="0"/>
+              </a:spcBef>
+              <a:spcAft>
+                <a:spcPts val="300"/>
+              </a:spcAft>
+            </a:pPr>
+            <a:r>
+              <a:rPr sz="900" b="0" i="0">
+                <a:solidFill>
+                  <a:srgbClr val="727375"/>
+                </a:solidFill>
+                <a:latin typeface="Arial"/>
+              </a:rPr>
+              <a:t>11</a:t>
+            </a:r>
+          </a:p>
+        </p:txBody>
+      </p:sp>
+      <p:sp>
+        <p:nvSpPr>
+          <p:cNvPr id="9" name="TextBox 8"/>
+          <p:cNvSpPr txBox="1"/>
+          <p:nvPr/>
+        </p:nvSpPr>
+        <p:spPr>
+          <a:xfrm>
+            <a:off x="4754879" y="54864"/>
+            <a:ext cx="4023360" cy="182880"/>
+          </a:xfrm>
+          <a:prstGeom prst="rect">
+            <a:avLst/>
+          </a:prstGeom>
+          <a:noFill/>
+        </p:spPr>
+        <p:txBody>
+          <a:bodyPr wrap="square" lIns="0" rIns="0" tIns="0" bIns="0" anchor="t">
+            <a:spAutoFit/>
+          </a:bodyPr>
+          <a:lstStyle/>
+          <a:p>
+            <a:pPr algn="r">
+              <a:lnSpc>
+                <a:spcPct val="100000"/>
+              </a:lnSpc>
+              <a:spcBef>
+                <a:spcPts val="0"/>
+              </a:spcBef>
+              <a:spcAft>
+                <a:spcPts val="0"/>
+              </a:spcAft>
+            </a:pPr>
+            <a:r>
+              <a:rPr sz="750" b="0" i="1">
+                <a:solidFill>
+                  <a:srgbClr val="727375"/>
+                </a:solidFill>
+                <a:latin typeface="Arial"/>
+              </a:rPr>
+              <a:t>PROPOSED SLIDE 4 — OPTION C (numbers rail)</a:t>
+            </a:r>
+          </a:p>
+        </p:txBody>
+      </p:sp>
+      <p:sp>
+        <p:nvSpPr>
+          <p:cNvPr id="10" name="TextBox 9"/>
+          <p:cNvSpPr txBox="1"/>
+          <p:nvPr/>
+        </p:nvSpPr>
+        <p:spPr>
+          <a:xfrm>
+            <a:off x="365760" y="1389888"/>
+            <a:ext cx="2331720" cy="219456"/>
+          </a:xfrm>
+          <a:prstGeom prst="rect">
+            <a:avLst/>
+          </a:prstGeom>
+          <a:noFill/>
+        </p:spPr>
+        <p:txBody>
+          <a:bodyPr wrap="square" lIns="0" rIns="0" tIns="0" bIns="0" anchor="t">
+            <a:spAutoFit/>
+          </a:bodyPr>
+          <a:lstStyle/>
+          <a:p>
+            <a:pPr algn="l">
+              <a:lnSpc>
+                <a:spcPct val="100000"/>
+              </a:lnSpc>
+              <a:spcBef>
+                <a:spcPts val="0"/>
+              </a:spcBef>
+              <a:spcAft>
+                <a:spcPts val="0"/>
+              </a:spcAft>
+            </a:pPr>
+            <a:r>
+              <a:rPr sz="900" b="1" i="0">
+                <a:solidFill>
+                  <a:srgbClr val="1B3E6E"/>
+                </a:solidFill>
+                <a:latin typeface="Arial"/>
+              </a:rPr>
+              <a:t>THE RETURN ON $150k</a:t>
+            </a:r>
+          </a:p>
+        </p:txBody>
+      </p:sp>
+      <p:sp>
+        <p:nvSpPr>
+          <p:cNvPr id="11" name="Rectangle 10"/>
+          <p:cNvSpPr/>
+          <p:nvPr/>
+        </p:nvSpPr>
+        <p:spPr>
+          <a:xfrm>
+            <a:off x="365760" y="1645920"/>
+            <a:ext cx="2331720" cy="12801"/>
+          </a:xfrm>
+          <a:prstGeom prst="rect">
+            <a:avLst/>
+          </a:prstGeom>
+          <a:solidFill>
+            <a:srgbClr val="BFBFBF"/>
+          </a:solidFill>
+          <a:ln>
+            <a:noFill/>
+          </a:ln>
+          <a:effectLst/>
+        </p:spPr>
+        <p:style>
+          <a:lnRef idx="1">
+            <a:schemeClr val="accent1"/>
+          </a:lnRef>
+          <a:fillRef idx="3">
+            <a:schemeClr val="accent1"/>
+          </a:fillRef>
+          <a:effectRef idx="2">
+            <a:schemeClr val="accent1"/>
+          </a:effectRef>
+          <a:fontRef idx="minor">
+            <a:schemeClr val="lt1"/>
+          </a:fontRef>
+        </p:style>
+        <p:txBody>
+          <a:bodyPr rtlCol="0" anchor="ctr"/>
+          <a:lstStyle/>
+          <a:p>
+            <a:pPr algn="ctr"/>
+          </a:p>
+        </p:txBody>
+      </p:sp>
+      <p:sp>
+        <p:nvSpPr>
+          <p:cNvPr id="12" name="TextBox 11"/>
+          <p:cNvSpPr txBox="1"/>
+          <p:nvPr/>
+        </p:nvSpPr>
+        <p:spPr>
+          <a:xfrm>
+            <a:off x="365760" y="1810512"/>
+            <a:ext cx="2331720" cy="868680"/>
+          </a:xfrm>
+          <a:prstGeom prst="rect">
+            <a:avLst/>
+          </a:prstGeom>
+          <a:noFill/>
+        </p:spPr>
+        <p:txBody>
+          <a:bodyPr wrap="square" lIns="0" rIns="0" tIns="0" bIns="0" anchor="t">
+            <a:spAutoFit/>
+          </a:bodyPr>
+          <a:lstStyle/>
+          <a:p>
+            <a:pPr algn="l">
+              <a:lnSpc>
+                <a:spcPct val="100000"/>
+              </a:lnSpc>
+              <a:spcBef>
+                <a:spcPts val="0"/>
+              </a:spcBef>
+              <a:spcAft>
+                <a:spcPts val="100"/>
+              </a:spcAft>
+            </a:pPr>
+            <a:r>
+              <a:rPr sz="2200" b="1" i="0">
+                <a:solidFill>
+                  <a:srgbClr val="1B3E6E"/>
+                </a:solidFill>
+                <a:latin typeface="Georgia"/>
+              </a:rPr>
+              <a:t>$150k</a:t>
+            </a:r>
+          </a:p>
+          <a:p>
+            <a:pPr algn="l">
+              <a:lnSpc>
+                <a:spcPct val="95000"/>
+              </a:lnSpc>
+              <a:spcBef>
+                <a:spcPts val="0"/>
+              </a:spcBef>
+              <a:spcAft>
+                <a:spcPts val="0"/>
+              </a:spcAft>
+            </a:pPr>
+            <a:r>
+              <a:rPr sz="740" b="0" i="0">
+                <a:solidFill>
+                  <a:srgbClr val="727375"/>
+                </a:solidFill>
+                <a:latin typeface="Arial"/>
+              </a:rPr>
+              <a:t>one-time GS-funded build</a:t>
+            </a:r>
+          </a:p>
+        </p:txBody>
+      </p:sp>
+      <p:cxnSp>
+        <p:nvCxnSpPr>
+          <p:cNvPr id="13" name="Connector 12"/>
+          <p:cNvCxnSpPr/>
+          <p:nvPr/>
+        </p:nvCxnSpPr>
+        <p:spPr>
+          <a:xfrm>
+            <a:off x="667512" y="2523744"/>
+            <a:ext cx="0" cy="256032"/>
+          </a:xfrm>
+          <a:prstGeom prst="line">
+            <a:avLst/>
+          </a:prstGeom>
+          <a:ln w="12700">
+            <a:solidFill>
+              <a:srgbClr val="BFBFBF"/>
+            </a:solidFill>
+            <a:prstDash val="sysDash"/>
+            <a:tailEnd type="triangle" w="med" len="med"/>
+          </a:ln>
+          <a:effectLst/>
+        </p:spPr>
+        <p:style>
+          <a:lnRef idx="2">
+            <a:schemeClr val="accent1"/>
+          </a:lnRef>
+          <a:fillRef idx="0">
+            <a:schemeClr val="accent1"/>
+          </a:fillRef>
+          <a:effectRef idx="1">
+            <a:schemeClr val="accent1"/>
+          </a:effectRef>
+          <a:fontRef idx="minor">
+            <a:schemeClr val="tx1"/>
+          </a:fontRef>
+        </p:style>
+      </p:cxnSp>
+      <p:sp>
+        <p:nvSpPr>
+          <p:cNvPr id="14" name="TextBox 13"/>
+          <p:cNvSpPr txBox="1"/>
+          <p:nvPr/>
+        </p:nvSpPr>
+        <p:spPr>
+          <a:xfrm>
+            <a:off x="365760" y="2871215"/>
+            <a:ext cx="2331720" cy="868680"/>
+          </a:xfrm>
+          <a:prstGeom prst="rect">
+            <a:avLst/>
+          </a:prstGeom>
+          <a:noFill/>
+        </p:spPr>
+        <p:txBody>
+          <a:bodyPr wrap="square" lIns="0" rIns="0" tIns="0" bIns="0" anchor="t">
+            <a:spAutoFit/>
+          </a:bodyPr>
+          <a:lstStyle/>
+          <a:p>
+            <a:pPr algn="l">
+              <a:lnSpc>
+                <a:spcPct val="100000"/>
+              </a:lnSpc>
+              <a:spcBef>
+                <a:spcPts val="0"/>
+              </a:spcBef>
+              <a:spcAft>
+                <a:spcPts val="100"/>
+              </a:spcAft>
+            </a:pPr>
+            <a:r>
+              <a:rPr sz="2000" b="1" i="0">
+                <a:solidFill>
+                  <a:srgbClr val="398025"/>
+                </a:solidFill>
+                <a:latin typeface="Georgia"/>
+              </a:rPr>
+              <a:t>~$10.1M</a:t>
+            </a:r>
+          </a:p>
+          <a:p>
+            <a:pPr algn="l">
+              <a:lnSpc>
+                <a:spcPct val="95000"/>
+              </a:lnSpc>
+              <a:spcBef>
+                <a:spcPts val="0"/>
+              </a:spcBef>
+              <a:spcAft>
+                <a:spcPts val="0"/>
+              </a:spcAft>
+            </a:pPr>
+            <a:r>
+              <a:rPr sz="740" b="0" i="0">
+                <a:solidFill>
+                  <a:srgbClr val="727375"/>
+                </a:solidFill>
+                <a:latin typeface="Arial"/>
+              </a:rPr>
+              <a:t>saved on procurement, cumulative 2026–29</a:t>
+            </a:r>
+          </a:p>
+        </p:txBody>
+      </p:sp>
+      <p:cxnSp>
+        <p:nvCxnSpPr>
+          <p:cNvPr id="15" name="Connector 14"/>
+          <p:cNvCxnSpPr/>
+          <p:nvPr/>
+        </p:nvCxnSpPr>
+        <p:spPr>
+          <a:xfrm>
+            <a:off x="667512" y="3584448"/>
+            <a:ext cx="0" cy="256031"/>
+          </a:xfrm>
+          <a:prstGeom prst="line">
+            <a:avLst/>
+          </a:prstGeom>
+          <a:ln w="12700">
+            <a:solidFill>
+              <a:srgbClr val="BFBFBF"/>
+            </a:solidFill>
+            <a:prstDash val="sysDash"/>
+            <a:tailEnd type="triangle" w="med" len="med"/>
+          </a:ln>
+          <a:effectLst/>
+        </p:spPr>
+        <p:style>
+          <a:lnRef idx="2">
+            <a:schemeClr val="accent1"/>
+          </a:lnRef>
+          <a:fillRef idx="0">
+            <a:schemeClr val="accent1"/>
+          </a:fillRef>
+          <a:effectRef idx="1">
+            <a:schemeClr val="accent1"/>
+          </a:effectRef>
+          <a:fontRef idx="minor">
+            <a:schemeClr val="tx1"/>
+          </a:fontRef>
+        </p:style>
+      </p:cxnSp>
+      <p:sp>
+        <p:nvSpPr>
+          <p:cNvPr id="16" name="TextBox 15"/>
+          <p:cNvSpPr txBox="1"/>
+          <p:nvPr/>
+        </p:nvSpPr>
+        <p:spPr>
+          <a:xfrm>
+            <a:off x="365760" y="3931920"/>
+            <a:ext cx="2331720" cy="868680"/>
+          </a:xfrm>
+          <a:prstGeom prst="rect">
+            <a:avLst/>
+          </a:prstGeom>
+          <a:noFill/>
+        </p:spPr>
+        <p:txBody>
+          <a:bodyPr wrap="square" lIns="0" rIns="0" tIns="0" bIns="0" anchor="t">
+            <a:spAutoFit/>
+          </a:bodyPr>
+          <a:lstStyle/>
+          <a:p>
+            <a:pPr algn="l">
+              <a:lnSpc>
+                <a:spcPct val="100000"/>
+              </a:lnSpc>
+              <a:spcBef>
+                <a:spcPts val="0"/>
+              </a:spcBef>
+              <a:spcAft>
+                <a:spcPts val="100"/>
+              </a:spcAft>
+            </a:pPr>
+            <a:r>
+              <a:rPr sz="2000" b="1" i="0">
+                <a:solidFill>
+                  <a:srgbClr val="398025"/>
+                </a:solidFill>
+                <a:latin typeface="Georgia"/>
+              </a:rPr>
+              <a:t>21.6%</a:t>
+            </a:r>
+          </a:p>
+          <a:p>
+            <a:pPr algn="l">
+              <a:lnSpc>
+                <a:spcPct val="95000"/>
+              </a:lnSpc>
+              <a:spcBef>
+                <a:spcPts val="0"/>
+              </a:spcBef>
+              <a:spcAft>
+                <a:spcPts val="0"/>
+              </a:spcAft>
+            </a:pPr>
+            <a:r>
+              <a:rPr sz="740" b="0" i="0">
+                <a:solidFill>
+                  <a:srgbClr val="727375"/>
+                </a:solidFill>
+                <a:latin typeface="Arial"/>
+              </a:rPr>
+              <a:t>reduction in commodity cost</a:t>
+            </a:r>
+          </a:p>
+        </p:txBody>
+      </p:sp>
+      <p:cxnSp>
+        <p:nvCxnSpPr>
+          <p:cNvPr id="17" name="Connector 16"/>
+          <p:cNvCxnSpPr/>
+          <p:nvPr/>
+        </p:nvCxnSpPr>
+        <p:spPr>
+          <a:xfrm>
+            <a:off x="667512" y="4645152"/>
+            <a:ext cx="0" cy="256031"/>
+          </a:xfrm>
+          <a:prstGeom prst="line">
+            <a:avLst/>
+          </a:prstGeom>
+          <a:ln w="12700">
+            <a:solidFill>
+              <a:srgbClr val="BFBFBF"/>
+            </a:solidFill>
+            <a:prstDash val="sysDash"/>
+            <a:tailEnd type="triangle" w="med" len="med"/>
+          </a:ln>
+          <a:effectLst/>
+        </p:spPr>
+        <p:style>
+          <a:lnRef idx="2">
+            <a:schemeClr val="accent1"/>
+          </a:lnRef>
+          <a:fillRef idx="0">
+            <a:schemeClr val="accent1"/>
+          </a:fillRef>
+          <a:effectRef idx="1">
+            <a:schemeClr val="accent1"/>
+          </a:effectRef>
+          <a:fontRef idx="minor">
+            <a:schemeClr val="tx1"/>
+          </a:fontRef>
+        </p:style>
+      </p:cxnSp>
+      <p:sp>
+        <p:nvSpPr>
+          <p:cNvPr id="18" name="TextBox 17"/>
+          <p:cNvSpPr txBox="1"/>
+          <p:nvPr/>
+        </p:nvSpPr>
+        <p:spPr>
+          <a:xfrm>
+            <a:off x="365760" y="4992624"/>
+            <a:ext cx="2331720" cy="868680"/>
+          </a:xfrm>
+          <a:prstGeom prst="rect">
+            <a:avLst/>
+          </a:prstGeom>
+          <a:noFill/>
+        </p:spPr>
+        <p:txBody>
+          <a:bodyPr wrap="square" lIns="0" rIns="0" tIns="0" bIns="0" anchor="t">
+            <a:spAutoFit/>
+          </a:bodyPr>
+          <a:lstStyle/>
+          <a:p>
+            <a:pPr algn="l">
+              <a:lnSpc>
+                <a:spcPct val="100000"/>
+              </a:lnSpc>
+              <a:spcBef>
+                <a:spcPts val="0"/>
+              </a:spcBef>
+              <a:spcAft>
+                <a:spcPts val="100"/>
+              </a:spcAft>
+            </a:pPr>
+            <a:r>
+              <a:rPr sz="1800" b="1" i="0">
+                <a:solidFill>
+                  <a:srgbClr val="E08A1E"/>
+                </a:solidFill>
+                <a:latin typeface="Georgia"/>
+              </a:rPr>
+              <a:t>100%</a:t>
+            </a:r>
+          </a:p>
+          <a:p>
+            <a:pPr algn="l">
+              <a:lnSpc>
+                <a:spcPct val="95000"/>
+              </a:lnSpc>
+              <a:spcBef>
+                <a:spcPts val="0"/>
+              </a:spcBef>
+              <a:spcAft>
+                <a:spcPts val="0"/>
+              </a:spcAft>
+            </a:pPr>
+            <a:r>
+              <a:rPr sz="740" b="0" i="0">
+                <a:solidFill>
+                  <a:srgbClr val="727375"/>
+                </a:solidFill>
+                <a:latin typeface="Arial"/>
+              </a:rPr>
+              <a:t>of savings reinvested in more meals</a:t>
+            </a:r>
+          </a:p>
+        </p:txBody>
+      </p:sp>
+      <p:sp>
+        <p:nvSpPr>
+          <p:cNvPr id="19" name="Rectangle 18"/>
+          <p:cNvSpPr/>
+          <p:nvPr/>
+        </p:nvSpPr>
+        <p:spPr>
+          <a:xfrm>
+            <a:off x="2788920" y="1417320"/>
+            <a:ext cx="10972" cy="4480560"/>
+          </a:xfrm>
+          <a:prstGeom prst="rect">
+            <a:avLst/>
+          </a:prstGeom>
+          <a:solidFill>
+            <a:srgbClr val="DDDDDD"/>
+          </a:solidFill>
+          <a:ln>
+            <a:noFill/>
+          </a:ln>
+          <a:effectLst/>
+        </p:spPr>
+        <p:style>
+          <a:lnRef idx="1">
+            <a:schemeClr val="accent1"/>
+          </a:lnRef>
+          <a:fillRef idx="3">
+            <a:schemeClr val="accent1"/>
+          </a:fillRef>
+          <a:effectRef idx="2">
+            <a:schemeClr val="accent1"/>
+          </a:effectRef>
+          <a:fontRef idx="minor">
+            <a:schemeClr val="lt1"/>
+          </a:fontRef>
+        </p:style>
+        <p:txBody>
+          <a:bodyPr rtlCol="0" anchor="ctr"/>
+          <a:lstStyle/>
+          <a:p>
+            <a:pPr algn="ctr"/>
+          </a:p>
+        </p:txBody>
+      </p:sp>
+      <p:sp>
+        <p:nvSpPr>
+          <p:cNvPr id="20" name="Rectangle 19"/>
+          <p:cNvSpPr/>
+          <p:nvPr/>
+        </p:nvSpPr>
+        <p:spPr>
+          <a:xfrm>
+            <a:off x="3063240" y="1353312"/>
+            <a:ext cx="54864" cy="182880"/>
+          </a:xfrm>
+          <a:prstGeom prst="rect">
+            <a:avLst/>
+          </a:prstGeom>
+          <a:solidFill>
+            <a:srgbClr val="095F61"/>
+          </a:solidFill>
+          <a:ln>
+            <a:noFill/>
+          </a:ln>
+          <a:effectLst/>
+        </p:spPr>
+        <p:style>
+          <a:lnRef idx="1">
+            <a:schemeClr val="accent1"/>
+          </a:lnRef>
+          <a:fillRef idx="3">
+            <a:schemeClr val="accent1"/>
+          </a:fillRef>
+          <a:effectRef idx="2">
+            <a:schemeClr val="accent1"/>
+          </a:effectRef>
+          <a:fontRef idx="minor">
+            <a:schemeClr val="lt1"/>
+          </a:fontRef>
+        </p:style>
+        <p:txBody>
+          <a:bodyPr rtlCol="0" anchor="ctr"/>
+          <a:lstStyle/>
+          <a:p>
+            <a:pPr algn="ctr"/>
+          </a:p>
+        </p:txBody>
+      </p:sp>
+      <p:sp>
+        <p:nvSpPr>
+          <p:cNvPr id="21" name="TextBox 20"/>
+          <p:cNvSpPr txBox="1"/>
+          <p:nvPr/>
+        </p:nvSpPr>
+        <p:spPr>
+          <a:xfrm>
+            <a:off x="3209544" y="1325880"/>
+            <a:ext cx="5568696" cy="256032"/>
+          </a:xfrm>
+          <a:prstGeom prst="rect">
+            <a:avLst/>
+          </a:prstGeom>
+          <a:noFill/>
+        </p:spPr>
+        <p:txBody>
+          <a:bodyPr wrap="square" lIns="0" rIns="0" tIns="0" bIns="0" anchor="t">
+            <a:spAutoFit/>
+          </a:bodyPr>
+          <a:lstStyle/>
+          <a:p>
+            <a:pPr algn="l">
+              <a:lnSpc>
+                <a:spcPct val="100000"/>
+              </a:lnSpc>
+              <a:spcBef>
+                <a:spcPts val="0"/>
+              </a:spcBef>
+              <a:spcAft>
+                <a:spcPts val="0"/>
+              </a:spcAft>
+            </a:pPr>
+            <a:r>
+              <a:rPr sz="1000" b="1" i="0">
+                <a:solidFill>
+                  <a:srgbClr val="1B3E6E"/>
+                </a:solidFill>
+                <a:latin typeface="Arial"/>
+              </a:rPr>
+              <a:t>PILLAR 1 — Predictive Demand Forecasting</a:t>
+            </a:r>
+          </a:p>
+        </p:txBody>
+      </p:sp>
+      <p:sp>
+        <p:nvSpPr>
+          <p:cNvPr id="22" name="Rectangle 21"/>
+          <p:cNvSpPr/>
+          <p:nvPr/>
+        </p:nvSpPr>
+        <p:spPr>
+          <a:xfrm>
+            <a:off x="3063240" y="1600200"/>
+            <a:ext cx="5715000" cy="10972"/>
+          </a:xfrm>
+          <a:prstGeom prst="rect">
+            <a:avLst/>
+          </a:prstGeom>
+          <a:solidFill>
+            <a:srgbClr val="BFBFBF"/>
+          </a:solidFill>
+          <a:ln>
+            <a:noFill/>
+          </a:ln>
+          <a:effectLst/>
+        </p:spPr>
+        <p:style>
+          <a:lnRef idx="1">
+            <a:schemeClr val="accent1"/>
+          </a:lnRef>
+          <a:fillRef idx="3">
+            <a:schemeClr val="accent1"/>
+          </a:fillRef>
+          <a:effectRef idx="2">
+            <a:schemeClr val="accent1"/>
+          </a:effectRef>
+          <a:fontRef idx="minor">
+            <a:schemeClr val="lt1"/>
+          </a:fontRef>
+        </p:style>
+        <p:txBody>
+          <a:bodyPr rtlCol="0" anchor="ctr"/>
+          <a:lstStyle/>
+          <a:p>
+            <a:pPr algn="ctr"/>
+          </a:p>
+        </p:txBody>
+      </p:sp>
+      <p:sp>
+        <p:nvSpPr>
+          <p:cNvPr id="23" name="TextBox 22"/>
+          <p:cNvSpPr txBox="1"/>
+          <p:nvPr/>
+        </p:nvSpPr>
+        <p:spPr>
+          <a:xfrm>
+            <a:off x="3063240" y="1691640"/>
+            <a:ext cx="5715000" cy="2011680"/>
+          </a:xfrm>
+          <a:prstGeom prst="rect">
+            <a:avLst/>
+          </a:prstGeom>
+          <a:noFill/>
+        </p:spPr>
+        <p:txBody>
+          <a:bodyPr wrap="square" lIns="0" rIns="0" tIns="0" bIns="0" anchor="t">
+            <a:spAutoFit/>
+          </a:bodyPr>
+          <a:lstStyle/>
+          <a:p>
+            <a:pPr algn="l">
+              <a:lnSpc>
+                <a:spcPct val="102000"/>
+              </a:lnSpc>
+              <a:spcBef>
+                <a:spcPts val="0"/>
+              </a:spcBef>
+              <a:spcAft>
+                <a:spcPts val="150"/>
+              </a:spcAft>
+            </a:pPr>
+            <a:r>
+              <a:rPr sz="750" b="1" i="0">
+                <a:solidFill>
+                  <a:srgbClr val="333333"/>
+                </a:solidFill>
+                <a:latin typeface="Arial"/>
+              </a:rPr>
+              <a:t>•  Attendance &amp; enrolment trends </a:t>
+            </a:r>
+            <a:r>
+              <a:rPr sz="750" b="0" i="0">
+                <a:solidFill>
+                  <a:srgbClr val="333333"/>
+                </a:solidFill>
+                <a:latin typeface="Arial"/>
+              </a:rPr>
+              <a:t>estimate how many meals each centre should prepare daily</a:t>
+            </a:r>
+          </a:p>
+          <a:p>
+            <a:pPr algn="l">
+              <a:lnSpc>
+                <a:spcPct val="102000"/>
+              </a:lnSpc>
+              <a:spcBef>
+                <a:spcPts val="0"/>
+              </a:spcBef>
+              <a:spcAft>
+                <a:spcPts val="150"/>
+              </a:spcAft>
+            </a:pPr>
+            <a:r>
+              <a:rPr sz="750" b="1" i="0">
+                <a:solidFill>
+                  <a:srgbClr val="333333"/>
+                </a:solidFill>
+                <a:latin typeface="Arial"/>
+              </a:rPr>
+              <a:t>•  Holiday calendars </a:t>
+            </a:r>
+            <a:r>
+              <a:rPr sz="750" b="0" i="0">
+                <a:solidFill>
+                  <a:srgbClr val="333333"/>
+                </a:solidFill>
+                <a:latin typeface="Arial"/>
+              </a:rPr>
+              <a:t>capture local demand spikes or dips before production quantities are finalised</a:t>
+            </a:r>
+          </a:p>
+          <a:p>
+            <a:pPr algn="l">
+              <a:lnSpc>
+                <a:spcPct val="102000"/>
+              </a:lnSpc>
+              <a:spcBef>
+                <a:spcPts val="0"/>
+              </a:spcBef>
+              <a:spcAft>
+                <a:spcPts val="150"/>
+              </a:spcAft>
+            </a:pPr>
+            <a:r>
+              <a:rPr sz="750" b="1" i="0">
+                <a:solidFill>
+                  <a:srgbClr val="333333"/>
+                </a:solidFill>
+                <a:latin typeface="Arial"/>
+              </a:rPr>
+              <a:t>•  Menu consumption history </a:t>
+            </a:r>
+            <a:r>
+              <a:rPr sz="750" b="0" i="0">
+                <a:solidFill>
+                  <a:srgbClr val="333333"/>
+                </a:solidFill>
+                <a:latin typeface="Arial"/>
+              </a:rPr>
+              <a:t>converts expected meals into ingredient quantities for key staples</a:t>
+            </a:r>
+          </a:p>
+          <a:p>
+            <a:pPr algn="l">
+              <a:lnSpc>
+                <a:spcPct val="102000"/>
+              </a:lnSpc>
+              <a:spcBef>
+                <a:spcPts val="0"/>
+              </a:spcBef>
+              <a:spcAft>
+                <a:spcPts val="150"/>
+              </a:spcAft>
+            </a:pPr>
+            <a:r>
+              <a:rPr sz="750" b="1" i="0">
+                <a:solidFill>
+                  <a:srgbClr val="333333"/>
+                </a:solidFill>
+                <a:latin typeface="Arial"/>
+              </a:rPr>
+              <a:t>•  Weather signals &amp; feedback </a:t>
+            </a:r>
+            <a:r>
+              <a:rPr sz="750" b="0" i="0">
+                <a:solidFill>
+                  <a:srgbClr val="333333"/>
+                </a:solidFill>
+                <a:latin typeface="Arial"/>
+              </a:rPr>
+              <a:t>continuously refine the next centre-level forecast</a:t>
+            </a:r>
+          </a:p>
+        </p:txBody>
+      </p:sp>
+      <p:sp>
+        <p:nvSpPr>
+          <p:cNvPr id="24" name="Rectangle 23"/>
+          <p:cNvSpPr/>
+          <p:nvPr/>
+        </p:nvSpPr>
+        <p:spPr>
+          <a:xfrm>
+            <a:off x="3063240" y="2660903"/>
+            <a:ext cx="54864" cy="182880"/>
+          </a:xfrm>
+          <a:prstGeom prst="rect">
+            <a:avLst/>
+          </a:prstGeom>
+          <a:solidFill>
+            <a:srgbClr val="E08A1E"/>
+          </a:solidFill>
+          <a:ln>
+            <a:noFill/>
+          </a:ln>
+          <a:effectLst/>
+        </p:spPr>
+        <p:style>
+          <a:lnRef idx="1">
+            <a:schemeClr val="accent1"/>
+          </a:lnRef>
+          <a:fillRef idx="3">
+            <a:schemeClr val="accent1"/>
+          </a:fillRef>
+          <a:effectRef idx="2">
+            <a:schemeClr val="accent1"/>
+          </a:effectRef>
+          <a:fontRef idx="minor">
+            <a:schemeClr val="lt1"/>
+          </a:fontRef>
+        </p:style>
+        <p:txBody>
+          <a:bodyPr rtlCol="0" anchor="ctr"/>
+          <a:lstStyle/>
+          <a:p>
+            <a:pPr algn="ctr"/>
+          </a:p>
+        </p:txBody>
+      </p:sp>
+      <p:sp>
+        <p:nvSpPr>
+          <p:cNvPr id="25" name="TextBox 24"/>
+          <p:cNvSpPr txBox="1"/>
+          <p:nvPr/>
+        </p:nvSpPr>
+        <p:spPr>
+          <a:xfrm>
+            <a:off x="3209544" y="2633472"/>
+            <a:ext cx="5568696" cy="256032"/>
+          </a:xfrm>
+          <a:prstGeom prst="rect">
+            <a:avLst/>
+          </a:prstGeom>
+          <a:noFill/>
+        </p:spPr>
+        <p:txBody>
+          <a:bodyPr wrap="square" lIns="0" rIns="0" tIns="0" bIns="0" anchor="t">
+            <a:spAutoFit/>
+          </a:bodyPr>
+          <a:lstStyle/>
+          <a:p>
+            <a:pPr algn="l">
+              <a:lnSpc>
+                <a:spcPct val="100000"/>
+              </a:lnSpc>
+              <a:spcBef>
+                <a:spcPts val="0"/>
+              </a:spcBef>
+              <a:spcAft>
+                <a:spcPts val="0"/>
+              </a:spcAft>
+            </a:pPr>
+            <a:r>
+              <a:rPr sz="1000" b="1" i="0">
+                <a:solidFill>
+                  <a:srgbClr val="1B3E6E"/>
+                </a:solidFill>
+                <a:latin typeface="Arial"/>
+              </a:rPr>
+              <a:t>PILLAR 2 — Spatial-Temporal Procurement</a:t>
+            </a:r>
+          </a:p>
+        </p:txBody>
+      </p:sp>
+      <p:sp>
+        <p:nvSpPr>
+          <p:cNvPr id="26" name="Rectangle 25"/>
+          <p:cNvSpPr/>
+          <p:nvPr/>
+        </p:nvSpPr>
+        <p:spPr>
+          <a:xfrm>
+            <a:off x="3063240" y="2907791"/>
+            <a:ext cx="5715000" cy="10972"/>
+          </a:xfrm>
+          <a:prstGeom prst="rect">
+            <a:avLst/>
+          </a:prstGeom>
+          <a:solidFill>
+            <a:srgbClr val="BFBFBF"/>
+          </a:solidFill>
+          <a:ln>
+            <a:noFill/>
+          </a:ln>
+          <a:effectLst/>
+        </p:spPr>
+        <p:style>
+          <a:lnRef idx="1">
+            <a:schemeClr val="accent1"/>
+          </a:lnRef>
+          <a:fillRef idx="3">
+            <a:schemeClr val="accent1"/>
+          </a:fillRef>
+          <a:effectRef idx="2">
+            <a:schemeClr val="accent1"/>
+          </a:effectRef>
+          <a:fontRef idx="minor">
+            <a:schemeClr val="lt1"/>
+          </a:fontRef>
+        </p:style>
+        <p:txBody>
+          <a:bodyPr rtlCol="0" anchor="ctr"/>
+          <a:lstStyle/>
+          <a:p>
+            <a:pPr algn="ctr"/>
+          </a:p>
+        </p:txBody>
+      </p:sp>
+      <p:sp>
+        <p:nvSpPr>
+          <p:cNvPr id="27" name="TextBox 26"/>
+          <p:cNvSpPr txBox="1"/>
+          <p:nvPr/>
+        </p:nvSpPr>
+        <p:spPr>
+          <a:xfrm>
+            <a:off x="3063240" y="2999232"/>
+            <a:ext cx="5715000" cy="2011680"/>
+          </a:xfrm>
+          <a:prstGeom prst="rect">
+            <a:avLst/>
+          </a:prstGeom>
+          <a:noFill/>
+        </p:spPr>
+        <p:txBody>
+          <a:bodyPr wrap="square" lIns="0" rIns="0" tIns="0" bIns="0" anchor="t">
+            <a:spAutoFit/>
+          </a:bodyPr>
+          <a:lstStyle/>
+          <a:p>
+            <a:pPr algn="l">
+              <a:lnSpc>
+                <a:spcPct val="102000"/>
+              </a:lnSpc>
+              <a:spcBef>
+                <a:spcPts val="0"/>
+              </a:spcBef>
+              <a:spcAft>
+                <a:spcPts val="150"/>
+              </a:spcAft>
+            </a:pPr>
+            <a:r>
+              <a:rPr sz="750" b="1" i="0">
+                <a:solidFill>
+                  <a:srgbClr val="333333"/>
+                </a:solidFill>
+                <a:latin typeface="Arial"/>
+              </a:rPr>
+              <a:t>•  Seasonal price troughs </a:t>
+            </a:r>
+            <a:r>
+              <a:rPr sz="750" b="0" i="0">
+                <a:solidFill>
+                  <a:srgbClr val="333333"/>
+                </a:solidFill>
+                <a:latin typeface="Arial"/>
+              </a:rPr>
+              <a:t>identify when each commodity should be bought before prices rise</a:t>
+            </a:r>
+          </a:p>
+          <a:p>
+            <a:pPr algn="l">
+              <a:lnSpc>
+                <a:spcPct val="102000"/>
+              </a:lnSpc>
+              <a:spcBef>
+                <a:spcPts val="0"/>
+              </a:spcBef>
+              <a:spcAft>
+                <a:spcPts val="150"/>
+              </a:spcAft>
+            </a:pPr>
+            <a:r>
+              <a:rPr sz="750" b="1" i="0">
+                <a:solidFill>
+                  <a:srgbClr val="333333"/>
+                </a:solidFill>
+                <a:latin typeface="Arial"/>
+              </a:rPr>
+              <a:t>•  Surplus-region signals </a:t>
+            </a:r>
+            <a:r>
+              <a:rPr sz="750" b="0" i="0">
+                <a:solidFill>
+                  <a:srgbClr val="333333"/>
+                </a:solidFill>
+                <a:latin typeface="Arial"/>
+              </a:rPr>
+              <a:t>identify where each commodity can be sourced at lower landed cost</a:t>
+            </a:r>
+          </a:p>
+          <a:p>
+            <a:pPr algn="l">
+              <a:lnSpc>
+                <a:spcPct val="102000"/>
+              </a:lnSpc>
+              <a:spcBef>
+                <a:spcPts val="0"/>
+              </a:spcBef>
+              <a:spcAft>
+                <a:spcPts val="150"/>
+              </a:spcAft>
+            </a:pPr>
+            <a:r>
+              <a:rPr sz="750" b="1" i="0">
+                <a:solidFill>
+                  <a:srgbClr val="333333"/>
+                </a:solidFill>
+                <a:latin typeface="Arial"/>
+              </a:rPr>
+              <a:t>•  Logistics, handling &amp; storage costs </a:t>
+            </a:r>
+            <a:r>
+              <a:rPr sz="750" b="0" i="0">
+                <a:solidFill>
+                  <a:srgbClr val="333333"/>
+                </a:solidFill>
+                <a:latin typeface="Arial"/>
+              </a:rPr>
+              <a:t>are included in every sourcing recommendation</a:t>
+            </a:r>
+          </a:p>
+          <a:p>
+            <a:pPr algn="l">
+              <a:lnSpc>
+                <a:spcPct val="102000"/>
+              </a:lnSpc>
+              <a:spcBef>
+                <a:spcPts val="0"/>
+              </a:spcBef>
+              <a:spcAft>
+                <a:spcPts val="150"/>
+              </a:spcAft>
+            </a:pPr>
+            <a:r>
+              <a:rPr sz="750" b="1" i="0">
+                <a:solidFill>
+                  <a:srgbClr val="333333"/>
+                </a:solidFill>
+                <a:latin typeface="Arial"/>
+              </a:rPr>
+              <a:t>•  Quality grades &amp; shelf-life rules </a:t>
+            </a:r>
+            <a:r>
+              <a:rPr sz="750" b="0" i="0">
+                <a:solidFill>
+                  <a:srgbClr val="333333"/>
+                </a:solidFill>
+                <a:latin typeface="Arial"/>
+              </a:rPr>
+              <a:t>are locked into the final buying plan</a:t>
+            </a:r>
+          </a:p>
+        </p:txBody>
+      </p:sp>
+      <p:sp>
+        <p:nvSpPr>
+          <p:cNvPr id="28" name="Rounded Rectangle 27"/>
+          <p:cNvSpPr/>
+          <p:nvPr/>
+        </p:nvSpPr>
+        <p:spPr>
+          <a:xfrm>
+            <a:off x="3063240" y="4041648"/>
+            <a:ext cx="1005840" cy="310896"/>
+          </a:xfrm>
+          <a:prstGeom prst="roundRect">
+            <a:avLst>
+              <a:gd name="adj" fmla="val 50000"/>
+            </a:avLst>
+          </a:prstGeom>
+          <a:solidFill>
+            <a:srgbClr val="1B3E6E"/>
+          </a:solidFill>
+          <a:ln>
+            <a:noFill/>
+          </a:ln>
+          <a:effectLst/>
+        </p:spPr>
+        <p:style>
+          <a:lnRef idx="1">
+            <a:schemeClr val="accent1"/>
+          </a:lnRef>
+          <a:fillRef idx="3">
+            <a:schemeClr val="accent1"/>
+          </a:fillRef>
+          <a:effectRef idx="2">
+            <a:schemeClr val="accent1"/>
+          </a:effectRef>
+          <a:fontRef idx="minor">
+            <a:schemeClr val="lt1"/>
+          </a:fontRef>
+        </p:style>
+        <p:txBody>
+          <a:bodyPr rtlCol="0" anchor="ctr"/>
+          <a:lstStyle/>
+          <a:p>
+            <a:pPr algn="ctr"/>
+          </a:p>
+        </p:txBody>
+      </p:sp>
+      <p:sp>
+        <p:nvSpPr>
+          <p:cNvPr id="29" name="TextBox 28"/>
+          <p:cNvSpPr txBox="1"/>
+          <p:nvPr/>
+        </p:nvSpPr>
+        <p:spPr>
+          <a:xfrm>
+            <a:off x="3063240" y="4055363"/>
+            <a:ext cx="1005840" cy="274320"/>
+          </a:xfrm>
+          <a:prstGeom prst="rect">
+            <a:avLst/>
+          </a:prstGeom>
+          <a:noFill/>
+        </p:spPr>
+        <p:txBody>
+          <a:bodyPr wrap="square" lIns="0" rIns="0" tIns="0" bIns="0" anchor="ctr">
+            <a:spAutoFit/>
+          </a:bodyPr>
+          <a:lstStyle/>
+          <a:p>
+            <a:pPr algn="ctr">
+              <a:lnSpc>
+                <a:spcPct val="100000"/>
+              </a:lnSpc>
+              <a:spcBef>
+                <a:spcPts val="0"/>
+              </a:spcBef>
+              <a:spcAft>
+                <a:spcPts val="0"/>
+              </a:spcAft>
+            </a:pPr>
+            <a:r>
+              <a:rPr sz="720" b="1" i="0">
+                <a:solidFill>
+                  <a:srgbClr val="FFFFFF"/>
+                </a:solidFill>
+                <a:latin typeface="Arial"/>
+              </a:rPr>
+              <a:t>INGEST</a:t>
+            </a:r>
+          </a:p>
+        </p:txBody>
+      </p:sp>
+      <p:cxnSp>
+        <p:nvCxnSpPr>
+          <p:cNvPr id="30" name="Connector 29"/>
+          <p:cNvCxnSpPr/>
+          <p:nvPr/>
+        </p:nvCxnSpPr>
+        <p:spPr>
+          <a:xfrm>
+            <a:off x="4087368" y="4197096"/>
+            <a:ext cx="86868" cy="0"/>
+          </a:xfrm>
+          <a:prstGeom prst="curvedConnector3">
+            <a:avLst/>
+          </a:prstGeom>
+          <a:ln w="12700">
+            <a:solidFill>
+              <a:srgbClr val="727375"/>
+            </a:solidFill>
+            <a:prstDash val="sysDash"/>
+            <a:tailEnd type="triangle" w="med" len="med"/>
+          </a:ln>
+          <a:effectLst/>
+        </p:spPr>
+        <p:style>
+          <a:lnRef idx="2">
+            <a:schemeClr val="accent1"/>
+          </a:lnRef>
+          <a:fillRef idx="0">
+            <a:schemeClr val="accent1"/>
+          </a:fillRef>
+          <a:effectRef idx="1">
+            <a:schemeClr val="accent1"/>
+          </a:effectRef>
+          <a:fontRef idx="minor">
+            <a:schemeClr val="tx1"/>
+          </a:fontRef>
+        </p:style>
+      </p:cxnSp>
+      <p:sp>
+        <p:nvSpPr>
+          <p:cNvPr id="31" name="Rounded Rectangle 30"/>
+          <p:cNvSpPr/>
+          <p:nvPr/>
+        </p:nvSpPr>
+        <p:spPr>
+          <a:xfrm>
+            <a:off x="4192524" y="4041648"/>
+            <a:ext cx="1005840" cy="310896"/>
+          </a:xfrm>
+          <a:prstGeom prst="roundRect">
+            <a:avLst>
+              <a:gd name="adj" fmla="val 50000"/>
+            </a:avLst>
+          </a:prstGeom>
+          <a:solidFill>
+            <a:srgbClr val="3B6EA5"/>
+          </a:solidFill>
+          <a:ln>
+            <a:noFill/>
+          </a:ln>
+          <a:effectLst/>
+        </p:spPr>
+        <p:style>
+          <a:lnRef idx="1">
+            <a:schemeClr val="accent1"/>
+          </a:lnRef>
+          <a:fillRef idx="3">
+            <a:schemeClr val="accent1"/>
+          </a:fillRef>
+          <a:effectRef idx="2">
+            <a:schemeClr val="accent1"/>
+          </a:effectRef>
+          <a:fontRef idx="minor">
+            <a:schemeClr val="lt1"/>
+          </a:fontRef>
+        </p:style>
+        <p:txBody>
+          <a:bodyPr rtlCol="0" anchor="ctr"/>
+          <a:lstStyle/>
+          <a:p>
+            <a:pPr algn="ctr"/>
+          </a:p>
+        </p:txBody>
+      </p:sp>
+      <p:sp>
+        <p:nvSpPr>
+          <p:cNvPr id="32" name="TextBox 31"/>
+          <p:cNvSpPr txBox="1"/>
+          <p:nvPr/>
+        </p:nvSpPr>
+        <p:spPr>
+          <a:xfrm>
+            <a:off x="4192524" y="4055363"/>
+            <a:ext cx="1005840" cy="274320"/>
+          </a:xfrm>
+          <a:prstGeom prst="rect">
+            <a:avLst/>
+          </a:prstGeom>
+          <a:noFill/>
+        </p:spPr>
+        <p:txBody>
+          <a:bodyPr wrap="square" lIns="0" rIns="0" tIns="0" bIns="0" anchor="ctr">
+            <a:spAutoFit/>
+          </a:bodyPr>
+          <a:lstStyle/>
+          <a:p>
+            <a:pPr algn="ctr">
+              <a:lnSpc>
+                <a:spcPct val="100000"/>
+              </a:lnSpc>
+              <a:spcBef>
+                <a:spcPts val="0"/>
+              </a:spcBef>
+              <a:spcAft>
+                <a:spcPts val="0"/>
+              </a:spcAft>
+            </a:pPr>
+            <a:r>
+              <a:rPr sz="720" b="1" i="0">
+                <a:solidFill>
+                  <a:srgbClr val="FFFFFF"/>
+                </a:solidFill>
+                <a:latin typeface="Arial"/>
+              </a:rPr>
+              <a:t>FORECAST</a:t>
+            </a:r>
+          </a:p>
+        </p:txBody>
+      </p:sp>
+      <p:cxnSp>
+        <p:nvCxnSpPr>
+          <p:cNvPr id="33" name="Connector 32"/>
+          <p:cNvCxnSpPr/>
+          <p:nvPr/>
+        </p:nvCxnSpPr>
+        <p:spPr>
+          <a:xfrm>
+            <a:off x="5216652" y="4197096"/>
+            <a:ext cx="86868" cy="0"/>
+          </a:xfrm>
+          <a:prstGeom prst="curvedConnector3">
+            <a:avLst/>
+          </a:prstGeom>
+          <a:ln w="12700">
+            <a:solidFill>
+              <a:srgbClr val="727375"/>
+            </a:solidFill>
+            <a:prstDash val="sysDash"/>
+            <a:tailEnd type="triangle" w="med" len="med"/>
+          </a:ln>
+          <a:effectLst/>
+        </p:spPr>
+        <p:style>
+          <a:lnRef idx="2">
+            <a:schemeClr val="accent1"/>
+          </a:lnRef>
+          <a:fillRef idx="0">
+            <a:schemeClr val="accent1"/>
+          </a:fillRef>
+          <a:effectRef idx="1">
+            <a:schemeClr val="accent1"/>
+          </a:effectRef>
+          <a:fontRef idx="minor">
+            <a:schemeClr val="tx1"/>
+          </a:fontRef>
+        </p:style>
+      </p:cxnSp>
+      <p:sp>
+        <p:nvSpPr>
+          <p:cNvPr id="34" name="Rounded Rectangle 33"/>
+          <p:cNvSpPr/>
+          <p:nvPr/>
+        </p:nvSpPr>
+        <p:spPr>
+          <a:xfrm>
+            <a:off x="5321808" y="4041648"/>
+            <a:ext cx="1005840" cy="310896"/>
+          </a:xfrm>
+          <a:prstGeom prst="roundRect">
+            <a:avLst>
+              <a:gd name="adj" fmla="val 50000"/>
+            </a:avLst>
+          </a:prstGeom>
+          <a:solidFill>
+            <a:srgbClr val="398025"/>
+          </a:solidFill>
+          <a:ln>
+            <a:noFill/>
+          </a:ln>
+          <a:effectLst/>
+        </p:spPr>
+        <p:style>
+          <a:lnRef idx="1">
+            <a:schemeClr val="accent1"/>
+          </a:lnRef>
+          <a:fillRef idx="3">
+            <a:schemeClr val="accent1"/>
+          </a:fillRef>
+          <a:effectRef idx="2">
+            <a:schemeClr val="accent1"/>
+          </a:effectRef>
+          <a:fontRef idx="minor">
+            <a:schemeClr val="lt1"/>
+          </a:fontRef>
+        </p:style>
+        <p:txBody>
+          <a:bodyPr rtlCol="0" anchor="ctr"/>
+          <a:lstStyle/>
+          <a:p>
+            <a:pPr algn="ctr"/>
+          </a:p>
+        </p:txBody>
+      </p:sp>
+      <p:sp>
+        <p:nvSpPr>
+          <p:cNvPr id="35" name="TextBox 34"/>
+          <p:cNvSpPr txBox="1"/>
+          <p:nvPr/>
+        </p:nvSpPr>
+        <p:spPr>
+          <a:xfrm>
+            <a:off x="5321808" y="4055363"/>
+            <a:ext cx="1005840" cy="274320"/>
+          </a:xfrm>
+          <a:prstGeom prst="rect">
+            <a:avLst/>
+          </a:prstGeom>
+          <a:noFill/>
+        </p:spPr>
+        <p:txBody>
+          <a:bodyPr wrap="square" lIns="0" rIns="0" tIns="0" bIns="0" anchor="ctr">
+            <a:spAutoFit/>
+          </a:bodyPr>
+          <a:lstStyle/>
+          <a:p>
+            <a:pPr algn="ctr">
+              <a:lnSpc>
+                <a:spcPct val="100000"/>
+              </a:lnSpc>
+              <a:spcBef>
+                <a:spcPts val="0"/>
+              </a:spcBef>
+              <a:spcAft>
+                <a:spcPts val="0"/>
+              </a:spcAft>
+            </a:pPr>
+            <a:r>
+              <a:rPr sz="720" b="1" i="0">
+                <a:solidFill>
+                  <a:srgbClr val="FFFFFF"/>
+                </a:solidFill>
+                <a:latin typeface="Arial"/>
+              </a:rPr>
+              <a:t>OPTIMIZE</a:t>
+            </a:r>
+          </a:p>
+        </p:txBody>
+      </p:sp>
+      <p:cxnSp>
+        <p:nvCxnSpPr>
+          <p:cNvPr id="36" name="Connector 35"/>
+          <p:cNvCxnSpPr/>
+          <p:nvPr/>
+        </p:nvCxnSpPr>
+        <p:spPr>
+          <a:xfrm>
+            <a:off x="6345936" y="4197096"/>
+            <a:ext cx="86868" cy="0"/>
+          </a:xfrm>
+          <a:prstGeom prst="curvedConnector3">
+            <a:avLst/>
+          </a:prstGeom>
+          <a:ln w="12700">
+            <a:solidFill>
+              <a:srgbClr val="727375"/>
+            </a:solidFill>
+            <a:prstDash val="sysDash"/>
+            <a:tailEnd type="triangle" w="med" len="med"/>
+          </a:ln>
+          <a:effectLst/>
+        </p:spPr>
+        <p:style>
+          <a:lnRef idx="2">
+            <a:schemeClr val="accent1"/>
+          </a:lnRef>
+          <a:fillRef idx="0">
+            <a:schemeClr val="accent1"/>
+          </a:fillRef>
+          <a:effectRef idx="1">
+            <a:schemeClr val="accent1"/>
+          </a:effectRef>
+          <a:fontRef idx="minor">
+            <a:schemeClr val="tx1"/>
+          </a:fontRef>
+        </p:style>
+      </p:cxnSp>
+      <p:sp>
+        <p:nvSpPr>
+          <p:cNvPr id="37" name="Rounded Rectangle 36"/>
+          <p:cNvSpPr/>
+          <p:nvPr/>
+        </p:nvSpPr>
+        <p:spPr>
+          <a:xfrm>
+            <a:off x="6451092" y="4041648"/>
+            <a:ext cx="1005840" cy="310896"/>
+          </a:xfrm>
+          <a:prstGeom prst="roundRect">
+            <a:avLst>
+              <a:gd name="adj" fmla="val 50000"/>
+            </a:avLst>
+          </a:prstGeom>
+          <a:solidFill>
+            <a:srgbClr val="E08A1E"/>
+          </a:solidFill>
+          <a:ln>
+            <a:noFill/>
+          </a:ln>
+          <a:effectLst/>
+        </p:spPr>
+        <p:style>
+          <a:lnRef idx="1">
+            <a:schemeClr val="accent1"/>
+          </a:lnRef>
+          <a:fillRef idx="3">
+            <a:schemeClr val="accent1"/>
+          </a:fillRef>
+          <a:effectRef idx="2">
+            <a:schemeClr val="accent1"/>
+          </a:effectRef>
+          <a:fontRef idx="minor">
+            <a:schemeClr val="lt1"/>
+          </a:fontRef>
+        </p:style>
+        <p:txBody>
+          <a:bodyPr rtlCol="0" anchor="ctr"/>
+          <a:lstStyle/>
+          <a:p>
+            <a:pPr algn="ctr"/>
+          </a:p>
+        </p:txBody>
+      </p:sp>
+      <p:sp>
+        <p:nvSpPr>
+          <p:cNvPr id="38" name="TextBox 37"/>
+          <p:cNvSpPr txBox="1"/>
+          <p:nvPr/>
+        </p:nvSpPr>
+        <p:spPr>
+          <a:xfrm>
+            <a:off x="6451092" y="4055363"/>
+            <a:ext cx="1005840" cy="274320"/>
+          </a:xfrm>
+          <a:prstGeom prst="rect">
+            <a:avLst/>
+          </a:prstGeom>
+          <a:noFill/>
+        </p:spPr>
+        <p:txBody>
+          <a:bodyPr wrap="square" lIns="0" rIns="0" tIns="0" bIns="0" anchor="ctr">
+            <a:spAutoFit/>
+          </a:bodyPr>
+          <a:lstStyle/>
+          <a:p>
+            <a:pPr algn="ctr">
+              <a:lnSpc>
+                <a:spcPct val="100000"/>
+              </a:lnSpc>
+              <a:spcBef>
+                <a:spcPts val="0"/>
+              </a:spcBef>
+              <a:spcAft>
+                <a:spcPts val="0"/>
+              </a:spcAft>
+            </a:pPr>
+            <a:r>
+              <a:rPr sz="720" b="1" i="0">
+                <a:solidFill>
+                  <a:srgbClr val="FFFFFF"/>
+                </a:solidFill>
+                <a:latin typeface="Arial"/>
+              </a:rPr>
+              <a:t>RECOMMEND</a:t>
+            </a:r>
+          </a:p>
+        </p:txBody>
+      </p:sp>
+      <p:cxnSp>
+        <p:nvCxnSpPr>
+          <p:cNvPr id="39" name="Connector 38"/>
+          <p:cNvCxnSpPr/>
+          <p:nvPr/>
+        </p:nvCxnSpPr>
+        <p:spPr>
+          <a:xfrm>
+            <a:off x="7475220" y="4197096"/>
+            <a:ext cx="86868" cy="0"/>
+          </a:xfrm>
+          <a:prstGeom prst="curvedConnector3">
+            <a:avLst/>
+          </a:prstGeom>
+          <a:ln w="12700">
+            <a:solidFill>
+              <a:srgbClr val="727375"/>
+            </a:solidFill>
+            <a:prstDash val="sysDash"/>
+            <a:tailEnd type="triangle" w="med" len="med"/>
+          </a:ln>
+          <a:effectLst/>
+        </p:spPr>
+        <p:style>
+          <a:lnRef idx="2">
+            <a:schemeClr val="accent1"/>
+          </a:lnRef>
+          <a:fillRef idx="0">
+            <a:schemeClr val="accent1"/>
+          </a:fillRef>
+          <a:effectRef idx="1">
+            <a:schemeClr val="accent1"/>
+          </a:effectRef>
+          <a:fontRef idx="minor">
+            <a:schemeClr val="tx1"/>
+          </a:fontRef>
+        </p:style>
+      </p:cxnSp>
+      <p:sp>
+        <p:nvSpPr>
+          <p:cNvPr id="40" name="Rounded Rectangle 39"/>
+          <p:cNvSpPr/>
+          <p:nvPr/>
+        </p:nvSpPr>
+        <p:spPr>
+          <a:xfrm>
+            <a:off x="7580376" y="4041648"/>
+            <a:ext cx="1005840" cy="310896"/>
+          </a:xfrm>
+          <a:prstGeom prst="roundRect">
+            <a:avLst>
+              <a:gd name="adj" fmla="val 50000"/>
+            </a:avLst>
+          </a:prstGeom>
+          <a:solidFill>
+            <a:srgbClr val="A6428C"/>
+          </a:solidFill>
+          <a:ln>
+            <a:noFill/>
+          </a:ln>
+          <a:effectLst/>
+        </p:spPr>
+        <p:style>
+          <a:lnRef idx="1">
+            <a:schemeClr val="accent1"/>
+          </a:lnRef>
+          <a:fillRef idx="3">
+            <a:schemeClr val="accent1"/>
+          </a:fillRef>
+          <a:effectRef idx="2">
+            <a:schemeClr val="accent1"/>
+          </a:effectRef>
+          <a:fontRef idx="minor">
+            <a:schemeClr val="lt1"/>
+          </a:fontRef>
+        </p:style>
+        <p:txBody>
+          <a:bodyPr rtlCol="0" anchor="ctr"/>
+          <a:lstStyle/>
+          <a:p>
+            <a:pPr algn="ctr"/>
+          </a:p>
+        </p:txBody>
+      </p:sp>
+      <p:sp>
+        <p:nvSpPr>
+          <p:cNvPr id="41" name="TextBox 40"/>
+          <p:cNvSpPr txBox="1"/>
+          <p:nvPr/>
+        </p:nvSpPr>
+        <p:spPr>
+          <a:xfrm>
+            <a:off x="7580376" y="4055363"/>
+            <a:ext cx="1005840" cy="274320"/>
+          </a:xfrm>
+          <a:prstGeom prst="rect">
+            <a:avLst/>
+          </a:prstGeom>
+          <a:noFill/>
+        </p:spPr>
+        <p:txBody>
+          <a:bodyPr wrap="square" lIns="0" rIns="0" tIns="0" bIns="0" anchor="ctr">
+            <a:spAutoFit/>
+          </a:bodyPr>
+          <a:lstStyle/>
+          <a:p>
+            <a:pPr algn="ctr">
+              <a:lnSpc>
+                <a:spcPct val="100000"/>
+              </a:lnSpc>
+              <a:spcBef>
+                <a:spcPts val="0"/>
+              </a:spcBef>
+              <a:spcAft>
+                <a:spcPts val="0"/>
+              </a:spcAft>
+            </a:pPr>
+            <a:r>
+              <a:rPr sz="720" b="1" i="0">
+                <a:solidFill>
+                  <a:srgbClr val="FFFFFF"/>
+                </a:solidFill>
+                <a:latin typeface="Arial"/>
+              </a:rPr>
+              <a:t>LEARN</a:t>
+            </a:r>
+          </a:p>
+        </p:txBody>
+      </p:sp>
+      <p:sp>
+        <p:nvSpPr>
+          <p:cNvPr id="42" name="TextBox 41"/>
+          <p:cNvSpPr txBox="1"/>
+          <p:nvPr/>
+        </p:nvSpPr>
+        <p:spPr>
+          <a:xfrm>
+            <a:off x="3063240" y="4389120"/>
+            <a:ext cx="5715000" cy="164592"/>
+          </a:xfrm>
+          <a:prstGeom prst="rect">
+            <a:avLst/>
+          </a:prstGeom>
+          <a:noFill/>
+        </p:spPr>
+        <p:txBody>
+          <a:bodyPr wrap="square" lIns="0" rIns="0" tIns="0" bIns="0" anchor="t">
+            <a:spAutoFit/>
+          </a:bodyPr>
+          <a:lstStyle/>
+          <a:p>
+            <a:pPr algn="ctr">
+              <a:lnSpc>
+                <a:spcPct val="100000"/>
+              </a:lnSpc>
+              <a:spcBef>
+                <a:spcPts val="0"/>
+              </a:spcBef>
+              <a:spcAft>
+                <a:spcPts val="0"/>
+              </a:spcAft>
+            </a:pPr>
+            <a:r>
+              <a:rPr sz="680" b="0" i="1">
+                <a:solidFill>
+                  <a:srgbClr val="727375"/>
+                </a:solidFill>
+                <a:latin typeface="Arial"/>
+              </a:rPr>
+              <a:t>the self-learning loop — repeats daily, each cycle sharpens the next forecast</a:t>
+            </a:r>
+          </a:p>
+        </p:txBody>
+      </p:sp>
+      <p:sp>
+        <p:nvSpPr>
+          <p:cNvPr id="43" name="Rectangle 42"/>
+          <p:cNvSpPr/>
+          <p:nvPr/>
+        </p:nvSpPr>
+        <p:spPr>
+          <a:xfrm>
+            <a:off x="3063240" y="4617720"/>
+            <a:ext cx="54864" cy="182880"/>
+          </a:xfrm>
+          <a:prstGeom prst="rect">
+            <a:avLst/>
+          </a:prstGeom>
+          <a:solidFill>
+            <a:srgbClr val="398025"/>
+          </a:solidFill>
+          <a:ln>
+            <a:noFill/>
+          </a:ln>
+          <a:effectLst/>
+        </p:spPr>
+        <p:style>
+          <a:lnRef idx="1">
+            <a:schemeClr val="accent1"/>
+          </a:lnRef>
+          <a:fillRef idx="3">
+            <a:schemeClr val="accent1"/>
+          </a:fillRef>
+          <a:effectRef idx="2">
+            <a:schemeClr val="accent1"/>
+          </a:effectRef>
+          <a:fontRef idx="minor">
+            <a:schemeClr val="lt1"/>
+          </a:fontRef>
+        </p:style>
+        <p:txBody>
+          <a:bodyPr rtlCol="0" anchor="ctr"/>
+          <a:lstStyle/>
+          <a:p>
+            <a:pPr algn="ctr"/>
+          </a:p>
+        </p:txBody>
+      </p:sp>
+      <p:sp>
+        <p:nvSpPr>
+          <p:cNvPr id="44" name="TextBox 43"/>
+          <p:cNvSpPr txBox="1"/>
+          <p:nvPr/>
+        </p:nvSpPr>
+        <p:spPr>
+          <a:xfrm>
+            <a:off x="3209544" y="4590288"/>
+            <a:ext cx="5568696" cy="256032"/>
+          </a:xfrm>
+          <a:prstGeom prst="rect">
+            <a:avLst/>
+          </a:prstGeom>
+          <a:noFill/>
+        </p:spPr>
+        <p:txBody>
+          <a:bodyPr wrap="square" lIns="0" rIns="0" tIns="0" bIns="0" anchor="t">
+            <a:spAutoFit/>
+          </a:bodyPr>
+          <a:lstStyle/>
+          <a:p>
+            <a:pPr algn="l">
+              <a:lnSpc>
+                <a:spcPct val="100000"/>
+              </a:lnSpc>
+              <a:spcBef>
+                <a:spcPts val="0"/>
+              </a:spcBef>
+              <a:spcAft>
+                <a:spcPts val="0"/>
+              </a:spcAft>
+            </a:pPr>
+            <a:r>
+              <a:rPr sz="950" b="1" i="0">
+                <a:solidFill>
+                  <a:srgbClr val="1B3E6E"/>
+                </a:solidFill>
+                <a:latin typeface="Arial"/>
+              </a:rPr>
+              <a:t>Rice procurement cost — with vs. without GS funding ($M)</a:t>
+            </a:r>
+          </a:p>
+        </p:txBody>
+      </p:sp>
+      <p:sp>
+        <p:nvSpPr>
+          <p:cNvPr id="45" name="Rectangle 44"/>
+          <p:cNvSpPr/>
+          <p:nvPr/>
+        </p:nvSpPr>
+        <p:spPr>
+          <a:xfrm>
+            <a:off x="3063240" y="4864607"/>
+            <a:ext cx="5715000" cy="10972"/>
+          </a:xfrm>
+          <a:prstGeom prst="rect">
+            <a:avLst/>
+          </a:prstGeom>
+          <a:solidFill>
+            <a:srgbClr val="BFBFBF"/>
+          </a:solidFill>
+          <a:ln>
+            <a:noFill/>
+          </a:ln>
+          <a:effectLst/>
+        </p:spPr>
+        <p:style>
+          <a:lnRef idx="1">
+            <a:schemeClr val="accent1"/>
+          </a:lnRef>
+          <a:fillRef idx="3">
+            <a:schemeClr val="accent1"/>
+          </a:fillRef>
+          <a:effectRef idx="2">
+            <a:schemeClr val="accent1"/>
+          </a:effectRef>
+          <a:fontRef idx="minor">
+            <a:schemeClr val="lt1"/>
+          </a:fontRef>
+        </p:style>
+        <p:txBody>
+          <a:bodyPr rtlCol="0" anchor="ctr"/>
+          <a:lstStyle/>
+          <a:p>
+            <a:pPr algn="ctr"/>
+          </a:p>
+        </p:txBody>
+      </p:sp>
+      <p:graphicFrame>
+        <p:nvGraphicFramePr>
+          <p:cNvPr id="46" name="Chart 45"/>
+          <p:cNvGraphicFramePr>
+            <a:graphicFrameLocks noGrp="1"/>
+          </p:cNvGraphicFramePr>
+          <p:nvPr/>
+        </p:nvGraphicFramePr>
+        <p:xfrm>
+          <a:off x="3063240" y="4919472"/>
+          <a:ext cx="3794760" cy="1316736"/>
+        </p:xfrm>
+        <a:graphic>
+          <a:graphicData uri="http://schemas.openxmlformats.org/drawingml/2006/chart">
+            <c:chart xmlns:c="http://schemas.openxmlformats.org/drawingml/2006/chart" r:id="rId2"/>
+          </a:graphicData>
+        </a:graphic>
+      </p:graphicFrame>
+      <p:sp>
+        <p:nvSpPr>
+          <p:cNvPr id="47" name="TextBox 46"/>
+          <p:cNvSpPr txBox="1"/>
+          <p:nvPr/>
+        </p:nvSpPr>
+        <p:spPr>
+          <a:xfrm>
+            <a:off x="6995160" y="5047488"/>
+            <a:ext cx="1783080" cy="1188720"/>
+          </a:xfrm>
+          <a:prstGeom prst="rect">
+            <a:avLst/>
+          </a:prstGeom>
+          <a:noFill/>
+        </p:spPr>
+        <p:txBody>
+          <a:bodyPr wrap="square" lIns="0" rIns="0" tIns="0" bIns="0" anchor="t">
+            <a:spAutoFit/>
+          </a:bodyPr>
+          <a:lstStyle/>
+          <a:p>
+            <a:pPr algn="l">
+              <a:lnSpc>
+                <a:spcPct val="100000"/>
+              </a:lnSpc>
+              <a:spcBef>
+                <a:spcPts val="0"/>
+              </a:spcBef>
+              <a:spcAft>
+                <a:spcPts val="100"/>
+              </a:spcAft>
+            </a:pPr>
+            <a:r>
+              <a:rPr sz="1300" b="1" i="0">
+                <a:solidFill>
+                  <a:srgbClr val="398025"/>
+                </a:solidFill>
+                <a:latin typeface="Georgia"/>
+              </a:rPr>
+              <a:t>~$10.1M saved</a:t>
+            </a:r>
+          </a:p>
+          <a:p>
+            <a:pPr algn="l">
+              <a:lnSpc>
+                <a:spcPct val="100000"/>
+              </a:lnSpc>
+              <a:spcBef>
+                <a:spcPts val="0"/>
+              </a:spcBef>
+              <a:spcAft>
+                <a:spcPts val="300"/>
+              </a:spcAft>
+            </a:pPr>
+            <a:r>
+              <a:rPr sz="900" b="1" i="0">
+                <a:solidFill>
+                  <a:srgbClr val="398025"/>
+                </a:solidFill>
+                <a:latin typeface="Arial"/>
+              </a:rPr>
+              <a:t>21.6% ↓ cost, 2026–29</a:t>
+            </a:r>
+          </a:p>
+          <a:p>
+            <a:pPr algn="l">
+              <a:lnSpc>
+                <a:spcPct val="100000"/>
+              </a:lnSpc>
+              <a:spcBef>
+                <a:spcPts val="0"/>
+              </a:spcBef>
+              <a:spcAft>
+                <a:spcPts val="0"/>
+              </a:spcAft>
+            </a:pPr>
+            <a:r>
+              <a:rPr sz="720" b="0" i="1">
+                <a:solidFill>
+                  <a:srgbClr val="727375"/>
+                </a:solidFill>
+                <a:latin typeface="Arial"/>
+              </a:rPr>
+              <a:t>freed capital feeds more children</a:t>
+            </a:r>
+          </a:p>
+        </p:txBody>
+      </p:sp>
+    </p:spTree>
+  </p:cSld>
+  <p:clrMapOvr>
+    <a:masterClrMapping/>
+  </p:clrMapOvr>
+</p:sld>
+</file>
+
+<file path=ppt/slides/slide12.xml><?xml version="1.0" encoding="utf-8"?>
+<p:sld xmlns:a="http://schemas.openxmlformats.org/drawingml/2006/main" xmlns:p="http://schemas.openxmlformats.org/presentationml/2006/main" xmlns:r="http://schemas.openxmlformats.org/officeDocument/2006/relationships">
+  <p:cSld>
+    <p:spTree>
+      <p:nvGrpSpPr>
+        <p:cNvPr id="1" name=""/>
+        <p:cNvGrpSpPr/>
+        <p:nvPr/>
+      </p:nvGrpSpPr>
+      <p:grpSpPr/>
+      <p:sp>
+        <p:nvSpPr>
+          <p:cNvPr id="2" name="Rectangle 1"/>
+          <p:cNvSpPr/>
+          <p:nvPr/>
+        </p:nvSpPr>
+        <p:spPr>
+          <a:xfrm>
+            <a:off x="365760" y="274320"/>
+            <a:ext cx="8412480" cy="23774"/>
+          </a:xfrm>
+          <a:prstGeom prst="rect">
+            <a:avLst/>
+          </a:prstGeom>
+          <a:solidFill>
+            <a:srgbClr val="1B3E6E"/>
+          </a:solidFill>
+          <a:ln>
+            <a:noFill/>
+          </a:ln>
+          <a:effectLst/>
+        </p:spPr>
+        <p:style>
+          <a:lnRef idx="1">
+            <a:schemeClr val="accent1"/>
+          </a:lnRef>
+          <a:fillRef idx="3">
+            <a:schemeClr val="accent1"/>
+          </a:fillRef>
+          <a:effectRef idx="2">
+            <a:schemeClr val="accent1"/>
+          </a:effectRef>
+          <a:fontRef idx="minor">
+            <a:schemeClr val="lt1"/>
+          </a:fontRef>
+        </p:style>
+        <p:txBody>
+          <a:bodyPr rtlCol="0" anchor="ctr"/>
+          <a:lstStyle/>
+          <a:p>
+            <a:pPr algn="ctr"/>
+          </a:p>
+        </p:txBody>
+      </p:sp>
+      <p:sp>
+        <p:nvSpPr>
+          <p:cNvPr id="3" name="TextBox 2"/>
+          <p:cNvSpPr txBox="1"/>
+          <p:nvPr/>
+        </p:nvSpPr>
+        <p:spPr>
+          <a:xfrm>
+            <a:off x="365760" y="365760"/>
+            <a:ext cx="8412480" cy="457200"/>
+          </a:xfrm>
+          <a:prstGeom prst="rect">
+            <a:avLst/>
+          </a:prstGeom>
+          <a:noFill/>
+        </p:spPr>
+        <p:txBody>
+          <a:bodyPr wrap="square" lIns="0" rIns="0" tIns="0" bIns="0" anchor="t">
+            <a:spAutoFit/>
+          </a:bodyPr>
+          <a:lstStyle/>
+          <a:p>
+            <a:pPr algn="l">
+              <a:lnSpc>
+                <a:spcPct val="100000"/>
+              </a:lnSpc>
+              <a:spcBef>
+                <a:spcPts val="0"/>
+              </a:spcBef>
+              <a:spcAft>
+                <a:spcPts val="0"/>
+              </a:spcAft>
+            </a:pPr>
+            <a:r>
+              <a:rPr sz="2000" b="0" i="0">
+                <a:solidFill>
+                  <a:srgbClr val="1B3E6E"/>
+                </a:solidFill>
+                <a:latin typeface="Georgia"/>
+              </a:rPr>
+              <a:t>Solution 1 — the AI-enabled planning &amp; procurement build ($150k)</a:t>
+            </a:r>
+          </a:p>
+        </p:txBody>
+      </p:sp>
+      <p:sp>
+        <p:nvSpPr>
+          <p:cNvPr id="4" name="TextBox 3"/>
+          <p:cNvSpPr txBox="1"/>
+          <p:nvPr/>
+        </p:nvSpPr>
+        <p:spPr>
+          <a:xfrm>
+            <a:off x="365760" y="822960"/>
+            <a:ext cx="8412480" cy="438912"/>
+          </a:xfrm>
+          <a:prstGeom prst="rect">
+            <a:avLst/>
+          </a:prstGeom>
+          <a:noFill/>
+        </p:spPr>
+        <p:txBody>
+          <a:bodyPr wrap="square" lIns="0" rIns="0" tIns="0" bIns="0" anchor="t">
+            <a:spAutoFit/>
+          </a:bodyPr>
+          <a:lstStyle/>
+          <a:p>
+            <a:pPr algn="l">
+              <a:lnSpc>
+                <a:spcPct val="100000"/>
+              </a:lnSpc>
+              <a:spcBef>
+                <a:spcPts val="0"/>
+              </a:spcBef>
+              <a:spcAft>
+                <a:spcPts val="0"/>
+              </a:spcAft>
+            </a:pPr>
+            <a:r>
+              <a:rPr sz="1050" b="0" i="0">
+                <a:solidFill>
+                  <a:srgbClr val="333333"/>
+                </a:solidFill>
+                <a:latin typeface="Arial"/>
+              </a:rPr>
+              <a:t>Connecting real-time demand signals to kitchen production and procurement — the technology that closes Gap 1.</a:t>
+            </a:r>
+          </a:p>
+        </p:txBody>
+      </p:sp>
+      <p:sp>
+        <p:nvSpPr>
+          <p:cNvPr id="5" name="Rectangle 4"/>
+          <p:cNvSpPr/>
+          <p:nvPr/>
+        </p:nvSpPr>
+        <p:spPr>
+          <a:xfrm>
+            <a:off x="502920" y="6071616"/>
+            <a:ext cx="8138159" cy="365760"/>
+          </a:xfrm>
+          <a:prstGeom prst="rect">
+            <a:avLst/>
+          </a:prstGeom>
+          <a:solidFill>
+            <a:srgbClr val="D9D9D9"/>
+          </a:solidFill>
+          <a:ln>
+            <a:noFill/>
+          </a:ln>
+          <a:effectLst/>
+        </p:spPr>
+        <p:style>
+          <a:lnRef idx="1">
+            <a:schemeClr val="accent1"/>
+          </a:lnRef>
+          <a:fillRef idx="3">
+            <a:schemeClr val="accent1"/>
+          </a:fillRef>
+          <a:effectRef idx="2">
+            <a:schemeClr val="accent1"/>
+          </a:effectRef>
+          <a:fontRef idx="minor">
+            <a:schemeClr val="lt1"/>
+          </a:fontRef>
+        </p:style>
+        <p:txBody>
+          <a:bodyPr rtlCol="0" anchor="ctr"/>
+          <a:lstStyle/>
+          <a:p>
+            <a:pPr algn="ctr"/>
+          </a:p>
+        </p:txBody>
+      </p:sp>
+      <p:sp>
+        <p:nvSpPr>
+          <p:cNvPr id="6" name="TextBox 5"/>
+          <p:cNvSpPr txBox="1"/>
+          <p:nvPr/>
+        </p:nvSpPr>
+        <p:spPr>
+          <a:xfrm>
+            <a:off x="640080" y="6071616"/>
+            <a:ext cx="7863840" cy="365760"/>
+          </a:xfrm>
+          <a:prstGeom prst="rect">
+            <a:avLst/>
+          </a:prstGeom>
+          <a:noFill/>
+        </p:spPr>
+        <p:txBody>
+          <a:bodyPr wrap="square" lIns="0" rIns="0" tIns="0" bIns="0" anchor="ctr">
+            <a:spAutoFit/>
+          </a:bodyPr>
+          <a:lstStyle/>
+          <a:p>
+            <a:pPr algn="ctr">
+              <a:lnSpc>
+                <a:spcPct val="95000"/>
+              </a:lnSpc>
+              <a:spcBef>
+                <a:spcPts val="0"/>
+              </a:spcBef>
+              <a:spcAft>
+                <a:spcPts val="0"/>
+              </a:spcAft>
+            </a:pPr>
+            <a:r>
+              <a:rPr sz="1100" b="1" i="0">
+                <a:solidFill>
+                  <a:srgbClr val="1B3E6E"/>
+                </a:solidFill>
+                <a:latin typeface="Georgia"/>
+              </a:rPr>
+              <a:t>“Feeding more children with the same rupee” — AI plus GS capital makes it possible.</a:t>
+            </a:r>
+          </a:p>
+        </p:txBody>
+      </p:sp>
+      <p:sp>
+        <p:nvSpPr>
+          <p:cNvPr id="7" name="TextBox 6"/>
+          <p:cNvSpPr txBox="1"/>
+          <p:nvPr/>
+        </p:nvSpPr>
+        <p:spPr>
+          <a:xfrm>
+            <a:off x="365760" y="6492240"/>
+            <a:ext cx="1280160" cy="329184"/>
+          </a:xfrm>
+          <a:prstGeom prst="rect">
+            <a:avLst/>
+          </a:prstGeom>
+          <a:noFill/>
+        </p:spPr>
+        <p:txBody>
+          <a:bodyPr wrap="square" lIns="0" rIns="0" tIns="0" bIns="0" anchor="t">
+            <a:spAutoFit/>
+          </a:bodyPr>
+          <a:lstStyle/>
+          <a:p>
+            <a:pPr algn="l">
+              <a:lnSpc>
+                <a:spcPct val="90000"/>
+              </a:lnSpc>
+              <a:spcBef>
+                <a:spcPts val="0"/>
+              </a:spcBef>
+              <a:spcAft>
+                <a:spcPts val="0"/>
+              </a:spcAft>
+            </a:pPr>
+            <a:r>
+              <a:rPr sz="900" b="1" i="0">
+                <a:solidFill>
+                  <a:srgbClr val="111111"/>
+                </a:solidFill>
+                <a:latin typeface="Georgia"/>
+              </a:rPr>
+              <a:t>Goldman</a:t>
+            </a:r>
+          </a:p>
+          <a:p>
+            <a:pPr algn="l">
+              <a:lnSpc>
+                <a:spcPct val="90000"/>
+              </a:lnSpc>
+              <a:spcBef>
+                <a:spcPts val="0"/>
+              </a:spcBef>
+              <a:spcAft>
+                <a:spcPts val="0"/>
+              </a:spcAft>
+            </a:pPr>
+            <a:r>
+              <a:rPr sz="900" b="1" i="0">
+                <a:solidFill>
+                  <a:srgbClr val="111111"/>
+                </a:solidFill>
+                <a:latin typeface="Georgia"/>
+              </a:rPr>
+              <a:t>Sachs</a:t>
+            </a:r>
+          </a:p>
+        </p:txBody>
+      </p:sp>
+      <p:sp>
+        <p:nvSpPr>
+          <p:cNvPr id="8" name="TextBox 7"/>
+          <p:cNvSpPr txBox="1"/>
+          <p:nvPr/>
+        </p:nvSpPr>
+        <p:spPr>
+          <a:xfrm>
+            <a:off x="8321040" y="6528816"/>
+            <a:ext cx="457200" cy="274320"/>
+          </a:xfrm>
+          <a:prstGeom prst="rect">
+            <a:avLst/>
+          </a:prstGeom>
+          <a:noFill/>
+        </p:spPr>
+        <p:txBody>
+          <a:bodyPr wrap="square" lIns="0" rIns="0" tIns="0" bIns="0" anchor="t">
+            <a:spAutoFit/>
+          </a:bodyPr>
+          <a:lstStyle/>
+          <a:p>
+            <a:pPr algn="r">
+              <a:lnSpc>
+                <a:spcPct val="100000"/>
+              </a:lnSpc>
+              <a:spcBef>
+                <a:spcPts val="0"/>
+              </a:spcBef>
+              <a:spcAft>
+                <a:spcPts val="300"/>
+              </a:spcAft>
+            </a:pPr>
+            <a:r>
+              <a:rPr sz="900" b="0" i="0">
+                <a:solidFill>
+                  <a:srgbClr val="727375"/>
+                </a:solidFill>
+                <a:latin typeface="Arial"/>
+              </a:rPr>
+              <a:t>12</a:t>
+            </a:r>
+          </a:p>
+        </p:txBody>
+      </p:sp>
+      <p:sp>
+        <p:nvSpPr>
+          <p:cNvPr id="9" name="TextBox 8"/>
+          <p:cNvSpPr txBox="1"/>
+          <p:nvPr/>
+        </p:nvSpPr>
+        <p:spPr>
+          <a:xfrm>
+            <a:off x="4754879" y="54864"/>
+            <a:ext cx="4023360" cy="182880"/>
+          </a:xfrm>
+          <a:prstGeom prst="rect">
+            <a:avLst/>
+          </a:prstGeom>
+          <a:noFill/>
+        </p:spPr>
+        <p:txBody>
+          <a:bodyPr wrap="square" lIns="0" rIns="0" tIns="0" bIns="0" anchor="t">
+            <a:spAutoFit/>
+          </a:bodyPr>
+          <a:lstStyle/>
+          <a:p>
+            <a:pPr algn="r">
+              <a:lnSpc>
+                <a:spcPct val="100000"/>
+              </a:lnSpc>
+              <a:spcBef>
+                <a:spcPts val="0"/>
+              </a:spcBef>
+              <a:spcAft>
+                <a:spcPts val="0"/>
+              </a:spcAft>
+            </a:pPr>
+            <a:r>
+              <a:rPr sz="750" b="0" i="1">
+                <a:solidFill>
+                  <a:srgbClr val="727375"/>
+                </a:solidFill>
+                <a:latin typeface="Arial"/>
+              </a:rPr>
+              <a:t>PROPOSED SLIDE 4 — OPTION D (central hub)</a:t>
+            </a:r>
+          </a:p>
+        </p:txBody>
+      </p:sp>
+      <p:sp>
+        <p:nvSpPr>
+          <p:cNvPr id="10" name="Rectangle 9"/>
+          <p:cNvSpPr/>
+          <p:nvPr/>
+        </p:nvSpPr>
+        <p:spPr>
+          <a:xfrm>
+            <a:off x="365760" y="1399032"/>
+            <a:ext cx="54864" cy="182880"/>
+          </a:xfrm>
+          <a:prstGeom prst="rect">
+            <a:avLst/>
+          </a:prstGeom>
+          <a:solidFill>
+            <a:srgbClr val="095F61"/>
+          </a:solidFill>
+          <a:ln>
+            <a:noFill/>
+          </a:ln>
+          <a:effectLst/>
+        </p:spPr>
+        <p:style>
+          <a:lnRef idx="1">
+            <a:schemeClr val="accent1"/>
+          </a:lnRef>
+          <a:fillRef idx="3">
+            <a:schemeClr val="accent1"/>
+          </a:fillRef>
+          <a:effectRef idx="2">
+            <a:schemeClr val="accent1"/>
+          </a:effectRef>
+          <a:fontRef idx="minor">
+            <a:schemeClr val="lt1"/>
+          </a:fontRef>
+        </p:style>
+        <p:txBody>
+          <a:bodyPr rtlCol="0" anchor="ctr"/>
+          <a:lstStyle/>
+          <a:p>
+            <a:pPr algn="ctr"/>
+          </a:p>
+        </p:txBody>
+      </p:sp>
+      <p:sp>
+        <p:nvSpPr>
+          <p:cNvPr id="11" name="TextBox 10"/>
+          <p:cNvSpPr txBox="1"/>
+          <p:nvPr/>
+        </p:nvSpPr>
+        <p:spPr>
+          <a:xfrm>
+            <a:off x="512064" y="1371600"/>
+            <a:ext cx="2551176" cy="256032"/>
+          </a:xfrm>
+          <a:prstGeom prst="rect">
+            <a:avLst/>
+          </a:prstGeom>
+          <a:noFill/>
+        </p:spPr>
+        <p:txBody>
+          <a:bodyPr wrap="square" lIns="0" rIns="0" tIns="0" bIns="0" anchor="t">
+            <a:spAutoFit/>
+          </a:bodyPr>
+          <a:lstStyle/>
+          <a:p>
+            <a:pPr algn="l">
+              <a:lnSpc>
+                <a:spcPct val="100000"/>
+              </a:lnSpc>
+              <a:spcBef>
+                <a:spcPts val="0"/>
+              </a:spcBef>
+              <a:spcAft>
+                <a:spcPts val="0"/>
+              </a:spcAft>
+            </a:pPr>
+            <a:r>
+              <a:rPr sz="900" b="1" i="0">
+                <a:solidFill>
+                  <a:srgbClr val="1B3E6E"/>
+                </a:solidFill>
+                <a:latin typeface="Arial"/>
+              </a:rPr>
+              <a:t>PILLAR 1 — Predictive Demand Forecasting</a:t>
+            </a:r>
+          </a:p>
+        </p:txBody>
+      </p:sp>
+      <p:sp>
+        <p:nvSpPr>
+          <p:cNvPr id="12" name="Rectangle 11"/>
+          <p:cNvSpPr/>
+          <p:nvPr/>
+        </p:nvSpPr>
+        <p:spPr>
+          <a:xfrm>
+            <a:off x="365760" y="1645920"/>
+            <a:ext cx="2697480" cy="10972"/>
+          </a:xfrm>
+          <a:prstGeom prst="rect">
+            <a:avLst/>
+          </a:prstGeom>
+          <a:solidFill>
+            <a:srgbClr val="BFBFBF"/>
+          </a:solidFill>
+          <a:ln>
+            <a:noFill/>
+          </a:ln>
+          <a:effectLst/>
+        </p:spPr>
+        <p:style>
+          <a:lnRef idx="1">
+            <a:schemeClr val="accent1"/>
+          </a:lnRef>
+          <a:fillRef idx="3">
+            <a:schemeClr val="accent1"/>
+          </a:fillRef>
+          <a:effectRef idx="2">
+            <a:schemeClr val="accent1"/>
+          </a:effectRef>
+          <a:fontRef idx="minor">
+            <a:schemeClr val="lt1"/>
+          </a:fontRef>
+        </p:style>
+        <p:txBody>
+          <a:bodyPr rtlCol="0" anchor="ctr"/>
+          <a:lstStyle/>
+          <a:p>
+            <a:pPr algn="ctr"/>
+          </a:p>
+        </p:txBody>
+      </p:sp>
+      <p:sp>
+        <p:nvSpPr>
+          <p:cNvPr id="13" name="TextBox 12"/>
+          <p:cNvSpPr txBox="1"/>
+          <p:nvPr/>
+        </p:nvSpPr>
+        <p:spPr>
+          <a:xfrm>
+            <a:off x="365760" y="1737360"/>
+            <a:ext cx="2697480" cy="2011680"/>
+          </a:xfrm>
+          <a:prstGeom prst="rect">
+            <a:avLst/>
+          </a:prstGeom>
+          <a:noFill/>
+        </p:spPr>
+        <p:txBody>
+          <a:bodyPr wrap="square" lIns="0" rIns="0" tIns="0" bIns="0" anchor="t">
+            <a:spAutoFit/>
+          </a:bodyPr>
+          <a:lstStyle/>
+          <a:p>
+            <a:pPr algn="l">
+              <a:lnSpc>
+                <a:spcPct val="102000"/>
+              </a:lnSpc>
+              <a:spcBef>
+                <a:spcPts val="0"/>
+              </a:spcBef>
+              <a:spcAft>
+                <a:spcPts val="200"/>
+              </a:spcAft>
+            </a:pPr>
+            <a:r>
+              <a:rPr sz="720" b="1" i="0">
+                <a:solidFill>
+                  <a:srgbClr val="333333"/>
+                </a:solidFill>
+                <a:latin typeface="Arial"/>
+              </a:rPr>
+              <a:t>•  Attendance &amp; enrolment trends </a:t>
+            </a:r>
+            <a:r>
+              <a:rPr sz="720" b="0" i="0">
+                <a:solidFill>
+                  <a:srgbClr val="333333"/>
+                </a:solidFill>
+                <a:latin typeface="Arial"/>
+              </a:rPr>
+              <a:t>estimate how many meals each centre should prepare daily</a:t>
+            </a:r>
+          </a:p>
+          <a:p>
+            <a:pPr algn="l">
+              <a:lnSpc>
+                <a:spcPct val="102000"/>
+              </a:lnSpc>
+              <a:spcBef>
+                <a:spcPts val="0"/>
+              </a:spcBef>
+              <a:spcAft>
+                <a:spcPts val="200"/>
+              </a:spcAft>
+            </a:pPr>
+            <a:r>
+              <a:rPr sz="720" b="1" i="0">
+                <a:solidFill>
+                  <a:srgbClr val="333333"/>
+                </a:solidFill>
+                <a:latin typeface="Arial"/>
+              </a:rPr>
+              <a:t>•  Holiday calendars </a:t>
+            </a:r>
+            <a:r>
+              <a:rPr sz="720" b="0" i="0">
+                <a:solidFill>
+                  <a:srgbClr val="333333"/>
+                </a:solidFill>
+                <a:latin typeface="Arial"/>
+              </a:rPr>
+              <a:t>capture local demand spikes or dips before production quantities are finalised</a:t>
+            </a:r>
+          </a:p>
+          <a:p>
+            <a:pPr algn="l">
+              <a:lnSpc>
+                <a:spcPct val="102000"/>
+              </a:lnSpc>
+              <a:spcBef>
+                <a:spcPts val="0"/>
+              </a:spcBef>
+              <a:spcAft>
+                <a:spcPts val="200"/>
+              </a:spcAft>
+            </a:pPr>
+            <a:r>
+              <a:rPr sz="720" b="1" i="0">
+                <a:solidFill>
+                  <a:srgbClr val="333333"/>
+                </a:solidFill>
+                <a:latin typeface="Arial"/>
+              </a:rPr>
+              <a:t>•  Menu consumption history </a:t>
+            </a:r>
+            <a:r>
+              <a:rPr sz="720" b="0" i="0">
+                <a:solidFill>
+                  <a:srgbClr val="333333"/>
+                </a:solidFill>
+                <a:latin typeface="Arial"/>
+              </a:rPr>
+              <a:t>converts expected meals into ingredient quantities for key staples</a:t>
+            </a:r>
+          </a:p>
+          <a:p>
+            <a:pPr algn="l">
+              <a:lnSpc>
+                <a:spcPct val="102000"/>
+              </a:lnSpc>
+              <a:spcBef>
+                <a:spcPts val="0"/>
+              </a:spcBef>
+              <a:spcAft>
+                <a:spcPts val="200"/>
+              </a:spcAft>
+            </a:pPr>
+            <a:r>
+              <a:rPr sz="720" b="1" i="0">
+                <a:solidFill>
+                  <a:srgbClr val="333333"/>
+                </a:solidFill>
+                <a:latin typeface="Arial"/>
+              </a:rPr>
+              <a:t>•  Weather signals &amp; feedback </a:t>
+            </a:r>
+            <a:r>
+              <a:rPr sz="720" b="0" i="0">
+                <a:solidFill>
+                  <a:srgbClr val="333333"/>
+                </a:solidFill>
+                <a:latin typeface="Arial"/>
+              </a:rPr>
+              <a:t>continuously refine the next centre-level forecast</a:t>
+            </a:r>
+          </a:p>
+        </p:txBody>
+      </p:sp>
+      <p:sp>
+        <p:nvSpPr>
+          <p:cNvPr id="14" name="Rectangle 13"/>
+          <p:cNvSpPr/>
+          <p:nvPr/>
+        </p:nvSpPr>
+        <p:spPr>
+          <a:xfrm>
+            <a:off x="6080760" y="1399032"/>
+            <a:ext cx="54864" cy="182880"/>
+          </a:xfrm>
+          <a:prstGeom prst="rect">
+            <a:avLst/>
+          </a:prstGeom>
+          <a:solidFill>
+            <a:srgbClr val="E08A1E"/>
+          </a:solidFill>
+          <a:ln>
+            <a:noFill/>
+          </a:ln>
+          <a:effectLst/>
+        </p:spPr>
+        <p:style>
+          <a:lnRef idx="1">
+            <a:schemeClr val="accent1"/>
+          </a:lnRef>
+          <a:fillRef idx="3">
+            <a:schemeClr val="accent1"/>
+          </a:fillRef>
+          <a:effectRef idx="2">
+            <a:schemeClr val="accent1"/>
+          </a:effectRef>
+          <a:fontRef idx="minor">
+            <a:schemeClr val="lt1"/>
+          </a:fontRef>
+        </p:style>
+        <p:txBody>
+          <a:bodyPr rtlCol="0" anchor="ctr"/>
+          <a:lstStyle/>
+          <a:p>
+            <a:pPr algn="ctr"/>
+          </a:p>
+        </p:txBody>
+      </p:sp>
+      <p:sp>
+        <p:nvSpPr>
+          <p:cNvPr id="15" name="TextBox 14"/>
+          <p:cNvSpPr txBox="1"/>
+          <p:nvPr/>
+        </p:nvSpPr>
+        <p:spPr>
+          <a:xfrm>
+            <a:off x="6227064" y="1371600"/>
+            <a:ext cx="2551176" cy="256032"/>
+          </a:xfrm>
+          <a:prstGeom prst="rect">
+            <a:avLst/>
+          </a:prstGeom>
+          <a:noFill/>
+        </p:spPr>
+        <p:txBody>
+          <a:bodyPr wrap="square" lIns="0" rIns="0" tIns="0" bIns="0" anchor="t">
+            <a:spAutoFit/>
+          </a:bodyPr>
+          <a:lstStyle/>
+          <a:p>
+            <a:pPr algn="l">
+              <a:lnSpc>
+                <a:spcPct val="100000"/>
+              </a:lnSpc>
+              <a:spcBef>
+                <a:spcPts val="0"/>
+              </a:spcBef>
+              <a:spcAft>
+                <a:spcPts val="0"/>
+              </a:spcAft>
+            </a:pPr>
+            <a:r>
+              <a:rPr sz="900" b="1" i="0">
+                <a:solidFill>
+                  <a:srgbClr val="1B3E6E"/>
+                </a:solidFill>
+                <a:latin typeface="Arial"/>
+              </a:rPr>
+              <a:t>PILLAR 2 — Spatial-Temporal Procurement</a:t>
+            </a:r>
+          </a:p>
+        </p:txBody>
+      </p:sp>
+      <p:sp>
+        <p:nvSpPr>
+          <p:cNvPr id="16" name="Rectangle 15"/>
+          <p:cNvSpPr/>
+          <p:nvPr/>
+        </p:nvSpPr>
+        <p:spPr>
+          <a:xfrm>
+            <a:off x="6080760" y="1645920"/>
+            <a:ext cx="2697480" cy="10972"/>
+          </a:xfrm>
+          <a:prstGeom prst="rect">
+            <a:avLst/>
+          </a:prstGeom>
+          <a:solidFill>
+            <a:srgbClr val="BFBFBF"/>
+          </a:solidFill>
+          <a:ln>
+            <a:noFill/>
+          </a:ln>
+          <a:effectLst/>
+        </p:spPr>
+        <p:style>
+          <a:lnRef idx="1">
+            <a:schemeClr val="accent1"/>
+          </a:lnRef>
+          <a:fillRef idx="3">
+            <a:schemeClr val="accent1"/>
+          </a:fillRef>
+          <a:effectRef idx="2">
+            <a:schemeClr val="accent1"/>
+          </a:effectRef>
+          <a:fontRef idx="minor">
+            <a:schemeClr val="lt1"/>
+          </a:fontRef>
+        </p:style>
+        <p:txBody>
+          <a:bodyPr rtlCol="0" anchor="ctr"/>
+          <a:lstStyle/>
+          <a:p>
+            <a:pPr algn="ctr"/>
+          </a:p>
+        </p:txBody>
+      </p:sp>
+      <p:sp>
+        <p:nvSpPr>
+          <p:cNvPr id="17" name="TextBox 16"/>
+          <p:cNvSpPr txBox="1"/>
+          <p:nvPr/>
+        </p:nvSpPr>
+        <p:spPr>
+          <a:xfrm>
+            <a:off x="6080760" y="1737360"/>
+            <a:ext cx="2697480" cy="2011680"/>
+          </a:xfrm>
+          <a:prstGeom prst="rect">
+            <a:avLst/>
+          </a:prstGeom>
+          <a:noFill/>
+        </p:spPr>
+        <p:txBody>
+          <a:bodyPr wrap="square" lIns="0" rIns="0" tIns="0" bIns="0" anchor="t">
+            <a:spAutoFit/>
+          </a:bodyPr>
+          <a:lstStyle/>
+          <a:p>
+            <a:pPr algn="l">
+              <a:lnSpc>
+                <a:spcPct val="102000"/>
+              </a:lnSpc>
+              <a:spcBef>
+                <a:spcPts val="0"/>
+              </a:spcBef>
+              <a:spcAft>
+                <a:spcPts val="200"/>
+              </a:spcAft>
+            </a:pPr>
+            <a:r>
+              <a:rPr sz="720" b="1" i="0">
+                <a:solidFill>
+                  <a:srgbClr val="333333"/>
+                </a:solidFill>
+                <a:latin typeface="Arial"/>
+              </a:rPr>
+              <a:t>•  Seasonal price troughs </a:t>
+            </a:r>
+            <a:r>
+              <a:rPr sz="720" b="0" i="0">
+                <a:solidFill>
+                  <a:srgbClr val="333333"/>
+                </a:solidFill>
+                <a:latin typeface="Arial"/>
+              </a:rPr>
+              <a:t>identify when each commodity should be bought before prices rise</a:t>
+            </a:r>
+          </a:p>
+          <a:p>
+            <a:pPr algn="l">
+              <a:lnSpc>
+                <a:spcPct val="102000"/>
+              </a:lnSpc>
+              <a:spcBef>
+                <a:spcPts val="0"/>
+              </a:spcBef>
+              <a:spcAft>
+                <a:spcPts val="200"/>
+              </a:spcAft>
+            </a:pPr>
+            <a:r>
+              <a:rPr sz="720" b="1" i="0">
+                <a:solidFill>
+                  <a:srgbClr val="333333"/>
+                </a:solidFill>
+                <a:latin typeface="Arial"/>
+              </a:rPr>
+              <a:t>•  Surplus-region signals </a:t>
+            </a:r>
+            <a:r>
+              <a:rPr sz="720" b="0" i="0">
+                <a:solidFill>
+                  <a:srgbClr val="333333"/>
+                </a:solidFill>
+                <a:latin typeface="Arial"/>
+              </a:rPr>
+              <a:t>identify where each commodity can be sourced at lower landed cost</a:t>
+            </a:r>
+          </a:p>
+          <a:p>
+            <a:pPr algn="l">
+              <a:lnSpc>
+                <a:spcPct val="102000"/>
+              </a:lnSpc>
+              <a:spcBef>
+                <a:spcPts val="0"/>
+              </a:spcBef>
+              <a:spcAft>
+                <a:spcPts val="200"/>
+              </a:spcAft>
+            </a:pPr>
+            <a:r>
+              <a:rPr sz="720" b="1" i="0">
+                <a:solidFill>
+                  <a:srgbClr val="333333"/>
+                </a:solidFill>
+                <a:latin typeface="Arial"/>
+              </a:rPr>
+              <a:t>•  Logistics, handling &amp; storage costs </a:t>
+            </a:r>
+            <a:r>
+              <a:rPr sz="720" b="0" i="0">
+                <a:solidFill>
+                  <a:srgbClr val="333333"/>
+                </a:solidFill>
+                <a:latin typeface="Arial"/>
+              </a:rPr>
+              <a:t>are included in every sourcing recommendation</a:t>
+            </a:r>
+          </a:p>
+          <a:p>
+            <a:pPr algn="l">
+              <a:lnSpc>
+                <a:spcPct val="102000"/>
+              </a:lnSpc>
+              <a:spcBef>
+                <a:spcPts val="0"/>
+              </a:spcBef>
+              <a:spcAft>
+                <a:spcPts val="200"/>
+              </a:spcAft>
+            </a:pPr>
+            <a:r>
+              <a:rPr sz="720" b="1" i="0">
+                <a:solidFill>
+                  <a:srgbClr val="333333"/>
+                </a:solidFill>
+                <a:latin typeface="Arial"/>
+              </a:rPr>
+              <a:t>•  Quality grades &amp; shelf-life rules </a:t>
+            </a:r>
+            <a:r>
+              <a:rPr sz="720" b="0" i="0">
+                <a:solidFill>
+                  <a:srgbClr val="333333"/>
+                </a:solidFill>
+                <a:latin typeface="Arial"/>
+              </a:rPr>
+              <a:t>are locked into the final buying plan</a:t>
+            </a:r>
+          </a:p>
+        </p:txBody>
+      </p:sp>
+      <p:sp>
+        <p:nvSpPr>
+          <p:cNvPr id="18" name="Oval 17"/>
+          <p:cNvSpPr/>
+          <p:nvPr/>
+        </p:nvSpPr>
+        <p:spPr>
+          <a:xfrm>
+            <a:off x="3977639" y="2240280"/>
+            <a:ext cx="1188720" cy="1188720"/>
+          </a:xfrm>
+          <a:prstGeom prst="ellipse">
+            <a:avLst/>
+          </a:prstGeom>
+          <a:solidFill>
+            <a:srgbClr val="EEF3F9"/>
+          </a:solidFill>
+          <a:ln w="13970">
+            <a:solidFill>
+              <a:srgbClr val="1B3E6E"/>
+            </a:solidFill>
+          </a:ln>
+          <a:effectLst/>
+        </p:spPr>
+        <p:style>
+          <a:lnRef idx="1">
+            <a:schemeClr val="accent1"/>
+          </a:lnRef>
+          <a:fillRef idx="3">
+            <a:schemeClr val="accent1"/>
+          </a:fillRef>
+          <a:effectRef idx="2">
+            <a:schemeClr val="accent1"/>
+          </a:effectRef>
+          <a:fontRef idx="minor">
+            <a:schemeClr val="lt1"/>
+          </a:fontRef>
+        </p:style>
+        <p:txBody>
+          <a:bodyPr rtlCol="0" anchor="ctr"/>
+          <a:lstStyle/>
+          <a:p>
+            <a:pPr algn="ctr"/>
+          </a:p>
+        </p:txBody>
+      </p:sp>
+      <p:sp>
+        <p:nvSpPr>
+          <p:cNvPr id="19" name="Rounded Rectangle 18"/>
+          <p:cNvSpPr/>
+          <p:nvPr/>
+        </p:nvSpPr>
+        <p:spPr>
+          <a:xfrm>
+            <a:off x="4087368" y="1645920"/>
+            <a:ext cx="969264" cy="512064"/>
+          </a:xfrm>
+          <a:prstGeom prst="roundRect">
+            <a:avLst>
+              <a:gd name="adj" fmla="val 30000"/>
+            </a:avLst>
+          </a:prstGeom>
+          <a:solidFill>
+            <a:srgbClr val="1B3E6E"/>
+          </a:solidFill>
+          <a:ln>
+            <a:noFill/>
+          </a:ln>
+          <a:effectLst/>
+        </p:spPr>
+        <p:style>
+          <a:lnRef idx="1">
+            <a:schemeClr val="accent1"/>
+          </a:lnRef>
+          <a:fillRef idx="3">
+            <a:schemeClr val="accent1"/>
+          </a:fillRef>
+          <a:effectRef idx="2">
+            <a:schemeClr val="accent1"/>
+          </a:effectRef>
+          <a:fontRef idx="minor">
+            <a:schemeClr val="lt1"/>
+          </a:fontRef>
+        </p:style>
+        <p:txBody>
+          <a:bodyPr rtlCol="0" anchor="ctr"/>
+          <a:lstStyle/>
+          <a:p>
+            <a:pPr algn="ctr"/>
+          </a:p>
+        </p:txBody>
+      </p:sp>
+      <p:sp>
+        <p:nvSpPr>
+          <p:cNvPr id="20" name="TextBox 19"/>
+          <p:cNvSpPr txBox="1"/>
+          <p:nvPr/>
+        </p:nvSpPr>
+        <p:spPr>
+          <a:xfrm>
+            <a:off x="4087368" y="1659636"/>
+            <a:ext cx="969264" cy="484632"/>
+          </a:xfrm>
+          <a:prstGeom prst="rect">
+            <a:avLst/>
+          </a:prstGeom>
+          <a:noFill/>
+        </p:spPr>
+        <p:txBody>
+          <a:bodyPr wrap="square" lIns="0" rIns="0" tIns="0" bIns="0" anchor="ctr">
+            <a:spAutoFit/>
+          </a:bodyPr>
+          <a:lstStyle/>
+          <a:p>
+            <a:pPr algn="ctr">
+              <a:lnSpc>
+                <a:spcPct val="90000"/>
+              </a:lnSpc>
+              <a:spcBef>
+                <a:spcPts val="0"/>
+              </a:spcBef>
+              <a:spcAft>
+                <a:spcPts val="0"/>
+              </a:spcAft>
+            </a:pPr>
+            <a:r>
+              <a:rPr sz="700" b="1" i="0">
+                <a:solidFill>
+                  <a:srgbClr val="FFFFFF"/>
+                </a:solidFill>
+                <a:latin typeface="Arial"/>
+              </a:rPr>
+              <a:t>INGEST</a:t>
+            </a:r>
+          </a:p>
+          <a:p>
+            <a:pPr algn="ctr">
+              <a:lnSpc>
+                <a:spcPct val="85000"/>
+              </a:lnSpc>
+              <a:spcBef>
+                <a:spcPts val="0"/>
+              </a:spcBef>
+              <a:spcAft>
+                <a:spcPts val="0"/>
+              </a:spcAft>
+            </a:pPr>
+            <a:r>
+              <a:rPr sz="550" b="0" i="0">
+                <a:solidFill>
+                  <a:srgbClr val="FFFFFF"/>
+                </a:solidFill>
+                <a:latin typeface="Arial"/>
+              </a:rPr>
+              <a:t>live prices, weather,
+attendance</a:t>
+            </a:r>
+          </a:p>
+        </p:txBody>
+      </p:sp>
+      <p:sp>
+        <p:nvSpPr>
+          <p:cNvPr id="21" name="Rounded Rectangle 20"/>
+          <p:cNvSpPr/>
+          <p:nvPr/>
+        </p:nvSpPr>
+        <p:spPr>
+          <a:xfrm>
+            <a:off x="4974407" y="2290391"/>
+            <a:ext cx="969264" cy="512064"/>
+          </a:xfrm>
+          <a:prstGeom prst="roundRect">
+            <a:avLst>
+              <a:gd name="adj" fmla="val 30000"/>
+            </a:avLst>
+          </a:prstGeom>
+          <a:solidFill>
+            <a:srgbClr val="3B6EA5"/>
+          </a:solidFill>
+          <a:ln>
+            <a:noFill/>
+          </a:ln>
+          <a:effectLst/>
+        </p:spPr>
+        <p:style>
+          <a:lnRef idx="1">
+            <a:schemeClr val="accent1"/>
+          </a:lnRef>
+          <a:fillRef idx="3">
+            <a:schemeClr val="accent1"/>
+          </a:fillRef>
+          <a:effectRef idx="2">
+            <a:schemeClr val="accent1"/>
+          </a:effectRef>
+          <a:fontRef idx="minor">
+            <a:schemeClr val="lt1"/>
+          </a:fontRef>
+        </p:style>
+        <p:txBody>
+          <a:bodyPr rtlCol="0" anchor="ctr"/>
+          <a:lstStyle/>
+          <a:p>
+            <a:pPr algn="ctr"/>
+          </a:p>
+        </p:txBody>
+      </p:sp>
+      <p:sp>
+        <p:nvSpPr>
+          <p:cNvPr id="22" name="TextBox 21"/>
+          <p:cNvSpPr txBox="1"/>
+          <p:nvPr/>
+        </p:nvSpPr>
+        <p:spPr>
+          <a:xfrm>
+            <a:off x="4974407" y="2304107"/>
+            <a:ext cx="969264" cy="484632"/>
+          </a:xfrm>
+          <a:prstGeom prst="rect">
+            <a:avLst/>
+          </a:prstGeom>
+          <a:noFill/>
+        </p:spPr>
+        <p:txBody>
+          <a:bodyPr wrap="square" lIns="0" rIns="0" tIns="0" bIns="0" anchor="ctr">
+            <a:spAutoFit/>
+          </a:bodyPr>
+          <a:lstStyle/>
+          <a:p>
+            <a:pPr algn="ctr">
+              <a:lnSpc>
+                <a:spcPct val="90000"/>
+              </a:lnSpc>
+              <a:spcBef>
+                <a:spcPts val="0"/>
+              </a:spcBef>
+              <a:spcAft>
+                <a:spcPts val="0"/>
+              </a:spcAft>
+            </a:pPr>
+            <a:r>
+              <a:rPr sz="700" b="1" i="0">
+                <a:solidFill>
+                  <a:srgbClr val="FFFFFF"/>
+                </a:solidFill>
+                <a:latin typeface="Arial"/>
+              </a:rPr>
+              <a:t>FORECAST</a:t>
+            </a:r>
+          </a:p>
+          <a:p>
+            <a:pPr algn="ctr">
+              <a:lnSpc>
+                <a:spcPct val="85000"/>
+              </a:lnSpc>
+              <a:spcBef>
+                <a:spcPts val="0"/>
+              </a:spcBef>
+              <a:spcAft>
+                <a:spcPts val="0"/>
+              </a:spcAft>
+            </a:pPr>
+            <a:r>
+              <a:rPr sz="550" b="0" i="0">
+                <a:solidFill>
+                  <a:srgbClr val="FFFFFF"/>
+                </a:solidFill>
+                <a:latin typeface="Arial"/>
+              </a:rPr>
+              <a:t>ingredient-level
+demand</a:t>
+            </a:r>
+          </a:p>
+        </p:txBody>
+      </p:sp>
+      <p:sp>
+        <p:nvSpPr>
+          <p:cNvPr id="23" name="Rounded Rectangle 22"/>
+          <p:cNvSpPr/>
+          <p:nvPr/>
+        </p:nvSpPr>
+        <p:spPr>
+          <a:xfrm>
+            <a:off x="4635588" y="3333168"/>
+            <a:ext cx="969264" cy="512064"/>
+          </a:xfrm>
+          <a:prstGeom prst="roundRect">
+            <a:avLst>
+              <a:gd name="adj" fmla="val 30000"/>
+            </a:avLst>
+          </a:prstGeom>
+          <a:solidFill>
+            <a:srgbClr val="398025"/>
+          </a:solidFill>
+          <a:ln>
+            <a:noFill/>
+          </a:ln>
+          <a:effectLst/>
+        </p:spPr>
+        <p:style>
+          <a:lnRef idx="1">
+            <a:schemeClr val="accent1"/>
+          </a:lnRef>
+          <a:fillRef idx="3">
+            <a:schemeClr val="accent1"/>
+          </a:fillRef>
+          <a:effectRef idx="2">
+            <a:schemeClr val="accent1"/>
+          </a:effectRef>
+          <a:fontRef idx="minor">
+            <a:schemeClr val="lt1"/>
+          </a:fontRef>
+        </p:style>
+        <p:txBody>
+          <a:bodyPr rtlCol="0" anchor="ctr"/>
+          <a:lstStyle/>
+          <a:p>
+            <a:pPr algn="ctr"/>
+          </a:p>
+        </p:txBody>
+      </p:sp>
+      <p:sp>
+        <p:nvSpPr>
+          <p:cNvPr id="24" name="TextBox 23"/>
+          <p:cNvSpPr txBox="1"/>
+          <p:nvPr/>
+        </p:nvSpPr>
+        <p:spPr>
+          <a:xfrm>
+            <a:off x="4635588" y="3346884"/>
+            <a:ext cx="969264" cy="484632"/>
+          </a:xfrm>
+          <a:prstGeom prst="rect">
+            <a:avLst/>
+          </a:prstGeom>
+          <a:noFill/>
+        </p:spPr>
+        <p:txBody>
+          <a:bodyPr wrap="square" lIns="0" rIns="0" tIns="0" bIns="0" anchor="ctr">
+            <a:spAutoFit/>
+          </a:bodyPr>
+          <a:lstStyle/>
+          <a:p>
+            <a:pPr algn="ctr">
+              <a:lnSpc>
+                <a:spcPct val="90000"/>
+              </a:lnSpc>
+              <a:spcBef>
+                <a:spcPts val="0"/>
+              </a:spcBef>
+              <a:spcAft>
+                <a:spcPts val="0"/>
+              </a:spcAft>
+            </a:pPr>
+            <a:r>
+              <a:rPr sz="700" b="1" i="0">
+                <a:solidFill>
+                  <a:srgbClr val="FFFFFF"/>
+                </a:solidFill>
+                <a:latin typeface="Arial"/>
+              </a:rPr>
+              <a:t>OPTIMIZE</a:t>
+            </a:r>
+          </a:p>
+          <a:p>
+            <a:pPr algn="ctr">
+              <a:lnSpc>
+                <a:spcPct val="85000"/>
+              </a:lnSpc>
+              <a:spcBef>
+                <a:spcPts val="0"/>
+              </a:spcBef>
+              <a:spcAft>
+                <a:spcPts val="0"/>
+              </a:spcAft>
+            </a:pPr>
+            <a:r>
+              <a:rPr sz="550" b="0" i="0">
+                <a:solidFill>
+                  <a:srgbClr val="FFFFFF"/>
+                </a:solidFill>
+                <a:latin typeface="Arial"/>
+              </a:rPr>
+              <a:t>when &amp; where
+to buy</a:t>
+            </a:r>
+          </a:p>
+        </p:txBody>
+      </p:sp>
+      <p:sp>
+        <p:nvSpPr>
+          <p:cNvPr id="25" name="Rounded Rectangle 24"/>
+          <p:cNvSpPr/>
+          <p:nvPr/>
+        </p:nvSpPr>
+        <p:spPr>
+          <a:xfrm>
+            <a:off x="3539147" y="3333168"/>
+            <a:ext cx="969264" cy="512064"/>
+          </a:xfrm>
+          <a:prstGeom prst="roundRect">
+            <a:avLst>
+              <a:gd name="adj" fmla="val 30000"/>
+            </a:avLst>
+          </a:prstGeom>
+          <a:solidFill>
+            <a:srgbClr val="E08A1E"/>
+          </a:solidFill>
+          <a:ln>
+            <a:noFill/>
+          </a:ln>
+          <a:effectLst/>
+        </p:spPr>
+        <p:style>
+          <a:lnRef idx="1">
+            <a:schemeClr val="accent1"/>
+          </a:lnRef>
+          <a:fillRef idx="3">
+            <a:schemeClr val="accent1"/>
+          </a:fillRef>
+          <a:effectRef idx="2">
+            <a:schemeClr val="accent1"/>
+          </a:effectRef>
+          <a:fontRef idx="minor">
+            <a:schemeClr val="lt1"/>
+          </a:fontRef>
+        </p:style>
+        <p:txBody>
+          <a:bodyPr rtlCol="0" anchor="ctr"/>
+          <a:lstStyle/>
+          <a:p>
+            <a:pPr algn="ctr"/>
+          </a:p>
+        </p:txBody>
+      </p:sp>
+      <p:sp>
+        <p:nvSpPr>
+          <p:cNvPr id="26" name="TextBox 25"/>
+          <p:cNvSpPr txBox="1"/>
+          <p:nvPr/>
+        </p:nvSpPr>
+        <p:spPr>
+          <a:xfrm>
+            <a:off x="3539147" y="3346884"/>
+            <a:ext cx="969264" cy="484632"/>
+          </a:xfrm>
+          <a:prstGeom prst="rect">
+            <a:avLst/>
+          </a:prstGeom>
+          <a:noFill/>
+        </p:spPr>
+        <p:txBody>
+          <a:bodyPr wrap="square" lIns="0" rIns="0" tIns="0" bIns="0" anchor="ctr">
+            <a:spAutoFit/>
+          </a:bodyPr>
+          <a:lstStyle/>
+          <a:p>
+            <a:pPr algn="ctr">
+              <a:lnSpc>
+                <a:spcPct val="90000"/>
+              </a:lnSpc>
+              <a:spcBef>
+                <a:spcPts val="0"/>
+              </a:spcBef>
+              <a:spcAft>
+                <a:spcPts val="0"/>
+              </a:spcAft>
+            </a:pPr>
+            <a:r>
+              <a:rPr sz="700" b="1" i="0">
+                <a:solidFill>
+                  <a:srgbClr val="FFFFFF"/>
+                </a:solidFill>
+                <a:latin typeface="Arial"/>
+              </a:rPr>
+              <a:t>RECOMMEND</a:t>
+            </a:r>
+          </a:p>
+          <a:p>
+            <a:pPr algn="ctr">
+              <a:lnSpc>
+                <a:spcPct val="85000"/>
+              </a:lnSpc>
+              <a:spcBef>
+                <a:spcPts val="0"/>
+              </a:spcBef>
+              <a:spcAft>
+                <a:spcPts val="0"/>
+              </a:spcAft>
+            </a:pPr>
+            <a:r>
+              <a:rPr sz="550" b="0" i="0">
+                <a:solidFill>
+                  <a:srgbClr val="FFFFFF"/>
+                </a:solidFill>
+                <a:latin typeface="Arial"/>
+              </a:rPr>
+              <a:t>actionable
+buying sheet</a:t>
+            </a:r>
+          </a:p>
+        </p:txBody>
+      </p:sp>
+      <p:sp>
+        <p:nvSpPr>
+          <p:cNvPr id="27" name="Rounded Rectangle 26"/>
+          <p:cNvSpPr/>
+          <p:nvPr/>
+        </p:nvSpPr>
+        <p:spPr>
+          <a:xfrm>
+            <a:off x="3200328" y="2290391"/>
+            <a:ext cx="969264" cy="512064"/>
+          </a:xfrm>
+          <a:prstGeom prst="roundRect">
+            <a:avLst>
+              <a:gd name="adj" fmla="val 30000"/>
+            </a:avLst>
+          </a:prstGeom>
+          <a:solidFill>
+            <a:srgbClr val="A6428C"/>
+          </a:solidFill>
+          <a:ln>
+            <a:noFill/>
+          </a:ln>
+          <a:effectLst/>
+        </p:spPr>
+        <p:style>
+          <a:lnRef idx="1">
+            <a:schemeClr val="accent1"/>
+          </a:lnRef>
+          <a:fillRef idx="3">
+            <a:schemeClr val="accent1"/>
+          </a:fillRef>
+          <a:effectRef idx="2">
+            <a:schemeClr val="accent1"/>
+          </a:effectRef>
+          <a:fontRef idx="minor">
+            <a:schemeClr val="lt1"/>
+          </a:fontRef>
+        </p:style>
+        <p:txBody>
+          <a:bodyPr rtlCol="0" anchor="ctr"/>
+          <a:lstStyle/>
+          <a:p>
+            <a:pPr algn="ctr"/>
+          </a:p>
+        </p:txBody>
+      </p:sp>
+      <p:sp>
+        <p:nvSpPr>
+          <p:cNvPr id="28" name="TextBox 27"/>
+          <p:cNvSpPr txBox="1"/>
+          <p:nvPr/>
+        </p:nvSpPr>
+        <p:spPr>
+          <a:xfrm>
+            <a:off x="3200328" y="2304107"/>
+            <a:ext cx="969264" cy="484632"/>
+          </a:xfrm>
+          <a:prstGeom prst="rect">
+            <a:avLst/>
+          </a:prstGeom>
+          <a:noFill/>
+        </p:spPr>
+        <p:txBody>
+          <a:bodyPr wrap="square" lIns="0" rIns="0" tIns="0" bIns="0" anchor="ctr">
+            <a:spAutoFit/>
+          </a:bodyPr>
+          <a:lstStyle/>
+          <a:p>
+            <a:pPr algn="ctr">
+              <a:lnSpc>
+                <a:spcPct val="90000"/>
+              </a:lnSpc>
+              <a:spcBef>
+                <a:spcPts val="0"/>
+              </a:spcBef>
+              <a:spcAft>
+                <a:spcPts val="0"/>
+              </a:spcAft>
+            </a:pPr>
+            <a:r>
+              <a:rPr sz="700" b="1" i="0">
+                <a:solidFill>
+                  <a:srgbClr val="FFFFFF"/>
+                </a:solidFill>
+                <a:latin typeface="Arial"/>
+              </a:rPr>
+              <a:t>LEARN</a:t>
+            </a:r>
+          </a:p>
+          <a:p>
+            <a:pPr algn="ctr">
+              <a:lnSpc>
+                <a:spcPct val="85000"/>
+              </a:lnSpc>
+              <a:spcBef>
+                <a:spcPts val="0"/>
+              </a:spcBef>
+              <a:spcAft>
+                <a:spcPts val="0"/>
+              </a:spcAft>
+            </a:pPr>
+            <a:r>
+              <a:rPr sz="550" b="0" i="0">
+                <a:solidFill>
+                  <a:srgbClr val="FFFFFF"/>
+                </a:solidFill>
+                <a:latin typeface="Arial"/>
+              </a:rPr>
+              <a:t>feedback trains
+the model</a:t>
+            </a:r>
+          </a:p>
+        </p:txBody>
+      </p:sp>
+      <p:cxnSp>
+        <p:nvCxnSpPr>
+          <p:cNvPr id="29" name="Connector 28"/>
+          <p:cNvCxnSpPr/>
+          <p:nvPr/>
+        </p:nvCxnSpPr>
+        <p:spPr>
+          <a:xfrm>
+            <a:off x="4909599" y="2034206"/>
+            <a:ext cx="319334" cy="232010"/>
+          </a:xfrm>
+          <a:prstGeom prst="curvedConnector3">
+            <a:avLst/>
+          </a:prstGeom>
+          <a:ln w="12700">
+            <a:solidFill>
+              <a:srgbClr val="727375"/>
+            </a:solidFill>
+            <a:prstDash val="sysDash"/>
+            <a:tailEnd type="triangle" w="med" len="med"/>
+          </a:ln>
+          <a:effectLst/>
+        </p:spPr>
+        <p:style>
+          <a:lnRef idx="2">
+            <a:schemeClr val="accent1"/>
+          </a:lnRef>
+          <a:fillRef idx="0">
+            <a:schemeClr val="accent1"/>
+          </a:fillRef>
+          <a:effectRef idx="1">
+            <a:schemeClr val="accent1"/>
+          </a:effectRef>
+          <a:fontRef idx="minor">
+            <a:schemeClr val="tx1"/>
+          </a:fontRef>
+        </p:style>
+      </p:cxnSp>
+      <p:cxnSp>
+        <p:nvCxnSpPr>
+          <p:cNvPr id="30" name="Connector 29"/>
+          <p:cNvCxnSpPr/>
+          <p:nvPr/>
+        </p:nvCxnSpPr>
+        <p:spPr>
+          <a:xfrm flipH="1">
+            <a:off x="5315606" y="2908368"/>
+            <a:ext cx="121975" cy="375400"/>
+          </a:xfrm>
+          <a:prstGeom prst="curvedConnector3">
+            <a:avLst/>
+          </a:prstGeom>
+          <a:ln w="12700">
+            <a:solidFill>
+              <a:srgbClr val="727375"/>
+            </a:solidFill>
+            <a:prstDash val="sysDash"/>
+            <a:tailEnd type="triangle" w="med" len="med"/>
+          </a:ln>
+          <a:effectLst/>
+        </p:spPr>
+        <p:style>
+          <a:lnRef idx="2">
+            <a:schemeClr val="accent1"/>
+          </a:lnRef>
+          <a:fillRef idx="0">
+            <a:schemeClr val="accent1"/>
+          </a:fillRef>
+          <a:effectRef idx="1">
+            <a:schemeClr val="accent1"/>
+          </a:effectRef>
+          <a:fontRef idx="minor">
+            <a:schemeClr val="tx1"/>
+          </a:fontRef>
+        </p:style>
+      </p:cxnSp>
+      <p:cxnSp>
+        <p:nvCxnSpPr>
+          <p:cNvPr id="31" name="Connector 30"/>
+          <p:cNvCxnSpPr/>
+          <p:nvPr/>
+        </p:nvCxnSpPr>
+        <p:spPr>
+          <a:xfrm flipH="1">
+            <a:off x="4374640" y="3680640"/>
+            <a:ext cx="394719" cy="0"/>
+          </a:xfrm>
+          <a:prstGeom prst="curvedConnector3">
+            <a:avLst/>
+          </a:prstGeom>
+          <a:ln w="12700">
+            <a:solidFill>
+              <a:srgbClr val="727375"/>
+            </a:solidFill>
+            <a:prstDash val="sysDash"/>
+            <a:tailEnd type="triangle" w="med" len="med"/>
+          </a:ln>
+          <a:effectLst/>
+        </p:spPr>
+        <p:style>
+          <a:lnRef idx="2">
+            <a:schemeClr val="accent1"/>
+          </a:lnRef>
+          <a:fillRef idx="0">
+            <a:schemeClr val="accent1"/>
+          </a:fillRef>
+          <a:effectRef idx="1">
+            <a:schemeClr val="accent1"/>
+          </a:effectRef>
+          <a:fontRef idx="minor">
+            <a:schemeClr val="tx1"/>
+          </a:fontRef>
+        </p:style>
+      </p:cxnSp>
+      <p:cxnSp>
+        <p:nvCxnSpPr>
+          <p:cNvPr id="32" name="Connector 31"/>
+          <p:cNvCxnSpPr/>
+          <p:nvPr/>
+        </p:nvCxnSpPr>
+        <p:spPr>
+          <a:xfrm flipH="1" flipV="1">
+            <a:off x="3706418" y="2908368"/>
+            <a:ext cx="121975" cy="375400"/>
+          </a:xfrm>
+          <a:prstGeom prst="curvedConnector3">
+            <a:avLst/>
+          </a:prstGeom>
+          <a:ln w="12700">
+            <a:solidFill>
+              <a:srgbClr val="727375"/>
+            </a:solidFill>
+            <a:prstDash val="sysDash"/>
+            <a:tailEnd type="triangle" w="med" len="med"/>
+          </a:ln>
+          <a:effectLst/>
+        </p:spPr>
+        <p:style>
+          <a:lnRef idx="2">
+            <a:schemeClr val="accent1"/>
+          </a:lnRef>
+          <a:fillRef idx="0">
+            <a:schemeClr val="accent1"/>
+          </a:fillRef>
+          <a:effectRef idx="1">
+            <a:schemeClr val="accent1"/>
+          </a:effectRef>
+          <a:fontRef idx="minor">
+            <a:schemeClr val="tx1"/>
+          </a:fontRef>
+        </p:style>
+      </p:cxnSp>
+      <p:cxnSp>
+        <p:nvCxnSpPr>
+          <p:cNvPr id="33" name="Connector 32"/>
+          <p:cNvCxnSpPr/>
+          <p:nvPr/>
+        </p:nvCxnSpPr>
+        <p:spPr>
+          <a:xfrm flipV="1">
+            <a:off x="3915066" y="2034206"/>
+            <a:ext cx="319334" cy="232010"/>
+          </a:xfrm>
+          <a:prstGeom prst="curvedConnector3">
+            <a:avLst/>
+          </a:prstGeom>
+          <a:ln w="12700">
+            <a:solidFill>
+              <a:srgbClr val="727375"/>
+            </a:solidFill>
+            <a:prstDash val="sysDash"/>
+            <a:tailEnd type="triangle" w="med" len="med"/>
+          </a:ln>
+          <a:effectLst/>
+        </p:spPr>
+        <p:style>
+          <a:lnRef idx="2">
+            <a:schemeClr val="accent1"/>
+          </a:lnRef>
+          <a:fillRef idx="0">
+            <a:schemeClr val="accent1"/>
+          </a:fillRef>
+          <a:effectRef idx="1">
+            <a:schemeClr val="accent1"/>
+          </a:effectRef>
+          <a:fontRef idx="minor">
+            <a:schemeClr val="tx1"/>
+          </a:fontRef>
+        </p:style>
+      </p:cxnSp>
+      <p:sp>
+        <p:nvSpPr>
+          <p:cNvPr id="34" name="TextBox 33"/>
+          <p:cNvSpPr txBox="1"/>
+          <p:nvPr/>
+        </p:nvSpPr>
+        <p:spPr>
+          <a:xfrm>
+            <a:off x="4005072" y="2651760"/>
+            <a:ext cx="1133856" cy="365760"/>
+          </a:xfrm>
+          <a:prstGeom prst="rect">
+            <a:avLst/>
+          </a:prstGeom>
+          <a:noFill/>
+        </p:spPr>
+        <p:txBody>
+          <a:bodyPr wrap="square" lIns="0" rIns="0" tIns="0" bIns="0" anchor="ctr">
+            <a:spAutoFit/>
+          </a:bodyPr>
+          <a:lstStyle/>
+          <a:p>
+            <a:pPr algn="ctr">
+              <a:lnSpc>
+                <a:spcPct val="95000"/>
+              </a:lnSpc>
+              <a:spcBef>
+                <a:spcPts val="0"/>
+              </a:spcBef>
+              <a:spcAft>
+                <a:spcPts val="0"/>
+              </a:spcAft>
+            </a:pPr>
+            <a:r>
+              <a:rPr sz="680" b="1" i="0">
+                <a:solidFill>
+                  <a:srgbClr val="1B3E6E"/>
+                </a:solidFill>
+                <a:latin typeface="Arial"/>
+              </a:rPr>
+              <a:t>SELF-LEARNING
+OPS LOOP</a:t>
+            </a:r>
+          </a:p>
+        </p:txBody>
+      </p:sp>
+      <p:cxnSp>
+        <p:nvCxnSpPr>
+          <p:cNvPr id="35" name="Connector 34"/>
+          <p:cNvCxnSpPr/>
+          <p:nvPr/>
+        </p:nvCxnSpPr>
+        <p:spPr>
+          <a:xfrm flipH="1">
+            <a:off x="3090672" y="2331720"/>
+            <a:ext cx="27432" cy="365760"/>
+          </a:xfrm>
+          <a:prstGeom prst="curvedConnector3">
+            <a:avLst/>
+          </a:prstGeom>
+          <a:ln w="13970">
+            <a:solidFill>
+              <a:srgbClr val="095F61"/>
+            </a:solidFill>
+            <a:prstDash val="sysDash"/>
+            <a:tailEnd type="triangle" w="med" len="med"/>
+          </a:ln>
+          <a:effectLst/>
+        </p:spPr>
+        <p:style>
+          <a:lnRef idx="2">
+            <a:schemeClr val="accent1"/>
+          </a:lnRef>
+          <a:fillRef idx="0">
+            <a:schemeClr val="accent1"/>
+          </a:fillRef>
+          <a:effectRef idx="1">
+            <a:schemeClr val="accent1"/>
+          </a:effectRef>
+          <a:fontRef idx="minor">
+            <a:schemeClr val="tx1"/>
+          </a:fontRef>
+        </p:style>
+      </p:cxnSp>
+      <p:cxnSp>
+        <p:nvCxnSpPr>
+          <p:cNvPr id="36" name="Connector 35"/>
+          <p:cNvCxnSpPr/>
+          <p:nvPr/>
+        </p:nvCxnSpPr>
+        <p:spPr>
+          <a:xfrm>
+            <a:off x="6025896" y="2331720"/>
+            <a:ext cx="27431" cy="365760"/>
+          </a:xfrm>
+          <a:prstGeom prst="curvedConnector3">
+            <a:avLst/>
+          </a:prstGeom>
+          <a:ln w="13970">
+            <a:solidFill>
+              <a:srgbClr val="E08A1E"/>
+            </a:solidFill>
+            <a:prstDash val="sysDash"/>
+            <a:tailEnd type="triangle" w="med" len="med"/>
+          </a:ln>
+          <a:effectLst/>
+        </p:spPr>
+        <p:style>
+          <a:lnRef idx="2">
+            <a:schemeClr val="accent1"/>
+          </a:lnRef>
+          <a:fillRef idx="0">
+            <a:schemeClr val="accent1"/>
+          </a:fillRef>
+          <a:effectRef idx="1">
+            <a:schemeClr val="accent1"/>
+          </a:effectRef>
+          <a:fontRef idx="minor">
+            <a:schemeClr val="tx1"/>
+          </a:fontRef>
+        </p:style>
+      </p:cxnSp>
+      <p:sp>
+        <p:nvSpPr>
+          <p:cNvPr id="37" name="Rectangle 36"/>
+          <p:cNvSpPr/>
+          <p:nvPr/>
+        </p:nvSpPr>
+        <p:spPr>
+          <a:xfrm>
+            <a:off x="365760" y="4398264"/>
+            <a:ext cx="54864" cy="182880"/>
+          </a:xfrm>
+          <a:prstGeom prst="rect">
+            <a:avLst/>
+          </a:prstGeom>
+          <a:solidFill>
+            <a:srgbClr val="398025"/>
+          </a:solidFill>
+          <a:ln>
+            <a:noFill/>
+          </a:ln>
+          <a:effectLst/>
+        </p:spPr>
+        <p:style>
+          <a:lnRef idx="1">
+            <a:schemeClr val="accent1"/>
+          </a:lnRef>
+          <a:fillRef idx="3">
+            <a:schemeClr val="accent1"/>
+          </a:fillRef>
+          <a:effectRef idx="2">
+            <a:schemeClr val="accent1"/>
+          </a:effectRef>
+          <a:fontRef idx="minor">
+            <a:schemeClr val="lt1"/>
+          </a:fontRef>
+        </p:style>
+        <p:txBody>
+          <a:bodyPr rtlCol="0" anchor="ctr"/>
+          <a:lstStyle/>
+          <a:p>
+            <a:pPr algn="ctr"/>
+          </a:p>
+        </p:txBody>
+      </p:sp>
+      <p:sp>
+        <p:nvSpPr>
+          <p:cNvPr id="38" name="TextBox 37"/>
+          <p:cNvSpPr txBox="1"/>
+          <p:nvPr/>
+        </p:nvSpPr>
+        <p:spPr>
+          <a:xfrm>
+            <a:off x="512064" y="4370832"/>
+            <a:ext cx="4837176" cy="256032"/>
+          </a:xfrm>
+          <a:prstGeom prst="rect">
+            <a:avLst/>
+          </a:prstGeom>
+          <a:noFill/>
+        </p:spPr>
+        <p:txBody>
+          <a:bodyPr wrap="square" lIns="0" rIns="0" tIns="0" bIns="0" anchor="t">
+            <a:spAutoFit/>
+          </a:bodyPr>
+          <a:lstStyle/>
+          <a:p>
+            <a:pPr algn="l">
+              <a:lnSpc>
+                <a:spcPct val="100000"/>
+              </a:lnSpc>
+              <a:spcBef>
+                <a:spcPts val="0"/>
+              </a:spcBef>
+              <a:spcAft>
+                <a:spcPts val="0"/>
+              </a:spcAft>
+            </a:pPr>
+            <a:r>
+              <a:rPr sz="950" b="1" i="0">
+                <a:solidFill>
+                  <a:srgbClr val="1B3E6E"/>
+                </a:solidFill>
+                <a:latin typeface="Arial"/>
+              </a:rPr>
+              <a:t>Rice procurement cost — with vs. without GS funding ($M)</a:t>
+            </a:r>
+          </a:p>
+        </p:txBody>
+      </p:sp>
+      <p:sp>
+        <p:nvSpPr>
+          <p:cNvPr id="39" name="Rectangle 38"/>
+          <p:cNvSpPr/>
+          <p:nvPr/>
+        </p:nvSpPr>
+        <p:spPr>
+          <a:xfrm>
+            <a:off x="365760" y="4645152"/>
+            <a:ext cx="4983480" cy="10972"/>
+          </a:xfrm>
+          <a:prstGeom prst="rect">
+            <a:avLst/>
+          </a:prstGeom>
+          <a:solidFill>
+            <a:srgbClr val="BFBFBF"/>
+          </a:solidFill>
+          <a:ln>
+            <a:noFill/>
+          </a:ln>
+          <a:effectLst/>
+        </p:spPr>
+        <p:style>
+          <a:lnRef idx="1">
+            <a:schemeClr val="accent1"/>
+          </a:lnRef>
+          <a:fillRef idx="3">
+            <a:schemeClr val="accent1"/>
+          </a:fillRef>
+          <a:effectRef idx="2">
+            <a:schemeClr val="accent1"/>
+          </a:effectRef>
+          <a:fontRef idx="minor">
+            <a:schemeClr val="lt1"/>
+          </a:fontRef>
+        </p:style>
+        <p:txBody>
+          <a:bodyPr rtlCol="0" anchor="ctr"/>
+          <a:lstStyle/>
+          <a:p>
+            <a:pPr algn="ctr"/>
+          </a:p>
+        </p:txBody>
+      </p:sp>
+      <p:graphicFrame>
+        <p:nvGraphicFramePr>
+          <p:cNvPr id="40" name="Chart 39"/>
+          <p:cNvGraphicFramePr>
+            <a:graphicFrameLocks noGrp="1"/>
+          </p:cNvGraphicFramePr>
+          <p:nvPr/>
+        </p:nvGraphicFramePr>
+        <p:xfrm>
+          <a:off x="365760" y="4700016"/>
+          <a:ext cx="4983480" cy="1243584"/>
+        </p:xfrm>
+        <a:graphic>
+          <a:graphicData uri="http://schemas.openxmlformats.org/drawingml/2006/chart">
+            <c:chart xmlns:c="http://schemas.openxmlformats.org/drawingml/2006/chart" r:id="rId2"/>
+          </a:graphicData>
+        </a:graphic>
+      </p:graphicFrame>
+      <p:sp>
+        <p:nvSpPr>
+          <p:cNvPr id="41" name="Rounded Rectangle 40"/>
+          <p:cNvSpPr/>
+          <p:nvPr/>
+        </p:nvSpPr>
+        <p:spPr>
+          <a:xfrm>
+            <a:off x="5577840" y="4370832"/>
+            <a:ext cx="3200400" cy="1591056"/>
+          </a:xfrm>
+          <a:prstGeom prst="roundRect">
+            <a:avLst>
+              <a:gd name="adj" fmla="val 10000"/>
+            </a:avLst>
+          </a:prstGeom>
+          <a:solidFill>
+            <a:srgbClr val="398025"/>
+          </a:solidFill>
+          <a:ln>
+            <a:noFill/>
+          </a:ln>
+          <a:effectLst/>
+        </p:spPr>
+        <p:style>
+          <a:lnRef idx="1">
+            <a:schemeClr val="accent1"/>
+          </a:lnRef>
+          <a:fillRef idx="3">
+            <a:schemeClr val="accent1"/>
+          </a:fillRef>
+          <a:effectRef idx="2">
+            <a:schemeClr val="accent1"/>
+          </a:effectRef>
+          <a:fontRef idx="minor">
+            <a:schemeClr val="lt1"/>
+          </a:fontRef>
+        </p:style>
+        <p:txBody>
+          <a:bodyPr rtlCol="0" anchor="ctr"/>
+          <a:lstStyle/>
+          <a:p>
+            <a:pPr algn="ctr"/>
+          </a:p>
+        </p:txBody>
+      </p:sp>
+      <p:sp>
+        <p:nvSpPr>
+          <p:cNvPr id="42" name="TextBox 41"/>
+          <p:cNvSpPr txBox="1"/>
+          <p:nvPr/>
+        </p:nvSpPr>
+        <p:spPr>
+          <a:xfrm>
+            <a:off x="5669279" y="4407408"/>
+            <a:ext cx="3017520" cy="1517904"/>
+          </a:xfrm>
+          <a:prstGeom prst="rect">
+            <a:avLst/>
+          </a:prstGeom>
+          <a:noFill/>
+        </p:spPr>
+        <p:txBody>
+          <a:bodyPr wrap="square" lIns="0" rIns="0" tIns="0" bIns="0" anchor="ctr">
+            <a:spAutoFit/>
+          </a:bodyPr>
+          <a:lstStyle/>
+          <a:p>
+            <a:pPr algn="ctr">
+              <a:lnSpc>
+                <a:spcPct val="100000"/>
+              </a:lnSpc>
+              <a:spcBef>
+                <a:spcPts val="0"/>
+              </a:spcBef>
+              <a:spcAft>
+                <a:spcPts val="100"/>
+              </a:spcAft>
+            </a:pPr>
+            <a:r>
+              <a:rPr sz="700" b="1" i="0">
+                <a:solidFill>
+                  <a:srgbClr val="FFFFFF"/>
+                </a:solidFill>
+                <a:latin typeface="Arial"/>
+              </a:rPr>
+              <a:t>CUMULATIVE 2026–29 IMPACT</a:t>
+            </a:r>
+          </a:p>
+          <a:p>
+            <a:pPr algn="ctr">
+              <a:lnSpc>
+                <a:spcPct val="100000"/>
+              </a:lnSpc>
+              <a:spcBef>
+                <a:spcPts val="0"/>
+              </a:spcBef>
+              <a:spcAft>
+                <a:spcPts val="100"/>
+              </a:spcAft>
+            </a:pPr>
+            <a:r>
+              <a:rPr sz="1400" b="1" i="0">
+                <a:solidFill>
+                  <a:srgbClr val="FFFFFF"/>
+                </a:solidFill>
+                <a:latin typeface="Arial"/>
+              </a:rPr>
+              <a:t>~$10.1M saved  |  21.6% reduction</a:t>
+            </a:r>
+          </a:p>
+          <a:p>
+            <a:pPr algn="ctr">
+              <a:lnSpc>
+                <a:spcPct val="100000"/>
+              </a:lnSpc>
+              <a:spcBef>
+                <a:spcPts val="0"/>
+              </a:spcBef>
+              <a:spcAft>
+                <a:spcPts val="0"/>
+              </a:spcAft>
+            </a:pPr>
+            <a:r>
+              <a:rPr sz="700" b="0" i="1">
+                <a:solidFill>
+                  <a:srgbClr val="FFFFFF"/>
+                </a:solidFill>
+                <a:latin typeface="Arial"/>
+              </a:rPr>
+              <a:t>freed capital feeds more children</a:t>
+            </a:r>
+          </a:p>
+        </p:txBody>
+      </p:sp>
+    </p:spTree>
+  </p:cSld>
+  <p:clrMapOvr>
+    <a:masterClrMapping/>
+  </p:clrMapOvr>
+</p:sld>
+</file>
+
 <file path=ppt/slides/slide2.xml><?xml version="1.0" encoding="utf-8"?>
 <p:sld xmlns:a="http://schemas.openxmlformats.org/drawingml/2006/main" xmlns:p="http://schemas.openxmlformats.org/presentationml/2006/main" xmlns:r="http://schemas.openxmlformats.org/officeDocument/2006/relationships">
   <p:cSld>
@@ -21689,6 +29273,2122 @@
                 <a:latin typeface="Arial"/>
               </a:rPr>
               <a:t>60 / 40 — weighted to the costlier gap</a:t>
+            </a:r>
+          </a:p>
+        </p:txBody>
+      </p:sp>
+    </p:spTree>
+  </p:cSld>
+  <p:clrMapOvr>
+    <a:masterClrMapping/>
+  </p:clrMapOvr>
+</p:sld>
+</file>
+
+<file path=ppt/slides/slide9.xml><?xml version="1.0" encoding="utf-8"?>
+<p:sld xmlns:a="http://schemas.openxmlformats.org/drawingml/2006/main" xmlns:p="http://schemas.openxmlformats.org/presentationml/2006/main" xmlns:r="http://schemas.openxmlformats.org/officeDocument/2006/relationships">
+  <p:cSld>
+    <p:spTree>
+      <p:nvGrpSpPr>
+        <p:cNvPr id="1" name=""/>
+        <p:cNvGrpSpPr/>
+        <p:nvPr/>
+      </p:nvGrpSpPr>
+      <p:grpSpPr/>
+      <p:sp>
+        <p:nvSpPr>
+          <p:cNvPr id="2" name="Rectangle 1"/>
+          <p:cNvSpPr/>
+          <p:nvPr/>
+        </p:nvSpPr>
+        <p:spPr>
+          <a:xfrm>
+            <a:off x="365760" y="274320"/>
+            <a:ext cx="8412480" cy="23774"/>
+          </a:xfrm>
+          <a:prstGeom prst="rect">
+            <a:avLst/>
+          </a:prstGeom>
+          <a:solidFill>
+            <a:srgbClr val="1B3E6E"/>
+          </a:solidFill>
+          <a:ln>
+            <a:noFill/>
+          </a:ln>
+          <a:effectLst/>
+        </p:spPr>
+        <p:style>
+          <a:lnRef idx="1">
+            <a:schemeClr val="accent1"/>
+          </a:lnRef>
+          <a:fillRef idx="3">
+            <a:schemeClr val="accent1"/>
+          </a:fillRef>
+          <a:effectRef idx="2">
+            <a:schemeClr val="accent1"/>
+          </a:effectRef>
+          <a:fontRef idx="minor">
+            <a:schemeClr val="lt1"/>
+          </a:fontRef>
+        </p:style>
+        <p:txBody>
+          <a:bodyPr rtlCol="0" anchor="ctr"/>
+          <a:lstStyle/>
+          <a:p>
+            <a:pPr algn="ctr"/>
+          </a:p>
+        </p:txBody>
+      </p:sp>
+      <p:sp>
+        <p:nvSpPr>
+          <p:cNvPr id="3" name="TextBox 2"/>
+          <p:cNvSpPr txBox="1"/>
+          <p:nvPr/>
+        </p:nvSpPr>
+        <p:spPr>
+          <a:xfrm>
+            <a:off x="365760" y="365760"/>
+            <a:ext cx="8412480" cy="457200"/>
+          </a:xfrm>
+          <a:prstGeom prst="rect">
+            <a:avLst/>
+          </a:prstGeom>
+          <a:noFill/>
+        </p:spPr>
+        <p:txBody>
+          <a:bodyPr wrap="square" lIns="0" rIns="0" tIns="0" bIns="0" anchor="t">
+            <a:spAutoFit/>
+          </a:bodyPr>
+          <a:lstStyle/>
+          <a:p>
+            <a:pPr algn="l">
+              <a:lnSpc>
+                <a:spcPct val="100000"/>
+              </a:lnSpc>
+              <a:spcBef>
+                <a:spcPts val="0"/>
+              </a:spcBef>
+              <a:spcAft>
+                <a:spcPts val="0"/>
+              </a:spcAft>
+            </a:pPr>
+            <a:r>
+              <a:rPr sz="2000" b="0" i="0">
+                <a:solidFill>
+                  <a:srgbClr val="1B3E6E"/>
+                </a:solidFill>
+                <a:latin typeface="Georgia"/>
+              </a:rPr>
+              <a:t>Solution 1 — the AI-enabled planning &amp; procurement build ($150k)</a:t>
+            </a:r>
+          </a:p>
+        </p:txBody>
+      </p:sp>
+      <p:sp>
+        <p:nvSpPr>
+          <p:cNvPr id="4" name="TextBox 3"/>
+          <p:cNvSpPr txBox="1"/>
+          <p:nvPr/>
+        </p:nvSpPr>
+        <p:spPr>
+          <a:xfrm>
+            <a:off x="365760" y="822960"/>
+            <a:ext cx="8412480" cy="438912"/>
+          </a:xfrm>
+          <a:prstGeom prst="rect">
+            <a:avLst/>
+          </a:prstGeom>
+          <a:noFill/>
+        </p:spPr>
+        <p:txBody>
+          <a:bodyPr wrap="square" lIns="0" rIns="0" tIns="0" bIns="0" anchor="t">
+            <a:spAutoFit/>
+          </a:bodyPr>
+          <a:lstStyle/>
+          <a:p>
+            <a:pPr algn="l">
+              <a:lnSpc>
+                <a:spcPct val="100000"/>
+              </a:lnSpc>
+              <a:spcBef>
+                <a:spcPts val="0"/>
+              </a:spcBef>
+              <a:spcAft>
+                <a:spcPts val="0"/>
+              </a:spcAft>
+            </a:pPr>
+            <a:r>
+              <a:rPr sz="1050" b="0" i="0">
+                <a:solidFill>
+                  <a:srgbClr val="333333"/>
+                </a:solidFill>
+                <a:latin typeface="Arial"/>
+              </a:rPr>
+              <a:t>Connecting real-time demand signals to kitchen production and procurement — the technology that closes Gap 1.</a:t>
+            </a:r>
+          </a:p>
+        </p:txBody>
+      </p:sp>
+      <p:sp>
+        <p:nvSpPr>
+          <p:cNvPr id="5" name="Rectangle 4"/>
+          <p:cNvSpPr/>
+          <p:nvPr/>
+        </p:nvSpPr>
+        <p:spPr>
+          <a:xfrm>
+            <a:off x="502920" y="6071616"/>
+            <a:ext cx="8138159" cy="365760"/>
+          </a:xfrm>
+          <a:prstGeom prst="rect">
+            <a:avLst/>
+          </a:prstGeom>
+          <a:solidFill>
+            <a:srgbClr val="D9D9D9"/>
+          </a:solidFill>
+          <a:ln>
+            <a:noFill/>
+          </a:ln>
+          <a:effectLst/>
+        </p:spPr>
+        <p:style>
+          <a:lnRef idx="1">
+            <a:schemeClr val="accent1"/>
+          </a:lnRef>
+          <a:fillRef idx="3">
+            <a:schemeClr val="accent1"/>
+          </a:fillRef>
+          <a:effectRef idx="2">
+            <a:schemeClr val="accent1"/>
+          </a:effectRef>
+          <a:fontRef idx="minor">
+            <a:schemeClr val="lt1"/>
+          </a:fontRef>
+        </p:style>
+        <p:txBody>
+          <a:bodyPr rtlCol="0" anchor="ctr"/>
+          <a:lstStyle/>
+          <a:p>
+            <a:pPr algn="ctr"/>
+          </a:p>
+        </p:txBody>
+      </p:sp>
+      <p:sp>
+        <p:nvSpPr>
+          <p:cNvPr id="6" name="TextBox 5"/>
+          <p:cNvSpPr txBox="1"/>
+          <p:nvPr/>
+        </p:nvSpPr>
+        <p:spPr>
+          <a:xfrm>
+            <a:off x="640080" y="6071616"/>
+            <a:ext cx="7863840" cy="365760"/>
+          </a:xfrm>
+          <a:prstGeom prst="rect">
+            <a:avLst/>
+          </a:prstGeom>
+          <a:noFill/>
+        </p:spPr>
+        <p:txBody>
+          <a:bodyPr wrap="square" lIns="0" rIns="0" tIns="0" bIns="0" anchor="ctr">
+            <a:spAutoFit/>
+          </a:bodyPr>
+          <a:lstStyle/>
+          <a:p>
+            <a:pPr algn="ctr">
+              <a:lnSpc>
+                <a:spcPct val="95000"/>
+              </a:lnSpc>
+              <a:spcBef>
+                <a:spcPts val="0"/>
+              </a:spcBef>
+              <a:spcAft>
+                <a:spcPts val="0"/>
+              </a:spcAft>
+            </a:pPr>
+            <a:r>
+              <a:rPr sz="1100" b="1" i="0">
+                <a:solidFill>
+                  <a:srgbClr val="1B3E6E"/>
+                </a:solidFill>
+                <a:latin typeface="Georgia"/>
+              </a:rPr>
+              <a:t>“Feeding more children with the same rupee” — AI plus GS capital makes it possible.</a:t>
+            </a:r>
+          </a:p>
+        </p:txBody>
+      </p:sp>
+      <p:sp>
+        <p:nvSpPr>
+          <p:cNvPr id="7" name="TextBox 6"/>
+          <p:cNvSpPr txBox="1"/>
+          <p:nvPr/>
+        </p:nvSpPr>
+        <p:spPr>
+          <a:xfrm>
+            <a:off x="365760" y="6492240"/>
+            <a:ext cx="1280160" cy="329184"/>
+          </a:xfrm>
+          <a:prstGeom prst="rect">
+            <a:avLst/>
+          </a:prstGeom>
+          <a:noFill/>
+        </p:spPr>
+        <p:txBody>
+          <a:bodyPr wrap="square" lIns="0" rIns="0" tIns="0" bIns="0" anchor="t">
+            <a:spAutoFit/>
+          </a:bodyPr>
+          <a:lstStyle/>
+          <a:p>
+            <a:pPr algn="l">
+              <a:lnSpc>
+                <a:spcPct val="90000"/>
+              </a:lnSpc>
+              <a:spcBef>
+                <a:spcPts val="0"/>
+              </a:spcBef>
+              <a:spcAft>
+                <a:spcPts val="0"/>
+              </a:spcAft>
+            </a:pPr>
+            <a:r>
+              <a:rPr sz="900" b="1" i="0">
+                <a:solidFill>
+                  <a:srgbClr val="111111"/>
+                </a:solidFill>
+                <a:latin typeface="Georgia"/>
+              </a:rPr>
+              <a:t>Goldman</a:t>
+            </a:r>
+          </a:p>
+          <a:p>
+            <a:pPr algn="l">
+              <a:lnSpc>
+                <a:spcPct val="90000"/>
+              </a:lnSpc>
+              <a:spcBef>
+                <a:spcPts val="0"/>
+              </a:spcBef>
+              <a:spcAft>
+                <a:spcPts val="0"/>
+              </a:spcAft>
+            </a:pPr>
+            <a:r>
+              <a:rPr sz="900" b="1" i="0">
+                <a:solidFill>
+                  <a:srgbClr val="111111"/>
+                </a:solidFill>
+                <a:latin typeface="Georgia"/>
+              </a:rPr>
+              <a:t>Sachs</a:t>
+            </a:r>
+          </a:p>
+        </p:txBody>
+      </p:sp>
+      <p:sp>
+        <p:nvSpPr>
+          <p:cNvPr id="8" name="TextBox 7"/>
+          <p:cNvSpPr txBox="1"/>
+          <p:nvPr/>
+        </p:nvSpPr>
+        <p:spPr>
+          <a:xfrm>
+            <a:off x="8321040" y="6528816"/>
+            <a:ext cx="457200" cy="274320"/>
+          </a:xfrm>
+          <a:prstGeom prst="rect">
+            <a:avLst/>
+          </a:prstGeom>
+          <a:noFill/>
+        </p:spPr>
+        <p:txBody>
+          <a:bodyPr wrap="square" lIns="0" rIns="0" tIns="0" bIns="0" anchor="t">
+            <a:spAutoFit/>
+          </a:bodyPr>
+          <a:lstStyle/>
+          <a:p>
+            <a:pPr algn="r">
+              <a:lnSpc>
+                <a:spcPct val="100000"/>
+              </a:lnSpc>
+              <a:spcBef>
+                <a:spcPts val="0"/>
+              </a:spcBef>
+              <a:spcAft>
+                <a:spcPts val="300"/>
+              </a:spcAft>
+            </a:pPr>
+            <a:r>
+              <a:rPr sz="900" b="0" i="0">
+                <a:solidFill>
+                  <a:srgbClr val="727375"/>
+                </a:solidFill>
+                <a:latin typeface="Arial"/>
+              </a:rPr>
+              <a:t>9</a:t>
+            </a:r>
+          </a:p>
+        </p:txBody>
+      </p:sp>
+      <p:sp>
+        <p:nvSpPr>
+          <p:cNvPr id="9" name="TextBox 8"/>
+          <p:cNvSpPr txBox="1"/>
+          <p:nvPr/>
+        </p:nvSpPr>
+        <p:spPr>
+          <a:xfrm>
+            <a:off x="4754879" y="54864"/>
+            <a:ext cx="4023360" cy="182880"/>
+          </a:xfrm>
+          <a:prstGeom prst="rect">
+            <a:avLst/>
+          </a:prstGeom>
+          <a:noFill/>
+        </p:spPr>
+        <p:txBody>
+          <a:bodyPr wrap="square" lIns="0" rIns="0" tIns="0" bIns="0" anchor="t">
+            <a:spAutoFit/>
+          </a:bodyPr>
+          <a:lstStyle/>
+          <a:p>
+            <a:pPr algn="r">
+              <a:lnSpc>
+                <a:spcPct val="100000"/>
+              </a:lnSpc>
+              <a:spcBef>
+                <a:spcPts val="0"/>
+              </a:spcBef>
+              <a:spcAft>
+                <a:spcPts val="0"/>
+              </a:spcAft>
+            </a:pPr>
+            <a:r>
+              <a:rPr sz="750" b="0" i="1">
+                <a:solidFill>
+                  <a:srgbClr val="727375"/>
+                </a:solidFill>
+                <a:latin typeface="Arial"/>
+              </a:rPr>
+              <a:t>PROPOSED SLIDE 4 — OPTION A (quadrant)</a:t>
+            </a:r>
+          </a:p>
+        </p:txBody>
+      </p:sp>
+      <p:sp>
+        <p:nvSpPr>
+          <p:cNvPr id="10" name="Rectangle 9"/>
+          <p:cNvSpPr/>
+          <p:nvPr/>
+        </p:nvSpPr>
+        <p:spPr>
+          <a:xfrm>
+            <a:off x="365760" y="1335024"/>
+            <a:ext cx="4133087" cy="1517904"/>
+          </a:xfrm>
+          <a:prstGeom prst="rect">
+            <a:avLst/>
+          </a:prstGeom>
+          <a:solidFill>
+            <a:srgbClr val="FFFFFF"/>
+          </a:solidFill>
+          <a:ln w="11430">
+            <a:solidFill>
+              <a:srgbClr val="BFBFBF"/>
+            </a:solidFill>
+          </a:ln>
+          <a:effectLst/>
+        </p:spPr>
+        <p:style>
+          <a:lnRef idx="1">
+            <a:schemeClr val="accent1"/>
+          </a:lnRef>
+          <a:fillRef idx="3">
+            <a:schemeClr val="accent1"/>
+          </a:fillRef>
+          <a:effectRef idx="2">
+            <a:schemeClr val="accent1"/>
+          </a:effectRef>
+          <a:fontRef idx="minor">
+            <a:schemeClr val="lt1"/>
+          </a:fontRef>
+        </p:style>
+        <p:txBody>
+          <a:bodyPr rtlCol="0" anchor="ctr"/>
+          <a:lstStyle/>
+          <a:p>
+            <a:pPr algn="ctr"/>
+          </a:p>
+        </p:txBody>
+      </p:sp>
+      <p:sp>
+        <p:nvSpPr>
+          <p:cNvPr id="11" name="Rectangle 10"/>
+          <p:cNvSpPr/>
+          <p:nvPr/>
+        </p:nvSpPr>
+        <p:spPr>
+          <a:xfrm>
+            <a:off x="365760" y="1335024"/>
+            <a:ext cx="4133087" cy="274320"/>
+          </a:xfrm>
+          <a:prstGeom prst="rect">
+            <a:avLst/>
+          </a:prstGeom>
+          <a:solidFill>
+            <a:srgbClr val="095F61"/>
+          </a:solidFill>
+          <a:ln>
+            <a:noFill/>
+          </a:ln>
+          <a:effectLst/>
+        </p:spPr>
+        <p:style>
+          <a:lnRef idx="1">
+            <a:schemeClr val="accent1"/>
+          </a:lnRef>
+          <a:fillRef idx="3">
+            <a:schemeClr val="accent1"/>
+          </a:fillRef>
+          <a:effectRef idx="2">
+            <a:schemeClr val="accent1"/>
+          </a:effectRef>
+          <a:fontRef idx="minor">
+            <a:schemeClr val="lt1"/>
+          </a:fontRef>
+        </p:style>
+        <p:txBody>
+          <a:bodyPr rtlCol="0" anchor="ctr"/>
+          <a:lstStyle/>
+          <a:p>
+            <a:pPr algn="ctr"/>
+          </a:p>
+        </p:txBody>
+      </p:sp>
+      <p:sp>
+        <p:nvSpPr>
+          <p:cNvPr id="12" name="TextBox 11"/>
+          <p:cNvSpPr txBox="1"/>
+          <p:nvPr/>
+        </p:nvSpPr>
+        <p:spPr>
+          <a:xfrm>
+            <a:off x="475488" y="1362456"/>
+            <a:ext cx="3913632" cy="228600"/>
+          </a:xfrm>
+          <a:prstGeom prst="rect">
+            <a:avLst/>
+          </a:prstGeom>
+          <a:noFill/>
+        </p:spPr>
+        <p:txBody>
+          <a:bodyPr wrap="square" lIns="0" rIns="0" tIns="0" bIns="0" anchor="t">
+            <a:spAutoFit/>
+          </a:bodyPr>
+          <a:lstStyle/>
+          <a:p>
+            <a:pPr algn="l">
+              <a:lnSpc>
+                <a:spcPct val="100000"/>
+              </a:lnSpc>
+              <a:spcBef>
+                <a:spcPts val="0"/>
+              </a:spcBef>
+              <a:spcAft>
+                <a:spcPts val="0"/>
+              </a:spcAft>
+            </a:pPr>
+            <a:r>
+              <a:rPr sz="950" b="1" i="0">
+                <a:solidFill>
+                  <a:srgbClr val="FFFFFF"/>
+                </a:solidFill>
+                <a:latin typeface="Arial"/>
+              </a:rPr>
+              <a:t>PILLAR 1 — Predictive Demand Forecasting</a:t>
+            </a:r>
+          </a:p>
+        </p:txBody>
+      </p:sp>
+      <p:sp>
+        <p:nvSpPr>
+          <p:cNvPr id="13" name="Rectangle 12"/>
+          <p:cNvSpPr/>
+          <p:nvPr/>
+        </p:nvSpPr>
+        <p:spPr>
+          <a:xfrm>
+            <a:off x="4645152" y="1335024"/>
+            <a:ext cx="4133087" cy="1517904"/>
+          </a:xfrm>
+          <a:prstGeom prst="rect">
+            <a:avLst/>
+          </a:prstGeom>
+          <a:solidFill>
+            <a:srgbClr val="FFFFFF"/>
+          </a:solidFill>
+          <a:ln w="11430">
+            <a:solidFill>
+              <a:srgbClr val="BFBFBF"/>
+            </a:solidFill>
+          </a:ln>
+          <a:effectLst/>
+        </p:spPr>
+        <p:style>
+          <a:lnRef idx="1">
+            <a:schemeClr val="accent1"/>
+          </a:lnRef>
+          <a:fillRef idx="3">
+            <a:schemeClr val="accent1"/>
+          </a:fillRef>
+          <a:effectRef idx="2">
+            <a:schemeClr val="accent1"/>
+          </a:effectRef>
+          <a:fontRef idx="minor">
+            <a:schemeClr val="lt1"/>
+          </a:fontRef>
+        </p:style>
+        <p:txBody>
+          <a:bodyPr rtlCol="0" anchor="ctr"/>
+          <a:lstStyle/>
+          <a:p>
+            <a:pPr algn="ctr"/>
+          </a:p>
+        </p:txBody>
+      </p:sp>
+      <p:sp>
+        <p:nvSpPr>
+          <p:cNvPr id="14" name="Rectangle 13"/>
+          <p:cNvSpPr/>
+          <p:nvPr/>
+        </p:nvSpPr>
+        <p:spPr>
+          <a:xfrm>
+            <a:off x="4645152" y="1335024"/>
+            <a:ext cx="4133087" cy="274320"/>
+          </a:xfrm>
+          <a:prstGeom prst="rect">
+            <a:avLst/>
+          </a:prstGeom>
+          <a:solidFill>
+            <a:srgbClr val="E08A1E"/>
+          </a:solidFill>
+          <a:ln>
+            <a:noFill/>
+          </a:ln>
+          <a:effectLst/>
+        </p:spPr>
+        <p:style>
+          <a:lnRef idx="1">
+            <a:schemeClr val="accent1"/>
+          </a:lnRef>
+          <a:fillRef idx="3">
+            <a:schemeClr val="accent1"/>
+          </a:fillRef>
+          <a:effectRef idx="2">
+            <a:schemeClr val="accent1"/>
+          </a:effectRef>
+          <a:fontRef idx="minor">
+            <a:schemeClr val="lt1"/>
+          </a:fontRef>
+        </p:style>
+        <p:txBody>
+          <a:bodyPr rtlCol="0" anchor="ctr"/>
+          <a:lstStyle/>
+          <a:p>
+            <a:pPr algn="ctr"/>
+          </a:p>
+        </p:txBody>
+      </p:sp>
+      <p:sp>
+        <p:nvSpPr>
+          <p:cNvPr id="15" name="TextBox 14"/>
+          <p:cNvSpPr txBox="1"/>
+          <p:nvPr/>
+        </p:nvSpPr>
+        <p:spPr>
+          <a:xfrm>
+            <a:off x="4754880" y="1362456"/>
+            <a:ext cx="3913632" cy="228600"/>
+          </a:xfrm>
+          <a:prstGeom prst="rect">
+            <a:avLst/>
+          </a:prstGeom>
+          <a:noFill/>
+        </p:spPr>
+        <p:txBody>
+          <a:bodyPr wrap="square" lIns="0" rIns="0" tIns="0" bIns="0" anchor="t">
+            <a:spAutoFit/>
+          </a:bodyPr>
+          <a:lstStyle/>
+          <a:p>
+            <a:pPr algn="l">
+              <a:lnSpc>
+                <a:spcPct val="100000"/>
+              </a:lnSpc>
+              <a:spcBef>
+                <a:spcPts val="0"/>
+              </a:spcBef>
+              <a:spcAft>
+                <a:spcPts val="0"/>
+              </a:spcAft>
+            </a:pPr>
+            <a:r>
+              <a:rPr sz="950" b="1" i="0">
+                <a:solidFill>
+                  <a:srgbClr val="FFFFFF"/>
+                </a:solidFill>
+                <a:latin typeface="Arial"/>
+              </a:rPr>
+              <a:t>PILLAR 2 — Spatial-Temporal Procurement</a:t>
+            </a:r>
+          </a:p>
+        </p:txBody>
+      </p:sp>
+      <p:sp>
+        <p:nvSpPr>
+          <p:cNvPr id="16" name="TextBox 15"/>
+          <p:cNvSpPr txBox="1"/>
+          <p:nvPr/>
+        </p:nvSpPr>
+        <p:spPr>
+          <a:xfrm>
+            <a:off x="493776" y="1700784"/>
+            <a:ext cx="3877056" cy="2011680"/>
+          </a:xfrm>
+          <a:prstGeom prst="rect">
+            <a:avLst/>
+          </a:prstGeom>
+          <a:noFill/>
+        </p:spPr>
+        <p:txBody>
+          <a:bodyPr wrap="square" lIns="0" rIns="0" tIns="0" bIns="0" anchor="t">
+            <a:spAutoFit/>
+          </a:bodyPr>
+          <a:lstStyle/>
+          <a:p>
+            <a:pPr algn="l">
+              <a:lnSpc>
+                <a:spcPct val="100000"/>
+              </a:lnSpc>
+              <a:spcBef>
+                <a:spcPts val="0"/>
+              </a:spcBef>
+              <a:spcAft>
+                <a:spcPts val="200"/>
+              </a:spcAft>
+            </a:pPr>
+            <a:r>
+              <a:rPr sz="750" b="0" i="1">
+                <a:solidFill>
+                  <a:srgbClr val="727375"/>
+                </a:solidFill>
+                <a:latin typeface="Arial"/>
+              </a:rPr>
+              <a:t>Predicts exact meal &amp; ingredient needs per centre by ingesting:</a:t>
+            </a:r>
+          </a:p>
+          <a:p>
+            <a:pPr algn="l">
+              <a:lnSpc>
+                <a:spcPct val="102000"/>
+              </a:lnSpc>
+              <a:spcBef>
+                <a:spcPts val="0"/>
+              </a:spcBef>
+              <a:spcAft>
+                <a:spcPts val="200"/>
+              </a:spcAft>
+            </a:pPr>
+            <a:r>
+              <a:rPr sz="750" b="1" i="0">
+                <a:solidFill>
+                  <a:srgbClr val="333333"/>
+                </a:solidFill>
+                <a:latin typeface="Arial"/>
+              </a:rPr>
+              <a:t>•  Attendance &amp; enrolment trends </a:t>
+            </a:r>
+            <a:r>
+              <a:rPr sz="750" b="0" i="0">
+                <a:solidFill>
+                  <a:srgbClr val="333333"/>
+                </a:solidFill>
+                <a:latin typeface="Arial"/>
+              </a:rPr>
+              <a:t>estimate how many meals each centre should prepare daily</a:t>
+            </a:r>
+          </a:p>
+          <a:p>
+            <a:pPr algn="l">
+              <a:lnSpc>
+                <a:spcPct val="102000"/>
+              </a:lnSpc>
+              <a:spcBef>
+                <a:spcPts val="0"/>
+              </a:spcBef>
+              <a:spcAft>
+                <a:spcPts val="200"/>
+              </a:spcAft>
+            </a:pPr>
+            <a:r>
+              <a:rPr sz="750" b="1" i="0">
+                <a:solidFill>
+                  <a:srgbClr val="333333"/>
+                </a:solidFill>
+                <a:latin typeface="Arial"/>
+              </a:rPr>
+              <a:t>•  Holiday calendars </a:t>
+            </a:r>
+            <a:r>
+              <a:rPr sz="750" b="0" i="0">
+                <a:solidFill>
+                  <a:srgbClr val="333333"/>
+                </a:solidFill>
+                <a:latin typeface="Arial"/>
+              </a:rPr>
+              <a:t>capture local demand spikes or dips before production quantities are finalised</a:t>
+            </a:r>
+          </a:p>
+          <a:p>
+            <a:pPr algn="l">
+              <a:lnSpc>
+                <a:spcPct val="102000"/>
+              </a:lnSpc>
+              <a:spcBef>
+                <a:spcPts val="0"/>
+              </a:spcBef>
+              <a:spcAft>
+                <a:spcPts val="200"/>
+              </a:spcAft>
+            </a:pPr>
+            <a:r>
+              <a:rPr sz="750" b="1" i="0">
+                <a:solidFill>
+                  <a:srgbClr val="333333"/>
+                </a:solidFill>
+                <a:latin typeface="Arial"/>
+              </a:rPr>
+              <a:t>•  Menu consumption history </a:t>
+            </a:r>
+            <a:r>
+              <a:rPr sz="750" b="0" i="0">
+                <a:solidFill>
+                  <a:srgbClr val="333333"/>
+                </a:solidFill>
+                <a:latin typeface="Arial"/>
+              </a:rPr>
+              <a:t>converts expected meals into ingredient quantities for key staples</a:t>
+            </a:r>
+          </a:p>
+          <a:p>
+            <a:pPr algn="l">
+              <a:lnSpc>
+                <a:spcPct val="102000"/>
+              </a:lnSpc>
+              <a:spcBef>
+                <a:spcPts val="0"/>
+              </a:spcBef>
+              <a:spcAft>
+                <a:spcPts val="200"/>
+              </a:spcAft>
+            </a:pPr>
+            <a:r>
+              <a:rPr sz="750" b="1" i="0">
+                <a:solidFill>
+                  <a:srgbClr val="333333"/>
+                </a:solidFill>
+                <a:latin typeface="Arial"/>
+              </a:rPr>
+              <a:t>•  Weather signals &amp; feedback </a:t>
+            </a:r>
+            <a:r>
+              <a:rPr sz="750" b="0" i="0">
+                <a:solidFill>
+                  <a:srgbClr val="333333"/>
+                </a:solidFill>
+                <a:latin typeface="Arial"/>
+              </a:rPr>
+              <a:t>continuously refine the next centre-level forecast</a:t>
+            </a:r>
+          </a:p>
+        </p:txBody>
+      </p:sp>
+      <p:sp>
+        <p:nvSpPr>
+          <p:cNvPr id="17" name="TextBox 16"/>
+          <p:cNvSpPr txBox="1"/>
+          <p:nvPr/>
+        </p:nvSpPr>
+        <p:spPr>
+          <a:xfrm>
+            <a:off x="4773168" y="1700784"/>
+            <a:ext cx="3877056" cy="2011680"/>
+          </a:xfrm>
+          <a:prstGeom prst="rect">
+            <a:avLst/>
+          </a:prstGeom>
+          <a:noFill/>
+        </p:spPr>
+        <p:txBody>
+          <a:bodyPr wrap="square" lIns="0" rIns="0" tIns="0" bIns="0" anchor="t">
+            <a:spAutoFit/>
+          </a:bodyPr>
+          <a:lstStyle/>
+          <a:p>
+            <a:pPr algn="l">
+              <a:lnSpc>
+                <a:spcPct val="100000"/>
+              </a:lnSpc>
+              <a:spcBef>
+                <a:spcPts val="0"/>
+              </a:spcBef>
+              <a:spcAft>
+                <a:spcPts val="200"/>
+              </a:spcAft>
+            </a:pPr>
+            <a:r>
+              <a:rPr sz="750" b="0" i="1">
+                <a:solidFill>
+                  <a:srgbClr val="727375"/>
+                </a:solidFill>
+                <a:latin typeface="Arial"/>
+              </a:rPr>
+              <a:t>Decides when and where to buy each commodity to minimise total landed cost:</a:t>
+            </a:r>
+          </a:p>
+          <a:p>
+            <a:pPr algn="l">
+              <a:lnSpc>
+                <a:spcPct val="102000"/>
+              </a:lnSpc>
+              <a:spcBef>
+                <a:spcPts val="0"/>
+              </a:spcBef>
+              <a:spcAft>
+                <a:spcPts val="200"/>
+              </a:spcAft>
+            </a:pPr>
+            <a:r>
+              <a:rPr sz="750" b="1" i="0">
+                <a:solidFill>
+                  <a:srgbClr val="333333"/>
+                </a:solidFill>
+                <a:latin typeface="Arial"/>
+              </a:rPr>
+              <a:t>•  Seasonal price troughs </a:t>
+            </a:r>
+            <a:r>
+              <a:rPr sz="750" b="0" i="0">
+                <a:solidFill>
+                  <a:srgbClr val="333333"/>
+                </a:solidFill>
+                <a:latin typeface="Arial"/>
+              </a:rPr>
+              <a:t>identify when each commodity should be bought before prices rise</a:t>
+            </a:r>
+          </a:p>
+          <a:p>
+            <a:pPr algn="l">
+              <a:lnSpc>
+                <a:spcPct val="102000"/>
+              </a:lnSpc>
+              <a:spcBef>
+                <a:spcPts val="0"/>
+              </a:spcBef>
+              <a:spcAft>
+                <a:spcPts val="200"/>
+              </a:spcAft>
+            </a:pPr>
+            <a:r>
+              <a:rPr sz="750" b="1" i="0">
+                <a:solidFill>
+                  <a:srgbClr val="333333"/>
+                </a:solidFill>
+                <a:latin typeface="Arial"/>
+              </a:rPr>
+              <a:t>•  Surplus-region signals </a:t>
+            </a:r>
+            <a:r>
+              <a:rPr sz="750" b="0" i="0">
+                <a:solidFill>
+                  <a:srgbClr val="333333"/>
+                </a:solidFill>
+                <a:latin typeface="Arial"/>
+              </a:rPr>
+              <a:t>identify where each commodity can be sourced at lower landed cost</a:t>
+            </a:r>
+          </a:p>
+          <a:p>
+            <a:pPr algn="l">
+              <a:lnSpc>
+                <a:spcPct val="102000"/>
+              </a:lnSpc>
+              <a:spcBef>
+                <a:spcPts val="0"/>
+              </a:spcBef>
+              <a:spcAft>
+                <a:spcPts val="200"/>
+              </a:spcAft>
+            </a:pPr>
+            <a:r>
+              <a:rPr sz="750" b="1" i="0">
+                <a:solidFill>
+                  <a:srgbClr val="333333"/>
+                </a:solidFill>
+                <a:latin typeface="Arial"/>
+              </a:rPr>
+              <a:t>•  Logistics, handling &amp; storage costs </a:t>
+            </a:r>
+            <a:r>
+              <a:rPr sz="750" b="0" i="0">
+                <a:solidFill>
+                  <a:srgbClr val="333333"/>
+                </a:solidFill>
+                <a:latin typeface="Arial"/>
+              </a:rPr>
+              <a:t>are included in every sourcing recommendation</a:t>
+            </a:r>
+          </a:p>
+          <a:p>
+            <a:pPr algn="l">
+              <a:lnSpc>
+                <a:spcPct val="102000"/>
+              </a:lnSpc>
+              <a:spcBef>
+                <a:spcPts val="0"/>
+              </a:spcBef>
+              <a:spcAft>
+                <a:spcPts val="200"/>
+              </a:spcAft>
+            </a:pPr>
+            <a:r>
+              <a:rPr sz="750" b="1" i="0">
+                <a:solidFill>
+                  <a:srgbClr val="333333"/>
+                </a:solidFill>
+                <a:latin typeface="Arial"/>
+              </a:rPr>
+              <a:t>•  Quality grades &amp; shelf-life rules </a:t>
+            </a:r>
+            <a:r>
+              <a:rPr sz="750" b="0" i="0">
+                <a:solidFill>
+                  <a:srgbClr val="333333"/>
+                </a:solidFill>
+                <a:latin typeface="Arial"/>
+              </a:rPr>
+              <a:t>are locked into the final buying plan</a:t>
+            </a:r>
+          </a:p>
+        </p:txBody>
+      </p:sp>
+      <p:sp>
+        <p:nvSpPr>
+          <p:cNvPr id="18" name="Rectangle 17"/>
+          <p:cNvSpPr/>
+          <p:nvPr/>
+        </p:nvSpPr>
+        <p:spPr>
+          <a:xfrm>
+            <a:off x="365760" y="3044951"/>
+            <a:ext cx="54864" cy="182880"/>
+          </a:xfrm>
+          <a:prstGeom prst="rect">
+            <a:avLst/>
+          </a:prstGeom>
+          <a:solidFill>
+            <a:srgbClr val="1B3E6E"/>
+          </a:solidFill>
+          <a:ln>
+            <a:noFill/>
+          </a:ln>
+          <a:effectLst/>
+        </p:spPr>
+        <p:style>
+          <a:lnRef idx="1">
+            <a:schemeClr val="accent1"/>
+          </a:lnRef>
+          <a:fillRef idx="3">
+            <a:schemeClr val="accent1"/>
+          </a:fillRef>
+          <a:effectRef idx="2">
+            <a:schemeClr val="accent1"/>
+          </a:effectRef>
+          <a:fontRef idx="minor">
+            <a:schemeClr val="lt1"/>
+          </a:fontRef>
+        </p:style>
+        <p:txBody>
+          <a:bodyPr rtlCol="0" anchor="ctr"/>
+          <a:lstStyle/>
+          <a:p>
+            <a:pPr algn="ctr"/>
+          </a:p>
+        </p:txBody>
+      </p:sp>
+      <p:sp>
+        <p:nvSpPr>
+          <p:cNvPr id="19" name="TextBox 18"/>
+          <p:cNvSpPr txBox="1"/>
+          <p:nvPr/>
+        </p:nvSpPr>
+        <p:spPr>
+          <a:xfrm>
+            <a:off x="512064" y="3017520"/>
+            <a:ext cx="3986783" cy="256032"/>
+          </a:xfrm>
+          <a:prstGeom prst="rect">
+            <a:avLst/>
+          </a:prstGeom>
+          <a:noFill/>
+        </p:spPr>
+        <p:txBody>
+          <a:bodyPr wrap="square" lIns="0" rIns="0" tIns="0" bIns="0" anchor="t">
+            <a:spAutoFit/>
+          </a:bodyPr>
+          <a:lstStyle/>
+          <a:p>
+            <a:pPr algn="l">
+              <a:lnSpc>
+                <a:spcPct val="100000"/>
+              </a:lnSpc>
+              <a:spcBef>
+                <a:spcPts val="0"/>
+              </a:spcBef>
+              <a:spcAft>
+                <a:spcPts val="0"/>
+              </a:spcAft>
+            </a:pPr>
+            <a:r>
+              <a:rPr sz="1050" b="1" i="0">
+                <a:solidFill>
+                  <a:srgbClr val="1B3E6E"/>
+                </a:solidFill>
+                <a:latin typeface="Arial"/>
+              </a:rPr>
+              <a:t>The self-learning operations loop</a:t>
+            </a:r>
+          </a:p>
+        </p:txBody>
+      </p:sp>
+      <p:sp>
+        <p:nvSpPr>
+          <p:cNvPr id="20" name="Rectangle 19"/>
+          <p:cNvSpPr/>
+          <p:nvPr/>
+        </p:nvSpPr>
+        <p:spPr>
+          <a:xfrm>
+            <a:off x="365760" y="3291839"/>
+            <a:ext cx="4133087" cy="10972"/>
+          </a:xfrm>
+          <a:prstGeom prst="rect">
+            <a:avLst/>
+          </a:prstGeom>
+          <a:solidFill>
+            <a:srgbClr val="BFBFBF"/>
+          </a:solidFill>
+          <a:ln>
+            <a:noFill/>
+          </a:ln>
+          <a:effectLst/>
+        </p:spPr>
+        <p:style>
+          <a:lnRef idx="1">
+            <a:schemeClr val="accent1"/>
+          </a:lnRef>
+          <a:fillRef idx="3">
+            <a:schemeClr val="accent1"/>
+          </a:fillRef>
+          <a:effectRef idx="2">
+            <a:schemeClr val="accent1"/>
+          </a:effectRef>
+          <a:fontRef idx="minor">
+            <a:schemeClr val="lt1"/>
+          </a:fontRef>
+        </p:style>
+        <p:txBody>
+          <a:bodyPr rtlCol="0" anchor="ctr"/>
+          <a:lstStyle/>
+          <a:p>
+            <a:pPr algn="ctr"/>
+          </a:p>
+        </p:txBody>
+      </p:sp>
+      <p:sp>
+        <p:nvSpPr>
+          <p:cNvPr id="21" name="Rounded Rectangle 20"/>
+          <p:cNvSpPr/>
+          <p:nvPr/>
+        </p:nvSpPr>
+        <p:spPr>
+          <a:xfrm>
+            <a:off x="1956815" y="3621024"/>
+            <a:ext cx="950976" cy="384048"/>
+          </a:xfrm>
+          <a:prstGeom prst="roundRect">
+            <a:avLst>
+              <a:gd name="adj" fmla="val 30000"/>
+            </a:avLst>
+          </a:prstGeom>
+          <a:solidFill>
+            <a:srgbClr val="1B3E6E"/>
+          </a:solidFill>
+          <a:ln>
+            <a:noFill/>
+          </a:ln>
+          <a:effectLst/>
+        </p:spPr>
+        <p:style>
+          <a:lnRef idx="1">
+            <a:schemeClr val="accent1"/>
+          </a:lnRef>
+          <a:fillRef idx="3">
+            <a:schemeClr val="accent1"/>
+          </a:fillRef>
+          <a:effectRef idx="2">
+            <a:schemeClr val="accent1"/>
+          </a:effectRef>
+          <a:fontRef idx="minor">
+            <a:schemeClr val="lt1"/>
+          </a:fontRef>
+        </p:style>
+        <p:txBody>
+          <a:bodyPr rtlCol="0" anchor="ctr"/>
+          <a:lstStyle/>
+          <a:p>
+            <a:pPr algn="ctr"/>
+          </a:p>
+        </p:txBody>
+      </p:sp>
+      <p:sp>
+        <p:nvSpPr>
+          <p:cNvPr id="22" name="TextBox 21"/>
+          <p:cNvSpPr txBox="1"/>
+          <p:nvPr/>
+        </p:nvSpPr>
+        <p:spPr>
+          <a:xfrm>
+            <a:off x="1956815" y="3634740"/>
+            <a:ext cx="950976" cy="356616"/>
+          </a:xfrm>
+          <a:prstGeom prst="rect">
+            <a:avLst/>
+          </a:prstGeom>
+          <a:noFill/>
+        </p:spPr>
+        <p:txBody>
+          <a:bodyPr wrap="square" lIns="0" rIns="0" tIns="0" bIns="0" anchor="ctr">
+            <a:spAutoFit/>
+          </a:bodyPr>
+          <a:lstStyle/>
+          <a:p>
+            <a:pPr algn="ctr">
+              <a:lnSpc>
+                <a:spcPct val="90000"/>
+              </a:lnSpc>
+              <a:spcBef>
+                <a:spcPts val="0"/>
+              </a:spcBef>
+              <a:spcAft>
+                <a:spcPts val="0"/>
+              </a:spcAft>
+            </a:pPr>
+            <a:r>
+              <a:rPr sz="720" b="1" i="0">
+                <a:solidFill>
+                  <a:srgbClr val="FFFFFF"/>
+                </a:solidFill>
+                <a:latin typeface="Arial"/>
+              </a:rPr>
+              <a:t>INGEST</a:t>
+            </a:r>
+          </a:p>
+        </p:txBody>
+      </p:sp>
+      <p:sp>
+        <p:nvSpPr>
+          <p:cNvPr id="23" name="Rounded Rectangle 22"/>
+          <p:cNvSpPr/>
+          <p:nvPr/>
+        </p:nvSpPr>
+        <p:spPr>
+          <a:xfrm>
+            <a:off x="2782979" y="4221267"/>
+            <a:ext cx="950976" cy="384048"/>
+          </a:xfrm>
+          <a:prstGeom prst="roundRect">
+            <a:avLst>
+              <a:gd name="adj" fmla="val 30000"/>
+            </a:avLst>
+          </a:prstGeom>
+          <a:solidFill>
+            <a:srgbClr val="3B6EA5"/>
+          </a:solidFill>
+          <a:ln>
+            <a:noFill/>
+          </a:ln>
+          <a:effectLst/>
+        </p:spPr>
+        <p:style>
+          <a:lnRef idx="1">
+            <a:schemeClr val="accent1"/>
+          </a:lnRef>
+          <a:fillRef idx="3">
+            <a:schemeClr val="accent1"/>
+          </a:fillRef>
+          <a:effectRef idx="2">
+            <a:schemeClr val="accent1"/>
+          </a:effectRef>
+          <a:fontRef idx="minor">
+            <a:schemeClr val="lt1"/>
+          </a:fontRef>
+        </p:style>
+        <p:txBody>
+          <a:bodyPr rtlCol="0" anchor="ctr"/>
+          <a:lstStyle/>
+          <a:p>
+            <a:pPr algn="ctr"/>
+          </a:p>
+        </p:txBody>
+      </p:sp>
+      <p:sp>
+        <p:nvSpPr>
+          <p:cNvPr id="24" name="TextBox 23"/>
+          <p:cNvSpPr txBox="1"/>
+          <p:nvPr/>
+        </p:nvSpPr>
+        <p:spPr>
+          <a:xfrm>
+            <a:off x="2782979" y="4234983"/>
+            <a:ext cx="950976" cy="356616"/>
+          </a:xfrm>
+          <a:prstGeom prst="rect">
+            <a:avLst/>
+          </a:prstGeom>
+          <a:noFill/>
+        </p:spPr>
+        <p:txBody>
+          <a:bodyPr wrap="square" lIns="0" rIns="0" tIns="0" bIns="0" anchor="ctr">
+            <a:spAutoFit/>
+          </a:bodyPr>
+          <a:lstStyle/>
+          <a:p>
+            <a:pPr algn="ctr">
+              <a:lnSpc>
+                <a:spcPct val="90000"/>
+              </a:lnSpc>
+              <a:spcBef>
+                <a:spcPts val="0"/>
+              </a:spcBef>
+              <a:spcAft>
+                <a:spcPts val="0"/>
+              </a:spcAft>
+            </a:pPr>
+            <a:r>
+              <a:rPr sz="720" b="1" i="0">
+                <a:solidFill>
+                  <a:srgbClr val="FFFFFF"/>
+                </a:solidFill>
+                <a:latin typeface="Arial"/>
+              </a:rPr>
+              <a:t>FORECAST</a:t>
+            </a:r>
+          </a:p>
+        </p:txBody>
+      </p:sp>
+      <p:sp>
+        <p:nvSpPr>
+          <p:cNvPr id="25" name="Rounded Rectangle 24"/>
+          <p:cNvSpPr/>
+          <p:nvPr/>
+        </p:nvSpPr>
+        <p:spPr>
+          <a:xfrm>
+            <a:off x="2467413" y="5192480"/>
+            <a:ext cx="950976" cy="384048"/>
+          </a:xfrm>
+          <a:prstGeom prst="roundRect">
+            <a:avLst>
+              <a:gd name="adj" fmla="val 30000"/>
+            </a:avLst>
+          </a:prstGeom>
+          <a:solidFill>
+            <a:srgbClr val="398025"/>
+          </a:solidFill>
+          <a:ln>
+            <a:noFill/>
+          </a:ln>
+          <a:effectLst/>
+        </p:spPr>
+        <p:style>
+          <a:lnRef idx="1">
+            <a:schemeClr val="accent1"/>
+          </a:lnRef>
+          <a:fillRef idx="3">
+            <a:schemeClr val="accent1"/>
+          </a:fillRef>
+          <a:effectRef idx="2">
+            <a:schemeClr val="accent1"/>
+          </a:effectRef>
+          <a:fontRef idx="minor">
+            <a:schemeClr val="lt1"/>
+          </a:fontRef>
+        </p:style>
+        <p:txBody>
+          <a:bodyPr rtlCol="0" anchor="ctr"/>
+          <a:lstStyle/>
+          <a:p>
+            <a:pPr algn="ctr"/>
+          </a:p>
+        </p:txBody>
+      </p:sp>
+      <p:sp>
+        <p:nvSpPr>
+          <p:cNvPr id="26" name="TextBox 25"/>
+          <p:cNvSpPr txBox="1"/>
+          <p:nvPr/>
+        </p:nvSpPr>
+        <p:spPr>
+          <a:xfrm>
+            <a:off x="2467413" y="5206196"/>
+            <a:ext cx="950976" cy="356616"/>
+          </a:xfrm>
+          <a:prstGeom prst="rect">
+            <a:avLst/>
+          </a:prstGeom>
+          <a:noFill/>
+        </p:spPr>
+        <p:txBody>
+          <a:bodyPr wrap="square" lIns="0" rIns="0" tIns="0" bIns="0" anchor="ctr">
+            <a:spAutoFit/>
+          </a:bodyPr>
+          <a:lstStyle/>
+          <a:p>
+            <a:pPr algn="ctr">
+              <a:lnSpc>
+                <a:spcPct val="90000"/>
+              </a:lnSpc>
+              <a:spcBef>
+                <a:spcPts val="0"/>
+              </a:spcBef>
+              <a:spcAft>
+                <a:spcPts val="0"/>
+              </a:spcAft>
+            </a:pPr>
+            <a:r>
+              <a:rPr sz="720" b="1" i="0">
+                <a:solidFill>
+                  <a:srgbClr val="FFFFFF"/>
+                </a:solidFill>
+                <a:latin typeface="Arial"/>
+              </a:rPr>
+              <a:t>OPTIMIZE</a:t>
+            </a:r>
+          </a:p>
+        </p:txBody>
+      </p:sp>
+      <p:sp>
+        <p:nvSpPr>
+          <p:cNvPr id="27" name="Rounded Rectangle 26"/>
+          <p:cNvSpPr/>
+          <p:nvPr/>
+        </p:nvSpPr>
+        <p:spPr>
+          <a:xfrm>
+            <a:off x="1446218" y="5192480"/>
+            <a:ext cx="950976" cy="384048"/>
+          </a:xfrm>
+          <a:prstGeom prst="roundRect">
+            <a:avLst>
+              <a:gd name="adj" fmla="val 30000"/>
+            </a:avLst>
+          </a:prstGeom>
+          <a:solidFill>
+            <a:srgbClr val="E08A1E"/>
+          </a:solidFill>
+          <a:ln>
+            <a:noFill/>
+          </a:ln>
+          <a:effectLst/>
+        </p:spPr>
+        <p:style>
+          <a:lnRef idx="1">
+            <a:schemeClr val="accent1"/>
+          </a:lnRef>
+          <a:fillRef idx="3">
+            <a:schemeClr val="accent1"/>
+          </a:fillRef>
+          <a:effectRef idx="2">
+            <a:schemeClr val="accent1"/>
+          </a:effectRef>
+          <a:fontRef idx="minor">
+            <a:schemeClr val="lt1"/>
+          </a:fontRef>
+        </p:style>
+        <p:txBody>
+          <a:bodyPr rtlCol="0" anchor="ctr"/>
+          <a:lstStyle/>
+          <a:p>
+            <a:pPr algn="ctr"/>
+          </a:p>
+        </p:txBody>
+      </p:sp>
+      <p:sp>
+        <p:nvSpPr>
+          <p:cNvPr id="28" name="TextBox 27"/>
+          <p:cNvSpPr txBox="1"/>
+          <p:nvPr/>
+        </p:nvSpPr>
+        <p:spPr>
+          <a:xfrm>
+            <a:off x="1446218" y="5206196"/>
+            <a:ext cx="950976" cy="356616"/>
+          </a:xfrm>
+          <a:prstGeom prst="rect">
+            <a:avLst/>
+          </a:prstGeom>
+          <a:noFill/>
+        </p:spPr>
+        <p:txBody>
+          <a:bodyPr wrap="square" lIns="0" rIns="0" tIns="0" bIns="0" anchor="ctr">
+            <a:spAutoFit/>
+          </a:bodyPr>
+          <a:lstStyle/>
+          <a:p>
+            <a:pPr algn="ctr">
+              <a:lnSpc>
+                <a:spcPct val="90000"/>
+              </a:lnSpc>
+              <a:spcBef>
+                <a:spcPts val="0"/>
+              </a:spcBef>
+              <a:spcAft>
+                <a:spcPts val="0"/>
+              </a:spcAft>
+            </a:pPr>
+            <a:r>
+              <a:rPr sz="720" b="1" i="0">
+                <a:solidFill>
+                  <a:srgbClr val="FFFFFF"/>
+                </a:solidFill>
+                <a:latin typeface="Arial"/>
+              </a:rPr>
+              <a:t>RECOMMEND</a:t>
+            </a:r>
+          </a:p>
+        </p:txBody>
+      </p:sp>
+      <p:sp>
+        <p:nvSpPr>
+          <p:cNvPr id="29" name="Rounded Rectangle 28"/>
+          <p:cNvSpPr/>
+          <p:nvPr/>
+        </p:nvSpPr>
+        <p:spPr>
+          <a:xfrm>
+            <a:off x="1130652" y="4221267"/>
+            <a:ext cx="950976" cy="384048"/>
+          </a:xfrm>
+          <a:prstGeom prst="roundRect">
+            <a:avLst>
+              <a:gd name="adj" fmla="val 30000"/>
+            </a:avLst>
+          </a:prstGeom>
+          <a:solidFill>
+            <a:srgbClr val="A6428C"/>
+          </a:solidFill>
+          <a:ln>
+            <a:noFill/>
+          </a:ln>
+          <a:effectLst/>
+        </p:spPr>
+        <p:style>
+          <a:lnRef idx="1">
+            <a:schemeClr val="accent1"/>
+          </a:lnRef>
+          <a:fillRef idx="3">
+            <a:schemeClr val="accent1"/>
+          </a:fillRef>
+          <a:effectRef idx="2">
+            <a:schemeClr val="accent1"/>
+          </a:effectRef>
+          <a:fontRef idx="minor">
+            <a:schemeClr val="lt1"/>
+          </a:fontRef>
+        </p:style>
+        <p:txBody>
+          <a:bodyPr rtlCol="0" anchor="ctr"/>
+          <a:lstStyle/>
+          <a:p>
+            <a:pPr algn="ctr"/>
+          </a:p>
+        </p:txBody>
+      </p:sp>
+      <p:sp>
+        <p:nvSpPr>
+          <p:cNvPr id="30" name="TextBox 29"/>
+          <p:cNvSpPr txBox="1"/>
+          <p:nvPr/>
+        </p:nvSpPr>
+        <p:spPr>
+          <a:xfrm>
+            <a:off x="1130652" y="4234983"/>
+            <a:ext cx="950976" cy="356616"/>
+          </a:xfrm>
+          <a:prstGeom prst="rect">
+            <a:avLst/>
+          </a:prstGeom>
+          <a:noFill/>
+        </p:spPr>
+        <p:txBody>
+          <a:bodyPr wrap="square" lIns="0" rIns="0" tIns="0" bIns="0" anchor="ctr">
+            <a:spAutoFit/>
+          </a:bodyPr>
+          <a:lstStyle/>
+          <a:p>
+            <a:pPr algn="ctr">
+              <a:lnSpc>
+                <a:spcPct val="90000"/>
+              </a:lnSpc>
+              <a:spcBef>
+                <a:spcPts val="0"/>
+              </a:spcBef>
+              <a:spcAft>
+                <a:spcPts val="0"/>
+              </a:spcAft>
+            </a:pPr>
+            <a:r>
+              <a:rPr sz="720" b="1" i="0">
+                <a:solidFill>
+                  <a:srgbClr val="FFFFFF"/>
+                </a:solidFill>
+                <a:latin typeface="Arial"/>
+              </a:rPr>
+              <a:t>LEARN</a:t>
+            </a:r>
+          </a:p>
+        </p:txBody>
+      </p:sp>
+      <p:cxnSp>
+        <p:nvCxnSpPr>
+          <p:cNvPr id="31" name="Connector 30"/>
+          <p:cNvCxnSpPr/>
+          <p:nvPr/>
+        </p:nvCxnSpPr>
+        <p:spPr>
+          <a:xfrm>
+            <a:off x="2750423" y="3931149"/>
+            <a:ext cx="297419" cy="216087"/>
+          </a:xfrm>
+          <a:prstGeom prst="curvedConnector3">
+            <a:avLst/>
+          </a:prstGeom>
+          <a:ln w="12700">
+            <a:solidFill>
+              <a:srgbClr val="727375"/>
+            </a:solidFill>
+            <a:prstDash val="sysDash"/>
+            <a:tailEnd type="triangle" w="med" len="med"/>
+          </a:ln>
+          <a:effectLst/>
+        </p:spPr>
+        <p:style>
+          <a:lnRef idx="2">
+            <a:schemeClr val="accent1"/>
+          </a:lnRef>
+          <a:fillRef idx="0">
+            <a:schemeClr val="accent1"/>
+          </a:fillRef>
+          <a:effectRef idx="1">
+            <a:schemeClr val="accent1"/>
+          </a:effectRef>
+          <a:fontRef idx="minor">
+            <a:schemeClr val="tx1"/>
+          </a:fontRef>
+        </p:style>
+      </p:cxnSp>
+      <p:cxnSp>
+        <p:nvCxnSpPr>
+          <p:cNvPr id="32" name="Connector 31"/>
+          <p:cNvCxnSpPr/>
+          <p:nvPr/>
+        </p:nvCxnSpPr>
+        <p:spPr>
+          <a:xfrm flipH="1">
+            <a:off x="3130847" y="4752336"/>
+            <a:ext cx="113604" cy="349636"/>
+          </a:xfrm>
+          <a:prstGeom prst="curvedConnector3">
+            <a:avLst/>
+          </a:prstGeom>
+          <a:ln w="12700">
+            <a:solidFill>
+              <a:srgbClr val="727375"/>
+            </a:solidFill>
+            <a:prstDash val="sysDash"/>
+            <a:tailEnd type="triangle" w="med" len="med"/>
+          </a:ln>
+          <a:effectLst/>
+        </p:spPr>
+        <p:style>
+          <a:lnRef idx="2">
+            <a:schemeClr val="accent1"/>
+          </a:lnRef>
+          <a:fillRef idx="0">
+            <a:schemeClr val="accent1"/>
+          </a:fillRef>
+          <a:effectRef idx="1">
+            <a:schemeClr val="accent1"/>
+          </a:effectRef>
+          <a:fontRef idx="minor">
+            <a:schemeClr val="tx1"/>
+          </a:fontRef>
+        </p:style>
+      </p:cxnSp>
+      <p:cxnSp>
+        <p:nvCxnSpPr>
+          <p:cNvPr id="33" name="Connector 32"/>
+          <p:cNvCxnSpPr/>
+          <p:nvPr/>
+        </p:nvCxnSpPr>
+        <p:spPr>
+          <a:xfrm flipH="1">
+            <a:off x="2248488" y="5475944"/>
+            <a:ext cx="367631" cy="0"/>
+          </a:xfrm>
+          <a:prstGeom prst="curvedConnector3">
+            <a:avLst/>
+          </a:prstGeom>
+          <a:ln w="12700">
+            <a:solidFill>
+              <a:srgbClr val="727375"/>
+            </a:solidFill>
+            <a:prstDash val="sysDash"/>
+            <a:tailEnd type="triangle" w="med" len="med"/>
+          </a:ln>
+          <a:effectLst/>
+        </p:spPr>
+        <p:style>
+          <a:lnRef idx="2">
+            <a:schemeClr val="accent1"/>
+          </a:lnRef>
+          <a:fillRef idx="0">
+            <a:schemeClr val="accent1"/>
+          </a:fillRef>
+          <a:effectRef idx="1">
+            <a:schemeClr val="accent1"/>
+          </a:effectRef>
+          <a:fontRef idx="minor">
+            <a:schemeClr val="tx1"/>
+          </a:fontRef>
+        </p:style>
+      </p:cxnSp>
+      <p:cxnSp>
+        <p:nvCxnSpPr>
+          <p:cNvPr id="34" name="Connector 33"/>
+          <p:cNvCxnSpPr/>
+          <p:nvPr/>
+        </p:nvCxnSpPr>
+        <p:spPr>
+          <a:xfrm flipH="1" flipV="1">
+            <a:off x="1620156" y="4752336"/>
+            <a:ext cx="113604" cy="349636"/>
+          </a:xfrm>
+          <a:prstGeom prst="curvedConnector3">
+            <a:avLst/>
+          </a:prstGeom>
+          <a:ln w="12700">
+            <a:solidFill>
+              <a:srgbClr val="727375"/>
+            </a:solidFill>
+            <a:prstDash val="sysDash"/>
+            <a:tailEnd type="triangle" w="med" len="med"/>
+          </a:ln>
+          <a:effectLst/>
+        </p:spPr>
+        <p:style>
+          <a:lnRef idx="2">
+            <a:schemeClr val="accent1"/>
+          </a:lnRef>
+          <a:fillRef idx="0">
+            <a:schemeClr val="accent1"/>
+          </a:fillRef>
+          <a:effectRef idx="1">
+            <a:schemeClr val="accent1"/>
+          </a:effectRef>
+          <a:fontRef idx="minor">
+            <a:schemeClr val="tx1"/>
+          </a:fontRef>
+        </p:style>
+      </p:cxnSp>
+      <p:cxnSp>
+        <p:nvCxnSpPr>
+          <p:cNvPr id="35" name="Connector 34"/>
+          <p:cNvCxnSpPr/>
+          <p:nvPr/>
+        </p:nvCxnSpPr>
+        <p:spPr>
+          <a:xfrm flipV="1">
+            <a:off x="1816765" y="3931149"/>
+            <a:ext cx="297419" cy="216087"/>
+          </a:xfrm>
+          <a:prstGeom prst="curvedConnector3">
+            <a:avLst/>
+          </a:prstGeom>
+          <a:ln w="12700">
+            <a:solidFill>
+              <a:srgbClr val="727375"/>
+            </a:solidFill>
+            <a:prstDash val="sysDash"/>
+            <a:tailEnd type="triangle" w="med" len="med"/>
+          </a:ln>
+          <a:effectLst/>
+        </p:spPr>
+        <p:style>
+          <a:lnRef idx="2">
+            <a:schemeClr val="accent1"/>
+          </a:lnRef>
+          <a:fillRef idx="0">
+            <a:schemeClr val="accent1"/>
+          </a:fillRef>
+          <a:effectRef idx="1">
+            <a:schemeClr val="accent1"/>
+          </a:effectRef>
+          <a:fontRef idx="minor">
+            <a:schemeClr val="tx1"/>
+          </a:fontRef>
+        </p:style>
+      </p:cxnSp>
+      <p:sp>
+        <p:nvSpPr>
+          <p:cNvPr id="36" name="TextBox 35"/>
+          <p:cNvSpPr txBox="1"/>
+          <p:nvPr/>
+        </p:nvSpPr>
+        <p:spPr>
+          <a:xfrm>
+            <a:off x="1746503" y="4480560"/>
+            <a:ext cx="1371600" cy="402336"/>
+          </a:xfrm>
+          <a:prstGeom prst="rect">
+            <a:avLst/>
+          </a:prstGeom>
+          <a:noFill/>
+        </p:spPr>
+        <p:txBody>
+          <a:bodyPr wrap="square" lIns="0" rIns="0" tIns="0" bIns="0" anchor="ctr">
+            <a:spAutoFit/>
+          </a:bodyPr>
+          <a:lstStyle/>
+          <a:p>
+            <a:pPr algn="ctr">
+              <a:lnSpc>
+                <a:spcPct val="95000"/>
+              </a:lnSpc>
+              <a:spcBef>
+                <a:spcPts val="0"/>
+              </a:spcBef>
+              <a:spcAft>
+                <a:spcPts val="0"/>
+              </a:spcAft>
+            </a:pPr>
+            <a:r>
+              <a:rPr sz="750" b="1" i="0">
+                <a:solidFill>
+                  <a:srgbClr val="1B3E6E"/>
+                </a:solidFill>
+                <a:latin typeface="Arial"/>
+              </a:rPr>
+              <a:t>SELF-LEARNING
+OPS LOOP</a:t>
+            </a:r>
+          </a:p>
+        </p:txBody>
+      </p:sp>
+      <p:sp>
+        <p:nvSpPr>
+          <p:cNvPr id="37" name="Rectangle 36"/>
+          <p:cNvSpPr/>
+          <p:nvPr/>
+        </p:nvSpPr>
+        <p:spPr>
+          <a:xfrm>
+            <a:off x="4645152" y="3044951"/>
+            <a:ext cx="54864" cy="182880"/>
+          </a:xfrm>
+          <a:prstGeom prst="rect">
+            <a:avLst/>
+          </a:prstGeom>
+          <a:solidFill>
+            <a:srgbClr val="398025"/>
+          </a:solidFill>
+          <a:ln>
+            <a:noFill/>
+          </a:ln>
+          <a:effectLst/>
+        </p:spPr>
+        <p:style>
+          <a:lnRef idx="1">
+            <a:schemeClr val="accent1"/>
+          </a:lnRef>
+          <a:fillRef idx="3">
+            <a:schemeClr val="accent1"/>
+          </a:fillRef>
+          <a:effectRef idx="2">
+            <a:schemeClr val="accent1"/>
+          </a:effectRef>
+          <a:fontRef idx="minor">
+            <a:schemeClr val="lt1"/>
+          </a:fontRef>
+        </p:style>
+        <p:txBody>
+          <a:bodyPr rtlCol="0" anchor="ctr"/>
+          <a:lstStyle/>
+          <a:p>
+            <a:pPr algn="ctr"/>
+          </a:p>
+        </p:txBody>
+      </p:sp>
+      <p:sp>
+        <p:nvSpPr>
+          <p:cNvPr id="38" name="TextBox 37"/>
+          <p:cNvSpPr txBox="1"/>
+          <p:nvPr/>
+        </p:nvSpPr>
+        <p:spPr>
+          <a:xfrm>
+            <a:off x="4791456" y="3017520"/>
+            <a:ext cx="3986783" cy="256032"/>
+          </a:xfrm>
+          <a:prstGeom prst="rect">
+            <a:avLst/>
+          </a:prstGeom>
+          <a:noFill/>
+        </p:spPr>
+        <p:txBody>
+          <a:bodyPr wrap="square" lIns="0" rIns="0" tIns="0" bIns="0" anchor="t">
+            <a:spAutoFit/>
+          </a:bodyPr>
+          <a:lstStyle/>
+          <a:p>
+            <a:pPr algn="l">
+              <a:lnSpc>
+                <a:spcPct val="100000"/>
+              </a:lnSpc>
+              <a:spcBef>
+                <a:spcPts val="0"/>
+              </a:spcBef>
+              <a:spcAft>
+                <a:spcPts val="0"/>
+              </a:spcAft>
+            </a:pPr>
+            <a:r>
+              <a:rPr sz="950" b="1" i="0">
+                <a:solidFill>
+                  <a:srgbClr val="1B3E6E"/>
+                </a:solidFill>
+                <a:latin typeface="Arial"/>
+              </a:rPr>
+              <a:t>Rice procurement cost — with vs. without GS funding ($M)</a:t>
+            </a:r>
+          </a:p>
+        </p:txBody>
+      </p:sp>
+      <p:sp>
+        <p:nvSpPr>
+          <p:cNvPr id="39" name="Rectangle 38"/>
+          <p:cNvSpPr/>
+          <p:nvPr/>
+        </p:nvSpPr>
+        <p:spPr>
+          <a:xfrm>
+            <a:off x="4645152" y="3291839"/>
+            <a:ext cx="4133087" cy="10972"/>
+          </a:xfrm>
+          <a:prstGeom prst="rect">
+            <a:avLst/>
+          </a:prstGeom>
+          <a:solidFill>
+            <a:srgbClr val="BFBFBF"/>
+          </a:solidFill>
+          <a:ln>
+            <a:noFill/>
+          </a:ln>
+          <a:effectLst/>
+        </p:spPr>
+        <p:style>
+          <a:lnRef idx="1">
+            <a:schemeClr val="accent1"/>
+          </a:lnRef>
+          <a:fillRef idx="3">
+            <a:schemeClr val="accent1"/>
+          </a:fillRef>
+          <a:effectRef idx="2">
+            <a:schemeClr val="accent1"/>
+          </a:effectRef>
+          <a:fontRef idx="minor">
+            <a:schemeClr val="lt1"/>
+          </a:fontRef>
+        </p:style>
+        <p:txBody>
+          <a:bodyPr rtlCol="0" anchor="ctr"/>
+          <a:lstStyle/>
+          <a:p>
+            <a:pPr algn="ctr"/>
+          </a:p>
+        </p:txBody>
+      </p:sp>
+      <p:graphicFrame>
+        <p:nvGraphicFramePr>
+          <p:cNvPr id="40" name="Chart 39"/>
+          <p:cNvGraphicFramePr>
+            <a:graphicFrameLocks noGrp="1"/>
+          </p:cNvGraphicFramePr>
+          <p:nvPr/>
+        </p:nvGraphicFramePr>
+        <p:xfrm>
+          <a:off x="4645152" y="3364991"/>
+          <a:ext cx="4133087" cy="1783080"/>
+        </p:xfrm>
+        <a:graphic>
+          <a:graphicData uri="http://schemas.openxmlformats.org/drawingml/2006/chart">
+            <c:chart xmlns:c="http://schemas.openxmlformats.org/drawingml/2006/chart" r:id="rId2"/>
+          </a:graphicData>
+        </a:graphic>
+      </p:graphicFrame>
+      <p:sp>
+        <p:nvSpPr>
+          <p:cNvPr id="41" name="Rounded Rectangle 40"/>
+          <p:cNvSpPr/>
+          <p:nvPr/>
+        </p:nvSpPr>
+        <p:spPr>
+          <a:xfrm>
+            <a:off x="4645152" y="5212079"/>
+            <a:ext cx="4133087" cy="621792"/>
+          </a:xfrm>
+          <a:prstGeom prst="roundRect">
+            <a:avLst>
+              <a:gd name="adj" fmla="val 10000"/>
+            </a:avLst>
+          </a:prstGeom>
+          <a:solidFill>
+            <a:srgbClr val="398025"/>
+          </a:solidFill>
+          <a:ln>
+            <a:noFill/>
+          </a:ln>
+          <a:effectLst/>
+        </p:spPr>
+        <p:style>
+          <a:lnRef idx="1">
+            <a:schemeClr val="accent1"/>
+          </a:lnRef>
+          <a:fillRef idx="3">
+            <a:schemeClr val="accent1"/>
+          </a:fillRef>
+          <a:effectRef idx="2">
+            <a:schemeClr val="accent1"/>
+          </a:effectRef>
+          <a:fontRef idx="minor">
+            <a:schemeClr val="lt1"/>
+          </a:fontRef>
+        </p:style>
+        <p:txBody>
+          <a:bodyPr rtlCol="0" anchor="ctr"/>
+          <a:lstStyle/>
+          <a:p>
+            <a:pPr algn="ctr"/>
+          </a:p>
+        </p:txBody>
+      </p:sp>
+      <p:sp>
+        <p:nvSpPr>
+          <p:cNvPr id="42" name="TextBox 41"/>
+          <p:cNvSpPr txBox="1"/>
+          <p:nvPr/>
+        </p:nvSpPr>
+        <p:spPr>
+          <a:xfrm>
+            <a:off x="4736592" y="5248655"/>
+            <a:ext cx="3950207" cy="548640"/>
+          </a:xfrm>
+          <a:prstGeom prst="rect">
+            <a:avLst/>
+          </a:prstGeom>
+          <a:noFill/>
+        </p:spPr>
+        <p:txBody>
+          <a:bodyPr wrap="square" lIns="0" rIns="0" tIns="0" bIns="0" anchor="ctr">
+            <a:spAutoFit/>
+          </a:bodyPr>
+          <a:lstStyle/>
+          <a:p>
+            <a:pPr algn="ctr">
+              <a:lnSpc>
+                <a:spcPct val="100000"/>
+              </a:lnSpc>
+              <a:spcBef>
+                <a:spcPts val="0"/>
+              </a:spcBef>
+              <a:spcAft>
+                <a:spcPts val="100"/>
+              </a:spcAft>
+            </a:pPr>
+            <a:r>
+              <a:rPr sz="700" b="1" i="0">
+                <a:solidFill>
+                  <a:srgbClr val="FFFFFF"/>
+                </a:solidFill>
+                <a:latin typeface="Arial"/>
+              </a:rPr>
+              <a:t>CUMULATIVE 2026–29 IMPACT</a:t>
+            </a:r>
+          </a:p>
+          <a:p>
+            <a:pPr algn="ctr">
+              <a:lnSpc>
+                <a:spcPct val="100000"/>
+              </a:lnSpc>
+              <a:spcBef>
+                <a:spcPts val="0"/>
+              </a:spcBef>
+              <a:spcAft>
+                <a:spcPts val="100"/>
+              </a:spcAft>
+            </a:pPr>
+            <a:r>
+              <a:rPr sz="1150" b="1" i="0">
+                <a:solidFill>
+                  <a:srgbClr val="FFFFFF"/>
+                </a:solidFill>
+                <a:latin typeface="Arial"/>
+              </a:rPr>
+              <a:t>~$10.1M saved  |  21.6% reduction</a:t>
+            </a:r>
+          </a:p>
+          <a:p>
+            <a:pPr algn="ctr">
+              <a:lnSpc>
+                <a:spcPct val="100000"/>
+              </a:lnSpc>
+              <a:spcBef>
+                <a:spcPts val="0"/>
+              </a:spcBef>
+              <a:spcAft>
+                <a:spcPts val="0"/>
+              </a:spcAft>
+            </a:pPr>
+            <a:r>
+              <a:rPr sz="700" b="0" i="1">
+                <a:solidFill>
+                  <a:srgbClr val="FFFFFF"/>
+                </a:solidFill>
+                <a:latin typeface="Arial"/>
+              </a:rPr>
+              <a:t>freed capital feeds more children</a:t>
             </a:r>
           </a:p>
         </p:txBody>

--- a/AkshayaPatra_GS_Pitch.pptx
+++ b/AkshayaPatra_GS_Pitch.pptx
@@ -11,6 +11,10 @@
     <p:sldId id="259" r:id="rId10"/>
     <p:sldId id="260" r:id="rId11"/>
     <p:sldId id="261" r:id="rId12"/>
+    <p:sldId id="262" r:id="rId13"/>
+    <p:sldId id="263" r:id="rId14"/>
+    <p:sldId id="264" r:id="rId15"/>
+    <p:sldId id="265" r:id="rId16"/>
   </p:sldIdLst>
   <p:sldSz cx="9144000" cy="6858000" type="screen4x3"/>
   <p:notesSz cx="6858000" cy="9144000"/>
@@ -992,6 +996,551 @@
     <a:p>
       <a:pPr>
         <a:defRPr sz="680">
+          <a:solidFill>
+            <a:srgbClr val="333333"/>
+          </a:solidFill>
+          <a:latin typeface="Arial"/>
+        </a:defRPr>
+      </a:pPr>
+      <a:endParaRPr lang="en-US"/>
+    </a:p>
+  </c:txPr>
+  <c:externalData r:id="rId1">
+    <c:autoUpdate val="0"/>
+  </c:externalData>
+</c:chartSpace>
+</file>
+
+<file path=ppt/charts/chart6.xml><?xml version="1.0" encoding="utf-8"?>
+<c:chartSpace xmlns:c="http://schemas.openxmlformats.org/drawingml/2006/chart" xmlns:a="http://schemas.openxmlformats.org/drawingml/2006/main" xmlns:r="http://schemas.openxmlformats.org/officeDocument/2006/relationships">
+  <c:date1904 val="0"/>
+  <c:chart>
+    <c:autoTitleDeleted val="1"/>
+    <c:plotArea>
+      <c:lineChart>
+        <c:grouping val="standard"/>
+        <c:varyColors val="0"/>
+        <c:ser>
+          <c:idx val="0"/>
+          <c:order val="0"/>
+          <c:tx>
+            <c:strRef>
+              <c:f>Sheet1!$B$1</c:f>
+              <c:strCache>
+                <c:ptCount val="1"/>
+                <c:pt idx="0">
+                  <c:v>Meals/day (M)</c:v>
+                </c:pt>
+              </c:strCache>
+            </c:strRef>
+          </c:tx>
+          <c:spPr>
+            <a:ln w="28575">
+              <a:solidFill>
+                <a:srgbClr val="1B3E6E"/>
+              </a:solidFill>
+            </a:ln>
+          </c:spPr>
+          <c:cat>
+            <c:strRef>
+              <c:f>Sheet1!$A$2:$A$8</c:f>
+              <c:strCache>
+                <c:ptCount val="7"/>
+                <c:pt idx="0">
+                  <c:v>2000</c:v>
+                </c:pt>
+                <c:pt idx="1">
+                  <c:v>2005</c:v>
+                </c:pt>
+                <c:pt idx="2">
+                  <c:v>2010</c:v>
+                </c:pt>
+                <c:pt idx="3">
+                  <c:v>2015</c:v>
+                </c:pt>
+                <c:pt idx="4">
+                  <c:v>2020</c:v>
+                </c:pt>
+                <c:pt idx="5">
+                  <c:v>2023</c:v>
+                </c:pt>
+                <c:pt idx="6">
+                  <c:v>2026</c:v>
+                </c:pt>
+              </c:strCache>
+            </c:strRef>
+          </c:cat>
+          <c:val>
+            <c:numRef>
+              <c:f>Sheet1!$B$2:$B$8</c:f>
+              <c:numCache>
+                <c:formatCode>General</c:formatCode>
+                <c:ptCount val="7"/>
+                <c:pt idx="0">
+                  <c:v>0.0015</c:v>
+                </c:pt>
+                <c:pt idx="1">
+                  <c:v>0.33</c:v>
+                </c:pt>
+                <c:pt idx="2">
+                  <c:v>1.2</c:v>
+                </c:pt>
+                <c:pt idx="3">
+                  <c:v>1.44</c:v>
+                </c:pt>
+                <c:pt idx="4">
+                  <c:v>1.8</c:v>
+                </c:pt>
+                <c:pt idx="5">
+                  <c:v>2.0</c:v>
+                </c:pt>
+                <c:pt idx="6">
+                  <c:v>2.35</c:v>
+                </c:pt>
+              </c:numCache>
+            </c:numRef>
+          </c:val>
+          <c:smooth/>
+        </c:ser>
+        <c:marker val="1"/>
+        <c:smooth val="0"/>
+        <c:axId val="2118791784"/>
+        <c:axId val="2140495176"/>
+      </c:lineChart>
+      <c:catAx>
+        <c:axId val="2118791784"/>
+        <c:scaling>
+          <c:orientation val="minMax"/>
+        </c:scaling>
+        <c:delete val="0"/>
+        <c:axPos val="b"/>
+        <c:majorTickMark val="out"/>
+        <c:minorTickMark val="none"/>
+        <c:tickLblPos val="nextTo"/>
+        <c:spPr>
+          <a:ln>
+            <a:solidFill>
+              <a:srgbClr val="BFBFBF"/>
+            </a:solidFill>
+          </a:ln>
+        </c:spPr>
+        <c:txPr>
+          <a:bodyPr/>
+          <a:lstStyle/>
+          <a:p>
+            <a:pPr>
+              <a:defRPr sz="750"/>
+            </a:pPr>
+          </a:p>
+        </c:txPr>
+        <c:crossAx val="2140495176"/>
+        <c:crosses val="autoZero"/>
+        <c:auto val="1"/>
+        <c:lblAlgn val="ctr"/>
+        <c:lblOffset val="100"/>
+        <c:noMultiLvlLbl val="0"/>
+      </c:catAx>
+      <c:valAx>
+        <c:axId val="2140495176"/>
+        <c:scaling/>
+        <c:delete val="0"/>
+        <c:axPos val="l"/>
+        <c:majorGridlines>
+          <c:spPr>
+            <a:ln w="6350">
+              <a:solidFill>
+                <a:srgbClr val="E8E8E8"/>
+              </a:solidFill>
+            </a:ln>
+          </c:spPr>
+        </c:majorGridlines>
+        <c:majorTickMark val="out"/>
+        <c:minorTickMark val="none"/>
+        <c:tickLblPos val="nextTo"/>
+        <c:txPr>
+          <a:bodyPr/>
+          <a:lstStyle/>
+          <a:p>
+            <a:pPr>
+              <a:defRPr sz="750"/>
+            </a:pPr>
+          </a:p>
+        </c:txPr>
+        <c:crossAx val="2118791784"/>
+        <c:crosses val="autoZero"/>
+      </c:valAx>
+    </c:plotArea>
+    <c:plotVisOnly val="1"/>
+    <c:dispBlanksAs val="gap"/>
+    <c:showDLblsOverMax val="0"/>
+  </c:chart>
+  <c:txPr>
+    <a:bodyPr/>
+    <a:lstStyle/>
+    <a:p>
+      <a:pPr>
+        <a:defRPr sz="700">
+          <a:solidFill>
+            <a:srgbClr val="333333"/>
+          </a:solidFill>
+          <a:latin typeface="Arial"/>
+        </a:defRPr>
+      </a:pPr>
+      <a:endParaRPr lang="en-US"/>
+    </a:p>
+  </c:txPr>
+  <c:externalData r:id="rId1">
+    <c:autoUpdate val="0"/>
+  </c:externalData>
+</c:chartSpace>
+</file>
+
+<file path=ppt/charts/chart7.xml><?xml version="1.0" encoding="utf-8"?>
+<c:chartSpace xmlns:c="http://schemas.openxmlformats.org/drawingml/2006/chart" xmlns:a="http://schemas.openxmlformats.org/drawingml/2006/main" xmlns:r="http://schemas.openxmlformats.org/officeDocument/2006/relationships">
+  <c:chart>
+    <c:autoTitleDeleted val="1"/>
+    <c:plotArea>
+      <c:pieChart>
+        <c:varyColors val="1"/>
+        <c:ser>
+          <c:idx val="0"/>
+          <c:order val="0"/>
+          <c:tx>
+            <c:strRef>
+              <c:f>Sheet1!$B$1</c:f>
+              <c:strCache>
+                <c:ptCount val="1"/>
+                <c:pt idx="0">
+                  <c:v>s</c:v>
+                </c:pt>
+              </c:strCache>
+            </c:strRef>
+          </c:tx>
+          <c:dPt>
+            <c:idx val="0"/>
+            <c:spPr>
+              <a:solidFill>
+                <a:srgbClr val="1B3E6E"/>
+              </a:solidFill>
+              <a:ln w="25400">
+                <a:solidFill>
+                  <a:srgbClr val="FFFFFF"/>
+                </a:solidFill>
+              </a:ln>
+            </c:spPr>
+          </c:dPt>
+          <c:dPt>
+            <c:idx val="1"/>
+            <c:spPr>
+              <a:solidFill>
+                <a:srgbClr val="398025"/>
+              </a:solidFill>
+              <a:ln w="25400">
+                <a:solidFill>
+                  <a:srgbClr val="FFFFFF"/>
+                </a:solidFill>
+              </a:ln>
+            </c:spPr>
+          </c:dPt>
+          <c:cat>
+            <c:strRef>
+              <c:f>Sheet1!$A$2:$A$3</c:f>
+              <c:strCache>
+                <c:ptCount val="2"/>
+                <c:pt idx="0">
+                  <c:v>Solution 1 — $150k</c:v>
+                </c:pt>
+                <c:pt idx="1">
+                  <c:v>Solution 2 — $100k</c:v>
+                </c:pt>
+              </c:strCache>
+            </c:strRef>
+          </c:cat>
+          <c:val>
+            <c:numRef>
+              <c:f>Sheet1!$B$2:$B$3</c:f>
+              <c:numCache>
+                <c:formatCode>General</c:formatCode>
+                <c:ptCount val="2"/>
+                <c:pt idx="0">
+                  <c:v>150</c:v>
+                </c:pt>
+                <c:pt idx="1">
+                  <c:v>100</c:v>
+                </c:pt>
+              </c:numCache>
+            </c:numRef>
+          </c:val>
+        </c:ser>
+        <c:dLbls>
+          <c:numFmt formatCode="&quot;$&quot;0&quot;k&quot;" sourceLinked="0"/>
+          <c:txPr>
+            <a:bodyPr/>
+            <a:lstStyle/>
+            <a:p>
+              <a:pPr>
+                <a:defRPr sz="1100" b="1">
+                  <a:solidFill>
+                    <a:srgbClr val="FFFFFF"/>
+                  </a:solidFill>
+                </a:defRPr>
+              </a:pPr>
+            </a:p>
+          </c:txPr>
+          <c:showLegendKey val="0"/>
+          <c:showVal val="1"/>
+          <c:showCatName val="0"/>
+          <c:showSerName val="0"/>
+          <c:showPercent val="0"/>
+          <c:showBubbleSize val="0"/>
+          <c:showLeaderLines val="1"/>
+        </c:dLbls>
+      </c:pieChart>
+    </c:plotArea>
+    <c:dispBlanksAs val="gap"/>
+  </c:chart>
+  <c:txPr>
+    <a:bodyPr/>
+    <a:lstStyle/>
+    <a:p>
+      <a:pPr>
+        <a:defRPr sz="900">
+          <a:latin typeface="Arial"/>
+        </a:defRPr>
+      </a:pPr>
+      <a:endParaRPr lang="en-US"/>
+    </a:p>
+  </c:txPr>
+  <c:spPr>
+    <a:noFill/>
+    <a:ln>
+      <a:noFill/>
+    </a:ln>
+  </c:spPr>
+  <c:externalData r:id="rId1">
+    <c:autoUpdate val="0"/>
+  </c:externalData>
+</c:chartSpace>
+</file>
+
+<file path=ppt/charts/chart8.xml><?xml version="1.0" encoding="utf-8"?>
+<c:chartSpace xmlns:c="http://schemas.openxmlformats.org/drawingml/2006/chart" xmlns:a="http://schemas.openxmlformats.org/drawingml/2006/main" xmlns:r="http://schemas.openxmlformats.org/officeDocument/2006/relationships">
+  <c:date1904 val="0"/>
+  <c:chart>
+    <c:autoTitleDeleted val="1"/>
+    <c:plotArea>
+      <c:barChart>
+        <c:barDir val="col"/>
+        <c:grouping val="clustered"/>
+        <c:ser>
+          <c:idx val="0"/>
+          <c:order val="0"/>
+          <c:tx>
+            <c:strRef>
+              <c:f>Sheet1!$B$1</c:f>
+              <c:strCache>
+                <c:ptCount val="1"/>
+                <c:pt idx="0">
+                  <c:v>Without GS funding</c:v>
+                </c:pt>
+              </c:strCache>
+            </c:strRef>
+          </c:tx>
+          <c:spPr>
+            <a:solidFill>
+              <a:srgbClr val="E08A1E"/>
+            </a:solidFill>
+            <a:ln>
+              <a:noFill/>
+            </a:ln>
+          </c:spPr>
+          <c:cat>
+            <c:strRef>
+              <c:f>Sheet1!$A$2:$A$5</c:f>
+              <c:strCache>
+                <c:ptCount val="4"/>
+                <c:pt idx="0">
+                  <c:v>2026</c:v>
+                </c:pt>
+                <c:pt idx="1">
+                  <c:v>2027</c:v>
+                </c:pt>
+                <c:pt idx="2">
+                  <c:v>2028</c:v>
+                </c:pt>
+                <c:pt idx="3">
+                  <c:v>2029</c:v>
+                </c:pt>
+              </c:strCache>
+            </c:strRef>
+          </c:cat>
+          <c:val>
+            <c:numRef>
+              <c:f>Sheet1!$B$2:$B$5</c:f>
+              <c:numCache>
+                <c:formatCode>General</c:formatCode>
+                <c:ptCount val="4"/>
+                <c:pt idx="0">
+                  <c:v>10.8</c:v>
+                </c:pt>
+                <c:pt idx="1">
+                  <c:v>11.4</c:v>
+                </c:pt>
+                <c:pt idx="2">
+                  <c:v>12.0</c:v>
+                </c:pt>
+                <c:pt idx="3">
+                  <c:v>12.6</c:v>
+                </c:pt>
+              </c:numCache>
+            </c:numRef>
+          </c:val>
+        </c:ser>
+        <c:ser>
+          <c:idx val="1"/>
+          <c:order val="1"/>
+          <c:tx>
+            <c:strRef>
+              <c:f>Sheet1!$C$1</c:f>
+              <c:strCache>
+                <c:ptCount val="1"/>
+                <c:pt idx="0">
+                  <c:v>With GS funding</c:v>
+                </c:pt>
+              </c:strCache>
+            </c:strRef>
+          </c:tx>
+          <c:spPr>
+            <a:solidFill>
+              <a:srgbClr val="398025"/>
+            </a:solidFill>
+            <a:ln>
+              <a:noFill/>
+            </a:ln>
+          </c:spPr>
+          <c:cat>
+            <c:strRef>
+              <c:f>Sheet1!$A$2:$A$5</c:f>
+              <c:strCache>
+                <c:ptCount val="4"/>
+                <c:pt idx="0">
+                  <c:v>2026</c:v>
+                </c:pt>
+                <c:pt idx="1">
+                  <c:v>2027</c:v>
+                </c:pt>
+                <c:pt idx="2">
+                  <c:v>2028</c:v>
+                </c:pt>
+                <c:pt idx="3">
+                  <c:v>2029</c:v>
+                </c:pt>
+              </c:strCache>
+            </c:strRef>
+          </c:cat>
+          <c:val>
+            <c:numRef>
+              <c:f>Sheet1!$C$2:$C$5</c:f>
+              <c:numCache>
+                <c:formatCode>General</c:formatCode>
+                <c:ptCount val="4"/>
+                <c:pt idx="0">
+                  <c:v>9.4</c:v>
+                </c:pt>
+                <c:pt idx="1">
+                  <c:v>9.2</c:v>
+                </c:pt>
+                <c:pt idx="2">
+                  <c:v>9.1</c:v>
+                </c:pt>
+                <c:pt idx="3">
+                  <c:v>9.0</c:v>
+                </c:pt>
+              </c:numCache>
+            </c:numRef>
+          </c:val>
+        </c:ser>
+        <c:gapWidth val="80"/>
+        <c:overlap val="-10"/>
+        <c:axId val="-2068027336"/>
+        <c:axId val="-2113994440"/>
+      </c:barChart>
+      <c:catAx>
+        <c:axId val="-2068027336"/>
+        <c:scaling>
+          <c:orientation val="minMax"/>
+        </c:scaling>
+        <c:delete val="0"/>
+        <c:axPos val="b"/>
+        <c:majorTickMark val="out"/>
+        <c:minorTickMark val="none"/>
+        <c:tickLblPos val="nextTo"/>
+        <c:spPr>
+          <a:ln>
+            <a:solidFill>
+              <a:srgbClr val="BFBFBF"/>
+            </a:solidFill>
+          </a:ln>
+        </c:spPr>
+        <c:txPr>
+          <a:bodyPr/>
+          <a:lstStyle/>
+          <a:p>
+            <a:pPr>
+              <a:defRPr sz="700"/>
+            </a:pPr>
+          </a:p>
+        </c:txPr>
+        <c:crossAx val="-2113994440"/>
+        <c:crosses val="autoZero"/>
+        <c:auto val="1"/>
+        <c:lblAlgn val="ctr"/>
+        <c:lblOffset val="100"/>
+        <c:noMultiLvlLbl val="0"/>
+      </c:catAx>
+      <c:valAx>
+        <c:axId val="-2113994440"/>
+        <c:scaling/>
+        <c:delete val="0"/>
+        <c:axPos val="l"/>
+        <c:numFmt formatCode="&quot;$&quot;0&quot;M&quot;" sourceLinked="0"/>
+        <c:majorTickMark val="out"/>
+        <c:minorTickMark val="none"/>
+        <c:tickLblPos val="nextTo"/>
+        <c:txPr>
+          <a:bodyPr/>
+          <a:lstStyle/>
+          <a:p>
+            <a:pPr>
+              <a:defRPr sz="650"/>
+            </a:pPr>
+          </a:p>
+        </c:txPr>
+        <c:crossAx val="-2068027336"/>
+        <c:crosses val="autoZero"/>
+      </c:valAx>
+    </c:plotArea>
+    <c:legend>
+      <c:legendPos val="b"/>
+      <c:overlay val="0"/>
+      <c:txPr>
+        <a:bodyPr/>
+        <a:lstStyle/>
+        <a:p>
+          <a:pPr>
+            <a:defRPr sz="700"/>
+          </a:pPr>
+        </a:p>
+      </c:txPr>
+    </c:legend>
+    <c:dispBlanksAs val="gap"/>
+  </c:chart>
+  <c:txPr>
+    <a:bodyPr/>
+    <a:lstStyle/>
+    <a:p>
+      <a:pPr>
+        <a:defRPr sz="700">
           <a:solidFill>
             <a:srgbClr val="333333"/>
           </a:solidFill>
@@ -6344,6 +6893,2554 @@
 </p:sld>
 </file>
 
+<file path=ppt/slides/slide10.xml><?xml version="1.0" encoding="utf-8"?>
+<p:sld xmlns:a="http://schemas.openxmlformats.org/drawingml/2006/main" xmlns:p="http://schemas.openxmlformats.org/presentationml/2006/main" xmlns:r="http://schemas.openxmlformats.org/officeDocument/2006/relationships">
+  <p:cSld>
+    <p:spTree>
+      <p:nvGrpSpPr>
+        <p:cNvPr id="1" name=""/>
+        <p:cNvGrpSpPr/>
+        <p:nvPr/>
+      </p:nvGrpSpPr>
+      <p:grpSpPr/>
+      <p:sp>
+        <p:nvSpPr>
+          <p:cNvPr id="2" name="Rectangle 1"/>
+          <p:cNvSpPr/>
+          <p:nvPr/>
+        </p:nvSpPr>
+        <p:spPr>
+          <a:xfrm>
+            <a:off x="365760" y="274320"/>
+            <a:ext cx="8412480" cy="23774"/>
+          </a:xfrm>
+          <a:prstGeom prst="rect">
+            <a:avLst/>
+          </a:prstGeom>
+          <a:solidFill>
+            <a:srgbClr val="1B3E6E"/>
+          </a:solidFill>
+          <a:ln>
+            <a:noFill/>
+          </a:ln>
+          <a:effectLst/>
+        </p:spPr>
+        <p:style>
+          <a:lnRef idx="1">
+            <a:schemeClr val="accent1"/>
+          </a:lnRef>
+          <a:fillRef idx="3">
+            <a:schemeClr val="accent1"/>
+          </a:fillRef>
+          <a:effectRef idx="2">
+            <a:schemeClr val="accent1"/>
+          </a:effectRef>
+          <a:fontRef idx="minor">
+            <a:schemeClr val="lt1"/>
+          </a:fontRef>
+        </p:style>
+        <p:txBody>
+          <a:bodyPr rtlCol="0" anchor="ctr"/>
+          <a:lstStyle/>
+          <a:p>
+            <a:pPr algn="ctr"/>
+          </a:p>
+        </p:txBody>
+      </p:sp>
+      <p:sp>
+        <p:nvSpPr>
+          <p:cNvPr id="3" name="TextBox 2"/>
+          <p:cNvSpPr txBox="1"/>
+          <p:nvPr/>
+        </p:nvSpPr>
+        <p:spPr>
+          <a:xfrm>
+            <a:off x="365760" y="365760"/>
+            <a:ext cx="8412480" cy="457200"/>
+          </a:xfrm>
+          <a:prstGeom prst="rect">
+            <a:avLst/>
+          </a:prstGeom>
+          <a:noFill/>
+        </p:spPr>
+        <p:txBody>
+          <a:bodyPr wrap="square" lIns="0" rIns="0" tIns="0" bIns="0" anchor="t">
+            <a:spAutoFit/>
+          </a:bodyPr>
+          <a:lstStyle/>
+          <a:p>
+            <a:pPr algn="l">
+              <a:lnSpc>
+                <a:spcPct val="100000"/>
+              </a:lnSpc>
+              <a:spcBef>
+                <a:spcPts val="0"/>
+              </a:spcBef>
+              <a:spcAft>
+                <a:spcPts val="0"/>
+              </a:spcAft>
+            </a:pPr>
+            <a:r>
+              <a:rPr sz="2000" b="0" i="0">
+                <a:solidFill>
+                  <a:srgbClr val="1B3E6E"/>
+                </a:solidFill>
+                <a:latin typeface="Georgia"/>
+              </a:rPr>
+              <a:t>Conclusion — why Akshaya Patra, and why this proposal wins</a:t>
+            </a:r>
+          </a:p>
+        </p:txBody>
+      </p:sp>
+      <p:sp>
+        <p:nvSpPr>
+          <p:cNvPr id="4" name="TextBox 3"/>
+          <p:cNvSpPr txBox="1"/>
+          <p:nvPr/>
+        </p:nvSpPr>
+        <p:spPr>
+          <a:xfrm>
+            <a:off x="365760" y="822960"/>
+            <a:ext cx="8412480" cy="438912"/>
+          </a:xfrm>
+          <a:prstGeom prst="rect">
+            <a:avLst/>
+          </a:prstGeom>
+          <a:noFill/>
+        </p:spPr>
+        <p:txBody>
+          <a:bodyPr wrap="square" lIns="0" rIns="0" tIns="0" bIns="0" anchor="t">
+            <a:spAutoFit/>
+          </a:bodyPr>
+          <a:lstStyle/>
+          <a:p>
+            <a:pPr algn="l">
+              <a:lnSpc>
+                <a:spcPct val="100000"/>
+              </a:lnSpc>
+              <a:spcBef>
+                <a:spcPts val="0"/>
+              </a:spcBef>
+              <a:spcAft>
+                <a:spcPts val="0"/>
+              </a:spcAft>
+            </a:pPr>
+            <a:r>
+              <a:rPr sz="1050" b="0" i="0">
+                <a:solidFill>
+                  <a:srgbClr val="333333"/>
+                </a:solidFill>
+                <a:latin typeface="Arial"/>
+              </a:rPr>
+              <a:t>A proven engine of social mobility, economics where every donor rupee is matched by government subsidy, and a grant that compounds.</a:t>
+            </a:r>
+          </a:p>
+        </p:txBody>
+      </p:sp>
+      <p:sp>
+        <p:nvSpPr>
+          <p:cNvPr id="5" name="Rectangle 4"/>
+          <p:cNvSpPr/>
+          <p:nvPr/>
+        </p:nvSpPr>
+        <p:spPr>
+          <a:xfrm>
+            <a:off x="502920" y="6071616"/>
+            <a:ext cx="8138159" cy="365760"/>
+          </a:xfrm>
+          <a:prstGeom prst="rect">
+            <a:avLst/>
+          </a:prstGeom>
+          <a:solidFill>
+            <a:srgbClr val="D9D9D9"/>
+          </a:solidFill>
+          <a:ln>
+            <a:noFill/>
+          </a:ln>
+          <a:effectLst/>
+        </p:spPr>
+        <p:style>
+          <a:lnRef idx="1">
+            <a:schemeClr val="accent1"/>
+          </a:lnRef>
+          <a:fillRef idx="3">
+            <a:schemeClr val="accent1"/>
+          </a:fillRef>
+          <a:effectRef idx="2">
+            <a:schemeClr val="accent1"/>
+          </a:effectRef>
+          <a:fontRef idx="minor">
+            <a:schemeClr val="lt1"/>
+          </a:fontRef>
+        </p:style>
+        <p:txBody>
+          <a:bodyPr rtlCol="0" anchor="ctr"/>
+          <a:lstStyle/>
+          <a:p>
+            <a:pPr algn="ctr"/>
+          </a:p>
+        </p:txBody>
+      </p:sp>
+      <p:sp>
+        <p:nvSpPr>
+          <p:cNvPr id="6" name="TextBox 5"/>
+          <p:cNvSpPr txBox="1"/>
+          <p:nvPr/>
+        </p:nvSpPr>
+        <p:spPr>
+          <a:xfrm>
+            <a:off x="640080" y="6071616"/>
+            <a:ext cx="7863840" cy="365760"/>
+          </a:xfrm>
+          <a:prstGeom prst="rect">
+            <a:avLst/>
+          </a:prstGeom>
+          <a:noFill/>
+        </p:spPr>
+        <p:txBody>
+          <a:bodyPr wrap="square" lIns="0" rIns="0" tIns="0" bIns="0" anchor="ctr">
+            <a:spAutoFit/>
+          </a:bodyPr>
+          <a:lstStyle/>
+          <a:p>
+            <a:pPr algn="ctr">
+              <a:lnSpc>
+                <a:spcPct val="95000"/>
+              </a:lnSpc>
+              <a:spcBef>
+                <a:spcPts val="0"/>
+              </a:spcBef>
+              <a:spcAft>
+                <a:spcPts val="0"/>
+              </a:spcAft>
+            </a:pPr>
+            <a:r>
+              <a:rPr sz="1100" b="1" i="0">
+                <a:solidFill>
+                  <a:srgbClr val="1B3E6E"/>
+                </a:solidFill>
+                <a:latin typeface="Georgia"/>
+              </a:rPr>
+              <a:t>$250k that doesn't feed children for a year — it upgrades the engine that feeds them forever.</a:t>
+            </a:r>
+          </a:p>
+        </p:txBody>
+      </p:sp>
+      <p:sp>
+        <p:nvSpPr>
+          <p:cNvPr id="7" name="TextBox 6"/>
+          <p:cNvSpPr txBox="1"/>
+          <p:nvPr/>
+        </p:nvSpPr>
+        <p:spPr>
+          <a:xfrm>
+            <a:off x="365760" y="6492240"/>
+            <a:ext cx="1280160" cy="329184"/>
+          </a:xfrm>
+          <a:prstGeom prst="rect">
+            <a:avLst/>
+          </a:prstGeom>
+          <a:noFill/>
+        </p:spPr>
+        <p:txBody>
+          <a:bodyPr wrap="square" lIns="0" rIns="0" tIns="0" bIns="0" anchor="t">
+            <a:spAutoFit/>
+          </a:bodyPr>
+          <a:lstStyle/>
+          <a:p>
+            <a:pPr algn="l">
+              <a:lnSpc>
+                <a:spcPct val="90000"/>
+              </a:lnSpc>
+              <a:spcBef>
+                <a:spcPts val="0"/>
+              </a:spcBef>
+              <a:spcAft>
+                <a:spcPts val="0"/>
+              </a:spcAft>
+            </a:pPr>
+            <a:r>
+              <a:rPr sz="900" b="1" i="0">
+                <a:solidFill>
+                  <a:srgbClr val="111111"/>
+                </a:solidFill>
+                <a:latin typeface="Georgia"/>
+              </a:rPr>
+              <a:t>Goldman</a:t>
+            </a:r>
+          </a:p>
+          <a:p>
+            <a:pPr algn="l">
+              <a:lnSpc>
+                <a:spcPct val="90000"/>
+              </a:lnSpc>
+              <a:spcBef>
+                <a:spcPts val="0"/>
+              </a:spcBef>
+              <a:spcAft>
+                <a:spcPts val="0"/>
+              </a:spcAft>
+            </a:pPr>
+            <a:r>
+              <a:rPr sz="900" b="1" i="0">
+                <a:solidFill>
+                  <a:srgbClr val="111111"/>
+                </a:solidFill>
+                <a:latin typeface="Georgia"/>
+              </a:rPr>
+              <a:t>Sachs</a:t>
+            </a:r>
+          </a:p>
+        </p:txBody>
+      </p:sp>
+      <p:sp>
+        <p:nvSpPr>
+          <p:cNvPr id="8" name="TextBox 7"/>
+          <p:cNvSpPr txBox="1"/>
+          <p:nvPr/>
+        </p:nvSpPr>
+        <p:spPr>
+          <a:xfrm>
+            <a:off x="8321040" y="6528816"/>
+            <a:ext cx="457200" cy="274320"/>
+          </a:xfrm>
+          <a:prstGeom prst="rect">
+            <a:avLst/>
+          </a:prstGeom>
+          <a:noFill/>
+        </p:spPr>
+        <p:txBody>
+          <a:bodyPr wrap="square" lIns="0" rIns="0" tIns="0" bIns="0" anchor="t">
+            <a:spAutoFit/>
+          </a:bodyPr>
+          <a:lstStyle/>
+          <a:p>
+            <a:pPr algn="r">
+              <a:lnSpc>
+                <a:spcPct val="100000"/>
+              </a:lnSpc>
+              <a:spcBef>
+                <a:spcPts val="0"/>
+              </a:spcBef>
+              <a:spcAft>
+                <a:spcPts val="300"/>
+              </a:spcAft>
+            </a:pPr>
+            <a:r>
+              <a:rPr sz="900" b="0" i="0">
+                <a:solidFill>
+                  <a:srgbClr val="727375"/>
+                </a:solidFill>
+                <a:latin typeface="Arial"/>
+              </a:rPr>
+              <a:t>10</a:t>
+            </a:r>
+          </a:p>
+        </p:txBody>
+      </p:sp>
+      <p:sp>
+        <p:nvSpPr>
+          <p:cNvPr id="9" name="TextBox 8"/>
+          <p:cNvSpPr txBox="1"/>
+          <p:nvPr/>
+        </p:nvSpPr>
+        <p:spPr>
+          <a:xfrm>
+            <a:off x="4754879" y="54864"/>
+            <a:ext cx="4023360" cy="182880"/>
+          </a:xfrm>
+          <a:prstGeom prst="rect">
+            <a:avLst/>
+          </a:prstGeom>
+          <a:noFill/>
+        </p:spPr>
+        <p:txBody>
+          <a:bodyPr wrap="square" lIns="0" rIns="0" tIns="0" bIns="0" anchor="t">
+            <a:spAutoFit/>
+          </a:bodyPr>
+          <a:lstStyle/>
+          <a:p>
+            <a:pPr algn="r">
+              <a:lnSpc>
+                <a:spcPct val="100000"/>
+              </a:lnSpc>
+              <a:spcBef>
+                <a:spcPts val="0"/>
+              </a:spcBef>
+              <a:spcAft>
+                <a:spcPts val="0"/>
+              </a:spcAft>
+            </a:pPr>
+            <a:r>
+              <a:rPr sz="750" b="0" i="1">
+                <a:solidFill>
+                  <a:srgbClr val="727375"/>
+                </a:solidFill>
+                <a:latin typeface="Arial"/>
+              </a:rPr>
+              <a:t>FINAL CONTENT — SLIDE 6 (v2)</a:t>
+            </a:r>
+          </a:p>
+        </p:txBody>
+      </p:sp>
+      <p:sp>
+        <p:nvSpPr>
+          <p:cNvPr id="10" name="TextBox 9"/>
+          <p:cNvSpPr txBox="1"/>
+          <p:nvPr/>
+        </p:nvSpPr>
+        <p:spPr>
+          <a:xfrm>
+            <a:off x="4846320" y="6547104"/>
+            <a:ext cx="3401568" cy="274320"/>
+          </a:xfrm>
+          <a:prstGeom prst="rect">
+            <a:avLst/>
+          </a:prstGeom>
+          <a:noFill/>
+        </p:spPr>
+        <p:txBody>
+          <a:bodyPr wrap="square" lIns="0" rIns="0" tIns="0" bIns="0" anchor="t">
+            <a:spAutoFit/>
+          </a:bodyPr>
+          <a:lstStyle/>
+          <a:p>
+            <a:pPr algn="r">
+              <a:lnSpc>
+                <a:spcPct val="100000"/>
+              </a:lnSpc>
+              <a:spcBef>
+                <a:spcPts val="0"/>
+              </a:spcBef>
+              <a:spcAft>
+                <a:spcPts val="0"/>
+              </a:spcAft>
+            </a:pPr>
+            <a:r>
+              <a:rPr sz="650" b="0" i="1">
+                <a:solidFill>
+                  <a:srgbClr val="727375"/>
+                </a:solidFill>
+                <a:latin typeface="Arial"/>
+              </a:rPr>
+              <a:t>Source: The Akshaya Patra Foundation — official documents</a:t>
+            </a:r>
+          </a:p>
+        </p:txBody>
+      </p:sp>
+      <p:sp>
+        <p:nvSpPr>
+          <p:cNvPr id="11" name="TextBox 10"/>
+          <p:cNvSpPr txBox="1"/>
+          <p:nvPr/>
+        </p:nvSpPr>
+        <p:spPr>
+          <a:xfrm>
+            <a:off x="365760" y="1389888"/>
+            <a:ext cx="2331720" cy="219456"/>
+          </a:xfrm>
+          <a:prstGeom prst="rect">
+            <a:avLst/>
+          </a:prstGeom>
+          <a:noFill/>
+        </p:spPr>
+        <p:txBody>
+          <a:bodyPr wrap="square" lIns="0" rIns="0" tIns="0" bIns="0" anchor="t">
+            <a:spAutoFit/>
+          </a:bodyPr>
+          <a:lstStyle/>
+          <a:p>
+            <a:pPr algn="l">
+              <a:lnSpc>
+                <a:spcPct val="100000"/>
+              </a:lnSpc>
+              <a:spcBef>
+                <a:spcPts val="0"/>
+              </a:spcBef>
+              <a:spcAft>
+                <a:spcPts val="0"/>
+              </a:spcAft>
+            </a:pPr>
+            <a:r>
+              <a:rPr sz="900" b="1" i="0">
+                <a:solidFill>
+                  <a:srgbClr val="1B3E6E"/>
+                </a:solidFill>
+                <a:latin typeface="Arial"/>
+              </a:rPr>
+              <a:t>THE FUND &amp; ITS IMPACT</a:t>
+            </a:r>
+          </a:p>
+        </p:txBody>
+      </p:sp>
+      <p:sp>
+        <p:nvSpPr>
+          <p:cNvPr id="12" name="Rectangle 11"/>
+          <p:cNvSpPr/>
+          <p:nvPr/>
+        </p:nvSpPr>
+        <p:spPr>
+          <a:xfrm>
+            <a:off x="365760" y="1645920"/>
+            <a:ext cx="2331720" cy="12801"/>
+          </a:xfrm>
+          <a:prstGeom prst="rect">
+            <a:avLst/>
+          </a:prstGeom>
+          <a:solidFill>
+            <a:srgbClr val="BFBFBF"/>
+          </a:solidFill>
+          <a:ln>
+            <a:noFill/>
+          </a:ln>
+          <a:effectLst/>
+        </p:spPr>
+        <p:style>
+          <a:lnRef idx="1">
+            <a:schemeClr val="accent1"/>
+          </a:lnRef>
+          <a:fillRef idx="3">
+            <a:schemeClr val="accent1"/>
+          </a:fillRef>
+          <a:effectRef idx="2">
+            <a:schemeClr val="accent1"/>
+          </a:effectRef>
+          <a:fontRef idx="minor">
+            <a:schemeClr val="lt1"/>
+          </a:fontRef>
+        </p:style>
+        <p:txBody>
+          <a:bodyPr rtlCol="0" anchor="ctr"/>
+          <a:lstStyle/>
+          <a:p>
+            <a:pPr algn="ctr"/>
+          </a:p>
+        </p:txBody>
+      </p:sp>
+      <p:sp>
+        <p:nvSpPr>
+          <p:cNvPr id="13" name="TextBox 12"/>
+          <p:cNvSpPr txBox="1"/>
+          <p:nvPr/>
+        </p:nvSpPr>
+        <p:spPr>
+          <a:xfrm>
+            <a:off x="365760" y="1792224"/>
+            <a:ext cx="2331720" cy="822960"/>
+          </a:xfrm>
+          <a:prstGeom prst="rect">
+            <a:avLst/>
+          </a:prstGeom>
+          <a:noFill/>
+        </p:spPr>
+        <p:txBody>
+          <a:bodyPr wrap="square" lIns="0" rIns="0" tIns="0" bIns="0" anchor="t">
+            <a:spAutoFit/>
+          </a:bodyPr>
+          <a:lstStyle/>
+          <a:p>
+            <a:pPr algn="l">
+              <a:lnSpc>
+                <a:spcPct val="100000"/>
+              </a:lnSpc>
+              <a:spcBef>
+                <a:spcPts val="0"/>
+              </a:spcBef>
+              <a:spcAft>
+                <a:spcPts val="100"/>
+              </a:spcAft>
+            </a:pPr>
+            <a:r>
+              <a:rPr sz="2200" b="1" i="0">
+                <a:solidFill>
+                  <a:srgbClr val="1B3E6E"/>
+                </a:solidFill>
+                <a:latin typeface="Georgia"/>
+              </a:rPr>
+              <a:t>$250k</a:t>
+            </a:r>
+          </a:p>
+          <a:p>
+            <a:pPr algn="l">
+              <a:lnSpc>
+                <a:spcPct val="95000"/>
+              </a:lnSpc>
+              <a:spcBef>
+                <a:spcPts val="0"/>
+              </a:spcBef>
+              <a:spcAft>
+                <a:spcPts val="0"/>
+              </a:spcAft>
+            </a:pPr>
+            <a:r>
+              <a:rPr sz="700" b="0" i="0">
+                <a:solidFill>
+                  <a:srgbClr val="727375"/>
+                </a:solidFill>
+                <a:latin typeface="Arial"/>
+              </a:rPr>
+              <a:t>one-time grant ≈ ₹2.1 Cr</a:t>
+            </a:r>
+          </a:p>
+        </p:txBody>
+      </p:sp>
+      <p:cxnSp>
+        <p:nvCxnSpPr>
+          <p:cNvPr id="14" name="Connector 13"/>
+          <p:cNvCxnSpPr/>
+          <p:nvPr/>
+        </p:nvCxnSpPr>
+        <p:spPr>
+          <a:xfrm>
+            <a:off x="667512" y="2395728"/>
+            <a:ext cx="0" cy="219456"/>
+          </a:xfrm>
+          <a:prstGeom prst="line">
+            <a:avLst/>
+          </a:prstGeom>
+          <a:ln w="12700">
+            <a:solidFill>
+              <a:srgbClr val="BFBFBF"/>
+            </a:solidFill>
+            <a:prstDash val="sysDash"/>
+            <a:tailEnd type="triangle" w="med" len="med"/>
+          </a:ln>
+          <a:effectLst/>
+        </p:spPr>
+        <p:style>
+          <a:lnRef idx="2">
+            <a:schemeClr val="accent1"/>
+          </a:lnRef>
+          <a:fillRef idx="0">
+            <a:schemeClr val="accent1"/>
+          </a:fillRef>
+          <a:effectRef idx="1">
+            <a:schemeClr val="accent1"/>
+          </a:effectRef>
+          <a:fontRef idx="minor">
+            <a:schemeClr val="tx1"/>
+          </a:fontRef>
+        </p:style>
+      </p:cxnSp>
+      <p:sp>
+        <p:nvSpPr>
+          <p:cNvPr id="15" name="TextBox 14"/>
+          <p:cNvSpPr txBox="1"/>
+          <p:nvPr/>
+        </p:nvSpPr>
+        <p:spPr>
+          <a:xfrm>
+            <a:off x="365760" y="2660904"/>
+            <a:ext cx="2331720" cy="822960"/>
+          </a:xfrm>
+          <a:prstGeom prst="rect">
+            <a:avLst/>
+          </a:prstGeom>
+          <a:noFill/>
+        </p:spPr>
+        <p:txBody>
+          <a:bodyPr wrap="square" lIns="0" rIns="0" tIns="0" bIns="0" anchor="t">
+            <a:spAutoFit/>
+          </a:bodyPr>
+          <a:lstStyle/>
+          <a:p>
+            <a:pPr algn="l">
+              <a:lnSpc>
+                <a:spcPct val="100000"/>
+              </a:lnSpc>
+              <a:spcBef>
+                <a:spcPts val="0"/>
+              </a:spcBef>
+              <a:spcAft>
+                <a:spcPts val="100"/>
+              </a:spcAft>
+            </a:pPr>
+            <a:r>
+              <a:rPr sz="2000" b="1" i="0">
+                <a:solidFill>
+                  <a:srgbClr val="398025"/>
+                </a:solidFill>
+                <a:latin typeface="Georgia"/>
+              </a:rPr>
+              <a:t>₹6.56</a:t>
+            </a:r>
+          </a:p>
+          <a:p>
+            <a:pPr algn="l">
+              <a:lnSpc>
+                <a:spcPct val="95000"/>
+              </a:lnSpc>
+              <a:spcBef>
+                <a:spcPts val="0"/>
+              </a:spcBef>
+              <a:spcAft>
+                <a:spcPts val="0"/>
+              </a:spcAft>
+            </a:pPr>
+            <a:r>
+              <a:rPr sz="700" b="0" i="0">
+                <a:solidFill>
+                  <a:srgbClr val="727375"/>
+                </a:solidFill>
+                <a:latin typeface="Arial"/>
+              </a:rPr>
+              <a:t>donor cost per meal — govt funds ₹8.56 of every ₹17</a:t>
+            </a:r>
+          </a:p>
+        </p:txBody>
+      </p:sp>
+      <p:cxnSp>
+        <p:nvCxnSpPr>
+          <p:cNvPr id="16" name="Connector 15"/>
+          <p:cNvCxnSpPr/>
+          <p:nvPr/>
+        </p:nvCxnSpPr>
+        <p:spPr>
+          <a:xfrm>
+            <a:off x="667512" y="3264408"/>
+            <a:ext cx="0" cy="219456"/>
+          </a:xfrm>
+          <a:prstGeom prst="line">
+            <a:avLst/>
+          </a:prstGeom>
+          <a:ln w="12700">
+            <a:solidFill>
+              <a:srgbClr val="BFBFBF"/>
+            </a:solidFill>
+            <a:prstDash val="sysDash"/>
+            <a:tailEnd type="triangle" w="med" len="med"/>
+          </a:ln>
+          <a:effectLst/>
+        </p:spPr>
+        <p:style>
+          <a:lnRef idx="2">
+            <a:schemeClr val="accent1"/>
+          </a:lnRef>
+          <a:fillRef idx="0">
+            <a:schemeClr val="accent1"/>
+          </a:fillRef>
+          <a:effectRef idx="1">
+            <a:schemeClr val="accent1"/>
+          </a:effectRef>
+          <a:fontRef idx="minor">
+            <a:schemeClr val="tx1"/>
+          </a:fontRef>
+        </p:style>
+      </p:cxnSp>
+      <p:sp>
+        <p:nvSpPr>
+          <p:cNvPr id="17" name="TextBox 16"/>
+          <p:cNvSpPr txBox="1"/>
+          <p:nvPr/>
+        </p:nvSpPr>
+        <p:spPr>
+          <a:xfrm>
+            <a:off x="365760" y="3529584"/>
+            <a:ext cx="2331720" cy="822960"/>
+          </a:xfrm>
+          <a:prstGeom prst="rect">
+            <a:avLst/>
+          </a:prstGeom>
+          <a:noFill/>
+        </p:spPr>
+        <p:txBody>
+          <a:bodyPr wrap="square" lIns="0" rIns="0" tIns="0" bIns="0" anchor="t">
+            <a:spAutoFit/>
+          </a:bodyPr>
+          <a:lstStyle/>
+          <a:p>
+            <a:pPr algn="l">
+              <a:lnSpc>
+                <a:spcPct val="100000"/>
+              </a:lnSpc>
+              <a:spcBef>
+                <a:spcPts val="0"/>
+              </a:spcBef>
+              <a:spcAft>
+                <a:spcPts val="100"/>
+              </a:spcAft>
+            </a:pPr>
+            <a:r>
+              <a:rPr sz="2000" b="1" i="0">
+                <a:solidFill>
+                  <a:srgbClr val="1B3E6E"/>
+                </a:solidFill>
+                <a:latin typeface="Georgia"/>
+              </a:rPr>
+              <a:t>₹1,500</a:t>
+            </a:r>
+          </a:p>
+          <a:p>
+            <a:pPr algn="l">
+              <a:lnSpc>
+                <a:spcPct val="95000"/>
+              </a:lnSpc>
+              <a:spcBef>
+                <a:spcPts val="0"/>
+              </a:spcBef>
+              <a:spcAft>
+                <a:spcPts val="0"/>
+              </a:spcAft>
+            </a:pPr>
+            <a:r>
+              <a:rPr sz="700" b="0" i="0">
+                <a:solidFill>
+                  <a:srgbClr val="727375"/>
+                </a:solidFill>
+                <a:latin typeface="Arial"/>
+              </a:rPr>
+              <a:t>feeds one child for a full year (232 school days)</a:t>
+            </a:r>
+          </a:p>
+        </p:txBody>
+      </p:sp>
+      <p:cxnSp>
+        <p:nvCxnSpPr>
+          <p:cNvPr id="18" name="Connector 17"/>
+          <p:cNvCxnSpPr/>
+          <p:nvPr/>
+        </p:nvCxnSpPr>
+        <p:spPr>
+          <a:xfrm>
+            <a:off x="667512" y="4133088"/>
+            <a:ext cx="0" cy="219456"/>
+          </a:xfrm>
+          <a:prstGeom prst="line">
+            <a:avLst/>
+          </a:prstGeom>
+          <a:ln w="12700">
+            <a:solidFill>
+              <a:srgbClr val="BFBFBF"/>
+            </a:solidFill>
+            <a:prstDash val="sysDash"/>
+            <a:tailEnd type="triangle" w="med" len="med"/>
+          </a:ln>
+          <a:effectLst/>
+        </p:spPr>
+        <p:style>
+          <a:lnRef idx="2">
+            <a:schemeClr val="accent1"/>
+          </a:lnRef>
+          <a:fillRef idx="0">
+            <a:schemeClr val="accent1"/>
+          </a:fillRef>
+          <a:effectRef idx="1">
+            <a:schemeClr val="accent1"/>
+          </a:effectRef>
+          <a:fontRef idx="minor">
+            <a:schemeClr val="tx1"/>
+          </a:fontRef>
+        </p:style>
+      </p:cxnSp>
+      <p:sp>
+        <p:nvSpPr>
+          <p:cNvPr id="19" name="TextBox 18"/>
+          <p:cNvSpPr txBox="1"/>
+          <p:nvPr/>
+        </p:nvSpPr>
+        <p:spPr>
+          <a:xfrm>
+            <a:off x="365760" y="4398264"/>
+            <a:ext cx="2331720" cy="822960"/>
+          </a:xfrm>
+          <a:prstGeom prst="rect">
+            <a:avLst/>
+          </a:prstGeom>
+          <a:noFill/>
+        </p:spPr>
+        <p:txBody>
+          <a:bodyPr wrap="square" lIns="0" rIns="0" tIns="0" bIns="0" anchor="t">
+            <a:spAutoFit/>
+          </a:bodyPr>
+          <a:lstStyle/>
+          <a:p>
+            <a:pPr algn="l">
+              <a:lnSpc>
+                <a:spcPct val="100000"/>
+              </a:lnSpc>
+              <a:spcBef>
+                <a:spcPts val="0"/>
+              </a:spcBef>
+              <a:spcAft>
+                <a:spcPts val="100"/>
+              </a:spcAft>
+            </a:pPr>
+            <a:r>
+              <a:rPr sz="1800" b="1" i="0">
+                <a:solidFill>
+                  <a:srgbClr val="E08A1E"/>
+                </a:solidFill>
+                <a:latin typeface="Georgia"/>
+              </a:rPr>
+              <a:t>14,000+</a:t>
+            </a:r>
+          </a:p>
+          <a:p>
+            <a:pPr algn="l">
+              <a:lnSpc>
+                <a:spcPct val="95000"/>
+              </a:lnSpc>
+              <a:spcBef>
+                <a:spcPts val="0"/>
+              </a:spcBef>
+              <a:spcAft>
+                <a:spcPts val="0"/>
+              </a:spcAft>
+            </a:pPr>
+            <a:r>
+              <a:rPr sz="700" b="0" i="0">
+                <a:solidFill>
+                  <a:srgbClr val="727375"/>
+                </a:solidFill>
+                <a:latin typeface="Arial"/>
+              </a:rPr>
+              <a:t>children fed for a year by the grant alone — before savings</a:t>
+            </a:r>
+          </a:p>
+        </p:txBody>
+      </p:sp>
+      <p:sp>
+        <p:nvSpPr>
+          <p:cNvPr id="20" name="Rectangle 19"/>
+          <p:cNvSpPr/>
+          <p:nvPr/>
+        </p:nvSpPr>
+        <p:spPr>
+          <a:xfrm>
+            <a:off x="2788920" y="1417320"/>
+            <a:ext cx="10972" cy="3447288"/>
+          </a:xfrm>
+          <a:prstGeom prst="rect">
+            <a:avLst/>
+          </a:prstGeom>
+          <a:solidFill>
+            <a:srgbClr val="DDDDDD"/>
+          </a:solidFill>
+          <a:ln>
+            <a:noFill/>
+          </a:ln>
+          <a:effectLst/>
+        </p:spPr>
+        <p:style>
+          <a:lnRef idx="1">
+            <a:schemeClr val="accent1"/>
+          </a:lnRef>
+          <a:fillRef idx="3">
+            <a:schemeClr val="accent1"/>
+          </a:fillRef>
+          <a:effectRef idx="2">
+            <a:schemeClr val="accent1"/>
+          </a:effectRef>
+          <a:fontRef idx="minor">
+            <a:schemeClr val="lt1"/>
+          </a:fontRef>
+        </p:style>
+        <p:txBody>
+          <a:bodyPr rtlCol="0" anchor="ctr"/>
+          <a:lstStyle/>
+          <a:p>
+            <a:pPr algn="ctr"/>
+          </a:p>
+        </p:txBody>
+      </p:sp>
+      <p:sp>
+        <p:nvSpPr>
+          <p:cNvPr id="21" name="Rectangle 20"/>
+          <p:cNvSpPr/>
+          <p:nvPr/>
+        </p:nvSpPr>
+        <p:spPr>
+          <a:xfrm>
+            <a:off x="3063240" y="1399032"/>
+            <a:ext cx="54864" cy="182880"/>
+          </a:xfrm>
+          <a:prstGeom prst="rect">
+            <a:avLst/>
+          </a:prstGeom>
+          <a:solidFill>
+            <a:srgbClr val="3B6EA5"/>
+          </a:solidFill>
+          <a:ln>
+            <a:noFill/>
+          </a:ln>
+          <a:effectLst/>
+        </p:spPr>
+        <p:style>
+          <a:lnRef idx="1">
+            <a:schemeClr val="accent1"/>
+          </a:lnRef>
+          <a:fillRef idx="3">
+            <a:schemeClr val="accent1"/>
+          </a:fillRef>
+          <a:effectRef idx="2">
+            <a:schemeClr val="accent1"/>
+          </a:effectRef>
+          <a:fontRef idx="minor">
+            <a:schemeClr val="lt1"/>
+          </a:fontRef>
+        </p:style>
+        <p:txBody>
+          <a:bodyPr rtlCol="0" anchor="ctr"/>
+          <a:lstStyle/>
+          <a:p>
+            <a:pPr algn="ctr"/>
+          </a:p>
+        </p:txBody>
+      </p:sp>
+      <p:sp>
+        <p:nvSpPr>
+          <p:cNvPr id="22" name="TextBox 21"/>
+          <p:cNvSpPr txBox="1"/>
+          <p:nvPr/>
+        </p:nvSpPr>
+        <p:spPr>
+          <a:xfrm>
+            <a:off x="3209544" y="1371600"/>
+            <a:ext cx="5568696" cy="256032"/>
+          </a:xfrm>
+          <a:prstGeom prst="rect">
+            <a:avLst/>
+          </a:prstGeom>
+          <a:noFill/>
+        </p:spPr>
+        <p:txBody>
+          <a:bodyPr wrap="square" lIns="0" rIns="0" tIns="0" bIns="0" anchor="t">
+            <a:spAutoFit/>
+          </a:bodyPr>
+          <a:lstStyle/>
+          <a:p>
+            <a:pPr algn="l">
+              <a:lnSpc>
+                <a:spcPct val="100000"/>
+              </a:lnSpc>
+              <a:spcBef>
+                <a:spcPts val="0"/>
+              </a:spcBef>
+              <a:spcAft>
+                <a:spcPts val="0"/>
+              </a:spcAft>
+            </a:pPr>
+            <a:r>
+              <a:rPr sz="1050" b="1" i="0">
+                <a:solidFill>
+                  <a:srgbClr val="1B3E6E"/>
+                </a:solidFill>
+                <a:latin typeface="Arial"/>
+              </a:rPr>
+              <a:t>The partnership equation</a:t>
+            </a:r>
+          </a:p>
+        </p:txBody>
+      </p:sp>
+      <p:sp>
+        <p:nvSpPr>
+          <p:cNvPr id="23" name="Rectangle 22"/>
+          <p:cNvSpPr/>
+          <p:nvPr/>
+        </p:nvSpPr>
+        <p:spPr>
+          <a:xfrm>
+            <a:off x="3063240" y="1645920"/>
+            <a:ext cx="5715000" cy="10972"/>
+          </a:xfrm>
+          <a:prstGeom prst="rect">
+            <a:avLst/>
+          </a:prstGeom>
+          <a:solidFill>
+            <a:srgbClr val="BFBFBF"/>
+          </a:solidFill>
+          <a:ln>
+            <a:noFill/>
+          </a:ln>
+          <a:effectLst/>
+        </p:spPr>
+        <p:style>
+          <a:lnRef idx="1">
+            <a:schemeClr val="accent1"/>
+          </a:lnRef>
+          <a:fillRef idx="3">
+            <a:schemeClr val="accent1"/>
+          </a:fillRef>
+          <a:effectRef idx="2">
+            <a:schemeClr val="accent1"/>
+          </a:effectRef>
+          <a:fontRef idx="minor">
+            <a:schemeClr val="lt1"/>
+          </a:fontRef>
+        </p:style>
+        <p:txBody>
+          <a:bodyPr rtlCol="0" anchor="ctr"/>
+          <a:lstStyle/>
+          <a:p>
+            <a:pPr algn="ctr"/>
+          </a:p>
+        </p:txBody>
+      </p:sp>
+      <p:sp>
+        <p:nvSpPr>
+          <p:cNvPr id="24" name="Oval 23"/>
+          <p:cNvSpPr/>
+          <p:nvPr/>
+        </p:nvSpPr>
+        <p:spPr>
+          <a:xfrm>
+            <a:off x="4009644" y="1755648"/>
+            <a:ext cx="969264" cy="804672"/>
+          </a:xfrm>
+          <a:prstGeom prst="ellipse">
+            <a:avLst/>
+          </a:prstGeom>
+          <a:solidFill>
+            <a:srgbClr val="EEF3F9"/>
+          </a:solidFill>
+          <a:ln w="13970">
+            <a:solidFill>
+              <a:srgbClr val="1B3E6E"/>
+            </a:solidFill>
+          </a:ln>
+          <a:effectLst/>
+        </p:spPr>
+        <p:style>
+          <a:lnRef idx="1">
+            <a:schemeClr val="accent1"/>
+          </a:lnRef>
+          <a:fillRef idx="3">
+            <a:schemeClr val="accent1"/>
+          </a:fillRef>
+          <a:effectRef idx="2">
+            <a:schemeClr val="accent1"/>
+          </a:effectRef>
+          <a:fontRef idx="minor">
+            <a:schemeClr val="lt1"/>
+          </a:fontRef>
+        </p:style>
+        <p:txBody>
+          <a:bodyPr rtlCol="0" anchor="ctr"/>
+          <a:lstStyle/>
+          <a:p>
+            <a:pPr algn="ctr"/>
+          </a:p>
+        </p:txBody>
+      </p:sp>
+      <p:sp>
+        <p:nvSpPr>
+          <p:cNvPr id="25" name="TextBox 24"/>
+          <p:cNvSpPr txBox="1"/>
+          <p:nvPr/>
+        </p:nvSpPr>
+        <p:spPr>
+          <a:xfrm>
+            <a:off x="4009644" y="1856231"/>
+            <a:ext cx="969264" cy="603504"/>
+          </a:xfrm>
+          <a:prstGeom prst="rect">
+            <a:avLst/>
+          </a:prstGeom>
+          <a:noFill/>
+        </p:spPr>
+        <p:txBody>
+          <a:bodyPr wrap="square" lIns="0" rIns="0" tIns="0" bIns="0" anchor="ctr">
+            <a:spAutoFit/>
+          </a:bodyPr>
+          <a:lstStyle/>
+          <a:p>
+            <a:pPr algn="ctr">
+              <a:lnSpc>
+                <a:spcPct val="90000"/>
+              </a:lnSpc>
+              <a:spcBef>
+                <a:spcPts val="0"/>
+              </a:spcBef>
+              <a:spcAft>
+                <a:spcPts val="0"/>
+              </a:spcAft>
+            </a:pPr>
+            <a:r>
+              <a:rPr sz="700" b="1" i="0">
+                <a:solidFill>
+                  <a:srgbClr val="1B3E6E"/>
+                </a:solidFill>
+                <a:latin typeface="Arial"/>
+              </a:rPr>
+              <a:t>GS $250k
+catalytic
+capital</a:t>
+            </a:r>
+          </a:p>
+        </p:txBody>
+      </p:sp>
+      <p:sp>
+        <p:nvSpPr>
+          <p:cNvPr id="26" name="Plus 25"/>
+          <p:cNvSpPr/>
+          <p:nvPr/>
+        </p:nvSpPr>
+        <p:spPr>
+          <a:xfrm>
+            <a:off x="5088636" y="2048255"/>
+            <a:ext cx="237744" cy="219456"/>
+          </a:xfrm>
+          <a:prstGeom prst="mathPlus">
+            <a:avLst/>
+          </a:prstGeom>
+          <a:solidFill>
+            <a:srgbClr val="1B3E6E"/>
+          </a:solidFill>
+          <a:ln>
+            <a:noFill/>
+          </a:ln>
+          <a:effectLst/>
+        </p:spPr>
+        <p:style>
+          <a:lnRef idx="1">
+            <a:schemeClr val="accent1"/>
+          </a:lnRef>
+          <a:fillRef idx="3">
+            <a:schemeClr val="accent1"/>
+          </a:fillRef>
+          <a:effectRef idx="2">
+            <a:schemeClr val="accent1"/>
+          </a:effectRef>
+          <a:fontRef idx="minor">
+            <a:schemeClr val="lt1"/>
+          </a:fontRef>
+        </p:style>
+        <p:txBody>
+          <a:bodyPr rtlCol="0" anchor="ctr"/>
+          <a:lstStyle/>
+          <a:p>
+            <a:pPr algn="ctr"/>
+          </a:p>
+        </p:txBody>
+      </p:sp>
+      <p:sp>
+        <p:nvSpPr>
+          <p:cNvPr id="27" name="Oval 26"/>
+          <p:cNvSpPr/>
+          <p:nvPr/>
+        </p:nvSpPr>
+        <p:spPr>
+          <a:xfrm>
+            <a:off x="5436108" y="1755648"/>
+            <a:ext cx="969264" cy="804672"/>
+          </a:xfrm>
+          <a:prstGeom prst="ellipse">
+            <a:avLst/>
+          </a:prstGeom>
+          <a:solidFill>
+            <a:srgbClr val="FDF6E0"/>
+          </a:solidFill>
+          <a:ln w="13970">
+            <a:solidFill>
+              <a:srgbClr val="E08A1E"/>
+            </a:solidFill>
+          </a:ln>
+          <a:effectLst/>
+        </p:spPr>
+        <p:style>
+          <a:lnRef idx="1">
+            <a:schemeClr val="accent1"/>
+          </a:lnRef>
+          <a:fillRef idx="3">
+            <a:schemeClr val="accent1"/>
+          </a:fillRef>
+          <a:effectRef idx="2">
+            <a:schemeClr val="accent1"/>
+          </a:effectRef>
+          <a:fontRef idx="minor">
+            <a:schemeClr val="lt1"/>
+          </a:fontRef>
+        </p:style>
+        <p:txBody>
+          <a:bodyPr rtlCol="0" anchor="ctr"/>
+          <a:lstStyle/>
+          <a:p>
+            <a:pPr algn="ctr"/>
+          </a:p>
+        </p:txBody>
+      </p:sp>
+      <p:sp>
+        <p:nvSpPr>
+          <p:cNvPr id="28" name="TextBox 27"/>
+          <p:cNvSpPr txBox="1"/>
+          <p:nvPr/>
+        </p:nvSpPr>
+        <p:spPr>
+          <a:xfrm>
+            <a:off x="5436108" y="1856231"/>
+            <a:ext cx="969264" cy="603504"/>
+          </a:xfrm>
+          <a:prstGeom prst="rect">
+            <a:avLst/>
+          </a:prstGeom>
+          <a:noFill/>
+        </p:spPr>
+        <p:txBody>
+          <a:bodyPr wrap="square" lIns="0" rIns="0" tIns="0" bIns="0" anchor="ctr">
+            <a:spAutoFit/>
+          </a:bodyPr>
+          <a:lstStyle/>
+          <a:p>
+            <a:pPr algn="ctr">
+              <a:lnSpc>
+                <a:spcPct val="90000"/>
+              </a:lnSpc>
+              <a:spcBef>
+                <a:spcPts val="0"/>
+              </a:spcBef>
+              <a:spcAft>
+                <a:spcPts val="0"/>
+              </a:spcAft>
+            </a:pPr>
+            <a:r>
+              <a:rPr sz="700" b="1" i="0">
+                <a:solidFill>
+                  <a:srgbClr val="E08A1E"/>
+                </a:solidFill>
+                <a:latin typeface="Arial"/>
+              </a:rPr>
+              <a:t>AP's 2.35M
+meals-a-day
+engine</a:t>
+            </a:r>
+          </a:p>
+        </p:txBody>
+      </p:sp>
+      <p:sp>
+        <p:nvSpPr>
+          <p:cNvPr id="29" name="Equal 28"/>
+          <p:cNvSpPr/>
+          <p:nvPr/>
+        </p:nvSpPr>
+        <p:spPr>
+          <a:xfrm>
+            <a:off x="6515100" y="2048255"/>
+            <a:ext cx="237744" cy="219456"/>
+          </a:xfrm>
+          <a:prstGeom prst="mathEqual">
+            <a:avLst/>
+          </a:prstGeom>
+          <a:solidFill>
+            <a:srgbClr val="1B3E6E"/>
+          </a:solidFill>
+          <a:ln>
+            <a:noFill/>
+          </a:ln>
+          <a:effectLst/>
+        </p:spPr>
+        <p:style>
+          <a:lnRef idx="1">
+            <a:schemeClr val="accent1"/>
+          </a:lnRef>
+          <a:fillRef idx="3">
+            <a:schemeClr val="accent1"/>
+          </a:fillRef>
+          <a:effectRef idx="2">
+            <a:schemeClr val="accent1"/>
+          </a:effectRef>
+          <a:fontRef idx="minor">
+            <a:schemeClr val="lt1"/>
+          </a:fontRef>
+        </p:style>
+        <p:txBody>
+          <a:bodyPr rtlCol="0" anchor="ctr"/>
+          <a:lstStyle/>
+          <a:p>
+            <a:pPr algn="ctr"/>
+          </a:p>
+        </p:txBody>
+      </p:sp>
+      <p:sp>
+        <p:nvSpPr>
+          <p:cNvPr id="30" name="Oval 29"/>
+          <p:cNvSpPr/>
+          <p:nvPr/>
+        </p:nvSpPr>
+        <p:spPr>
+          <a:xfrm>
+            <a:off x="6862572" y="1755648"/>
+            <a:ext cx="969264" cy="804672"/>
+          </a:xfrm>
+          <a:prstGeom prst="ellipse">
+            <a:avLst/>
+          </a:prstGeom>
+          <a:solidFill>
+            <a:srgbClr val="EAF3E6"/>
+          </a:solidFill>
+          <a:ln w="13970">
+            <a:solidFill>
+              <a:srgbClr val="398025"/>
+            </a:solidFill>
+          </a:ln>
+          <a:effectLst/>
+        </p:spPr>
+        <p:style>
+          <a:lnRef idx="1">
+            <a:schemeClr val="accent1"/>
+          </a:lnRef>
+          <a:fillRef idx="3">
+            <a:schemeClr val="accent1"/>
+          </a:fillRef>
+          <a:effectRef idx="2">
+            <a:schemeClr val="accent1"/>
+          </a:effectRef>
+          <a:fontRef idx="minor">
+            <a:schemeClr val="lt1"/>
+          </a:fontRef>
+        </p:style>
+        <p:txBody>
+          <a:bodyPr rtlCol="0" anchor="ctr"/>
+          <a:lstStyle/>
+          <a:p>
+            <a:pPr algn="ctr"/>
+          </a:p>
+        </p:txBody>
+      </p:sp>
+      <p:sp>
+        <p:nvSpPr>
+          <p:cNvPr id="31" name="TextBox 30"/>
+          <p:cNvSpPr txBox="1"/>
+          <p:nvPr/>
+        </p:nvSpPr>
+        <p:spPr>
+          <a:xfrm>
+            <a:off x="6862572" y="1856231"/>
+            <a:ext cx="969264" cy="603504"/>
+          </a:xfrm>
+          <a:prstGeom prst="rect">
+            <a:avLst/>
+          </a:prstGeom>
+          <a:noFill/>
+        </p:spPr>
+        <p:txBody>
+          <a:bodyPr wrap="square" lIns="0" rIns="0" tIns="0" bIns="0" anchor="ctr">
+            <a:spAutoFit/>
+          </a:bodyPr>
+          <a:lstStyle/>
+          <a:p>
+            <a:pPr algn="ctr">
+              <a:lnSpc>
+                <a:spcPct val="90000"/>
+              </a:lnSpc>
+              <a:spcBef>
+                <a:spcPts val="0"/>
+              </a:spcBef>
+              <a:spcAft>
+                <a:spcPts val="0"/>
+              </a:spcAft>
+            </a:pPr>
+            <a:r>
+              <a:rPr sz="700" b="1" i="0">
+                <a:solidFill>
+                  <a:srgbClr val="398025"/>
+                </a:solidFill>
+                <a:latin typeface="Arial"/>
+              </a:rPr>
+              <a:t>Impact that
+compounds
+yearly</a:t>
+            </a:r>
+          </a:p>
+        </p:txBody>
+      </p:sp>
+      <p:sp>
+        <p:nvSpPr>
+          <p:cNvPr id="32" name="TextBox 31"/>
+          <p:cNvSpPr txBox="1"/>
+          <p:nvPr/>
+        </p:nvSpPr>
+        <p:spPr>
+          <a:xfrm>
+            <a:off x="3063240" y="2606039"/>
+            <a:ext cx="5715000" cy="219456"/>
+          </a:xfrm>
+          <a:prstGeom prst="rect">
+            <a:avLst/>
+          </a:prstGeom>
+          <a:noFill/>
+        </p:spPr>
+        <p:txBody>
+          <a:bodyPr wrap="square" lIns="0" rIns="0" tIns="0" bIns="0" anchor="t">
+            <a:spAutoFit/>
+          </a:bodyPr>
+          <a:lstStyle/>
+          <a:p>
+            <a:pPr algn="ctr">
+              <a:lnSpc>
+                <a:spcPct val="100000"/>
+              </a:lnSpc>
+              <a:spcBef>
+                <a:spcPts val="0"/>
+              </a:spcBef>
+              <a:spcAft>
+                <a:spcPts val="0"/>
+              </a:spcAft>
+            </a:pPr>
+            <a:r>
+              <a:rPr sz="700" b="0" i="1">
+                <a:solidFill>
+                  <a:srgbClr val="727375"/>
+                </a:solidFill>
+                <a:latin typeface="Arial"/>
+              </a:rPr>
+              <a:t>One-time capital → permanent capability → recurring savings → more children in school, every year after Year 1</a:t>
+            </a:r>
+          </a:p>
+        </p:txBody>
+      </p:sp>
+      <p:sp>
+        <p:nvSpPr>
+          <p:cNvPr id="33" name="Rectangle 32"/>
+          <p:cNvSpPr/>
+          <p:nvPr/>
+        </p:nvSpPr>
+        <p:spPr>
+          <a:xfrm>
+            <a:off x="3063240" y="2916936"/>
+            <a:ext cx="54864" cy="182880"/>
+          </a:xfrm>
+          <a:prstGeom prst="rect">
+            <a:avLst/>
+          </a:prstGeom>
+          <a:solidFill>
+            <a:srgbClr val="1B3E6E"/>
+          </a:solidFill>
+          <a:ln>
+            <a:noFill/>
+          </a:ln>
+          <a:effectLst/>
+        </p:spPr>
+        <p:style>
+          <a:lnRef idx="1">
+            <a:schemeClr val="accent1"/>
+          </a:lnRef>
+          <a:fillRef idx="3">
+            <a:schemeClr val="accent1"/>
+          </a:fillRef>
+          <a:effectRef idx="2">
+            <a:schemeClr val="accent1"/>
+          </a:effectRef>
+          <a:fontRef idx="minor">
+            <a:schemeClr val="lt1"/>
+          </a:fontRef>
+        </p:style>
+        <p:txBody>
+          <a:bodyPr rtlCol="0" anchor="ctr"/>
+          <a:lstStyle/>
+          <a:p>
+            <a:pPr algn="ctr"/>
+          </a:p>
+        </p:txBody>
+      </p:sp>
+      <p:sp>
+        <p:nvSpPr>
+          <p:cNvPr id="34" name="TextBox 33"/>
+          <p:cNvSpPr txBox="1"/>
+          <p:nvPr/>
+        </p:nvSpPr>
+        <p:spPr>
+          <a:xfrm>
+            <a:off x="3209544" y="2889504"/>
+            <a:ext cx="5568696" cy="256032"/>
+          </a:xfrm>
+          <a:prstGeom prst="rect">
+            <a:avLst/>
+          </a:prstGeom>
+          <a:noFill/>
+        </p:spPr>
+        <p:txBody>
+          <a:bodyPr wrap="square" lIns="0" rIns="0" tIns="0" bIns="0" anchor="t">
+            <a:spAutoFit/>
+          </a:bodyPr>
+          <a:lstStyle/>
+          <a:p>
+            <a:pPr algn="l">
+              <a:lnSpc>
+                <a:spcPct val="100000"/>
+              </a:lnSpc>
+              <a:spcBef>
+                <a:spcPts val="0"/>
+              </a:spcBef>
+              <a:spcAft>
+                <a:spcPts val="0"/>
+              </a:spcAft>
+            </a:pPr>
+            <a:r>
+              <a:rPr sz="1050" b="1" i="0">
+                <a:solidFill>
+                  <a:srgbClr val="1B3E6E"/>
+                </a:solidFill>
+                <a:latin typeface="Arial"/>
+              </a:rPr>
+              <a:t>Why the GS grant stands out here</a:t>
+            </a:r>
+          </a:p>
+        </p:txBody>
+      </p:sp>
+      <p:sp>
+        <p:nvSpPr>
+          <p:cNvPr id="35" name="Rectangle 34"/>
+          <p:cNvSpPr/>
+          <p:nvPr/>
+        </p:nvSpPr>
+        <p:spPr>
+          <a:xfrm>
+            <a:off x="3063240" y="3163824"/>
+            <a:ext cx="5715000" cy="10972"/>
+          </a:xfrm>
+          <a:prstGeom prst="rect">
+            <a:avLst/>
+          </a:prstGeom>
+          <a:solidFill>
+            <a:srgbClr val="BFBFBF"/>
+          </a:solidFill>
+          <a:ln>
+            <a:noFill/>
+          </a:ln>
+          <a:effectLst/>
+        </p:spPr>
+        <p:style>
+          <a:lnRef idx="1">
+            <a:schemeClr val="accent1"/>
+          </a:lnRef>
+          <a:fillRef idx="3">
+            <a:schemeClr val="accent1"/>
+          </a:fillRef>
+          <a:effectRef idx="2">
+            <a:schemeClr val="accent1"/>
+          </a:effectRef>
+          <a:fontRef idx="minor">
+            <a:schemeClr val="lt1"/>
+          </a:fontRef>
+        </p:style>
+        <p:txBody>
+          <a:bodyPr rtlCol="0" anchor="ctr"/>
+          <a:lstStyle/>
+          <a:p>
+            <a:pPr algn="ctr"/>
+          </a:p>
+        </p:txBody>
+      </p:sp>
+      <p:sp>
+        <p:nvSpPr>
+          <p:cNvPr id="36" name="TextBox 35"/>
+          <p:cNvSpPr txBox="1"/>
+          <p:nvPr/>
+        </p:nvSpPr>
+        <p:spPr>
+          <a:xfrm>
+            <a:off x="3063240" y="3255264"/>
+            <a:ext cx="5715000" cy="384048"/>
+          </a:xfrm>
+          <a:prstGeom prst="rect">
+            <a:avLst/>
+          </a:prstGeom>
+          <a:noFill/>
+        </p:spPr>
+        <p:txBody>
+          <a:bodyPr wrap="square" lIns="0" rIns="0" tIns="0" bIns="0" anchor="t">
+            <a:spAutoFit/>
+          </a:bodyPr>
+          <a:lstStyle/>
+          <a:p>
+            <a:pPr algn="l">
+              <a:lnSpc>
+                <a:spcPct val="98000"/>
+              </a:lnSpc>
+              <a:spcBef>
+                <a:spcPts val="0"/>
+              </a:spcBef>
+              <a:spcAft>
+                <a:spcPts val="0"/>
+              </a:spcAft>
+            </a:pPr>
+            <a:r>
+              <a:rPr sz="760" b="1" i="0">
+                <a:solidFill>
+                  <a:srgbClr val="398025"/>
+                </a:solidFill>
+                <a:latin typeface="Arial"/>
+              </a:rPr>
+              <a:t>✓  Structural, not sustenance:  </a:t>
+            </a:r>
+            <a:r>
+              <a:rPr sz="760" b="0" i="0">
+                <a:solidFill>
+                  <a:srgbClr val="333333"/>
+                </a:solidFill>
+                <a:latin typeface="Arial"/>
+              </a:rPr>
+              <a:t>TAPF's own words: restricted funds “deliver meals today” but cannot build “the systems behind every meal” — GS funds exactly those systems</a:t>
+            </a:r>
+          </a:p>
+        </p:txBody>
+      </p:sp>
+      <p:sp>
+        <p:nvSpPr>
+          <p:cNvPr id="37" name="TextBox 36"/>
+          <p:cNvSpPr txBox="1"/>
+          <p:nvPr/>
+        </p:nvSpPr>
+        <p:spPr>
+          <a:xfrm>
+            <a:off x="3063240" y="3621024"/>
+            <a:ext cx="5715000" cy="384048"/>
+          </a:xfrm>
+          <a:prstGeom prst="rect">
+            <a:avLst/>
+          </a:prstGeom>
+          <a:noFill/>
+        </p:spPr>
+        <p:txBody>
+          <a:bodyPr wrap="square" lIns="0" rIns="0" tIns="0" bIns="0" anchor="t">
+            <a:spAutoFit/>
+          </a:bodyPr>
+          <a:lstStyle/>
+          <a:p>
+            <a:pPr algn="l">
+              <a:lnSpc>
+                <a:spcPct val="98000"/>
+              </a:lnSpc>
+              <a:spcBef>
+                <a:spcPts val="0"/>
+              </a:spcBef>
+              <a:spcAft>
+                <a:spcPts val="0"/>
+              </a:spcAft>
+            </a:pPr>
+            <a:r>
+              <a:rPr sz="760" b="1" i="0">
+                <a:solidFill>
+                  <a:srgbClr val="398025"/>
+                </a:solidFill>
+                <a:latin typeface="Arial"/>
+              </a:rPr>
+              <a:t>✓  Co-designed priorities:  </a:t>
+            </a:r>
+            <a:r>
+              <a:rPr sz="760" b="0" i="0">
+                <a:solidFill>
+                  <a:srgbClr val="333333"/>
+                </a:solidFill>
+                <a:latin typeface="Arial"/>
+              </a:rPr>
+              <a:t>forecasting &amp; real-time fleet visibility are TAPF's self-declared top tech gaps; logistics tech ranked #1 for grant ROI</a:t>
+            </a:r>
+          </a:p>
+        </p:txBody>
+      </p:sp>
+      <p:sp>
+        <p:nvSpPr>
+          <p:cNvPr id="38" name="TextBox 37"/>
+          <p:cNvSpPr txBox="1"/>
+          <p:nvPr/>
+        </p:nvSpPr>
+        <p:spPr>
+          <a:xfrm>
+            <a:off x="3063240" y="3986784"/>
+            <a:ext cx="5715000" cy="384048"/>
+          </a:xfrm>
+          <a:prstGeom prst="rect">
+            <a:avLst/>
+          </a:prstGeom>
+          <a:noFill/>
+        </p:spPr>
+        <p:txBody>
+          <a:bodyPr wrap="square" lIns="0" rIns="0" tIns="0" bIns="0" anchor="t">
+            <a:spAutoFit/>
+          </a:bodyPr>
+          <a:lstStyle/>
+          <a:p>
+            <a:pPr algn="l">
+              <a:lnSpc>
+                <a:spcPct val="98000"/>
+              </a:lnSpc>
+              <a:spcBef>
+                <a:spcPts val="0"/>
+              </a:spcBef>
+              <a:spcAft>
+                <a:spcPts val="0"/>
+              </a:spcAft>
+            </a:pPr>
+            <a:r>
+              <a:rPr sz="760" b="1" i="0">
+                <a:solidFill>
+                  <a:srgbClr val="398025"/>
+                </a:solidFill>
+                <a:latin typeface="Arial"/>
+              </a:rPr>
+              <a:t>✓  Plays to GS DNA:  </a:t>
+            </a:r>
+            <a:r>
+              <a:rPr sz="760" b="0" i="0">
+                <a:solidFill>
+                  <a:srgbClr val="333333"/>
+                </a:solidFill>
+                <a:latin typeface="Arial"/>
+              </a:rPr>
+              <a:t>forecasting, optimisation &amp; risk controls — with GS engineering mentorship pro bono</a:t>
+            </a:r>
+          </a:p>
+        </p:txBody>
+      </p:sp>
+      <p:sp>
+        <p:nvSpPr>
+          <p:cNvPr id="39" name="TextBox 38"/>
+          <p:cNvSpPr txBox="1"/>
+          <p:nvPr/>
+        </p:nvSpPr>
+        <p:spPr>
+          <a:xfrm>
+            <a:off x="3063240" y="4352544"/>
+            <a:ext cx="5715000" cy="384048"/>
+          </a:xfrm>
+          <a:prstGeom prst="rect">
+            <a:avLst/>
+          </a:prstGeom>
+          <a:noFill/>
+        </p:spPr>
+        <p:txBody>
+          <a:bodyPr wrap="square" lIns="0" rIns="0" tIns="0" bIns="0" anchor="t">
+            <a:spAutoFit/>
+          </a:bodyPr>
+          <a:lstStyle/>
+          <a:p>
+            <a:pPr algn="l">
+              <a:lnSpc>
+                <a:spcPct val="98000"/>
+              </a:lnSpc>
+              <a:spcBef>
+                <a:spcPts val="0"/>
+              </a:spcBef>
+              <a:spcAft>
+                <a:spcPts val="0"/>
+              </a:spcAft>
+            </a:pPr>
+            <a:r>
+              <a:rPr sz="760" b="1" i="0">
+                <a:solidFill>
+                  <a:srgbClr val="398025"/>
+                </a:solidFill>
+                <a:latin typeface="Arial"/>
+              </a:rPr>
+              <a:t>✓  Measurable ROI:  </a:t>
+            </a:r>
+            <a:r>
+              <a:rPr sz="760" b="0" i="0">
+                <a:solidFill>
+                  <a:srgbClr val="333333"/>
+                </a:solidFill>
+                <a:latin typeface="Arial"/>
+              </a:rPr>
+              <a:t>audited savings against a ₹450 Cr+ procurement base; quarterly KPI dashboard to GS</a:t>
+            </a:r>
+          </a:p>
+        </p:txBody>
+      </p:sp>
+      <p:sp>
+        <p:nvSpPr>
+          <p:cNvPr id="40" name="TextBox 39"/>
+          <p:cNvSpPr txBox="1"/>
+          <p:nvPr/>
+        </p:nvSpPr>
+        <p:spPr>
+          <a:xfrm>
+            <a:off x="3063240" y="4718304"/>
+            <a:ext cx="5715000" cy="384048"/>
+          </a:xfrm>
+          <a:prstGeom prst="rect">
+            <a:avLst/>
+          </a:prstGeom>
+          <a:noFill/>
+        </p:spPr>
+        <p:txBody>
+          <a:bodyPr wrap="square" lIns="0" rIns="0" tIns="0" bIns="0" anchor="t">
+            <a:spAutoFit/>
+          </a:bodyPr>
+          <a:lstStyle/>
+          <a:p>
+            <a:pPr algn="l">
+              <a:lnSpc>
+                <a:spcPct val="98000"/>
+              </a:lnSpc>
+              <a:spcBef>
+                <a:spcPts val="0"/>
+              </a:spcBef>
+              <a:spcAft>
+                <a:spcPts val="0"/>
+              </a:spcAft>
+            </a:pPr>
+            <a:r>
+              <a:rPr sz="760" b="1" i="0">
+                <a:solidFill>
+                  <a:srgbClr val="398025"/>
+                </a:solidFill>
+                <a:latin typeface="Arial"/>
+              </a:rPr>
+              <a:t>✓  Compounding &amp; green:  </a:t>
+            </a:r>
+            <a:r>
+              <a:rPr sz="760" b="0" i="0">
+                <a:solidFill>
+                  <a:srgbClr val="333333"/>
+                </a:solidFill>
+                <a:latin typeface="Arial"/>
+              </a:rPr>
+              <a:t>savings recur yearly and support TAPF's 50% renewable-by-2030 and EV-fleet-by-2035 goals</a:t>
+            </a:r>
+          </a:p>
+        </p:txBody>
+      </p:sp>
+      <p:sp>
+        <p:nvSpPr>
+          <p:cNvPr id="41" name="Rectangle 40"/>
+          <p:cNvSpPr/>
+          <p:nvPr/>
+        </p:nvSpPr>
+        <p:spPr>
+          <a:xfrm>
+            <a:off x="365760" y="5001768"/>
+            <a:ext cx="54864" cy="182880"/>
+          </a:xfrm>
+          <a:prstGeom prst="rect">
+            <a:avLst/>
+          </a:prstGeom>
+          <a:solidFill>
+            <a:srgbClr val="E08A1E"/>
+          </a:solidFill>
+          <a:ln>
+            <a:noFill/>
+          </a:ln>
+          <a:effectLst/>
+        </p:spPr>
+        <p:style>
+          <a:lnRef idx="1">
+            <a:schemeClr val="accent1"/>
+          </a:lnRef>
+          <a:fillRef idx="3">
+            <a:schemeClr val="accent1"/>
+          </a:fillRef>
+          <a:effectRef idx="2">
+            <a:schemeClr val="accent1"/>
+          </a:effectRef>
+          <a:fontRef idx="minor">
+            <a:schemeClr val="lt1"/>
+          </a:fontRef>
+        </p:style>
+        <p:txBody>
+          <a:bodyPr rtlCol="0" anchor="ctr"/>
+          <a:lstStyle/>
+          <a:p>
+            <a:pPr algn="ctr"/>
+          </a:p>
+        </p:txBody>
+      </p:sp>
+      <p:sp>
+        <p:nvSpPr>
+          <p:cNvPr id="42" name="TextBox 41"/>
+          <p:cNvSpPr txBox="1"/>
+          <p:nvPr/>
+        </p:nvSpPr>
+        <p:spPr>
+          <a:xfrm>
+            <a:off x="512064" y="4974336"/>
+            <a:ext cx="8266175" cy="256032"/>
+          </a:xfrm>
+          <a:prstGeom prst="rect">
+            <a:avLst/>
+          </a:prstGeom>
+          <a:noFill/>
+        </p:spPr>
+        <p:txBody>
+          <a:bodyPr wrap="square" lIns="0" rIns="0" tIns="0" bIns="0" anchor="t">
+            <a:spAutoFit/>
+          </a:bodyPr>
+          <a:lstStyle/>
+          <a:p>
+            <a:pPr algn="l">
+              <a:lnSpc>
+                <a:spcPct val="100000"/>
+              </a:lnSpc>
+              <a:spcBef>
+                <a:spcPts val="0"/>
+              </a:spcBef>
+              <a:spcAft>
+                <a:spcPts val="0"/>
+              </a:spcAft>
+            </a:pPr>
+            <a:r>
+              <a:rPr sz="1050" b="1" i="0">
+                <a:solidFill>
+                  <a:srgbClr val="1B3E6E"/>
+                </a:solidFill>
+                <a:latin typeface="Arial"/>
+              </a:rPr>
+              <a:t>Proven track record</a:t>
+            </a:r>
+          </a:p>
+        </p:txBody>
+      </p:sp>
+      <p:sp>
+        <p:nvSpPr>
+          <p:cNvPr id="43" name="Rectangle 42"/>
+          <p:cNvSpPr/>
+          <p:nvPr/>
+        </p:nvSpPr>
+        <p:spPr>
+          <a:xfrm>
+            <a:off x="365760" y="5248656"/>
+            <a:ext cx="8412480" cy="10972"/>
+          </a:xfrm>
+          <a:prstGeom prst="rect">
+            <a:avLst/>
+          </a:prstGeom>
+          <a:solidFill>
+            <a:srgbClr val="BFBFBF"/>
+          </a:solidFill>
+          <a:ln>
+            <a:noFill/>
+          </a:ln>
+          <a:effectLst/>
+        </p:spPr>
+        <p:style>
+          <a:lnRef idx="1">
+            <a:schemeClr val="accent1"/>
+          </a:lnRef>
+          <a:fillRef idx="3">
+            <a:schemeClr val="accent1"/>
+          </a:fillRef>
+          <a:effectRef idx="2">
+            <a:schemeClr val="accent1"/>
+          </a:effectRef>
+          <a:fontRef idx="minor">
+            <a:schemeClr val="lt1"/>
+          </a:fontRef>
+        </p:style>
+        <p:txBody>
+          <a:bodyPr rtlCol="0" anchor="ctr"/>
+          <a:lstStyle/>
+          <a:p>
+            <a:pPr algn="ctr"/>
+          </a:p>
+        </p:txBody>
+      </p:sp>
+      <p:sp>
+        <p:nvSpPr>
+          <p:cNvPr id="44" name="Rectangle 43"/>
+          <p:cNvSpPr/>
+          <p:nvPr/>
+        </p:nvSpPr>
+        <p:spPr>
+          <a:xfrm>
+            <a:off x="365760" y="5376672"/>
+            <a:ext cx="502920" cy="566928"/>
+          </a:xfrm>
+          <a:prstGeom prst="rect">
+            <a:avLst/>
+          </a:prstGeom>
+          <a:solidFill>
+            <a:srgbClr val="F2F2F2"/>
+          </a:solidFill>
+          <a:ln w="12700">
+            <a:solidFill>
+              <a:srgbClr val="727375"/>
+            </a:solidFill>
+            <a:prstDash val="dash"/>
+          </a:ln>
+          <a:effectLst/>
+        </p:spPr>
+        <p:style>
+          <a:lnRef idx="1">
+            <a:schemeClr val="accent1"/>
+          </a:lnRef>
+          <a:fillRef idx="3">
+            <a:schemeClr val="accent1"/>
+          </a:fillRef>
+          <a:effectRef idx="2">
+            <a:schemeClr val="accent1"/>
+          </a:effectRef>
+          <a:fontRef idx="minor">
+            <a:schemeClr val="lt1"/>
+          </a:fontRef>
+        </p:style>
+        <p:txBody>
+          <a:bodyPr rtlCol="0" anchor="ctr"/>
+          <a:lstStyle/>
+          <a:p>
+            <a:pPr algn="ctr"/>
+          </a:p>
+        </p:txBody>
+      </p:sp>
+      <p:sp>
+        <p:nvSpPr>
+          <p:cNvPr id="45" name="TextBox 44"/>
+          <p:cNvSpPr txBox="1"/>
+          <p:nvPr/>
+        </p:nvSpPr>
+        <p:spPr>
+          <a:xfrm>
+            <a:off x="420624" y="5376672"/>
+            <a:ext cx="393192" cy="566928"/>
+          </a:xfrm>
+          <a:prstGeom prst="rect">
+            <a:avLst/>
+          </a:prstGeom>
+          <a:noFill/>
+        </p:spPr>
+        <p:txBody>
+          <a:bodyPr wrap="square" lIns="0" rIns="0" tIns="0" bIns="0" anchor="ctr">
+            <a:spAutoFit/>
+          </a:bodyPr>
+          <a:lstStyle/>
+          <a:p>
+            <a:pPr algn="ctr">
+              <a:lnSpc>
+                <a:spcPct val="100000"/>
+              </a:lnSpc>
+              <a:spcBef>
+                <a:spcPts val="0"/>
+              </a:spcBef>
+              <a:spcAft>
+                <a:spcPts val="100"/>
+              </a:spcAft>
+            </a:pPr>
+            <a:r>
+              <a:rPr sz="850" b="1" i="0">
+                <a:solidFill>
+                  <a:srgbClr val="727375"/>
+                </a:solidFill>
+                <a:latin typeface="Arial"/>
+              </a:rPr>
+              <a:t>📷</a:t>
+            </a:r>
+          </a:p>
+        </p:txBody>
+      </p:sp>
+      <p:sp>
+        <p:nvSpPr>
+          <p:cNvPr id="46" name="TextBox 45"/>
+          <p:cNvSpPr txBox="1"/>
+          <p:nvPr/>
+        </p:nvSpPr>
+        <p:spPr>
+          <a:xfrm>
+            <a:off x="969264" y="5376672"/>
+            <a:ext cx="2331720" cy="777240"/>
+          </a:xfrm>
+          <a:prstGeom prst="rect">
+            <a:avLst/>
+          </a:prstGeom>
+          <a:noFill/>
+        </p:spPr>
+        <p:txBody>
+          <a:bodyPr wrap="square" lIns="0" rIns="0" tIns="0" bIns="0" anchor="t">
+            <a:spAutoFit/>
+          </a:bodyPr>
+          <a:lstStyle/>
+          <a:p>
+            <a:pPr algn="l">
+              <a:lnSpc>
+                <a:spcPct val="100000"/>
+              </a:lnSpc>
+              <a:spcBef>
+                <a:spcPts val="0"/>
+              </a:spcBef>
+              <a:spcAft>
+                <a:spcPts val="100"/>
+              </a:spcAft>
+            </a:pPr>
+            <a:r>
+              <a:rPr sz="690" b="0" i="1">
+                <a:solidFill>
+                  <a:srgbClr val="333333"/>
+                </a:solidFill>
+                <a:latin typeface="Arial"/>
+              </a:rPr>
+              <a:t>“Everybody used to get enough food and it was very tasty.”</a:t>
+            </a:r>
+          </a:p>
+          <a:p>
+            <a:pPr algn="l">
+              <a:lnSpc>
+                <a:spcPct val="100000"/>
+              </a:lnSpc>
+              <a:spcBef>
+                <a:spcPts val="0"/>
+              </a:spcBef>
+              <a:spcAft>
+                <a:spcPts val="0"/>
+              </a:spcAft>
+            </a:pPr>
+            <a:r>
+              <a:rPr sz="660" b="1" i="0">
+                <a:solidFill>
+                  <a:srgbClr val="1B3E6E"/>
+                </a:solidFill>
+                <a:latin typeface="Arial"/>
+              </a:rPr>
+              <a:t>— Krishna Kumar, </a:t>
+            </a:r>
+            <a:r>
+              <a:rPr sz="660" b="0" i="0">
+                <a:solidFill>
+                  <a:srgbClr val="727375"/>
+                </a:solidFill>
+                <a:latin typeface="Arial"/>
+              </a:rPr>
+              <a:t>AVP, HSBC — programme alumnus</a:t>
+            </a:r>
+          </a:p>
+        </p:txBody>
+      </p:sp>
+      <p:sp>
+        <p:nvSpPr>
+          <p:cNvPr id="47" name="Rectangle 46"/>
+          <p:cNvSpPr/>
+          <p:nvPr/>
+        </p:nvSpPr>
+        <p:spPr>
+          <a:xfrm>
+            <a:off x="3401568" y="5376672"/>
+            <a:ext cx="10972" cy="658367"/>
+          </a:xfrm>
+          <a:prstGeom prst="rect">
+            <a:avLst/>
+          </a:prstGeom>
+          <a:solidFill>
+            <a:srgbClr val="DDDDDD"/>
+          </a:solidFill>
+          <a:ln>
+            <a:noFill/>
+          </a:ln>
+          <a:effectLst/>
+        </p:spPr>
+        <p:style>
+          <a:lnRef idx="1">
+            <a:schemeClr val="accent1"/>
+          </a:lnRef>
+          <a:fillRef idx="3">
+            <a:schemeClr val="accent1"/>
+          </a:fillRef>
+          <a:effectRef idx="2">
+            <a:schemeClr val="accent1"/>
+          </a:effectRef>
+          <a:fontRef idx="minor">
+            <a:schemeClr val="lt1"/>
+          </a:fontRef>
+        </p:style>
+        <p:txBody>
+          <a:bodyPr rtlCol="0" anchor="ctr"/>
+          <a:lstStyle/>
+          <a:p>
+            <a:pPr algn="ctr"/>
+          </a:p>
+        </p:txBody>
+      </p:sp>
+      <p:sp>
+        <p:nvSpPr>
+          <p:cNvPr id="48" name="Rectangle 47"/>
+          <p:cNvSpPr/>
+          <p:nvPr/>
+        </p:nvSpPr>
+        <p:spPr>
+          <a:xfrm>
+            <a:off x="3547872" y="5376672"/>
+            <a:ext cx="502920" cy="566928"/>
+          </a:xfrm>
+          <a:prstGeom prst="rect">
+            <a:avLst/>
+          </a:prstGeom>
+          <a:solidFill>
+            <a:srgbClr val="F2F2F2"/>
+          </a:solidFill>
+          <a:ln w="12700">
+            <a:solidFill>
+              <a:srgbClr val="727375"/>
+            </a:solidFill>
+            <a:prstDash val="dash"/>
+          </a:ln>
+          <a:effectLst/>
+        </p:spPr>
+        <p:style>
+          <a:lnRef idx="1">
+            <a:schemeClr val="accent1"/>
+          </a:lnRef>
+          <a:fillRef idx="3">
+            <a:schemeClr val="accent1"/>
+          </a:fillRef>
+          <a:effectRef idx="2">
+            <a:schemeClr val="accent1"/>
+          </a:effectRef>
+          <a:fontRef idx="minor">
+            <a:schemeClr val="lt1"/>
+          </a:fontRef>
+        </p:style>
+        <p:txBody>
+          <a:bodyPr rtlCol="0" anchor="ctr"/>
+          <a:lstStyle/>
+          <a:p>
+            <a:pPr algn="ctr"/>
+          </a:p>
+        </p:txBody>
+      </p:sp>
+      <p:sp>
+        <p:nvSpPr>
+          <p:cNvPr id="49" name="TextBox 48"/>
+          <p:cNvSpPr txBox="1"/>
+          <p:nvPr/>
+        </p:nvSpPr>
+        <p:spPr>
+          <a:xfrm>
+            <a:off x="3602736" y="5376672"/>
+            <a:ext cx="393192" cy="566928"/>
+          </a:xfrm>
+          <a:prstGeom prst="rect">
+            <a:avLst/>
+          </a:prstGeom>
+          <a:noFill/>
+        </p:spPr>
+        <p:txBody>
+          <a:bodyPr wrap="square" lIns="0" rIns="0" tIns="0" bIns="0" anchor="ctr">
+            <a:spAutoFit/>
+          </a:bodyPr>
+          <a:lstStyle/>
+          <a:p>
+            <a:pPr algn="ctr">
+              <a:lnSpc>
+                <a:spcPct val="100000"/>
+              </a:lnSpc>
+              <a:spcBef>
+                <a:spcPts val="0"/>
+              </a:spcBef>
+              <a:spcAft>
+                <a:spcPts val="100"/>
+              </a:spcAft>
+            </a:pPr>
+            <a:r>
+              <a:rPr sz="850" b="1" i="0">
+                <a:solidFill>
+                  <a:srgbClr val="727375"/>
+                </a:solidFill>
+                <a:latin typeface="Arial"/>
+              </a:rPr>
+              <a:t>📷</a:t>
+            </a:r>
+          </a:p>
+        </p:txBody>
+      </p:sp>
+      <p:sp>
+        <p:nvSpPr>
+          <p:cNvPr id="50" name="TextBox 49"/>
+          <p:cNvSpPr txBox="1"/>
+          <p:nvPr/>
+        </p:nvSpPr>
+        <p:spPr>
+          <a:xfrm>
+            <a:off x="4151376" y="5376672"/>
+            <a:ext cx="2240280" cy="777240"/>
+          </a:xfrm>
+          <a:prstGeom prst="rect">
+            <a:avLst/>
+          </a:prstGeom>
+          <a:noFill/>
+        </p:spPr>
+        <p:txBody>
+          <a:bodyPr wrap="square" lIns="0" rIns="0" tIns="0" bIns="0" anchor="t">
+            <a:spAutoFit/>
+          </a:bodyPr>
+          <a:lstStyle/>
+          <a:p>
+            <a:pPr algn="l">
+              <a:lnSpc>
+                <a:spcPct val="100000"/>
+              </a:lnSpc>
+              <a:spcBef>
+                <a:spcPts val="0"/>
+              </a:spcBef>
+              <a:spcAft>
+                <a:spcPts val="100"/>
+              </a:spcAft>
+            </a:pPr>
+            <a:r>
+              <a:rPr sz="690" b="0" i="1">
+                <a:solidFill>
+                  <a:srgbClr val="333333"/>
+                </a:solidFill>
+                <a:latin typeface="Arial"/>
+              </a:rPr>
+              <a:t>“My dream is to become financially strong so I can support others the way I was supported.”</a:t>
+            </a:r>
+          </a:p>
+          <a:p>
+            <a:pPr algn="l">
+              <a:lnSpc>
+                <a:spcPct val="100000"/>
+              </a:lnSpc>
+              <a:spcBef>
+                <a:spcPts val="0"/>
+              </a:spcBef>
+              <a:spcAft>
+                <a:spcPts val="0"/>
+              </a:spcAft>
+            </a:pPr>
+            <a:r>
+              <a:rPr sz="660" b="1" i="0">
+                <a:solidFill>
+                  <a:srgbClr val="1B3E6E"/>
+                </a:solidFill>
+                <a:latin typeface="Arial"/>
+              </a:rPr>
+              <a:t>— Suma, </a:t>
+            </a:r>
+            <a:r>
+              <a:rPr sz="660" b="0" i="0">
+                <a:solidFill>
+                  <a:srgbClr val="727375"/>
+                </a:solidFill>
+                <a:latin typeface="Arial"/>
+              </a:rPr>
+              <a:t>Purchasing Analyst, Palo Alto Networks</a:t>
+            </a:r>
+          </a:p>
+        </p:txBody>
+      </p:sp>
+      <p:sp>
+        <p:nvSpPr>
+          <p:cNvPr id="51" name="Rectangle 50"/>
+          <p:cNvSpPr/>
+          <p:nvPr/>
+        </p:nvSpPr>
+        <p:spPr>
+          <a:xfrm>
+            <a:off x="6510528" y="5376672"/>
+            <a:ext cx="10972" cy="658367"/>
+          </a:xfrm>
+          <a:prstGeom prst="rect">
+            <a:avLst/>
+          </a:prstGeom>
+          <a:solidFill>
+            <a:srgbClr val="DDDDDD"/>
+          </a:solidFill>
+          <a:ln>
+            <a:noFill/>
+          </a:ln>
+          <a:effectLst/>
+        </p:spPr>
+        <p:style>
+          <a:lnRef idx="1">
+            <a:schemeClr val="accent1"/>
+          </a:lnRef>
+          <a:fillRef idx="3">
+            <a:schemeClr val="accent1"/>
+          </a:fillRef>
+          <a:effectRef idx="2">
+            <a:schemeClr val="accent1"/>
+          </a:effectRef>
+          <a:fontRef idx="minor">
+            <a:schemeClr val="lt1"/>
+          </a:fontRef>
+        </p:style>
+        <p:txBody>
+          <a:bodyPr rtlCol="0" anchor="ctr"/>
+          <a:lstStyle/>
+          <a:p>
+            <a:pPr algn="ctr"/>
+          </a:p>
+        </p:txBody>
+      </p:sp>
+      <p:sp>
+        <p:nvSpPr>
+          <p:cNvPr id="52" name="TextBox 51"/>
+          <p:cNvSpPr txBox="1"/>
+          <p:nvPr/>
+        </p:nvSpPr>
+        <p:spPr>
+          <a:xfrm>
+            <a:off x="6656832" y="5358384"/>
+            <a:ext cx="2121407" cy="822960"/>
+          </a:xfrm>
+          <a:prstGeom prst="rect">
+            <a:avLst/>
+          </a:prstGeom>
+          <a:noFill/>
+        </p:spPr>
+        <p:txBody>
+          <a:bodyPr wrap="square" lIns="0" rIns="0" tIns="0" bIns="0" anchor="t">
+            <a:spAutoFit/>
+          </a:bodyPr>
+          <a:lstStyle/>
+          <a:p>
+            <a:pPr algn="l">
+              <a:lnSpc>
+                <a:spcPct val="100000"/>
+              </a:lnSpc>
+              <a:spcBef>
+                <a:spcPts val="0"/>
+              </a:spcBef>
+              <a:spcAft>
+                <a:spcPts val="200"/>
+              </a:spcAft>
+            </a:pPr>
+            <a:r>
+              <a:rPr sz="660" b="1" i="0">
+                <a:solidFill>
+                  <a:srgbClr val="1B3E6E"/>
+                </a:solidFill>
+                <a:latin typeface="Arial"/>
+              </a:rPr>
+              <a:t>Recognition: </a:t>
+            </a:r>
+            <a:r>
+              <a:rPr sz="660" b="0" i="0">
+                <a:solidFill>
+                  <a:srgbClr val="333333"/>
+                </a:solidFill>
+                <a:latin typeface="Arial"/>
+              </a:rPr>
+              <a:t>Padma Shri · Gandhi Peace Prize 2016 · BBC Global Champion · Nikkei Asia Award · CII Food Safety 2026 · HBS case study</a:t>
+            </a:r>
+          </a:p>
+          <a:p>
+            <a:pPr algn="l">
+              <a:lnSpc>
+                <a:spcPct val="100000"/>
+              </a:lnSpc>
+              <a:spcBef>
+                <a:spcPts val="0"/>
+              </a:spcBef>
+              <a:spcAft>
+                <a:spcPts val="0"/>
+              </a:spcAft>
+            </a:pPr>
+            <a:r>
+              <a:rPr sz="660" b="1" i="0">
+                <a:solidFill>
+                  <a:srgbClr val="1B3E6E"/>
+                </a:solidFill>
+                <a:latin typeface="Arial"/>
+              </a:rPr>
+              <a:t>Partners incl.: </a:t>
+            </a:r>
+            <a:r>
+              <a:rPr sz="660" b="0" i="0">
+                <a:solidFill>
+                  <a:srgbClr val="333333"/>
+                </a:solidFill>
+                <a:latin typeface="Arial"/>
+              </a:rPr>
+              <a:t>Deutsche Bank (Pune kitchen '26) · IOCL (solar) + leading corporates</a:t>
+            </a:r>
+          </a:p>
+        </p:txBody>
+      </p:sp>
+    </p:spTree>
+  </p:cSld>
+  <p:clrMapOvr>
+    <a:masterClrMapping/>
+  </p:clrMapOvr>
+</p:sld>
+</file>
+
 <file path=ppt/slides/slide2.xml><?xml version="1.0" encoding="utf-8"?>
 <p:sld xmlns:a="http://schemas.openxmlformats.org/drawingml/2006/main" xmlns:p="http://schemas.openxmlformats.org/presentationml/2006/main" xmlns:r="http://schemas.openxmlformats.org/officeDocument/2006/relationships">
   <p:cSld>
@@ -17225,6 +20322,6537 @@
                 <a:latin typeface="Arial"/>
               </a:rPr>
               <a:t>SBI</a:t>
+            </a:r>
+          </a:p>
+        </p:txBody>
+      </p:sp>
+    </p:spTree>
+  </p:cSld>
+  <p:clrMapOvr>
+    <a:masterClrMapping/>
+  </p:clrMapOvr>
+</p:sld>
+</file>
+
+<file path=ppt/slides/slide7.xml><?xml version="1.0" encoding="utf-8"?>
+<p:sld xmlns:a="http://schemas.openxmlformats.org/drawingml/2006/main" xmlns:p="http://schemas.openxmlformats.org/presentationml/2006/main" xmlns:r="http://schemas.openxmlformats.org/officeDocument/2006/relationships">
+  <p:cSld>
+    <p:spTree>
+      <p:nvGrpSpPr>
+        <p:cNvPr id="1" name=""/>
+        <p:cNvGrpSpPr/>
+        <p:nvPr/>
+      </p:nvGrpSpPr>
+      <p:grpSpPr/>
+      <p:sp>
+        <p:nvSpPr>
+          <p:cNvPr id="2" name="Rectangle 1"/>
+          <p:cNvSpPr/>
+          <p:nvPr/>
+        </p:nvSpPr>
+        <p:spPr>
+          <a:xfrm>
+            <a:off x="365760" y="274320"/>
+            <a:ext cx="8412480" cy="23774"/>
+          </a:xfrm>
+          <a:prstGeom prst="rect">
+            <a:avLst/>
+          </a:prstGeom>
+          <a:solidFill>
+            <a:srgbClr val="1B3E6E"/>
+          </a:solidFill>
+          <a:ln>
+            <a:noFill/>
+          </a:ln>
+          <a:effectLst/>
+        </p:spPr>
+        <p:style>
+          <a:lnRef idx="1">
+            <a:schemeClr val="accent1"/>
+          </a:lnRef>
+          <a:fillRef idx="3">
+            <a:schemeClr val="accent1"/>
+          </a:fillRef>
+          <a:effectRef idx="2">
+            <a:schemeClr val="accent1"/>
+          </a:effectRef>
+          <a:fontRef idx="minor">
+            <a:schemeClr val="lt1"/>
+          </a:fontRef>
+        </p:style>
+        <p:txBody>
+          <a:bodyPr rtlCol="0" anchor="ctr"/>
+          <a:lstStyle/>
+          <a:p>
+            <a:pPr algn="ctr"/>
+          </a:p>
+        </p:txBody>
+      </p:sp>
+      <p:sp>
+        <p:nvSpPr>
+          <p:cNvPr id="3" name="TextBox 2"/>
+          <p:cNvSpPr txBox="1"/>
+          <p:nvPr/>
+        </p:nvSpPr>
+        <p:spPr>
+          <a:xfrm>
+            <a:off x="365760" y="365760"/>
+            <a:ext cx="8412480" cy="457200"/>
+          </a:xfrm>
+          <a:prstGeom prst="rect">
+            <a:avLst/>
+          </a:prstGeom>
+          <a:noFill/>
+        </p:spPr>
+        <p:txBody>
+          <a:bodyPr wrap="square" lIns="0" rIns="0" tIns="0" bIns="0" anchor="t">
+            <a:spAutoFit/>
+          </a:bodyPr>
+          <a:lstStyle/>
+          <a:p>
+            <a:pPr algn="l">
+              <a:lnSpc>
+                <a:spcPct val="100000"/>
+              </a:lnSpc>
+              <a:spcBef>
+                <a:spcPts val="0"/>
+              </a:spcBef>
+              <a:spcAft>
+                <a:spcPts val="0"/>
+              </a:spcAft>
+            </a:pPr>
+            <a:r>
+              <a:rPr sz="2000" b="0" i="0">
+                <a:solidFill>
+                  <a:srgbClr val="1B3E6E"/>
+                </a:solidFill>
+                <a:latin typeface="Georgia"/>
+              </a:rPr>
+              <a:t>Who is The Akshaya Patra Foundation?</a:t>
+            </a:r>
+          </a:p>
+        </p:txBody>
+      </p:sp>
+      <p:sp>
+        <p:nvSpPr>
+          <p:cNvPr id="4" name="TextBox 3"/>
+          <p:cNvSpPr txBox="1"/>
+          <p:nvPr/>
+        </p:nvSpPr>
+        <p:spPr>
+          <a:xfrm>
+            <a:off x="365760" y="822960"/>
+            <a:ext cx="8412480" cy="438912"/>
+          </a:xfrm>
+          <a:prstGeom prst="rect">
+            <a:avLst/>
+          </a:prstGeom>
+          <a:noFill/>
+        </p:spPr>
+        <p:txBody>
+          <a:bodyPr wrap="square" lIns="0" rIns="0" tIns="0" bIns="0" anchor="t">
+            <a:spAutoFit/>
+          </a:bodyPr>
+          <a:lstStyle/>
+          <a:p>
+            <a:pPr algn="l">
+              <a:lnSpc>
+                <a:spcPct val="100000"/>
+              </a:lnSpc>
+              <a:spcBef>
+                <a:spcPts val="0"/>
+              </a:spcBef>
+              <a:spcAft>
+                <a:spcPts val="0"/>
+              </a:spcAft>
+            </a:pPr>
+            <a:r>
+              <a:rPr sz="1050" b="0" i="0">
+                <a:solidFill>
+                  <a:srgbClr val="333333"/>
+                </a:solidFill>
+                <a:latin typeface="Arial"/>
+              </a:rPr>
+              <a:t>The world's largest NGO-run school meal programme — serving 2.35 million children every school day, so that hunger never interrupts education.</a:t>
+            </a:r>
+          </a:p>
+        </p:txBody>
+      </p:sp>
+      <p:sp>
+        <p:nvSpPr>
+          <p:cNvPr id="5" name="Rectangle 4"/>
+          <p:cNvSpPr/>
+          <p:nvPr/>
+        </p:nvSpPr>
+        <p:spPr>
+          <a:xfrm>
+            <a:off x="502920" y="6071616"/>
+            <a:ext cx="8138159" cy="365760"/>
+          </a:xfrm>
+          <a:prstGeom prst="rect">
+            <a:avLst/>
+          </a:prstGeom>
+          <a:solidFill>
+            <a:srgbClr val="D9D9D9"/>
+          </a:solidFill>
+          <a:ln>
+            <a:noFill/>
+          </a:ln>
+          <a:effectLst/>
+        </p:spPr>
+        <p:style>
+          <a:lnRef idx="1">
+            <a:schemeClr val="accent1"/>
+          </a:lnRef>
+          <a:fillRef idx="3">
+            <a:schemeClr val="accent1"/>
+          </a:fillRef>
+          <a:effectRef idx="2">
+            <a:schemeClr val="accent1"/>
+          </a:effectRef>
+          <a:fontRef idx="minor">
+            <a:schemeClr val="lt1"/>
+          </a:fontRef>
+        </p:style>
+        <p:txBody>
+          <a:bodyPr rtlCol="0" anchor="ctr"/>
+          <a:lstStyle/>
+          <a:p>
+            <a:pPr algn="ctr"/>
+          </a:p>
+        </p:txBody>
+      </p:sp>
+      <p:sp>
+        <p:nvSpPr>
+          <p:cNvPr id="6" name="TextBox 5"/>
+          <p:cNvSpPr txBox="1"/>
+          <p:nvPr/>
+        </p:nvSpPr>
+        <p:spPr>
+          <a:xfrm>
+            <a:off x="640080" y="6071616"/>
+            <a:ext cx="7863840" cy="365760"/>
+          </a:xfrm>
+          <a:prstGeom prst="rect">
+            <a:avLst/>
+          </a:prstGeom>
+          <a:noFill/>
+        </p:spPr>
+        <p:txBody>
+          <a:bodyPr wrap="square" lIns="0" rIns="0" tIns="0" bIns="0" anchor="ctr">
+            <a:spAutoFit/>
+          </a:bodyPr>
+          <a:lstStyle/>
+          <a:p>
+            <a:pPr algn="ctr">
+              <a:lnSpc>
+                <a:spcPct val="95000"/>
+              </a:lnSpc>
+              <a:spcBef>
+                <a:spcPts val="0"/>
+              </a:spcBef>
+              <a:spcAft>
+                <a:spcPts val="0"/>
+              </a:spcAft>
+            </a:pPr>
+            <a:r>
+              <a:rPr sz="1100" b="1" i="0">
+                <a:solidFill>
+                  <a:srgbClr val="1B3E6E"/>
+                </a:solidFill>
+                <a:latin typeface="Georgia"/>
+              </a:rPr>
+              <a:t>“No child in India shall be deprived of education because of hunger” — 5 billion meals over 25 years.</a:t>
+            </a:r>
+          </a:p>
+        </p:txBody>
+      </p:sp>
+      <p:sp>
+        <p:nvSpPr>
+          <p:cNvPr id="7" name="TextBox 6"/>
+          <p:cNvSpPr txBox="1"/>
+          <p:nvPr/>
+        </p:nvSpPr>
+        <p:spPr>
+          <a:xfrm>
+            <a:off x="365760" y="6492240"/>
+            <a:ext cx="1280160" cy="329184"/>
+          </a:xfrm>
+          <a:prstGeom prst="rect">
+            <a:avLst/>
+          </a:prstGeom>
+          <a:noFill/>
+        </p:spPr>
+        <p:txBody>
+          <a:bodyPr wrap="square" lIns="0" rIns="0" tIns="0" bIns="0" anchor="t">
+            <a:spAutoFit/>
+          </a:bodyPr>
+          <a:lstStyle/>
+          <a:p>
+            <a:pPr algn="l">
+              <a:lnSpc>
+                <a:spcPct val="90000"/>
+              </a:lnSpc>
+              <a:spcBef>
+                <a:spcPts val="0"/>
+              </a:spcBef>
+              <a:spcAft>
+                <a:spcPts val="0"/>
+              </a:spcAft>
+            </a:pPr>
+            <a:r>
+              <a:rPr sz="900" b="1" i="0">
+                <a:solidFill>
+                  <a:srgbClr val="111111"/>
+                </a:solidFill>
+                <a:latin typeface="Georgia"/>
+              </a:rPr>
+              <a:t>Goldman</a:t>
+            </a:r>
+          </a:p>
+          <a:p>
+            <a:pPr algn="l">
+              <a:lnSpc>
+                <a:spcPct val="90000"/>
+              </a:lnSpc>
+              <a:spcBef>
+                <a:spcPts val="0"/>
+              </a:spcBef>
+              <a:spcAft>
+                <a:spcPts val="0"/>
+              </a:spcAft>
+            </a:pPr>
+            <a:r>
+              <a:rPr sz="900" b="1" i="0">
+                <a:solidFill>
+                  <a:srgbClr val="111111"/>
+                </a:solidFill>
+                <a:latin typeface="Georgia"/>
+              </a:rPr>
+              <a:t>Sachs</a:t>
+            </a:r>
+          </a:p>
+        </p:txBody>
+      </p:sp>
+      <p:sp>
+        <p:nvSpPr>
+          <p:cNvPr id="8" name="TextBox 7"/>
+          <p:cNvSpPr txBox="1"/>
+          <p:nvPr/>
+        </p:nvSpPr>
+        <p:spPr>
+          <a:xfrm>
+            <a:off x="8321040" y="6528816"/>
+            <a:ext cx="457200" cy="274320"/>
+          </a:xfrm>
+          <a:prstGeom prst="rect">
+            <a:avLst/>
+          </a:prstGeom>
+          <a:noFill/>
+        </p:spPr>
+        <p:txBody>
+          <a:bodyPr wrap="square" lIns="0" rIns="0" tIns="0" bIns="0" anchor="t">
+            <a:spAutoFit/>
+          </a:bodyPr>
+          <a:lstStyle/>
+          <a:p>
+            <a:pPr algn="r">
+              <a:lnSpc>
+                <a:spcPct val="100000"/>
+              </a:lnSpc>
+              <a:spcBef>
+                <a:spcPts val="0"/>
+              </a:spcBef>
+              <a:spcAft>
+                <a:spcPts val="300"/>
+              </a:spcAft>
+            </a:pPr>
+            <a:r>
+              <a:rPr sz="900" b="0" i="0">
+                <a:solidFill>
+                  <a:srgbClr val="727375"/>
+                </a:solidFill>
+                <a:latin typeface="Arial"/>
+              </a:rPr>
+              <a:t>7</a:t>
+            </a:r>
+          </a:p>
+        </p:txBody>
+      </p:sp>
+      <p:sp>
+        <p:nvSpPr>
+          <p:cNvPr id="9" name="TextBox 8"/>
+          <p:cNvSpPr txBox="1"/>
+          <p:nvPr/>
+        </p:nvSpPr>
+        <p:spPr>
+          <a:xfrm>
+            <a:off x="4754879" y="54864"/>
+            <a:ext cx="4023360" cy="182880"/>
+          </a:xfrm>
+          <a:prstGeom prst="rect">
+            <a:avLst/>
+          </a:prstGeom>
+          <a:noFill/>
+        </p:spPr>
+        <p:txBody>
+          <a:bodyPr wrap="square" lIns="0" rIns="0" tIns="0" bIns="0" anchor="t">
+            <a:spAutoFit/>
+          </a:bodyPr>
+          <a:lstStyle/>
+          <a:p>
+            <a:pPr algn="r">
+              <a:lnSpc>
+                <a:spcPct val="100000"/>
+              </a:lnSpc>
+              <a:spcBef>
+                <a:spcPts val="0"/>
+              </a:spcBef>
+              <a:spcAft>
+                <a:spcPts val="0"/>
+              </a:spcAft>
+            </a:pPr>
+            <a:r>
+              <a:rPr sz="750" b="0" i="1">
+                <a:solidFill>
+                  <a:srgbClr val="727375"/>
+                </a:solidFill>
+                <a:latin typeface="Arial"/>
+              </a:rPr>
+              <a:t>FINAL CONTENT — SLIDE 1 (v2)</a:t>
+            </a:r>
+          </a:p>
+        </p:txBody>
+      </p:sp>
+      <p:sp>
+        <p:nvSpPr>
+          <p:cNvPr id="10" name="TextBox 9"/>
+          <p:cNvSpPr txBox="1"/>
+          <p:nvPr/>
+        </p:nvSpPr>
+        <p:spPr>
+          <a:xfrm>
+            <a:off x="4846320" y="6547104"/>
+            <a:ext cx="3401568" cy="274320"/>
+          </a:xfrm>
+          <a:prstGeom prst="rect">
+            <a:avLst/>
+          </a:prstGeom>
+          <a:noFill/>
+        </p:spPr>
+        <p:txBody>
+          <a:bodyPr wrap="square" lIns="0" rIns="0" tIns="0" bIns="0" anchor="t">
+            <a:spAutoFit/>
+          </a:bodyPr>
+          <a:lstStyle/>
+          <a:p>
+            <a:pPr algn="r">
+              <a:lnSpc>
+                <a:spcPct val="100000"/>
+              </a:lnSpc>
+              <a:spcBef>
+                <a:spcPts val="0"/>
+              </a:spcBef>
+              <a:spcAft>
+                <a:spcPts val="0"/>
+              </a:spcAft>
+            </a:pPr>
+            <a:r>
+              <a:rPr sz="650" b="0" i="1">
+                <a:solidFill>
+                  <a:srgbClr val="727375"/>
+                </a:solidFill>
+                <a:latin typeface="Arial"/>
+              </a:rPr>
+              <a:t>Source: The Akshaya Patra Foundation — official documents</a:t>
+            </a:r>
+          </a:p>
+        </p:txBody>
+      </p:sp>
+      <p:sp>
+        <p:nvSpPr>
+          <p:cNvPr id="11" name="TextBox 10"/>
+          <p:cNvSpPr txBox="1"/>
+          <p:nvPr/>
+        </p:nvSpPr>
+        <p:spPr>
+          <a:xfrm>
+            <a:off x="1572768" y="6492240"/>
+            <a:ext cx="3154680" cy="347472"/>
+          </a:xfrm>
+          <a:prstGeom prst="rect">
+            <a:avLst/>
+          </a:prstGeom>
+          <a:noFill/>
+        </p:spPr>
+        <p:txBody>
+          <a:bodyPr wrap="square" lIns="0" rIns="0" tIns="0" bIns="0" anchor="t">
+            <a:spAutoFit/>
+          </a:bodyPr>
+          <a:lstStyle/>
+          <a:p>
+            <a:pPr algn="l">
+              <a:lnSpc>
+                <a:spcPct val="95000"/>
+              </a:lnSpc>
+              <a:spcBef>
+                <a:spcPts val="0"/>
+              </a:spcBef>
+              <a:spcAft>
+                <a:spcPts val="0"/>
+              </a:spcAft>
+            </a:pPr>
+            <a:r>
+              <a:rPr sz="630" b="0" i="0">
+                <a:solidFill>
+                  <a:srgbClr val="727375"/>
+                </a:solidFill>
+                <a:latin typeface="Arial"/>
+              </a:rPr>
+              <a:t>Team: Nishant Tomer · Pratham Goenka · Aadithya Muralidharan · Somya Sethi · Mohajit Neog</a:t>
+            </a:r>
+          </a:p>
+        </p:txBody>
+      </p:sp>
+      <p:sp>
+        <p:nvSpPr>
+          <p:cNvPr id="12" name="Rectangle 11"/>
+          <p:cNvSpPr/>
+          <p:nvPr/>
+        </p:nvSpPr>
+        <p:spPr>
+          <a:xfrm>
+            <a:off x="365760" y="1298448"/>
+            <a:ext cx="8412480" cy="731520"/>
+          </a:xfrm>
+          <a:prstGeom prst="rect">
+            <a:avLst/>
+          </a:prstGeom>
+          <a:solidFill>
+            <a:srgbClr val="E08A1E"/>
+          </a:solidFill>
+          <a:ln>
+            <a:noFill/>
+          </a:ln>
+          <a:effectLst/>
+        </p:spPr>
+        <p:style>
+          <a:lnRef idx="1">
+            <a:schemeClr val="accent1"/>
+          </a:lnRef>
+          <a:fillRef idx="3">
+            <a:schemeClr val="accent1"/>
+          </a:fillRef>
+          <a:effectRef idx="2">
+            <a:schemeClr val="accent1"/>
+          </a:effectRef>
+          <a:fontRef idx="minor">
+            <a:schemeClr val="lt1"/>
+          </a:fontRef>
+        </p:style>
+        <p:txBody>
+          <a:bodyPr rtlCol="0" anchor="ctr"/>
+          <a:lstStyle/>
+          <a:p>
+            <a:pPr algn="ctr"/>
+          </a:p>
+        </p:txBody>
+      </p:sp>
+      <p:sp>
+        <p:nvSpPr>
+          <p:cNvPr id="13" name="Rectangle 12"/>
+          <p:cNvSpPr/>
+          <p:nvPr/>
+        </p:nvSpPr>
+        <p:spPr>
+          <a:xfrm>
+            <a:off x="438912" y="1380744"/>
+            <a:ext cx="896112" cy="566928"/>
+          </a:xfrm>
+          <a:prstGeom prst="rect">
+            <a:avLst/>
+          </a:prstGeom>
+          <a:solidFill>
+            <a:srgbClr val="F2F2F2"/>
+          </a:solidFill>
+          <a:ln w="12700">
+            <a:solidFill>
+              <a:srgbClr val="727375"/>
+            </a:solidFill>
+            <a:prstDash val="dash"/>
+          </a:ln>
+          <a:effectLst/>
+        </p:spPr>
+        <p:style>
+          <a:lnRef idx="1">
+            <a:schemeClr val="accent1"/>
+          </a:lnRef>
+          <a:fillRef idx="3">
+            <a:schemeClr val="accent1"/>
+          </a:fillRef>
+          <a:effectRef idx="2">
+            <a:schemeClr val="accent1"/>
+          </a:effectRef>
+          <a:fontRef idx="minor">
+            <a:schemeClr val="lt1"/>
+          </a:fontRef>
+        </p:style>
+        <p:txBody>
+          <a:bodyPr rtlCol="0" anchor="ctr"/>
+          <a:lstStyle/>
+          <a:p>
+            <a:pPr algn="ctr"/>
+          </a:p>
+        </p:txBody>
+      </p:sp>
+      <p:sp>
+        <p:nvSpPr>
+          <p:cNvPr id="14" name="TextBox 13"/>
+          <p:cNvSpPr txBox="1"/>
+          <p:nvPr/>
+        </p:nvSpPr>
+        <p:spPr>
+          <a:xfrm>
+            <a:off x="493776" y="1380744"/>
+            <a:ext cx="786384" cy="566928"/>
+          </a:xfrm>
+          <a:prstGeom prst="rect">
+            <a:avLst/>
+          </a:prstGeom>
+          <a:noFill/>
+        </p:spPr>
+        <p:txBody>
+          <a:bodyPr wrap="square" lIns="0" rIns="0" tIns="0" bIns="0" anchor="ctr">
+            <a:spAutoFit/>
+          </a:bodyPr>
+          <a:lstStyle/>
+          <a:p>
+            <a:pPr algn="ctr">
+              <a:lnSpc>
+                <a:spcPct val="100000"/>
+              </a:lnSpc>
+              <a:spcBef>
+                <a:spcPts val="0"/>
+              </a:spcBef>
+              <a:spcAft>
+                <a:spcPts val="100"/>
+              </a:spcAft>
+            </a:pPr>
+            <a:r>
+              <a:rPr sz="850" b="1" i="0">
+                <a:solidFill>
+                  <a:srgbClr val="727375"/>
+                </a:solidFill>
+                <a:latin typeface="Arial"/>
+              </a:rPr>
+              <a:t>AKSHAYA PATRA
+logo</a:t>
+            </a:r>
+          </a:p>
+        </p:txBody>
+      </p:sp>
+      <p:sp>
+        <p:nvSpPr>
+          <p:cNvPr id="15" name="TextBox 14"/>
+          <p:cNvSpPr txBox="1"/>
+          <p:nvPr/>
+        </p:nvSpPr>
+        <p:spPr>
+          <a:xfrm>
+            <a:off x="1481328" y="1298448"/>
+            <a:ext cx="7168895" cy="731520"/>
+          </a:xfrm>
+          <a:prstGeom prst="rect">
+            <a:avLst/>
+          </a:prstGeom>
+          <a:noFill/>
+        </p:spPr>
+        <p:txBody>
+          <a:bodyPr wrap="square" lIns="0" rIns="0" tIns="0" bIns="0" anchor="ctr">
+            <a:spAutoFit/>
+          </a:bodyPr>
+          <a:lstStyle/>
+          <a:p>
+            <a:pPr algn="l">
+              <a:lnSpc>
+                <a:spcPct val="100000"/>
+              </a:lnSpc>
+              <a:spcBef>
+                <a:spcPts val="0"/>
+              </a:spcBef>
+              <a:spcAft>
+                <a:spcPts val="0"/>
+              </a:spcAft>
+            </a:pPr>
+            <a:r>
+              <a:rPr sz="800" b="1" i="0">
+                <a:solidFill>
+                  <a:srgbClr val="FFFFFF"/>
+                </a:solidFill>
+                <a:latin typeface="Arial"/>
+              </a:rPr>
+              <a:t>Founded in 2000 serving 1,500 children, </a:t>
+            </a:r>
+            <a:r>
+              <a:rPr sz="800" b="0" i="0">
+                <a:solidFill>
+                  <a:srgbClr val="FFFFFF"/>
+                </a:solidFill>
+                <a:latin typeface="Arial"/>
+              </a:rPr>
+              <a:t>Akshaya Patra is a Government-partnered PPP that has grown into the world's largest NGO-run school meal programme — </a:t>
+            </a:r>
+            <a:r>
+              <a:rPr sz="800" b="1" i="0">
+                <a:solidFill>
+                  <a:srgbClr val="FFFFFF"/>
+                </a:solidFill>
+                <a:latin typeface="Arial"/>
+              </a:rPr>
+              <a:t>5 billion cumulative meals over 25 years</a:t>
+            </a:r>
+            <a:r>
+              <a:rPr sz="800" b="0" i="0">
+                <a:solidFill>
+                  <a:srgbClr val="FFFFFF"/>
+                </a:solidFill>
+                <a:latin typeface="Arial"/>
+              </a:rPr>
+              <a:t>, a milestone celebrated with the Hon'ble President of India in March 2026.</a:t>
+            </a:r>
+          </a:p>
+        </p:txBody>
+      </p:sp>
+      <p:sp>
+        <p:nvSpPr>
+          <p:cNvPr id="16" name="Rectangle 15"/>
+          <p:cNvSpPr/>
+          <p:nvPr/>
+        </p:nvSpPr>
+        <p:spPr>
+          <a:xfrm>
+            <a:off x="4361688" y="2212848"/>
+            <a:ext cx="10972" cy="3685032"/>
+          </a:xfrm>
+          <a:prstGeom prst="rect">
+            <a:avLst/>
+          </a:prstGeom>
+          <a:solidFill>
+            <a:srgbClr val="DDDDDD"/>
+          </a:solidFill>
+          <a:ln>
+            <a:noFill/>
+          </a:ln>
+          <a:effectLst/>
+        </p:spPr>
+        <p:style>
+          <a:lnRef idx="1">
+            <a:schemeClr val="accent1"/>
+          </a:lnRef>
+          <a:fillRef idx="3">
+            <a:schemeClr val="accent1"/>
+          </a:fillRef>
+          <a:effectRef idx="2">
+            <a:schemeClr val="accent1"/>
+          </a:effectRef>
+          <a:fontRef idx="minor">
+            <a:schemeClr val="lt1"/>
+          </a:fontRef>
+        </p:style>
+        <p:txBody>
+          <a:bodyPr rtlCol="0" anchor="ctr"/>
+          <a:lstStyle/>
+          <a:p>
+            <a:pPr algn="ctr"/>
+          </a:p>
+        </p:txBody>
+      </p:sp>
+      <p:sp>
+        <p:nvSpPr>
+          <p:cNvPr id="17" name="Rectangle 16"/>
+          <p:cNvSpPr/>
+          <p:nvPr/>
+        </p:nvSpPr>
+        <p:spPr>
+          <a:xfrm>
+            <a:off x="365760" y="2203703"/>
+            <a:ext cx="54864" cy="182880"/>
+          </a:xfrm>
+          <a:prstGeom prst="rect">
+            <a:avLst/>
+          </a:prstGeom>
+          <a:solidFill>
+            <a:srgbClr val="1B3E6E"/>
+          </a:solidFill>
+          <a:ln>
+            <a:noFill/>
+          </a:ln>
+          <a:effectLst/>
+        </p:spPr>
+        <p:style>
+          <a:lnRef idx="1">
+            <a:schemeClr val="accent1"/>
+          </a:lnRef>
+          <a:fillRef idx="3">
+            <a:schemeClr val="accent1"/>
+          </a:fillRef>
+          <a:effectRef idx="2">
+            <a:schemeClr val="accent1"/>
+          </a:effectRef>
+          <a:fontRef idx="minor">
+            <a:schemeClr val="lt1"/>
+          </a:fontRef>
+        </p:style>
+        <p:txBody>
+          <a:bodyPr rtlCol="0" anchor="ctr"/>
+          <a:lstStyle/>
+          <a:p>
+            <a:pPr algn="ctr"/>
+          </a:p>
+        </p:txBody>
+      </p:sp>
+      <p:sp>
+        <p:nvSpPr>
+          <p:cNvPr id="18" name="TextBox 17"/>
+          <p:cNvSpPr txBox="1"/>
+          <p:nvPr/>
+        </p:nvSpPr>
+        <p:spPr>
+          <a:xfrm>
+            <a:off x="512064" y="2176272"/>
+            <a:ext cx="3895344" cy="256032"/>
+          </a:xfrm>
+          <a:prstGeom prst="rect">
+            <a:avLst/>
+          </a:prstGeom>
+          <a:noFill/>
+        </p:spPr>
+        <p:txBody>
+          <a:bodyPr wrap="square" lIns="0" rIns="0" tIns="0" bIns="0" anchor="t">
+            <a:spAutoFit/>
+          </a:bodyPr>
+          <a:lstStyle/>
+          <a:p>
+            <a:pPr algn="l">
+              <a:lnSpc>
+                <a:spcPct val="100000"/>
+              </a:lnSpc>
+              <a:spcBef>
+                <a:spcPts val="0"/>
+              </a:spcBef>
+              <a:spcAft>
+                <a:spcPts val="0"/>
+              </a:spcAft>
+            </a:pPr>
+            <a:r>
+              <a:rPr sz="1150" b="1" i="0">
+                <a:solidFill>
+                  <a:srgbClr val="1B3E6E"/>
+                </a:solidFill>
+                <a:latin typeface="Arial"/>
+              </a:rPr>
+              <a:t>Who they are &amp; why we chose them</a:t>
+            </a:r>
+          </a:p>
+        </p:txBody>
+      </p:sp>
+      <p:sp>
+        <p:nvSpPr>
+          <p:cNvPr id="19" name="Rectangle 18"/>
+          <p:cNvSpPr/>
+          <p:nvPr/>
+        </p:nvSpPr>
+        <p:spPr>
+          <a:xfrm>
+            <a:off x="365760" y="2450591"/>
+            <a:ext cx="4041648" cy="10972"/>
+          </a:xfrm>
+          <a:prstGeom prst="rect">
+            <a:avLst/>
+          </a:prstGeom>
+          <a:solidFill>
+            <a:srgbClr val="BFBFBF"/>
+          </a:solidFill>
+          <a:ln>
+            <a:noFill/>
+          </a:ln>
+          <a:effectLst/>
+        </p:spPr>
+        <p:style>
+          <a:lnRef idx="1">
+            <a:schemeClr val="accent1"/>
+          </a:lnRef>
+          <a:fillRef idx="3">
+            <a:schemeClr val="accent1"/>
+          </a:fillRef>
+          <a:effectRef idx="2">
+            <a:schemeClr val="accent1"/>
+          </a:effectRef>
+          <a:fontRef idx="minor">
+            <a:schemeClr val="lt1"/>
+          </a:fontRef>
+        </p:style>
+        <p:txBody>
+          <a:bodyPr rtlCol="0" anchor="ctr"/>
+          <a:lstStyle/>
+          <a:p>
+            <a:pPr algn="ctr"/>
+          </a:p>
+        </p:txBody>
+      </p:sp>
+      <p:sp>
+        <p:nvSpPr>
+          <p:cNvPr id="20" name="TextBox 19"/>
+          <p:cNvSpPr txBox="1"/>
+          <p:nvPr/>
+        </p:nvSpPr>
+        <p:spPr>
+          <a:xfrm>
+            <a:off x="365760" y="2542032"/>
+            <a:ext cx="4041648" cy="1417320"/>
+          </a:xfrm>
+          <a:prstGeom prst="rect">
+            <a:avLst/>
+          </a:prstGeom>
+          <a:noFill/>
+        </p:spPr>
+        <p:txBody>
+          <a:bodyPr wrap="square" lIns="0" rIns="0" tIns="0" bIns="0" anchor="t">
+            <a:spAutoFit/>
+          </a:bodyPr>
+          <a:lstStyle/>
+          <a:p>
+            <a:pPr algn="l">
+              <a:lnSpc>
+                <a:spcPct val="102000"/>
+              </a:lnSpc>
+              <a:spcBef>
+                <a:spcPts val="0"/>
+              </a:spcBef>
+              <a:spcAft>
+                <a:spcPts val="300"/>
+              </a:spcAft>
+            </a:pPr>
+            <a:r>
+              <a:rPr sz="800" b="1" i="0">
+                <a:solidFill>
+                  <a:srgbClr val="1B3E6E"/>
+                </a:solidFill>
+                <a:latin typeface="Arial"/>
+              </a:rPr>
+              <a:t>Mission: </a:t>
+            </a:r>
+            <a:r>
+              <a:rPr sz="800" b="0" i="0">
+                <a:solidFill>
+                  <a:srgbClr val="333333"/>
+                </a:solidFill>
+                <a:latin typeface="Arial"/>
+              </a:rPr>
+              <a:t>serve mid-day meals to 3 million children every day and achieve 3 million servings of morning nutrition.</a:t>
+            </a:r>
+          </a:p>
+          <a:p>
+            <a:pPr algn="l">
+              <a:lnSpc>
+                <a:spcPct val="102000"/>
+              </a:lnSpc>
+              <a:spcBef>
+                <a:spcPts val="0"/>
+              </a:spcBef>
+              <a:spcAft>
+                <a:spcPts val="300"/>
+              </a:spcAft>
+            </a:pPr>
+            <a:r>
+              <a:rPr sz="800" b="1" i="0">
+                <a:solidFill>
+                  <a:srgbClr val="1B3E6E"/>
+                </a:solidFill>
+                <a:latin typeface="Arial"/>
+              </a:rPr>
+              <a:t>Why Akshaya Patra: </a:t>
+            </a:r>
+            <a:r>
+              <a:rPr sz="800" b="0" i="0">
+                <a:solidFill>
+                  <a:srgbClr val="333333"/>
+                </a:solidFill>
+                <a:latin typeface="Arial"/>
+              </a:rPr>
+              <a:t>our supply-chain review found world-class production — and </a:t>
+            </a:r>
+            <a:r>
+              <a:rPr sz="800" b="1" i="0">
+                <a:solidFill>
+                  <a:srgbClr val="333333"/>
+                </a:solidFill>
+                <a:latin typeface="Arial"/>
+              </a:rPr>
+              <a:t>two clearly identified, fixable gaps</a:t>
+            </a:r>
+            <a:r>
+              <a:rPr sz="800" b="0" i="0">
+                <a:solidFill>
+                  <a:srgbClr val="333333"/>
+                </a:solidFill>
+                <a:latin typeface="Arial"/>
+              </a:rPr>
+              <a:t> that TAPF itself ranks as its top technology priorities, where $250k unlocks compounding year-on-year impact.</a:t>
+            </a:r>
+          </a:p>
+          <a:p>
+            <a:pPr algn="l">
+              <a:lnSpc>
+                <a:spcPct val="100000"/>
+              </a:lnSpc>
+              <a:spcBef>
+                <a:spcPts val="0"/>
+              </a:spcBef>
+              <a:spcAft>
+                <a:spcPts val="0"/>
+              </a:spcAft>
+            </a:pPr>
+            <a:r>
+              <a:rPr sz="760" b="1" i="0">
+                <a:solidFill>
+                  <a:srgbClr val="398025"/>
+                </a:solidFill>
+                <a:latin typeface="Arial"/>
+              </a:rPr>
+              <a:t>✓ 25 yrs of proven delivery   ✓ Govt-audited PPP   ✓ Tech-forward ops (ERP, OS1 dispatch, kitchen automation)</a:t>
+            </a:r>
+          </a:p>
+        </p:txBody>
+      </p:sp>
+      <p:sp>
+        <p:nvSpPr>
+          <p:cNvPr id="21" name="Rectangle 20"/>
+          <p:cNvSpPr/>
+          <p:nvPr/>
+        </p:nvSpPr>
+        <p:spPr>
+          <a:xfrm>
+            <a:off x="365760" y="3977640"/>
+            <a:ext cx="54864" cy="182880"/>
+          </a:xfrm>
+          <a:prstGeom prst="rect">
+            <a:avLst/>
+          </a:prstGeom>
+          <a:solidFill>
+            <a:srgbClr val="7297C5"/>
+          </a:solidFill>
+          <a:ln>
+            <a:noFill/>
+          </a:ln>
+          <a:effectLst/>
+        </p:spPr>
+        <p:style>
+          <a:lnRef idx="1">
+            <a:schemeClr val="accent1"/>
+          </a:lnRef>
+          <a:fillRef idx="3">
+            <a:schemeClr val="accent1"/>
+          </a:fillRef>
+          <a:effectRef idx="2">
+            <a:schemeClr val="accent1"/>
+          </a:effectRef>
+          <a:fontRef idx="minor">
+            <a:schemeClr val="lt1"/>
+          </a:fontRef>
+        </p:style>
+        <p:txBody>
+          <a:bodyPr rtlCol="0" anchor="ctr"/>
+          <a:lstStyle/>
+          <a:p>
+            <a:pPr algn="ctr"/>
+          </a:p>
+        </p:txBody>
+      </p:sp>
+      <p:sp>
+        <p:nvSpPr>
+          <p:cNvPr id="22" name="TextBox 21"/>
+          <p:cNvSpPr txBox="1"/>
+          <p:nvPr/>
+        </p:nvSpPr>
+        <p:spPr>
+          <a:xfrm>
+            <a:off x="512064" y="3950208"/>
+            <a:ext cx="3895344" cy="256032"/>
+          </a:xfrm>
+          <a:prstGeom prst="rect">
+            <a:avLst/>
+          </a:prstGeom>
+          <a:noFill/>
+        </p:spPr>
+        <p:txBody>
+          <a:bodyPr wrap="square" lIns="0" rIns="0" tIns="0" bIns="0" anchor="t">
+            <a:spAutoFit/>
+          </a:bodyPr>
+          <a:lstStyle/>
+          <a:p>
+            <a:pPr algn="l">
+              <a:lnSpc>
+                <a:spcPct val="100000"/>
+              </a:lnSpc>
+              <a:spcBef>
+                <a:spcPts val="0"/>
+              </a:spcBef>
+              <a:spcAft>
+                <a:spcPts val="0"/>
+              </a:spcAft>
+            </a:pPr>
+            <a:r>
+              <a:rPr sz="1150" b="1" i="0">
+                <a:solidFill>
+                  <a:srgbClr val="1B3E6E"/>
+                </a:solidFill>
+                <a:latin typeface="Arial"/>
+              </a:rPr>
+              <a:t>The journey — daily meals served (millions)</a:t>
+            </a:r>
+          </a:p>
+        </p:txBody>
+      </p:sp>
+      <p:sp>
+        <p:nvSpPr>
+          <p:cNvPr id="23" name="Rectangle 22"/>
+          <p:cNvSpPr/>
+          <p:nvPr/>
+        </p:nvSpPr>
+        <p:spPr>
+          <a:xfrm>
+            <a:off x="365760" y="4224528"/>
+            <a:ext cx="4041648" cy="10972"/>
+          </a:xfrm>
+          <a:prstGeom prst="rect">
+            <a:avLst/>
+          </a:prstGeom>
+          <a:solidFill>
+            <a:srgbClr val="BFBFBF"/>
+          </a:solidFill>
+          <a:ln>
+            <a:noFill/>
+          </a:ln>
+          <a:effectLst/>
+        </p:spPr>
+        <p:style>
+          <a:lnRef idx="1">
+            <a:schemeClr val="accent1"/>
+          </a:lnRef>
+          <a:fillRef idx="3">
+            <a:schemeClr val="accent1"/>
+          </a:fillRef>
+          <a:effectRef idx="2">
+            <a:schemeClr val="accent1"/>
+          </a:effectRef>
+          <a:fontRef idx="minor">
+            <a:schemeClr val="lt1"/>
+          </a:fontRef>
+        </p:style>
+        <p:txBody>
+          <a:bodyPr rtlCol="0" anchor="ctr"/>
+          <a:lstStyle/>
+          <a:p>
+            <a:pPr algn="ctr"/>
+          </a:p>
+        </p:txBody>
+      </p:sp>
+      <p:graphicFrame>
+        <p:nvGraphicFramePr>
+          <p:cNvPr id="24" name="Chart 23"/>
+          <p:cNvGraphicFramePr>
+            <a:graphicFrameLocks noGrp="1"/>
+          </p:cNvGraphicFramePr>
+          <p:nvPr/>
+        </p:nvGraphicFramePr>
+        <p:xfrm>
+          <a:off x="365760" y="4334256"/>
+          <a:ext cx="4041648" cy="1298448"/>
+        </p:xfrm>
+        <a:graphic>
+          <a:graphicData uri="http://schemas.openxmlformats.org/drawingml/2006/chart">
+            <c:chart xmlns:c="http://schemas.openxmlformats.org/drawingml/2006/chart" r:id="rId2"/>
+          </a:graphicData>
+        </a:graphic>
+      </p:graphicFrame>
+      <p:sp>
+        <p:nvSpPr>
+          <p:cNvPr id="25" name="TextBox 24"/>
+          <p:cNvSpPr txBox="1"/>
+          <p:nvPr/>
+        </p:nvSpPr>
+        <p:spPr>
+          <a:xfrm>
+            <a:off x="365760" y="5687568"/>
+            <a:ext cx="4041648" cy="310896"/>
+          </a:xfrm>
+          <a:prstGeom prst="rect">
+            <a:avLst/>
+          </a:prstGeom>
+          <a:noFill/>
+        </p:spPr>
+        <p:txBody>
+          <a:bodyPr wrap="square" lIns="0" rIns="0" tIns="0" bIns="0" anchor="t">
+            <a:spAutoFit/>
+          </a:bodyPr>
+          <a:lstStyle/>
+          <a:p>
+            <a:pPr algn="l">
+              <a:lnSpc>
+                <a:spcPct val="95000"/>
+              </a:lnSpc>
+              <a:spcBef>
+                <a:spcPts val="0"/>
+              </a:spcBef>
+              <a:spcAft>
+                <a:spcPts val="0"/>
+              </a:spcAft>
+            </a:pPr>
+            <a:r>
+              <a:rPr sz="680" b="1" i="0">
+                <a:solidFill>
+                  <a:srgbClr val="333333"/>
+                </a:solidFill>
+                <a:latin typeface="Arial"/>
+              </a:rPr>
+              <a:t>Mar 2026: </a:t>
+            </a:r>
+            <a:r>
+              <a:rPr sz="680" b="0" i="0">
+                <a:solidFill>
+                  <a:srgbClr val="333333"/>
+                </a:solidFill>
+                <a:latin typeface="Arial"/>
+              </a:rPr>
+              <a:t>5-billionth meal celebrated by the Hon'ble President of India  ·  </a:t>
+            </a:r>
+            <a:r>
+              <a:rPr sz="680" b="1" i="0">
+                <a:solidFill>
+                  <a:srgbClr val="333333"/>
+                </a:solidFill>
+                <a:latin typeface="Arial"/>
+              </a:rPr>
+              <a:t>Apr 2026: </a:t>
+            </a:r>
+            <a:r>
+              <a:rPr sz="680" b="0" i="0">
+                <a:solidFill>
+                  <a:srgbClr val="333333"/>
+                </a:solidFill>
+                <a:latin typeface="Arial"/>
+              </a:rPr>
+              <a:t>80th kitchen opens in Pune (Deutsche Bank CSR)</a:t>
+            </a:r>
+          </a:p>
+        </p:txBody>
+      </p:sp>
+      <p:sp>
+        <p:nvSpPr>
+          <p:cNvPr id="26" name="Rectangle 25"/>
+          <p:cNvSpPr/>
+          <p:nvPr/>
+        </p:nvSpPr>
+        <p:spPr>
+          <a:xfrm>
+            <a:off x="4590288" y="2203703"/>
+            <a:ext cx="54864" cy="182880"/>
+          </a:xfrm>
+          <a:prstGeom prst="rect">
+            <a:avLst/>
+          </a:prstGeom>
+          <a:solidFill>
+            <a:srgbClr val="3B6EA5"/>
+          </a:solidFill>
+          <a:ln>
+            <a:noFill/>
+          </a:ln>
+          <a:effectLst/>
+        </p:spPr>
+        <p:style>
+          <a:lnRef idx="1">
+            <a:schemeClr val="accent1"/>
+          </a:lnRef>
+          <a:fillRef idx="3">
+            <a:schemeClr val="accent1"/>
+          </a:fillRef>
+          <a:effectRef idx="2">
+            <a:schemeClr val="accent1"/>
+          </a:effectRef>
+          <a:fontRef idx="minor">
+            <a:schemeClr val="lt1"/>
+          </a:fontRef>
+        </p:style>
+        <p:txBody>
+          <a:bodyPr rtlCol="0" anchor="ctr"/>
+          <a:lstStyle/>
+          <a:p>
+            <a:pPr algn="ctr"/>
+          </a:p>
+        </p:txBody>
+      </p:sp>
+      <p:sp>
+        <p:nvSpPr>
+          <p:cNvPr id="27" name="TextBox 26"/>
+          <p:cNvSpPr txBox="1"/>
+          <p:nvPr/>
+        </p:nvSpPr>
+        <p:spPr>
+          <a:xfrm>
+            <a:off x="4736592" y="2176272"/>
+            <a:ext cx="4041648" cy="256032"/>
+          </a:xfrm>
+          <a:prstGeom prst="rect">
+            <a:avLst/>
+          </a:prstGeom>
+          <a:noFill/>
+        </p:spPr>
+        <p:txBody>
+          <a:bodyPr wrap="square" lIns="0" rIns="0" tIns="0" bIns="0" anchor="t">
+            <a:spAutoFit/>
+          </a:bodyPr>
+          <a:lstStyle/>
+          <a:p>
+            <a:pPr algn="l">
+              <a:lnSpc>
+                <a:spcPct val="100000"/>
+              </a:lnSpc>
+              <a:spcBef>
+                <a:spcPts val="0"/>
+              </a:spcBef>
+              <a:spcAft>
+                <a:spcPts val="0"/>
+              </a:spcAft>
+            </a:pPr>
+            <a:r>
+              <a:rPr sz="1150" b="1" i="0">
+                <a:solidFill>
+                  <a:srgbClr val="1B3E6E"/>
+                </a:solidFill>
+                <a:latin typeface="Arial"/>
+              </a:rPr>
+              <a:t>What they do — the hub-and-spoke model</a:t>
+            </a:r>
+          </a:p>
+        </p:txBody>
+      </p:sp>
+      <p:sp>
+        <p:nvSpPr>
+          <p:cNvPr id="28" name="Rectangle 27"/>
+          <p:cNvSpPr/>
+          <p:nvPr/>
+        </p:nvSpPr>
+        <p:spPr>
+          <a:xfrm>
+            <a:off x="4590288" y="2450591"/>
+            <a:ext cx="4187952" cy="10972"/>
+          </a:xfrm>
+          <a:prstGeom prst="rect">
+            <a:avLst/>
+          </a:prstGeom>
+          <a:solidFill>
+            <a:srgbClr val="BFBFBF"/>
+          </a:solidFill>
+          <a:ln>
+            <a:noFill/>
+          </a:ln>
+          <a:effectLst/>
+        </p:spPr>
+        <p:style>
+          <a:lnRef idx="1">
+            <a:schemeClr val="accent1"/>
+          </a:lnRef>
+          <a:fillRef idx="3">
+            <a:schemeClr val="accent1"/>
+          </a:fillRef>
+          <a:effectRef idx="2">
+            <a:schemeClr val="accent1"/>
+          </a:effectRef>
+          <a:fontRef idx="minor">
+            <a:schemeClr val="lt1"/>
+          </a:fontRef>
+        </p:style>
+        <p:txBody>
+          <a:bodyPr rtlCol="0" anchor="ctr"/>
+          <a:lstStyle/>
+          <a:p>
+            <a:pPr algn="ctr"/>
+          </a:p>
+        </p:txBody>
+      </p:sp>
+      <p:sp>
+        <p:nvSpPr>
+          <p:cNvPr id="29" name="TextBox 28"/>
+          <p:cNvSpPr txBox="1"/>
+          <p:nvPr/>
+        </p:nvSpPr>
+        <p:spPr>
+          <a:xfrm>
+            <a:off x="4590288" y="2542032"/>
+            <a:ext cx="4187952" cy="1051560"/>
+          </a:xfrm>
+          <a:prstGeom prst="rect">
+            <a:avLst/>
+          </a:prstGeom>
+          <a:noFill/>
+        </p:spPr>
+        <p:txBody>
+          <a:bodyPr wrap="square" lIns="0" rIns="0" tIns="0" bIns="0" anchor="t">
+            <a:spAutoFit/>
+          </a:bodyPr>
+          <a:lstStyle/>
+          <a:p>
+            <a:pPr algn="l">
+              <a:lnSpc>
+                <a:spcPct val="100000"/>
+              </a:lnSpc>
+              <a:spcBef>
+                <a:spcPts val="0"/>
+              </a:spcBef>
+              <a:spcAft>
+                <a:spcPts val="300"/>
+              </a:spcAft>
+            </a:pPr>
+            <a:r>
+              <a:rPr sz="780" b="1" i="0">
+                <a:solidFill>
+                  <a:srgbClr val="333333"/>
+                </a:solidFill>
+                <a:latin typeface="Arial"/>
+              </a:rPr>
+              <a:t>•  Centralised mega-kitchens </a:t>
+            </a:r>
+            <a:r>
+              <a:rPr sz="780" b="0" i="0">
+                <a:solidFill>
+                  <a:srgbClr val="333333"/>
+                </a:solidFill>
+                <a:latin typeface="Arial"/>
+              </a:rPr>
+              <a:t>— rice for 1,000 students in 15 min; 40,000 rotis/hour</a:t>
+            </a:r>
+          </a:p>
+          <a:p>
+            <a:pPr algn="l">
+              <a:lnSpc>
+                <a:spcPct val="100000"/>
+              </a:lnSpc>
+              <a:spcBef>
+                <a:spcPts val="0"/>
+              </a:spcBef>
+              <a:spcAft>
+                <a:spcPts val="300"/>
+              </a:spcAft>
+            </a:pPr>
+            <a:r>
+              <a:rPr sz="780" b="1" i="0">
+                <a:solidFill>
+                  <a:srgbClr val="333333"/>
+                </a:solidFill>
+                <a:latin typeface="Arial"/>
+              </a:rPr>
+              <a:t>•  Hub-and-spoke delivery </a:t>
+            </a:r>
+            <a:r>
+              <a:rPr sz="780" b="0" i="0">
+                <a:solidFill>
+                  <a:srgbClr val="333333"/>
+                </a:solidFill>
+                <a:latin typeface="Arial"/>
+              </a:rPr>
+              <a:t>— 1,100+ vehicles move 2 lakh+ insulated vessels daily</a:t>
+            </a:r>
+          </a:p>
+          <a:p>
+            <a:pPr algn="l">
+              <a:lnSpc>
+                <a:spcPct val="100000"/>
+              </a:lnSpc>
+              <a:spcBef>
+                <a:spcPts val="0"/>
+              </a:spcBef>
+              <a:spcAft>
+                <a:spcPts val="300"/>
+              </a:spcAft>
+            </a:pPr>
+            <a:r>
+              <a:rPr sz="780" b="1" i="0">
+                <a:solidFill>
+                  <a:srgbClr val="333333"/>
+                </a:solidFill>
+                <a:latin typeface="Arial"/>
+              </a:rPr>
+              <a:t>•  PPP economics </a:t>
+            </a:r>
+            <a:r>
+              <a:rPr sz="780" b="0" i="0">
+                <a:solidFill>
+                  <a:srgbClr val="333333"/>
+                </a:solidFill>
+                <a:latin typeface="Arial"/>
+              </a:rPr>
+              <a:t>— govt funds ₹8.56 of every ₹17 meal; donors bridge ₹6.56</a:t>
+            </a:r>
+          </a:p>
+          <a:p>
+            <a:pPr algn="l">
+              <a:lnSpc>
+                <a:spcPct val="100000"/>
+              </a:lnSpc>
+              <a:spcBef>
+                <a:spcPts val="0"/>
+              </a:spcBef>
+              <a:spcAft>
+                <a:spcPts val="0"/>
+              </a:spcAft>
+            </a:pPr>
+            <a:r>
+              <a:rPr sz="780" b="1" i="0">
+                <a:solidFill>
+                  <a:srgbClr val="333333"/>
+                </a:solidFill>
+                <a:latin typeface="Arial"/>
+              </a:rPr>
+              <a:t>•  Beyond lunch </a:t>
+            </a:r>
+            <a:r>
+              <a:rPr sz="780" b="0" i="0">
+                <a:solidFill>
+                  <a:srgbClr val="333333"/>
+                </a:solidFill>
+                <a:latin typeface="Arial"/>
+              </a:rPr>
+              <a:t>— morning nutrition, school rejuvenation, scholarships (NEST)</a:t>
+            </a:r>
+          </a:p>
+        </p:txBody>
+      </p:sp>
+      <p:sp>
+        <p:nvSpPr>
+          <p:cNvPr id="30" name="Rectangle 29"/>
+          <p:cNvSpPr/>
+          <p:nvPr/>
+        </p:nvSpPr>
+        <p:spPr>
+          <a:xfrm>
+            <a:off x="4590288" y="3630168"/>
+            <a:ext cx="54864" cy="182880"/>
+          </a:xfrm>
+          <a:prstGeom prst="rect">
+            <a:avLst/>
+          </a:prstGeom>
+          <a:solidFill>
+            <a:srgbClr val="E08A1E"/>
+          </a:solidFill>
+          <a:ln>
+            <a:noFill/>
+          </a:ln>
+          <a:effectLst/>
+        </p:spPr>
+        <p:style>
+          <a:lnRef idx="1">
+            <a:schemeClr val="accent1"/>
+          </a:lnRef>
+          <a:fillRef idx="3">
+            <a:schemeClr val="accent1"/>
+          </a:fillRef>
+          <a:effectRef idx="2">
+            <a:schemeClr val="accent1"/>
+          </a:effectRef>
+          <a:fontRef idx="minor">
+            <a:schemeClr val="lt1"/>
+          </a:fontRef>
+        </p:style>
+        <p:txBody>
+          <a:bodyPr rtlCol="0" anchor="ctr"/>
+          <a:lstStyle/>
+          <a:p>
+            <a:pPr algn="ctr"/>
+          </a:p>
+        </p:txBody>
+      </p:sp>
+      <p:sp>
+        <p:nvSpPr>
+          <p:cNvPr id="31" name="TextBox 30"/>
+          <p:cNvSpPr txBox="1"/>
+          <p:nvPr/>
+        </p:nvSpPr>
+        <p:spPr>
+          <a:xfrm>
+            <a:off x="4736592" y="3602736"/>
+            <a:ext cx="4041648" cy="256032"/>
+          </a:xfrm>
+          <a:prstGeom prst="rect">
+            <a:avLst/>
+          </a:prstGeom>
+          <a:noFill/>
+        </p:spPr>
+        <p:txBody>
+          <a:bodyPr wrap="square" lIns="0" rIns="0" tIns="0" bIns="0" anchor="t">
+            <a:spAutoFit/>
+          </a:bodyPr>
+          <a:lstStyle/>
+          <a:p>
+            <a:pPr algn="l">
+              <a:lnSpc>
+                <a:spcPct val="100000"/>
+              </a:lnSpc>
+              <a:spcBef>
+                <a:spcPts val="0"/>
+              </a:spcBef>
+              <a:spcAft>
+                <a:spcPts val="0"/>
+              </a:spcAft>
+            </a:pPr>
+            <a:r>
+              <a:rPr sz="1150" b="1" i="0">
+                <a:solidFill>
+                  <a:srgbClr val="1B3E6E"/>
+                </a:solidFill>
+                <a:latin typeface="Arial"/>
+              </a:rPr>
+              <a:t>Scale at a glance (2026)</a:t>
+            </a:r>
+          </a:p>
+        </p:txBody>
+      </p:sp>
+      <p:sp>
+        <p:nvSpPr>
+          <p:cNvPr id="32" name="Rectangle 31"/>
+          <p:cNvSpPr/>
+          <p:nvPr/>
+        </p:nvSpPr>
+        <p:spPr>
+          <a:xfrm>
+            <a:off x="4590288" y="3877056"/>
+            <a:ext cx="4187952" cy="10972"/>
+          </a:xfrm>
+          <a:prstGeom prst="rect">
+            <a:avLst/>
+          </a:prstGeom>
+          <a:solidFill>
+            <a:srgbClr val="BFBFBF"/>
+          </a:solidFill>
+          <a:ln>
+            <a:noFill/>
+          </a:ln>
+          <a:effectLst/>
+        </p:spPr>
+        <p:style>
+          <a:lnRef idx="1">
+            <a:schemeClr val="accent1"/>
+          </a:lnRef>
+          <a:fillRef idx="3">
+            <a:schemeClr val="accent1"/>
+          </a:fillRef>
+          <a:effectRef idx="2">
+            <a:schemeClr val="accent1"/>
+          </a:effectRef>
+          <a:fontRef idx="minor">
+            <a:schemeClr val="lt1"/>
+          </a:fontRef>
+        </p:style>
+        <p:txBody>
+          <a:bodyPr rtlCol="0" anchor="ctr"/>
+          <a:lstStyle/>
+          <a:p>
+            <a:pPr algn="ctr"/>
+          </a:p>
+        </p:txBody>
+      </p:sp>
+      <p:sp>
+        <p:nvSpPr>
+          <p:cNvPr id="33" name="TextBox 32"/>
+          <p:cNvSpPr txBox="1"/>
+          <p:nvPr/>
+        </p:nvSpPr>
+        <p:spPr>
+          <a:xfrm>
+            <a:off x="4590288" y="3986783"/>
+            <a:ext cx="1046988" cy="685800"/>
+          </a:xfrm>
+          <a:prstGeom prst="rect">
+            <a:avLst/>
+          </a:prstGeom>
+          <a:noFill/>
+        </p:spPr>
+        <p:txBody>
+          <a:bodyPr wrap="square" lIns="0" rIns="0" tIns="0" bIns="0" anchor="t">
+            <a:spAutoFit/>
+          </a:bodyPr>
+          <a:lstStyle/>
+          <a:p>
+            <a:pPr algn="ctr">
+              <a:lnSpc>
+                <a:spcPct val="100000"/>
+              </a:lnSpc>
+              <a:spcBef>
+                <a:spcPts val="0"/>
+              </a:spcBef>
+              <a:spcAft>
+                <a:spcPts val="100"/>
+              </a:spcAft>
+            </a:pPr>
+            <a:r>
+              <a:rPr sz="1400" b="1" i="0">
+                <a:solidFill>
+                  <a:srgbClr val="1B3E6E"/>
+                </a:solidFill>
+                <a:latin typeface="Arial"/>
+              </a:rPr>
+              <a:t>2.35M</a:t>
+            </a:r>
+          </a:p>
+          <a:p>
+            <a:pPr algn="ctr">
+              <a:lnSpc>
+                <a:spcPct val="95000"/>
+              </a:lnSpc>
+              <a:spcBef>
+                <a:spcPts val="0"/>
+              </a:spcBef>
+              <a:spcAft>
+                <a:spcPts val="0"/>
+              </a:spcAft>
+            </a:pPr>
+            <a:r>
+              <a:rPr sz="680" b="0" i="0">
+                <a:solidFill>
+                  <a:srgbClr val="727375"/>
+                </a:solidFill>
+                <a:latin typeface="Arial"/>
+              </a:rPr>
+              <a:t>meals served
+every day</a:t>
+            </a:r>
+          </a:p>
+        </p:txBody>
+      </p:sp>
+      <p:sp>
+        <p:nvSpPr>
+          <p:cNvPr id="34" name="TextBox 33"/>
+          <p:cNvSpPr txBox="1"/>
+          <p:nvPr/>
+        </p:nvSpPr>
+        <p:spPr>
+          <a:xfrm>
+            <a:off x="5637275" y="3986783"/>
+            <a:ext cx="1046988" cy="685800"/>
+          </a:xfrm>
+          <a:prstGeom prst="rect">
+            <a:avLst/>
+          </a:prstGeom>
+          <a:noFill/>
+        </p:spPr>
+        <p:txBody>
+          <a:bodyPr wrap="square" lIns="0" rIns="0" tIns="0" bIns="0" anchor="t">
+            <a:spAutoFit/>
+          </a:bodyPr>
+          <a:lstStyle/>
+          <a:p>
+            <a:pPr algn="ctr">
+              <a:lnSpc>
+                <a:spcPct val="100000"/>
+              </a:lnSpc>
+              <a:spcBef>
+                <a:spcPts val="0"/>
+              </a:spcBef>
+              <a:spcAft>
+                <a:spcPts val="100"/>
+              </a:spcAft>
+            </a:pPr>
+            <a:r>
+              <a:rPr sz="1400" b="1" i="0">
+                <a:solidFill>
+                  <a:srgbClr val="1B3E6E"/>
+                </a:solidFill>
+                <a:latin typeface="Arial"/>
+              </a:rPr>
+              <a:t>80</a:t>
+            </a:r>
+          </a:p>
+          <a:p>
+            <a:pPr algn="ctr">
+              <a:lnSpc>
+                <a:spcPct val="95000"/>
+              </a:lnSpc>
+              <a:spcBef>
+                <a:spcPts val="0"/>
+              </a:spcBef>
+              <a:spcAft>
+                <a:spcPts val="0"/>
+              </a:spcAft>
+            </a:pPr>
+            <a:r>
+              <a:rPr sz="680" b="0" i="0">
+                <a:solidFill>
+                  <a:srgbClr val="727375"/>
+                </a:solidFill>
+                <a:latin typeface="Arial"/>
+              </a:rPr>
+              <a:t>kitchens across
+81 locations</a:t>
+            </a:r>
+          </a:p>
+        </p:txBody>
+      </p:sp>
+      <p:sp>
+        <p:nvSpPr>
+          <p:cNvPr id="35" name="TextBox 34"/>
+          <p:cNvSpPr txBox="1"/>
+          <p:nvPr/>
+        </p:nvSpPr>
+        <p:spPr>
+          <a:xfrm>
+            <a:off x="6684264" y="3986783"/>
+            <a:ext cx="1046988" cy="685800"/>
+          </a:xfrm>
+          <a:prstGeom prst="rect">
+            <a:avLst/>
+          </a:prstGeom>
+          <a:noFill/>
+        </p:spPr>
+        <p:txBody>
+          <a:bodyPr wrap="square" lIns="0" rIns="0" tIns="0" bIns="0" anchor="t">
+            <a:spAutoFit/>
+          </a:bodyPr>
+          <a:lstStyle/>
+          <a:p>
+            <a:pPr algn="ctr">
+              <a:lnSpc>
+                <a:spcPct val="100000"/>
+              </a:lnSpc>
+              <a:spcBef>
+                <a:spcPts val="0"/>
+              </a:spcBef>
+              <a:spcAft>
+                <a:spcPts val="100"/>
+              </a:spcAft>
+            </a:pPr>
+            <a:r>
+              <a:rPr sz="1400" b="1" i="0">
+                <a:solidFill>
+                  <a:srgbClr val="1B3E6E"/>
+                </a:solidFill>
+                <a:latin typeface="Arial"/>
+              </a:rPr>
+              <a:t>16+3</a:t>
+            </a:r>
+          </a:p>
+          <a:p>
+            <a:pPr algn="ctr">
+              <a:lnSpc>
+                <a:spcPct val="95000"/>
+              </a:lnSpc>
+              <a:spcBef>
+                <a:spcPts val="0"/>
+              </a:spcBef>
+              <a:spcAft>
+                <a:spcPts val="0"/>
+              </a:spcAft>
+            </a:pPr>
+            <a:r>
+              <a:rPr sz="680" b="0" i="0">
+                <a:solidFill>
+                  <a:srgbClr val="727375"/>
+                </a:solidFill>
+                <a:latin typeface="Arial"/>
+              </a:rPr>
+              <a:t>states &amp;
+union territories</a:t>
+            </a:r>
+          </a:p>
+        </p:txBody>
+      </p:sp>
+      <p:sp>
+        <p:nvSpPr>
+          <p:cNvPr id="36" name="TextBox 35"/>
+          <p:cNvSpPr txBox="1"/>
+          <p:nvPr/>
+        </p:nvSpPr>
+        <p:spPr>
+          <a:xfrm>
+            <a:off x="7731252" y="3986783"/>
+            <a:ext cx="1046988" cy="685800"/>
+          </a:xfrm>
+          <a:prstGeom prst="rect">
+            <a:avLst/>
+          </a:prstGeom>
+          <a:noFill/>
+        </p:spPr>
+        <p:txBody>
+          <a:bodyPr wrap="square" lIns="0" rIns="0" tIns="0" bIns="0" anchor="t">
+            <a:spAutoFit/>
+          </a:bodyPr>
+          <a:lstStyle/>
+          <a:p>
+            <a:pPr algn="ctr">
+              <a:lnSpc>
+                <a:spcPct val="100000"/>
+              </a:lnSpc>
+              <a:spcBef>
+                <a:spcPts val="0"/>
+              </a:spcBef>
+              <a:spcAft>
+                <a:spcPts val="100"/>
+              </a:spcAft>
+            </a:pPr>
+            <a:r>
+              <a:rPr sz="1400" b="1" i="0">
+                <a:solidFill>
+                  <a:srgbClr val="1B3E6E"/>
+                </a:solidFill>
+                <a:latin typeface="Arial"/>
+              </a:rPr>
+              <a:t>25,000+</a:t>
+            </a:r>
+          </a:p>
+          <a:p>
+            <a:pPr algn="ctr">
+              <a:lnSpc>
+                <a:spcPct val="95000"/>
+              </a:lnSpc>
+              <a:spcBef>
+                <a:spcPts val="0"/>
+              </a:spcBef>
+              <a:spcAft>
+                <a:spcPts val="0"/>
+              </a:spcAft>
+            </a:pPr>
+            <a:r>
+              <a:rPr sz="680" b="0" i="0">
+                <a:solidFill>
+                  <a:srgbClr val="727375"/>
+                </a:solidFill>
+                <a:latin typeface="Arial"/>
+              </a:rPr>
+              <a:t>govt schools
+served</a:t>
+            </a:r>
+          </a:p>
+        </p:txBody>
+      </p:sp>
+      <p:sp>
+        <p:nvSpPr>
+          <p:cNvPr id="37" name="Rectangle 36"/>
+          <p:cNvSpPr/>
+          <p:nvPr/>
+        </p:nvSpPr>
+        <p:spPr>
+          <a:xfrm>
+            <a:off x="4590288" y="4709160"/>
+            <a:ext cx="54864" cy="182880"/>
+          </a:xfrm>
+          <a:prstGeom prst="rect">
+            <a:avLst/>
+          </a:prstGeom>
+          <a:solidFill>
+            <a:srgbClr val="398025"/>
+          </a:solidFill>
+          <a:ln>
+            <a:noFill/>
+          </a:ln>
+          <a:effectLst/>
+        </p:spPr>
+        <p:style>
+          <a:lnRef idx="1">
+            <a:schemeClr val="accent1"/>
+          </a:lnRef>
+          <a:fillRef idx="3">
+            <a:schemeClr val="accent1"/>
+          </a:fillRef>
+          <a:effectRef idx="2">
+            <a:schemeClr val="accent1"/>
+          </a:effectRef>
+          <a:fontRef idx="minor">
+            <a:schemeClr val="lt1"/>
+          </a:fontRef>
+        </p:style>
+        <p:txBody>
+          <a:bodyPr rtlCol="0" anchor="ctr"/>
+          <a:lstStyle/>
+          <a:p>
+            <a:pPr algn="ctr"/>
+          </a:p>
+        </p:txBody>
+      </p:sp>
+      <p:sp>
+        <p:nvSpPr>
+          <p:cNvPr id="38" name="TextBox 37"/>
+          <p:cNvSpPr txBox="1"/>
+          <p:nvPr/>
+        </p:nvSpPr>
+        <p:spPr>
+          <a:xfrm>
+            <a:off x="4736592" y="4681728"/>
+            <a:ext cx="4041648" cy="256032"/>
+          </a:xfrm>
+          <a:prstGeom prst="rect">
+            <a:avLst/>
+          </a:prstGeom>
+          <a:noFill/>
+        </p:spPr>
+        <p:txBody>
+          <a:bodyPr wrap="square" lIns="0" rIns="0" tIns="0" bIns="0" anchor="t">
+            <a:spAutoFit/>
+          </a:bodyPr>
+          <a:lstStyle/>
+          <a:p>
+            <a:pPr algn="l">
+              <a:lnSpc>
+                <a:spcPct val="100000"/>
+              </a:lnSpc>
+              <a:spcBef>
+                <a:spcPts val="0"/>
+              </a:spcBef>
+              <a:spcAft>
+                <a:spcPts val="0"/>
+              </a:spcAft>
+            </a:pPr>
+            <a:r>
+              <a:rPr sz="1150" b="1" i="0">
+                <a:solidFill>
+                  <a:srgbClr val="1B3E6E"/>
+                </a:solidFill>
+                <a:latin typeface="Arial"/>
+              </a:rPr>
+              <a:t>The opportunity — India context</a:t>
+            </a:r>
+          </a:p>
+        </p:txBody>
+      </p:sp>
+      <p:sp>
+        <p:nvSpPr>
+          <p:cNvPr id="39" name="Rectangle 38"/>
+          <p:cNvSpPr/>
+          <p:nvPr/>
+        </p:nvSpPr>
+        <p:spPr>
+          <a:xfrm>
+            <a:off x="4590288" y="4956048"/>
+            <a:ext cx="4187952" cy="10972"/>
+          </a:xfrm>
+          <a:prstGeom prst="rect">
+            <a:avLst/>
+          </a:prstGeom>
+          <a:solidFill>
+            <a:srgbClr val="BFBFBF"/>
+          </a:solidFill>
+          <a:ln>
+            <a:noFill/>
+          </a:ln>
+          <a:effectLst/>
+        </p:spPr>
+        <p:style>
+          <a:lnRef idx="1">
+            <a:schemeClr val="accent1"/>
+          </a:lnRef>
+          <a:fillRef idx="3">
+            <a:schemeClr val="accent1"/>
+          </a:fillRef>
+          <a:effectRef idx="2">
+            <a:schemeClr val="accent1"/>
+          </a:effectRef>
+          <a:fontRef idx="minor">
+            <a:schemeClr val="lt1"/>
+          </a:fontRef>
+        </p:style>
+        <p:txBody>
+          <a:bodyPr rtlCol="0" anchor="ctr"/>
+          <a:lstStyle/>
+          <a:p>
+            <a:pPr algn="ctr"/>
+          </a:p>
+        </p:txBody>
+      </p:sp>
+      <p:sp>
+        <p:nvSpPr>
+          <p:cNvPr id="40" name="TextBox 39"/>
+          <p:cNvSpPr txBox="1"/>
+          <p:nvPr/>
+        </p:nvSpPr>
+        <p:spPr>
+          <a:xfrm>
+            <a:off x="4590288" y="5065776"/>
+            <a:ext cx="1024128" cy="685800"/>
+          </a:xfrm>
+          <a:prstGeom prst="rect">
+            <a:avLst/>
+          </a:prstGeom>
+          <a:noFill/>
+        </p:spPr>
+        <p:txBody>
+          <a:bodyPr wrap="square" lIns="0" rIns="0" tIns="0" bIns="0" anchor="t">
+            <a:spAutoFit/>
+          </a:bodyPr>
+          <a:lstStyle/>
+          <a:p>
+            <a:pPr algn="ctr">
+              <a:lnSpc>
+                <a:spcPct val="100000"/>
+              </a:lnSpc>
+              <a:spcBef>
+                <a:spcPts val="0"/>
+              </a:spcBef>
+              <a:spcAft>
+                <a:spcPts val="100"/>
+              </a:spcAft>
+            </a:pPr>
+            <a:r>
+              <a:rPr sz="1200" b="1" i="0">
+                <a:solidFill>
+                  <a:srgbClr val="1B3E6E"/>
+                </a:solidFill>
+                <a:latin typeface="Arial"/>
+              </a:rPr>
+              <a:t>2%</a:t>
+            </a:r>
+          </a:p>
+          <a:p>
+            <a:pPr algn="ctr">
+              <a:lnSpc>
+                <a:spcPct val="95000"/>
+              </a:lnSpc>
+              <a:spcBef>
+                <a:spcPts val="0"/>
+              </a:spcBef>
+              <a:spcAft>
+                <a:spcPts val="0"/>
+              </a:spcAft>
+            </a:pPr>
+            <a:r>
+              <a:rPr sz="620" b="0" i="0">
+                <a:solidFill>
+                  <a:srgbClr val="727375"/>
+                </a:solidFill>
+                <a:latin typeface="Arial"/>
+              </a:rPr>
+              <a:t>of India's 130M govt-
+school children reached</a:t>
+            </a:r>
+          </a:p>
+        </p:txBody>
+      </p:sp>
+      <p:sp>
+        <p:nvSpPr>
+          <p:cNvPr id="41" name="TextBox 40"/>
+          <p:cNvSpPr txBox="1"/>
+          <p:nvPr/>
+        </p:nvSpPr>
+        <p:spPr>
+          <a:xfrm>
+            <a:off x="5669279" y="5065776"/>
+            <a:ext cx="1024128" cy="685800"/>
+          </a:xfrm>
+          <a:prstGeom prst="rect">
+            <a:avLst/>
+          </a:prstGeom>
+          <a:noFill/>
+        </p:spPr>
+        <p:txBody>
+          <a:bodyPr wrap="square" lIns="0" rIns="0" tIns="0" bIns="0" anchor="t">
+            <a:spAutoFit/>
+          </a:bodyPr>
+          <a:lstStyle/>
+          <a:p>
+            <a:pPr algn="ctr">
+              <a:lnSpc>
+                <a:spcPct val="100000"/>
+              </a:lnSpc>
+              <a:spcBef>
+                <a:spcPts val="0"/>
+              </a:spcBef>
+              <a:spcAft>
+                <a:spcPts val="100"/>
+              </a:spcAft>
+            </a:pPr>
+            <a:r>
+              <a:rPr sz="1200" b="1" i="0">
+                <a:solidFill>
+                  <a:srgbClr val="1B3E6E"/>
+                </a:solidFill>
+                <a:latin typeface="Arial"/>
+              </a:rPr>
+              <a:t>8.2%</a:t>
+            </a:r>
+          </a:p>
+          <a:p>
+            <a:pPr algn="ctr">
+              <a:lnSpc>
+                <a:spcPct val="95000"/>
+              </a:lnSpc>
+              <a:spcBef>
+                <a:spcPts val="0"/>
+              </a:spcBef>
+              <a:spcAft>
+                <a:spcPts val="0"/>
+              </a:spcAft>
+            </a:pPr>
+            <a:r>
+              <a:rPr sz="620" b="0" i="0">
+                <a:solidFill>
+                  <a:srgbClr val="727375"/>
+                </a:solidFill>
+                <a:latin typeface="Arial"/>
+              </a:rPr>
+              <a:t>secondary dropout
+rate (UDISE+)</a:t>
+            </a:r>
+          </a:p>
+        </p:txBody>
+      </p:sp>
+      <p:sp>
+        <p:nvSpPr>
+          <p:cNvPr id="42" name="TextBox 41"/>
+          <p:cNvSpPr txBox="1"/>
+          <p:nvPr/>
+        </p:nvSpPr>
+        <p:spPr>
+          <a:xfrm>
+            <a:off x="6748271" y="5065776"/>
+            <a:ext cx="1024128" cy="685800"/>
+          </a:xfrm>
+          <a:prstGeom prst="rect">
+            <a:avLst/>
+          </a:prstGeom>
+          <a:noFill/>
+        </p:spPr>
+        <p:txBody>
+          <a:bodyPr wrap="square" lIns="0" rIns="0" tIns="0" bIns="0" anchor="t">
+            <a:spAutoFit/>
+          </a:bodyPr>
+          <a:lstStyle/>
+          <a:p>
+            <a:pPr algn="ctr">
+              <a:lnSpc>
+                <a:spcPct val="100000"/>
+              </a:lnSpc>
+              <a:spcBef>
+                <a:spcPts val="0"/>
+              </a:spcBef>
+              <a:spcAft>
+                <a:spcPts val="100"/>
+              </a:spcAft>
+            </a:pPr>
+            <a:r>
+              <a:rPr sz="1200" b="1" i="0">
+                <a:solidFill>
+                  <a:srgbClr val="1B3E6E"/>
+                </a:solidFill>
+                <a:latin typeface="Arial"/>
+              </a:rPr>
+              <a:t>102/123</a:t>
+            </a:r>
+          </a:p>
+          <a:p>
+            <a:pPr algn="ctr">
+              <a:lnSpc>
+                <a:spcPct val="95000"/>
+              </a:lnSpc>
+              <a:spcBef>
+                <a:spcPts val="0"/>
+              </a:spcBef>
+              <a:spcAft>
+                <a:spcPts val="0"/>
+              </a:spcAft>
+            </a:pPr>
+            <a:r>
+              <a:rPr sz="620" b="0" i="0">
+                <a:solidFill>
+                  <a:srgbClr val="727375"/>
+                </a:solidFill>
+                <a:latin typeface="Arial"/>
+              </a:rPr>
+              <a:t>India, Global Hunger
+Index 2025</a:t>
+            </a:r>
+          </a:p>
+        </p:txBody>
+      </p:sp>
+      <p:sp>
+        <p:nvSpPr>
+          <p:cNvPr id="43" name="Rectangle 42"/>
+          <p:cNvSpPr/>
+          <p:nvPr/>
+        </p:nvSpPr>
+        <p:spPr>
+          <a:xfrm>
+            <a:off x="7882127" y="5084064"/>
+            <a:ext cx="896112" cy="658368"/>
+          </a:xfrm>
+          <a:prstGeom prst="rect">
+            <a:avLst/>
+          </a:prstGeom>
+          <a:solidFill>
+            <a:srgbClr val="F2F2F2"/>
+          </a:solidFill>
+          <a:ln w="12700">
+            <a:solidFill>
+              <a:srgbClr val="727375"/>
+            </a:solidFill>
+            <a:prstDash val="dash"/>
+          </a:ln>
+          <a:effectLst/>
+        </p:spPr>
+        <p:style>
+          <a:lnRef idx="1">
+            <a:schemeClr val="accent1"/>
+          </a:lnRef>
+          <a:fillRef idx="3">
+            <a:schemeClr val="accent1"/>
+          </a:fillRef>
+          <a:effectRef idx="2">
+            <a:schemeClr val="accent1"/>
+          </a:effectRef>
+          <a:fontRef idx="minor">
+            <a:schemeClr val="lt1"/>
+          </a:fontRef>
+        </p:style>
+        <p:txBody>
+          <a:bodyPr rtlCol="0" anchor="ctr"/>
+          <a:lstStyle/>
+          <a:p>
+            <a:pPr algn="ctr"/>
+          </a:p>
+        </p:txBody>
+      </p:sp>
+      <p:sp>
+        <p:nvSpPr>
+          <p:cNvPr id="44" name="TextBox 43"/>
+          <p:cNvSpPr txBox="1"/>
+          <p:nvPr/>
+        </p:nvSpPr>
+        <p:spPr>
+          <a:xfrm>
+            <a:off x="7936992" y="5084064"/>
+            <a:ext cx="786384" cy="658368"/>
+          </a:xfrm>
+          <a:prstGeom prst="rect">
+            <a:avLst/>
+          </a:prstGeom>
+          <a:noFill/>
+        </p:spPr>
+        <p:txBody>
+          <a:bodyPr wrap="square" lIns="0" rIns="0" tIns="0" bIns="0" anchor="ctr">
+            <a:spAutoFit/>
+          </a:bodyPr>
+          <a:lstStyle/>
+          <a:p>
+            <a:pPr algn="ctr">
+              <a:lnSpc>
+                <a:spcPct val="100000"/>
+              </a:lnSpc>
+              <a:spcBef>
+                <a:spcPts val="0"/>
+              </a:spcBef>
+              <a:spcAft>
+                <a:spcPts val="100"/>
+              </a:spcAft>
+            </a:pPr>
+            <a:r>
+              <a:rPr sz="850" b="1" i="0">
+                <a:solidFill>
+                  <a:srgbClr val="727375"/>
+                </a:solidFill>
+                <a:latin typeface="Arial"/>
+              </a:rPr>
+              <a:t>📷 PHOTO: children
+at mid-day meal</a:t>
+            </a:r>
+          </a:p>
+        </p:txBody>
+      </p:sp>
+    </p:spTree>
+  </p:cSld>
+  <p:clrMapOvr>
+    <a:masterClrMapping/>
+  </p:clrMapOvr>
+</p:sld>
+</file>
+
+<file path=ppt/slides/slide8.xml><?xml version="1.0" encoding="utf-8"?>
+<p:sld xmlns:a="http://schemas.openxmlformats.org/drawingml/2006/main" xmlns:p="http://schemas.openxmlformats.org/presentationml/2006/main" xmlns:r="http://schemas.openxmlformats.org/officeDocument/2006/relationships">
+  <p:cSld>
+    <p:spTree>
+      <p:nvGrpSpPr>
+        <p:cNvPr id="1" name=""/>
+        <p:cNvGrpSpPr/>
+        <p:nvPr/>
+      </p:nvGrpSpPr>
+      <p:grpSpPr/>
+      <p:sp>
+        <p:nvSpPr>
+          <p:cNvPr id="2" name="Rectangle 1"/>
+          <p:cNvSpPr/>
+          <p:nvPr/>
+        </p:nvSpPr>
+        <p:spPr>
+          <a:xfrm>
+            <a:off x="365760" y="274320"/>
+            <a:ext cx="8412480" cy="23774"/>
+          </a:xfrm>
+          <a:prstGeom prst="rect">
+            <a:avLst/>
+          </a:prstGeom>
+          <a:solidFill>
+            <a:srgbClr val="1B3E6E"/>
+          </a:solidFill>
+          <a:ln>
+            <a:noFill/>
+          </a:ln>
+          <a:effectLst/>
+        </p:spPr>
+        <p:style>
+          <a:lnRef idx="1">
+            <a:schemeClr val="accent1"/>
+          </a:lnRef>
+          <a:fillRef idx="3">
+            <a:schemeClr val="accent1"/>
+          </a:fillRef>
+          <a:effectRef idx="2">
+            <a:schemeClr val="accent1"/>
+          </a:effectRef>
+          <a:fontRef idx="minor">
+            <a:schemeClr val="lt1"/>
+          </a:fontRef>
+        </p:style>
+        <p:txBody>
+          <a:bodyPr rtlCol="0" anchor="ctr"/>
+          <a:lstStyle/>
+          <a:p>
+            <a:pPr algn="ctr"/>
+          </a:p>
+        </p:txBody>
+      </p:sp>
+      <p:sp>
+        <p:nvSpPr>
+          <p:cNvPr id="3" name="TextBox 2"/>
+          <p:cNvSpPr txBox="1"/>
+          <p:nvPr/>
+        </p:nvSpPr>
+        <p:spPr>
+          <a:xfrm>
+            <a:off x="365760" y="365760"/>
+            <a:ext cx="8412480" cy="457200"/>
+          </a:xfrm>
+          <a:prstGeom prst="rect">
+            <a:avLst/>
+          </a:prstGeom>
+          <a:noFill/>
+        </p:spPr>
+        <p:txBody>
+          <a:bodyPr wrap="square" lIns="0" rIns="0" tIns="0" bIns="0" anchor="t">
+            <a:spAutoFit/>
+          </a:bodyPr>
+          <a:lstStyle/>
+          <a:p>
+            <a:pPr algn="l">
+              <a:lnSpc>
+                <a:spcPct val="100000"/>
+              </a:lnSpc>
+              <a:spcBef>
+                <a:spcPts val="0"/>
+              </a:spcBef>
+              <a:spcAft>
+                <a:spcPts val="0"/>
+              </a:spcAft>
+            </a:pPr>
+            <a:r>
+              <a:rPr sz="2000" b="0" i="0">
+                <a:solidFill>
+                  <a:srgbClr val="1B3E6E"/>
+                </a:solidFill>
+                <a:latin typeface="Georgia"/>
+              </a:rPr>
+              <a:t>The two gaps — and the $250,000 that closes them</a:t>
+            </a:r>
+          </a:p>
+        </p:txBody>
+      </p:sp>
+      <p:sp>
+        <p:nvSpPr>
+          <p:cNvPr id="4" name="TextBox 3"/>
+          <p:cNvSpPr txBox="1"/>
+          <p:nvPr/>
+        </p:nvSpPr>
+        <p:spPr>
+          <a:xfrm>
+            <a:off x="365760" y="822960"/>
+            <a:ext cx="8412480" cy="438912"/>
+          </a:xfrm>
+          <a:prstGeom prst="rect">
+            <a:avLst/>
+          </a:prstGeom>
+          <a:noFill/>
+        </p:spPr>
+        <p:txBody>
+          <a:bodyPr wrap="square" lIns="0" rIns="0" tIns="0" bIns="0" anchor="t">
+            <a:spAutoFit/>
+          </a:bodyPr>
+          <a:lstStyle/>
+          <a:p>
+            <a:pPr algn="l">
+              <a:lnSpc>
+                <a:spcPct val="100000"/>
+              </a:lnSpc>
+              <a:spcBef>
+                <a:spcPts val="0"/>
+              </a:spcBef>
+              <a:spcAft>
+                <a:spcPts val="0"/>
+              </a:spcAft>
+            </a:pPr>
+            <a:r>
+              <a:rPr sz="1050" b="0" i="0">
+                <a:solidFill>
+                  <a:srgbClr val="333333"/>
+                </a:solidFill>
+                <a:latin typeface="Arial"/>
+              </a:rPr>
+              <a:t>The gaps sit exactly where TAPF's own leadership says they are — its top-ranked technology priorities, confirmed in writing.</a:t>
+            </a:r>
+          </a:p>
+        </p:txBody>
+      </p:sp>
+      <p:sp>
+        <p:nvSpPr>
+          <p:cNvPr id="5" name="Rectangle 4"/>
+          <p:cNvSpPr/>
+          <p:nvPr/>
+        </p:nvSpPr>
+        <p:spPr>
+          <a:xfrm>
+            <a:off x="502920" y="6071616"/>
+            <a:ext cx="8138159" cy="365760"/>
+          </a:xfrm>
+          <a:prstGeom prst="rect">
+            <a:avLst/>
+          </a:prstGeom>
+          <a:solidFill>
+            <a:srgbClr val="D9D9D9"/>
+          </a:solidFill>
+          <a:ln>
+            <a:noFill/>
+          </a:ln>
+          <a:effectLst/>
+        </p:spPr>
+        <p:style>
+          <a:lnRef idx="1">
+            <a:schemeClr val="accent1"/>
+          </a:lnRef>
+          <a:fillRef idx="3">
+            <a:schemeClr val="accent1"/>
+          </a:fillRef>
+          <a:effectRef idx="2">
+            <a:schemeClr val="accent1"/>
+          </a:effectRef>
+          <a:fontRef idx="minor">
+            <a:schemeClr val="lt1"/>
+          </a:fontRef>
+        </p:style>
+        <p:txBody>
+          <a:bodyPr rtlCol="0" anchor="ctr"/>
+          <a:lstStyle/>
+          <a:p>
+            <a:pPr algn="ctr"/>
+          </a:p>
+        </p:txBody>
+      </p:sp>
+      <p:sp>
+        <p:nvSpPr>
+          <p:cNvPr id="6" name="TextBox 5"/>
+          <p:cNvSpPr txBox="1"/>
+          <p:nvPr/>
+        </p:nvSpPr>
+        <p:spPr>
+          <a:xfrm>
+            <a:off x="640080" y="6071616"/>
+            <a:ext cx="7863840" cy="365760"/>
+          </a:xfrm>
+          <a:prstGeom prst="rect">
+            <a:avLst/>
+          </a:prstGeom>
+          <a:noFill/>
+        </p:spPr>
+        <p:txBody>
+          <a:bodyPr wrap="square" lIns="0" rIns="0" tIns="0" bIns="0" anchor="ctr">
+            <a:spAutoFit/>
+          </a:bodyPr>
+          <a:lstStyle/>
+          <a:p>
+            <a:pPr algn="ctr">
+              <a:lnSpc>
+                <a:spcPct val="95000"/>
+              </a:lnSpc>
+              <a:spcBef>
+                <a:spcPts val="0"/>
+              </a:spcBef>
+              <a:spcAft>
+                <a:spcPts val="0"/>
+              </a:spcAft>
+            </a:pPr>
+            <a:r>
+              <a:rPr sz="1100" b="1" i="0">
+                <a:solidFill>
+                  <a:srgbClr val="1B3E6E"/>
+                </a:solidFill>
+                <a:latin typeface="Georgia"/>
+              </a:rPr>
+              <a:t>Two fixable gaps, two targeted builds — both at the top of TAPF's own priority list.</a:t>
+            </a:r>
+          </a:p>
+        </p:txBody>
+      </p:sp>
+      <p:sp>
+        <p:nvSpPr>
+          <p:cNvPr id="7" name="TextBox 6"/>
+          <p:cNvSpPr txBox="1"/>
+          <p:nvPr/>
+        </p:nvSpPr>
+        <p:spPr>
+          <a:xfrm>
+            <a:off x="365760" y="6492240"/>
+            <a:ext cx="1280160" cy="329184"/>
+          </a:xfrm>
+          <a:prstGeom prst="rect">
+            <a:avLst/>
+          </a:prstGeom>
+          <a:noFill/>
+        </p:spPr>
+        <p:txBody>
+          <a:bodyPr wrap="square" lIns="0" rIns="0" tIns="0" bIns="0" anchor="t">
+            <a:spAutoFit/>
+          </a:bodyPr>
+          <a:lstStyle/>
+          <a:p>
+            <a:pPr algn="l">
+              <a:lnSpc>
+                <a:spcPct val="90000"/>
+              </a:lnSpc>
+              <a:spcBef>
+                <a:spcPts val="0"/>
+              </a:spcBef>
+              <a:spcAft>
+                <a:spcPts val="0"/>
+              </a:spcAft>
+            </a:pPr>
+            <a:r>
+              <a:rPr sz="900" b="1" i="0">
+                <a:solidFill>
+                  <a:srgbClr val="111111"/>
+                </a:solidFill>
+                <a:latin typeface="Georgia"/>
+              </a:rPr>
+              <a:t>Goldman</a:t>
+            </a:r>
+          </a:p>
+          <a:p>
+            <a:pPr algn="l">
+              <a:lnSpc>
+                <a:spcPct val="90000"/>
+              </a:lnSpc>
+              <a:spcBef>
+                <a:spcPts val="0"/>
+              </a:spcBef>
+              <a:spcAft>
+                <a:spcPts val="0"/>
+              </a:spcAft>
+            </a:pPr>
+            <a:r>
+              <a:rPr sz="900" b="1" i="0">
+                <a:solidFill>
+                  <a:srgbClr val="111111"/>
+                </a:solidFill>
+                <a:latin typeface="Georgia"/>
+              </a:rPr>
+              <a:t>Sachs</a:t>
+            </a:r>
+          </a:p>
+        </p:txBody>
+      </p:sp>
+      <p:sp>
+        <p:nvSpPr>
+          <p:cNvPr id="8" name="TextBox 7"/>
+          <p:cNvSpPr txBox="1"/>
+          <p:nvPr/>
+        </p:nvSpPr>
+        <p:spPr>
+          <a:xfrm>
+            <a:off x="8321040" y="6528816"/>
+            <a:ext cx="457200" cy="274320"/>
+          </a:xfrm>
+          <a:prstGeom prst="rect">
+            <a:avLst/>
+          </a:prstGeom>
+          <a:noFill/>
+        </p:spPr>
+        <p:txBody>
+          <a:bodyPr wrap="square" lIns="0" rIns="0" tIns="0" bIns="0" anchor="t">
+            <a:spAutoFit/>
+          </a:bodyPr>
+          <a:lstStyle/>
+          <a:p>
+            <a:pPr algn="r">
+              <a:lnSpc>
+                <a:spcPct val="100000"/>
+              </a:lnSpc>
+              <a:spcBef>
+                <a:spcPts val="0"/>
+              </a:spcBef>
+              <a:spcAft>
+                <a:spcPts val="300"/>
+              </a:spcAft>
+            </a:pPr>
+            <a:r>
+              <a:rPr sz="900" b="0" i="0">
+                <a:solidFill>
+                  <a:srgbClr val="727375"/>
+                </a:solidFill>
+                <a:latin typeface="Arial"/>
+              </a:rPr>
+              <a:t>8</a:t>
+            </a:r>
+          </a:p>
+        </p:txBody>
+      </p:sp>
+      <p:sp>
+        <p:nvSpPr>
+          <p:cNvPr id="9" name="TextBox 8"/>
+          <p:cNvSpPr txBox="1"/>
+          <p:nvPr/>
+        </p:nvSpPr>
+        <p:spPr>
+          <a:xfrm>
+            <a:off x="4754879" y="54864"/>
+            <a:ext cx="4023360" cy="182880"/>
+          </a:xfrm>
+          <a:prstGeom prst="rect">
+            <a:avLst/>
+          </a:prstGeom>
+          <a:noFill/>
+        </p:spPr>
+        <p:txBody>
+          <a:bodyPr wrap="square" lIns="0" rIns="0" tIns="0" bIns="0" anchor="t">
+            <a:spAutoFit/>
+          </a:bodyPr>
+          <a:lstStyle/>
+          <a:p>
+            <a:pPr algn="r">
+              <a:lnSpc>
+                <a:spcPct val="100000"/>
+              </a:lnSpc>
+              <a:spcBef>
+                <a:spcPts val="0"/>
+              </a:spcBef>
+              <a:spcAft>
+                <a:spcPts val="0"/>
+              </a:spcAft>
+            </a:pPr>
+            <a:r>
+              <a:rPr sz="750" b="0" i="1">
+                <a:solidFill>
+                  <a:srgbClr val="727375"/>
+                </a:solidFill>
+                <a:latin typeface="Arial"/>
+              </a:rPr>
+              <a:t>FINAL CONTENT — SLIDE 3 (v2)</a:t>
+            </a:r>
+          </a:p>
+        </p:txBody>
+      </p:sp>
+      <p:sp>
+        <p:nvSpPr>
+          <p:cNvPr id="10" name="TextBox 9"/>
+          <p:cNvSpPr txBox="1"/>
+          <p:nvPr/>
+        </p:nvSpPr>
+        <p:spPr>
+          <a:xfrm>
+            <a:off x="4846320" y="6547104"/>
+            <a:ext cx="3401568" cy="274320"/>
+          </a:xfrm>
+          <a:prstGeom prst="rect">
+            <a:avLst/>
+          </a:prstGeom>
+          <a:noFill/>
+        </p:spPr>
+        <p:txBody>
+          <a:bodyPr wrap="square" lIns="0" rIns="0" tIns="0" bIns="0" anchor="t">
+            <a:spAutoFit/>
+          </a:bodyPr>
+          <a:lstStyle/>
+          <a:p>
+            <a:pPr algn="r">
+              <a:lnSpc>
+                <a:spcPct val="100000"/>
+              </a:lnSpc>
+              <a:spcBef>
+                <a:spcPts val="0"/>
+              </a:spcBef>
+              <a:spcAft>
+                <a:spcPts val="0"/>
+              </a:spcAft>
+            </a:pPr>
+            <a:r>
+              <a:rPr sz="650" b="0" i="1">
+                <a:solidFill>
+                  <a:srgbClr val="727375"/>
+                </a:solidFill>
+                <a:latin typeface="Arial"/>
+              </a:rPr>
+              <a:t>Source: The Akshaya Patra Foundation — official documents</a:t>
+            </a:r>
+          </a:p>
+        </p:txBody>
+      </p:sp>
+      <p:sp>
+        <p:nvSpPr>
+          <p:cNvPr id="11" name="Rectangle 10"/>
+          <p:cNvSpPr/>
+          <p:nvPr/>
+        </p:nvSpPr>
+        <p:spPr>
+          <a:xfrm>
+            <a:off x="365760" y="1335024"/>
+            <a:ext cx="4133087" cy="2249424"/>
+          </a:xfrm>
+          <a:prstGeom prst="rect">
+            <a:avLst/>
+          </a:prstGeom>
+          <a:solidFill>
+            <a:srgbClr val="F4F4F4"/>
+          </a:solidFill>
+          <a:ln>
+            <a:noFill/>
+          </a:ln>
+          <a:effectLst/>
+        </p:spPr>
+        <p:style>
+          <a:lnRef idx="1">
+            <a:schemeClr val="accent1"/>
+          </a:lnRef>
+          <a:fillRef idx="3">
+            <a:schemeClr val="accent1"/>
+          </a:fillRef>
+          <a:effectRef idx="2">
+            <a:schemeClr val="accent1"/>
+          </a:effectRef>
+          <a:fontRef idx="minor">
+            <a:schemeClr val="lt1"/>
+          </a:fontRef>
+        </p:style>
+        <p:txBody>
+          <a:bodyPr rtlCol="0" anchor="ctr"/>
+          <a:lstStyle/>
+          <a:p>
+            <a:pPr algn="ctr"/>
+          </a:p>
+        </p:txBody>
+      </p:sp>
+      <p:sp>
+        <p:nvSpPr>
+          <p:cNvPr id="12" name="Rectangle 11"/>
+          <p:cNvSpPr/>
+          <p:nvPr/>
+        </p:nvSpPr>
+        <p:spPr>
+          <a:xfrm>
+            <a:off x="365760" y="3675887"/>
+            <a:ext cx="4133087" cy="2231136"/>
+          </a:xfrm>
+          <a:prstGeom prst="rect">
+            <a:avLst/>
+          </a:prstGeom>
+          <a:solidFill>
+            <a:srgbClr val="F4F4F4"/>
+          </a:solidFill>
+          <a:ln>
+            <a:noFill/>
+          </a:ln>
+          <a:effectLst/>
+        </p:spPr>
+        <p:style>
+          <a:lnRef idx="1">
+            <a:schemeClr val="accent1"/>
+          </a:lnRef>
+          <a:fillRef idx="3">
+            <a:schemeClr val="accent1"/>
+          </a:fillRef>
+          <a:effectRef idx="2">
+            <a:schemeClr val="accent1"/>
+          </a:effectRef>
+          <a:fontRef idx="minor">
+            <a:schemeClr val="lt1"/>
+          </a:fontRef>
+        </p:style>
+        <p:txBody>
+          <a:bodyPr rtlCol="0" anchor="ctr"/>
+          <a:lstStyle/>
+          <a:p>
+            <a:pPr algn="ctr"/>
+          </a:p>
+        </p:txBody>
+      </p:sp>
+      <p:sp>
+        <p:nvSpPr>
+          <p:cNvPr id="13" name="Rectangle 12"/>
+          <p:cNvSpPr/>
+          <p:nvPr/>
+        </p:nvSpPr>
+        <p:spPr>
+          <a:xfrm>
+            <a:off x="4645152" y="1335024"/>
+            <a:ext cx="4133087" cy="2249424"/>
+          </a:xfrm>
+          <a:prstGeom prst="rect">
+            <a:avLst/>
+          </a:prstGeom>
+          <a:solidFill>
+            <a:srgbClr val="F4F4F4"/>
+          </a:solidFill>
+          <a:ln>
+            <a:noFill/>
+          </a:ln>
+          <a:effectLst/>
+        </p:spPr>
+        <p:style>
+          <a:lnRef idx="1">
+            <a:schemeClr val="accent1"/>
+          </a:lnRef>
+          <a:fillRef idx="3">
+            <a:schemeClr val="accent1"/>
+          </a:fillRef>
+          <a:effectRef idx="2">
+            <a:schemeClr val="accent1"/>
+          </a:effectRef>
+          <a:fontRef idx="minor">
+            <a:schemeClr val="lt1"/>
+          </a:fontRef>
+        </p:style>
+        <p:txBody>
+          <a:bodyPr rtlCol="0" anchor="ctr"/>
+          <a:lstStyle/>
+          <a:p>
+            <a:pPr algn="ctr"/>
+          </a:p>
+        </p:txBody>
+      </p:sp>
+      <p:sp>
+        <p:nvSpPr>
+          <p:cNvPr id="14" name="Rectangle 13"/>
+          <p:cNvSpPr/>
+          <p:nvPr/>
+        </p:nvSpPr>
+        <p:spPr>
+          <a:xfrm>
+            <a:off x="4645152" y="3675887"/>
+            <a:ext cx="4133087" cy="2231136"/>
+          </a:xfrm>
+          <a:prstGeom prst="rect">
+            <a:avLst/>
+          </a:prstGeom>
+          <a:solidFill>
+            <a:srgbClr val="F4F4F4"/>
+          </a:solidFill>
+          <a:ln>
+            <a:noFill/>
+          </a:ln>
+          <a:effectLst/>
+        </p:spPr>
+        <p:style>
+          <a:lnRef idx="1">
+            <a:schemeClr val="accent1"/>
+          </a:lnRef>
+          <a:fillRef idx="3">
+            <a:schemeClr val="accent1"/>
+          </a:fillRef>
+          <a:effectRef idx="2">
+            <a:schemeClr val="accent1"/>
+          </a:effectRef>
+          <a:fontRef idx="minor">
+            <a:schemeClr val="lt1"/>
+          </a:fontRef>
+        </p:style>
+        <p:txBody>
+          <a:bodyPr rtlCol="0" anchor="ctr"/>
+          <a:lstStyle/>
+          <a:p>
+            <a:pPr algn="ctr"/>
+          </a:p>
+        </p:txBody>
+      </p:sp>
+      <p:sp>
+        <p:nvSpPr>
+          <p:cNvPr id="15" name="Rectangle 14"/>
+          <p:cNvSpPr/>
+          <p:nvPr/>
+        </p:nvSpPr>
+        <p:spPr>
+          <a:xfrm>
+            <a:off x="502920" y="1472184"/>
+            <a:ext cx="54864" cy="182880"/>
+          </a:xfrm>
+          <a:prstGeom prst="rect">
+            <a:avLst/>
+          </a:prstGeom>
+          <a:solidFill>
+            <a:srgbClr val="C22310"/>
+          </a:solidFill>
+          <a:ln>
+            <a:noFill/>
+          </a:ln>
+          <a:effectLst/>
+        </p:spPr>
+        <p:style>
+          <a:lnRef idx="1">
+            <a:schemeClr val="accent1"/>
+          </a:lnRef>
+          <a:fillRef idx="3">
+            <a:schemeClr val="accent1"/>
+          </a:fillRef>
+          <a:effectRef idx="2">
+            <a:schemeClr val="accent1"/>
+          </a:effectRef>
+          <a:fontRef idx="minor">
+            <a:schemeClr val="lt1"/>
+          </a:fontRef>
+        </p:style>
+        <p:txBody>
+          <a:bodyPr rtlCol="0" anchor="ctr"/>
+          <a:lstStyle/>
+          <a:p>
+            <a:pPr algn="ctr"/>
+          </a:p>
+        </p:txBody>
+      </p:sp>
+      <p:sp>
+        <p:nvSpPr>
+          <p:cNvPr id="16" name="TextBox 15"/>
+          <p:cNvSpPr txBox="1"/>
+          <p:nvPr/>
+        </p:nvSpPr>
+        <p:spPr>
+          <a:xfrm>
+            <a:off x="640080" y="1444752"/>
+            <a:ext cx="2926080" cy="237744"/>
+          </a:xfrm>
+          <a:prstGeom prst="rect">
+            <a:avLst/>
+          </a:prstGeom>
+          <a:noFill/>
+        </p:spPr>
+        <p:txBody>
+          <a:bodyPr wrap="square" lIns="0" rIns="0" tIns="0" bIns="0" anchor="t">
+            <a:spAutoFit/>
+          </a:bodyPr>
+          <a:lstStyle/>
+          <a:p>
+            <a:pPr algn="l">
+              <a:lnSpc>
+                <a:spcPct val="100000"/>
+              </a:lnSpc>
+              <a:spcBef>
+                <a:spcPts val="0"/>
+              </a:spcBef>
+              <a:spcAft>
+                <a:spcPts val="0"/>
+              </a:spcAft>
+            </a:pPr>
+            <a:r>
+              <a:rPr sz="1050" b="1" i="0">
+                <a:solidFill>
+                  <a:srgbClr val="1B3E6E"/>
+                </a:solidFill>
+                <a:latin typeface="Arial"/>
+              </a:rPr>
+              <a:t>GAP 1 — Procurement</a:t>
+            </a:r>
+          </a:p>
+        </p:txBody>
+      </p:sp>
+      <p:sp>
+        <p:nvSpPr>
+          <p:cNvPr id="17" name="TextBox 16"/>
+          <p:cNvSpPr txBox="1"/>
+          <p:nvPr/>
+        </p:nvSpPr>
+        <p:spPr>
+          <a:xfrm>
+            <a:off x="530352" y="1792224"/>
+            <a:ext cx="2788920" cy="1737360"/>
+          </a:xfrm>
+          <a:prstGeom prst="rect">
+            <a:avLst/>
+          </a:prstGeom>
+          <a:noFill/>
+        </p:spPr>
+        <p:txBody>
+          <a:bodyPr wrap="square" lIns="0" rIns="0" tIns="0" bIns="0" anchor="t">
+            <a:spAutoFit/>
+          </a:bodyPr>
+          <a:lstStyle/>
+          <a:p>
+            <a:pPr algn="l">
+              <a:lnSpc>
+                <a:spcPct val="102000"/>
+              </a:lnSpc>
+              <a:spcBef>
+                <a:spcPts val="0"/>
+              </a:spcBef>
+              <a:spcAft>
+                <a:spcPts val="300"/>
+              </a:spcAft>
+            </a:pPr>
+            <a:r>
+              <a:rPr sz="780" b="1" i="0">
+                <a:solidFill>
+                  <a:srgbClr val="333333"/>
+                </a:solidFill>
+                <a:latin typeface="Arial"/>
+              </a:rPr>
+              <a:t>•  Periodic, manual planning</a:t>
+            </a:r>
+            <a:r>
+              <a:rPr sz="780" b="0" i="0">
+                <a:solidFill>
+                  <a:srgbClr val="333333"/>
+                </a:solidFill>
+                <a:latin typeface="Arial"/>
+              </a:rPr>
+              <a:t> vs demand that shifts daily — weather, off-season supply, attendance swings</a:t>
+            </a:r>
+          </a:p>
+          <a:p>
+            <a:pPr algn="l">
+              <a:lnSpc>
+                <a:spcPct val="102000"/>
+              </a:lnSpc>
+              <a:spcBef>
+                <a:spcPts val="0"/>
+              </a:spcBef>
+              <a:spcAft>
+                <a:spcPts val="300"/>
+              </a:spcAft>
+            </a:pPr>
+            <a:r>
+              <a:rPr sz="780" b="1" i="0">
+                <a:solidFill>
+                  <a:srgbClr val="333333"/>
+                </a:solidFill>
+                <a:latin typeface="Arial"/>
+              </a:rPr>
+              <a:t>•  No buffer day</a:t>
+            </a:r>
+            <a:r>
+              <a:rPr sz="780" b="0" i="0">
+                <a:solidFill>
+                  <a:srgbClr val="333333"/>
+                </a:solidFill>
+                <a:latin typeface="Arial"/>
+              </a:rPr>
+              <a:t> — a planning miss is a same-day miss for children</a:t>
+            </a:r>
+          </a:p>
+          <a:p>
+            <a:pPr algn="l">
+              <a:lnSpc>
+                <a:spcPct val="102000"/>
+              </a:lnSpc>
+              <a:spcBef>
+                <a:spcPts val="0"/>
+              </a:spcBef>
+              <a:spcAft>
+                <a:spcPts val="300"/>
+              </a:spcAft>
+            </a:pPr>
+            <a:r>
+              <a:rPr sz="780" b="1" i="0">
+                <a:solidFill>
+                  <a:srgbClr val="333333"/>
+                </a:solidFill>
+                <a:latin typeface="Arial"/>
+              </a:rPr>
+              <a:t>•  Complexity: </a:t>
+            </a:r>
+            <a:r>
+              <a:rPr sz="780" b="0" i="0">
+                <a:solidFill>
+                  <a:srgbClr val="333333"/>
+                </a:solidFill>
+                <a:latin typeface="Arial"/>
+              </a:rPr>
+              <a:t>₹450 Cr+ food spend · 700 items · 655 vendors · 78 buyers, 145 approvers</a:t>
+            </a:r>
+          </a:p>
+          <a:p>
+            <a:pPr algn="l">
+              <a:lnSpc>
+                <a:spcPct val="102000"/>
+              </a:lnSpc>
+              <a:spcBef>
+                <a:spcPts val="0"/>
+              </a:spcBef>
+              <a:spcAft>
+                <a:spcPts val="0"/>
+              </a:spcAft>
+            </a:pPr>
+            <a:r>
+              <a:rPr sz="780" b="1" i="0">
+                <a:solidFill>
+                  <a:srgbClr val="C22310"/>
+                </a:solidFill>
+                <a:latin typeface="Arial"/>
+              </a:rPr>
+              <a:t>Today: 4–5.6% monthly vegetable wastage · spot buys above seasonal price troughs</a:t>
+            </a:r>
+          </a:p>
+        </p:txBody>
+      </p:sp>
+      <p:sp>
+        <p:nvSpPr>
+          <p:cNvPr id="18" name="Rectangle 17"/>
+          <p:cNvSpPr/>
+          <p:nvPr/>
+        </p:nvSpPr>
+        <p:spPr>
+          <a:xfrm>
+            <a:off x="5833872" y="1472184"/>
+            <a:ext cx="54864" cy="182880"/>
+          </a:xfrm>
+          <a:prstGeom prst="rect">
+            <a:avLst/>
+          </a:prstGeom>
+          <a:solidFill>
+            <a:srgbClr val="C22310"/>
+          </a:solidFill>
+          <a:ln>
+            <a:noFill/>
+          </a:ln>
+          <a:effectLst/>
+        </p:spPr>
+        <p:style>
+          <a:lnRef idx="1">
+            <a:schemeClr val="accent1"/>
+          </a:lnRef>
+          <a:fillRef idx="3">
+            <a:schemeClr val="accent1"/>
+          </a:fillRef>
+          <a:effectRef idx="2">
+            <a:schemeClr val="accent1"/>
+          </a:effectRef>
+          <a:fontRef idx="minor">
+            <a:schemeClr val="lt1"/>
+          </a:fontRef>
+        </p:style>
+        <p:txBody>
+          <a:bodyPr rtlCol="0" anchor="ctr"/>
+          <a:lstStyle/>
+          <a:p>
+            <a:pPr algn="ctr"/>
+          </a:p>
+        </p:txBody>
+      </p:sp>
+      <p:sp>
+        <p:nvSpPr>
+          <p:cNvPr id="19" name="TextBox 18"/>
+          <p:cNvSpPr txBox="1"/>
+          <p:nvPr/>
+        </p:nvSpPr>
+        <p:spPr>
+          <a:xfrm>
+            <a:off x="5971032" y="1444752"/>
+            <a:ext cx="2926080" cy="237744"/>
+          </a:xfrm>
+          <a:prstGeom prst="rect">
+            <a:avLst/>
+          </a:prstGeom>
+          <a:noFill/>
+        </p:spPr>
+        <p:txBody>
+          <a:bodyPr wrap="square" lIns="0" rIns="0" tIns="0" bIns="0" anchor="t">
+            <a:spAutoFit/>
+          </a:bodyPr>
+          <a:lstStyle/>
+          <a:p>
+            <a:pPr algn="l">
+              <a:lnSpc>
+                <a:spcPct val="100000"/>
+              </a:lnSpc>
+              <a:spcBef>
+                <a:spcPts val="0"/>
+              </a:spcBef>
+              <a:spcAft>
+                <a:spcPts val="0"/>
+              </a:spcAft>
+            </a:pPr>
+            <a:r>
+              <a:rPr sz="1050" b="1" i="0">
+                <a:solidFill>
+                  <a:srgbClr val="1B3E6E"/>
+                </a:solidFill>
+                <a:latin typeface="Arial"/>
+              </a:rPr>
+              <a:t>GAP 2 — Distribution</a:t>
+            </a:r>
+          </a:p>
+        </p:txBody>
+      </p:sp>
+      <p:sp>
+        <p:nvSpPr>
+          <p:cNvPr id="20" name="TextBox 19"/>
+          <p:cNvSpPr txBox="1"/>
+          <p:nvPr/>
+        </p:nvSpPr>
+        <p:spPr>
+          <a:xfrm>
+            <a:off x="5852160" y="1792224"/>
+            <a:ext cx="2788920" cy="1737360"/>
+          </a:xfrm>
+          <a:prstGeom prst="rect">
+            <a:avLst/>
+          </a:prstGeom>
+          <a:noFill/>
+        </p:spPr>
+        <p:txBody>
+          <a:bodyPr wrap="square" lIns="0" rIns="0" tIns="0" bIns="0" anchor="t">
+            <a:spAutoFit/>
+          </a:bodyPr>
+          <a:lstStyle/>
+          <a:p>
+            <a:pPr algn="l">
+              <a:lnSpc>
+                <a:spcPct val="102000"/>
+              </a:lnSpc>
+              <a:spcBef>
+                <a:spcPts val="0"/>
+              </a:spcBef>
+              <a:spcAft>
+                <a:spcPts val="300"/>
+              </a:spcAft>
+            </a:pPr>
+            <a:r>
+              <a:rPr sz="780" b="1" i="0">
+                <a:solidFill>
+                  <a:srgbClr val="333333"/>
+                </a:solidFill>
+                <a:latin typeface="Arial"/>
+              </a:rPr>
+              <a:t>•  No real-time vehicle location</a:t>
+            </a:r>
+            <a:r>
+              <a:rPr sz="780" b="0" i="0">
+                <a:solidFill>
+                  <a:srgbClr val="333333"/>
+                </a:solidFill>
+                <a:latin typeface="Arial"/>
+              </a:rPr>
+              <a:t> — schools phone kitchens to confirm deliveries</a:t>
+            </a:r>
+          </a:p>
+          <a:p>
+            <a:pPr algn="l">
+              <a:lnSpc>
+                <a:spcPct val="102000"/>
+              </a:lnSpc>
+              <a:spcBef>
+                <a:spcPts val="0"/>
+              </a:spcBef>
+              <a:spcAft>
+                <a:spcPts val="300"/>
+              </a:spcAft>
+            </a:pPr>
+            <a:r>
+              <a:rPr sz="780" b="1" i="0">
+                <a:solidFill>
+                  <a:srgbClr val="333333"/>
+                </a:solidFill>
+                <a:latin typeface="Arial"/>
+              </a:rPr>
+              <a:t>•  No maintenance or driver-safety data</a:t>
+            </a:r>
+            <a:r>
+              <a:rPr sz="780" b="0" i="0">
+                <a:solidFill>
+                  <a:srgbClr val="333333"/>
+                </a:solidFill>
+                <a:latin typeface="Arial"/>
+              </a:rPr>
+              <a:t> — issues surface only after incidents</a:t>
+            </a:r>
+          </a:p>
+          <a:p>
+            <a:pPr algn="l">
+              <a:lnSpc>
+                <a:spcPct val="102000"/>
+              </a:lnSpc>
+              <a:spcBef>
+                <a:spcPts val="0"/>
+              </a:spcBef>
+              <a:spcAft>
+                <a:spcPts val="300"/>
+              </a:spcAft>
+            </a:pPr>
+            <a:r>
+              <a:rPr sz="780" b="1" i="0">
+                <a:solidFill>
+                  <a:srgbClr val="333333"/>
+                </a:solidFill>
+                <a:latin typeface="Arial"/>
+              </a:rPr>
+              <a:t>•  4-hour cook-to-consume window</a:t>
+            </a:r>
+            <a:r>
+              <a:rPr sz="780" b="0" i="0">
+                <a:solidFill>
+                  <a:srgbClr val="333333"/>
+                </a:solidFill>
+                <a:latin typeface="Arial"/>
+              </a:rPr>
+              <a:t> at 65°C across ~70 km routes — zero slack</a:t>
+            </a:r>
+          </a:p>
+          <a:p>
+            <a:pPr algn="l">
+              <a:lnSpc>
+                <a:spcPct val="102000"/>
+              </a:lnSpc>
+              <a:spcBef>
+                <a:spcPts val="0"/>
+              </a:spcBef>
+              <a:spcAft>
+                <a:spcPts val="0"/>
+              </a:spcAft>
+            </a:pPr>
+            <a:r>
+              <a:rPr sz="780" b="1" i="0">
+                <a:solidFill>
+                  <a:srgbClr val="C22310"/>
+                </a:solidFill>
+                <a:latin typeface="Arial"/>
+              </a:rPr>
+              <a:t>TAPF's #1 strategic headwind: last-mile traceability &amp; food-safety risk</a:t>
+            </a:r>
+          </a:p>
+        </p:txBody>
+      </p:sp>
+      <p:sp>
+        <p:nvSpPr>
+          <p:cNvPr id="21" name="Rectangle 20"/>
+          <p:cNvSpPr/>
+          <p:nvPr/>
+        </p:nvSpPr>
+        <p:spPr>
+          <a:xfrm>
+            <a:off x="502920" y="3813048"/>
+            <a:ext cx="54864" cy="182880"/>
+          </a:xfrm>
+          <a:prstGeom prst="rect">
+            <a:avLst/>
+          </a:prstGeom>
+          <a:solidFill>
+            <a:srgbClr val="1B3E6E"/>
+          </a:solidFill>
+          <a:ln>
+            <a:noFill/>
+          </a:ln>
+          <a:effectLst/>
+        </p:spPr>
+        <p:style>
+          <a:lnRef idx="1">
+            <a:schemeClr val="accent1"/>
+          </a:lnRef>
+          <a:fillRef idx="3">
+            <a:schemeClr val="accent1"/>
+          </a:fillRef>
+          <a:effectRef idx="2">
+            <a:schemeClr val="accent1"/>
+          </a:effectRef>
+          <a:fontRef idx="minor">
+            <a:schemeClr val="lt1"/>
+          </a:fontRef>
+        </p:style>
+        <p:txBody>
+          <a:bodyPr rtlCol="0" anchor="ctr"/>
+          <a:lstStyle/>
+          <a:p>
+            <a:pPr algn="ctr"/>
+          </a:p>
+        </p:txBody>
+      </p:sp>
+      <p:sp>
+        <p:nvSpPr>
+          <p:cNvPr id="22" name="TextBox 21"/>
+          <p:cNvSpPr txBox="1"/>
+          <p:nvPr/>
+        </p:nvSpPr>
+        <p:spPr>
+          <a:xfrm>
+            <a:off x="640080" y="3785615"/>
+            <a:ext cx="2926080" cy="237744"/>
+          </a:xfrm>
+          <a:prstGeom prst="rect">
+            <a:avLst/>
+          </a:prstGeom>
+          <a:noFill/>
+        </p:spPr>
+        <p:txBody>
+          <a:bodyPr wrap="square" lIns="0" rIns="0" tIns="0" bIns="0" anchor="t">
+            <a:spAutoFit/>
+          </a:bodyPr>
+          <a:lstStyle/>
+          <a:p>
+            <a:pPr algn="l">
+              <a:lnSpc>
+                <a:spcPct val="100000"/>
+              </a:lnSpc>
+              <a:spcBef>
+                <a:spcPts val="0"/>
+              </a:spcBef>
+              <a:spcAft>
+                <a:spcPts val="0"/>
+              </a:spcAft>
+            </a:pPr>
+            <a:r>
+              <a:rPr sz="1050" b="1" i="0">
+                <a:solidFill>
+                  <a:srgbClr val="1B3E6E"/>
+                </a:solidFill>
+                <a:latin typeface="Arial"/>
+              </a:rPr>
+              <a:t>SOLUTION 1 — “Annapurna AI” · $150k</a:t>
+            </a:r>
+          </a:p>
+        </p:txBody>
+      </p:sp>
+      <p:sp>
+        <p:nvSpPr>
+          <p:cNvPr id="23" name="TextBox 22"/>
+          <p:cNvSpPr txBox="1"/>
+          <p:nvPr/>
+        </p:nvSpPr>
+        <p:spPr>
+          <a:xfrm>
+            <a:off x="530352" y="4133087"/>
+            <a:ext cx="2788920" cy="1691640"/>
+          </a:xfrm>
+          <a:prstGeom prst="rect">
+            <a:avLst/>
+          </a:prstGeom>
+          <a:noFill/>
+        </p:spPr>
+        <p:txBody>
+          <a:bodyPr wrap="square" lIns="0" rIns="0" tIns="0" bIns="0" anchor="t">
+            <a:spAutoFit/>
+          </a:bodyPr>
+          <a:lstStyle/>
+          <a:p>
+            <a:pPr algn="l">
+              <a:lnSpc>
+                <a:spcPct val="102000"/>
+              </a:lnSpc>
+              <a:spcBef>
+                <a:spcPts val="0"/>
+              </a:spcBef>
+              <a:spcAft>
+                <a:spcPts val="300"/>
+              </a:spcAft>
+            </a:pPr>
+            <a:r>
+              <a:rPr sz="780" b="1" i="0">
+                <a:solidFill>
+                  <a:srgbClr val="1B3E6E"/>
+                </a:solidFill>
+                <a:latin typeface="Arial"/>
+              </a:rPr>
+              <a:t>What: </a:t>
+            </a:r>
+            <a:r>
+              <a:rPr sz="780" b="0" i="0">
+                <a:solidFill>
+                  <a:srgbClr val="333333"/>
+                </a:solidFill>
+                <a:latin typeface="Arial"/>
+              </a:rPr>
+              <a:t>AI demand forecasting &amp; procurement planning across all 80 kitchens</a:t>
+            </a:r>
+          </a:p>
+          <a:p>
+            <a:pPr algn="l">
+              <a:lnSpc>
+                <a:spcPct val="102000"/>
+              </a:lnSpc>
+              <a:spcBef>
+                <a:spcPts val="0"/>
+              </a:spcBef>
+              <a:spcAft>
+                <a:spcPts val="300"/>
+              </a:spcAft>
+            </a:pPr>
+            <a:r>
+              <a:rPr sz="780" b="1" i="0">
+                <a:solidFill>
+                  <a:srgbClr val="1B3E6E"/>
+                </a:solidFill>
+                <a:latin typeface="Arial"/>
+              </a:rPr>
+              <a:t>How: </a:t>
+            </a:r>
+            <a:r>
+              <a:rPr sz="780" b="0" i="0">
+                <a:solidFill>
+                  <a:srgbClr val="333333"/>
+                </a:solidFill>
+                <a:latin typeface="Arial"/>
+              </a:rPr>
+              <a:t>attendance, calendars, menus &amp; weather → daily indents; buy-timing tuned to seasonal price troughs across 655 vendors</a:t>
+            </a:r>
+          </a:p>
+          <a:p>
+            <a:pPr algn="l">
+              <a:lnSpc>
+                <a:spcPct val="102000"/>
+              </a:lnSpc>
+              <a:spcBef>
+                <a:spcPts val="0"/>
+              </a:spcBef>
+              <a:spcAft>
+                <a:spcPts val="300"/>
+              </a:spcAft>
+            </a:pPr>
+            <a:r>
+              <a:rPr sz="800" b="1" i="0">
+                <a:solidFill>
+                  <a:srgbClr val="398025"/>
+                </a:solidFill>
+                <a:latin typeface="Arial"/>
+              </a:rPr>
+              <a:t>→  cuts veg wastage toward ~1–2%</a:t>
+            </a:r>
+          </a:p>
+          <a:p>
+            <a:pPr algn="l">
+              <a:lnSpc>
+                <a:spcPct val="102000"/>
+              </a:lnSpc>
+              <a:spcBef>
+                <a:spcPts val="0"/>
+              </a:spcBef>
+              <a:spcAft>
+                <a:spcPts val="0"/>
+              </a:spcAft>
+            </a:pPr>
+            <a:r>
+              <a:rPr sz="800" b="1" i="0">
+                <a:solidFill>
+                  <a:srgbClr val="398025"/>
+                </a:solidFill>
+                <a:latin typeface="Arial"/>
+              </a:rPr>
+              <a:t>→  savings recur every year (team est.)</a:t>
+            </a:r>
+          </a:p>
+        </p:txBody>
+      </p:sp>
+      <p:sp>
+        <p:nvSpPr>
+          <p:cNvPr id="24" name="Rectangle 23"/>
+          <p:cNvSpPr/>
+          <p:nvPr/>
+        </p:nvSpPr>
+        <p:spPr>
+          <a:xfrm>
+            <a:off x="5833872" y="3813048"/>
+            <a:ext cx="54864" cy="182880"/>
+          </a:xfrm>
+          <a:prstGeom prst="rect">
+            <a:avLst/>
+          </a:prstGeom>
+          <a:solidFill>
+            <a:srgbClr val="398025"/>
+          </a:solidFill>
+          <a:ln>
+            <a:noFill/>
+          </a:ln>
+          <a:effectLst/>
+        </p:spPr>
+        <p:style>
+          <a:lnRef idx="1">
+            <a:schemeClr val="accent1"/>
+          </a:lnRef>
+          <a:fillRef idx="3">
+            <a:schemeClr val="accent1"/>
+          </a:fillRef>
+          <a:effectRef idx="2">
+            <a:schemeClr val="accent1"/>
+          </a:effectRef>
+          <a:fontRef idx="minor">
+            <a:schemeClr val="lt1"/>
+          </a:fontRef>
+        </p:style>
+        <p:txBody>
+          <a:bodyPr rtlCol="0" anchor="ctr"/>
+          <a:lstStyle/>
+          <a:p>
+            <a:pPr algn="ctr"/>
+          </a:p>
+        </p:txBody>
+      </p:sp>
+      <p:sp>
+        <p:nvSpPr>
+          <p:cNvPr id="25" name="TextBox 24"/>
+          <p:cNvSpPr txBox="1"/>
+          <p:nvPr/>
+        </p:nvSpPr>
+        <p:spPr>
+          <a:xfrm>
+            <a:off x="5971032" y="3785615"/>
+            <a:ext cx="2926080" cy="237744"/>
+          </a:xfrm>
+          <a:prstGeom prst="rect">
+            <a:avLst/>
+          </a:prstGeom>
+          <a:noFill/>
+        </p:spPr>
+        <p:txBody>
+          <a:bodyPr wrap="square" lIns="0" rIns="0" tIns="0" bIns="0" anchor="t">
+            <a:spAutoFit/>
+          </a:bodyPr>
+          <a:lstStyle/>
+          <a:p>
+            <a:pPr algn="l">
+              <a:lnSpc>
+                <a:spcPct val="100000"/>
+              </a:lnSpc>
+              <a:spcBef>
+                <a:spcPts val="0"/>
+              </a:spcBef>
+              <a:spcAft>
+                <a:spcPts val="0"/>
+              </a:spcAft>
+            </a:pPr>
+            <a:r>
+              <a:rPr sz="1050" b="1" i="0">
+                <a:solidFill>
+                  <a:srgbClr val="1B3E6E"/>
+                </a:solidFill>
+                <a:latin typeface="Arial"/>
+              </a:rPr>
+              <a:t>SOLUTION 2 — “Last-Mile Shield” · $100k</a:t>
+            </a:r>
+          </a:p>
+        </p:txBody>
+      </p:sp>
+      <p:sp>
+        <p:nvSpPr>
+          <p:cNvPr id="26" name="TextBox 25"/>
+          <p:cNvSpPr txBox="1"/>
+          <p:nvPr/>
+        </p:nvSpPr>
+        <p:spPr>
+          <a:xfrm>
+            <a:off x="5852160" y="4133087"/>
+            <a:ext cx="2788920" cy="1691640"/>
+          </a:xfrm>
+          <a:prstGeom prst="rect">
+            <a:avLst/>
+          </a:prstGeom>
+          <a:noFill/>
+        </p:spPr>
+        <p:txBody>
+          <a:bodyPr wrap="square" lIns="0" rIns="0" tIns="0" bIns="0" anchor="t">
+            <a:spAutoFit/>
+          </a:bodyPr>
+          <a:lstStyle/>
+          <a:p>
+            <a:pPr algn="l">
+              <a:lnSpc>
+                <a:spcPct val="102000"/>
+              </a:lnSpc>
+              <a:spcBef>
+                <a:spcPts val="0"/>
+              </a:spcBef>
+              <a:spcAft>
+                <a:spcPts val="300"/>
+              </a:spcAft>
+            </a:pPr>
+            <a:r>
+              <a:rPr sz="780" b="1" i="0">
+                <a:solidFill>
+                  <a:srgbClr val="1B3E6E"/>
+                </a:solidFill>
+                <a:latin typeface="Arial"/>
+              </a:rPr>
+              <a:t>What: </a:t>
+            </a:r>
+            <a:r>
+              <a:rPr sz="780" b="0" i="0">
+                <a:solidFill>
+                  <a:srgbClr val="333333"/>
+                </a:solidFill>
+                <a:latin typeface="Arial"/>
+              </a:rPr>
+              <a:t>AIS-140 GPS + BLE door sensors fleet-wide; geofenced delivery confirmation; smart locks on high-risk routes</a:t>
+            </a:r>
+          </a:p>
+          <a:p>
+            <a:pPr algn="l">
+              <a:lnSpc>
+                <a:spcPct val="102000"/>
+              </a:lnSpc>
+              <a:spcBef>
+                <a:spcPts val="0"/>
+              </a:spcBef>
+              <a:spcAft>
+                <a:spcPts val="300"/>
+              </a:spcAft>
+            </a:pPr>
+            <a:r>
+              <a:rPr sz="780" b="1" i="0">
+                <a:solidFill>
+                  <a:srgbClr val="1B3E6E"/>
+                </a:solidFill>
+                <a:latin typeface="Arial"/>
+              </a:rPr>
+              <a:t>How: </a:t>
+            </a:r>
+            <a:r>
+              <a:rPr sz="780" b="0" i="0">
+                <a:solidFill>
+                  <a:srgbClr val="333333"/>
+                </a:solidFill>
+                <a:latin typeface="Arial"/>
+              </a:rPr>
+              <a:t>accelerates TAPF's own in-house blueprint (Traccar + DOUP) — auto delivery confirmation to schools</a:t>
+            </a:r>
+          </a:p>
+          <a:p>
+            <a:pPr algn="l">
+              <a:lnSpc>
+                <a:spcPct val="102000"/>
+              </a:lnSpc>
+              <a:spcBef>
+                <a:spcPts val="0"/>
+              </a:spcBef>
+              <a:spcAft>
+                <a:spcPts val="300"/>
+              </a:spcAft>
+            </a:pPr>
+            <a:r>
+              <a:rPr sz="800" b="1" i="0">
+                <a:solidFill>
+                  <a:srgbClr val="398025"/>
+                </a:solidFill>
+                <a:latin typeface="Arial"/>
+              </a:rPr>
+              <a:t>→  on-time within the 4-hr window</a:t>
+            </a:r>
+          </a:p>
+          <a:p>
+            <a:pPr algn="l">
+              <a:lnSpc>
+                <a:spcPct val="102000"/>
+              </a:lnSpc>
+              <a:spcBef>
+                <a:spcPts val="0"/>
+              </a:spcBef>
+              <a:spcAft>
+                <a:spcPts val="0"/>
+              </a:spcAft>
+            </a:pPr>
+            <a:r>
+              <a:rPr sz="800" b="1" i="0">
+                <a:solidFill>
+                  <a:srgbClr val="398025"/>
+                </a:solidFill>
+                <a:latin typeface="Arial"/>
+              </a:rPr>
+              <a:t>→  maintenance &amp; driver-safety telemetry included</a:t>
+            </a:r>
+          </a:p>
+        </p:txBody>
+      </p:sp>
+      <p:sp>
+        <p:nvSpPr>
+          <p:cNvPr id="27" name="Oval 26"/>
+          <p:cNvSpPr/>
+          <p:nvPr/>
+        </p:nvSpPr>
+        <p:spPr>
+          <a:xfrm>
+            <a:off x="3337560" y="2386584"/>
+            <a:ext cx="2468880" cy="2468880"/>
+          </a:xfrm>
+          <a:prstGeom prst="ellipse">
+            <a:avLst/>
+          </a:prstGeom>
+          <a:solidFill>
+            <a:srgbClr val="FFFFFF"/>
+          </a:solidFill>
+          <a:ln w="12700">
+            <a:solidFill>
+              <a:srgbClr val="BFBFBF"/>
+            </a:solidFill>
+          </a:ln>
+          <a:effectLst/>
+        </p:spPr>
+        <p:style>
+          <a:lnRef idx="1">
+            <a:schemeClr val="accent1"/>
+          </a:lnRef>
+          <a:fillRef idx="3">
+            <a:schemeClr val="accent1"/>
+          </a:fillRef>
+          <a:effectRef idx="2">
+            <a:schemeClr val="accent1"/>
+          </a:effectRef>
+          <a:fontRef idx="minor">
+            <a:schemeClr val="lt1"/>
+          </a:fontRef>
+        </p:style>
+        <p:txBody>
+          <a:bodyPr rtlCol="0" anchor="ctr"/>
+          <a:lstStyle/>
+          <a:p>
+            <a:pPr algn="ctr"/>
+          </a:p>
+        </p:txBody>
+      </p:sp>
+      <p:graphicFrame>
+        <p:nvGraphicFramePr>
+          <p:cNvPr id="28" name="Chart 27"/>
+          <p:cNvGraphicFramePr>
+            <a:graphicFrameLocks noGrp="1"/>
+          </p:cNvGraphicFramePr>
+          <p:nvPr/>
+        </p:nvGraphicFramePr>
+        <p:xfrm>
+          <a:off x="3406140" y="2455164"/>
+          <a:ext cx="2331720" cy="2331720"/>
+        </p:xfrm>
+        <a:graphic>
+          <a:graphicData uri="http://schemas.openxmlformats.org/drawingml/2006/chart">
+            <c:chart xmlns:c="http://schemas.openxmlformats.org/drawingml/2006/chart" r:id="rId2"/>
+          </a:graphicData>
+        </a:graphic>
+      </p:graphicFrame>
+      <p:sp>
+        <p:nvSpPr>
+          <p:cNvPr id="29" name="Rounded Rectangle 28"/>
+          <p:cNvSpPr/>
+          <p:nvPr/>
+        </p:nvSpPr>
+        <p:spPr>
+          <a:xfrm>
+            <a:off x="3406140" y="4837176"/>
+            <a:ext cx="2331720" cy="384048"/>
+          </a:xfrm>
+          <a:prstGeom prst="roundRect">
+            <a:avLst>
+              <a:gd name="adj" fmla="val 50000"/>
+            </a:avLst>
+          </a:prstGeom>
+          <a:solidFill>
+            <a:srgbClr val="FFFFFF"/>
+          </a:solidFill>
+          <a:ln w="11430">
+            <a:solidFill>
+              <a:srgbClr val="BFBFBF"/>
+            </a:solidFill>
+          </a:ln>
+          <a:effectLst/>
+        </p:spPr>
+        <p:style>
+          <a:lnRef idx="1">
+            <a:schemeClr val="accent1"/>
+          </a:lnRef>
+          <a:fillRef idx="3">
+            <a:schemeClr val="accent1"/>
+          </a:fillRef>
+          <a:effectRef idx="2">
+            <a:schemeClr val="accent1"/>
+          </a:effectRef>
+          <a:fontRef idx="minor">
+            <a:schemeClr val="lt1"/>
+          </a:fontRef>
+        </p:style>
+        <p:txBody>
+          <a:bodyPr rtlCol="0" anchor="ctr"/>
+          <a:lstStyle/>
+          <a:p>
+            <a:pPr algn="ctr"/>
+          </a:p>
+        </p:txBody>
+      </p:sp>
+      <p:sp>
+        <p:nvSpPr>
+          <p:cNvPr id="30" name="TextBox 29"/>
+          <p:cNvSpPr txBox="1"/>
+          <p:nvPr/>
+        </p:nvSpPr>
+        <p:spPr>
+          <a:xfrm>
+            <a:off x="3406140" y="4860036"/>
+            <a:ext cx="2331720" cy="338328"/>
+          </a:xfrm>
+          <a:prstGeom prst="rect">
+            <a:avLst/>
+          </a:prstGeom>
+          <a:noFill/>
+        </p:spPr>
+        <p:txBody>
+          <a:bodyPr wrap="square" lIns="0" rIns="0" tIns="0" bIns="0" anchor="ctr">
+            <a:spAutoFit/>
+          </a:bodyPr>
+          <a:lstStyle/>
+          <a:p>
+            <a:pPr algn="ctr">
+              <a:lnSpc>
+                <a:spcPct val="100000"/>
+              </a:lnSpc>
+              <a:spcBef>
+                <a:spcPts val="0"/>
+              </a:spcBef>
+              <a:spcAft>
+                <a:spcPts val="0"/>
+              </a:spcAft>
+            </a:pPr>
+            <a:r>
+              <a:rPr sz="850" b="1" i="0">
+                <a:solidFill>
+                  <a:srgbClr val="1B3E6E"/>
+                </a:solidFill>
+                <a:latin typeface="Arial"/>
+              </a:rPr>
+              <a:t>THE $250k GRANT</a:t>
+            </a:r>
+          </a:p>
+          <a:p>
+            <a:pPr algn="ctr">
+              <a:lnSpc>
+                <a:spcPct val="100000"/>
+              </a:lnSpc>
+              <a:spcBef>
+                <a:spcPts val="0"/>
+              </a:spcBef>
+              <a:spcAft>
+                <a:spcPts val="0"/>
+              </a:spcAft>
+            </a:pPr>
+            <a:r>
+              <a:rPr sz="640" b="0" i="1">
+                <a:solidFill>
+                  <a:srgbClr val="727375"/>
+                </a:solidFill>
+                <a:latin typeface="Arial"/>
+              </a:rPr>
+              <a:t>both gaps: TAPF's self-ranked top priorities</a:t>
+            </a:r>
+          </a:p>
+        </p:txBody>
+      </p:sp>
+    </p:spTree>
+  </p:cSld>
+  <p:clrMapOvr>
+    <a:masterClrMapping/>
+  </p:clrMapOvr>
+</p:sld>
+</file>
+
+<file path=ppt/slides/slide9.xml><?xml version="1.0" encoding="utf-8"?>
+<p:sld xmlns:a="http://schemas.openxmlformats.org/drawingml/2006/main" xmlns:p="http://schemas.openxmlformats.org/presentationml/2006/main" xmlns:r="http://schemas.openxmlformats.org/officeDocument/2006/relationships">
+  <p:cSld>
+    <p:spTree>
+      <p:nvGrpSpPr>
+        <p:cNvPr id="1" name=""/>
+        <p:cNvGrpSpPr/>
+        <p:nvPr/>
+      </p:nvGrpSpPr>
+      <p:grpSpPr/>
+      <p:sp>
+        <p:nvSpPr>
+          <p:cNvPr id="2" name="Rectangle 1"/>
+          <p:cNvSpPr/>
+          <p:nvPr/>
+        </p:nvSpPr>
+        <p:spPr>
+          <a:xfrm>
+            <a:off x="365760" y="274320"/>
+            <a:ext cx="8412480" cy="23774"/>
+          </a:xfrm>
+          <a:prstGeom prst="rect">
+            <a:avLst/>
+          </a:prstGeom>
+          <a:solidFill>
+            <a:srgbClr val="1B3E6E"/>
+          </a:solidFill>
+          <a:ln>
+            <a:noFill/>
+          </a:ln>
+          <a:effectLst/>
+        </p:spPr>
+        <p:style>
+          <a:lnRef idx="1">
+            <a:schemeClr val="accent1"/>
+          </a:lnRef>
+          <a:fillRef idx="3">
+            <a:schemeClr val="accent1"/>
+          </a:fillRef>
+          <a:effectRef idx="2">
+            <a:schemeClr val="accent1"/>
+          </a:effectRef>
+          <a:fontRef idx="minor">
+            <a:schemeClr val="lt1"/>
+          </a:fontRef>
+        </p:style>
+        <p:txBody>
+          <a:bodyPr rtlCol="0" anchor="ctr"/>
+          <a:lstStyle/>
+          <a:p>
+            <a:pPr algn="ctr"/>
+          </a:p>
+        </p:txBody>
+      </p:sp>
+      <p:sp>
+        <p:nvSpPr>
+          <p:cNvPr id="3" name="TextBox 2"/>
+          <p:cNvSpPr txBox="1"/>
+          <p:nvPr/>
+        </p:nvSpPr>
+        <p:spPr>
+          <a:xfrm>
+            <a:off x="365760" y="365760"/>
+            <a:ext cx="8412480" cy="457200"/>
+          </a:xfrm>
+          <a:prstGeom prst="rect">
+            <a:avLst/>
+          </a:prstGeom>
+          <a:noFill/>
+        </p:spPr>
+        <p:txBody>
+          <a:bodyPr wrap="square" lIns="0" rIns="0" tIns="0" bIns="0" anchor="t">
+            <a:spAutoFit/>
+          </a:bodyPr>
+          <a:lstStyle/>
+          <a:p>
+            <a:pPr algn="l">
+              <a:lnSpc>
+                <a:spcPct val="100000"/>
+              </a:lnSpc>
+              <a:spcBef>
+                <a:spcPts val="0"/>
+              </a:spcBef>
+              <a:spcAft>
+                <a:spcPts val="0"/>
+              </a:spcAft>
+            </a:pPr>
+            <a:r>
+              <a:rPr sz="2000" b="0" i="0">
+                <a:solidFill>
+                  <a:srgbClr val="1B3E6E"/>
+                </a:solidFill>
+                <a:latin typeface="Georgia"/>
+              </a:rPr>
+              <a:t>Solution 1 — the AI-enabled planning &amp; procurement build ($150k)</a:t>
+            </a:r>
+          </a:p>
+        </p:txBody>
+      </p:sp>
+      <p:sp>
+        <p:nvSpPr>
+          <p:cNvPr id="4" name="TextBox 3"/>
+          <p:cNvSpPr txBox="1"/>
+          <p:nvPr/>
+        </p:nvSpPr>
+        <p:spPr>
+          <a:xfrm>
+            <a:off x="365760" y="822960"/>
+            <a:ext cx="8412480" cy="438912"/>
+          </a:xfrm>
+          <a:prstGeom prst="rect">
+            <a:avLst/>
+          </a:prstGeom>
+          <a:noFill/>
+        </p:spPr>
+        <p:txBody>
+          <a:bodyPr wrap="square" lIns="0" rIns="0" tIns="0" bIns="0" anchor="t">
+            <a:spAutoFit/>
+          </a:bodyPr>
+          <a:lstStyle/>
+          <a:p>
+            <a:pPr algn="l">
+              <a:lnSpc>
+                <a:spcPct val="100000"/>
+              </a:lnSpc>
+              <a:spcBef>
+                <a:spcPts val="0"/>
+              </a:spcBef>
+              <a:spcAft>
+                <a:spcPts val="0"/>
+              </a:spcAft>
+            </a:pPr>
+            <a:r>
+              <a:rPr sz="1050" b="0" i="0">
+                <a:solidFill>
+                  <a:srgbClr val="333333"/>
+                </a:solidFill>
+                <a:latin typeface="Arial"/>
+              </a:rPr>
+              <a:t>Connecting real-time demand signals to kitchen production and procurement — the technology that closes Gap 1.</a:t>
+            </a:r>
+          </a:p>
+        </p:txBody>
+      </p:sp>
+      <p:sp>
+        <p:nvSpPr>
+          <p:cNvPr id="5" name="Rectangle 4"/>
+          <p:cNvSpPr/>
+          <p:nvPr/>
+        </p:nvSpPr>
+        <p:spPr>
+          <a:xfrm>
+            <a:off x="502920" y="6071616"/>
+            <a:ext cx="8138159" cy="365760"/>
+          </a:xfrm>
+          <a:prstGeom prst="rect">
+            <a:avLst/>
+          </a:prstGeom>
+          <a:solidFill>
+            <a:srgbClr val="D9D9D9"/>
+          </a:solidFill>
+          <a:ln>
+            <a:noFill/>
+          </a:ln>
+          <a:effectLst/>
+        </p:spPr>
+        <p:style>
+          <a:lnRef idx="1">
+            <a:schemeClr val="accent1"/>
+          </a:lnRef>
+          <a:fillRef idx="3">
+            <a:schemeClr val="accent1"/>
+          </a:fillRef>
+          <a:effectRef idx="2">
+            <a:schemeClr val="accent1"/>
+          </a:effectRef>
+          <a:fontRef idx="minor">
+            <a:schemeClr val="lt1"/>
+          </a:fontRef>
+        </p:style>
+        <p:txBody>
+          <a:bodyPr rtlCol="0" anchor="ctr"/>
+          <a:lstStyle/>
+          <a:p>
+            <a:pPr algn="ctr"/>
+          </a:p>
+        </p:txBody>
+      </p:sp>
+      <p:sp>
+        <p:nvSpPr>
+          <p:cNvPr id="6" name="TextBox 5"/>
+          <p:cNvSpPr txBox="1"/>
+          <p:nvPr/>
+        </p:nvSpPr>
+        <p:spPr>
+          <a:xfrm>
+            <a:off x="640080" y="6071616"/>
+            <a:ext cx="7863840" cy="365760"/>
+          </a:xfrm>
+          <a:prstGeom prst="rect">
+            <a:avLst/>
+          </a:prstGeom>
+          <a:noFill/>
+        </p:spPr>
+        <p:txBody>
+          <a:bodyPr wrap="square" lIns="0" rIns="0" tIns="0" bIns="0" anchor="ctr">
+            <a:spAutoFit/>
+          </a:bodyPr>
+          <a:lstStyle/>
+          <a:p>
+            <a:pPr algn="ctr">
+              <a:lnSpc>
+                <a:spcPct val="95000"/>
+              </a:lnSpc>
+              <a:spcBef>
+                <a:spcPts val="0"/>
+              </a:spcBef>
+              <a:spcAft>
+                <a:spcPts val="0"/>
+              </a:spcAft>
+            </a:pPr>
+            <a:r>
+              <a:rPr sz="1100" b="1" i="0">
+                <a:solidFill>
+                  <a:srgbClr val="1B3E6E"/>
+                </a:solidFill>
+                <a:latin typeface="Georgia"/>
+              </a:rPr>
+              <a:t>“Feeding more children with the same rupee” — AI plus GS capital makes it possible.</a:t>
+            </a:r>
+          </a:p>
+        </p:txBody>
+      </p:sp>
+      <p:sp>
+        <p:nvSpPr>
+          <p:cNvPr id="7" name="TextBox 6"/>
+          <p:cNvSpPr txBox="1"/>
+          <p:nvPr/>
+        </p:nvSpPr>
+        <p:spPr>
+          <a:xfrm>
+            <a:off x="365760" y="6492240"/>
+            <a:ext cx="1280160" cy="329184"/>
+          </a:xfrm>
+          <a:prstGeom prst="rect">
+            <a:avLst/>
+          </a:prstGeom>
+          <a:noFill/>
+        </p:spPr>
+        <p:txBody>
+          <a:bodyPr wrap="square" lIns="0" rIns="0" tIns="0" bIns="0" anchor="t">
+            <a:spAutoFit/>
+          </a:bodyPr>
+          <a:lstStyle/>
+          <a:p>
+            <a:pPr algn="l">
+              <a:lnSpc>
+                <a:spcPct val="90000"/>
+              </a:lnSpc>
+              <a:spcBef>
+                <a:spcPts val="0"/>
+              </a:spcBef>
+              <a:spcAft>
+                <a:spcPts val="0"/>
+              </a:spcAft>
+            </a:pPr>
+            <a:r>
+              <a:rPr sz="900" b="1" i="0">
+                <a:solidFill>
+                  <a:srgbClr val="111111"/>
+                </a:solidFill>
+                <a:latin typeface="Georgia"/>
+              </a:rPr>
+              <a:t>Goldman</a:t>
+            </a:r>
+          </a:p>
+          <a:p>
+            <a:pPr algn="l">
+              <a:lnSpc>
+                <a:spcPct val="90000"/>
+              </a:lnSpc>
+              <a:spcBef>
+                <a:spcPts val="0"/>
+              </a:spcBef>
+              <a:spcAft>
+                <a:spcPts val="0"/>
+              </a:spcAft>
+            </a:pPr>
+            <a:r>
+              <a:rPr sz="900" b="1" i="0">
+                <a:solidFill>
+                  <a:srgbClr val="111111"/>
+                </a:solidFill>
+                <a:latin typeface="Georgia"/>
+              </a:rPr>
+              <a:t>Sachs</a:t>
+            </a:r>
+          </a:p>
+        </p:txBody>
+      </p:sp>
+      <p:sp>
+        <p:nvSpPr>
+          <p:cNvPr id="8" name="TextBox 7"/>
+          <p:cNvSpPr txBox="1"/>
+          <p:nvPr/>
+        </p:nvSpPr>
+        <p:spPr>
+          <a:xfrm>
+            <a:off x="8321040" y="6528816"/>
+            <a:ext cx="457200" cy="274320"/>
+          </a:xfrm>
+          <a:prstGeom prst="rect">
+            <a:avLst/>
+          </a:prstGeom>
+          <a:noFill/>
+        </p:spPr>
+        <p:txBody>
+          <a:bodyPr wrap="square" lIns="0" rIns="0" tIns="0" bIns="0" anchor="t">
+            <a:spAutoFit/>
+          </a:bodyPr>
+          <a:lstStyle/>
+          <a:p>
+            <a:pPr algn="r">
+              <a:lnSpc>
+                <a:spcPct val="100000"/>
+              </a:lnSpc>
+              <a:spcBef>
+                <a:spcPts val="0"/>
+              </a:spcBef>
+              <a:spcAft>
+                <a:spcPts val="300"/>
+              </a:spcAft>
+            </a:pPr>
+            <a:r>
+              <a:rPr sz="900" b="0" i="0">
+                <a:solidFill>
+                  <a:srgbClr val="727375"/>
+                </a:solidFill>
+                <a:latin typeface="Arial"/>
+              </a:rPr>
+              <a:t>9</a:t>
+            </a:r>
+          </a:p>
+        </p:txBody>
+      </p:sp>
+      <p:sp>
+        <p:nvSpPr>
+          <p:cNvPr id="9" name="TextBox 8"/>
+          <p:cNvSpPr txBox="1"/>
+          <p:nvPr/>
+        </p:nvSpPr>
+        <p:spPr>
+          <a:xfrm>
+            <a:off x="4754879" y="54864"/>
+            <a:ext cx="4023360" cy="182880"/>
+          </a:xfrm>
+          <a:prstGeom prst="rect">
+            <a:avLst/>
+          </a:prstGeom>
+          <a:noFill/>
+        </p:spPr>
+        <p:txBody>
+          <a:bodyPr wrap="square" lIns="0" rIns="0" tIns="0" bIns="0" anchor="t">
+            <a:spAutoFit/>
+          </a:bodyPr>
+          <a:lstStyle/>
+          <a:p>
+            <a:pPr algn="r">
+              <a:lnSpc>
+                <a:spcPct val="100000"/>
+              </a:lnSpc>
+              <a:spcBef>
+                <a:spcPts val="0"/>
+              </a:spcBef>
+              <a:spcAft>
+                <a:spcPts val="0"/>
+              </a:spcAft>
+            </a:pPr>
+            <a:r>
+              <a:rPr sz="750" b="0" i="1">
+                <a:solidFill>
+                  <a:srgbClr val="727375"/>
+                </a:solidFill>
+                <a:latin typeface="Arial"/>
+              </a:rPr>
+              <a:t>FINAL CONTENT — SLIDE 4 (v2)</a:t>
+            </a:r>
+          </a:p>
+        </p:txBody>
+      </p:sp>
+      <p:sp>
+        <p:nvSpPr>
+          <p:cNvPr id="10" name="TextBox 9"/>
+          <p:cNvSpPr txBox="1"/>
+          <p:nvPr/>
+        </p:nvSpPr>
+        <p:spPr>
+          <a:xfrm>
+            <a:off x="4846320" y="6547104"/>
+            <a:ext cx="3401568" cy="274320"/>
+          </a:xfrm>
+          <a:prstGeom prst="rect">
+            <a:avLst/>
+          </a:prstGeom>
+          <a:noFill/>
+        </p:spPr>
+        <p:txBody>
+          <a:bodyPr wrap="square" lIns="0" rIns="0" tIns="0" bIns="0" anchor="t">
+            <a:spAutoFit/>
+          </a:bodyPr>
+          <a:lstStyle/>
+          <a:p>
+            <a:pPr algn="r">
+              <a:lnSpc>
+                <a:spcPct val="100000"/>
+              </a:lnSpc>
+              <a:spcBef>
+                <a:spcPts val="0"/>
+              </a:spcBef>
+              <a:spcAft>
+                <a:spcPts val="0"/>
+              </a:spcAft>
+            </a:pPr>
+            <a:r>
+              <a:rPr sz="650" b="0" i="1">
+                <a:solidFill>
+                  <a:srgbClr val="727375"/>
+                </a:solidFill>
+                <a:latin typeface="Arial"/>
+              </a:rPr>
+              <a:t>Source: The Akshaya Patra Foundation — official documents</a:t>
+            </a:r>
+          </a:p>
+        </p:txBody>
+      </p:sp>
+      <p:sp>
+        <p:nvSpPr>
+          <p:cNvPr id="11" name="Rectangle 10"/>
+          <p:cNvSpPr/>
+          <p:nvPr/>
+        </p:nvSpPr>
+        <p:spPr>
+          <a:xfrm>
+            <a:off x="365760" y="1335024"/>
+            <a:ext cx="4133087" cy="1700784"/>
+          </a:xfrm>
+          <a:prstGeom prst="rect">
+            <a:avLst/>
+          </a:prstGeom>
+          <a:solidFill>
+            <a:srgbClr val="FFFFFF"/>
+          </a:solidFill>
+          <a:ln w="11430">
+            <a:solidFill>
+              <a:srgbClr val="BFBFBF"/>
+            </a:solidFill>
+          </a:ln>
+          <a:effectLst/>
+        </p:spPr>
+        <p:style>
+          <a:lnRef idx="1">
+            <a:schemeClr val="accent1"/>
+          </a:lnRef>
+          <a:fillRef idx="3">
+            <a:schemeClr val="accent1"/>
+          </a:fillRef>
+          <a:effectRef idx="2">
+            <a:schemeClr val="accent1"/>
+          </a:effectRef>
+          <a:fontRef idx="minor">
+            <a:schemeClr val="lt1"/>
+          </a:fontRef>
+        </p:style>
+        <p:txBody>
+          <a:bodyPr rtlCol="0" anchor="ctr"/>
+          <a:lstStyle/>
+          <a:p>
+            <a:pPr algn="ctr"/>
+          </a:p>
+        </p:txBody>
+      </p:sp>
+      <p:sp>
+        <p:nvSpPr>
+          <p:cNvPr id="12" name="Rectangle 11"/>
+          <p:cNvSpPr/>
+          <p:nvPr/>
+        </p:nvSpPr>
+        <p:spPr>
+          <a:xfrm>
+            <a:off x="365760" y="1335024"/>
+            <a:ext cx="4133087" cy="274320"/>
+          </a:xfrm>
+          <a:prstGeom prst="rect">
+            <a:avLst/>
+          </a:prstGeom>
+          <a:solidFill>
+            <a:srgbClr val="095F61"/>
+          </a:solidFill>
+          <a:ln>
+            <a:noFill/>
+          </a:ln>
+          <a:effectLst/>
+        </p:spPr>
+        <p:style>
+          <a:lnRef idx="1">
+            <a:schemeClr val="accent1"/>
+          </a:lnRef>
+          <a:fillRef idx="3">
+            <a:schemeClr val="accent1"/>
+          </a:fillRef>
+          <a:effectRef idx="2">
+            <a:schemeClr val="accent1"/>
+          </a:effectRef>
+          <a:fontRef idx="minor">
+            <a:schemeClr val="lt1"/>
+          </a:fontRef>
+        </p:style>
+        <p:txBody>
+          <a:bodyPr rtlCol="0" anchor="ctr"/>
+          <a:lstStyle/>
+          <a:p>
+            <a:pPr algn="ctr"/>
+          </a:p>
+        </p:txBody>
+      </p:sp>
+      <p:sp>
+        <p:nvSpPr>
+          <p:cNvPr id="13" name="TextBox 12"/>
+          <p:cNvSpPr txBox="1"/>
+          <p:nvPr/>
+        </p:nvSpPr>
+        <p:spPr>
+          <a:xfrm>
+            <a:off x="475488" y="1362456"/>
+            <a:ext cx="3913632" cy="228600"/>
+          </a:xfrm>
+          <a:prstGeom prst="rect">
+            <a:avLst/>
+          </a:prstGeom>
+          <a:noFill/>
+        </p:spPr>
+        <p:txBody>
+          <a:bodyPr wrap="square" lIns="0" rIns="0" tIns="0" bIns="0" anchor="t">
+            <a:spAutoFit/>
+          </a:bodyPr>
+          <a:lstStyle/>
+          <a:p>
+            <a:pPr algn="l">
+              <a:lnSpc>
+                <a:spcPct val="100000"/>
+              </a:lnSpc>
+              <a:spcBef>
+                <a:spcPts val="0"/>
+              </a:spcBef>
+              <a:spcAft>
+                <a:spcPts val="0"/>
+              </a:spcAft>
+            </a:pPr>
+            <a:r>
+              <a:rPr sz="950" b="1" i="0">
+                <a:solidFill>
+                  <a:srgbClr val="FFFFFF"/>
+                </a:solidFill>
+                <a:latin typeface="Arial"/>
+              </a:rPr>
+              <a:t>PILLAR 1 — Predictive Demand Forecasting</a:t>
+            </a:r>
+          </a:p>
+        </p:txBody>
+      </p:sp>
+      <p:sp>
+        <p:nvSpPr>
+          <p:cNvPr id="14" name="Rectangle 13"/>
+          <p:cNvSpPr/>
+          <p:nvPr/>
+        </p:nvSpPr>
+        <p:spPr>
+          <a:xfrm>
+            <a:off x="4645152" y="1335024"/>
+            <a:ext cx="4133087" cy="1700784"/>
+          </a:xfrm>
+          <a:prstGeom prst="rect">
+            <a:avLst/>
+          </a:prstGeom>
+          <a:solidFill>
+            <a:srgbClr val="FFFFFF"/>
+          </a:solidFill>
+          <a:ln w="11430">
+            <a:solidFill>
+              <a:srgbClr val="BFBFBF"/>
+            </a:solidFill>
+          </a:ln>
+          <a:effectLst/>
+        </p:spPr>
+        <p:style>
+          <a:lnRef idx="1">
+            <a:schemeClr val="accent1"/>
+          </a:lnRef>
+          <a:fillRef idx="3">
+            <a:schemeClr val="accent1"/>
+          </a:fillRef>
+          <a:effectRef idx="2">
+            <a:schemeClr val="accent1"/>
+          </a:effectRef>
+          <a:fontRef idx="minor">
+            <a:schemeClr val="lt1"/>
+          </a:fontRef>
+        </p:style>
+        <p:txBody>
+          <a:bodyPr rtlCol="0" anchor="ctr"/>
+          <a:lstStyle/>
+          <a:p>
+            <a:pPr algn="ctr"/>
+          </a:p>
+        </p:txBody>
+      </p:sp>
+      <p:sp>
+        <p:nvSpPr>
+          <p:cNvPr id="15" name="Rectangle 14"/>
+          <p:cNvSpPr/>
+          <p:nvPr/>
+        </p:nvSpPr>
+        <p:spPr>
+          <a:xfrm>
+            <a:off x="4645152" y="1335024"/>
+            <a:ext cx="4133087" cy="274320"/>
+          </a:xfrm>
+          <a:prstGeom prst="rect">
+            <a:avLst/>
+          </a:prstGeom>
+          <a:solidFill>
+            <a:srgbClr val="E08A1E"/>
+          </a:solidFill>
+          <a:ln>
+            <a:noFill/>
+          </a:ln>
+          <a:effectLst/>
+        </p:spPr>
+        <p:style>
+          <a:lnRef idx="1">
+            <a:schemeClr val="accent1"/>
+          </a:lnRef>
+          <a:fillRef idx="3">
+            <a:schemeClr val="accent1"/>
+          </a:fillRef>
+          <a:effectRef idx="2">
+            <a:schemeClr val="accent1"/>
+          </a:effectRef>
+          <a:fontRef idx="minor">
+            <a:schemeClr val="lt1"/>
+          </a:fontRef>
+        </p:style>
+        <p:txBody>
+          <a:bodyPr rtlCol="0" anchor="ctr"/>
+          <a:lstStyle/>
+          <a:p>
+            <a:pPr algn="ctr"/>
+          </a:p>
+        </p:txBody>
+      </p:sp>
+      <p:sp>
+        <p:nvSpPr>
+          <p:cNvPr id="16" name="TextBox 15"/>
+          <p:cNvSpPr txBox="1"/>
+          <p:nvPr/>
+        </p:nvSpPr>
+        <p:spPr>
+          <a:xfrm>
+            <a:off x="4754880" y="1362456"/>
+            <a:ext cx="3913632" cy="228600"/>
+          </a:xfrm>
+          <a:prstGeom prst="rect">
+            <a:avLst/>
+          </a:prstGeom>
+          <a:noFill/>
+        </p:spPr>
+        <p:txBody>
+          <a:bodyPr wrap="square" lIns="0" rIns="0" tIns="0" bIns="0" anchor="t">
+            <a:spAutoFit/>
+          </a:bodyPr>
+          <a:lstStyle/>
+          <a:p>
+            <a:pPr algn="l">
+              <a:lnSpc>
+                <a:spcPct val="100000"/>
+              </a:lnSpc>
+              <a:spcBef>
+                <a:spcPts val="0"/>
+              </a:spcBef>
+              <a:spcAft>
+                <a:spcPts val="0"/>
+              </a:spcAft>
+            </a:pPr>
+            <a:r>
+              <a:rPr sz="950" b="1" i="0">
+                <a:solidFill>
+                  <a:srgbClr val="FFFFFF"/>
+                </a:solidFill>
+                <a:latin typeface="Arial"/>
+              </a:rPr>
+              <a:t>PILLAR 2 — Spatial-Temporal Procurement</a:t>
+            </a:r>
+          </a:p>
+        </p:txBody>
+      </p:sp>
+      <p:sp>
+        <p:nvSpPr>
+          <p:cNvPr id="17" name="TextBox 16"/>
+          <p:cNvSpPr txBox="1"/>
+          <p:nvPr/>
+        </p:nvSpPr>
+        <p:spPr>
+          <a:xfrm>
+            <a:off x="493776" y="1700784"/>
+            <a:ext cx="3877056" cy="1298448"/>
+          </a:xfrm>
+          <a:prstGeom prst="rect">
+            <a:avLst/>
+          </a:prstGeom>
+          <a:noFill/>
+        </p:spPr>
+        <p:txBody>
+          <a:bodyPr wrap="square" lIns="0" rIns="0" tIns="0" bIns="0" anchor="t">
+            <a:spAutoFit/>
+          </a:bodyPr>
+          <a:lstStyle/>
+          <a:p>
+            <a:pPr algn="l">
+              <a:lnSpc>
+                <a:spcPct val="100000"/>
+              </a:lnSpc>
+              <a:spcBef>
+                <a:spcPts val="0"/>
+              </a:spcBef>
+              <a:spcAft>
+                <a:spcPts val="200"/>
+              </a:spcAft>
+            </a:pPr>
+            <a:r>
+              <a:rPr sz="740" b="0" i="1">
+                <a:solidFill>
+                  <a:srgbClr val="727375"/>
+                </a:solidFill>
+                <a:latin typeface="Arial"/>
+              </a:rPr>
+              <a:t>Predicts exact meal &amp; ingredient needs per centre by ingesting:</a:t>
+            </a:r>
+          </a:p>
+          <a:p>
+            <a:pPr algn="l">
+              <a:lnSpc>
+                <a:spcPct val="102000"/>
+              </a:lnSpc>
+              <a:spcBef>
+                <a:spcPts val="0"/>
+              </a:spcBef>
+              <a:spcAft>
+                <a:spcPts val="200"/>
+              </a:spcAft>
+            </a:pPr>
+            <a:r>
+              <a:rPr sz="740" b="1" i="0">
+                <a:solidFill>
+                  <a:srgbClr val="333333"/>
+                </a:solidFill>
+                <a:latin typeface="Arial"/>
+              </a:rPr>
+              <a:t>•  Attendance &amp; enrolment trends </a:t>
+            </a:r>
+            <a:r>
+              <a:rPr sz="740" b="0" i="0">
+                <a:solidFill>
+                  <a:srgbClr val="333333"/>
+                </a:solidFill>
+                <a:latin typeface="Arial"/>
+              </a:rPr>
+              <a:t>estimate how many meals each centre should prepare daily</a:t>
+            </a:r>
+          </a:p>
+          <a:p>
+            <a:pPr algn="l">
+              <a:lnSpc>
+                <a:spcPct val="102000"/>
+              </a:lnSpc>
+              <a:spcBef>
+                <a:spcPts val="0"/>
+              </a:spcBef>
+              <a:spcAft>
+                <a:spcPts val="200"/>
+              </a:spcAft>
+            </a:pPr>
+            <a:r>
+              <a:rPr sz="740" b="1" i="0">
+                <a:solidFill>
+                  <a:srgbClr val="333333"/>
+                </a:solidFill>
+                <a:latin typeface="Arial"/>
+              </a:rPr>
+              <a:t>•  Holiday calendars </a:t>
+            </a:r>
+            <a:r>
+              <a:rPr sz="740" b="0" i="0">
+                <a:solidFill>
+                  <a:srgbClr val="333333"/>
+                </a:solidFill>
+                <a:latin typeface="Arial"/>
+              </a:rPr>
+              <a:t>capture local demand spikes or dips before production is finalised</a:t>
+            </a:r>
+          </a:p>
+          <a:p>
+            <a:pPr algn="l">
+              <a:lnSpc>
+                <a:spcPct val="102000"/>
+              </a:lnSpc>
+              <a:spcBef>
+                <a:spcPts val="0"/>
+              </a:spcBef>
+              <a:spcAft>
+                <a:spcPts val="200"/>
+              </a:spcAft>
+            </a:pPr>
+            <a:r>
+              <a:rPr sz="740" b="1" i="0">
+                <a:solidFill>
+                  <a:srgbClr val="333333"/>
+                </a:solidFill>
+                <a:latin typeface="Arial"/>
+              </a:rPr>
+              <a:t>•  Menu consumption history </a:t>
+            </a:r>
+            <a:r>
+              <a:rPr sz="740" b="0" i="0">
+                <a:solidFill>
+                  <a:srgbClr val="333333"/>
+                </a:solidFill>
+                <a:latin typeface="Arial"/>
+              </a:rPr>
+              <a:t>converts expected meals into ingredient quantities for key staples</a:t>
+            </a:r>
+          </a:p>
+          <a:p>
+            <a:pPr algn="l">
+              <a:lnSpc>
+                <a:spcPct val="102000"/>
+              </a:lnSpc>
+              <a:spcBef>
+                <a:spcPts val="0"/>
+              </a:spcBef>
+              <a:spcAft>
+                <a:spcPts val="200"/>
+              </a:spcAft>
+            </a:pPr>
+            <a:r>
+              <a:rPr sz="740" b="1" i="0">
+                <a:solidFill>
+                  <a:srgbClr val="333333"/>
+                </a:solidFill>
+                <a:latin typeface="Arial"/>
+              </a:rPr>
+              <a:t>•  Weather &amp; consumption feedback </a:t>
+            </a:r>
+            <a:r>
+              <a:rPr sz="740" b="0" i="0">
+                <a:solidFill>
+                  <a:srgbClr val="333333"/>
+                </a:solidFill>
+                <a:latin typeface="Arial"/>
+              </a:rPr>
+              <a:t>continuously refine the next centre-level forecast</a:t>
+            </a:r>
+          </a:p>
+          <a:p>
+            <a:pPr algn="l">
+              <a:lnSpc>
+                <a:spcPct val="102000"/>
+              </a:lnSpc>
+              <a:spcBef>
+                <a:spcPts val="0"/>
+              </a:spcBef>
+              <a:spcAft>
+                <a:spcPts val="0"/>
+              </a:spcAft>
+            </a:pPr>
+            <a:r>
+              <a:rPr sz="740" b="1" i="0">
+                <a:solidFill>
+                  <a:srgbClr val="333333"/>
+                </a:solidFill>
+                <a:latin typeface="Arial"/>
+              </a:rPr>
+              <a:t>•  Perishables (veg, dairy) </a:t>
+            </a:r>
+            <a:r>
+              <a:rPr sz="740" b="0" i="0">
+                <a:solidFill>
+                  <a:srgbClr val="333333"/>
+                </a:solidFill>
+                <a:latin typeface="Arial"/>
+              </a:rPr>
+              <a:t>get shorter forecast cycles than staples (grains, dhals, oils)</a:t>
+            </a:r>
+          </a:p>
+        </p:txBody>
+      </p:sp>
+      <p:sp>
+        <p:nvSpPr>
+          <p:cNvPr id="18" name="TextBox 17"/>
+          <p:cNvSpPr txBox="1"/>
+          <p:nvPr/>
+        </p:nvSpPr>
+        <p:spPr>
+          <a:xfrm>
+            <a:off x="4773168" y="1700784"/>
+            <a:ext cx="3877056" cy="1298448"/>
+          </a:xfrm>
+          <a:prstGeom prst="rect">
+            <a:avLst/>
+          </a:prstGeom>
+          <a:noFill/>
+        </p:spPr>
+        <p:txBody>
+          <a:bodyPr wrap="square" lIns="0" rIns="0" tIns="0" bIns="0" anchor="t">
+            <a:spAutoFit/>
+          </a:bodyPr>
+          <a:lstStyle/>
+          <a:p>
+            <a:pPr algn="l">
+              <a:lnSpc>
+                <a:spcPct val="100000"/>
+              </a:lnSpc>
+              <a:spcBef>
+                <a:spcPts val="0"/>
+              </a:spcBef>
+              <a:spcAft>
+                <a:spcPts val="200"/>
+              </a:spcAft>
+            </a:pPr>
+            <a:r>
+              <a:rPr sz="740" b="0" i="1">
+                <a:solidFill>
+                  <a:srgbClr val="727375"/>
+                </a:solidFill>
+                <a:latin typeface="Arial"/>
+              </a:rPr>
+              <a:t>Decides when and where to buy each commodity to minimise total landed cost:</a:t>
+            </a:r>
+          </a:p>
+          <a:p>
+            <a:pPr algn="l">
+              <a:lnSpc>
+                <a:spcPct val="102000"/>
+              </a:lnSpc>
+              <a:spcBef>
+                <a:spcPts val="0"/>
+              </a:spcBef>
+              <a:spcAft>
+                <a:spcPts val="200"/>
+              </a:spcAft>
+            </a:pPr>
+            <a:r>
+              <a:rPr sz="740" b="1" i="0">
+                <a:solidFill>
+                  <a:srgbClr val="333333"/>
+                </a:solidFill>
+                <a:latin typeface="Arial"/>
+              </a:rPr>
+              <a:t>•  Seasonal price troughs </a:t>
+            </a:r>
+            <a:r>
+              <a:rPr sz="740" b="0" i="0">
+                <a:solidFill>
+                  <a:srgbClr val="333333"/>
+                </a:solidFill>
+                <a:latin typeface="Arial"/>
+              </a:rPr>
+              <a:t>identify when each commodity should be bought before prices rise</a:t>
+            </a:r>
+          </a:p>
+          <a:p>
+            <a:pPr algn="l">
+              <a:lnSpc>
+                <a:spcPct val="102000"/>
+              </a:lnSpc>
+              <a:spcBef>
+                <a:spcPts val="0"/>
+              </a:spcBef>
+              <a:spcAft>
+                <a:spcPts val="200"/>
+              </a:spcAft>
+            </a:pPr>
+            <a:r>
+              <a:rPr sz="740" b="1" i="0">
+                <a:solidFill>
+                  <a:srgbClr val="333333"/>
+                </a:solidFill>
+                <a:latin typeface="Arial"/>
+              </a:rPr>
+              <a:t>•  Surplus-region signals </a:t>
+            </a:r>
+            <a:r>
+              <a:rPr sz="740" b="0" i="0">
+                <a:solidFill>
+                  <a:srgbClr val="333333"/>
+                </a:solidFill>
+                <a:latin typeface="Arial"/>
+              </a:rPr>
+              <a:t>identify where each commodity can be sourced at lower landed cost</a:t>
+            </a:r>
+          </a:p>
+          <a:p>
+            <a:pPr algn="l">
+              <a:lnSpc>
+                <a:spcPct val="102000"/>
+              </a:lnSpc>
+              <a:spcBef>
+                <a:spcPts val="0"/>
+              </a:spcBef>
+              <a:spcAft>
+                <a:spcPts val="200"/>
+              </a:spcAft>
+            </a:pPr>
+            <a:r>
+              <a:rPr sz="740" b="1" i="0">
+                <a:solidFill>
+                  <a:srgbClr val="333333"/>
+                </a:solidFill>
+                <a:latin typeface="Arial"/>
+              </a:rPr>
+              <a:t>•  Logistics, handling &amp; storage costs </a:t>
+            </a:r>
+            <a:r>
+              <a:rPr sz="740" b="0" i="0">
+                <a:solidFill>
+                  <a:srgbClr val="333333"/>
+                </a:solidFill>
+                <a:latin typeface="Arial"/>
+              </a:rPr>
+              <a:t>are included in every sourcing recommendation</a:t>
+            </a:r>
+          </a:p>
+          <a:p>
+            <a:pPr algn="l">
+              <a:lnSpc>
+                <a:spcPct val="102000"/>
+              </a:lnSpc>
+              <a:spcBef>
+                <a:spcPts val="0"/>
+              </a:spcBef>
+              <a:spcAft>
+                <a:spcPts val="200"/>
+              </a:spcAft>
+            </a:pPr>
+            <a:r>
+              <a:rPr sz="740" b="1" i="0">
+                <a:solidFill>
+                  <a:srgbClr val="333333"/>
+                </a:solidFill>
+                <a:latin typeface="Arial"/>
+              </a:rPr>
+              <a:t>•  Quality grades &amp; shelf-life rules </a:t>
+            </a:r>
+            <a:r>
+              <a:rPr sz="740" b="0" i="0">
+                <a:solidFill>
+                  <a:srgbClr val="333333"/>
+                </a:solidFill>
+                <a:latin typeface="Arial"/>
+              </a:rPr>
+              <a:t>are locked into the final buying plan</a:t>
+            </a:r>
+          </a:p>
+          <a:p>
+            <a:pPr algn="l">
+              <a:lnSpc>
+                <a:spcPct val="102000"/>
+              </a:lnSpc>
+              <a:spcBef>
+                <a:spcPts val="0"/>
+              </a:spcBef>
+              <a:spcAft>
+                <a:spcPts val="0"/>
+              </a:spcAft>
+            </a:pPr>
+            <a:r>
+              <a:rPr sz="740" b="1" i="0">
+                <a:solidFill>
+                  <a:srgbClr val="333333"/>
+                </a:solidFill>
+                <a:latin typeface="Arial"/>
+              </a:rPr>
+              <a:t>•  Full procure-to-pay coverage </a:t>
+            </a:r>
+            <a:r>
+              <a:rPr sz="740" b="0" i="0">
+                <a:solidFill>
+                  <a:srgbClr val="333333"/>
+                </a:solidFill>
+                <a:latin typeface="Arial"/>
+              </a:rPr>
+              <a:t>— requisition → PO → goods receipt → invoice → payment</a:t>
+            </a:r>
+          </a:p>
+        </p:txBody>
+      </p:sp>
+      <p:sp>
+        <p:nvSpPr>
+          <p:cNvPr id="19" name="TextBox 18"/>
+          <p:cNvSpPr txBox="1"/>
+          <p:nvPr/>
+        </p:nvSpPr>
+        <p:spPr>
+          <a:xfrm>
+            <a:off x="365760" y="3090672"/>
+            <a:ext cx="8412480" cy="201168"/>
+          </a:xfrm>
+          <a:prstGeom prst="rect">
+            <a:avLst/>
+          </a:prstGeom>
+          <a:noFill/>
+        </p:spPr>
+        <p:txBody>
+          <a:bodyPr wrap="square" lIns="0" rIns="0" tIns="0" bIns="0" anchor="t">
+            <a:spAutoFit/>
+          </a:bodyPr>
+          <a:lstStyle/>
+          <a:p>
+            <a:pPr algn="ctr">
+              <a:lnSpc>
+                <a:spcPct val="100000"/>
+              </a:lnSpc>
+              <a:spcBef>
+                <a:spcPts val="0"/>
+              </a:spcBef>
+              <a:spcAft>
+                <a:spcPts val="0"/>
+              </a:spcAft>
+            </a:pPr>
+            <a:r>
+              <a:rPr sz="740" b="1" i="0">
+                <a:solidFill>
+                  <a:srgbClr val="1B3E6E"/>
+                </a:solidFill>
+                <a:latin typeface="Arial"/>
+              </a:rPr>
+              <a:t>Annual volumes:  </a:t>
+            </a:r>
+            <a:r>
+              <a:rPr sz="740" b="0" i="0">
+                <a:solidFill>
+                  <a:srgbClr val="727375"/>
+                </a:solidFill>
+                <a:latin typeface="Arial"/>
+              </a:rPr>
+              <a:t>120 T vegetables · 55 T dhals · 20 T dairy · 18 T oils · 6 T spices — against ₹450 Cr+ annual food spend</a:t>
+            </a:r>
+          </a:p>
+        </p:txBody>
+      </p:sp>
+      <p:sp>
+        <p:nvSpPr>
+          <p:cNvPr id="20" name="Rectangle 19"/>
+          <p:cNvSpPr/>
+          <p:nvPr/>
+        </p:nvSpPr>
+        <p:spPr>
+          <a:xfrm>
+            <a:off x="365760" y="3374136"/>
+            <a:ext cx="54864" cy="182880"/>
+          </a:xfrm>
+          <a:prstGeom prst="rect">
+            <a:avLst/>
+          </a:prstGeom>
+          <a:solidFill>
+            <a:srgbClr val="1B3E6E"/>
+          </a:solidFill>
+          <a:ln>
+            <a:noFill/>
+          </a:ln>
+          <a:effectLst/>
+        </p:spPr>
+        <p:style>
+          <a:lnRef idx="1">
+            <a:schemeClr val="accent1"/>
+          </a:lnRef>
+          <a:fillRef idx="3">
+            <a:schemeClr val="accent1"/>
+          </a:fillRef>
+          <a:effectRef idx="2">
+            <a:schemeClr val="accent1"/>
+          </a:effectRef>
+          <a:fontRef idx="minor">
+            <a:schemeClr val="lt1"/>
+          </a:fontRef>
+        </p:style>
+        <p:txBody>
+          <a:bodyPr rtlCol="0" anchor="ctr"/>
+          <a:lstStyle/>
+          <a:p>
+            <a:pPr algn="ctr"/>
+          </a:p>
+        </p:txBody>
+      </p:sp>
+      <p:sp>
+        <p:nvSpPr>
+          <p:cNvPr id="21" name="TextBox 20"/>
+          <p:cNvSpPr txBox="1"/>
+          <p:nvPr/>
+        </p:nvSpPr>
+        <p:spPr>
+          <a:xfrm>
+            <a:off x="512064" y="3346704"/>
+            <a:ext cx="3986783" cy="256032"/>
+          </a:xfrm>
+          <a:prstGeom prst="rect">
+            <a:avLst/>
+          </a:prstGeom>
+          <a:noFill/>
+        </p:spPr>
+        <p:txBody>
+          <a:bodyPr wrap="square" lIns="0" rIns="0" tIns="0" bIns="0" anchor="t">
+            <a:spAutoFit/>
+          </a:bodyPr>
+          <a:lstStyle/>
+          <a:p>
+            <a:pPr algn="l">
+              <a:lnSpc>
+                <a:spcPct val="100000"/>
+              </a:lnSpc>
+              <a:spcBef>
+                <a:spcPts val="0"/>
+              </a:spcBef>
+              <a:spcAft>
+                <a:spcPts val="0"/>
+              </a:spcAft>
+            </a:pPr>
+            <a:r>
+              <a:rPr sz="1000" b="1" i="0">
+                <a:solidFill>
+                  <a:srgbClr val="1B3E6E"/>
+                </a:solidFill>
+                <a:latin typeface="Arial"/>
+              </a:rPr>
+              <a:t>The self-learning operations loop — sharper every day</a:t>
+            </a:r>
+          </a:p>
+        </p:txBody>
+      </p:sp>
+      <p:sp>
+        <p:nvSpPr>
+          <p:cNvPr id="22" name="Rectangle 21"/>
+          <p:cNvSpPr/>
+          <p:nvPr/>
+        </p:nvSpPr>
+        <p:spPr>
+          <a:xfrm>
+            <a:off x="365760" y="3621024"/>
+            <a:ext cx="4133087" cy="10972"/>
+          </a:xfrm>
+          <a:prstGeom prst="rect">
+            <a:avLst/>
+          </a:prstGeom>
+          <a:solidFill>
+            <a:srgbClr val="BFBFBF"/>
+          </a:solidFill>
+          <a:ln>
+            <a:noFill/>
+          </a:ln>
+          <a:effectLst/>
+        </p:spPr>
+        <p:style>
+          <a:lnRef idx="1">
+            <a:schemeClr val="accent1"/>
+          </a:lnRef>
+          <a:fillRef idx="3">
+            <a:schemeClr val="accent1"/>
+          </a:fillRef>
+          <a:effectRef idx="2">
+            <a:schemeClr val="accent1"/>
+          </a:effectRef>
+          <a:fontRef idx="minor">
+            <a:schemeClr val="lt1"/>
+          </a:fontRef>
+        </p:style>
+        <p:txBody>
+          <a:bodyPr rtlCol="0" anchor="ctr"/>
+          <a:lstStyle/>
+          <a:p>
+            <a:pPr algn="ctr"/>
+          </a:p>
+        </p:txBody>
+      </p:sp>
+      <p:sp>
+        <p:nvSpPr>
+          <p:cNvPr id="23" name="Rounded Rectangle 22"/>
+          <p:cNvSpPr/>
+          <p:nvPr/>
+        </p:nvSpPr>
+        <p:spPr>
+          <a:xfrm>
+            <a:off x="1975103" y="4023360"/>
+            <a:ext cx="914400" cy="329184"/>
+          </a:xfrm>
+          <a:prstGeom prst="roundRect">
+            <a:avLst>
+              <a:gd name="adj" fmla="val 30000"/>
+            </a:avLst>
+          </a:prstGeom>
+          <a:solidFill>
+            <a:srgbClr val="1B3E6E"/>
+          </a:solidFill>
+          <a:ln>
+            <a:noFill/>
+          </a:ln>
+          <a:effectLst/>
+        </p:spPr>
+        <p:style>
+          <a:lnRef idx="1">
+            <a:schemeClr val="accent1"/>
+          </a:lnRef>
+          <a:fillRef idx="3">
+            <a:schemeClr val="accent1"/>
+          </a:fillRef>
+          <a:effectRef idx="2">
+            <a:schemeClr val="accent1"/>
+          </a:effectRef>
+          <a:fontRef idx="minor">
+            <a:schemeClr val="lt1"/>
+          </a:fontRef>
+        </p:style>
+        <p:txBody>
+          <a:bodyPr rtlCol="0" anchor="ctr"/>
+          <a:lstStyle/>
+          <a:p>
+            <a:pPr algn="ctr"/>
+          </a:p>
+        </p:txBody>
+      </p:sp>
+      <p:sp>
+        <p:nvSpPr>
+          <p:cNvPr id="24" name="TextBox 23"/>
+          <p:cNvSpPr txBox="1"/>
+          <p:nvPr/>
+        </p:nvSpPr>
+        <p:spPr>
+          <a:xfrm>
+            <a:off x="1975103" y="4041648"/>
+            <a:ext cx="914400" cy="292608"/>
+          </a:xfrm>
+          <a:prstGeom prst="rect">
+            <a:avLst/>
+          </a:prstGeom>
+          <a:noFill/>
+        </p:spPr>
+        <p:txBody>
+          <a:bodyPr wrap="square" lIns="0" rIns="0" tIns="0" bIns="0" anchor="ctr">
+            <a:spAutoFit/>
+          </a:bodyPr>
+          <a:lstStyle/>
+          <a:p>
+            <a:pPr algn="ctr">
+              <a:lnSpc>
+                <a:spcPct val="90000"/>
+              </a:lnSpc>
+              <a:spcBef>
+                <a:spcPts val="0"/>
+              </a:spcBef>
+              <a:spcAft>
+                <a:spcPts val="0"/>
+              </a:spcAft>
+            </a:pPr>
+            <a:r>
+              <a:rPr sz="700" b="1" i="0">
+                <a:solidFill>
+                  <a:srgbClr val="FFFFFF"/>
+                </a:solidFill>
+                <a:latin typeface="Arial"/>
+              </a:rPr>
+              <a:t>1 · INGEST</a:t>
+            </a:r>
+          </a:p>
+        </p:txBody>
+      </p:sp>
+      <p:sp>
+        <p:nvSpPr>
+          <p:cNvPr id="25" name="TextBox 24"/>
+          <p:cNvSpPr txBox="1"/>
+          <p:nvPr/>
+        </p:nvSpPr>
+        <p:spPr>
+          <a:xfrm>
+            <a:off x="1837943" y="3689604"/>
+            <a:ext cx="1188720" cy="265176"/>
+          </a:xfrm>
+          <a:prstGeom prst="rect">
+            <a:avLst/>
+          </a:prstGeom>
+          <a:noFill/>
+        </p:spPr>
+        <p:txBody>
+          <a:bodyPr wrap="square" lIns="0" rIns="0" tIns="0" bIns="0" anchor="ctr">
+            <a:spAutoFit/>
+          </a:bodyPr>
+          <a:lstStyle/>
+          <a:p>
+            <a:pPr algn="ctr">
+              <a:lnSpc>
+                <a:spcPct val="90000"/>
+              </a:lnSpc>
+              <a:spcBef>
+                <a:spcPts val="0"/>
+              </a:spcBef>
+              <a:spcAft>
+                <a:spcPts val="0"/>
+              </a:spcAft>
+            </a:pPr>
+            <a:r>
+              <a:rPr sz="620" b="0" i="0">
+                <a:solidFill>
+                  <a:srgbClr val="727375"/>
+                </a:solidFill>
+                <a:latin typeface="Arial"/>
+              </a:rPr>
+              <a:t>pulls live prices,
+weather &amp; attendance</a:t>
+            </a:r>
+          </a:p>
+        </p:txBody>
+      </p:sp>
+      <p:sp>
+        <p:nvSpPr>
+          <p:cNvPr id="26" name="Rounded Rectangle 25"/>
+          <p:cNvSpPr/>
+          <p:nvPr/>
+        </p:nvSpPr>
+        <p:spPr>
+          <a:xfrm>
+            <a:off x="2618642" y="4490917"/>
+            <a:ext cx="914400" cy="329184"/>
+          </a:xfrm>
+          <a:prstGeom prst="roundRect">
+            <a:avLst>
+              <a:gd name="adj" fmla="val 30000"/>
+            </a:avLst>
+          </a:prstGeom>
+          <a:solidFill>
+            <a:srgbClr val="3B6EA5"/>
+          </a:solidFill>
+          <a:ln>
+            <a:noFill/>
+          </a:ln>
+          <a:effectLst/>
+        </p:spPr>
+        <p:style>
+          <a:lnRef idx="1">
+            <a:schemeClr val="accent1"/>
+          </a:lnRef>
+          <a:fillRef idx="3">
+            <a:schemeClr val="accent1"/>
+          </a:fillRef>
+          <a:effectRef idx="2">
+            <a:schemeClr val="accent1"/>
+          </a:effectRef>
+          <a:fontRef idx="minor">
+            <a:schemeClr val="lt1"/>
+          </a:fontRef>
+        </p:style>
+        <p:txBody>
+          <a:bodyPr rtlCol="0" anchor="ctr"/>
+          <a:lstStyle/>
+          <a:p>
+            <a:pPr algn="ctr"/>
+          </a:p>
+        </p:txBody>
+      </p:sp>
+      <p:sp>
+        <p:nvSpPr>
+          <p:cNvPr id="27" name="TextBox 26"/>
+          <p:cNvSpPr txBox="1"/>
+          <p:nvPr/>
+        </p:nvSpPr>
+        <p:spPr>
+          <a:xfrm>
+            <a:off x="2618642" y="4509205"/>
+            <a:ext cx="914400" cy="292608"/>
+          </a:xfrm>
+          <a:prstGeom prst="rect">
+            <a:avLst/>
+          </a:prstGeom>
+          <a:noFill/>
+        </p:spPr>
+        <p:txBody>
+          <a:bodyPr wrap="square" lIns="0" rIns="0" tIns="0" bIns="0" anchor="ctr">
+            <a:spAutoFit/>
+          </a:bodyPr>
+          <a:lstStyle/>
+          <a:p>
+            <a:pPr algn="ctr">
+              <a:lnSpc>
+                <a:spcPct val="90000"/>
+              </a:lnSpc>
+              <a:spcBef>
+                <a:spcPts val="0"/>
+              </a:spcBef>
+              <a:spcAft>
+                <a:spcPts val="0"/>
+              </a:spcAft>
+            </a:pPr>
+            <a:r>
+              <a:rPr sz="700" b="1" i="0">
+                <a:solidFill>
+                  <a:srgbClr val="FFFFFF"/>
+                </a:solidFill>
+                <a:latin typeface="Arial"/>
+              </a:rPr>
+              <a:t>2 · FORECAST</a:t>
+            </a:r>
+          </a:p>
+        </p:txBody>
+      </p:sp>
+      <p:sp>
+        <p:nvSpPr>
+          <p:cNvPr id="28" name="TextBox 27"/>
+          <p:cNvSpPr txBox="1"/>
+          <p:nvPr/>
+        </p:nvSpPr>
+        <p:spPr>
+          <a:xfrm>
+            <a:off x="2481482" y="4888681"/>
+            <a:ext cx="1188720" cy="265176"/>
+          </a:xfrm>
+          <a:prstGeom prst="rect">
+            <a:avLst/>
+          </a:prstGeom>
+          <a:noFill/>
+        </p:spPr>
+        <p:txBody>
+          <a:bodyPr wrap="square" lIns="0" rIns="0" tIns="0" bIns="0" anchor="ctr">
+            <a:spAutoFit/>
+          </a:bodyPr>
+          <a:lstStyle/>
+          <a:p>
+            <a:pPr algn="ctr">
+              <a:lnSpc>
+                <a:spcPct val="90000"/>
+              </a:lnSpc>
+              <a:spcBef>
+                <a:spcPts val="0"/>
+              </a:spcBef>
+              <a:spcAft>
+                <a:spcPts val="0"/>
+              </a:spcAft>
+            </a:pPr>
+            <a:r>
+              <a:rPr sz="620" b="0" i="0">
+                <a:solidFill>
+                  <a:srgbClr val="727375"/>
+                </a:solidFill>
+                <a:latin typeface="Arial"/>
+              </a:rPr>
+              <a:t>ingredient-level
+demand per centre</a:t>
+            </a:r>
+          </a:p>
+        </p:txBody>
+      </p:sp>
+      <p:sp>
+        <p:nvSpPr>
+          <p:cNvPr id="29" name="Rounded Rectangle 28"/>
+          <p:cNvSpPr/>
+          <p:nvPr/>
+        </p:nvSpPr>
+        <p:spPr>
+          <a:xfrm>
+            <a:off x="2372832" y="5247442"/>
+            <a:ext cx="914400" cy="329184"/>
+          </a:xfrm>
+          <a:prstGeom prst="roundRect">
+            <a:avLst>
+              <a:gd name="adj" fmla="val 30000"/>
+            </a:avLst>
+          </a:prstGeom>
+          <a:solidFill>
+            <a:srgbClr val="398025"/>
+          </a:solidFill>
+          <a:ln>
+            <a:noFill/>
+          </a:ln>
+          <a:effectLst/>
+        </p:spPr>
+        <p:style>
+          <a:lnRef idx="1">
+            <a:schemeClr val="accent1"/>
+          </a:lnRef>
+          <a:fillRef idx="3">
+            <a:schemeClr val="accent1"/>
+          </a:fillRef>
+          <a:effectRef idx="2">
+            <a:schemeClr val="accent1"/>
+          </a:effectRef>
+          <a:fontRef idx="minor">
+            <a:schemeClr val="lt1"/>
+          </a:fontRef>
+        </p:style>
+        <p:txBody>
+          <a:bodyPr rtlCol="0" anchor="ctr"/>
+          <a:lstStyle/>
+          <a:p>
+            <a:pPr algn="ctr"/>
+          </a:p>
+        </p:txBody>
+      </p:sp>
+      <p:sp>
+        <p:nvSpPr>
+          <p:cNvPr id="30" name="TextBox 29"/>
+          <p:cNvSpPr txBox="1"/>
+          <p:nvPr/>
+        </p:nvSpPr>
+        <p:spPr>
+          <a:xfrm>
+            <a:off x="2372832" y="5265730"/>
+            <a:ext cx="914400" cy="292608"/>
+          </a:xfrm>
+          <a:prstGeom prst="rect">
+            <a:avLst/>
+          </a:prstGeom>
+          <a:noFill/>
+        </p:spPr>
+        <p:txBody>
+          <a:bodyPr wrap="square" lIns="0" rIns="0" tIns="0" bIns="0" anchor="ctr">
+            <a:spAutoFit/>
+          </a:bodyPr>
+          <a:lstStyle/>
+          <a:p>
+            <a:pPr algn="ctr">
+              <a:lnSpc>
+                <a:spcPct val="90000"/>
+              </a:lnSpc>
+              <a:spcBef>
+                <a:spcPts val="0"/>
+              </a:spcBef>
+              <a:spcAft>
+                <a:spcPts val="0"/>
+              </a:spcAft>
+            </a:pPr>
+            <a:r>
+              <a:rPr sz="700" b="1" i="0">
+                <a:solidFill>
+                  <a:srgbClr val="FFFFFF"/>
+                </a:solidFill>
+                <a:latin typeface="Arial"/>
+              </a:rPr>
+              <a:t>3 · OPTIMIZE</a:t>
+            </a:r>
+          </a:p>
+        </p:txBody>
+      </p:sp>
+      <p:sp>
+        <p:nvSpPr>
+          <p:cNvPr id="31" name="TextBox 30"/>
+          <p:cNvSpPr txBox="1"/>
+          <p:nvPr/>
+        </p:nvSpPr>
+        <p:spPr>
+          <a:xfrm>
+            <a:off x="2235672" y="5645206"/>
+            <a:ext cx="1188720" cy="265176"/>
+          </a:xfrm>
+          <a:prstGeom prst="rect">
+            <a:avLst/>
+          </a:prstGeom>
+          <a:noFill/>
+        </p:spPr>
+        <p:txBody>
+          <a:bodyPr wrap="square" lIns="0" rIns="0" tIns="0" bIns="0" anchor="ctr">
+            <a:spAutoFit/>
+          </a:bodyPr>
+          <a:lstStyle/>
+          <a:p>
+            <a:pPr algn="ctr">
+              <a:lnSpc>
+                <a:spcPct val="90000"/>
+              </a:lnSpc>
+              <a:spcBef>
+                <a:spcPts val="0"/>
+              </a:spcBef>
+              <a:spcAft>
+                <a:spcPts val="0"/>
+              </a:spcAft>
+            </a:pPr>
+            <a:r>
+              <a:rPr sz="620" b="0" i="0">
+                <a:solidFill>
+                  <a:srgbClr val="727375"/>
+                </a:solidFill>
+                <a:latin typeface="Arial"/>
+              </a:rPr>
+              <a:t>computes when &amp;
+where to buy</a:t>
+            </a:r>
+          </a:p>
+        </p:txBody>
+      </p:sp>
+      <p:sp>
+        <p:nvSpPr>
+          <p:cNvPr id="32" name="Rounded Rectangle 31"/>
+          <p:cNvSpPr/>
+          <p:nvPr/>
+        </p:nvSpPr>
+        <p:spPr>
+          <a:xfrm>
+            <a:off x="1577375" y="5247442"/>
+            <a:ext cx="914400" cy="329184"/>
+          </a:xfrm>
+          <a:prstGeom prst="roundRect">
+            <a:avLst>
+              <a:gd name="adj" fmla="val 30000"/>
+            </a:avLst>
+          </a:prstGeom>
+          <a:solidFill>
+            <a:srgbClr val="E08A1E"/>
+          </a:solidFill>
+          <a:ln>
+            <a:noFill/>
+          </a:ln>
+          <a:effectLst/>
+        </p:spPr>
+        <p:style>
+          <a:lnRef idx="1">
+            <a:schemeClr val="accent1"/>
+          </a:lnRef>
+          <a:fillRef idx="3">
+            <a:schemeClr val="accent1"/>
+          </a:fillRef>
+          <a:effectRef idx="2">
+            <a:schemeClr val="accent1"/>
+          </a:effectRef>
+          <a:fontRef idx="minor">
+            <a:schemeClr val="lt1"/>
+          </a:fontRef>
+        </p:style>
+        <p:txBody>
+          <a:bodyPr rtlCol="0" anchor="ctr"/>
+          <a:lstStyle/>
+          <a:p>
+            <a:pPr algn="ctr"/>
+          </a:p>
+        </p:txBody>
+      </p:sp>
+      <p:sp>
+        <p:nvSpPr>
+          <p:cNvPr id="33" name="TextBox 32"/>
+          <p:cNvSpPr txBox="1"/>
+          <p:nvPr/>
+        </p:nvSpPr>
+        <p:spPr>
+          <a:xfrm>
+            <a:off x="1577375" y="5265730"/>
+            <a:ext cx="914400" cy="292608"/>
+          </a:xfrm>
+          <a:prstGeom prst="rect">
+            <a:avLst/>
+          </a:prstGeom>
+          <a:noFill/>
+        </p:spPr>
+        <p:txBody>
+          <a:bodyPr wrap="square" lIns="0" rIns="0" tIns="0" bIns="0" anchor="ctr">
+            <a:spAutoFit/>
+          </a:bodyPr>
+          <a:lstStyle/>
+          <a:p>
+            <a:pPr algn="ctr">
+              <a:lnSpc>
+                <a:spcPct val="90000"/>
+              </a:lnSpc>
+              <a:spcBef>
+                <a:spcPts val="0"/>
+              </a:spcBef>
+              <a:spcAft>
+                <a:spcPts val="0"/>
+              </a:spcAft>
+            </a:pPr>
+            <a:r>
+              <a:rPr sz="700" b="1" i="0">
+                <a:solidFill>
+                  <a:srgbClr val="FFFFFF"/>
+                </a:solidFill>
+                <a:latin typeface="Arial"/>
+              </a:rPr>
+              <a:t>4 · RECOMMEND</a:t>
+            </a:r>
+          </a:p>
+        </p:txBody>
+      </p:sp>
+      <p:sp>
+        <p:nvSpPr>
+          <p:cNvPr id="34" name="TextBox 33"/>
+          <p:cNvSpPr txBox="1"/>
+          <p:nvPr/>
+        </p:nvSpPr>
+        <p:spPr>
+          <a:xfrm>
+            <a:off x="1440215" y="5645206"/>
+            <a:ext cx="1188720" cy="265176"/>
+          </a:xfrm>
+          <a:prstGeom prst="rect">
+            <a:avLst/>
+          </a:prstGeom>
+          <a:noFill/>
+        </p:spPr>
+        <p:txBody>
+          <a:bodyPr wrap="square" lIns="0" rIns="0" tIns="0" bIns="0" anchor="ctr">
+            <a:spAutoFit/>
+          </a:bodyPr>
+          <a:lstStyle/>
+          <a:p>
+            <a:pPr algn="ctr">
+              <a:lnSpc>
+                <a:spcPct val="90000"/>
+              </a:lnSpc>
+              <a:spcBef>
+                <a:spcPts val="0"/>
+              </a:spcBef>
+              <a:spcAft>
+                <a:spcPts val="0"/>
+              </a:spcAft>
+            </a:pPr>
+            <a:r>
+              <a:rPr sz="620" b="0" i="0">
+                <a:solidFill>
+                  <a:srgbClr val="727375"/>
+                </a:solidFill>
+                <a:latin typeface="Arial"/>
+              </a:rPr>
+              <a:t>actionable buying
+sheet for kitchens</a:t>
+            </a:r>
+          </a:p>
+        </p:txBody>
+      </p:sp>
+      <p:sp>
+        <p:nvSpPr>
+          <p:cNvPr id="35" name="Rounded Rectangle 34"/>
+          <p:cNvSpPr/>
+          <p:nvPr/>
+        </p:nvSpPr>
+        <p:spPr>
+          <a:xfrm>
+            <a:off x="1331565" y="4490917"/>
+            <a:ext cx="914400" cy="329184"/>
+          </a:xfrm>
+          <a:prstGeom prst="roundRect">
+            <a:avLst>
+              <a:gd name="adj" fmla="val 30000"/>
+            </a:avLst>
+          </a:prstGeom>
+          <a:solidFill>
+            <a:srgbClr val="A6428C"/>
+          </a:solidFill>
+          <a:ln>
+            <a:noFill/>
+          </a:ln>
+          <a:effectLst/>
+        </p:spPr>
+        <p:style>
+          <a:lnRef idx="1">
+            <a:schemeClr val="accent1"/>
+          </a:lnRef>
+          <a:fillRef idx="3">
+            <a:schemeClr val="accent1"/>
+          </a:fillRef>
+          <a:effectRef idx="2">
+            <a:schemeClr val="accent1"/>
+          </a:effectRef>
+          <a:fontRef idx="minor">
+            <a:schemeClr val="lt1"/>
+          </a:fontRef>
+        </p:style>
+        <p:txBody>
+          <a:bodyPr rtlCol="0" anchor="ctr"/>
+          <a:lstStyle/>
+          <a:p>
+            <a:pPr algn="ctr"/>
+          </a:p>
+        </p:txBody>
+      </p:sp>
+      <p:sp>
+        <p:nvSpPr>
+          <p:cNvPr id="36" name="TextBox 35"/>
+          <p:cNvSpPr txBox="1"/>
+          <p:nvPr/>
+        </p:nvSpPr>
+        <p:spPr>
+          <a:xfrm>
+            <a:off x="1331565" y="4509205"/>
+            <a:ext cx="914400" cy="292608"/>
+          </a:xfrm>
+          <a:prstGeom prst="rect">
+            <a:avLst/>
+          </a:prstGeom>
+          <a:noFill/>
+        </p:spPr>
+        <p:txBody>
+          <a:bodyPr wrap="square" lIns="0" rIns="0" tIns="0" bIns="0" anchor="ctr">
+            <a:spAutoFit/>
+          </a:bodyPr>
+          <a:lstStyle/>
+          <a:p>
+            <a:pPr algn="ctr">
+              <a:lnSpc>
+                <a:spcPct val="90000"/>
+              </a:lnSpc>
+              <a:spcBef>
+                <a:spcPts val="0"/>
+              </a:spcBef>
+              <a:spcAft>
+                <a:spcPts val="0"/>
+              </a:spcAft>
+            </a:pPr>
+            <a:r>
+              <a:rPr sz="700" b="1" i="0">
+                <a:solidFill>
+                  <a:srgbClr val="FFFFFF"/>
+                </a:solidFill>
+                <a:latin typeface="Arial"/>
+              </a:rPr>
+              <a:t>5 · LEARN</a:t>
+            </a:r>
+          </a:p>
+        </p:txBody>
+      </p:sp>
+      <p:sp>
+        <p:nvSpPr>
+          <p:cNvPr id="37" name="TextBox 36"/>
+          <p:cNvSpPr txBox="1"/>
+          <p:nvPr/>
+        </p:nvSpPr>
+        <p:spPr>
+          <a:xfrm>
+            <a:off x="1194405" y="4888681"/>
+            <a:ext cx="1188720" cy="265176"/>
+          </a:xfrm>
+          <a:prstGeom prst="rect">
+            <a:avLst/>
+          </a:prstGeom>
+          <a:noFill/>
+        </p:spPr>
+        <p:txBody>
+          <a:bodyPr wrap="square" lIns="0" rIns="0" tIns="0" bIns="0" anchor="ctr">
+            <a:spAutoFit/>
+          </a:bodyPr>
+          <a:lstStyle/>
+          <a:p>
+            <a:pPr algn="ctr">
+              <a:lnSpc>
+                <a:spcPct val="90000"/>
+              </a:lnSpc>
+              <a:spcBef>
+                <a:spcPts val="0"/>
+              </a:spcBef>
+              <a:spcAft>
+                <a:spcPts val="0"/>
+              </a:spcAft>
+            </a:pPr>
+            <a:r>
+              <a:rPr sz="620" b="0" i="0">
+                <a:solidFill>
+                  <a:srgbClr val="727375"/>
+                </a:solidFill>
+                <a:latin typeface="Arial"/>
+              </a:rPr>
+              <a:t>outcome feedback
+trains the model</a:t>
+            </a:r>
+          </a:p>
+        </p:txBody>
+      </p:sp>
+      <p:cxnSp>
+        <p:nvCxnSpPr>
+          <p:cNvPr id="38" name="Connector 37"/>
+          <p:cNvCxnSpPr/>
+          <p:nvPr/>
+        </p:nvCxnSpPr>
+        <p:spPr>
+          <a:xfrm>
+            <a:off x="2699479" y="4280342"/>
+            <a:ext cx="205932" cy="149619"/>
+          </a:xfrm>
+          <a:prstGeom prst="curvedConnector3">
+            <a:avLst/>
+          </a:prstGeom>
+          <a:ln w="12700">
+            <a:solidFill>
+              <a:srgbClr val="727375"/>
+            </a:solidFill>
+            <a:prstDash val="sysDash"/>
+            <a:tailEnd type="triangle" w="med" len="med"/>
+          </a:ln>
+          <a:effectLst/>
+        </p:spPr>
+        <p:style>
+          <a:lnRef idx="2">
+            <a:schemeClr val="accent1"/>
+          </a:lnRef>
+          <a:fillRef idx="0">
+            <a:schemeClr val="accent1"/>
+          </a:fillRef>
+          <a:effectRef idx="1">
+            <a:schemeClr val="accent1"/>
+          </a:effectRef>
+          <a:fontRef idx="minor">
+            <a:schemeClr val="tx1"/>
+          </a:fontRef>
+        </p:style>
+      </p:cxnSp>
+      <p:cxnSp>
+        <p:nvCxnSpPr>
+          <p:cNvPr id="39" name="Connector 38"/>
+          <p:cNvCxnSpPr/>
+          <p:nvPr/>
+        </p:nvCxnSpPr>
+        <p:spPr>
+          <a:xfrm flipH="1">
+            <a:off x="2991875" y="4938158"/>
+            <a:ext cx="78659" cy="242088"/>
+          </a:xfrm>
+          <a:prstGeom prst="curvedConnector3">
+            <a:avLst/>
+          </a:prstGeom>
+          <a:ln w="12700">
+            <a:solidFill>
+              <a:srgbClr val="727375"/>
+            </a:solidFill>
+            <a:prstDash val="sysDash"/>
+            <a:tailEnd type="triangle" w="med" len="med"/>
+          </a:ln>
+          <a:effectLst/>
+        </p:spPr>
+        <p:style>
+          <a:lnRef idx="2">
+            <a:schemeClr val="accent1"/>
+          </a:lnRef>
+          <a:fillRef idx="0">
+            <a:schemeClr val="accent1"/>
+          </a:fillRef>
+          <a:effectRef idx="1">
+            <a:schemeClr val="accent1"/>
+          </a:effectRef>
+          <a:fontRef idx="minor">
+            <a:schemeClr val="tx1"/>
+          </a:fontRef>
+        </p:style>
+      </p:cxnSp>
+      <p:cxnSp>
+        <p:nvCxnSpPr>
+          <p:cNvPr id="40" name="Connector 39"/>
+          <p:cNvCxnSpPr/>
+          <p:nvPr/>
+        </p:nvCxnSpPr>
+        <p:spPr>
+          <a:xfrm flipH="1">
+            <a:off x="2305030" y="5494330"/>
+            <a:ext cx="254547" cy="0"/>
+          </a:xfrm>
+          <a:prstGeom prst="curvedConnector3">
+            <a:avLst/>
+          </a:prstGeom>
+          <a:ln w="12700">
+            <a:solidFill>
+              <a:srgbClr val="727375"/>
+            </a:solidFill>
+            <a:prstDash val="sysDash"/>
+            <a:tailEnd type="triangle" w="med" len="med"/>
+          </a:ln>
+          <a:effectLst/>
+        </p:spPr>
+        <p:style>
+          <a:lnRef idx="2">
+            <a:schemeClr val="accent1"/>
+          </a:lnRef>
+          <a:fillRef idx="0">
+            <a:schemeClr val="accent1"/>
+          </a:fillRef>
+          <a:effectRef idx="1">
+            <a:schemeClr val="accent1"/>
+          </a:effectRef>
+          <a:fontRef idx="minor">
+            <a:schemeClr val="tx1"/>
+          </a:fontRef>
+        </p:style>
+      </p:cxnSp>
+      <p:cxnSp>
+        <p:nvCxnSpPr>
+          <p:cNvPr id="41" name="Connector 40"/>
+          <p:cNvCxnSpPr/>
+          <p:nvPr/>
+        </p:nvCxnSpPr>
+        <p:spPr>
+          <a:xfrm flipH="1" flipV="1">
+            <a:off x="1794073" y="4938158"/>
+            <a:ext cx="78659" cy="242088"/>
+          </a:xfrm>
+          <a:prstGeom prst="curvedConnector3">
+            <a:avLst/>
+          </a:prstGeom>
+          <a:ln w="12700">
+            <a:solidFill>
+              <a:srgbClr val="727375"/>
+            </a:solidFill>
+            <a:prstDash val="sysDash"/>
+            <a:tailEnd type="triangle" w="med" len="med"/>
+          </a:ln>
+          <a:effectLst/>
+        </p:spPr>
+        <p:style>
+          <a:lnRef idx="2">
+            <a:schemeClr val="accent1"/>
+          </a:lnRef>
+          <a:fillRef idx="0">
+            <a:schemeClr val="accent1"/>
+          </a:fillRef>
+          <a:effectRef idx="1">
+            <a:schemeClr val="accent1"/>
+          </a:effectRef>
+          <a:fontRef idx="minor">
+            <a:schemeClr val="tx1"/>
+          </a:fontRef>
+        </p:style>
+      </p:cxnSp>
+      <p:cxnSp>
+        <p:nvCxnSpPr>
+          <p:cNvPr id="42" name="Connector 41"/>
+          <p:cNvCxnSpPr/>
+          <p:nvPr/>
+        </p:nvCxnSpPr>
+        <p:spPr>
+          <a:xfrm flipV="1">
+            <a:off x="1959196" y="4280342"/>
+            <a:ext cx="205932" cy="149619"/>
+          </a:xfrm>
+          <a:prstGeom prst="curvedConnector3">
+            <a:avLst/>
+          </a:prstGeom>
+          <a:ln w="12700">
+            <a:solidFill>
+              <a:srgbClr val="727375"/>
+            </a:solidFill>
+            <a:prstDash val="sysDash"/>
+            <a:tailEnd type="triangle" w="med" len="med"/>
+          </a:ln>
+          <a:effectLst/>
+        </p:spPr>
+        <p:style>
+          <a:lnRef idx="2">
+            <a:schemeClr val="accent1"/>
+          </a:lnRef>
+          <a:fillRef idx="0">
+            <a:schemeClr val="accent1"/>
+          </a:fillRef>
+          <a:effectRef idx="1">
+            <a:schemeClr val="accent1"/>
+          </a:effectRef>
+          <a:fontRef idx="minor">
+            <a:schemeClr val="tx1"/>
+          </a:fontRef>
+        </p:style>
+      </p:cxnSp>
+      <p:sp>
+        <p:nvSpPr>
+          <p:cNvPr id="43" name="TextBox 42"/>
+          <p:cNvSpPr txBox="1"/>
+          <p:nvPr/>
+        </p:nvSpPr>
+        <p:spPr>
+          <a:xfrm>
+            <a:off x="1929383" y="4773168"/>
+            <a:ext cx="1005840" cy="201168"/>
+          </a:xfrm>
+          <a:prstGeom prst="rect">
+            <a:avLst/>
+          </a:prstGeom>
+          <a:noFill/>
+        </p:spPr>
+        <p:txBody>
+          <a:bodyPr wrap="square" lIns="0" rIns="0" tIns="0" bIns="0" anchor="ctr">
+            <a:spAutoFit/>
+          </a:bodyPr>
+          <a:lstStyle/>
+          <a:p>
+            <a:pPr algn="ctr">
+              <a:lnSpc>
+                <a:spcPct val="100000"/>
+              </a:lnSpc>
+              <a:spcBef>
+                <a:spcPts val="0"/>
+              </a:spcBef>
+              <a:spcAft>
+                <a:spcPts val="0"/>
+              </a:spcAft>
+            </a:pPr>
+            <a:r>
+              <a:rPr sz="680" b="1" i="0">
+                <a:solidFill>
+                  <a:srgbClr val="1B3E6E"/>
+                </a:solidFill>
+                <a:latin typeface="Arial"/>
+              </a:rPr>
+              <a:t>↻  runs daily</a:t>
+            </a:r>
+          </a:p>
+        </p:txBody>
+      </p:sp>
+      <p:sp>
+        <p:nvSpPr>
+          <p:cNvPr id="44" name="Rectangle 43"/>
+          <p:cNvSpPr/>
+          <p:nvPr/>
+        </p:nvSpPr>
+        <p:spPr>
+          <a:xfrm>
+            <a:off x="4645152" y="3374136"/>
+            <a:ext cx="54864" cy="182880"/>
+          </a:xfrm>
+          <a:prstGeom prst="rect">
+            <a:avLst/>
+          </a:prstGeom>
+          <a:solidFill>
+            <a:srgbClr val="398025"/>
+          </a:solidFill>
+          <a:ln>
+            <a:noFill/>
+          </a:ln>
+          <a:effectLst/>
+        </p:spPr>
+        <p:style>
+          <a:lnRef idx="1">
+            <a:schemeClr val="accent1"/>
+          </a:lnRef>
+          <a:fillRef idx="3">
+            <a:schemeClr val="accent1"/>
+          </a:fillRef>
+          <a:effectRef idx="2">
+            <a:schemeClr val="accent1"/>
+          </a:effectRef>
+          <a:fontRef idx="minor">
+            <a:schemeClr val="lt1"/>
+          </a:fontRef>
+        </p:style>
+        <p:txBody>
+          <a:bodyPr rtlCol="0" anchor="ctr"/>
+          <a:lstStyle/>
+          <a:p>
+            <a:pPr algn="ctr"/>
+          </a:p>
+        </p:txBody>
+      </p:sp>
+      <p:sp>
+        <p:nvSpPr>
+          <p:cNvPr id="45" name="TextBox 44"/>
+          <p:cNvSpPr txBox="1"/>
+          <p:nvPr/>
+        </p:nvSpPr>
+        <p:spPr>
+          <a:xfrm>
+            <a:off x="4791456" y="3346704"/>
+            <a:ext cx="3986783" cy="256032"/>
+          </a:xfrm>
+          <a:prstGeom prst="rect">
+            <a:avLst/>
+          </a:prstGeom>
+          <a:noFill/>
+        </p:spPr>
+        <p:txBody>
+          <a:bodyPr wrap="square" lIns="0" rIns="0" tIns="0" bIns="0" anchor="t">
+            <a:spAutoFit/>
+          </a:bodyPr>
+          <a:lstStyle/>
+          <a:p>
+            <a:pPr algn="l">
+              <a:lnSpc>
+                <a:spcPct val="100000"/>
+              </a:lnSpc>
+              <a:spcBef>
+                <a:spcPts val="0"/>
+              </a:spcBef>
+              <a:spcAft>
+                <a:spcPts val="0"/>
+              </a:spcAft>
+            </a:pPr>
+            <a:r>
+              <a:rPr sz="950" b="1" i="0">
+                <a:solidFill>
+                  <a:srgbClr val="1B3E6E"/>
+                </a:solidFill>
+                <a:latin typeface="Arial"/>
+              </a:rPr>
+              <a:t>Rice procurement cost — with vs. without GS funding ($M)</a:t>
+            </a:r>
+          </a:p>
+        </p:txBody>
+      </p:sp>
+      <p:sp>
+        <p:nvSpPr>
+          <p:cNvPr id="46" name="Rectangle 45"/>
+          <p:cNvSpPr/>
+          <p:nvPr/>
+        </p:nvSpPr>
+        <p:spPr>
+          <a:xfrm>
+            <a:off x="4645152" y="3621024"/>
+            <a:ext cx="4133087" cy="10972"/>
+          </a:xfrm>
+          <a:prstGeom prst="rect">
+            <a:avLst/>
+          </a:prstGeom>
+          <a:solidFill>
+            <a:srgbClr val="BFBFBF"/>
+          </a:solidFill>
+          <a:ln>
+            <a:noFill/>
+          </a:ln>
+          <a:effectLst/>
+        </p:spPr>
+        <p:style>
+          <a:lnRef idx="1">
+            <a:schemeClr val="accent1"/>
+          </a:lnRef>
+          <a:fillRef idx="3">
+            <a:schemeClr val="accent1"/>
+          </a:fillRef>
+          <a:effectRef idx="2">
+            <a:schemeClr val="accent1"/>
+          </a:effectRef>
+          <a:fontRef idx="minor">
+            <a:schemeClr val="lt1"/>
+          </a:fontRef>
+        </p:style>
+        <p:txBody>
+          <a:bodyPr rtlCol="0" anchor="ctr"/>
+          <a:lstStyle/>
+          <a:p>
+            <a:pPr algn="ctr"/>
+          </a:p>
+        </p:txBody>
+      </p:sp>
+      <p:graphicFrame>
+        <p:nvGraphicFramePr>
+          <p:cNvPr id="47" name="Chart 46"/>
+          <p:cNvGraphicFramePr>
+            <a:graphicFrameLocks noGrp="1"/>
+          </p:cNvGraphicFramePr>
+          <p:nvPr/>
+        </p:nvGraphicFramePr>
+        <p:xfrm>
+          <a:off x="4645152" y="3694176"/>
+          <a:ext cx="4133087" cy="1536192"/>
+        </p:xfrm>
+        <a:graphic>
+          <a:graphicData uri="http://schemas.openxmlformats.org/drawingml/2006/chart">
+            <c:chart xmlns:c="http://schemas.openxmlformats.org/drawingml/2006/chart" r:id="rId2"/>
+          </a:graphicData>
+        </a:graphic>
+      </p:graphicFrame>
+      <p:sp>
+        <p:nvSpPr>
+          <p:cNvPr id="48" name="Rounded Rectangle 47"/>
+          <p:cNvSpPr/>
+          <p:nvPr/>
+        </p:nvSpPr>
+        <p:spPr>
+          <a:xfrm>
+            <a:off x="4645152" y="5303520"/>
+            <a:ext cx="4133087" cy="603504"/>
+          </a:xfrm>
+          <a:prstGeom prst="roundRect">
+            <a:avLst>
+              <a:gd name="adj" fmla="val 10000"/>
+            </a:avLst>
+          </a:prstGeom>
+          <a:solidFill>
+            <a:srgbClr val="398025"/>
+          </a:solidFill>
+          <a:ln>
+            <a:noFill/>
+          </a:ln>
+          <a:effectLst/>
+        </p:spPr>
+        <p:style>
+          <a:lnRef idx="1">
+            <a:schemeClr val="accent1"/>
+          </a:lnRef>
+          <a:fillRef idx="3">
+            <a:schemeClr val="accent1"/>
+          </a:fillRef>
+          <a:effectRef idx="2">
+            <a:schemeClr val="accent1"/>
+          </a:effectRef>
+          <a:fontRef idx="minor">
+            <a:schemeClr val="lt1"/>
+          </a:fontRef>
+        </p:style>
+        <p:txBody>
+          <a:bodyPr rtlCol="0" anchor="ctr"/>
+          <a:lstStyle/>
+          <a:p>
+            <a:pPr algn="ctr"/>
+          </a:p>
+        </p:txBody>
+      </p:sp>
+      <p:sp>
+        <p:nvSpPr>
+          <p:cNvPr id="49" name="TextBox 48"/>
+          <p:cNvSpPr txBox="1"/>
+          <p:nvPr/>
+        </p:nvSpPr>
+        <p:spPr>
+          <a:xfrm>
+            <a:off x="4736592" y="5340096"/>
+            <a:ext cx="3950208" cy="530352"/>
+          </a:xfrm>
+          <a:prstGeom prst="rect">
+            <a:avLst/>
+          </a:prstGeom>
+          <a:noFill/>
+        </p:spPr>
+        <p:txBody>
+          <a:bodyPr wrap="square" lIns="0" rIns="0" tIns="0" bIns="0" anchor="ctr">
+            <a:spAutoFit/>
+          </a:bodyPr>
+          <a:lstStyle/>
+          <a:p>
+            <a:pPr algn="ctr">
+              <a:lnSpc>
+                <a:spcPct val="100000"/>
+              </a:lnSpc>
+              <a:spcBef>
+                <a:spcPts val="0"/>
+              </a:spcBef>
+              <a:spcAft>
+                <a:spcPts val="100"/>
+              </a:spcAft>
+            </a:pPr>
+            <a:r>
+              <a:rPr sz="700" b="1" i="0">
+                <a:solidFill>
+                  <a:srgbClr val="FFFFFF"/>
+                </a:solidFill>
+                <a:latin typeface="Arial"/>
+              </a:rPr>
+              <a:t>CUMULATIVE 2026–29 IMPACT</a:t>
+            </a:r>
+          </a:p>
+          <a:p>
+            <a:pPr algn="ctr">
+              <a:lnSpc>
+                <a:spcPct val="100000"/>
+              </a:lnSpc>
+              <a:spcBef>
+                <a:spcPts val="0"/>
+              </a:spcBef>
+              <a:spcAft>
+                <a:spcPts val="100"/>
+              </a:spcAft>
+            </a:pPr>
+            <a:r>
+              <a:rPr sz="1150" b="1" i="0">
+                <a:solidFill>
+                  <a:srgbClr val="FFFFFF"/>
+                </a:solidFill>
+                <a:latin typeface="Arial"/>
+              </a:rPr>
+              <a:t>~$10.1M saved  |  21.6% reduction</a:t>
+            </a:r>
+          </a:p>
+          <a:p>
+            <a:pPr algn="ctr">
+              <a:lnSpc>
+                <a:spcPct val="100000"/>
+              </a:lnSpc>
+              <a:spcBef>
+                <a:spcPts val="0"/>
+              </a:spcBef>
+              <a:spcAft>
+                <a:spcPts val="0"/>
+              </a:spcAft>
+            </a:pPr>
+            <a:r>
+              <a:rPr sz="660" b="0" i="1">
+                <a:solidFill>
+                  <a:srgbClr val="FFFFFF"/>
+                </a:solidFill>
+                <a:latin typeface="Arial"/>
+              </a:rPr>
+              <a:t>team estimate on TAPF's ₹450 Cr+ annual food spend</a:t>
             </a:r>
           </a:p>
         </p:txBody>

--- a/AkshayaPatra_GS_Pitch.pptx
+++ b/AkshayaPatra_GS_Pitch.pptx
@@ -15,6 +15,7 @@
     <p:sldId id="263" r:id="rId14"/>
     <p:sldId id="264" r:id="rId15"/>
     <p:sldId id="265" r:id="rId16"/>
+    <p:sldId id="266" r:id="rId17"/>
   </p:sldIdLst>
   <p:sldSz cx="9144000" cy="6858000" type="screen4x3"/>
   <p:notesSz cx="6858000" cy="9144000"/>
@@ -1541,6 +1542,173 @@
     <a:p>
       <a:pPr>
         <a:defRPr sz="700">
+          <a:solidFill>
+            <a:srgbClr val="333333"/>
+          </a:solidFill>
+          <a:latin typeface="Arial"/>
+        </a:defRPr>
+      </a:pPr>
+      <a:endParaRPr lang="en-US"/>
+    </a:p>
+  </c:txPr>
+  <c:externalData r:id="rId1">
+    <c:autoUpdate val="0"/>
+  </c:externalData>
+</c:chartSpace>
+</file>
+
+<file path=ppt/charts/chart9.xml><?xml version="1.0" encoding="utf-8"?>
+<c:chartSpace xmlns:c="http://schemas.openxmlformats.org/drawingml/2006/chart" xmlns:a="http://schemas.openxmlformats.org/drawingml/2006/main" xmlns:r="http://schemas.openxmlformats.org/officeDocument/2006/relationships">
+  <c:date1904 val="0"/>
+  <c:chart>
+    <c:autoTitleDeleted val="1"/>
+    <c:plotArea>
+      <c:barChart>
+        <c:barDir val="col"/>
+        <c:grouping val="clustered"/>
+        <c:ser>
+          <c:idx val="0"/>
+          <c:order val="0"/>
+          <c:tx>
+            <c:strRef>
+              <c:f>Sheet1!$B$1</c:f>
+              <c:strCache>
+                <c:ptCount val="1"/>
+                <c:pt idx="0">
+                  <c:v>saved</c:v>
+                </c:pt>
+              </c:strCache>
+            </c:strRef>
+          </c:tx>
+          <c:spPr>
+            <a:solidFill>
+              <a:srgbClr val="398025"/>
+            </a:solidFill>
+            <a:ln>
+              <a:noFill/>
+            </a:ln>
+          </c:spPr>
+          <c:cat>
+            <c:strRef>
+              <c:f>Sheet1!$A$2:$A$5</c:f>
+              <c:strCache>
+                <c:ptCount val="4"/>
+                <c:pt idx="0">
+                  <c:v>2026</c:v>
+                </c:pt>
+                <c:pt idx="1">
+                  <c:v>2027</c:v>
+                </c:pt>
+                <c:pt idx="2">
+                  <c:v>2028</c:v>
+                </c:pt>
+                <c:pt idx="3">
+                  <c:v>2029</c:v>
+                </c:pt>
+              </c:strCache>
+            </c:strRef>
+          </c:cat>
+          <c:val>
+            <c:numRef>
+              <c:f>Sheet1!$B$2:$B$5</c:f>
+              <c:numCache>
+                <c:formatCode>General</c:formatCode>
+                <c:ptCount val="4"/>
+                <c:pt idx="0">
+                  <c:v>1.8</c:v>
+                </c:pt>
+                <c:pt idx="1">
+                  <c:v>3.6</c:v>
+                </c:pt>
+                <c:pt idx="2">
+                  <c:v>5.1</c:v>
+                </c:pt>
+                <c:pt idx="3">
+                  <c:v>5.1</c:v>
+                </c:pt>
+              </c:numCache>
+            </c:numRef>
+          </c:val>
+        </c:ser>
+        <c:dLbls>
+          <c:txPr>
+            <a:bodyPr/>
+            <a:lstStyle/>
+            <a:p>
+              <a:pPr>
+                <a:defRPr sz="650" b="1">
+                  <a:solidFill>
+                    <a:srgbClr val="1B3E6E"/>
+                  </a:solidFill>
+                </a:defRPr>
+              </a:pPr>
+            </a:p>
+          </c:txPr>
+          <c:showLegendKey val="0"/>
+          <c:showVal val="1"/>
+          <c:showCatName val="0"/>
+          <c:showSerName val="0"/>
+          <c:showPercent val="0"/>
+          <c:showBubbleSize val="0"/>
+          <c:showLeaderLines val="1"/>
+        </c:dLbls>
+        <c:gapWidth val="60"/>
+        <c:axId val="-2068027336"/>
+        <c:axId val="-2113994440"/>
+      </c:barChart>
+      <c:catAx>
+        <c:axId val="-2068027336"/>
+        <c:scaling>
+          <c:orientation val="minMax"/>
+        </c:scaling>
+        <c:delete val="0"/>
+        <c:axPos val="b"/>
+        <c:majorTickMark val="out"/>
+        <c:minorTickMark val="none"/>
+        <c:tickLblPos val="nextTo"/>
+        <c:spPr>
+          <a:ln>
+            <a:solidFill>
+              <a:srgbClr val="BFBFBF"/>
+            </a:solidFill>
+          </a:ln>
+        </c:spPr>
+        <c:txPr>
+          <a:bodyPr/>
+          <a:lstStyle/>
+          <a:p>
+            <a:pPr>
+              <a:defRPr sz="650"/>
+            </a:pPr>
+          </a:p>
+        </c:txPr>
+        <c:crossAx val="-2113994440"/>
+        <c:crosses val="autoZero"/>
+        <c:auto val="1"/>
+        <c:lblAlgn val="ctr"/>
+        <c:lblOffset val="100"/>
+        <c:noMultiLvlLbl val="0"/>
+      </c:catAx>
+      <c:valAx>
+        <c:axId val="-2113994440"/>
+        <c:scaling/>
+        <c:delete/>
+        <c:axPos val="l"/>
+        <c:majorTickMark val="out"/>
+        <c:minorTickMark val="none"/>
+        <c:tickLblPos val="nextTo"/>
+        <c:crossAx val="-2068027336"/>
+        <c:crosses val="autoZero"/>
+      </c:valAx>
+    </c:plotArea>
+    <c:dispBlanksAs val="gap"/>
+  </c:chart>
+  <c:txPr>
+    <a:bodyPr/>
+    <a:lstStyle/>
+    <a:p>
+      <a:pPr>
+        <a:defRPr sz="650">
           <a:solidFill>
             <a:srgbClr val="333333"/>
           </a:solidFill>
@@ -9429,6 +9597,2263 @@
                 <a:latin typeface="Arial"/>
               </a:rPr>
               <a:t>Deutsche Bank (Pune kitchen '26) · IOCL (solar) + leading corporates</a:t>
+            </a:r>
+          </a:p>
+        </p:txBody>
+      </p:sp>
+    </p:spTree>
+  </p:cSld>
+  <p:clrMapOvr>
+    <a:masterClrMapping/>
+  </p:clrMapOvr>
+</p:sld>
+</file>
+
+<file path=ppt/slides/slide11.xml><?xml version="1.0" encoding="utf-8"?>
+<p:sld xmlns:a="http://schemas.openxmlformats.org/drawingml/2006/main" xmlns:p="http://schemas.openxmlformats.org/presentationml/2006/main" xmlns:r="http://schemas.openxmlformats.org/officeDocument/2006/relationships">
+  <p:cSld>
+    <p:spTree>
+      <p:nvGrpSpPr>
+        <p:cNvPr id="1" name=""/>
+        <p:cNvGrpSpPr/>
+        <p:nvPr/>
+      </p:nvGrpSpPr>
+      <p:grpSpPr/>
+      <p:sp>
+        <p:nvSpPr>
+          <p:cNvPr id="2" name="Rectangle 1"/>
+          <p:cNvSpPr/>
+          <p:nvPr/>
+        </p:nvSpPr>
+        <p:spPr>
+          <a:xfrm>
+            <a:off x="365760" y="274320"/>
+            <a:ext cx="8412480" cy="23774"/>
+          </a:xfrm>
+          <a:prstGeom prst="rect">
+            <a:avLst/>
+          </a:prstGeom>
+          <a:solidFill>
+            <a:srgbClr val="1B3E6E"/>
+          </a:solidFill>
+          <a:ln>
+            <a:noFill/>
+          </a:ln>
+          <a:effectLst/>
+        </p:spPr>
+        <p:style>
+          <a:lnRef idx="1">
+            <a:schemeClr val="accent1"/>
+          </a:lnRef>
+          <a:fillRef idx="3">
+            <a:schemeClr val="accent1"/>
+          </a:fillRef>
+          <a:effectRef idx="2">
+            <a:schemeClr val="accent1"/>
+          </a:effectRef>
+          <a:fontRef idx="minor">
+            <a:schemeClr val="lt1"/>
+          </a:fontRef>
+        </p:style>
+        <p:txBody>
+          <a:bodyPr rtlCol="0" anchor="ctr"/>
+          <a:lstStyle/>
+          <a:p>
+            <a:pPr algn="ctr"/>
+          </a:p>
+        </p:txBody>
+      </p:sp>
+      <p:sp>
+        <p:nvSpPr>
+          <p:cNvPr id="3" name="TextBox 2"/>
+          <p:cNvSpPr txBox="1"/>
+          <p:nvPr/>
+        </p:nvSpPr>
+        <p:spPr>
+          <a:xfrm>
+            <a:off x="365760" y="365760"/>
+            <a:ext cx="8412480" cy="457200"/>
+          </a:xfrm>
+          <a:prstGeom prst="rect">
+            <a:avLst/>
+          </a:prstGeom>
+          <a:noFill/>
+        </p:spPr>
+        <p:txBody>
+          <a:bodyPr wrap="square" lIns="0" rIns="0" tIns="0" bIns="0" anchor="t">
+            <a:spAutoFit/>
+          </a:bodyPr>
+          <a:lstStyle/>
+          <a:p>
+            <a:pPr algn="l">
+              <a:lnSpc>
+                <a:spcPct val="100000"/>
+              </a:lnSpc>
+              <a:spcBef>
+                <a:spcPts val="0"/>
+              </a:spcBef>
+              <a:spcAft>
+                <a:spcPts val="0"/>
+              </a:spcAft>
+            </a:pPr>
+            <a:r>
+              <a:rPr sz="2000" b="0" i="0">
+                <a:solidFill>
+                  <a:srgbClr val="1B3E6E"/>
+                </a:solidFill>
+                <a:latin typeface="Georgia"/>
+              </a:rPr>
+              <a:t>Solution 1 — where the savings come from, and what they buy</a:t>
+            </a:r>
+          </a:p>
+        </p:txBody>
+      </p:sp>
+      <p:sp>
+        <p:nvSpPr>
+          <p:cNvPr id="4" name="TextBox 3"/>
+          <p:cNvSpPr txBox="1"/>
+          <p:nvPr/>
+        </p:nvSpPr>
+        <p:spPr>
+          <a:xfrm>
+            <a:off x="365760" y="822960"/>
+            <a:ext cx="8412480" cy="438912"/>
+          </a:xfrm>
+          <a:prstGeom prst="rect">
+            <a:avLst/>
+          </a:prstGeom>
+          <a:noFill/>
+        </p:spPr>
+        <p:txBody>
+          <a:bodyPr wrap="square" lIns="0" rIns="0" tIns="0" bIns="0" anchor="t">
+            <a:spAutoFit/>
+          </a:bodyPr>
+          <a:lstStyle/>
+          <a:p>
+            <a:pPr algn="l">
+              <a:lnSpc>
+                <a:spcPct val="100000"/>
+              </a:lnSpc>
+              <a:spcBef>
+                <a:spcPts val="0"/>
+              </a:spcBef>
+              <a:spcAft>
+                <a:spcPts val="0"/>
+              </a:spcAft>
+            </a:pPr>
+            <a:r>
+              <a:rPr sz="1050" b="0" i="0">
+                <a:solidFill>
+                  <a:srgbClr val="333333"/>
+                </a:solidFill>
+                <a:latin typeface="Arial"/>
+              </a:rPr>
+              <a:t>Every bar is a number from TAPF's own data — wastage logs and seasonal price spreads — built up transparently into recurring annual impact.</a:t>
+            </a:r>
+          </a:p>
+        </p:txBody>
+      </p:sp>
+      <p:sp>
+        <p:nvSpPr>
+          <p:cNvPr id="5" name="Rectangle 4"/>
+          <p:cNvSpPr/>
+          <p:nvPr/>
+        </p:nvSpPr>
+        <p:spPr>
+          <a:xfrm>
+            <a:off x="502920" y="6071616"/>
+            <a:ext cx="8138159" cy="365760"/>
+          </a:xfrm>
+          <a:prstGeom prst="rect">
+            <a:avLst/>
+          </a:prstGeom>
+          <a:solidFill>
+            <a:srgbClr val="D9D9D9"/>
+          </a:solidFill>
+          <a:ln>
+            <a:noFill/>
+          </a:ln>
+          <a:effectLst/>
+        </p:spPr>
+        <p:style>
+          <a:lnRef idx="1">
+            <a:schemeClr val="accent1"/>
+          </a:lnRef>
+          <a:fillRef idx="3">
+            <a:schemeClr val="accent1"/>
+          </a:fillRef>
+          <a:effectRef idx="2">
+            <a:schemeClr val="accent1"/>
+          </a:effectRef>
+          <a:fontRef idx="minor">
+            <a:schemeClr val="lt1"/>
+          </a:fontRef>
+        </p:style>
+        <p:txBody>
+          <a:bodyPr rtlCol="0" anchor="ctr"/>
+          <a:lstStyle/>
+          <a:p>
+            <a:pPr algn="ctr"/>
+          </a:p>
+        </p:txBody>
+      </p:sp>
+      <p:sp>
+        <p:nvSpPr>
+          <p:cNvPr id="6" name="TextBox 5"/>
+          <p:cNvSpPr txBox="1"/>
+          <p:nvPr/>
+        </p:nvSpPr>
+        <p:spPr>
+          <a:xfrm>
+            <a:off x="640080" y="6071616"/>
+            <a:ext cx="7863840" cy="365760"/>
+          </a:xfrm>
+          <a:prstGeom prst="rect">
+            <a:avLst/>
+          </a:prstGeom>
+          <a:noFill/>
+        </p:spPr>
+        <p:txBody>
+          <a:bodyPr wrap="square" lIns="0" rIns="0" tIns="0" bIns="0" anchor="ctr">
+            <a:spAutoFit/>
+          </a:bodyPr>
+          <a:lstStyle/>
+          <a:p>
+            <a:pPr algn="ctr">
+              <a:lnSpc>
+                <a:spcPct val="95000"/>
+              </a:lnSpc>
+              <a:spcBef>
+                <a:spcPts val="0"/>
+              </a:spcBef>
+              <a:spcAft>
+                <a:spcPts val="0"/>
+              </a:spcAft>
+            </a:pPr>
+            <a:r>
+              <a:rPr sz="1100" b="1" i="0">
+                <a:solidFill>
+                  <a:srgbClr val="1B3E6E"/>
+                </a:solidFill>
+                <a:latin typeface="Georgia"/>
+              </a:rPr>
+              <a:t>₹6 Cr saved every year = 9M+ more meals = 40,000+ children fed for a full year — recurring, audited, conservative.</a:t>
+            </a:r>
+          </a:p>
+        </p:txBody>
+      </p:sp>
+      <p:sp>
+        <p:nvSpPr>
+          <p:cNvPr id="7" name="TextBox 6"/>
+          <p:cNvSpPr txBox="1"/>
+          <p:nvPr/>
+        </p:nvSpPr>
+        <p:spPr>
+          <a:xfrm>
+            <a:off x="365760" y="6492240"/>
+            <a:ext cx="1280160" cy="329184"/>
+          </a:xfrm>
+          <a:prstGeom prst="rect">
+            <a:avLst/>
+          </a:prstGeom>
+          <a:noFill/>
+        </p:spPr>
+        <p:txBody>
+          <a:bodyPr wrap="square" lIns="0" rIns="0" tIns="0" bIns="0" anchor="t">
+            <a:spAutoFit/>
+          </a:bodyPr>
+          <a:lstStyle/>
+          <a:p>
+            <a:pPr algn="l">
+              <a:lnSpc>
+                <a:spcPct val="90000"/>
+              </a:lnSpc>
+              <a:spcBef>
+                <a:spcPts val="0"/>
+              </a:spcBef>
+              <a:spcAft>
+                <a:spcPts val="0"/>
+              </a:spcAft>
+            </a:pPr>
+            <a:r>
+              <a:rPr sz="900" b="1" i="0">
+                <a:solidFill>
+                  <a:srgbClr val="111111"/>
+                </a:solidFill>
+                <a:latin typeface="Georgia"/>
+              </a:rPr>
+              <a:t>Goldman</a:t>
+            </a:r>
+          </a:p>
+          <a:p>
+            <a:pPr algn="l">
+              <a:lnSpc>
+                <a:spcPct val="90000"/>
+              </a:lnSpc>
+              <a:spcBef>
+                <a:spcPts val="0"/>
+              </a:spcBef>
+              <a:spcAft>
+                <a:spcPts val="0"/>
+              </a:spcAft>
+            </a:pPr>
+            <a:r>
+              <a:rPr sz="900" b="1" i="0">
+                <a:solidFill>
+                  <a:srgbClr val="111111"/>
+                </a:solidFill>
+                <a:latin typeface="Georgia"/>
+              </a:rPr>
+              <a:t>Sachs</a:t>
+            </a:r>
+          </a:p>
+        </p:txBody>
+      </p:sp>
+      <p:sp>
+        <p:nvSpPr>
+          <p:cNvPr id="8" name="TextBox 7"/>
+          <p:cNvSpPr txBox="1"/>
+          <p:nvPr/>
+        </p:nvSpPr>
+        <p:spPr>
+          <a:xfrm>
+            <a:off x="8321040" y="6528816"/>
+            <a:ext cx="457200" cy="274320"/>
+          </a:xfrm>
+          <a:prstGeom prst="rect">
+            <a:avLst/>
+          </a:prstGeom>
+          <a:noFill/>
+        </p:spPr>
+        <p:txBody>
+          <a:bodyPr wrap="square" lIns="0" rIns="0" tIns="0" bIns="0" anchor="t">
+            <a:spAutoFit/>
+          </a:bodyPr>
+          <a:lstStyle/>
+          <a:p>
+            <a:pPr algn="r">
+              <a:lnSpc>
+                <a:spcPct val="100000"/>
+              </a:lnSpc>
+              <a:spcBef>
+                <a:spcPts val="0"/>
+              </a:spcBef>
+              <a:spcAft>
+                <a:spcPts val="300"/>
+              </a:spcAft>
+            </a:pPr>
+            <a:r>
+              <a:rPr sz="900" b="0" i="0">
+                <a:solidFill>
+                  <a:srgbClr val="727375"/>
+                </a:solidFill>
+                <a:latin typeface="Arial"/>
+              </a:rPr>
+              <a:t>11</a:t>
+            </a:r>
+          </a:p>
+        </p:txBody>
+      </p:sp>
+      <p:sp>
+        <p:nvSpPr>
+          <p:cNvPr id="9" name="TextBox 8"/>
+          <p:cNvSpPr txBox="1"/>
+          <p:nvPr/>
+        </p:nvSpPr>
+        <p:spPr>
+          <a:xfrm>
+            <a:off x="5120640" y="54864"/>
+            <a:ext cx="3657600" cy="182880"/>
+          </a:xfrm>
+          <a:prstGeom prst="rect">
+            <a:avLst/>
+          </a:prstGeom>
+          <a:noFill/>
+        </p:spPr>
+        <p:txBody>
+          <a:bodyPr wrap="square" lIns="0" rIns="0" tIns="0" bIns="0" anchor="t">
+            <a:spAutoFit/>
+          </a:bodyPr>
+          <a:lstStyle/>
+          <a:p>
+            <a:pPr algn="r">
+              <a:lnSpc>
+                <a:spcPct val="100000"/>
+              </a:lnSpc>
+              <a:spcBef>
+                <a:spcPts val="0"/>
+              </a:spcBef>
+              <a:spcAft>
+                <a:spcPts val="0"/>
+              </a:spcAft>
+            </a:pPr>
+            <a:r>
+              <a:rPr sz="750" b="0" i="1">
+                <a:solidFill>
+                  <a:srgbClr val="727375"/>
+                </a:solidFill>
+                <a:latin typeface="Arial"/>
+              </a:rPr>
+              <a:t>PROPOSED SLIDE 4 GRAPH — v2 (compare with slide 9)</a:t>
+            </a:r>
+          </a:p>
+        </p:txBody>
+      </p:sp>
+      <p:sp>
+        <p:nvSpPr>
+          <p:cNvPr id="10" name="Rectangle 9"/>
+          <p:cNvSpPr/>
+          <p:nvPr/>
+        </p:nvSpPr>
+        <p:spPr>
+          <a:xfrm>
+            <a:off x="365760" y="1399032"/>
+            <a:ext cx="54864" cy="182880"/>
+          </a:xfrm>
+          <a:prstGeom prst="rect">
+            <a:avLst/>
+          </a:prstGeom>
+          <a:solidFill>
+            <a:srgbClr val="1B3E6E"/>
+          </a:solidFill>
+          <a:ln>
+            <a:noFill/>
+          </a:ln>
+          <a:effectLst/>
+        </p:spPr>
+        <p:style>
+          <a:lnRef idx="1">
+            <a:schemeClr val="accent1"/>
+          </a:lnRef>
+          <a:fillRef idx="3">
+            <a:schemeClr val="accent1"/>
+          </a:fillRef>
+          <a:effectRef idx="2">
+            <a:schemeClr val="accent1"/>
+          </a:effectRef>
+          <a:fontRef idx="minor">
+            <a:schemeClr val="lt1"/>
+          </a:fontRef>
+        </p:style>
+        <p:txBody>
+          <a:bodyPr rtlCol="0" anchor="ctr"/>
+          <a:lstStyle/>
+          <a:p>
+            <a:pPr algn="ctr"/>
+          </a:p>
+        </p:txBody>
+      </p:sp>
+      <p:sp>
+        <p:nvSpPr>
+          <p:cNvPr id="11" name="TextBox 10"/>
+          <p:cNvSpPr txBox="1"/>
+          <p:nvPr/>
+        </p:nvSpPr>
+        <p:spPr>
+          <a:xfrm>
+            <a:off x="512064" y="1371600"/>
+            <a:ext cx="4974336" cy="256032"/>
+          </a:xfrm>
+          <a:prstGeom prst="rect">
+            <a:avLst/>
+          </a:prstGeom>
+          <a:noFill/>
+        </p:spPr>
+        <p:txBody>
+          <a:bodyPr wrap="square" lIns="0" rIns="0" tIns="0" bIns="0" anchor="t">
+            <a:spAutoFit/>
+          </a:bodyPr>
+          <a:lstStyle/>
+          <a:p>
+            <a:pPr algn="l">
+              <a:lnSpc>
+                <a:spcPct val="100000"/>
+              </a:lnSpc>
+              <a:spcBef>
+                <a:spcPts val="0"/>
+              </a:spcBef>
+              <a:spcAft>
+                <a:spcPts val="0"/>
+              </a:spcAft>
+            </a:pPr>
+            <a:r>
+              <a:rPr sz="1150" b="1" i="0">
+                <a:solidFill>
+                  <a:srgbClr val="1B3E6E"/>
+                </a:solidFill>
+                <a:latin typeface="Arial"/>
+              </a:rPr>
+              <a:t>Annual savings build-up (₹ Cr / year)</a:t>
+            </a:r>
+          </a:p>
+        </p:txBody>
+      </p:sp>
+      <p:sp>
+        <p:nvSpPr>
+          <p:cNvPr id="12" name="Rectangle 11"/>
+          <p:cNvSpPr/>
+          <p:nvPr/>
+        </p:nvSpPr>
+        <p:spPr>
+          <a:xfrm>
+            <a:off x="365760" y="1645920"/>
+            <a:ext cx="5120640" cy="10972"/>
+          </a:xfrm>
+          <a:prstGeom prst="rect">
+            <a:avLst/>
+          </a:prstGeom>
+          <a:solidFill>
+            <a:srgbClr val="BFBFBF"/>
+          </a:solidFill>
+          <a:ln>
+            <a:noFill/>
+          </a:ln>
+          <a:effectLst/>
+        </p:spPr>
+        <p:style>
+          <a:lnRef idx="1">
+            <a:schemeClr val="accent1"/>
+          </a:lnRef>
+          <a:fillRef idx="3">
+            <a:schemeClr val="accent1"/>
+          </a:fillRef>
+          <a:effectRef idx="2">
+            <a:schemeClr val="accent1"/>
+          </a:effectRef>
+          <a:fontRef idx="minor">
+            <a:schemeClr val="lt1"/>
+          </a:fontRef>
+        </p:style>
+        <p:txBody>
+          <a:bodyPr rtlCol="0" anchor="ctr"/>
+          <a:lstStyle/>
+          <a:p>
+            <a:pPr algn="ctr"/>
+          </a:p>
+        </p:txBody>
+      </p:sp>
+      <p:sp>
+        <p:nvSpPr>
+          <p:cNvPr id="13" name="Rectangle 12"/>
+          <p:cNvSpPr/>
+          <p:nvPr/>
+        </p:nvSpPr>
+        <p:spPr>
+          <a:xfrm>
+            <a:off x="365760" y="4846320"/>
+            <a:ext cx="5074920" cy="12801"/>
+          </a:xfrm>
+          <a:prstGeom prst="rect">
+            <a:avLst/>
+          </a:prstGeom>
+          <a:solidFill>
+            <a:srgbClr val="BFBFBF"/>
+          </a:solidFill>
+          <a:ln>
+            <a:noFill/>
+          </a:ln>
+          <a:effectLst/>
+        </p:spPr>
+        <p:style>
+          <a:lnRef idx="1">
+            <a:schemeClr val="accent1"/>
+          </a:lnRef>
+          <a:fillRef idx="3">
+            <a:schemeClr val="accent1"/>
+          </a:fillRef>
+          <a:effectRef idx="2">
+            <a:schemeClr val="accent1"/>
+          </a:effectRef>
+          <a:fontRef idx="minor">
+            <a:schemeClr val="lt1"/>
+          </a:fontRef>
+        </p:style>
+        <p:txBody>
+          <a:bodyPr rtlCol="0" anchor="ctr"/>
+          <a:lstStyle/>
+          <a:p>
+            <a:pPr algn="ctr"/>
+          </a:p>
+        </p:txBody>
+      </p:sp>
+      <p:sp>
+        <p:nvSpPr>
+          <p:cNvPr id="14" name="Rectangle 13"/>
+          <p:cNvSpPr/>
+          <p:nvPr/>
+        </p:nvSpPr>
+        <p:spPr>
+          <a:xfrm>
+            <a:off x="566928" y="3421684"/>
+            <a:ext cx="731520" cy="1424635"/>
+          </a:xfrm>
+          <a:prstGeom prst="rect">
+            <a:avLst/>
+          </a:prstGeom>
+          <a:solidFill>
+            <a:srgbClr val="398025"/>
+          </a:solidFill>
+          <a:ln>
+            <a:noFill/>
+          </a:ln>
+          <a:effectLst/>
+        </p:spPr>
+        <p:style>
+          <a:lnRef idx="1">
+            <a:schemeClr val="accent1"/>
+          </a:lnRef>
+          <a:fillRef idx="3">
+            <a:schemeClr val="accent1"/>
+          </a:fillRef>
+          <a:effectRef idx="2">
+            <a:schemeClr val="accent1"/>
+          </a:effectRef>
+          <a:fontRef idx="minor">
+            <a:schemeClr val="lt1"/>
+          </a:fontRef>
+        </p:style>
+        <p:txBody>
+          <a:bodyPr rtlCol="0" anchor="ctr"/>
+          <a:lstStyle/>
+          <a:p>
+            <a:pPr algn="ctr"/>
+          </a:p>
+        </p:txBody>
+      </p:sp>
+      <p:sp>
+        <p:nvSpPr>
+          <p:cNvPr id="15" name="TextBox 14"/>
+          <p:cNvSpPr txBox="1"/>
+          <p:nvPr/>
+        </p:nvSpPr>
+        <p:spPr>
+          <a:xfrm>
+            <a:off x="429768" y="3202228"/>
+            <a:ext cx="1005840" cy="201168"/>
+          </a:xfrm>
+          <a:prstGeom prst="rect">
+            <a:avLst/>
+          </a:prstGeom>
+          <a:noFill/>
+        </p:spPr>
+        <p:txBody>
+          <a:bodyPr wrap="square" lIns="0" rIns="0" tIns="0" bIns="0" anchor="t">
+            <a:spAutoFit/>
+          </a:bodyPr>
+          <a:lstStyle/>
+          <a:p>
+            <a:pPr algn="ctr">
+              <a:lnSpc>
+                <a:spcPct val="100000"/>
+              </a:lnSpc>
+              <a:spcBef>
+                <a:spcPts val="0"/>
+              </a:spcBef>
+              <a:spcAft>
+                <a:spcPts val="0"/>
+              </a:spcAft>
+            </a:pPr>
+            <a:r>
+              <a:rPr sz="950" b="1" i="0">
+                <a:solidFill>
+                  <a:srgbClr val="1B3E6E"/>
+                </a:solidFill>
+                <a:latin typeface="Arial"/>
+              </a:rPr>
+              <a:t>+4.1</a:t>
+            </a:r>
+          </a:p>
+        </p:txBody>
+      </p:sp>
+      <p:sp>
+        <p:nvSpPr>
+          <p:cNvPr id="16" name="TextBox 15"/>
+          <p:cNvSpPr txBox="1"/>
+          <p:nvPr/>
+        </p:nvSpPr>
+        <p:spPr>
+          <a:xfrm>
+            <a:off x="420623" y="4901183"/>
+            <a:ext cx="1024128" cy="502920"/>
+          </a:xfrm>
+          <a:prstGeom prst="rect">
+            <a:avLst/>
+          </a:prstGeom>
+          <a:noFill/>
+        </p:spPr>
+        <p:txBody>
+          <a:bodyPr wrap="square" lIns="0" rIns="0" tIns="0" bIns="0" anchor="t">
+            <a:spAutoFit/>
+          </a:bodyPr>
+          <a:lstStyle/>
+          <a:p>
+            <a:pPr algn="ctr">
+              <a:lnSpc>
+                <a:spcPct val="90000"/>
+              </a:lnSpc>
+              <a:spcBef>
+                <a:spcPts val="0"/>
+              </a:spcBef>
+              <a:spcAft>
+                <a:spcPts val="100"/>
+              </a:spcAft>
+            </a:pPr>
+            <a:r>
+              <a:rPr sz="690" b="1" i="0">
+                <a:solidFill>
+                  <a:srgbClr val="333333"/>
+                </a:solidFill>
+                <a:latin typeface="Arial"/>
+              </a:rPr>
+              <a:t>Veg waste cut
+4.9% → 2%</a:t>
+            </a:r>
+          </a:p>
+          <a:p>
+            <a:pPr algn="ctr">
+              <a:lnSpc>
+                <a:spcPct val="100000"/>
+              </a:lnSpc>
+              <a:spcBef>
+                <a:spcPts val="0"/>
+              </a:spcBef>
+              <a:spcAft>
+                <a:spcPts val="0"/>
+              </a:spcAft>
+            </a:pPr>
+            <a:r>
+              <a:rPr sz="600" b="0" i="1">
+                <a:solidFill>
+                  <a:srgbClr val="727375"/>
+                </a:solidFill>
+                <a:latin typeface="Arial"/>
+              </a:rPr>
+              <a:t>TAPF wastage logs</a:t>
+            </a:r>
+          </a:p>
+        </p:txBody>
+      </p:sp>
+      <p:sp>
+        <p:nvSpPr>
+          <p:cNvPr id="17" name="Rectangle 16"/>
+          <p:cNvSpPr/>
+          <p:nvPr/>
+        </p:nvSpPr>
+        <p:spPr>
+          <a:xfrm>
+            <a:off x="1554480" y="2761487"/>
+            <a:ext cx="731520" cy="660196"/>
+          </a:xfrm>
+          <a:prstGeom prst="rect">
+            <a:avLst/>
+          </a:prstGeom>
+          <a:solidFill>
+            <a:srgbClr val="095F61"/>
+          </a:solidFill>
+          <a:ln>
+            <a:noFill/>
+          </a:ln>
+          <a:effectLst/>
+        </p:spPr>
+        <p:style>
+          <a:lnRef idx="1">
+            <a:schemeClr val="accent1"/>
+          </a:lnRef>
+          <a:fillRef idx="3">
+            <a:schemeClr val="accent1"/>
+          </a:fillRef>
+          <a:effectRef idx="2">
+            <a:schemeClr val="accent1"/>
+          </a:effectRef>
+          <a:fontRef idx="minor">
+            <a:schemeClr val="lt1"/>
+          </a:fontRef>
+        </p:style>
+        <p:txBody>
+          <a:bodyPr rtlCol="0" anchor="ctr"/>
+          <a:lstStyle/>
+          <a:p>
+            <a:pPr algn="ctr"/>
+          </a:p>
+        </p:txBody>
+      </p:sp>
+      <p:sp>
+        <p:nvSpPr>
+          <p:cNvPr id="18" name="TextBox 17"/>
+          <p:cNvSpPr txBox="1"/>
+          <p:nvPr/>
+        </p:nvSpPr>
+        <p:spPr>
+          <a:xfrm>
+            <a:off x="1417320" y="2542031"/>
+            <a:ext cx="1005840" cy="201168"/>
+          </a:xfrm>
+          <a:prstGeom prst="rect">
+            <a:avLst/>
+          </a:prstGeom>
+          <a:noFill/>
+        </p:spPr>
+        <p:txBody>
+          <a:bodyPr wrap="square" lIns="0" rIns="0" tIns="0" bIns="0" anchor="t">
+            <a:spAutoFit/>
+          </a:bodyPr>
+          <a:lstStyle/>
+          <a:p>
+            <a:pPr algn="ctr">
+              <a:lnSpc>
+                <a:spcPct val="100000"/>
+              </a:lnSpc>
+              <a:spcBef>
+                <a:spcPts val="0"/>
+              </a:spcBef>
+              <a:spcAft>
+                <a:spcPts val="0"/>
+              </a:spcAft>
+            </a:pPr>
+            <a:r>
+              <a:rPr sz="950" b="1" i="0">
+                <a:solidFill>
+                  <a:srgbClr val="1B3E6E"/>
+                </a:solidFill>
+                <a:latin typeface="Arial"/>
+              </a:rPr>
+              <a:t>+1.9</a:t>
+            </a:r>
+          </a:p>
+        </p:txBody>
+      </p:sp>
+      <p:sp>
+        <p:nvSpPr>
+          <p:cNvPr id="19" name="TextBox 18"/>
+          <p:cNvSpPr txBox="1"/>
+          <p:nvPr/>
+        </p:nvSpPr>
+        <p:spPr>
+          <a:xfrm>
+            <a:off x="1408176" y="4901183"/>
+            <a:ext cx="1024128" cy="502920"/>
+          </a:xfrm>
+          <a:prstGeom prst="rect">
+            <a:avLst/>
+          </a:prstGeom>
+          <a:noFill/>
+        </p:spPr>
+        <p:txBody>
+          <a:bodyPr wrap="square" lIns="0" rIns="0" tIns="0" bIns="0" anchor="t">
+            <a:spAutoFit/>
+          </a:bodyPr>
+          <a:lstStyle/>
+          <a:p>
+            <a:pPr algn="ctr">
+              <a:lnSpc>
+                <a:spcPct val="90000"/>
+              </a:lnSpc>
+              <a:spcBef>
+                <a:spcPts val="0"/>
+              </a:spcBef>
+              <a:spcAft>
+                <a:spcPts val="100"/>
+              </a:spcAft>
+            </a:pPr>
+            <a:r>
+              <a:rPr sz="690" b="1" i="0">
+                <a:solidFill>
+                  <a:srgbClr val="333333"/>
+                </a:solidFill>
+                <a:latin typeface="Arial"/>
+              </a:rPr>
+              <a:t>Dhals buy-timing
+6–7% spread</a:t>
+            </a:r>
+          </a:p>
+          <a:p>
+            <a:pPr algn="ctr">
+              <a:lnSpc>
+                <a:spcPct val="100000"/>
+              </a:lnSpc>
+              <a:spcBef>
+                <a:spcPts val="0"/>
+              </a:spcBef>
+              <a:spcAft>
+                <a:spcPts val="0"/>
+              </a:spcAft>
+            </a:pPr>
+            <a:r>
+              <a:rPr sz="600" b="0" i="1">
+                <a:solidFill>
+                  <a:srgbClr val="727375"/>
+                </a:solidFill>
+                <a:latin typeface="Arial"/>
+              </a:rPr>
+              <a:t>TAPF price data</a:t>
+            </a:r>
+          </a:p>
+        </p:txBody>
+      </p:sp>
+      <p:cxnSp>
+        <p:nvCxnSpPr>
+          <p:cNvPr id="20" name="Connector 19"/>
+          <p:cNvCxnSpPr/>
+          <p:nvPr/>
+        </p:nvCxnSpPr>
+        <p:spPr>
+          <a:xfrm>
+            <a:off x="1298448" y="3421684"/>
+            <a:ext cx="256032" cy="0"/>
+          </a:xfrm>
+          <a:prstGeom prst="line">
+            <a:avLst/>
+          </a:prstGeom>
+          <a:ln w="11430">
+            <a:solidFill>
+              <a:srgbClr val="727375"/>
+            </a:solidFill>
+            <a:prstDash val="sysDash"/>
+          </a:ln>
+          <a:effectLst/>
+        </p:spPr>
+        <p:style>
+          <a:lnRef idx="2">
+            <a:schemeClr val="accent1"/>
+          </a:lnRef>
+          <a:fillRef idx="0">
+            <a:schemeClr val="accent1"/>
+          </a:fillRef>
+          <a:effectRef idx="1">
+            <a:schemeClr val="accent1"/>
+          </a:effectRef>
+          <a:fontRef idx="minor">
+            <a:schemeClr val="tx1"/>
+          </a:fontRef>
+        </p:style>
+      </p:cxnSp>
+      <p:sp>
+        <p:nvSpPr>
+          <p:cNvPr id="21" name="Rectangle 20"/>
+          <p:cNvSpPr/>
+          <p:nvPr/>
+        </p:nvSpPr>
+        <p:spPr>
+          <a:xfrm>
+            <a:off x="2542032" y="2483510"/>
+            <a:ext cx="731520" cy="277977"/>
+          </a:xfrm>
+          <a:prstGeom prst="rect">
+            <a:avLst/>
+          </a:prstGeom>
+          <a:solidFill>
+            <a:srgbClr val="F3C43F"/>
+          </a:solidFill>
+          <a:ln>
+            <a:noFill/>
+          </a:ln>
+          <a:effectLst/>
+        </p:spPr>
+        <p:style>
+          <a:lnRef idx="1">
+            <a:schemeClr val="accent1"/>
+          </a:lnRef>
+          <a:fillRef idx="3">
+            <a:schemeClr val="accent1"/>
+          </a:fillRef>
+          <a:effectRef idx="2">
+            <a:schemeClr val="accent1"/>
+          </a:effectRef>
+          <a:fontRef idx="minor">
+            <a:schemeClr val="lt1"/>
+          </a:fontRef>
+        </p:style>
+        <p:txBody>
+          <a:bodyPr rtlCol="0" anchor="ctr"/>
+          <a:lstStyle/>
+          <a:p>
+            <a:pPr algn="ctr"/>
+          </a:p>
+        </p:txBody>
+      </p:sp>
+      <p:sp>
+        <p:nvSpPr>
+          <p:cNvPr id="22" name="TextBox 21"/>
+          <p:cNvSpPr txBox="1"/>
+          <p:nvPr/>
+        </p:nvSpPr>
+        <p:spPr>
+          <a:xfrm>
+            <a:off x="2404872" y="2264054"/>
+            <a:ext cx="1005840" cy="201168"/>
+          </a:xfrm>
+          <a:prstGeom prst="rect">
+            <a:avLst/>
+          </a:prstGeom>
+          <a:noFill/>
+        </p:spPr>
+        <p:txBody>
+          <a:bodyPr wrap="square" lIns="0" rIns="0" tIns="0" bIns="0" anchor="t">
+            <a:spAutoFit/>
+          </a:bodyPr>
+          <a:lstStyle/>
+          <a:p>
+            <a:pPr algn="ctr">
+              <a:lnSpc>
+                <a:spcPct val="100000"/>
+              </a:lnSpc>
+              <a:spcBef>
+                <a:spcPts val="0"/>
+              </a:spcBef>
+              <a:spcAft>
+                <a:spcPts val="0"/>
+              </a:spcAft>
+            </a:pPr>
+            <a:r>
+              <a:rPr sz="950" b="1" i="0">
+                <a:solidFill>
+                  <a:srgbClr val="1B3E6E"/>
+                </a:solidFill>
+                <a:latin typeface="Arial"/>
+              </a:rPr>
+              <a:t>+0.8</a:t>
+            </a:r>
+          </a:p>
+        </p:txBody>
+      </p:sp>
+      <p:sp>
+        <p:nvSpPr>
+          <p:cNvPr id="23" name="TextBox 22"/>
+          <p:cNvSpPr txBox="1"/>
+          <p:nvPr/>
+        </p:nvSpPr>
+        <p:spPr>
+          <a:xfrm>
+            <a:off x="2395727" y="4901183"/>
+            <a:ext cx="1024128" cy="502920"/>
+          </a:xfrm>
+          <a:prstGeom prst="rect">
+            <a:avLst/>
+          </a:prstGeom>
+          <a:noFill/>
+        </p:spPr>
+        <p:txBody>
+          <a:bodyPr wrap="square" lIns="0" rIns="0" tIns="0" bIns="0" anchor="t">
+            <a:spAutoFit/>
+          </a:bodyPr>
+          <a:lstStyle/>
+          <a:p>
+            <a:pPr algn="ctr">
+              <a:lnSpc>
+                <a:spcPct val="90000"/>
+              </a:lnSpc>
+              <a:spcBef>
+                <a:spcPts val="0"/>
+              </a:spcBef>
+              <a:spcAft>
+                <a:spcPts val="100"/>
+              </a:spcAft>
+            </a:pPr>
+            <a:r>
+              <a:rPr sz="690" b="1" i="0">
+                <a:solidFill>
+                  <a:srgbClr val="333333"/>
+                </a:solidFill>
+                <a:latin typeface="Arial"/>
+              </a:rPr>
+              <a:t>Oils buy-timing
+4–5% spread</a:t>
+            </a:r>
+          </a:p>
+          <a:p>
+            <a:pPr algn="ctr">
+              <a:lnSpc>
+                <a:spcPct val="100000"/>
+              </a:lnSpc>
+              <a:spcBef>
+                <a:spcPts val="0"/>
+              </a:spcBef>
+              <a:spcAft>
+                <a:spcPts val="0"/>
+              </a:spcAft>
+            </a:pPr>
+            <a:r>
+              <a:rPr sz="600" b="0" i="1">
+                <a:solidFill>
+                  <a:srgbClr val="727375"/>
+                </a:solidFill>
+                <a:latin typeface="Arial"/>
+              </a:rPr>
+              <a:t>TAPF price data</a:t>
+            </a:r>
+          </a:p>
+        </p:txBody>
+      </p:sp>
+      <p:cxnSp>
+        <p:nvCxnSpPr>
+          <p:cNvPr id="24" name="Connector 23"/>
+          <p:cNvCxnSpPr/>
+          <p:nvPr/>
+        </p:nvCxnSpPr>
+        <p:spPr>
+          <a:xfrm>
+            <a:off x="2286000" y="2761487"/>
+            <a:ext cx="256032" cy="0"/>
+          </a:xfrm>
+          <a:prstGeom prst="line">
+            <a:avLst/>
+          </a:prstGeom>
+          <a:ln w="11430">
+            <a:solidFill>
+              <a:srgbClr val="727375"/>
+            </a:solidFill>
+            <a:prstDash val="sysDash"/>
+          </a:ln>
+          <a:effectLst/>
+        </p:spPr>
+        <p:style>
+          <a:lnRef idx="2">
+            <a:schemeClr val="accent1"/>
+          </a:lnRef>
+          <a:fillRef idx="0">
+            <a:schemeClr val="accent1"/>
+          </a:fillRef>
+          <a:effectRef idx="1">
+            <a:schemeClr val="accent1"/>
+          </a:effectRef>
+          <a:fontRef idx="minor">
+            <a:schemeClr val="tx1"/>
+          </a:fontRef>
+        </p:style>
+      </p:cxnSp>
+      <p:sp>
+        <p:nvSpPr>
+          <p:cNvPr id="25" name="Rectangle 24"/>
+          <p:cNvSpPr/>
+          <p:nvPr/>
+        </p:nvSpPr>
+        <p:spPr>
+          <a:xfrm>
+            <a:off x="3529584" y="2483510"/>
+            <a:ext cx="731520" cy="277977"/>
+          </a:xfrm>
+          <a:prstGeom prst="rect">
+            <a:avLst/>
+          </a:prstGeom>
+          <a:solidFill>
+            <a:srgbClr val="C22310"/>
+          </a:solidFill>
+          <a:ln>
+            <a:noFill/>
+          </a:ln>
+          <a:effectLst/>
+        </p:spPr>
+        <p:style>
+          <a:lnRef idx="1">
+            <a:schemeClr val="accent1"/>
+          </a:lnRef>
+          <a:fillRef idx="3">
+            <a:schemeClr val="accent1"/>
+          </a:fillRef>
+          <a:effectRef idx="2">
+            <a:schemeClr val="accent1"/>
+          </a:effectRef>
+          <a:fontRef idx="minor">
+            <a:schemeClr val="lt1"/>
+          </a:fontRef>
+        </p:style>
+        <p:txBody>
+          <a:bodyPr rtlCol="0" anchor="ctr"/>
+          <a:lstStyle/>
+          <a:p>
+            <a:pPr algn="ctr"/>
+          </a:p>
+        </p:txBody>
+      </p:sp>
+      <p:sp>
+        <p:nvSpPr>
+          <p:cNvPr id="26" name="TextBox 25"/>
+          <p:cNvSpPr txBox="1"/>
+          <p:nvPr/>
+        </p:nvSpPr>
+        <p:spPr>
+          <a:xfrm>
+            <a:off x="3392424" y="2264054"/>
+            <a:ext cx="1005840" cy="201168"/>
+          </a:xfrm>
+          <a:prstGeom prst="rect">
+            <a:avLst/>
+          </a:prstGeom>
+          <a:noFill/>
+        </p:spPr>
+        <p:txBody>
+          <a:bodyPr wrap="square" lIns="0" rIns="0" tIns="0" bIns="0" anchor="t">
+            <a:spAutoFit/>
+          </a:bodyPr>
+          <a:lstStyle/>
+          <a:p>
+            <a:pPr algn="ctr">
+              <a:lnSpc>
+                <a:spcPct val="100000"/>
+              </a:lnSpc>
+              <a:spcBef>
+                <a:spcPts val="0"/>
+              </a:spcBef>
+              <a:spcAft>
+                <a:spcPts val="0"/>
+              </a:spcAft>
+            </a:pPr>
+            <a:r>
+              <a:rPr sz="950" b="1" i="0">
+                <a:solidFill>
+                  <a:srgbClr val="C22310"/>
+                </a:solidFill>
+                <a:latin typeface="Arial"/>
+              </a:rPr>
+              <a:t>−0.8</a:t>
+            </a:r>
+          </a:p>
+        </p:txBody>
+      </p:sp>
+      <p:sp>
+        <p:nvSpPr>
+          <p:cNvPr id="27" name="TextBox 26"/>
+          <p:cNvSpPr txBox="1"/>
+          <p:nvPr/>
+        </p:nvSpPr>
+        <p:spPr>
+          <a:xfrm>
+            <a:off x="3383279" y="4901183"/>
+            <a:ext cx="1024128" cy="502920"/>
+          </a:xfrm>
+          <a:prstGeom prst="rect">
+            <a:avLst/>
+          </a:prstGeom>
+          <a:noFill/>
+        </p:spPr>
+        <p:txBody>
+          <a:bodyPr wrap="square" lIns="0" rIns="0" tIns="0" bIns="0" anchor="t">
+            <a:spAutoFit/>
+          </a:bodyPr>
+          <a:lstStyle/>
+          <a:p>
+            <a:pPr algn="ctr">
+              <a:lnSpc>
+                <a:spcPct val="90000"/>
+              </a:lnSpc>
+              <a:spcBef>
+                <a:spcPts val="0"/>
+              </a:spcBef>
+              <a:spcAft>
+                <a:spcPts val="100"/>
+              </a:spcAft>
+            </a:pPr>
+            <a:r>
+              <a:rPr sz="690" b="1" i="0">
+                <a:solidFill>
+                  <a:srgbClr val="333333"/>
+                </a:solidFill>
+                <a:latin typeface="Arial"/>
+              </a:rPr>
+              <a:t>Storage &amp;
+carry cost</a:t>
+            </a:r>
+          </a:p>
+          <a:p>
+            <a:pPr algn="ctr">
+              <a:lnSpc>
+                <a:spcPct val="100000"/>
+              </a:lnSpc>
+              <a:spcBef>
+                <a:spcPts val="0"/>
+              </a:spcBef>
+              <a:spcAft>
+                <a:spcPts val="0"/>
+              </a:spcAft>
+            </a:pPr>
+            <a:r>
+              <a:rPr sz="600" b="0" i="1">
+                <a:solidFill>
+                  <a:srgbClr val="727375"/>
+                </a:solidFill>
+                <a:latin typeface="Arial"/>
+              </a:rPr>
+              <a:t>netted off</a:t>
+            </a:r>
+          </a:p>
+        </p:txBody>
+      </p:sp>
+      <p:cxnSp>
+        <p:nvCxnSpPr>
+          <p:cNvPr id="28" name="Connector 27"/>
+          <p:cNvCxnSpPr/>
+          <p:nvPr/>
+        </p:nvCxnSpPr>
+        <p:spPr>
+          <a:xfrm>
+            <a:off x="3273552" y="2483510"/>
+            <a:ext cx="256032" cy="0"/>
+          </a:xfrm>
+          <a:prstGeom prst="line">
+            <a:avLst/>
+          </a:prstGeom>
+          <a:ln w="11430">
+            <a:solidFill>
+              <a:srgbClr val="727375"/>
+            </a:solidFill>
+            <a:prstDash val="sysDash"/>
+          </a:ln>
+          <a:effectLst/>
+        </p:spPr>
+        <p:style>
+          <a:lnRef idx="2">
+            <a:schemeClr val="accent1"/>
+          </a:lnRef>
+          <a:fillRef idx="0">
+            <a:schemeClr val="accent1"/>
+          </a:fillRef>
+          <a:effectRef idx="1">
+            <a:schemeClr val="accent1"/>
+          </a:effectRef>
+          <a:fontRef idx="minor">
+            <a:schemeClr val="tx1"/>
+          </a:fontRef>
+        </p:style>
+      </p:cxnSp>
+      <p:sp>
+        <p:nvSpPr>
+          <p:cNvPr id="29" name="Rectangle 28"/>
+          <p:cNvSpPr/>
+          <p:nvPr/>
+        </p:nvSpPr>
+        <p:spPr>
+          <a:xfrm>
+            <a:off x="4517136" y="2761487"/>
+            <a:ext cx="731520" cy="2084832"/>
+          </a:xfrm>
+          <a:prstGeom prst="rect">
+            <a:avLst/>
+          </a:prstGeom>
+          <a:solidFill>
+            <a:srgbClr val="1B3E6E"/>
+          </a:solidFill>
+          <a:ln>
+            <a:noFill/>
+          </a:ln>
+          <a:effectLst/>
+        </p:spPr>
+        <p:style>
+          <a:lnRef idx="1">
+            <a:schemeClr val="accent1"/>
+          </a:lnRef>
+          <a:fillRef idx="3">
+            <a:schemeClr val="accent1"/>
+          </a:fillRef>
+          <a:effectRef idx="2">
+            <a:schemeClr val="accent1"/>
+          </a:effectRef>
+          <a:fontRef idx="minor">
+            <a:schemeClr val="lt1"/>
+          </a:fontRef>
+        </p:style>
+        <p:txBody>
+          <a:bodyPr rtlCol="0" anchor="ctr"/>
+          <a:lstStyle/>
+          <a:p>
+            <a:pPr algn="ctr"/>
+          </a:p>
+        </p:txBody>
+      </p:sp>
+      <p:sp>
+        <p:nvSpPr>
+          <p:cNvPr id="30" name="TextBox 29"/>
+          <p:cNvSpPr txBox="1"/>
+          <p:nvPr/>
+        </p:nvSpPr>
+        <p:spPr>
+          <a:xfrm>
+            <a:off x="4379976" y="2542031"/>
+            <a:ext cx="1005840" cy="201168"/>
+          </a:xfrm>
+          <a:prstGeom prst="rect">
+            <a:avLst/>
+          </a:prstGeom>
+          <a:noFill/>
+        </p:spPr>
+        <p:txBody>
+          <a:bodyPr wrap="square" lIns="0" rIns="0" tIns="0" bIns="0" anchor="t">
+            <a:spAutoFit/>
+          </a:bodyPr>
+          <a:lstStyle/>
+          <a:p>
+            <a:pPr algn="ctr">
+              <a:lnSpc>
+                <a:spcPct val="100000"/>
+              </a:lnSpc>
+              <a:spcBef>
+                <a:spcPts val="0"/>
+              </a:spcBef>
+              <a:spcAft>
+                <a:spcPts val="0"/>
+              </a:spcAft>
+            </a:pPr>
+            <a:r>
+              <a:rPr sz="950" b="1" i="0">
+                <a:solidFill>
+                  <a:srgbClr val="1B3E6E"/>
+                </a:solidFill>
+                <a:latin typeface="Arial"/>
+              </a:rPr>
+              <a:t>₹6.0 Cr</a:t>
+            </a:r>
+          </a:p>
+        </p:txBody>
+      </p:sp>
+      <p:sp>
+        <p:nvSpPr>
+          <p:cNvPr id="31" name="TextBox 30"/>
+          <p:cNvSpPr txBox="1"/>
+          <p:nvPr/>
+        </p:nvSpPr>
+        <p:spPr>
+          <a:xfrm>
+            <a:off x="4370832" y="4901183"/>
+            <a:ext cx="1024128" cy="502920"/>
+          </a:xfrm>
+          <a:prstGeom prst="rect">
+            <a:avLst/>
+          </a:prstGeom>
+          <a:noFill/>
+        </p:spPr>
+        <p:txBody>
+          <a:bodyPr wrap="square" lIns="0" rIns="0" tIns="0" bIns="0" anchor="t">
+            <a:spAutoFit/>
+          </a:bodyPr>
+          <a:lstStyle/>
+          <a:p>
+            <a:pPr algn="ctr">
+              <a:lnSpc>
+                <a:spcPct val="90000"/>
+              </a:lnSpc>
+              <a:spcBef>
+                <a:spcPts val="0"/>
+              </a:spcBef>
+              <a:spcAft>
+                <a:spcPts val="100"/>
+              </a:spcAft>
+            </a:pPr>
+            <a:r>
+              <a:rPr sz="690" b="1" i="0">
+                <a:solidFill>
+                  <a:srgbClr val="333333"/>
+                </a:solidFill>
+                <a:latin typeface="Arial"/>
+              </a:rPr>
+              <a:t>NET SAVINGS
+every year</a:t>
+            </a:r>
+          </a:p>
+          <a:p>
+            <a:pPr algn="ctr">
+              <a:lnSpc>
+                <a:spcPct val="100000"/>
+              </a:lnSpc>
+              <a:spcBef>
+                <a:spcPts val="0"/>
+              </a:spcBef>
+              <a:spcAft>
+                <a:spcPts val="0"/>
+              </a:spcAft>
+            </a:pPr>
+            <a:r>
+              <a:rPr sz="600" b="0" i="1">
+                <a:solidFill>
+                  <a:srgbClr val="727375"/>
+                </a:solidFill>
+                <a:latin typeface="Arial"/>
+              </a:rPr>
+              <a:t>recurring</a:t>
+            </a:r>
+          </a:p>
+        </p:txBody>
+      </p:sp>
+      <p:cxnSp>
+        <p:nvCxnSpPr>
+          <p:cNvPr id="32" name="Connector 31"/>
+          <p:cNvCxnSpPr/>
+          <p:nvPr/>
+        </p:nvCxnSpPr>
+        <p:spPr>
+          <a:xfrm>
+            <a:off x="4261104" y="2761487"/>
+            <a:ext cx="256032" cy="0"/>
+          </a:xfrm>
+          <a:prstGeom prst="line">
+            <a:avLst/>
+          </a:prstGeom>
+          <a:ln w="11430">
+            <a:solidFill>
+              <a:srgbClr val="727375"/>
+            </a:solidFill>
+            <a:prstDash val="sysDash"/>
+          </a:ln>
+          <a:effectLst/>
+        </p:spPr>
+        <p:style>
+          <a:lnRef idx="2">
+            <a:schemeClr val="accent1"/>
+          </a:lnRef>
+          <a:fillRef idx="0">
+            <a:schemeClr val="accent1"/>
+          </a:fillRef>
+          <a:effectRef idx="1">
+            <a:schemeClr val="accent1"/>
+          </a:effectRef>
+          <a:fontRef idx="minor">
+            <a:schemeClr val="tx1"/>
+          </a:fontRef>
+        </p:style>
+      </p:cxnSp>
+      <p:sp>
+        <p:nvSpPr>
+          <p:cNvPr id="33" name="Rectangle 32"/>
+          <p:cNvSpPr/>
+          <p:nvPr/>
+        </p:nvSpPr>
+        <p:spPr>
+          <a:xfrm>
+            <a:off x="5870448" y="1399032"/>
+            <a:ext cx="54864" cy="182880"/>
+          </a:xfrm>
+          <a:prstGeom prst="rect">
+            <a:avLst/>
+          </a:prstGeom>
+          <a:solidFill>
+            <a:srgbClr val="3B6EA5"/>
+          </a:solidFill>
+          <a:ln>
+            <a:noFill/>
+          </a:ln>
+          <a:effectLst/>
+        </p:spPr>
+        <p:style>
+          <a:lnRef idx="1">
+            <a:schemeClr val="accent1"/>
+          </a:lnRef>
+          <a:fillRef idx="3">
+            <a:schemeClr val="accent1"/>
+          </a:fillRef>
+          <a:effectRef idx="2">
+            <a:schemeClr val="accent1"/>
+          </a:effectRef>
+          <a:fontRef idx="minor">
+            <a:schemeClr val="lt1"/>
+          </a:fontRef>
+        </p:style>
+        <p:txBody>
+          <a:bodyPr rtlCol="0" anchor="ctr"/>
+          <a:lstStyle/>
+          <a:p>
+            <a:pPr algn="ctr"/>
+          </a:p>
+        </p:txBody>
+      </p:sp>
+      <p:sp>
+        <p:nvSpPr>
+          <p:cNvPr id="34" name="TextBox 33"/>
+          <p:cNvSpPr txBox="1"/>
+          <p:nvPr/>
+        </p:nvSpPr>
+        <p:spPr>
+          <a:xfrm>
+            <a:off x="6016752" y="1371600"/>
+            <a:ext cx="2761487" cy="256032"/>
+          </a:xfrm>
+          <a:prstGeom prst="rect">
+            <a:avLst/>
+          </a:prstGeom>
+          <a:noFill/>
+        </p:spPr>
+        <p:txBody>
+          <a:bodyPr wrap="square" lIns="0" rIns="0" tIns="0" bIns="0" anchor="t">
+            <a:spAutoFit/>
+          </a:bodyPr>
+          <a:lstStyle/>
+          <a:p>
+            <a:pPr algn="l">
+              <a:lnSpc>
+                <a:spcPct val="100000"/>
+              </a:lnSpc>
+              <a:spcBef>
+                <a:spcPts val="0"/>
+              </a:spcBef>
+              <a:spcAft>
+                <a:spcPts val="0"/>
+              </a:spcAft>
+            </a:pPr>
+            <a:r>
+              <a:rPr sz="950" b="1" i="0">
+                <a:solidFill>
+                  <a:srgbClr val="1B3E6E"/>
+                </a:solidFill>
+                <a:latin typeface="Arial"/>
+              </a:rPr>
+              <a:t>Capture ramp (₹ Cr saved / yr)</a:t>
+            </a:r>
+          </a:p>
+        </p:txBody>
+      </p:sp>
+      <p:sp>
+        <p:nvSpPr>
+          <p:cNvPr id="35" name="Rectangle 34"/>
+          <p:cNvSpPr/>
+          <p:nvPr/>
+        </p:nvSpPr>
+        <p:spPr>
+          <a:xfrm>
+            <a:off x="5870448" y="1645920"/>
+            <a:ext cx="2907791" cy="10972"/>
+          </a:xfrm>
+          <a:prstGeom prst="rect">
+            <a:avLst/>
+          </a:prstGeom>
+          <a:solidFill>
+            <a:srgbClr val="BFBFBF"/>
+          </a:solidFill>
+          <a:ln>
+            <a:noFill/>
+          </a:ln>
+          <a:effectLst/>
+        </p:spPr>
+        <p:style>
+          <a:lnRef idx="1">
+            <a:schemeClr val="accent1"/>
+          </a:lnRef>
+          <a:fillRef idx="3">
+            <a:schemeClr val="accent1"/>
+          </a:fillRef>
+          <a:effectRef idx="2">
+            <a:schemeClr val="accent1"/>
+          </a:effectRef>
+          <a:fontRef idx="minor">
+            <a:schemeClr val="lt1"/>
+          </a:fontRef>
+        </p:style>
+        <p:txBody>
+          <a:bodyPr rtlCol="0" anchor="ctr"/>
+          <a:lstStyle/>
+          <a:p>
+            <a:pPr algn="ctr"/>
+          </a:p>
+        </p:txBody>
+      </p:sp>
+      <p:graphicFrame>
+        <p:nvGraphicFramePr>
+          <p:cNvPr id="36" name="Chart 35"/>
+          <p:cNvGraphicFramePr>
+            <a:graphicFrameLocks noGrp="1"/>
+          </p:cNvGraphicFramePr>
+          <p:nvPr/>
+        </p:nvGraphicFramePr>
+        <p:xfrm>
+          <a:off x="5870448" y="1737360"/>
+          <a:ext cx="2907791" cy="1188720"/>
+        </p:xfrm>
+        <a:graphic>
+          <a:graphicData uri="http://schemas.openxmlformats.org/drawingml/2006/chart">
+            <c:chart xmlns:c="http://schemas.openxmlformats.org/drawingml/2006/chart" r:id="rId2"/>
+          </a:graphicData>
+        </a:graphic>
+      </p:graphicFrame>
+      <p:sp>
+        <p:nvSpPr>
+          <p:cNvPr id="37" name="TextBox 36"/>
+          <p:cNvSpPr txBox="1"/>
+          <p:nvPr/>
+        </p:nvSpPr>
+        <p:spPr>
+          <a:xfrm>
+            <a:off x="5870448" y="2962656"/>
+            <a:ext cx="2907791" cy="182880"/>
+          </a:xfrm>
+          <a:prstGeom prst="rect">
+            <a:avLst/>
+          </a:prstGeom>
+          <a:noFill/>
+        </p:spPr>
+        <p:txBody>
+          <a:bodyPr wrap="square" lIns="0" rIns="0" tIns="0" bIns="0" anchor="t">
+            <a:spAutoFit/>
+          </a:bodyPr>
+          <a:lstStyle/>
+          <a:p>
+            <a:pPr algn="ctr">
+              <a:lnSpc>
+                <a:spcPct val="100000"/>
+              </a:lnSpc>
+              <a:spcBef>
+                <a:spcPts val="0"/>
+              </a:spcBef>
+              <a:spcAft>
+                <a:spcPts val="0"/>
+              </a:spcAft>
+            </a:pPr>
+            <a:r>
+              <a:rPr sz="650" b="0" i="1">
+                <a:solidFill>
+                  <a:srgbClr val="727375"/>
+                </a:solidFill>
+                <a:latin typeface="Arial"/>
+              </a:rPr>
+              <a:t>pilot 30% → scale 60% → steady-state 85% capture</a:t>
+            </a:r>
+          </a:p>
+        </p:txBody>
+      </p:sp>
+      <p:sp>
+        <p:nvSpPr>
+          <p:cNvPr id="38" name="Rectangle 37"/>
+          <p:cNvSpPr/>
+          <p:nvPr/>
+        </p:nvSpPr>
+        <p:spPr>
+          <a:xfrm>
+            <a:off x="5870448" y="3337560"/>
+            <a:ext cx="54864" cy="182880"/>
+          </a:xfrm>
+          <a:prstGeom prst="rect">
+            <a:avLst/>
+          </a:prstGeom>
+          <a:solidFill>
+            <a:srgbClr val="398025"/>
+          </a:solidFill>
+          <a:ln>
+            <a:noFill/>
+          </a:ln>
+          <a:effectLst/>
+        </p:spPr>
+        <p:style>
+          <a:lnRef idx="1">
+            <a:schemeClr val="accent1"/>
+          </a:lnRef>
+          <a:fillRef idx="3">
+            <a:schemeClr val="accent1"/>
+          </a:fillRef>
+          <a:effectRef idx="2">
+            <a:schemeClr val="accent1"/>
+          </a:effectRef>
+          <a:fontRef idx="minor">
+            <a:schemeClr val="lt1"/>
+          </a:fontRef>
+        </p:style>
+        <p:txBody>
+          <a:bodyPr rtlCol="0" anchor="ctr"/>
+          <a:lstStyle/>
+          <a:p>
+            <a:pPr algn="ctr"/>
+          </a:p>
+        </p:txBody>
+      </p:sp>
+      <p:sp>
+        <p:nvSpPr>
+          <p:cNvPr id="39" name="TextBox 38"/>
+          <p:cNvSpPr txBox="1"/>
+          <p:nvPr/>
+        </p:nvSpPr>
+        <p:spPr>
+          <a:xfrm>
+            <a:off x="6016752" y="3310128"/>
+            <a:ext cx="2761487" cy="256032"/>
+          </a:xfrm>
+          <a:prstGeom prst="rect">
+            <a:avLst/>
+          </a:prstGeom>
+          <a:noFill/>
+        </p:spPr>
+        <p:txBody>
+          <a:bodyPr wrap="square" lIns="0" rIns="0" tIns="0" bIns="0" anchor="t">
+            <a:spAutoFit/>
+          </a:bodyPr>
+          <a:lstStyle/>
+          <a:p>
+            <a:pPr algn="l">
+              <a:lnSpc>
+                <a:spcPct val="100000"/>
+              </a:lnSpc>
+              <a:spcBef>
+                <a:spcPts val="0"/>
+              </a:spcBef>
+              <a:spcAft>
+                <a:spcPts val="0"/>
+              </a:spcAft>
+            </a:pPr>
+            <a:r>
+              <a:rPr sz="950" b="1" i="0">
+                <a:solidFill>
+                  <a:srgbClr val="1B3E6E"/>
+                </a:solidFill>
+                <a:latin typeface="Arial"/>
+              </a:rPr>
+              <a:t>What ₹6 Cr/yr buys — every year</a:t>
+            </a:r>
+          </a:p>
+        </p:txBody>
+      </p:sp>
+      <p:sp>
+        <p:nvSpPr>
+          <p:cNvPr id="40" name="Rectangle 39"/>
+          <p:cNvSpPr/>
+          <p:nvPr/>
+        </p:nvSpPr>
+        <p:spPr>
+          <a:xfrm>
+            <a:off x="5870448" y="3584448"/>
+            <a:ext cx="2907791" cy="10972"/>
+          </a:xfrm>
+          <a:prstGeom prst="rect">
+            <a:avLst/>
+          </a:prstGeom>
+          <a:solidFill>
+            <a:srgbClr val="BFBFBF"/>
+          </a:solidFill>
+          <a:ln>
+            <a:noFill/>
+          </a:ln>
+          <a:effectLst/>
+        </p:spPr>
+        <p:style>
+          <a:lnRef idx="1">
+            <a:schemeClr val="accent1"/>
+          </a:lnRef>
+          <a:fillRef idx="3">
+            <a:schemeClr val="accent1"/>
+          </a:fillRef>
+          <a:effectRef idx="2">
+            <a:schemeClr val="accent1"/>
+          </a:effectRef>
+          <a:fontRef idx="minor">
+            <a:schemeClr val="lt1"/>
+          </a:fontRef>
+        </p:style>
+        <p:txBody>
+          <a:bodyPr rtlCol="0" anchor="ctr"/>
+          <a:lstStyle/>
+          <a:p>
+            <a:pPr algn="ctr"/>
+          </a:p>
+        </p:txBody>
+      </p:sp>
+      <p:sp>
+        <p:nvSpPr>
+          <p:cNvPr id="41" name="TextBox 40"/>
+          <p:cNvSpPr txBox="1"/>
+          <p:nvPr/>
+        </p:nvSpPr>
+        <p:spPr>
+          <a:xfrm>
+            <a:off x="5870448" y="3694176"/>
+            <a:ext cx="2907791" cy="512064"/>
+          </a:xfrm>
+          <a:prstGeom prst="rect">
+            <a:avLst/>
+          </a:prstGeom>
+          <a:noFill/>
+        </p:spPr>
+        <p:txBody>
+          <a:bodyPr wrap="square" lIns="0" rIns="0" tIns="0" bIns="0" anchor="t">
+            <a:spAutoFit/>
+          </a:bodyPr>
+          <a:lstStyle/>
+          <a:p>
+            <a:pPr algn="l">
+              <a:lnSpc>
+                <a:spcPct val="95000"/>
+              </a:lnSpc>
+              <a:spcBef>
+                <a:spcPts val="0"/>
+              </a:spcBef>
+              <a:spcAft>
+                <a:spcPts val="0"/>
+              </a:spcAft>
+            </a:pPr>
+            <a:r>
+              <a:rPr sz="950" b="1" i="0">
+                <a:solidFill>
+                  <a:srgbClr val="1B3E6E"/>
+                </a:solidFill>
+                <a:latin typeface="Arial"/>
+              </a:rPr>
+              <a:t>₹6.0 Cr  </a:t>
+            </a:r>
+            <a:r>
+              <a:rPr sz="950" b="0" i="0">
+                <a:solidFill>
+                  <a:srgbClr val="333333"/>
+                </a:solidFill>
+                <a:latin typeface="Arial"/>
+              </a:rPr>
+              <a:t>saved annually, steady-state</a:t>
+            </a:r>
+          </a:p>
+        </p:txBody>
+      </p:sp>
+      <p:cxnSp>
+        <p:nvCxnSpPr>
+          <p:cNvPr id="42" name="Connector 41"/>
+          <p:cNvCxnSpPr/>
+          <p:nvPr/>
+        </p:nvCxnSpPr>
+        <p:spPr>
+          <a:xfrm>
+            <a:off x="6144768" y="3950208"/>
+            <a:ext cx="0" cy="219456"/>
+          </a:xfrm>
+          <a:prstGeom prst="line">
+            <a:avLst/>
+          </a:prstGeom>
+          <a:ln w="12700">
+            <a:solidFill>
+              <a:srgbClr val="BFBFBF"/>
+            </a:solidFill>
+            <a:prstDash val="sysDash"/>
+            <a:tailEnd type="triangle" w="med" len="med"/>
+          </a:ln>
+          <a:effectLst/>
+        </p:spPr>
+        <p:style>
+          <a:lnRef idx="2">
+            <a:schemeClr val="accent1"/>
+          </a:lnRef>
+          <a:fillRef idx="0">
+            <a:schemeClr val="accent1"/>
+          </a:fillRef>
+          <a:effectRef idx="1">
+            <a:schemeClr val="accent1"/>
+          </a:effectRef>
+          <a:fontRef idx="minor">
+            <a:schemeClr val="tx1"/>
+          </a:fontRef>
+        </p:style>
+      </p:cxnSp>
+      <p:sp>
+        <p:nvSpPr>
+          <p:cNvPr id="43" name="TextBox 42"/>
+          <p:cNvSpPr txBox="1"/>
+          <p:nvPr/>
+        </p:nvSpPr>
+        <p:spPr>
+          <a:xfrm>
+            <a:off x="5870448" y="4242816"/>
+            <a:ext cx="2907791" cy="512064"/>
+          </a:xfrm>
+          <a:prstGeom prst="rect">
+            <a:avLst/>
+          </a:prstGeom>
+          <a:noFill/>
+        </p:spPr>
+        <p:txBody>
+          <a:bodyPr wrap="square" lIns="0" rIns="0" tIns="0" bIns="0" anchor="t">
+            <a:spAutoFit/>
+          </a:bodyPr>
+          <a:lstStyle/>
+          <a:p>
+            <a:pPr algn="l">
+              <a:lnSpc>
+                <a:spcPct val="95000"/>
+              </a:lnSpc>
+              <a:spcBef>
+                <a:spcPts val="0"/>
+              </a:spcBef>
+              <a:spcAft>
+                <a:spcPts val="0"/>
+              </a:spcAft>
+            </a:pPr>
+            <a:r>
+              <a:rPr sz="800" b="1" i="0">
+                <a:solidFill>
+                  <a:srgbClr val="727375"/>
+                </a:solidFill>
+                <a:latin typeface="Arial"/>
+              </a:rPr>
+              <a:t>at ₹6.56  </a:t>
+            </a:r>
+            <a:r>
+              <a:rPr sz="800" b="0" i="0">
+                <a:solidFill>
+                  <a:srgbClr val="333333"/>
+                </a:solidFill>
+                <a:latin typeface="Arial"/>
+              </a:rPr>
+              <a:t>donor cost per meal (govt funds the rest)</a:t>
+            </a:r>
+          </a:p>
+        </p:txBody>
+      </p:sp>
+      <p:cxnSp>
+        <p:nvCxnSpPr>
+          <p:cNvPr id="44" name="Connector 43"/>
+          <p:cNvCxnSpPr/>
+          <p:nvPr/>
+        </p:nvCxnSpPr>
+        <p:spPr>
+          <a:xfrm>
+            <a:off x="6144768" y="4498848"/>
+            <a:ext cx="0" cy="219456"/>
+          </a:xfrm>
+          <a:prstGeom prst="line">
+            <a:avLst/>
+          </a:prstGeom>
+          <a:ln w="12700">
+            <a:solidFill>
+              <a:srgbClr val="BFBFBF"/>
+            </a:solidFill>
+            <a:prstDash val="sysDash"/>
+            <a:tailEnd type="triangle" w="med" len="med"/>
+          </a:ln>
+          <a:effectLst/>
+        </p:spPr>
+        <p:style>
+          <a:lnRef idx="2">
+            <a:schemeClr val="accent1"/>
+          </a:lnRef>
+          <a:fillRef idx="0">
+            <a:schemeClr val="accent1"/>
+          </a:fillRef>
+          <a:effectRef idx="1">
+            <a:schemeClr val="accent1"/>
+          </a:effectRef>
+          <a:fontRef idx="minor">
+            <a:schemeClr val="tx1"/>
+          </a:fontRef>
+        </p:style>
+      </p:cxnSp>
+      <p:sp>
+        <p:nvSpPr>
+          <p:cNvPr id="45" name="TextBox 44"/>
+          <p:cNvSpPr txBox="1"/>
+          <p:nvPr/>
+        </p:nvSpPr>
+        <p:spPr>
+          <a:xfrm>
+            <a:off x="5870448" y="4791455"/>
+            <a:ext cx="2907791" cy="512064"/>
+          </a:xfrm>
+          <a:prstGeom prst="rect">
+            <a:avLst/>
+          </a:prstGeom>
+          <a:noFill/>
+        </p:spPr>
+        <p:txBody>
+          <a:bodyPr wrap="square" lIns="0" rIns="0" tIns="0" bIns="0" anchor="t">
+            <a:spAutoFit/>
+          </a:bodyPr>
+          <a:lstStyle/>
+          <a:p>
+            <a:pPr algn="l">
+              <a:lnSpc>
+                <a:spcPct val="95000"/>
+              </a:lnSpc>
+              <a:spcBef>
+                <a:spcPts val="0"/>
+              </a:spcBef>
+              <a:spcAft>
+                <a:spcPts val="0"/>
+              </a:spcAft>
+            </a:pPr>
+            <a:r>
+              <a:rPr sz="950" b="1" i="0">
+                <a:solidFill>
+                  <a:srgbClr val="398025"/>
+                </a:solidFill>
+                <a:latin typeface="Arial"/>
+              </a:rPr>
+              <a:t>9.1M+  </a:t>
+            </a:r>
+            <a:r>
+              <a:rPr sz="950" b="0" i="0">
+                <a:solidFill>
+                  <a:srgbClr val="333333"/>
+                </a:solidFill>
+                <a:latin typeface="Arial"/>
+              </a:rPr>
+              <a:t>additional meals every year</a:t>
+            </a:r>
+          </a:p>
+        </p:txBody>
+      </p:sp>
+      <p:cxnSp>
+        <p:nvCxnSpPr>
+          <p:cNvPr id="46" name="Connector 45"/>
+          <p:cNvCxnSpPr/>
+          <p:nvPr/>
+        </p:nvCxnSpPr>
+        <p:spPr>
+          <a:xfrm>
+            <a:off x="6144768" y="5047488"/>
+            <a:ext cx="0" cy="219456"/>
+          </a:xfrm>
+          <a:prstGeom prst="line">
+            <a:avLst/>
+          </a:prstGeom>
+          <a:ln w="12700">
+            <a:solidFill>
+              <a:srgbClr val="BFBFBF"/>
+            </a:solidFill>
+            <a:prstDash val="sysDash"/>
+            <a:tailEnd type="triangle" w="med" len="med"/>
+          </a:ln>
+          <a:effectLst/>
+        </p:spPr>
+        <p:style>
+          <a:lnRef idx="2">
+            <a:schemeClr val="accent1"/>
+          </a:lnRef>
+          <a:fillRef idx="0">
+            <a:schemeClr val="accent1"/>
+          </a:fillRef>
+          <a:effectRef idx="1">
+            <a:schemeClr val="accent1"/>
+          </a:effectRef>
+          <a:fontRef idx="minor">
+            <a:schemeClr val="tx1"/>
+          </a:fontRef>
+        </p:style>
+      </p:cxnSp>
+      <p:sp>
+        <p:nvSpPr>
+          <p:cNvPr id="47" name="TextBox 46"/>
+          <p:cNvSpPr txBox="1"/>
+          <p:nvPr/>
+        </p:nvSpPr>
+        <p:spPr>
+          <a:xfrm>
+            <a:off x="5870448" y="5340095"/>
+            <a:ext cx="2907791" cy="512064"/>
+          </a:xfrm>
+          <a:prstGeom prst="rect">
+            <a:avLst/>
+          </a:prstGeom>
+          <a:noFill/>
+        </p:spPr>
+        <p:txBody>
+          <a:bodyPr wrap="square" lIns="0" rIns="0" tIns="0" bIns="0" anchor="t">
+            <a:spAutoFit/>
+          </a:bodyPr>
+          <a:lstStyle/>
+          <a:p>
+            <a:pPr algn="l">
+              <a:lnSpc>
+                <a:spcPct val="95000"/>
+              </a:lnSpc>
+              <a:spcBef>
+                <a:spcPts val="0"/>
+              </a:spcBef>
+              <a:spcAft>
+                <a:spcPts val="0"/>
+              </a:spcAft>
+            </a:pPr>
+            <a:r>
+              <a:rPr sz="950" b="1" i="0">
+                <a:solidFill>
+                  <a:srgbClr val="E08A1E"/>
+                </a:solidFill>
+                <a:latin typeface="Arial"/>
+              </a:rPr>
+              <a:t>40,000+  </a:t>
+            </a:r>
+            <a:r>
+              <a:rPr sz="950" b="0" i="0">
+                <a:solidFill>
+                  <a:srgbClr val="333333"/>
+                </a:solidFill>
+                <a:latin typeface="Arial"/>
+              </a:rPr>
+              <a:t>children fed for a full year — every year</a:t>
+            </a:r>
+          </a:p>
+        </p:txBody>
+      </p:sp>
+      <p:sp>
+        <p:nvSpPr>
+          <p:cNvPr id="48" name="TextBox 47"/>
+          <p:cNvSpPr txBox="1"/>
+          <p:nvPr/>
+        </p:nvSpPr>
+        <p:spPr>
+          <a:xfrm>
+            <a:off x="365760" y="5577840"/>
+            <a:ext cx="5120640" cy="402336"/>
+          </a:xfrm>
+          <a:prstGeom prst="rect">
+            <a:avLst/>
+          </a:prstGeom>
+          <a:noFill/>
+        </p:spPr>
+        <p:txBody>
+          <a:bodyPr wrap="square" lIns="0" rIns="0" tIns="0" bIns="0" anchor="t">
+            <a:spAutoFit/>
+          </a:bodyPr>
+          <a:lstStyle/>
+          <a:p>
+            <a:pPr algn="l">
+              <a:lnSpc>
+                <a:spcPct val="100000"/>
+              </a:lnSpc>
+              <a:spcBef>
+                <a:spcPts val="0"/>
+              </a:spcBef>
+              <a:spcAft>
+                <a:spcPts val="0"/>
+              </a:spcAft>
+            </a:pPr>
+            <a:r>
+              <a:rPr sz="620" b="0" i="1">
+                <a:solidFill>
+                  <a:srgbClr val="727375"/>
+                </a:solidFill>
+                <a:latin typeface="Arial"/>
+              </a:rPr>
+              <a:t>Assumptions: illustrative commodity split of TAPF's ₹450 Cr+ food spend; seasonal spreads per TAPF (dhals 6–7%, oils 4–5%, excl. taxation &amp; global events); wastage per TAPF supply-chain data (4.1–5.6%/month). Spatial sourcing &amp; spot-premium avoidance: not modelled — upside.</a:t>
+            </a:r>
+          </a:p>
+        </p:txBody>
+      </p:sp>
+      <p:sp>
+        <p:nvSpPr>
+          <p:cNvPr id="49" name="TextBox 48"/>
+          <p:cNvSpPr txBox="1"/>
+          <p:nvPr/>
+        </p:nvSpPr>
+        <p:spPr>
+          <a:xfrm>
+            <a:off x="4846320" y="6547104"/>
+            <a:ext cx="3401568" cy="274320"/>
+          </a:xfrm>
+          <a:prstGeom prst="rect">
+            <a:avLst/>
+          </a:prstGeom>
+          <a:noFill/>
+        </p:spPr>
+        <p:txBody>
+          <a:bodyPr wrap="square" lIns="0" rIns="0" tIns="0" bIns="0" anchor="t">
+            <a:spAutoFit/>
+          </a:bodyPr>
+          <a:lstStyle/>
+          <a:p>
+            <a:pPr algn="r">
+              <a:lnSpc>
+                <a:spcPct val="100000"/>
+              </a:lnSpc>
+              <a:spcBef>
+                <a:spcPts val="0"/>
+              </a:spcBef>
+              <a:spcAft>
+                <a:spcPts val="0"/>
+              </a:spcAft>
+            </a:pPr>
+            <a:r>
+              <a:rPr sz="650" b="0" i="1">
+                <a:solidFill>
+                  <a:srgbClr val="727375"/>
+                </a:solidFill>
+                <a:latin typeface="Arial"/>
+              </a:rPr>
+              <a:t>Source: The Akshaya Patra Foundation — official documents</a:t>
             </a:r>
           </a:p>
         </p:txBody>
